--- a/folletos/2026-04/pptx/FIP_VANTRUST_LIQUIDEZ_DISPONIBLE_I.pptx
+++ b/folletos/2026-04/pptx/FIP_VANTRUST_LIQUIDEZ_DISPONIBLE_I.pptx
@@ -2927,7 +2927,7 @@
                 <a:ea typeface="Calibri" pitchFamily="34" charset="-122"/>
                 <a:cs typeface="Calibri" pitchFamily="34" charset="-120"/>
               </a:rPr>
-              <a:t>prueba CLP</a:t>
+              <a:t>prueba 2 CLP</a:t>
             </a:r>
             <a:endParaRPr lang="en-US" sz="800" dirty="0"/>
           </a:p>

--- a/folletos/2026-04/pptx/FIP_VANTRUST_LIQUIDEZ_DISPONIBLE_I.pptx
+++ b/folletos/2026-04/pptx/FIP_VANTRUST_LIQUIDEZ_DISPONIBLE_I.pptx
@@ -5363,7 +5363,7 @@
                 <a:ea typeface="Calibri" pitchFamily="34" charset="-122"/>
                 <a:cs typeface="Calibri" pitchFamily="34" charset="-120"/>
               </a:rPr>
-              <a:t>prueba CLP</a:t>
+              <a:t>prueba 3 CLP</a:t>
             </a:r>
             <a:endParaRPr lang="en-US" sz="800" dirty="0"/>
           </a:p>

--- a/folletos/2026-04/pptx/FIP_VANTRUST_LIQUIDEZ_DISPONIBLE_I.pptx
+++ b/folletos/2026-04/pptx/FIP_VANTRUST_LIQUIDEZ_DISPONIBLE_I.pptx
@@ -6323,7 +6323,7 @@
                 <a:ea typeface="Calibri" pitchFamily="34" charset="-122"/>
                 <a:cs typeface="Calibri" pitchFamily="34" charset="-120"/>
               </a:rPr>
-              <a:t>prueba CLP</a:t>
+              <a:t>prueba 4 CLP</a:t>
             </a:r>
             <a:endParaRPr lang="en-US" sz="800" dirty="0"/>
           </a:p>

--- a/folletos/2026-04/pptx/FIP_VANTRUST_LIQUIDEZ_DISPONIBLE_I.pptx
+++ b/folletos/2026-04/pptx/FIP_VANTRUST_LIQUIDEZ_DISPONIBLE_I.pptx
@@ -6373,7 +6373,7 @@
                 <a:ea typeface="Calibri" pitchFamily="34" charset="-122"/>
                 <a:cs typeface="Calibri" pitchFamily="34" charset="-120"/>
               </a:rPr>
-              <a:t>prueba CLP</a:t>
+              <a:t>prueba 6 CLP</a:t>
             </a:r>
             <a:endParaRPr lang="en-US" sz="800" dirty="0"/>
           </a:p>

--- a/folletos/2026-04/pptx/FIP_VANTRUST_LIQUIDEZ_DISPONIBLE_I.pptx
+++ b/folletos/2026-04/pptx/FIP_VANTRUST_LIQUIDEZ_DISPONIBLE_I.pptx
@@ -6373,7 +6373,7 @@
                 <a:ea typeface="Calibri" pitchFamily="34" charset="-122"/>
                 <a:cs typeface="Calibri" pitchFamily="34" charset="-120"/>
               </a:rPr>
-              <a:t>prueba 6 CLP</a:t>
+              <a:t>prueba CLP</a:t>
             </a:r>
             <a:endParaRPr lang="en-US" sz="800" dirty="0"/>
           </a:p>
@@ -33352,13 +33352,91 @@
       </p:sp>
       <p:sp>
         <p:nvSpPr>
-          <p:cNvPr id="8" name="Shape 6"/>
+          <p:cNvPr id="8" name="Text 6"/>
           <p:cNvSpPr/>
           <p:nvPr/>
         </p:nvSpPr>
         <p:spPr>
           <a:xfrm>
-            <a:off x="118872" y="1810512"/>
+            <a:off x="118872" y="1719072"/>
+            <a:ext cx="1188720" cy="173736"/>
+          </a:xfrm>
+          <a:prstGeom prst="rect">
+            <a:avLst/>
+          </a:prstGeom>
+          <a:noFill/>
+          <a:ln/>
+        </p:spPr>
+        <p:txBody>
+          <a:bodyPr wrap="square" lIns="0" tIns="0" rIns="0" bIns="0" rtlCol="0" anchor="ctr"/>
+          <a:lstStyle/>
+          <a:p>
+            <a:pPr indent="0" marL="0">
+              <a:buNone/>
+            </a:pPr>
+            <a:r>
+              <a:rPr lang="en-US" sz="750" dirty="0">
+                <a:solidFill>
+                  <a:srgbClr val="000000"/>
+                </a:solidFill>
+                <a:latin typeface="Calibri" pitchFamily="34" charset="0"/>
+                <a:ea typeface="Calibri" pitchFamily="34" charset="-122"/>
+                <a:cs typeface="Calibri" pitchFamily="34" charset="-120"/>
+              </a:rPr>
+              <a:t>CLP</a:t>
+            </a:r>
+            <a:endParaRPr lang="en-US" sz="750" dirty="0"/>
+          </a:p>
+        </p:txBody>
+      </p:sp>
+      <p:sp>
+        <p:nvSpPr>
+          <p:cNvPr id="9" name="Text 7"/>
+          <p:cNvSpPr/>
+          <p:nvPr/>
+        </p:nvSpPr>
+        <p:spPr>
+          <a:xfrm>
+            <a:off x="1307592" y="1719072"/>
+            <a:ext cx="1024128" cy="173736"/>
+          </a:xfrm>
+          <a:prstGeom prst="rect">
+            <a:avLst/>
+          </a:prstGeom>
+          <a:noFill/>
+          <a:ln/>
+        </p:spPr>
+        <p:txBody>
+          <a:bodyPr wrap="square" lIns="0" tIns="0" rIns="0" bIns="0" rtlCol="0" anchor="ctr"/>
+          <a:lstStyle/>
+          <a:p>
+            <a:pPr algn="r" indent="0" marL="0">
+              <a:buNone/>
+            </a:pPr>
+            <a:r>
+              <a:rPr lang="en-US" sz="750" b="1" dirty="0">
+                <a:solidFill>
+                  <a:srgbClr val="000000"/>
+                </a:solidFill>
+                <a:latin typeface="Calibri" pitchFamily="34" charset="0"/>
+                <a:ea typeface="Calibri" pitchFamily="34" charset="-122"/>
+                <a:cs typeface="Calibri" pitchFamily="34" charset="-120"/>
+              </a:rPr>
+              <a:t>100,00%</a:t>
+            </a:r>
+            <a:endParaRPr lang="en-US" sz="750" dirty="0"/>
+          </a:p>
+        </p:txBody>
+      </p:sp>
+      <p:sp>
+        <p:nvSpPr>
+          <p:cNvPr id="10" name="Shape 8"/>
+          <p:cNvSpPr/>
+          <p:nvPr/>
+        </p:nvSpPr>
+        <p:spPr>
+          <a:xfrm>
+            <a:off x="118872" y="2002536"/>
             <a:ext cx="2212848" cy="0"/>
           </a:xfrm>
           <a:prstGeom prst="line">
@@ -33375,13 +33453,13 @@
       </p:sp>
       <p:sp>
         <p:nvSpPr>
-          <p:cNvPr id="9" name="Text 7"/>
+          <p:cNvPr id="11" name="Text 9"/>
           <p:cNvSpPr/>
           <p:nvPr/>
         </p:nvSpPr>
         <p:spPr>
           <a:xfrm>
-            <a:off x="118872" y="1901952"/>
+            <a:off x="118872" y="2093976"/>
             <a:ext cx="2212848" cy="164592"/>
           </a:xfrm>
           <a:prstGeom prst="rect">
@@ -33414,13 +33492,13 @@
       </p:sp>
       <p:sp>
         <p:nvSpPr>
-          <p:cNvPr id="10" name="Shape 8"/>
+          <p:cNvPr id="12" name="Shape 10"/>
           <p:cNvSpPr/>
           <p:nvPr/>
         </p:nvSpPr>
         <p:spPr>
           <a:xfrm>
-            <a:off x="118872" y="2084832"/>
+            <a:off x="118872" y="2276856"/>
             <a:ext cx="2212848" cy="0"/>
           </a:xfrm>
           <a:prstGeom prst="line">
@@ -33437,13 +33515,13 @@
       </p:sp>
       <p:sp>
         <p:nvSpPr>
-          <p:cNvPr id="11" name="Text 9"/>
+          <p:cNvPr id="13" name="Text 11"/>
           <p:cNvSpPr/>
           <p:nvPr/>
         </p:nvSpPr>
         <p:spPr>
           <a:xfrm>
-            <a:off x="118872" y="2157984"/>
+            <a:off x="118872" y="2350008"/>
             <a:ext cx="1371600" cy="164592"/>
           </a:xfrm>
           <a:prstGeom prst="rect">
@@ -33476,13 +33554,13 @@
       </p:sp>
       <p:sp>
         <p:nvSpPr>
-          <p:cNvPr id="12" name="Text 10"/>
+          <p:cNvPr id="14" name="Text 12"/>
           <p:cNvSpPr/>
           <p:nvPr/>
         </p:nvSpPr>
         <p:spPr>
           <a:xfrm>
-            <a:off x="1490472" y="2157984"/>
+            <a:off x="1490472" y="2350008"/>
             <a:ext cx="841248" cy="164592"/>
           </a:xfrm>
           <a:prstGeom prst="rect">
@@ -33507,7 +33585,7 @@
                 <a:ea typeface="Calibri" pitchFamily="34" charset="-122"/>
                 <a:cs typeface="Calibri" pitchFamily="34" charset="-120"/>
               </a:rPr>
-              <a:t>100,00%</a:t>
+              <a:t>96,27%</a:t>
             </a:r>
             <a:endParaRPr lang="en-US" sz="700" dirty="0"/>
           </a:p>
@@ -33515,13 +33593,91 @@
       </p:sp>
       <p:sp>
         <p:nvSpPr>
-          <p:cNvPr id="13" name="Shape 11"/>
+          <p:cNvPr id="15" name="Text 13"/>
           <p:cNvSpPr/>
           <p:nvPr/>
         </p:nvSpPr>
         <p:spPr>
           <a:xfrm>
-            <a:off x="118872" y="2423160"/>
+            <a:off x="118872" y="2523744"/>
+            <a:ext cx="1371600" cy="164592"/>
+          </a:xfrm>
+          <a:prstGeom prst="rect">
+            <a:avLst/>
+          </a:prstGeom>
+          <a:noFill/>
+          <a:ln/>
+        </p:spPr>
+        <p:txBody>
+          <a:bodyPr wrap="square" lIns="0" tIns="0" rIns="0" bIns="0" rtlCol="0" anchor="ctr"/>
+          <a:lstStyle/>
+          <a:p>
+            <a:pPr indent="0" marL="0">
+              <a:buNone/>
+            </a:pPr>
+            <a:r>
+              <a:rPr lang="en-US" sz="700" dirty="0">
+                <a:solidFill>
+                  <a:srgbClr val="000000"/>
+                </a:solidFill>
+                <a:latin typeface="Calibri" pitchFamily="34" charset="0"/>
+                <a:ea typeface="Calibri" pitchFamily="34" charset="-122"/>
+                <a:cs typeface="Calibri" pitchFamily="34" charset="-120"/>
+              </a:rPr>
+              <a:t>Inmob</a:t>
+            </a:r>
+            <a:endParaRPr lang="en-US" sz="700" dirty="0"/>
+          </a:p>
+        </p:txBody>
+      </p:sp>
+      <p:sp>
+        <p:nvSpPr>
+          <p:cNvPr id="16" name="Text 14"/>
+          <p:cNvSpPr/>
+          <p:nvPr/>
+        </p:nvSpPr>
+        <p:spPr>
+          <a:xfrm>
+            <a:off x="1490472" y="2523744"/>
+            <a:ext cx="841248" cy="164592"/>
+          </a:xfrm>
+          <a:prstGeom prst="rect">
+            <a:avLst/>
+          </a:prstGeom>
+          <a:noFill/>
+          <a:ln/>
+        </p:spPr>
+        <p:txBody>
+          <a:bodyPr wrap="square" lIns="0" tIns="0" rIns="0" bIns="0" rtlCol="0" anchor="ctr"/>
+          <a:lstStyle/>
+          <a:p>
+            <a:pPr algn="r" indent="0" marL="0">
+              <a:buNone/>
+            </a:pPr>
+            <a:r>
+              <a:rPr lang="en-US" sz="700" b="1" dirty="0">
+                <a:solidFill>
+                  <a:srgbClr val="000000"/>
+                </a:solidFill>
+                <a:latin typeface="Calibri" pitchFamily="34" charset="0"/>
+                <a:ea typeface="Calibri" pitchFamily="34" charset="-122"/>
+                <a:cs typeface="Calibri" pitchFamily="34" charset="-120"/>
+              </a:rPr>
+              <a:t>3,73%</a:t>
+            </a:r>
+            <a:endParaRPr lang="en-US" sz="700" dirty="0"/>
+          </a:p>
+        </p:txBody>
+      </p:sp>
+      <p:sp>
+        <p:nvSpPr>
+          <p:cNvPr id="17" name="Shape 15"/>
+          <p:cNvSpPr/>
+          <p:nvPr/>
+        </p:nvSpPr>
+        <p:spPr>
+          <a:xfrm>
+            <a:off x="118872" y="2788920"/>
             <a:ext cx="2212848" cy="0"/>
           </a:xfrm>
           <a:prstGeom prst="line">
@@ -33538,13 +33694,13 @@
       </p:sp>
       <p:sp>
         <p:nvSpPr>
-          <p:cNvPr id="14" name="Text 12"/>
+          <p:cNvPr id="18" name="Text 16"/>
           <p:cNvSpPr/>
           <p:nvPr/>
         </p:nvSpPr>
         <p:spPr>
           <a:xfrm>
-            <a:off x="118872" y="2514600"/>
+            <a:off x="118872" y="2880360"/>
             <a:ext cx="2212848" cy="164592"/>
           </a:xfrm>
           <a:prstGeom prst="rect">
@@ -33577,13 +33733,13 @@
       </p:sp>
       <p:sp>
         <p:nvSpPr>
-          <p:cNvPr id="15" name="Shape 13"/>
+          <p:cNvPr id="19" name="Shape 17"/>
           <p:cNvSpPr/>
           <p:nvPr/>
         </p:nvSpPr>
         <p:spPr>
           <a:xfrm>
-            <a:off x="118872" y="2697480"/>
+            <a:off x="118872" y="3063240"/>
             <a:ext cx="2212848" cy="0"/>
           </a:xfrm>
           <a:prstGeom prst="line">
@@ -33600,13 +33756,13 @@
       </p:sp>
       <p:sp>
         <p:nvSpPr>
-          <p:cNvPr id="16" name="Text 14"/>
+          <p:cNvPr id="20" name="Text 18"/>
           <p:cNvSpPr/>
           <p:nvPr/>
         </p:nvSpPr>
         <p:spPr>
           <a:xfrm>
-            <a:off x="118872" y="2770632"/>
+            <a:off x="118872" y="3136392"/>
             <a:ext cx="1371600" cy="182880"/>
           </a:xfrm>
           <a:prstGeom prst="rect">
@@ -33639,13 +33795,13 @@
       </p:sp>
       <p:sp>
         <p:nvSpPr>
-          <p:cNvPr id="17" name="Text 15"/>
+          <p:cNvPr id="21" name="Text 19"/>
           <p:cNvSpPr/>
           <p:nvPr/>
         </p:nvSpPr>
         <p:spPr>
           <a:xfrm>
-            <a:off x="1490472" y="2770632"/>
+            <a:off x="1490472" y="3136392"/>
             <a:ext cx="841248" cy="182880"/>
           </a:xfrm>
           <a:prstGeom prst="rect">
@@ -33670,7 +33826,7 @@
                 <a:ea typeface="Calibri" pitchFamily="34" charset="-122"/>
                 <a:cs typeface="Calibri" pitchFamily="34" charset="-120"/>
               </a:rPr>
-              <a:t>63,16%</a:t>
+              <a:t>29,79%</a:t>
             </a:r>
             <a:endParaRPr lang="en-US" sz="750" dirty="0"/>
           </a:p>
@@ -33678,13 +33834,13 @@
       </p:sp>
       <p:sp>
         <p:nvSpPr>
-          <p:cNvPr id="18" name="Text 16"/>
+          <p:cNvPr id="22" name="Text 20"/>
           <p:cNvSpPr/>
           <p:nvPr/>
         </p:nvSpPr>
         <p:spPr>
           <a:xfrm>
-            <a:off x="118872" y="2971800"/>
+            <a:off x="118872" y="3337560"/>
             <a:ext cx="1371600" cy="182880"/>
           </a:xfrm>
           <a:prstGeom prst="rect">
@@ -33717,13 +33873,13 @@
       </p:sp>
       <p:sp>
         <p:nvSpPr>
-          <p:cNvPr id="19" name="Text 17"/>
+          <p:cNvPr id="23" name="Text 21"/>
           <p:cNvSpPr/>
           <p:nvPr/>
         </p:nvSpPr>
         <p:spPr>
           <a:xfrm>
-            <a:off x="1490472" y="2971800"/>
+            <a:off x="1490472" y="3337560"/>
             <a:ext cx="841248" cy="182880"/>
           </a:xfrm>
           <a:prstGeom prst="rect">
@@ -33748,7 +33904,7 @@
                 <a:ea typeface="Calibri" pitchFamily="34" charset="-122"/>
                 <a:cs typeface="Calibri" pitchFamily="34" charset="-120"/>
               </a:rPr>
-              <a:t>28,00%</a:t>
+              <a:t>17,81%</a:t>
             </a:r>
             <a:endParaRPr lang="en-US" sz="750" dirty="0"/>
           </a:p>
@@ -33756,13 +33912,13 @@
       </p:sp>
       <p:sp>
         <p:nvSpPr>
-          <p:cNvPr id="20" name="Text 18"/>
+          <p:cNvPr id="24" name="Text 22"/>
           <p:cNvSpPr/>
           <p:nvPr/>
         </p:nvSpPr>
         <p:spPr>
           <a:xfrm>
-            <a:off x="118872" y="3172968"/>
+            <a:off x="118872" y="3538728"/>
             <a:ext cx="1371600" cy="182880"/>
           </a:xfrm>
           <a:prstGeom prst="rect">
@@ -33795,13 +33951,13 @@
       </p:sp>
       <p:sp>
         <p:nvSpPr>
-          <p:cNvPr id="21" name="Text 19"/>
+          <p:cNvPr id="25" name="Text 23"/>
           <p:cNvSpPr/>
           <p:nvPr/>
         </p:nvSpPr>
         <p:spPr>
           <a:xfrm>
-            <a:off x="1490472" y="3172968"/>
+            <a:off x="1490472" y="3538728"/>
             <a:ext cx="841248" cy="182880"/>
           </a:xfrm>
           <a:prstGeom prst="rect">
@@ -33826,7 +33982,7 @@
                 <a:ea typeface="Calibri" pitchFamily="34" charset="-122"/>
                 <a:cs typeface="Calibri" pitchFamily="34" charset="-120"/>
               </a:rPr>
-              <a:t>8,84%</a:t>
+              <a:t>52,40%</a:t>
             </a:r>
             <a:endParaRPr lang="en-US" sz="750" dirty="0"/>
           </a:p>
@@ -33834,13 +33990,13 @@
       </p:sp>
       <p:sp>
         <p:nvSpPr>
-          <p:cNvPr id="22" name="Text 20"/>
+          <p:cNvPr id="26" name="Text 24"/>
           <p:cNvSpPr/>
           <p:nvPr/>
         </p:nvSpPr>
         <p:spPr>
           <a:xfrm>
-            <a:off x="118872" y="3374136"/>
+            <a:off x="118872" y="3739896"/>
             <a:ext cx="1371600" cy="182880"/>
           </a:xfrm>
           <a:prstGeom prst="rect">
@@ -33873,13 +34029,13 @@
       </p:sp>
       <p:sp>
         <p:nvSpPr>
-          <p:cNvPr id="23" name="Text 21"/>
+          <p:cNvPr id="27" name="Text 25"/>
           <p:cNvSpPr/>
           <p:nvPr/>
         </p:nvSpPr>
         <p:spPr>
           <a:xfrm>
-            <a:off x="1490472" y="3374136"/>
+            <a:off x="1490472" y="3739896"/>
             <a:ext cx="841248" cy="182880"/>
           </a:xfrm>
           <a:prstGeom prst="rect">
@@ -33912,7 +34068,7 @@
       </p:sp>
       <p:sp>
         <p:nvSpPr>
-          <p:cNvPr id="24" name="Text 22"/>
+          <p:cNvPr id="28" name="Text 26"/>
           <p:cNvSpPr/>
           <p:nvPr/>
         </p:nvSpPr>
@@ -33951,7 +34107,7 @@
       </p:sp>
       <p:sp>
         <p:nvSpPr>
-          <p:cNvPr id="25" name="Shape 23"/>
+          <p:cNvPr id="29" name="Shape 27"/>
           <p:cNvSpPr/>
           <p:nvPr/>
         </p:nvSpPr>
@@ -33974,7 +34130,7 @@
       </p:sp>
       <p:sp>
         <p:nvSpPr>
-          <p:cNvPr id="26" name="Text 24"/>
+          <p:cNvPr id="30" name="Text 28"/>
           <p:cNvSpPr/>
           <p:nvPr/>
         </p:nvSpPr>
@@ -34030,7 +34186,7 @@
       </p:sp>
       <p:sp>
         <p:nvSpPr>
-          <p:cNvPr id="27" name="Text 25"/>
+          <p:cNvPr id="31" name="Text 29"/>
           <p:cNvSpPr/>
           <p:nvPr/>
         </p:nvSpPr>
@@ -34086,7 +34242,7 @@
       </p:sp>
       <p:sp>
         <p:nvSpPr>
-          <p:cNvPr id="28" name="Text 26"/>
+          <p:cNvPr id="32" name="Text 30"/>
           <p:cNvSpPr/>
           <p:nvPr/>
         </p:nvSpPr>
@@ -34142,7 +34298,7 @@
       </p:sp>
       <p:sp>
         <p:nvSpPr>
-          <p:cNvPr id="29" name="Text 27"/>
+          <p:cNvPr id="33" name="Text 31"/>
           <p:cNvSpPr/>
           <p:nvPr/>
         </p:nvSpPr>
@@ -34198,7 +34354,7 @@
       </p:sp>
       <p:sp>
         <p:nvSpPr>
-          <p:cNvPr id="30" name="Text 28"/>
+          <p:cNvPr id="34" name="Text 32"/>
           <p:cNvSpPr/>
           <p:nvPr/>
         </p:nvSpPr>
@@ -34254,7 +34410,7 @@
       </p:sp>
       <p:sp>
         <p:nvSpPr>
-          <p:cNvPr id="31" name="Text 29"/>
+          <p:cNvPr id="35" name="Text 33"/>
           <p:cNvSpPr/>
           <p:nvPr/>
         </p:nvSpPr>
@@ -34310,7 +34466,7 @@
       </p:sp>
       <p:sp>
         <p:nvSpPr>
-          <p:cNvPr id="32" name="Text 30"/>
+          <p:cNvPr id="36" name="Text 34"/>
           <p:cNvSpPr/>
           <p:nvPr/>
         </p:nvSpPr>
@@ -34366,7 +34522,7 @@
       </p:sp>
       <p:sp>
         <p:nvSpPr>
-          <p:cNvPr id="33" name="Text 31"/>
+          <p:cNvPr id="37" name="Text 35"/>
           <p:cNvSpPr/>
           <p:nvPr/>
         </p:nvSpPr>
@@ -34422,7 +34578,7 @@
       </p:sp>
       <p:sp>
         <p:nvSpPr>
-          <p:cNvPr id="34" name="Text 32"/>
+          <p:cNvPr id="38" name="Text 36"/>
           <p:cNvSpPr/>
           <p:nvPr/>
         </p:nvSpPr>
@@ -34478,7 +34634,7 @@
       </p:sp>
       <p:sp>
         <p:nvSpPr>
-          <p:cNvPr id="35" name="Shape 33"/>
+          <p:cNvPr id="39" name="Shape 37"/>
           <p:cNvSpPr/>
           <p:nvPr/>
         </p:nvSpPr>
@@ -34501,7 +34657,7 @@
       </p:sp>
       <p:sp>
         <p:nvSpPr>
-          <p:cNvPr id="36" name="Text 34"/>
+          <p:cNvPr id="40" name="Text 38"/>
           <p:cNvSpPr/>
           <p:nvPr/>
         </p:nvSpPr>
@@ -34540,7 +34696,7 @@
       </p:sp>
       <p:sp>
         <p:nvSpPr>
-          <p:cNvPr id="37" name="Shape 35"/>
+          <p:cNvPr id="41" name="Shape 39"/>
           <p:cNvSpPr/>
           <p:nvPr/>
         </p:nvSpPr>
@@ -34563,7 +34719,7 @@
       </p:sp>
       <p:sp>
         <p:nvSpPr>
-          <p:cNvPr id="38" name="Text 36"/>
+          <p:cNvPr id="42" name="Text 40"/>
           <p:cNvSpPr/>
           <p:nvPr/>
         </p:nvSpPr>

--- a/folletos/2026-04/pptx/FIP_VANTRUST_LIQUIDEZ_DISPONIBLE_I.pptx
+++ b/folletos/2026-04/pptx/FIP_VANTRUST_LIQUIDEZ_DISPONIBLE_I.pptx
@@ -6373,7 +6373,7 @@
                 <a:ea typeface="Calibri" pitchFamily="34" charset="-122"/>
                 <a:cs typeface="Calibri" pitchFamily="34" charset="-120"/>
               </a:rPr>
-              <a:t>prueba CLP</a:t>
+              <a:t>prueba 8 CLP</a:t>
             </a:r>
             <a:endParaRPr lang="en-US" sz="800" dirty="0"/>
           </a:p>

--- a/folletos/2026-04/pptx/FIP_VANTRUST_LIQUIDEZ_DISPONIBLE_I.pptx
+++ b/folletos/2026-04/pptx/FIP_VANTRUST_LIQUIDEZ_DISPONIBLE_I.pptx
@@ -3131,7 +3131,7 @@
                 <a:ea typeface="Calibri" pitchFamily="34" charset="-122"/>
                 <a:cs typeface="Calibri" pitchFamily="34" charset="-120"/>
               </a:rPr>
-              <a:t>prueba CLP</a:t>
+              <a:t>prueba 10 CLP</a:t>
             </a:r>
             <a:endParaRPr lang="en-US" sz="800" dirty="0"/>
           </a:p>

--- a/folletos/2026-04/pptx/FIP_VANTRUST_LIQUIDEZ_DISPONIBLE_I.pptx
+++ b/folletos/2026-04/pptx/FIP_VANTRUST_LIQUIDEZ_DISPONIBLE_I.pptx
@@ -3131,7 +3131,7 @@
                 <a:ea typeface="Calibri" pitchFamily="34" charset="-122"/>
                 <a:cs typeface="Calibri" pitchFamily="34" charset="-120"/>
               </a:rPr>
-              <a:t>prueba 10 CLP</a:t>
+              <a:t>prueba 11 CLP</a:t>
             </a:r>
             <a:endParaRPr lang="en-US" sz="800" dirty="0"/>
           </a:p>

--- a/folletos/2026-04/pptx/FIP_VANTRUST_LIQUIDEZ_DISPONIBLE_I.pptx
+++ b/folletos/2026-04/pptx/FIP_VANTRUST_LIQUIDEZ_DISPONIBLE_I.pptx
@@ -3131,7 +3131,7 @@
                 <a:ea typeface="Calibri" pitchFamily="34" charset="-122"/>
                 <a:cs typeface="Calibri" pitchFamily="34" charset="-120"/>
               </a:rPr>
-              <a:t>prueba CLP</a:t>
+              <a:t>prueba 11 CLP</a:t>
             </a:r>
             <a:endParaRPr lang="en-US" sz="800" dirty="0"/>
           </a:p>

--- a/folletos/2026-04/pptx/FIP_VANTRUST_LIQUIDEZ_DISPONIBLE_I.pptx
+++ b/folletos/2026-04/pptx/FIP_VANTRUST_LIQUIDEZ_DISPONIBLE_I.pptx
@@ -3131,7 +3131,7 @@
                 <a:ea typeface="Calibri" pitchFamily="34" charset="-122"/>
                 <a:cs typeface="Calibri" pitchFamily="34" charset="-120"/>
               </a:rPr>
-              <a:t>prueba 11 CLP</a:t>
+              <a:t>prueba 12 CLP</a:t>
             </a:r>
             <a:endParaRPr lang="en-US" sz="800" dirty="0"/>
           </a:p>

--- a/folletos/2026-04/pptx/FIP_VANTRUST_LIQUIDEZ_DISPONIBLE_I.pptx
+++ b/folletos/2026-04/pptx/FIP_VANTRUST_LIQUIDEZ_DISPONIBLE_I.pptx
@@ -189,42 +189,39 @@
           </c:marker>
           <c:cat>
             <c:multiLvlStrRef>
-              <c:f>Sheet1!$A$2:$A$12</c:f>
+              <c:f>Sheet1!$A$2:$A$11</c:f>
               <c:multiLvlStrCache>
-                <c:ptCount val="11"/>
+                <c:ptCount val="10"/>
                 <c:lvl>
                   <c:pt idx="0">
-                    <c:v>2025-07-31</c:v>
+                    <c:v>Jul 2025</c:v>
                   </c:pt>
                   <c:pt idx="1">
-                    <c:v>2025-08-31</c:v>
+                    <c:v>Aug 2025</c:v>
                   </c:pt>
                   <c:pt idx="2">
-                    <c:v>2025-09-30</c:v>
+                    <c:v>Sep 2025</c:v>
                   </c:pt>
                   <c:pt idx="3">
-                    <c:v>2025-10-31</c:v>
+                    <c:v>Oct 2025</c:v>
                   </c:pt>
                   <c:pt idx="4">
-                    <c:v>2025-11-30</c:v>
+                    <c:v>Nov 2025</c:v>
                   </c:pt>
                   <c:pt idx="5">
-                    <c:v>2025-12-31</c:v>
+                    <c:v>Dec 2025</c:v>
                   </c:pt>
                   <c:pt idx="6">
-                    <c:v>2026-01-31</c:v>
+                    <c:v>Jan 2026</c:v>
                   </c:pt>
                   <c:pt idx="7">
-                    <c:v>2026-02-28</c:v>
+                    <c:v>Feb 2026</c:v>
                   </c:pt>
                   <c:pt idx="8">
-                    <c:v>2026-03-31</c:v>
+                    <c:v>Mar 2026</c:v>
                   </c:pt>
                   <c:pt idx="9">
-                    <c:v>2026-04-30</c:v>
-                  </c:pt>
-                  <c:pt idx="10">
-                    <c:v>2026-05-31</c:v>
+                    <c:v>Apr 2026</c:v>
                   </c:pt>
                 </c:lvl>
               </c:multiLvlStrCache>
@@ -232,42 +229,39 @@
           </c:cat>
           <c:val>
             <c:numRef>
-              <c:f>Sheet1!$B$2:$B$12</c:f>
+              <c:f>Sheet1!$B$2:$B$11</c:f>
               <c:numCache>
                 <c:formatCode>General</c:formatCode>
-                <c:ptCount val="11"/>
+                <c:ptCount val="10"/>
                 <c:pt idx="0">
-                  <c:v>519.78</c:v>
+                  <c:v>100</c:v>
                 </c:pt>
                 <c:pt idx="1">
-                  <c:v>522.32</c:v>
+                  <c:v>100.4</c:v>
                 </c:pt>
                 <c:pt idx="2">
-                  <c:v>523.75</c:v>
+                  <c:v>100.79</c:v>
                 </c:pt>
                 <c:pt idx="3">
-                  <c:v>524.58</c:v>
+                  <c:v>101.19</c:v>
                 </c:pt>
                 <c:pt idx="4">
-                  <c:v>525.18</c:v>
+                  <c:v>101.59</c:v>
                 </c:pt>
                 <c:pt idx="5">
-                  <c:v>525.63</c:v>
+                  <c:v>101.98</c:v>
                 </c:pt>
                 <c:pt idx="6">
-                  <c:v>525.88</c:v>
+                  <c:v>102.37</c:v>
                 </c:pt>
                 <c:pt idx="7">
-                  <c:v>526.1</c:v>
+                  <c:v>102.75</c:v>
                 </c:pt>
                 <c:pt idx="8">
-                  <c:v>526.32</c:v>
+                  <c:v>103.14</c:v>
                 </c:pt>
                 <c:pt idx="9">
-                  <c:v>526.54</c:v>
-                </c:pt>
-                <c:pt idx="10">
-                  <c:v>526.76</c:v>
+                  <c:v>103.52</c:v>
                 </c:pt>
               </c:numCache>
             </c:numRef>
@@ -345,42 +339,39 @@
           </c:marker>
           <c:cat>
             <c:multiLvlStrRef>
-              <c:f>Sheet1!$A$2:$A$12</c:f>
+              <c:f>Sheet1!$A$2:$A$11</c:f>
               <c:multiLvlStrCache>
-                <c:ptCount val="11"/>
+                <c:ptCount val="10"/>
                 <c:lvl>
                   <c:pt idx="0">
-                    <c:v>2025-07-31</c:v>
+                    <c:v>Jul 2025</c:v>
                   </c:pt>
                   <c:pt idx="1">
-                    <c:v>2025-08-31</c:v>
+                    <c:v>Aug 2025</c:v>
                   </c:pt>
                   <c:pt idx="2">
-                    <c:v>2025-09-30</c:v>
+                    <c:v>Sep 2025</c:v>
                   </c:pt>
                   <c:pt idx="3">
-                    <c:v>2025-10-31</c:v>
+                    <c:v>Oct 2025</c:v>
                   </c:pt>
                   <c:pt idx="4">
-                    <c:v>2025-11-30</c:v>
+                    <c:v>Nov 2025</c:v>
                   </c:pt>
                   <c:pt idx="5">
-                    <c:v>2025-12-31</c:v>
+                    <c:v>Dec 2025</c:v>
                   </c:pt>
                   <c:pt idx="6">
-                    <c:v>2026-01-31</c:v>
+                    <c:v>Jan 2026</c:v>
                   </c:pt>
                   <c:pt idx="7">
-                    <c:v>2026-02-28</c:v>
+                    <c:v>Feb 2026</c:v>
                   </c:pt>
                   <c:pt idx="8">
-                    <c:v>2026-03-31</c:v>
+                    <c:v>Mar 2026</c:v>
                   </c:pt>
                   <c:pt idx="9">
-                    <c:v>2026-04-30</c:v>
-                  </c:pt>
-                  <c:pt idx="10">
-                    <c:v>2026-05-31</c:v>
+                    <c:v>Apr 2026</c:v>
                   </c:pt>
                 </c:lvl>
               </c:multiLvlStrCache>
@@ -388,42 +379,39 @@
           </c:cat>
           <c:val>
             <c:numRef>
-              <c:f>Sheet1!$C$2:$C$12</c:f>
+              <c:f>Sheet1!$C$2:$C$11</c:f>
               <c:numCache>
                 <c:formatCode>General</c:formatCode>
-                <c:ptCount val="11"/>
+                <c:ptCount val="10"/>
                 <c:pt idx="0">
-                  <c:v>1000</c:v>
+                  <c:v>100</c:v>
                 </c:pt>
                 <c:pt idx="1">
-                  <c:v>1005.77</c:v>
+                  <c:v>100.58</c:v>
                 </c:pt>
                 <c:pt idx="2">
-                  <c:v>1011.04</c:v>
+                  <c:v>101.1</c:v>
                 </c:pt>
                 <c:pt idx="3">
-                  <c:v>1016.88</c:v>
+                  <c:v>101.69</c:v>
                 </c:pt>
                 <c:pt idx="4">
-                  <c:v>1022.94</c:v>
+                  <c:v>102.29</c:v>
                 </c:pt>
                 <c:pt idx="5">
-                  <c:v>1029.37</c:v>
+                  <c:v>102.94</c:v>
                 </c:pt>
                 <c:pt idx="6">
-                  <c:v>1035.06</c:v>
+                  <c:v>103.51</c:v>
                 </c:pt>
                 <c:pt idx="7">
-                  <c:v>1040.33</c:v>
+                  <c:v>104.03</c:v>
                 </c:pt>
                 <c:pt idx="8">
-                  <c:v>1046.24</c:v>
+                  <c:v>104.62</c:v>
                 </c:pt>
                 <c:pt idx="9">
-                  <c:v>1051.88</c:v>
-                </c:pt>
-                <c:pt idx="10">
-                  <c:v>1052.9</c:v>
+                  <c:v>105.19</c:v>
                 </c:pt>
               </c:numCache>
             </c:numRef>
@@ -501,42 +489,39 @@
           </c:marker>
           <c:cat>
             <c:multiLvlStrRef>
-              <c:f>Sheet1!$A$2:$A$12</c:f>
+              <c:f>Sheet1!$A$2:$A$11</c:f>
               <c:multiLvlStrCache>
-                <c:ptCount val="11"/>
+                <c:ptCount val="10"/>
                 <c:lvl>
                   <c:pt idx="0">
-                    <c:v>2025-07-31</c:v>
+                    <c:v>Jul 2025</c:v>
                   </c:pt>
                   <c:pt idx="1">
-                    <c:v>2025-08-31</c:v>
+                    <c:v>Aug 2025</c:v>
                   </c:pt>
                   <c:pt idx="2">
-                    <c:v>2025-09-30</c:v>
+                    <c:v>Sep 2025</c:v>
                   </c:pt>
                   <c:pt idx="3">
-                    <c:v>2025-10-31</c:v>
+                    <c:v>Oct 2025</c:v>
                   </c:pt>
                   <c:pt idx="4">
-                    <c:v>2025-11-30</c:v>
+                    <c:v>Nov 2025</c:v>
                   </c:pt>
                   <c:pt idx="5">
-                    <c:v>2025-12-31</c:v>
+                    <c:v>Dec 2025</c:v>
                   </c:pt>
                   <c:pt idx="6">
-                    <c:v>2026-01-31</c:v>
+                    <c:v>Jan 2026</c:v>
                   </c:pt>
                   <c:pt idx="7">
-                    <c:v>2026-02-28</c:v>
+                    <c:v>Feb 2026</c:v>
                   </c:pt>
                   <c:pt idx="8">
-                    <c:v>2026-03-31</c:v>
+                    <c:v>Mar 2026</c:v>
                   </c:pt>
                   <c:pt idx="9">
-                    <c:v>2026-04-30</c:v>
-                  </c:pt>
-                  <c:pt idx="10">
-                    <c:v>2026-05-31</c:v>
+                    <c:v>Apr 2026</c:v>
                   </c:pt>
                 </c:lvl>
               </c:multiLvlStrCache>
@@ -544,42 +529,39 @@
           </c:cat>
           <c:val>
             <c:numRef>
-              <c:f>Sheet1!$D$2:$D$12</c:f>
+              <c:f>Sheet1!$D$2:$D$11</c:f>
               <c:numCache>
                 <c:formatCode>General</c:formatCode>
-                <c:ptCount val="11"/>
+                <c:ptCount val="10"/>
                 <c:pt idx="0">
-                  <c:v>907.63</c:v>
+                  <c:v>100</c:v>
                 </c:pt>
                 <c:pt idx="1">
-                  <c:v>909.53</c:v>
+                  <c:v>100.3</c:v>
                 </c:pt>
                 <c:pt idx="2">
-                  <c:v>913.59</c:v>
+                  <c:v>100.58</c:v>
                 </c:pt>
                 <c:pt idx="3">
-                  <c:v>913.59</c:v>
+                  <c:v>100.87</c:v>
                 </c:pt>
                 <c:pt idx="4">
-                  <c:v>915.24</c:v>
+                  <c:v>101.15</c:v>
                 </c:pt>
                 <c:pt idx="5">
-                  <c:v>917.14</c:v>
+                  <c:v>101.71</c:v>
                 </c:pt>
                 <c:pt idx="6">
-                  <c:v>919.08</c:v>
+                  <c:v>101.71</c:v>
                 </c:pt>
                 <c:pt idx="7">
-                  <c:v>921.04</c:v>
+                  <c:v>101.96</c:v>
                 </c:pt>
                 <c:pt idx="8">
-                  <c:v>923.01</c:v>
+                  <c:v>102.23</c:v>
                 </c:pt>
                 <c:pt idx="9">
-                  <c:v>925.03</c:v>
-                </c:pt>
-                <c:pt idx="10">
-                  <c:v>926.95</c:v>
+                  <c:v>102.5</c:v>
                 </c:pt>
               </c:numCache>
             </c:numRef>
@@ -661,7 +643,7 @@
         <c:axId val="2094734552"/>
         <c:scaling>
           <c:orientation val="minMax"/>
-          <c:min val="504"/>
+          <c:min val="97"/>
         </c:scaling>
         <c:delete val="0"/>
         <c:axPos val="l"/>
@@ -3131,7 +3113,7 @@
                 <a:ea typeface="Calibri" pitchFamily="34" charset="-122"/>
                 <a:cs typeface="Calibri" pitchFamily="34" charset="-120"/>
               </a:rPr>
-              <a:t>prueba 12 CLP</a:t>
+              <a:t>prueba CLP</a:t>
             </a:r>
             <a:endParaRPr lang="en-US" sz="800" dirty="0"/>
           </a:p>
@@ -3642,28 +3624,7 @@
                           <a:ea typeface="Calibri" pitchFamily="34" charset="-122"/>
                           <a:cs typeface="Calibri" pitchFamily="34" charset="-120"/>
                         </a:rPr>
-                        <a:t>Acum.</a:t>
-                      </a:r>
-                      <a:endParaRPr lang="en-US" sz="750" dirty="0">
-                        <a:latin typeface="Calibri" charset="0"/>
-                        <a:ea typeface="Calibri" charset="0"/>
-                        <a:cs typeface="Calibri" charset="0"/>
-                      </a:endParaRPr>
-                    </a:p>
-                    <a:p>
-                      <a:pPr algn="ctr" indent="0" marL="0">
-                        <a:buNone/>
-                      </a:pPr>
-                      <a:r>
-                        <a:rPr lang="en-US" sz="750" b="1" dirty="0">
-                          <a:solidFill>
-                            <a:srgbClr val="000000"/>
-                          </a:solidFill>
-                          <a:latin typeface="Calibri" pitchFamily="34" charset="0"/>
-                          <a:ea typeface="Calibri" pitchFamily="34" charset="-122"/>
-                          <a:cs typeface="Calibri" pitchFamily="34" charset="-120"/>
-                        </a:rPr>
-                        <a:t>2026 (*)</a:t>
+                        <a:t>Acum 2026 (*)</a:t>
                       </a:r>
                       <a:endParaRPr lang="en-US" sz="750" dirty="0">
                         <a:latin typeface="Calibri" charset="0"/>
@@ -3801,7 +3762,7 @@
                           <a:ea typeface="Calibri" pitchFamily="34" charset="-122"/>
                           <a:cs typeface="Calibri" pitchFamily="34" charset="-120"/>
                         </a:rPr>
-                        <a:t>0,37%</a:t>
+                        <a:t>0.37%</a:t>
                       </a:r>
                       <a:endParaRPr lang="en-US" sz="750" dirty="0">
                         <a:latin typeface="Calibri" charset="0"/>
@@ -3848,7 +3809,7 @@
                       <a:tailEnd type="none" w="med" len="med"/>
                     </a:lnB>
                     <a:solidFill>
-                      <a:srgbClr val="FFFFFF"/>
+                      <a:srgbClr val="F9F9F9"/>
                     </a:solidFill>
                   </a:tcPr>
                 </a:tc>
@@ -3869,7 +3830,7 @@
                           <a:ea typeface="Calibri" pitchFamily="34" charset="-122"/>
                           <a:cs typeface="Calibri" pitchFamily="34" charset="-120"/>
                         </a:rPr>
-                        <a:t>1,13%</a:t>
+                        <a:t>1.13%</a:t>
                       </a:r>
                       <a:endParaRPr lang="en-US" sz="750" dirty="0">
                         <a:latin typeface="Calibri" charset="0"/>
@@ -3916,7 +3877,7 @@
                       <a:tailEnd type="none" w="med" len="med"/>
                     </a:lnB>
                     <a:solidFill>
-                      <a:srgbClr val="FFFFFF"/>
+                      <a:srgbClr val="F9F9F9"/>
                     </a:solidFill>
                   </a:tcPr>
                 </a:tc>
@@ -3937,7 +3898,7 @@
                           <a:ea typeface="Calibri" pitchFamily="34" charset="-122"/>
                           <a:cs typeface="Calibri" pitchFamily="34" charset="-120"/>
                         </a:rPr>
-                        <a:t>2,30%</a:t>
+                        <a:t>2.30%</a:t>
                       </a:r>
                       <a:endParaRPr lang="en-US" sz="750" dirty="0">
                         <a:latin typeface="Calibri" charset="0"/>
@@ -3984,7 +3945,7 @@
                       <a:tailEnd type="none" w="med" len="med"/>
                     </a:lnB>
                     <a:solidFill>
-                      <a:srgbClr val="FFFFFF"/>
+                      <a:srgbClr val="F9F9F9"/>
                     </a:solidFill>
                   </a:tcPr>
                 </a:tc>
@@ -4005,7 +3966,7 @@
                           <a:ea typeface="Calibri" pitchFamily="34" charset="-122"/>
                           <a:cs typeface="Calibri" pitchFamily="34" charset="-120"/>
                         </a:rPr>
-                        <a:t>4,82%</a:t>
+                        <a:t>4.82%</a:t>
                       </a:r>
                       <a:endParaRPr lang="en-US" sz="750" dirty="0">
                         <a:latin typeface="Calibri" charset="0"/>
@@ -4052,7 +4013,7 @@
                       <a:tailEnd type="none" w="med" len="med"/>
                     </a:lnB>
                     <a:solidFill>
-                      <a:srgbClr val="FFFFFF"/>
+                      <a:srgbClr val="F9F9F9"/>
                     </a:solidFill>
                   </a:tcPr>
                 </a:tc>
@@ -4073,7 +4034,7 @@
                           <a:ea typeface="Calibri" pitchFamily="34" charset="-122"/>
                           <a:cs typeface="Calibri" pitchFamily="34" charset="-120"/>
                         </a:rPr>
-                        <a:t>3,39%</a:t>
+                        <a:t>3.39%</a:t>
                       </a:r>
                       <a:endParaRPr lang="en-US" sz="750" dirty="0">
                         <a:latin typeface="Calibri" charset="0"/>
@@ -4120,7 +4081,7 @@
                       <a:tailEnd type="none" w="med" len="med"/>
                     </a:lnB>
                     <a:solidFill>
-                      <a:srgbClr val="FFFFFF"/>
+                      <a:srgbClr val="F9F9F9"/>
                     </a:solidFill>
                   </a:tcPr>
                 </a:tc>
@@ -4211,7 +4172,7 @@
                           <a:ea typeface="Calibri" pitchFamily="34" charset="-122"/>
                           <a:cs typeface="Calibri" pitchFamily="34" charset="-120"/>
                         </a:rPr>
-                        <a:t>0,26%</a:t>
+                        <a:t>0.26%</a:t>
                       </a:r>
                       <a:endParaRPr lang="en-US" sz="750" dirty="0">
                         <a:latin typeface="Calibri" charset="0"/>
@@ -4279,7 +4240,7 @@
                           <a:ea typeface="Calibri" pitchFamily="34" charset="-122"/>
                           <a:cs typeface="Calibri" pitchFamily="34" charset="-120"/>
                         </a:rPr>
-                        <a:t>0,77%</a:t>
+                        <a:t>0.77%</a:t>
                       </a:r>
                       <a:endParaRPr lang="en-US" sz="750" dirty="0">
                         <a:latin typeface="Calibri" charset="0"/>
@@ -4347,7 +4308,7 @@
                           <a:ea typeface="Calibri" pitchFamily="34" charset="-122"/>
                           <a:cs typeface="Calibri" pitchFamily="34" charset="-120"/>
                         </a:rPr>
-                        <a:t>1,62%</a:t>
+                        <a:t>1.62%</a:t>
                       </a:r>
                       <a:endParaRPr lang="en-US" sz="750" dirty="0">
                         <a:latin typeface="Calibri" charset="0"/>
@@ -4415,7 +4376,7 @@
                           <a:ea typeface="Calibri" pitchFamily="34" charset="-122"/>
                           <a:cs typeface="Calibri" pitchFamily="34" charset="-120"/>
                         </a:rPr>
-                        <a:t>3,43%</a:t>
+                        <a:t>3.43%</a:t>
                       </a:r>
                       <a:endParaRPr lang="en-US" sz="750" dirty="0">
                         <a:latin typeface="Calibri" charset="0"/>
@@ -4483,7 +4444,7 @@
                           <a:ea typeface="Calibri" pitchFamily="34" charset="-122"/>
                           <a:cs typeface="Calibri" pitchFamily="34" charset="-120"/>
                         </a:rPr>
-                        <a:t>2,32%</a:t>
+                        <a:t>2.32%</a:t>
                       </a:r>
                       <a:endParaRPr lang="en-US" sz="750" dirty="0">
                         <a:latin typeface="Calibri" charset="0"/>
@@ -4621,7 +4582,7 @@
                           <a:ea typeface="Calibri" pitchFamily="34" charset="-122"/>
                           <a:cs typeface="Calibri" pitchFamily="34" charset="-120"/>
                         </a:rPr>
-                        <a:t>0,54%</a:t>
+                        <a:t>0.54%</a:t>
                       </a:r>
                       <a:endParaRPr lang="en-US" sz="750" dirty="0">
                         <a:latin typeface="Calibri" charset="0"/>
@@ -4668,7 +4629,7 @@
                       <a:tailEnd type="none" w="med" len="med"/>
                     </a:lnB>
                     <a:solidFill>
-                      <a:srgbClr val="FFFFFF"/>
+                      <a:srgbClr val="F9F9F9"/>
                     </a:solidFill>
                   </a:tcPr>
                 </a:tc>
@@ -4689,7 +4650,7 @@
                           <a:ea typeface="Calibri" pitchFamily="34" charset="-122"/>
                           <a:cs typeface="Calibri" pitchFamily="34" charset="-120"/>
                         </a:rPr>
-                        <a:t>1,63%</a:t>
+                        <a:t>1.63%</a:t>
                       </a:r>
                       <a:endParaRPr lang="en-US" sz="750" dirty="0">
                         <a:latin typeface="Calibri" charset="0"/>
@@ -4736,7 +4697,7 @@
                       <a:tailEnd type="none" w="med" len="med"/>
                     </a:lnB>
                     <a:solidFill>
-                      <a:srgbClr val="FFFFFF"/>
+                      <a:srgbClr val="F9F9F9"/>
                     </a:solidFill>
                   </a:tcPr>
                 </a:tc>
@@ -4757,7 +4718,7 @@
                           <a:ea typeface="Calibri" pitchFamily="34" charset="-122"/>
                           <a:cs typeface="Calibri" pitchFamily="34" charset="-120"/>
                         </a:rPr>
-                        <a:t>3,44%</a:t>
+                        <a:t>3.44%</a:t>
                       </a:r>
                       <a:endParaRPr lang="en-US" sz="750" dirty="0">
                         <a:latin typeface="Calibri" charset="0"/>
@@ -4804,7 +4765,7 @@
                       <a:tailEnd type="none" w="med" len="med"/>
                     </a:lnB>
                     <a:solidFill>
-                      <a:srgbClr val="FFFFFF"/>
+                      <a:srgbClr val="F9F9F9"/>
                     </a:solidFill>
                   </a:tcPr>
                 </a:tc>
@@ -4872,7 +4833,7 @@
                       <a:tailEnd type="none" w="med" len="med"/>
                     </a:lnB>
                     <a:solidFill>
-                      <a:srgbClr val="FFFFFF"/>
+                      <a:srgbClr val="F9F9F9"/>
                     </a:solidFill>
                   </a:tcPr>
                 </a:tc>
@@ -4893,7 +4854,7 @@
                           <a:ea typeface="Calibri" pitchFamily="34" charset="-122"/>
                           <a:cs typeface="Calibri" pitchFamily="34" charset="-120"/>
                         </a:rPr>
-                        <a:t>4,88%</a:t>
+                        <a:t>4.88%</a:t>
                       </a:r>
                       <a:endParaRPr lang="en-US" sz="750" dirty="0">
                         <a:latin typeface="Calibri" charset="0"/>
@@ -4940,7 +4901,7 @@
                       <a:tailEnd type="none" w="med" len="med"/>
                     </a:lnB>
                     <a:solidFill>
-                      <a:srgbClr val="FFFFFF"/>
+                      <a:srgbClr val="F9F9F9"/>
                     </a:solidFill>
                   </a:tcPr>
                 </a:tc>
@@ -5050,7 +5011,7 @@
                 <a:gridCol w="246888"/>
                 <a:gridCol w="283464"/>
               </a:tblGrid>
-              <a:tr h="118872">
+              <a:tr h="123444">
                 <a:tc>
                   <a:txBody>
                     <a:bodyPr/>
@@ -6048,7 +6009,2773 @@
                   </a:tcPr>
                 </a:tc>
               </a:tr>
-              <a:tr h="118872">
+              <a:tr h="123444">
+                <a:tc>
+                  <a:txBody>
+                    <a:bodyPr/>
+                    <a:lstStyle/>
+                    <a:p>
+                      <a:pPr algn="l" indent="0" marL="0">
+                        <a:buNone/>
+                      </a:pPr>
+                      <a:r>
+                        <a:rPr lang="en-US" sz="500" b="1" dirty="0">
+                          <a:solidFill>
+                            <a:srgbClr val="000000"/>
+                          </a:solidFill>
+                          <a:latin typeface="Calibri" pitchFamily="34" charset="0"/>
+                          <a:ea typeface="Calibri" pitchFamily="34" charset="-122"/>
+                          <a:cs typeface="Calibri" pitchFamily="34" charset="-120"/>
+                        </a:rPr>
+                        <a:t>2024</a:t>
+                      </a:r>
+                      <a:endParaRPr lang="en-US" sz="500" dirty="0">
+                        <a:latin typeface="Calibri" charset="0"/>
+                        <a:ea typeface="Calibri" charset="0"/>
+                        <a:cs typeface="Calibri" charset="0"/>
+                      </a:endParaRPr>
+                    </a:p>
+                  </a:txBody>
+                  <a:tcPr marL="91440" marR="91440" marT="45720" marB="45720">
+                    <a:lnL w="2540" cap="flat" cmpd="sng" algn="ctr">
+                      <a:solidFill>
+                        <a:srgbClr val="EEEEEE"/>
+                      </a:solidFill>
+                      <a:prstDash val="solid"/>
+                      <a:round/>
+                      <a:headEnd type="none" w="med" len="med"/>
+                      <a:tailEnd type="none" w="med" len="med"/>
+                    </a:lnL>
+                    <a:lnR w="2540" cap="flat" cmpd="sng" algn="ctr">
+                      <a:solidFill>
+                        <a:srgbClr val="EEEEEE"/>
+                      </a:solidFill>
+                      <a:prstDash val="solid"/>
+                      <a:round/>
+                      <a:headEnd type="none" w="med" len="med"/>
+                      <a:tailEnd type="none" w="med" len="med"/>
+                    </a:lnR>
+                    <a:lnT w="2540" cap="flat" cmpd="sng" algn="ctr">
+                      <a:solidFill>
+                        <a:srgbClr val="EEEEEE"/>
+                      </a:solidFill>
+                      <a:prstDash val="solid"/>
+                      <a:round/>
+                      <a:headEnd type="none" w="med" len="med"/>
+                      <a:tailEnd type="none" w="med" len="med"/>
+                    </a:lnT>
+                    <a:lnB w="2540" cap="flat" cmpd="sng" algn="ctr">
+                      <a:solidFill>
+                        <a:srgbClr val="EEEEEE"/>
+                      </a:solidFill>
+                      <a:prstDash val="solid"/>
+                      <a:round/>
+                      <a:headEnd type="none" w="med" len="med"/>
+                      <a:tailEnd type="none" w="med" len="med"/>
+                    </a:lnB>
+                  </a:tcPr>
+                </a:tc>
+                <a:tc>
+                  <a:txBody>
+                    <a:bodyPr/>
+                    <a:lstStyle/>
+                    <a:p>
+                      <a:pPr algn="l" indent="0" marL="0">
+                        <a:buNone/>
+                      </a:pPr>
+                      <a:r>
+                        <a:rPr lang="en-US" sz="500" dirty="0">
+                          <a:solidFill>
+                            <a:srgbClr val="777777"/>
+                          </a:solidFill>
+                          <a:latin typeface="Calibri" pitchFamily="34" charset="0"/>
+                          <a:ea typeface="Calibri" pitchFamily="34" charset="-122"/>
+                          <a:cs typeface="Calibri" pitchFamily="34" charset="-120"/>
+                        </a:rPr>
+                        <a:t>ICP</a:t>
+                      </a:r>
+                      <a:endParaRPr lang="en-US" sz="500" dirty="0">
+                        <a:latin typeface="Calibri" charset="0"/>
+                        <a:ea typeface="Calibri" charset="0"/>
+                        <a:cs typeface="Calibri" charset="0"/>
+                      </a:endParaRPr>
+                    </a:p>
+                  </a:txBody>
+                  <a:tcPr marL="91440" marR="91440" marT="45720" marB="45720">
+                    <a:lnL w="2540" cap="flat" cmpd="sng" algn="ctr">
+                      <a:solidFill>
+                        <a:srgbClr val="EEEEEE"/>
+                      </a:solidFill>
+                      <a:prstDash val="solid"/>
+                      <a:round/>
+                      <a:headEnd type="none" w="med" len="med"/>
+                      <a:tailEnd type="none" w="med" len="med"/>
+                    </a:lnL>
+                    <a:lnR w="2540" cap="flat" cmpd="sng" algn="ctr">
+                      <a:solidFill>
+                        <a:srgbClr val="EEEEEE"/>
+                      </a:solidFill>
+                      <a:prstDash val="solid"/>
+                      <a:round/>
+                      <a:headEnd type="none" w="med" len="med"/>
+                      <a:tailEnd type="none" w="med" len="med"/>
+                    </a:lnR>
+                    <a:lnT w="2540" cap="flat" cmpd="sng" algn="ctr">
+                      <a:solidFill>
+                        <a:srgbClr val="EEEEEE"/>
+                      </a:solidFill>
+                      <a:prstDash val="solid"/>
+                      <a:round/>
+                      <a:headEnd type="none" w="med" len="med"/>
+                      <a:tailEnd type="none" w="med" len="med"/>
+                    </a:lnT>
+                    <a:lnB w="2540" cap="flat" cmpd="sng" algn="ctr">
+                      <a:solidFill>
+                        <a:srgbClr val="EEEEEE"/>
+                      </a:solidFill>
+                      <a:prstDash val="solid"/>
+                      <a:round/>
+                      <a:headEnd type="none" w="med" len="med"/>
+                      <a:tailEnd type="none" w="med" len="med"/>
+                    </a:lnB>
+                  </a:tcPr>
+                </a:tc>
+                <a:tc>
+                  <a:txBody>
+                    <a:bodyPr/>
+                    <a:lstStyle/>
+                    <a:p>
+                      <a:pPr algn="ctr" indent="0" marL="0">
+                        <a:buNone/>
+                      </a:pPr>
+                      <a:r>
+                        <a:rPr lang="en-US" sz="500" dirty="0">
+                          <a:solidFill>
+                            <a:srgbClr val="777777"/>
+                          </a:solidFill>
+                          <a:latin typeface="Calibri" pitchFamily="34" charset="0"/>
+                          <a:ea typeface="Calibri" pitchFamily="34" charset="-122"/>
+                          <a:cs typeface="Calibri" pitchFamily="34" charset="-120"/>
+                        </a:rPr>
+                        <a:t>0.69%</a:t>
+                      </a:r>
+                      <a:endParaRPr lang="en-US" sz="500" dirty="0">
+                        <a:latin typeface="Calibri" charset="0"/>
+                        <a:ea typeface="Calibri" charset="0"/>
+                        <a:cs typeface="Calibri" charset="0"/>
+                      </a:endParaRPr>
+                    </a:p>
+                  </a:txBody>
+                  <a:tcPr marL="91440" marR="91440" marT="45720" marB="45720">
+                    <a:lnL w="2540" cap="flat" cmpd="sng" algn="ctr">
+                      <a:solidFill>
+                        <a:srgbClr val="EEEEEE"/>
+                      </a:solidFill>
+                      <a:prstDash val="solid"/>
+                      <a:round/>
+                      <a:headEnd type="none" w="med" len="med"/>
+                      <a:tailEnd type="none" w="med" len="med"/>
+                    </a:lnL>
+                    <a:lnR w="2540" cap="flat" cmpd="sng" algn="ctr">
+                      <a:solidFill>
+                        <a:srgbClr val="EEEEEE"/>
+                      </a:solidFill>
+                      <a:prstDash val="solid"/>
+                      <a:round/>
+                      <a:headEnd type="none" w="med" len="med"/>
+                      <a:tailEnd type="none" w="med" len="med"/>
+                    </a:lnR>
+                    <a:lnT w="2540" cap="flat" cmpd="sng" algn="ctr">
+                      <a:solidFill>
+                        <a:srgbClr val="EEEEEE"/>
+                      </a:solidFill>
+                      <a:prstDash val="solid"/>
+                      <a:round/>
+                      <a:headEnd type="none" w="med" len="med"/>
+                      <a:tailEnd type="none" w="med" len="med"/>
+                    </a:lnT>
+                    <a:lnB w="2540" cap="flat" cmpd="sng" algn="ctr">
+                      <a:solidFill>
+                        <a:srgbClr val="EEEEEE"/>
+                      </a:solidFill>
+                      <a:prstDash val="solid"/>
+                      <a:round/>
+                      <a:headEnd type="none" w="med" len="med"/>
+                      <a:tailEnd type="none" w="med" len="med"/>
+                    </a:lnB>
+                  </a:tcPr>
+                </a:tc>
+                <a:tc>
+                  <a:txBody>
+                    <a:bodyPr/>
+                    <a:lstStyle/>
+                    <a:p>
+                      <a:pPr algn="ctr" indent="0" marL="0">
+                        <a:buNone/>
+                      </a:pPr>
+                      <a:r>
+                        <a:rPr lang="en-US" sz="500" dirty="0">
+                          <a:solidFill>
+                            <a:srgbClr val="777777"/>
+                          </a:solidFill>
+                          <a:latin typeface="Calibri" pitchFamily="34" charset="0"/>
+                          <a:ea typeface="Calibri" pitchFamily="34" charset="-122"/>
+                          <a:cs typeface="Calibri" pitchFamily="34" charset="-120"/>
+                        </a:rPr>
+                        <a:t>0.60%</a:t>
+                      </a:r>
+                      <a:endParaRPr lang="en-US" sz="500" dirty="0">
+                        <a:latin typeface="Calibri" charset="0"/>
+                        <a:ea typeface="Calibri" charset="0"/>
+                        <a:cs typeface="Calibri" charset="0"/>
+                      </a:endParaRPr>
+                    </a:p>
+                  </a:txBody>
+                  <a:tcPr marL="91440" marR="91440" marT="45720" marB="45720">
+                    <a:lnL w="2540" cap="flat" cmpd="sng" algn="ctr">
+                      <a:solidFill>
+                        <a:srgbClr val="EEEEEE"/>
+                      </a:solidFill>
+                      <a:prstDash val="solid"/>
+                      <a:round/>
+                      <a:headEnd type="none" w="med" len="med"/>
+                      <a:tailEnd type="none" w="med" len="med"/>
+                    </a:lnL>
+                    <a:lnR w="2540" cap="flat" cmpd="sng" algn="ctr">
+                      <a:solidFill>
+                        <a:srgbClr val="EEEEEE"/>
+                      </a:solidFill>
+                      <a:prstDash val="solid"/>
+                      <a:round/>
+                      <a:headEnd type="none" w="med" len="med"/>
+                      <a:tailEnd type="none" w="med" len="med"/>
+                    </a:lnR>
+                    <a:lnT w="2540" cap="flat" cmpd="sng" algn="ctr">
+                      <a:solidFill>
+                        <a:srgbClr val="EEEEEE"/>
+                      </a:solidFill>
+                      <a:prstDash val="solid"/>
+                      <a:round/>
+                      <a:headEnd type="none" w="med" len="med"/>
+                      <a:tailEnd type="none" w="med" len="med"/>
+                    </a:lnT>
+                    <a:lnB w="2540" cap="flat" cmpd="sng" algn="ctr">
+                      <a:solidFill>
+                        <a:srgbClr val="EEEEEE"/>
+                      </a:solidFill>
+                      <a:prstDash val="solid"/>
+                      <a:round/>
+                      <a:headEnd type="none" w="med" len="med"/>
+                      <a:tailEnd type="none" w="med" len="med"/>
+                    </a:lnB>
+                  </a:tcPr>
+                </a:tc>
+                <a:tc>
+                  <a:txBody>
+                    <a:bodyPr/>
+                    <a:lstStyle/>
+                    <a:p>
+                      <a:pPr algn="ctr" indent="0" marL="0">
+                        <a:buNone/>
+                      </a:pPr>
+                      <a:r>
+                        <a:rPr lang="en-US" sz="500" dirty="0">
+                          <a:solidFill>
+                            <a:srgbClr val="777777"/>
+                          </a:solidFill>
+                          <a:latin typeface="Calibri" pitchFamily="34" charset="0"/>
+                          <a:ea typeface="Calibri" pitchFamily="34" charset="-122"/>
+                          <a:cs typeface="Calibri" pitchFamily="34" charset="-120"/>
+                        </a:rPr>
+                        <a:t>0.60%</a:t>
+                      </a:r>
+                      <a:endParaRPr lang="en-US" sz="500" dirty="0">
+                        <a:latin typeface="Calibri" charset="0"/>
+                        <a:ea typeface="Calibri" charset="0"/>
+                        <a:cs typeface="Calibri" charset="0"/>
+                      </a:endParaRPr>
+                    </a:p>
+                  </a:txBody>
+                  <a:tcPr marL="91440" marR="91440" marT="45720" marB="45720">
+                    <a:lnL w="2540" cap="flat" cmpd="sng" algn="ctr">
+                      <a:solidFill>
+                        <a:srgbClr val="EEEEEE"/>
+                      </a:solidFill>
+                      <a:prstDash val="solid"/>
+                      <a:round/>
+                      <a:headEnd type="none" w="med" len="med"/>
+                      <a:tailEnd type="none" w="med" len="med"/>
+                    </a:lnL>
+                    <a:lnR w="2540" cap="flat" cmpd="sng" algn="ctr">
+                      <a:solidFill>
+                        <a:srgbClr val="EEEEEE"/>
+                      </a:solidFill>
+                      <a:prstDash val="solid"/>
+                      <a:round/>
+                      <a:headEnd type="none" w="med" len="med"/>
+                      <a:tailEnd type="none" w="med" len="med"/>
+                    </a:lnR>
+                    <a:lnT w="2540" cap="flat" cmpd="sng" algn="ctr">
+                      <a:solidFill>
+                        <a:srgbClr val="EEEEEE"/>
+                      </a:solidFill>
+                      <a:prstDash val="solid"/>
+                      <a:round/>
+                      <a:headEnd type="none" w="med" len="med"/>
+                      <a:tailEnd type="none" w="med" len="med"/>
+                    </a:lnT>
+                    <a:lnB w="2540" cap="flat" cmpd="sng" algn="ctr">
+                      <a:solidFill>
+                        <a:srgbClr val="EEEEEE"/>
+                      </a:solidFill>
+                      <a:prstDash val="solid"/>
+                      <a:round/>
+                      <a:headEnd type="none" w="med" len="med"/>
+                      <a:tailEnd type="none" w="med" len="med"/>
+                    </a:lnB>
+                  </a:tcPr>
+                </a:tc>
+                <a:tc>
+                  <a:txBody>
+                    <a:bodyPr/>
+                    <a:lstStyle/>
+                    <a:p>
+                      <a:pPr algn="ctr" indent="0" marL="0">
+                        <a:buNone/>
+                      </a:pPr>
+                      <a:r>
+                        <a:rPr lang="en-US" sz="500" dirty="0">
+                          <a:solidFill>
+                            <a:srgbClr val="777777"/>
+                          </a:solidFill>
+                          <a:latin typeface="Calibri" pitchFamily="34" charset="0"/>
+                          <a:ea typeface="Calibri" pitchFamily="34" charset="-122"/>
+                          <a:cs typeface="Calibri" pitchFamily="34" charset="-120"/>
+                        </a:rPr>
+                        <a:t>0.55%</a:t>
+                      </a:r>
+                      <a:endParaRPr lang="en-US" sz="500" dirty="0">
+                        <a:latin typeface="Calibri" charset="0"/>
+                        <a:ea typeface="Calibri" charset="0"/>
+                        <a:cs typeface="Calibri" charset="0"/>
+                      </a:endParaRPr>
+                    </a:p>
+                  </a:txBody>
+                  <a:tcPr marL="91440" marR="91440" marT="45720" marB="45720">
+                    <a:lnL w="2540" cap="flat" cmpd="sng" algn="ctr">
+                      <a:solidFill>
+                        <a:srgbClr val="EEEEEE"/>
+                      </a:solidFill>
+                      <a:prstDash val="solid"/>
+                      <a:round/>
+                      <a:headEnd type="none" w="med" len="med"/>
+                      <a:tailEnd type="none" w="med" len="med"/>
+                    </a:lnL>
+                    <a:lnR w="2540" cap="flat" cmpd="sng" algn="ctr">
+                      <a:solidFill>
+                        <a:srgbClr val="EEEEEE"/>
+                      </a:solidFill>
+                      <a:prstDash val="solid"/>
+                      <a:round/>
+                      <a:headEnd type="none" w="med" len="med"/>
+                      <a:tailEnd type="none" w="med" len="med"/>
+                    </a:lnR>
+                    <a:lnT w="2540" cap="flat" cmpd="sng" algn="ctr">
+                      <a:solidFill>
+                        <a:srgbClr val="EEEEEE"/>
+                      </a:solidFill>
+                      <a:prstDash val="solid"/>
+                      <a:round/>
+                      <a:headEnd type="none" w="med" len="med"/>
+                      <a:tailEnd type="none" w="med" len="med"/>
+                    </a:lnT>
+                    <a:lnB w="2540" cap="flat" cmpd="sng" algn="ctr">
+                      <a:solidFill>
+                        <a:srgbClr val="EEEEEE"/>
+                      </a:solidFill>
+                      <a:prstDash val="solid"/>
+                      <a:round/>
+                      <a:headEnd type="none" w="med" len="med"/>
+                      <a:tailEnd type="none" w="med" len="med"/>
+                    </a:lnB>
+                  </a:tcPr>
+                </a:tc>
+                <a:tc>
+                  <a:txBody>
+                    <a:bodyPr/>
+                    <a:lstStyle/>
+                    <a:p>
+                      <a:pPr algn="ctr" indent="0" marL="0">
+                        <a:buNone/>
+                      </a:pPr>
+                      <a:r>
+                        <a:rPr lang="en-US" sz="500" dirty="0">
+                          <a:solidFill>
+                            <a:srgbClr val="777777"/>
+                          </a:solidFill>
+                          <a:latin typeface="Calibri" pitchFamily="34" charset="0"/>
+                          <a:ea typeface="Calibri" pitchFamily="34" charset="-122"/>
+                          <a:cs typeface="Calibri" pitchFamily="34" charset="-120"/>
+                        </a:rPr>
+                        <a:t>0.53%</a:t>
+                      </a:r>
+                      <a:endParaRPr lang="en-US" sz="500" dirty="0">
+                        <a:latin typeface="Calibri" charset="0"/>
+                        <a:ea typeface="Calibri" charset="0"/>
+                        <a:cs typeface="Calibri" charset="0"/>
+                      </a:endParaRPr>
+                    </a:p>
+                  </a:txBody>
+                  <a:tcPr marL="91440" marR="91440" marT="45720" marB="45720">
+                    <a:lnL w="2540" cap="flat" cmpd="sng" algn="ctr">
+                      <a:solidFill>
+                        <a:srgbClr val="EEEEEE"/>
+                      </a:solidFill>
+                      <a:prstDash val="solid"/>
+                      <a:round/>
+                      <a:headEnd type="none" w="med" len="med"/>
+                      <a:tailEnd type="none" w="med" len="med"/>
+                    </a:lnL>
+                    <a:lnR w="2540" cap="flat" cmpd="sng" algn="ctr">
+                      <a:solidFill>
+                        <a:srgbClr val="EEEEEE"/>
+                      </a:solidFill>
+                      <a:prstDash val="solid"/>
+                      <a:round/>
+                      <a:headEnd type="none" w="med" len="med"/>
+                      <a:tailEnd type="none" w="med" len="med"/>
+                    </a:lnR>
+                    <a:lnT w="2540" cap="flat" cmpd="sng" algn="ctr">
+                      <a:solidFill>
+                        <a:srgbClr val="EEEEEE"/>
+                      </a:solidFill>
+                      <a:prstDash val="solid"/>
+                      <a:round/>
+                      <a:headEnd type="none" w="med" len="med"/>
+                      <a:tailEnd type="none" w="med" len="med"/>
+                    </a:lnT>
+                    <a:lnB w="2540" cap="flat" cmpd="sng" algn="ctr">
+                      <a:solidFill>
+                        <a:srgbClr val="EEEEEE"/>
+                      </a:solidFill>
+                      <a:prstDash val="solid"/>
+                      <a:round/>
+                      <a:headEnd type="none" w="med" len="med"/>
+                      <a:tailEnd type="none" w="med" len="med"/>
+                    </a:lnB>
+                  </a:tcPr>
+                </a:tc>
+                <a:tc>
+                  <a:txBody>
+                    <a:bodyPr/>
+                    <a:lstStyle/>
+                    <a:p>
+                      <a:pPr algn="ctr" indent="0" marL="0">
+                        <a:buNone/>
+                      </a:pPr>
+                      <a:r>
+                        <a:rPr lang="en-US" sz="500" dirty="0">
+                          <a:solidFill>
+                            <a:srgbClr val="777777"/>
+                          </a:solidFill>
+                          <a:latin typeface="Calibri" pitchFamily="34" charset="0"/>
+                          <a:ea typeface="Calibri" pitchFamily="34" charset="-122"/>
+                          <a:cs typeface="Calibri" pitchFamily="34" charset="-120"/>
+                        </a:rPr>
+                        <a:t>0.49%</a:t>
+                      </a:r>
+                      <a:endParaRPr lang="en-US" sz="500" dirty="0">
+                        <a:latin typeface="Calibri" charset="0"/>
+                        <a:ea typeface="Calibri" charset="0"/>
+                        <a:cs typeface="Calibri" charset="0"/>
+                      </a:endParaRPr>
+                    </a:p>
+                  </a:txBody>
+                  <a:tcPr marL="91440" marR="91440" marT="45720" marB="45720">
+                    <a:lnL w="2540" cap="flat" cmpd="sng" algn="ctr">
+                      <a:solidFill>
+                        <a:srgbClr val="EEEEEE"/>
+                      </a:solidFill>
+                      <a:prstDash val="solid"/>
+                      <a:round/>
+                      <a:headEnd type="none" w="med" len="med"/>
+                      <a:tailEnd type="none" w="med" len="med"/>
+                    </a:lnL>
+                    <a:lnR w="2540" cap="flat" cmpd="sng" algn="ctr">
+                      <a:solidFill>
+                        <a:srgbClr val="EEEEEE"/>
+                      </a:solidFill>
+                      <a:prstDash val="solid"/>
+                      <a:round/>
+                      <a:headEnd type="none" w="med" len="med"/>
+                      <a:tailEnd type="none" w="med" len="med"/>
+                    </a:lnR>
+                    <a:lnT w="2540" cap="flat" cmpd="sng" algn="ctr">
+                      <a:solidFill>
+                        <a:srgbClr val="EEEEEE"/>
+                      </a:solidFill>
+                      <a:prstDash val="solid"/>
+                      <a:round/>
+                      <a:headEnd type="none" w="med" len="med"/>
+                      <a:tailEnd type="none" w="med" len="med"/>
+                    </a:lnT>
+                    <a:lnB w="2540" cap="flat" cmpd="sng" algn="ctr">
+                      <a:solidFill>
+                        <a:srgbClr val="EEEEEE"/>
+                      </a:solidFill>
+                      <a:prstDash val="solid"/>
+                      <a:round/>
+                      <a:headEnd type="none" w="med" len="med"/>
+                      <a:tailEnd type="none" w="med" len="med"/>
+                    </a:lnB>
+                  </a:tcPr>
+                </a:tc>
+                <a:tc>
+                  <a:txBody>
+                    <a:bodyPr/>
+                    <a:lstStyle/>
+                    <a:p>
+                      <a:pPr algn="ctr" indent="0" marL="0">
+                        <a:buNone/>
+                      </a:pPr>
+                      <a:r>
+                        <a:rPr lang="en-US" sz="500" dirty="0">
+                          <a:solidFill>
+                            <a:srgbClr val="777777"/>
+                          </a:solidFill>
+                          <a:latin typeface="Calibri" pitchFamily="34" charset="0"/>
+                          <a:ea typeface="Calibri" pitchFamily="34" charset="-122"/>
+                          <a:cs typeface="Calibri" pitchFamily="34" charset="-120"/>
+                        </a:rPr>
+                        <a:t>0.48%</a:t>
+                      </a:r>
+                      <a:endParaRPr lang="en-US" sz="500" dirty="0">
+                        <a:latin typeface="Calibri" charset="0"/>
+                        <a:ea typeface="Calibri" charset="0"/>
+                        <a:cs typeface="Calibri" charset="0"/>
+                      </a:endParaRPr>
+                    </a:p>
+                  </a:txBody>
+                  <a:tcPr marL="91440" marR="91440" marT="45720" marB="45720">
+                    <a:lnL w="2540" cap="flat" cmpd="sng" algn="ctr">
+                      <a:solidFill>
+                        <a:srgbClr val="EEEEEE"/>
+                      </a:solidFill>
+                      <a:prstDash val="solid"/>
+                      <a:round/>
+                      <a:headEnd type="none" w="med" len="med"/>
+                      <a:tailEnd type="none" w="med" len="med"/>
+                    </a:lnL>
+                    <a:lnR w="2540" cap="flat" cmpd="sng" algn="ctr">
+                      <a:solidFill>
+                        <a:srgbClr val="EEEEEE"/>
+                      </a:solidFill>
+                      <a:prstDash val="solid"/>
+                      <a:round/>
+                      <a:headEnd type="none" w="med" len="med"/>
+                      <a:tailEnd type="none" w="med" len="med"/>
+                    </a:lnR>
+                    <a:lnT w="2540" cap="flat" cmpd="sng" algn="ctr">
+                      <a:solidFill>
+                        <a:srgbClr val="EEEEEE"/>
+                      </a:solidFill>
+                      <a:prstDash val="solid"/>
+                      <a:round/>
+                      <a:headEnd type="none" w="med" len="med"/>
+                      <a:tailEnd type="none" w="med" len="med"/>
+                    </a:lnT>
+                    <a:lnB w="2540" cap="flat" cmpd="sng" algn="ctr">
+                      <a:solidFill>
+                        <a:srgbClr val="EEEEEE"/>
+                      </a:solidFill>
+                      <a:prstDash val="solid"/>
+                      <a:round/>
+                      <a:headEnd type="none" w="med" len="med"/>
+                      <a:tailEnd type="none" w="med" len="med"/>
+                    </a:lnB>
+                  </a:tcPr>
+                </a:tc>
+                <a:tc>
+                  <a:txBody>
+                    <a:bodyPr/>
+                    <a:lstStyle/>
+                    <a:p>
+                      <a:pPr algn="ctr" indent="0" marL="0">
+                        <a:buNone/>
+                      </a:pPr>
+                      <a:r>
+                        <a:rPr lang="en-US" sz="500" dirty="0">
+                          <a:solidFill>
+                            <a:srgbClr val="777777"/>
+                          </a:solidFill>
+                          <a:latin typeface="Calibri" pitchFamily="34" charset="0"/>
+                          <a:ea typeface="Calibri" pitchFamily="34" charset="-122"/>
+                          <a:cs typeface="Calibri" pitchFamily="34" charset="-120"/>
+                        </a:rPr>
+                        <a:t>0.48%</a:t>
+                      </a:r>
+                      <a:endParaRPr lang="en-US" sz="500" dirty="0">
+                        <a:latin typeface="Calibri" charset="0"/>
+                        <a:ea typeface="Calibri" charset="0"/>
+                        <a:cs typeface="Calibri" charset="0"/>
+                      </a:endParaRPr>
+                    </a:p>
+                  </a:txBody>
+                  <a:tcPr marL="91440" marR="91440" marT="45720" marB="45720">
+                    <a:lnL w="2540" cap="flat" cmpd="sng" algn="ctr">
+                      <a:solidFill>
+                        <a:srgbClr val="EEEEEE"/>
+                      </a:solidFill>
+                      <a:prstDash val="solid"/>
+                      <a:round/>
+                      <a:headEnd type="none" w="med" len="med"/>
+                      <a:tailEnd type="none" w="med" len="med"/>
+                    </a:lnL>
+                    <a:lnR w="2540" cap="flat" cmpd="sng" algn="ctr">
+                      <a:solidFill>
+                        <a:srgbClr val="EEEEEE"/>
+                      </a:solidFill>
+                      <a:prstDash val="solid"/>
+                      <a:round/>
+                      <a:headEnd type="none" w="med" len="med"/>
+                      <a:tailEnd type="none" w="med" len="med"/>
+                    </a:lnR>
+                    <a:lnT w="2540" cap="flat" cmpd="sng" algn="ctr">
+                      <a:solidFill>
+                        <a:srgbClr val="EEEEEE"/>
+                      </a:solidFill>
+                      <a:prstDash val="solid"/>
+                      <a:round/>
+                      <a:headEnd type="none" w="med" len="med"/>
+                      <a:tailEnd type="none" w="med" len="med"/>
+                    </a:lnT>
+                    <a:lnB w="2540" cap="flat" cmpd="sng" algn="ctr">
+                      <a:solidFill>
+                        <a:srgbClr val="EEEEEE"/>
+                      </a:solidFill>
+                      <a:prstDash val="solid"/>
+                      <a:round/>
+                      <a:headEnd type="none" w="med" len="med"/>
+                      <a:tailEnd type="none" w="med" len="med"/>
+                    </a:lnB>
+                  </a:tcPr>
+                </a:tc>
+                <a:tc>
+                  <a:txBody>
+                    <a:bodyPr/>
+                    <a:lstStyle/>
+                    <a:p>
+                      <a:pPr algn="ctr" indent="0" marL="0">
+                        <a:buNone/>
+                      </a:pPr>
+                      <a:r>
+                        <a:rPr lang="en-US" sz="500" dirty="0">
+                          <a:solidFill>
+                            <a:srgbClr val="777777"/>
+                          </a:solidFill>
+                          <a:latin typeface="Calibri" pitchFamily="34" charset="0"/>
+                          <a:ea typeface="Calibri" pitchFamily="34" charset="-122"/>
+                          <a:cs typeface="Calibri" pitchFamily="34" charset="-120"/>
+                        </a:rPr>
+                        <a:t>0.46%</a:t>
+                      </a:r>
+                      <a:endParaRPr lang="en-US" sz="500" dirty="0">
+                        <a:latin typeface="Calibri" charset="0"/>
+                        <a:ea typeface="Calibri" charset="0"/>
+                        <a:cs typeface="Calibri" charset="0"/>
+                      </a:endParaRPr>
+                    </a:p>
+                  </a:txBody>
+                  <a:tcPr marL="91440" marR="91440" marT="45720" marB="45720">
+                    <a:lnL w="2540" cap="flat" cmpd="sng" algn="ctr">
+                      <a:solidFill>
+                        <a:srgbClr val="EEEEEE"/>
+                      </a:solidFill>
+                      <a:prstDash val="solid"/>
+                      <a:round/>
+                      <a:headEnd type="none" w="med" len="med"/>
+                      <a:tailEnd type="none" w="med" len="med"/>
+                    </a:lnL>
+                    <a:lnR w="2540" cap="flat" cmpd="sng" algn="ctr">
+                      <a:solidFill>
+                        <a:srgbClr val="EEEEEE"/>
+                      </a:solidFill>
+                      <a:prstDash val="solid"/>
+                      <a:round/>
+                      <a:headEnd type="none" w="med" len="med"/>
+                      <a:tailEnd type="none" w="med" len="med"/>
+                    </a:lnR>
+                    <a:lnT w="2540" cap="flat" cmpd="sng" algn="ctr">
+                      <a:solidFill>
+                        <a:srgbClr val="EEEEEE"/>
+                      </a:solidFill>
+                      <a:prstDash val="solid"/>
+                      <a:round/>
+                      <a:headEnd type="none" w="med" len="med"/>
+                      <a:tailEnd type="none" w="med" len="med"/>
+                    </a:lnT>
+                    <a:lnB w="2540" cap="flat" cmpd="sng" algn="ctr">
+                      <a:solidFill>
+                        <a:srgbClr val="EEEEEE"/>
+                      </a:solidFill>
+                      <a:prstDash val="solid"/>
+                      <a:round/>
+                      <a:headEnd type="none" w="med" len="med"/>
+                      <a:tailEnd type="none" w="med" len="med"/>
+                    </a:lnB>
+                  </a:tcPr>
+                </a:tc>
+                <a:tc>
+                  <a:txBody>
+                    <a:bodyPr/>
+                    <a:lstStyle/>
+                    <a:p>
+                      <a:pPr algn="ctr" indent="0" marL="0">
+                        <a:buNone/>
+                      </a:pPr>
+                      <a:r>
+                        <a:rPr lang="en-US" sz="500" dirty="0">
+                          <a:solidFill>
+                            <a:srgbClr val="777777"/>
+                          </a:solidFill>
+                          <a:latin typeface="Calibri" pitchFamily="34" charset="0"/>
+                          <a:ea typeface="Calibri" pitchFamily="34" charset="-122"/>
+                          <a:cs typeface="Calibri" pitchFamily="34" charset="-120"/>
+                        </a:rPr>
+                        <a:t>0.45%</a:t>
+                      </a:r>
+                      <a:endParaRPr lang="en-US" sz="500" dirty="0">
+                        <a:latin typeface="Calibri" charset="0"/>
+                        <a:ea typeface="Calibri" charset="0"/>
+                        <a:cs typeface="Calibri" charset="0"/>
+                      </a:endParaRPr>
+                    </a:p>
+                  </a:txBody>
+                  <a:tcPr marL="91440" marR="91440" marT="45720" marB="45720">
+                    <a:lnL w="2540" cap="flat" cmpd="sng" algn="ctr">
+                      <a:solidFill>
+                        <a:srgbClr val="EEEEEE"/>
+                      </a:solidFill>
+                      <a:prstDash val="solid"/>
+                      <a:round/>
+                      <a:headEnd type="none" w="med" len="med"/>
+                      <a:tailEnd type="none" w="med" len="med"/>
+                    </a:lnL>
+                    <a:lnR w="2540" cap="flat" cmpd="sng" algn="ctr">
+                      <a:solidFill>
+                        <a:srgbClr val="EEEEEE"/>
+                      </a:solidFill>
+                      <a:prstDash val="solid"/>
+                      <a:round/>
+                      <a:headEnd type="none" w="med" len="med"/>
+                      <a:tailEnd type="none" w="med" len="med"/>
+                    </a:lnR>
+                    <a:lnT w="2540" cap="flat" cmpd="sng" algn="ctr">
+                      <a:solidFill>
+                        <a:srgbClr val="EEEEEE"/>
+                      </a:solidFill>
+                      <a:prstDash val="solid"/>
+                      <a:round/>
+                      <a:headEnd type="none" w="med" len="med"/>
+                      <a:tailEnd type="none" w="med" len="med"/>
+                    </a:lnT>
+                    <a:lnB w="2540" cap="flat" cmpd="sng" algn="ctr">
+                      <a:solidFill>
+                        <a:srgbClr val="EEEEEE"/>
+                      </a:solidFill>
+                      <a:prstDash val="solid"/>
+                      <a:round/>
+                      <a:headEnd type="none" w="med" len="med"/>
+                      <a:tailEnd type="none" w="med" len="med"/>
+                    </a:lnB>
+                  </a:tcPr>
+                </a:tc>
+                <a:tc>
+                  <a:txBody>
+                    <a:bodyPr/>
+                    <a:lstStyle/>
+                    <a:p>
+                      <a:pPr algn="ctr" indent="0" marL="0">
+                        <a:buNone/>
+                      </a:pPr>
+                      <a:r>
+                        <a:rPr lang="en-US" sz="500" dirty="0">
+                          <a:solidFill>
+                            <a:srgbClr val="777777"/>
+                          </a:solidFill>
+                          <a:latin typeface="Calibri" pitchFamily="34" charset="0"/>
+                          <a:ea typeface="Calibri" pitchFamily="34" charset="-122"/>
+                          <a:cs typeface="Calibri" pitchFamily="34" charset="-120"/>
+                        </a:rPr>
+                        <a:t>0.44%</a:t>
+                      </a:r>
+                      <a:endParaRPr lang="en-US" sz="500" dirty="0">
+                        <a:latin typeface="Calibri" charset="0"/>
+                        <a:ea typeface="Calibri" charset="0"/>
+                        <a:cs typeface="Calibri" charset="0"/>
+                      </a:endParaRPr>
+                    </a:p>
+                  </a:txBody>
+                  <a:tcPr marL="91440" marR="91440" marT="45720" marB="45720">
+                    <a:lnL w="2540" cap="flat" cmpd="sng" algn="ctr">
+                      <a:solidFill>
+                        <a:srgbClr val="EEEEEE"/>
+                      </a:solidFill>
+                      <a:prstDash val="solid"/>
+                      <a:round/>
+                      <a:headEnd type="none" w="med" len="med"/>
+                      <a:tailEnd type="none" w="med" len="med"/>
+                    </a:lnL>
+                    <a:lnR w="2540" cap="flat" cmpd="sng" algn="ctr">
+                      <a:solidFill>
+                        <a:srgbClr val="EEEEEE"/>
+                      </a:solidFill>
+                      <a:prstDash val="solid"/>
+                      <a:round/>
+                      <a:headEnd type="none" w="med" len="med"/>
+                      <a:tailEnd type="none" w="med" len="med"/>
+                    </a:lnR>
+                    <a:lnT w="2540" cap="flat" cmpd="sng" algn="ctr">
+                      <a:solidFill>
+                        <a:srgbClr val="EEEEEE"/>
+                      </a:solidFill>
+                      <a:prstDash val="solid"/>
+                      <a:round/>
+                      <a:headEnd type="none" w="med" len="med"/>
+                      <a:tailEnd type="none" w="med" len="med"/>
+                    </a:lnT>
+                    <a:lnB w="2540" cap="flat" cmpd="sng" algn="ctr">
+                      <a:solidFill>
+                        <a:srgbClr val="EEEEEE"/>
+                      </a:solidFill>
+                      <a:prstDash val="solid"/>
+                      <a:round/>
+                      <a:headEnd type="none" w="med" len="med"/>
+                      <a:tailEnd type="none" w="med" len="med"/>
+                    </a:lnB>
+                  </a:tcPr>
+                </a:tc>
+                <a:tc>
+                  <a:txBody>
+                    <a:bodyPr/>
+                    <a:lstStyle/>
+                    <a:p>
+                      <a:pPr algn="ctr" indent="0" marL="0">
+                        <a:buNone/>
+                      </a:pPr>
+                      <a:r>
+                        <a:rPr lang="en-US" sz="500" dirty="0">
+                          <a:solidFill>
+                            <a:srgbClr val="777777"/>
+                          </a:solidFill>
+                          <a:latin typeface="Calibri" pitchFamily="34" charset="0"/>
+                          <a:ea typeface="Calibri" pitchFamily="34" charset="-122"/>
+                          <a:cs typeface="Calibri" pitchFamily="34" charset="-120"/>
+                        </a:rPr>
+                        <a:t>0.43%</a:t>
+                      </a:r>
+                      <a:endParaRPr lang="en-US" sz="500" dirty="0">
+                        <a:latin typeface="Calibri" charset="0"/>
+                        <a:ea typeface="Calibri" charset="0"/>
+                        <a:cs typeface="Calibri" charset="0"/>
+                      </a:endParaRPr>
+                    </a:p>
+                  </a:txBody>
+                  <a:tcPr marL="91440" marR="91440" marT="45720" marB="45720">
+                    <a:lnL w="2540" cap="flat" cmpd="sng" algn="ctr">
+                      <a:solidFill>
+                        <a:srgbClr val="EEEEEE"/>
+                      </a:solidFill>
+                      <a:prstDash val="solid"/>
+                      <a:round/>
+                      <a:headEnd type="none" w="med" len="med"/>
+                      <a:tailEnd type="none" w="med" len="med"/>
+                    </a:lnL>
+                    <a:lnR w="2540" cap="flat" cmpd="sng" algn="ctr">
+                      <a:solidFill>
+                        <a:srgbClr val="EEEEEE"/>
+                      </a:solidFill>
+                      <a:prstDash val="solid"/>
+                      <a:round/>
+                      <a:headEnd type="none" w="med" len="med"/>
+                      <a:tailEnd type="none" w="med" len="med"/>
+                    </a:lnR>
+                    <a:lnT w="2540" cap="flat" cmpd="sng" algn="ctr">
+                      <a:solidFill>
+                        <a:srgbClr val="EEEEEE"/>
+                      </a:solidFill>
+                      <a:prstDash val="solid"/>
+                      <a:round/>
+                      <a:headEnd type="none" w="med" len="med"/>
+                      <a:tailEnd type="none" w="med" len="med"/>
+                    </a:lnT>
+                    <a:lnB w="2540" cap="flat" cmpd="sng" algn="ctr">
+                      <a:solidFill>
+                        <a:srgbClr val="EEEEEE"/>
+                      </a:solidFill>
+                      <a:prstDash val="solid"/>
+                      <a:round/>
+                      <a:headEnd type="none" w="med" len="med"/>
+                      <a:tailEnd type="none" w="med" len="med"/>
+                    </a:lnB>
+                  </a:tcPr>
+                </a:tc>
+                <a:tc>
+                  <a:txBody>
+                    <a:bodyPr/>
+                    <a:lstStyle/>
+                    <a:p>
+                      <a:pPr algn="ctr" indent="0" marL="0">
+                        <a:buNone/>
+                      </a:pPr>
+                      <a:r>
+                        <a:rPr lang="en-US" sz="500" b="1" dirty="0">
+                          <a:solidFill>
+                            <a:srgbClr val="777777"/>
+                          </a:solidFill>
+                          <a:latin typeface="Calibri" pitchFamily="34" charset="0"/>
+                          <a:ea typeface="Calibri" pitchFamily="34" charset="-122"/>
+                          <a:cs typeface="Calibri" pitchFamily="34" charset="-120"/>
+                        </a:rPr>
+                        <a:t>6.38%</a:t>
+                      </a:r>
+                      <a:endParaRPr lang="en-US" sz="500" dirty="0">
+                        <a:latin typeface="Calibri" charset="0"/>
+                        <a:ea typeface="Calibri" charset="0"/>
+                        <a:cs typeface="Calibri" charset="0"/>
+                      </a:endParaRPr>
+                    </a:p>
+                  </a:txBody>
+                  <a:tcPr marL="91440" marR="91440" marT="45720" marB="45720">
+                    <a:lnL w="2540" cap="flat" cmpd="sng" algn="ctr">
+                      <a:solidFill>
+                        <a:srgbClr val="EEEEEE"/>
+                      </a:solidFill>
+                      <a:prstDash val="solid"/>
+                      <a:round/>
+                      <a:headEnd type="none" w="med" len="med"/>
+                      <a:tailEnd type="none" w="med" len="med"/>
+                    </a:lnL>
+                    <a:lnR w="2540" cap="flat" cmpd="sng" algn="ctr">
+                      <a:solidFill>
+                        <a:srgbClr val="EEEEEE"/>
+                      </a:solidFill>
+                      <a:prstDash val="solid"/>
+                      <a:round/>
+                      <a:headEnd type="none" w="med" len="med"/>
+                      <a:tailEnd type="none" w="med" len="med"/>
+                    </a:lnR>
+                    <a:lnT w="2540" cap="flat" cmpd="sng" algn="ctr">
+                      <a:solidFill>
+                        <a:srgbClr val="EEEEEE"/>
+                      </a:solidFill>
+                      <a:prstDash val="solid"/>
+                      <a:round/>
+                      <a:headEnd type="none" w="med" len="med"/>
+                      <a:tailEnd type="none" w="med" len="med"/>
+                    </a:lnT>
+                    <a:lnB w="2540" cap="flat" cmpd="sng" algn="ctr">
+                      <a:solidFill>
+                        <a:srgbClr val="EEEEEE"/>
+                      </a:solidFill>
+                      <a:prstDash val="solid"/>
+                      <a:round/>
+                      <a:headEnd type="none" w="med" len="med"/>
+                      <a:tailEnd type="none" w="med" len="med"/>
+                    </a:lnB>
+                  </a:tcPr>
+                </a:tc>
+              </a:tr>
+              <a:tr h="123444">
+                <a:tc>
+                  <a:txBody>
+                    <a:bodyPr/>
+                    <a:lstStyle/>
+                    <a:p>
+                      <a:pPr algn="l" indent="0" marL="0">
+                        <a:buNone/>
+                      </a:pPr>
+                      <a:endParaRPr lang="en-US" sz="500" dirty="0">
+                        <a:latin typeface="Calibri" charset="0"/>
+                        <a:ea typeface="Calibri" charset="0"/>
+                        <a:cs typeface="Calibri" charset="0"/>
+                      </a:endParaRPr>
+                    </a:p>
+                  </a:txBody>
+                  <a:tcPr marL="91440" marR="91440" marT="45720" marB="45720">
+                    <a:lnL w="2540" cap="flat" cmpd="sng" algn="ctr">
+                      <a:solidFill>
+                        <a:srgbClr val="EEEEEE"/>
+                      </a:solidFill>
+                      <a:prstDash val="solid"/>
+                      <a:round/>
+                      <a:headEnd type="none" w="med" len="med"/>
+                      <a:tailEnd type="none" w="med" len="med"/>
+                    </a:lnL>
+                    <a:lnR w="2540" cap="flat" cmpd="sng" algn="ctr">
+                      <a:solidFill>
+                        <a:srgbClr val="EEEEEE"/>
+                      </a:solidFill>
+                      <a:prstDash val="solid"/>
+                      <a:round/>
+                      <a:headEnd type="none" w="med" len="med"/>
+                      <a:tailEnd type="none" w="med" len="med"/>
+                    </a:lnR>
+                    <a:lnT w="2540" cap="flat" cmpd="sng" algn="ctr">
+                      <a:solidFill>
+                        <a:srgbClr val="EEEEEE"/>
+                      </a:solidFill>
+                      <a:prstDash val="solid"/>
+                      <a:round/>
+                      <a:headEnd type="none" w="med" len="med"/>
+                      <a:tailEnd type="none" w="med" len="med"/>
+                    </a:lnT>
+                    <a:lnB w="2540" cap="flat" cmpd="sng" algn="ctr">
+                      <a:solidFill>
+                        <a:srgbClr val="EEEEEE"/>
+                      </a:solidFill>
+                      <a:prstDash val="solid"/>
+                      <a:round/>
+                      <a:headEnd type="none" w="med" len="med"/>
+                      <a:tailEnd type="none" w="med" len="med"/>
+                    </a:lnB>
+                  </a:tcPr>
+                </a:tc>
+                <a:tc>
+                  <a:txBody>
+                    <a:bodyPr/>
+                    <a:lstStyle/>
+                    <a:p>
+                      <a:pPr algn="l" indent="0" marL="0">
+                        <a:buNone/>
+                      </a:pPr>
+                      <a:r>
+                        <a:rPr lang="en-US" sz="500" dirty="0">
+                          <a:solidFill>
+                            <a:srgbClr val="999999"/>
+                          </a:solidFill>
+                          <a:latin typeface="Calibri" pitchFamily="34" charset="0"/>
+                          <a:ea typeface="Calibri" pitchFamily="34" charset="-122"/>
+                          <a:cs typeface="Calibri" pitchFamily="34" charset="-120"/>
+                        </a:rPr>
+                        <a:t>Competencia</a:t>
+                      </a:r>
+                      <a:endParaRPr lang="en-US" sz="500" dirty="0">
+                        <a:latin typeface="Calibri" charset="0"/>
+                        <a:ea typeface="Calibri" charset="0"/>
+                        <a:cs typeface="Calibri" charset="0"/>
+                      </a:endParaRPr>
+                    </a:p>
+                  </a:txBody>
+                  <a:tcPr marL="91440" marR="91440" marT="45720" marB="45720">
+                    <a:lnL w="2540" cap="flat" cmpd="sng" algn="ctr">
+                      <a:solidFill>
+                        <a:srgbClr val="EEEEEE"/>
+                      </a:solidFill>
+                      <a:prstDash val="solid"/>
+                      <a:round/>
+                      <a:headEnd type="none" w="med" len="med"/>
+                      <a:tailEnd type="none" w="med" len="med"/>
+                    </a:lnL>
+                    <a:lnR w="2540" cap="flat" cmpd="sng" algn="ctr">
+                      <a:solidFill>
+                        <a:srgbClr val="EEEEEE"/>
+                      </a:solidFill>
+                      <a:prstDash val="solid"/>
+                      <a:round/>
+                      <a:headEnd type="none" w="med" len="med"/>
+                      <a:tailEnd type="none" w="med" len="med"/>
+                    </a:lnR>
+                    <a:lnT w="2540" cap="flat" cmpd="sng" algn="ctr">
+                      <a:solidFill>
+                        <a:srgbClr val="EEEEEE"/>
+                      </a:solidFill>
+                      <a:prstDash val="solid"/>
+                      <a:round/>
+                      <a:headEnd type="none" w="med" len="med"/>
+                      <a:tailEnd type="none" w="med" len="med"/>
+                    </a:lnT>
+                    <a:lnB w="2540" cap="flat" cmpd="sng" algn="ctr">
+                      <a:solidFill>
+                        <a:srgbClr val="EEEEEE"/>
+                      </a:solidFill>
+                      <a:prstDash val="solid"/>
+                      <a:round/>
+                      <a:headEnd type="none" w="med" len="med"/>
+                      <a:tailEnd type="none" w="med" len="med"/>
+                    </a:lnB>
+                  </a:tcPr>
+                </a:tc>
+                <a:tc>
+                  <a:txBody>
+                    <a:bodyPr/>
+                    <a:lstStyle/>
+                    <a:p>
+                      <a:pPr algn="ctr" indent="0" marL="0">
+                        <a:buNone/>
+                      </a:pPr>
+                      <a:r>
+                        <a:rPr lang="en-US" sz="500" dirty="0">
+                          <a:solidFill>
+                            <a:srgbClr val="999999"/>
+                          </a:solidFill>
+                          <a:latin typeface="Calibri" pitchFamily="34" charset="0"/>
+                          <a:ea typeface="Calibri" pitchFamily="34" charset="-122"/>
+                          <a:cs typeface="Calibri" pitchFamily="34" charset="-120"/>
+                        </a:rPr>
+                        <a:t>0.00%</a:t>
+                      </a:r>
+                      <a:endParaRPr lang="en-US" sz="500" dirty="0">
+                        <a:latin typeface="Calibri" charset="0"/>
+                        <a:ea typeface="Calibri" charset="0"/>
+                        <a:cs typeface="Calibri" charset="0"/>
+                      </a:endParaRPr>
+                    </a:p>
+                  </a:txBody>
+                  <a:tcPr marL="91440" marR="91440" marT="45720" marB="45720">
+                    <a:lnL w="2540" cap="flat" cmpd="sng" algn="ctr">
+                      <a:solidFill>
+                        <a:srgbClr val="EEEEEE"/>
+                      </a:solidFill>
+                      <a:prstDash val="solid"/>
+                      <a:round/>
+                      <a:headEnd type="none" w="med" len="med"/>
+                      <a:tailEnd type="none" w="med" len="med"/>
+                    </a:lnL>
+                    <a:lnR w="2540" cap="flat" cmpd="sng" algn="ctr">
+                      <a:solidFill>
+                        <a:srgbClr val="EEEEEE"/>
+                      </a:solidFill>
+                      <a:prstDash val="solid"/>
+                      <a:round/>
+                      <a:headEnd type="none" w="med" len="med"/>
+                      <a:tailEnd type="none" w="med" len="med"/>
+                    </a:lnR>
+                    <a:lnT w="2540" cap="flat" cmpd="sng" algn="ctr">
+                      <a:solidFill>
+                        <a:srgbClr val="EEEEEE"/>
+                      </a:solidFill>
+                      <a:prstDash val="solid"/>
+                      <a:round/>
+                      <a:headEnd type="none" w="med" len="med"/>
+                      <a:tailEnd type="none" w="med" len="med"/>
+                    </a:lnT>
+                    <a:lnB w="2540" cap="flat" cmpd="sng" algn="ctr">
+                      <a:solidFill>
+                        <a:srgbClr val="EEEEEE"/>
+                      </a:solidFill>
+                      <a:prstDash val="solid"/>
+                      <a:round/>
+                      <a:headEnd type="none" w="med" len="med"/>
+                      <a:tailEnd type="none" w="med" len="med"/>
+                    </a:lnB>
+                  </a:tcPr>
+                </a:tc>
+                <a:tc>
+                  <a:txBody>
+                    <a:bodyPr/>
+                    <a:lstStyle/>
+                    <a:p>
+                      <a:pPr algn="ctr" indent="0" marL="0">
+                        <a:buNone/>
+                      </a:pPr>
+                      <a:endParaRPr lang="en-US" sz="500" dirty="0">
+                        <a:latin typeface="Calibri" charset="0"/>
+                        <a:ea typeface="Calibri" charset="0"/>
+                        <a:cs typeface="Calibri" charset="0"/>
+                      </a:endParaRPr>
+                    </a:p>
+                  </a:txBody>
+                  <a:tcPr marL="91440" marR="91440" marT="45720" marB="45720">
+                    <a:lnL w="2540" cap="flat" cmpd="sng" algn="ctr">
+                      <a:solidFill>
+                        <a:srgbClr val="EEEEEE"/>
+                      </a:solidFill>
+                      <a:prstDash val="solid"/>
+                      <a:round/>
+                      <a:headEnd type="none" w="med" len="med"/>
+                      <a:tailEnd type="none" w="med" len="med"/>
+                    </a:lnL>
+                    <a:lnR w="2540" cap="flat" cmpd="sng" algn="ctr">
+                      <a:solidFill>
+                        <a:srgbClr val="EEEEEE"/>
+                      </a:solidFill>
+                      <a:prstDash val="solid"/>
+                      <a:round/>
+                      <a:headEnd type="none" w="med" len="med"/>
+                      <a:tailEnd type="none" w="med" len="med"/>
+                    </a:lnR>
+                    <a:lnT w="2540" cap="flat" cmpd="sng" algn="ctr">
+                      <a:solidFill>
+                        <a:srgbClr val="EEEEEE"/>
+                      </a:solidFill>
+                      <a:prstDash val="solid"/>
+                      <a:round/>
+                      <a:headEnd type="none" w="med" len="med"/>
+                      <a:tailEnd type="none" w="med" len="med"/>
+                    </a:lnT>
+                    <a:lnB w="2540" cap="flat" cmpd="sng" algn="ctr">
+                      <a:solidFill>
+                        <a:srgbClr val="EEEEEE"/>
+                      </a:solidFill>
+                      <a:prstDash val="solid"/>
+                      <a:round/>
+                      <a:headEnd type="none" w="med" len="med"/>
+                      <a:tailEnd type="none" w="med" len="med"/>
+                    </a:lnB>
+                  </a:tcPr>
+                </a:tc>
+                <a:tc>
+                  <a:txBody>
+                    <a:bodyPr/>
+                    <a:lstStyle/>
+                    <a:p>
+                      <a:pPr algn="ctr" indent="0" marL="0">
+                        <a:buNone/>
+                      </a:pPr>
+                      <a:endParaRPr lang="en-US" sz="500" dirty="0">
+                        <a:latin typeface="Calibri" charset="0"/>
+                        <a:ea typeface="Calibri" charset="0"/>
+                        <a:cs typeface="Calibri" charset="0"/>
+                      </a:endParaRPr>
+                    </a:p>
+                  </a:txBody>
+                  <a:tcPr marL="91440" marR="91440" marT="45720" marB="45720">
+                    <a:lnL w="2540" cap="flat" cmpd="sng" algn="ctr">
+                      <a:solidFill>
+                        <a:srgbClr val="EEEEEE"/>
+                      </a:solidFill>
+                      <a:prstDash val="solid"/>
+                      <a:round/>
+                      <a:headEnd type="none" w="med" len="med"/>
+                      <a:tailEnd type="none" w="med" len="med"/>
+                    </a:lnL>
+                    <a:lnR w="2540" cap="flat" cmpd="sng" algn="ctr">
+                      <a:solidFill>
+                        <a:srgbClr val="EEEEEE"/>
+                      </a:solidFill>
+                      <a:prstDash val="solid"/>
+                      <a:round/>
+                      <a:headEnd type="none" w="med" len="med"/>
+                      <a:tailEnd type="none" w="med" len="med"/>
+                    </a:lnR>
+                    <a:lnT w="2540" cap="flat" cmpd="sng" algn="ctr">
+                      <a:solidFill>
+                        <a:srgbClr val="EEEEEE"/>
+                      </a:solidFill>
+                      <a:prstDash val="solid"/>
+                      <a:round/>
+                      <a:headEnd type="none" w="med" len="med"/>
+                      <a:tailEnd type="none" w="med" len="med"/>
+                    </a:lnT>
+                    <a:lnB w="2540" cap="flat" cmpd="sng" algn="ctr">
+                      <a:solidFill>
+                        <a:srgbClr val="EEEEEE"/>
+                      </a:solidFill>
+                      <a:prstDash val="solid"/>
+                      <a:round/>
+                      <a:headEnd type="none" w="med" len="med"/>
+                      <a:tailEnd type="none" w="med" len="med"/>
+                    </a:lnB>
+                  </a:tcPr>
+                </a:tc>
+                <a:tc>
+                  <a:txBody>
+                    <a:bodyPr/>
+                    <a:lstStyle/>
+                    <a:p>
+                      <a:pPr algn="ctr" indent="0" marL="0">
+                        <a:buNone/>
+                      </a:pPr>
+                      <a:endParaRPr lang="en-US" sz="500" dirty="0">
+                        <a:latin typeface="Calibri" charset="0"/>
+                        <a:ea typeface="Calibri" charset="0"/>
+                        <a:cs typeface="Calibri" charset="0"/>
+                      </a:endParaRPr>
+                    </a:p>
+                  </a:txBody>
+                  <a:tcPr marL="91440" marR="91440" marT="45720" marB="45720">
+                    <a:lnL w="2540" cap="flat" cmpd="sng" algn="ctr">
+                      <a:solidFill>
+                        <a:srgbClr val="EEEEEE"/>
+                      </a:solidFill>
+                      <a:prstDash val="solid"/>
+                      <a:round/>
+                      <a:headEnd type="none" w="med" len="med"/>
+                      <a:tailEnd type="none" w="med" len="med"/>
+                    </a:lnL>
+                    <a:lnR w="2540" cap="flat" cmpd="sng" algn="ctr">
+                      <a:solidFill>
+                        <a:srgbClr val="EEEEEE"/>
+                      </a:solidFill>
+                      <a:prstDash val="solid"/>
+                      <a:round/>
+                      <a:headEnd type="none" w="med" len="med"/>
+                      <a:tailEnd type="none" w="med" len="med"/>
+                    </a:lnR>
+                    <a:lnT w="2540" cap="flat" cmpd="sng" algn="ctr">
+                      <a:solidFill>
+                        <a:srgbClr val="EEEEEE"/>
+                      </a:solidFill>
+                      <a:prstDash val="solid"/>
+                      <a:round/>
+                      <a:headEnd type="none" w="med" len="med"/>
+                      <a:tailEnd type="none" w="med" len="med"/>
+                    </a:lnT>
+                    <a:lnB w="2540" cap="flat" cmpd="sng" algn="ctr">
+                      <a:solidFill>
+                        <a:srgbClr val="EEEEEE"/>
+                      </a:solidFill>
+                      <a:prstDash val="solid"/>
+                      <a:round/>
+                      <a:headEnd type="none" w="med" len="med"/>
+                      <a:tailEnd type="none" w="med" len="med"/>
+                    </a:lnB>
+                  </a:tcPr>
+                </a:tc>
+                <a:tc>
+                  <a:txBody>
+                    <a:bodyPr/>
+                    <a:lstStyle/>
+                    <a:p>
+                      <a:pPr algn="ctr" indent="0" marL="0">
+                        <a:buNone/>
+                      </a:pPr>
+                      <a:endParaRPr lang="en-US" sz="500" dirty="0">
+                        <a:latin typeface="Calibri" charset="0"/>
+                        <a:ea typeface="Calibri" charset="0"/>
+                        <a:cs typeface="Calibri" charset="0"/>
+                      </a:endParaRPr>
+                    </a:p>
+                  </a:txBody>
+                  <a:tcPr marL="91440" marR="91440" marT="45720" marB="45720">
+                    <a:lnL w="2540" cap="flat" cmpd="sng" algn="ctr">
+                      <a:solidFill>
+                        <a:srgbClr val="EEEEEE"/>
+                      </a:solidFill>
+                      <a:prstDash val="solid"/>
+                      <a:round/>
+                      <a:headEnd type="none" w="med" len="med"/>
+                      <a:tailEnd type="none" w="med" len="med"/>
+                    </a:lnL>
+                    <a:lnR w="2540" cap="flat" cmpd="sng" algn="ctr">
+                      <a:solidFill>
+                        <a:srgbClr val="EEEEEE"/>
+                      </a:solidFill>
+                      <a:prstDash val="solid"/>
+                      <a:round/>
+                      <a:headEnd type="none" w="med" len="med"/>
+                      <a:tailEnd type="none" w="med" len="med"/>
+                    </a:lnR>
+                    <a:lnT w="2540" cap="flat" cmpd="sng" algn="ctr">
+                      <a:solidFill>
+                        <a:srgbClr val="EEEEEE"/>
+                      </a:solidFill>
+                      <a:prstDash val="solid"/>
+                      <a:round/>
+                      <a:headEnd type="none" w="med" len="med"/>
+                      <a:tailEnd type="none" w="med" len="med"/>
+                    </a:lnT>
+                    <a:lnB w="2540" cap="flat" cmpd="sng" algn="ctr">
+                      <a:solidFill>
+                        <a:srgbClr val="EEEEEE"/>
+                      </a:solidFill>
+                      <a:prstDash val="solid"/>
+                      <a:round/>
+                      <a:headEnd type="none" w="med" len="med"/>
+                      <a:tailEnd type="none" w="med" len="med"/>
+                    </a:lnB>
+                  </a:tcPr>
+                </a:tc>
+                <a:tc>
+                  <a:txBody>
+                    <a:bodyPr/>
+                    <a:lstStyle/>
+                    <a:p>
+                      <a:pPr algn="ctr" indent="0" marL="0">
+                        <a:buNone/>
+                      </a:pPr>
+                      <a:endParaRPr lang="en-US" sz="500" dirty="0">
+                        <a:latin typeface="Calibri" charset="0"/>
+                        <a:ea typeface="Calibri" charset="0"/>
+                        <a:cs typeface="Calibri" charset="0"/>
+                      </a:endParaRPr>
+                    </a:p>
+                  </a:txBody>
+                  <a:tcPr marL="91440" marR="91440" marT="45720" marB="45720">
+                    <a:lnL w="2540" cap="flat" cmpd="sng" algn="ctr">
+                      <a:solidFill>
+                        <a:srgbClr val="EEEEEE"/>
+                      </a:solidFill>
+                      <a:prstDash val="solid"/>
+                      <a:round/>
+                      <a:headEnd type="none" w="med" len="med"/>
+                      <a:tailEnd type="none" w="med" len="med"/>
+                    </a:lnL>
+                    <a:lnR w="2540" cap="flat" cmpd="sng" algn="ctr">
+                      <a:solidFill>
+                        <a:srgbClr val="EEEEEE"/>
+                      </a:solidFill>
+                      <a:prstDash val="solid"/>
+                      <a:round/>
+                      <a:headEnd type="none" w="med" len="med"/>
+                      <a:tailEnd type="none" w="med" len="med"/>
+                    </a:lnR>
+                    <a:lnT w="2540" cap="flat" cmpd="sng" algn="ctr">
+                      <a:solidFill>
+                        <a:srgbClr val="EEEEEE"/>
+                      </a:solidFill>
+                      <a:prstDash val="solid"/>
+                      <a:round/>
+                      <a:headEnd type="none" w="med" len="med"/>
+                      <a:tailEnd type="none" w="med" len="med"/>
+                    </a:lnT>
+                    <a:lnB w="2540" cap="flat" cmpd="sng" algn="ctr">
+                      <a:solidFill>
+                        <a:srgbClr val="EEEEEE"/>
+                      </a:solidFill>
+                      <a:prstDash val="solid"/>
+                      <a:round/>
+                      <a:headEnd type="none" w="med" len="med"/>
+                      <a:tailEnd type="none" w="med" len="med"/>
+                    </a:lnB>
+                  </a:tcPr>
+                </a:tc>
+                <a:tc>
+                  <a:txBody>
+                    <a:bodyPr/>
+                    <a:lstStyle/>
+                    <a:p>
+                      <a:pPr algn="ctr" indent="0" marL="0">
+                        <a:buNone/>
+                      </a:pPr>
+                      <a:endParaRPr lang="en-US" sz="500" dirty="0">
+                        <a:latin typeface="Calibri" charset="0"/>
+                        <a:ea typeface="Calibri" charset="0"/>
+                        <a:cs typeface="Calibri" charset="0"/>
+                      </a:endParaRPr>
+                    </a:p>
+                  </a:txBody>
+                  <a:tcPr marL="91440" marR="91440" marT="45720" marB="45720">
+                    <a:lnL w="2540" cap="flat" cmpd="sng" algn="ctr">
+                      <a:solidFill>
+                        <a:srgbClr val="EEEEEE"/>
+                      </a:solidFill>
+                      <a:prstDash val="solid"/>
+                      <a:round/>
+                      <a:headEnd type="none" w="med" len="med"/>
+                      <a:tailEnd type="none" w="med" len="med"/>
+                    </a:lnL>
+                    <a:lnR w="2540" cap="flat" cmpd="sng" algn="ctr">
+                      <a:solidFill>
+                        <a:srgbClr val="EEEEEE"/>
+                      </a:solidFill>
+                      <a:prstDash val="solid"/>
+                      <a:round/>
+                      <a:headEnd type="none" w="med" len="med"/>
+                      <a:tailEnd type="none" w="med" len="med"/>
+                    </a:lnR>
+                    <a:lnT w="2540" cap="flat" cmpd="sng" algn="ctr">
+                      <a:solidFill>
+                        <a:srgbClr val="EEEEEE"/>
+                      </a:solidFill>
+                      <a:prstDash val="solid"/>
+                      <a:round/>
+                      <a:headEnd type="none" w="med" len="med"/>
+                      <a:tailEnd type="none" w="med" len="med"/>
+                    </a:lnT>
+                    <a:lnB w="2540" cap="flat" cmpd="sng" algn="ctr">
+                      <a:solidFill>
+                        <a:srgbClr val="EEEEEE"/>
+                      </a:solidFill>
+                      <a:prstDash val="solid"/>
+                      <a:round/>
+                      <a:headEnd type="none" w="med" len="med"/>
+                      <a:tailEnd type="none" w="med" len="med"/>
+                    </a:lnB>
+                  </a:tcPr>
+                </a:tc>
+                <a:tc>
+                  <a:txBody>
+                    <a:bodyPr/>
+                    <a:lstStyle/>
+                    <a:p>
+                      <a:pPr algn="ctr" indent="0" marL="0">
+                        <a:buNone/>
+                      </a:pPr>
+                      <a:r>
+                        <a:rPr lang="en-US" sz="500" dirty="0">
+                          <a:solidFill>
+                            <a:srgbClr val="999999"/>
+                          </a:solidFill>
+                          <a:latin typeface="Calibri" pitchFamily="34" charset="0"/>
+                          <a:ea typeface="Calibri" pitchFamily="34" charset="-122"/>
+                          <a:cs typeface="Calibri" pitchFamily="34" charset="-120"/>
+                        </a:rPr>
+                        <a:t>0.00%</a:t>
+                      </a:r>
+                      <a:endParaRPr lang="en-US" sz="500" dirty="0">
+                        <a:latin typeface="Calibri" charset="0"/>
+                        <a:ea typeface="Calibri" charset="0"/>
+                        <a:cs typeface="Calibri" charset="0"/>
+                      </a:endParaRPr>
+                    </a:p>
+                  </a:txBody>
+                  <a:tcPr marL="91440" marR="91440" marT="45720" marB="45720">
+                    <a:lnL w="2540" cap="flat" cmpd="sng" algn="ctr">
+                      <a:solidFill>
+                        <a:srgbClr val="EEEEEE"/>
+                      </a:solidFill>
+                      <a:prstDash val="solid"/>
+                      <a:round/>
+                      <a:headEnd type="none" w="med" len="med"/>
+                      <a:tailEnd type="none" w="med" len="med"/>
+                    </a:lnL>
+                    <a:lnR w="2540" cap="flat" cmpd="sng" algn="ctr">
+                      <a:solidFill>
+                        <a:srgbClr val="EEEEEE"/>
+                      </a:solidFill>
+                      <a:prstDash val="solid"/>
+                      <a:round/>
+                      <a:headEnd type="none" w="med" len="med"/>
+                      <a:tailEnd type="none" w="med" len="med"/>
+                    </a:lnR>
+                    <a:lnT w="2540" cap="flat" cmpd="sng" algn="ctr">
+                      <a:solidFill>
+                        <a:srgbClr val="EEEEEE"/>
+                      </a:solidFill>
+                      <a:prstDash val="solid"/>
+                      <a:round/>
+                      <a:headEnd type="none" w="med" len="med"/>
+                      <a:tailEnd type="none" w="med" len="med"/>
+                    </a:lnT>
+                    <a:lnB w="2540" cap="flat" cmpd="sng" algn="ctr">
+                      <a:solidFill>
+                        <a:srgbClr val="EEEEEE"/>
+                      </a:solidFill>
+                      <a:prstDash val="solid"/>
+                      <a:round/>
+                      <a:headEnd type="none" w="med" len="med"/>
+                      <a:tailEnd type="none" w="med" len="med"/>
+                    </a:lnB>
+                  </a:tcPr>
+                </a:tc>
+                <a:tc>
+                  <a:txBody>
+                    <a:bodyPr/>
+                    <a:lstStyle/>
+                    <a:p>
+                      <a:pPr algn="ctr" indent="0" marL="0">
+                        <a:buNone/>
+                      </a:pPr>
+                      <a:r>
+                        <a:rPr lang="en-US" sz="500" dirty="0">
+                          <a:solidFill>
+                            <a:srgbClr val="999999"/>
+                          </a:solidFill>
+                          <a:latin typeface="Calibri" pitchFamily="34" charset="0"/>
+                          <a:ea typeface="Calibri" pitchFamily="34" charset="-122"/>
+                          <a:cs typeface="Calibri" pitchFamily="34" charset="-120"/>
+                        </a:rPr>
+                        <a:t>0.00%</a:t>
+                      </a:r>
+                      <a:endParaRPr lang="en-US" sz="500" dirty="0">
+                        <a:latin typeface="Calibri" charset="0"/>
+                        <a:ea typeface="Calibri" charset="0"/>
+                        <a:cs typeface="Calibri" charset="0"/>
+                      </a:endParaRPr>
+                    </a:p>
+                  </a:txBody>
+                  <a:tcPr marL="91440" marR="91440" marT="45720" marB="45720">
+                    <a:lnL w="2540" cap="flat" cmpd="sng" algn="ctr">
+                      <a:solidFill>
+                        <a:srgbClr val="EEEEEE"/>
+                      </a:solidFill>
+                      <a:prstDash val="solid"/>
+                      <a:round/>
+                      <a:headEnd type="none" w="med" len="med"/>
+                      <a:tailEnd type="none" w="med" len="med"/>
+                    </a:lnL>
+                    <a:lnR w="2540" cap="flat" cmpd="sng" algn="ctr">
+                      <a:solidFill>
+                        <a:srgbClr val="EEEEEE"/>
+                      </a:solidFill>
+                      <a:prstDash val="solid"/>
+                      <a:round/>
+                      <a:headEnd type="none" w="med" len="med"/>
+                      <a:tailEnd type="none" w="med" len="med"/>
+                    </a:lnR>
+                    <a:lnT w="2540" cap="flat" cmpd="sng" algn="ctr">
+                      <a:solidFill>
+                        <a:srgbClr val="EEEEEE"/>
+                      </a:solidFill>
+                      <a:prstDash val="solid"/>
+                      <a:round/>
+                      <a:headEnd type="none" w="med" len="med"/>
+                      <a:tailEnd type="none" w="med" len="med"/>
+                    </a:lnT>
+                    <a:lnB w="2540" cap="flat" cmpd="sng" algn="ctr">
+                      <a:solidFill>
+                        <a:srgbClr val="EEEEEE"/>
+                      </a:solidFill>
+                      <a:prstDash val="solid"/>
+                      <a:round/>
+                      <a:headEnd type="none" w="med" len="med"/>
+                      <a:tailEnd type="none" w="med" len="med"/>
+                    </a:lnB>
+                  </a:tcPr>
+                </a:tc>
+                <a:tc>
+                  <a:txBody>
+                    <a:bodyPr/>
+                    <a:lstStyle/>
+                    <a:p>
+                      <a:pPr algn="ctr" indent="0" marL="0">
+                        <a:buNone/>
+                      </a:pPr>
+                      <a:r>
+                        <a:rPr lang="en-US" sz="500" dirty="0">
+                          <a:solidFill>
+                            <a:srgbClr val="999999"/>
+                          </a:solidFill>
+                          <a:latin typeface="Calibri" pitchFamily="34" charset="0"/>
+                          <a:ea typeface="Calibri" pitchFamily="34" charset="-122"/>
+                          <a:cs typeface="Calibri" pitchFamily="34" charset="-120"/>
+                        </a:rPr>
+                        <a:t>0.00%</a:t>
+                      </a:r>
+                      <a:endParaRPr lang="en-US" sz="500" dirty="0">
+                        <a:latin typeface="Calibri" charset="0"/>
+                        <a:ea typeface="Calibri" charset="0"/>
+                        <a:cs typeface="Calibri" charset="0"/>
+                      </a:endParaRPr>
+                    </a:p>
+                  </a:txBody>
+                  <a:tcPr marL="91440" marR="91440" marT="45720" marB="45720">
+                    <a:lnL w="2540" cap="flat" cmpd="sng" algn="ctr">
+                      <a:solidFill>
+                        <a:srgbClr val="EEEEEE"/>
+                      </a:solidFill>
+                      <a:prstDash val="solid"/>
+                      <a:round/>
+                      <a:headEnd type="none" w="med" len="med"/>
+                      <a:tailEnd type="none" w="med" len="med"/>
+                    </a:lnL>
+                    <a:lnR w="2540" cap="flat" cmpd="sng" algn="ctr">
+                      <a:solidFill>
+                        <a:srgbClr val="EEEEEE"/>
+                      </a:solidFill>
+                      <a:prstDash val="solid"/>
+                      <a:round/>
+                      <a:headEnd type="none" w="med" len="med"/>
+                      <a:tailEnd type="none" w="med" len="med"/>
+                    </a:lnR>
+                    <a:lnT w="2540" cap="flat" cmpd="sng" algn="ctr">
+                      <a:solidFill>
+                        <a:srgbClr val="EEEEEE"/>
+                      </a:solidFill>
+                      <a:prstDash val="solid"/>
+                      <a:round/>
+                      <a:headEnd type="none" w="med" len="med"/>
+                      <a:tailEnd type="none" w="med" len="med"/>
+                    </a:lnT>
+                    <a:lnB w="2540" cap="flat" cmpd="sng" algn="ctr">
+                      <a:solidFill>
+                        <a:srgbClr val="EEEEEE"/>
+                      </a:solidFill>
+                      <a:prstDash val="solid"/>
+                      <a:round/>
+                      <a:headEnd type="none" w="med" len="med"/>
+                      <a:tailEnd type="none" w="med" len="med"/>
+                    </a:lnB>
+                  </a:tcPr>
+                </a:tc>
+                <a:tc>
+                  <a:txBody>
+                    <a:bodyPr/>
+                    <a:lstStyle/>
+                    <a:p>
+                      <a:pPr algn="ctr" indent="0" marL="0">
+                        <a:buNone/>
+                      </a:pPr>
+                      <a:r>
+                        <a:rPr lang="en-US" sz="500" dirty="0">
+                          <a:solidFill>
+                            <a:srgbClr val="999999"/>
+                          </a:solidFill>
+                          <a:latin typeface="Calibri" pitchFamily="34" charset="0"/>
+                          <a:ea typeface="Calibri" pitchFamily="34" charset="-122"/>
+                          <a:cs typeface="Calibri" pitchFamily="34" charset="-120"/>
+                        </a:rPr>
+                        <a:t>0.00%</a:t>
+                      </a:r>
+                      <a:endParaRPr lang="en-US" sz="500" dirty="0">
+                        <a:latin typeface="Calibri" charset="0"/>
+                        <a:ea typeface="Calibri" charset="0"/>
+                        <a:cs typeface="Calibri" charset="0"/>
+                      </a:endParaRPr>
+                    </a:p>
+                  </a:txBody>
+                  <a:tcPr marL="91440" marR="91440" marT="45720" marB="45720">
+                    <a:lnL w="2540" cap="flat" cmpd="sng" algn="ctr">
+                      <a:solidFill>
+                        <a:srgbClr val="EEEEEE"/>
+                      </a:solidFill>
+                      <a:prstDash val="solid"/>
+                      <a:round/>
+                      <a:headEnd type="none" w="med" len="med"/>
+                      <a:tailEnd type="none" w="med" len="med"/>
+                    </a:lnL>
+                    <a:lnR w="2540" cap="flat" cmpd="sng" algn="ctr">
+                      <a:solidFill>
+                        <a:srgbClr val="EEEEEE"/>
+                      </a:solidFill>
+                      <a:prstDash val="solid"/>
+                      <a:round/>
+                      <a:headEnd type="none" w="med" len="med"/>
+                      <a:tailEnd type="none" w="med" len="med"/>
+                    </a:lnR>
+                    <a:lnT w="2540" cap="flat" cmpd="sng" algn="ctr">
+                      <a:solidFill>
+                        <a:srgbClr val="EEEEEE"/>
+                      </a:solidFill>
+                      <a:prstDash val="solid"/>
+                      <a:round/>
+                      <a:headEnd type="none" w="med" len="med"/>
+                      <a:tailEnd type="none" w="med" len="med"/>
+                    </a:lnT>
+                    <a:lnB w="2540" cap="flat" cmpd="sng" algn="ctr">
+                      <a:solidFill>
+                        <a:srgbClr val="EEEEEE"/>
+                      </a:solidFill>
+                      <a:prstDash val="solid"/>
+                      <a:round/>
+                      <a:headEnd type="none" w="med" len="med"/>
+                      <a:tailEnd type="none" w="med" len="med"/>
+                    </a:lnB>
+                  </a:tcPr>
+                </a:tc>
+                <a:tc>
+                  <a:txBody>
+                    <a:bodyPr/>
+                    <a:lstStyle/>
+                    <a:p>
+                      <a:pPr algn="ctr" indent="0" marL="0">
+                        <a:buNone/>
+                      </a:pPr>
+                      <a:r>
+                        <a:rPr lang="en-US" sz="500" dirty="0">
+                          <a:solidFill>
+                            <a:srgbClr val="999999"/>
+                          </a:solidFill>
+                          <a:latin typeface="Calibri" pitchFamily="34" charset="0"/>
+                          <a:ea typeface="Calibri" pitchFamily="34" charset="-122"/>
+                          <a:cs typeface="Calibri" pitchFamily="34" charset="-120"/>
+                        </a:rPr>
+                        <a:t>-2.99%</a:t>
+                      </a:r>
+                      <a:endParaRPr lang="en-US" sz="500" dirty="0">
+                        <a:latin typeface="Calibri" charset="0"/>
+                        <a:ea typeface="Calibri" charset="0"/>
+                        <a:cs typeface="Calibri" charset="0"/>
+                      </a:endParaRPr>
+                    </a:p>
+                  </a:txBody>
+                  <a:tcPr marL="91440" marR="91440" marT="45720" marB="45720">
+                    <a:lnL w="2540" cap="flat" cmpd="sng" algn="ctr">
+                      <a:solidFill>
+                        <a:srgbClr val="EEEEEE"/>
+                      </a:solidFill>
+                      <a:prstDash val="solid"/>
+                      <a:round/>
+                      <a:headEnd type="none" w="med" len="med"/>
+                      <a:tailEnd type="none" w="med" len="med"/>
+                    </a:lnL>
+                    <a:lnR w="2540" cap="flat" cmpd="sng" algn="ctr">
+                      <a:solidFill>
+                        <a:srgbClr val="EEEEEE"/>
+                      </a:solidFill>
+                      <a:prstDash val="solid"/>
+                      <a:round/>
+                      <a:headEnd type="none" w="med" len="med"/>
+                      <a:tailEnd type="none" w="med" len="med"/>
+                    </a:lnR>
+                    <a:lnT w="2540" cap="flat" cmpd="sng" algn="ctr">
+                      <a:solidFill>
+                        <a:srgbClr val="EEEEEE"/>
+                      </a:solidFill>
+                      <a:prstDash val="solid"/>
+                      <a:round/>
+                      <a:headEnd type="none" w="med" len="med"/>
+                      <a:tailEnd type="none" w="med" len="med"/>
+                    </a:lnT>
+                    <a:lnB w="2540" cap="flat" cmpd="sng" algn="ctr">
+                      <a:solidFill>
+                        <a:srgbClr val="EEEEEE"/>
+                      </a:solidFill>
+                      <a:prstDash val="solid"/>
+                      <a:round/>
+                      <a:headEnd type="none" w="med" len="med"/>
+                      <a:tailEnd type="none" w="med" len="med"/>
+                    </a:lnB>
+                  </a:tcPr>
+                </a:tc>
+                <a:tc>
+                  <a:txBody>
+                    <a:bodyPr/>
+                    <a:lstStyle/>
+                    <a:p>
+                      <a:pPr algn="ctr" indent="0" marL="0">
+                        <a:buNone/>
+                      </a:pPr>
+                      <a:r>
+                        <a:rPr lang="en-US" sz="500" b="1" dirty="0">
+                          <a:solidFill>
+                            <a:srgbClr val="999999"/>
+                          </a:solidFill>
+                          <a:latin typeface="Calibri" pitchFamily="34" charset="0"/>
+                          <a:ea typeface="Calibri" pitchFamily="34" charset="-122"/>
+                          <a:cs typeface="Calibri" pitchFamily="34" charset="-120"/>
+                        </a:rPr>
+                        <a:t>-2.97%</a:t>
+                      </a:r>
+                      <a:endParaRPr lang="en-US" sz="500" dirty="0">
+                        <a:latin typeface="Calibri" charset="0"/>
+                        <a:ea typeface="Calibri" charset="0"/>
+                        <a:cs typeface="Calibri" charset="0"/>
+                      </a:endParaRPr>
+                    </a:p>
+                  </a:txBody>
+                  <a:tcPr marL="91440" marR="91440" marT="45720" marB="45720">
+                    <a:lnL w="2540" cap="flat" cmpd="sng" algn="ctr">
+                      <a:solidFill>
+                        <a:srgbClr val="EEEEEE"/>
+                      </a:solidFill>
+                      <a:prstDash val="solid"/>
+                      <a:round/>
+                      <a:headEnd type="none" w="med" len="med"/>
+                      <a:tailEnd type="none" w="med" len="med"/>
+                    </a:lnL>
+                    <a:lnR w="2540" cap="flat" cmpd="sng" algn="ctr">
+                      <a:solidFill>
+                        <a:srgbClr val="EEEEEE"/>
+                      </a:solidFill>
+                      <a:prstDash val="solid"/>
+                      <a:round/>
+                      <a:headEnd type="none" w="med" len="med"/>
+                      <a:tailEnd type="none" w="med" len="med"/>
+                    </a:lnR>
+                    <a:lnT w="2540" cap="flat" cmpd="sng" algn="ctr">
+                      <a:solidFill>
+                        <a:srgbClr val="EEEEEE"/>
+                      </a:solidFill>
+                      <a:prstDash val="solid"/>
+                      <a:round/>
+                      <a:headEnd type="none" w="med" len="med"/>
+                      <a:tailEnd type="none" w="med" len="med"/>
+                    </a:lnT>
+                    <a:lnB w="2540" cap="flat" cmpd="sng" algn="ctr">
+                      <a:solidFill>
+                        <a:srgbClr val="EEEEEE"/>
+                      </a:solidFill>
+                      <a:prstDash val="solid"/>
+                      <a:round/>
+                      <a:headEnd type="none" w="med" len="med"/>
+                      <a:tailEnd type="none" w="med" len="med"/>
+                    </a:lnB>
+                  </a:tcPr>
+                </a:tc>
+              </a:tr>
+              <a:tr h="123444">
+                <a:tc>
+                  <a:txBody>
+                    <a:bodyPr/>
+                    <a:lstStyle/>
+                    <a:p>
+                      <a:pPr algn="l" indent="0" marL="0">
+                        <a:buNone/>
+                      </a:pPr>
+                      <a:endParaRPr lang="en-US" sz="500" dirty="0">
+                        <a:latin typeface="Calibri" charset="0"/>
+                        <a:ea typeface="Calibri" charset="0"/>
+                        <a:cs typeface="Calibri" charset="0"/>
+                      </a:endParaRPr>
+                    </a:p>
+                  </a:txBody>
+                  <a:tcPr marL="91440" marR="91440" marT="45720" marB="45720">
+                    <a:lnL w="2540" cap="flat" cmpd="sng" algn="ctr">
+                      <a:solidFill>
+                        <a:srgbClr val="EEEEEE"/>
+                      </a:solidFill>
+                      <a:prstDash val="solid"/>
+                      <a:round/>
+                      <a:headEnd type="none" w="med" len="med"/>
+                      <a:tailEnd type="none" w="med" len="med"/>
+                    </a:lnL>
+                    <a:lnR w="2540" cap="flat" cmpd="sng" algn="ctr">
+                      <a:solidFill>
+                        <a:srgbClr val="EEEEEE"/>
+                      </a:solidFill>
+                      <a:prstDash val="solid"/>
+                      <a:round/>
+                      <a:headEnd type="none" w="med" len="med"/>
+                      <a:tailEnd type="none" w="med" len="med"/>
+                    </a:lnR>
+                    <a:lnT w="2540" cap="flat" cmpd="sng" algn="ctr">
+                      <a:solidFill>
+                        <a:srgbClr val="EEEEEE"/>
+                      </a:solidFill>
+                      <a:prstDash val="solid"/>
+                      <a:round/>
+                      <a:headEnd type="none" w="med" len="med"/>
+                      <a:tailEnd type="none" w="med" len="med"/>
+                    </a:lnT>
+                    <a:lnB w="2540" cap="flat" cmpd="sng" algn="ctr">
+                      <a:solidFill>
+                        <a:srgbClr val="EEEEEE"/>
+                      </a:solidFill>
+                      <a:prstDash val="solid"/>
+                      <a:round/>
+                      <a:headEnd type="none" w="med" len="med"/>
+                      <a:tailEnd type="none" w="med" len="med"/>
+                    </a:lnB>
+                  </a:tcPr>
+                </a:tc>
+                <a:tc>
+                  <a:txBody>
+                    <a:bodyPr/>
+                    <a:lstStyle/>
+                    <a:p>
+                      <a:pPr algn="l" indent="0" marL="0">
+                        <a:buNone/>
+                      </a:pPr>
+                      <a:r>
+                        <a:rPr lang="en-US" sz="500" dirty="0">
+                          <a:solidFill>
+                            <a:srgbClr val="000000"/>
+                          </a:solidFill>
+                          <a:latin typeface="Calibri" pitchFamily="34" charset="0"/>
+                          <a:ea typeface="Calibri" pitchFamily="34" charset="-122"/>
+                          <a:cs typeface="Calibri" pitchFamily="34" charset="-120"/>
+                        </a:rPr>
+                        <a:t>FIP LIQUIDEZ DISPONIBLE I</a:t>
+                      </a:r>
+                      <a:endParaRPr lang="en-US" sz="500" dirty="0">
+                        <a:latin typeface="Calibri" charset="0"/>
+                        <a:ea typeface="Calibri" charset="0"/>
+                        <a:cs typeface="Calibri" charset="0"/>
+                      </a:endParaRPr>
+                    </a:p>
+                  </a:txBody>
+                  <a:tcPr marL="91440" marR="91440" marT="45720" marB="45720">
+                    <a:lnL w="2540" cap="flat" cmpd="sng" algn="ctr">
+                      <a:solidFill>
+                        <a:srgbClr val="EEEEEE"/>
+                      </a:solidFill>
+                      <a:prstDash val="solid"/>
+                      <a:round/>
+                      <a:headEnd type="none" w="med" len="med"/>
+                      <a:tailEnd type="none" w="med" len="med"/>
+                    </a:lnL>
+                    <a:lnR w="2540" cap="flat" cmpd="sng" algn="ctr">
+                      <a:solidFill>
+                        <a:srgbClr val="EEEEEE"/>
+                      </a:solidFill>
+                      <a:prstDash val="solid"/>
+                      <a:round/>
+                      <a:headEnd type="none" w="med" len="med"/>
+                      <a:tailEnd type="none" w="med" len="med"/>
+                    </a:lnR>
+                    <a:lnT w="2540" cap="flat" cmpd="sng" algn="ctr">
+                      <a:solidFill>
+                        <a:srgbClr val="EEEEEE"/>
+                      </a:solidFill>
+                      <a:prstDash val="solid"/>
+                      <a:round/>
+                      <a:headEnd type="none" w="med" len="med"/>
+                      <a:tailEnd type="none" w="med" len="med"/>
+                    </a:lnT>
+                    <a:lnB w="2540" cap="flat" cmpd="sng" algn="ctr">
+                      <a:solidFill>
+                        <a:srgbClr val="EEEEEE"/>
+                      </a:solidFill>
+                      <a:prstDash val="solid"/>
+                      <a:round/>
+                      <a:headEnd type="none" w="med" len="med"/>
+                      <a:tailEnd type="none" w="med" len="med"/>
+                    </a:lnB>
+                  </a:tcPr>
+                </a:tc>
+                <a:tc>
+                  <a:txBody>
+                    <a:bodyPr/>
+                    <a:lstStyle/>
+                    <a:p>
+                      <a:pPr algn="ctr" indent="0" marL="0">
+                        <a:buNone/>
+                      </a:pPr>
+                      <a:endParaRPr lang="en-US" sz="500" dirty="0">
+                        <a:latin typeface="Calibri" charset="0"/>
+                        <a:ea typeface="Calibri" charset="0"/>
+                        <a:cs typeface="Calibri" charset="0"/>
+                      </a:endParaRPr>
+                    </a:p>
+                  </a:txBody>
+                  <a:tcPr marL="91440" marR="91440" marT="45720" marB="45720">
+                    <a:lnL w="2540" cap="flat" cmpd="sng" algn="ctr">
+                      <a:solidFill>
+                        <a:srgbClr val="EEEEEE"/>
+                      </a:solidFill>
+                      <a:prstDash val="solid"/>
+                      <a:round/>
+                      <a:headEnd type="none" w="med" len="med"/>
+                      <a:tailEnd type="none" w="med" len="med"/>
+                    </a:lnL>
+                    <a:lnR w="2540" cap="flat" cmpd="sng" algn="ctr">
+                      <a:solidFill>
+                        <a:srgbClr val="EEEEEE"/>
+                      </a:solidFill>
+                      <a:prstDash val="solid"/>
+                      <a:round/>
+                      <a:headEnd type="none" w="med" len="med"/>
+                      <a:tailEnd type="none" w="med" len="med"/>
+                    </a:lnR>
+                    <a:lnT w="2540" cap="flat" cmpd="sng" algn="ctr">
+                      <a:solidFill>
+                        <a:srgbClr val="EEEEEE"/>
+                      </a:solidFill>
+                      <a:prstDash val="solid"/>
+                      <a:round/>
+                      <a:headEnd type="none" w="med" len="med"/>
+                      <a:tailEnd type="none" w="med" len="med"/>
+                    </a:lnT>
+                    <a:lnB w="2540" cap="flat" cmpd="sng" algn="ctr">
+                      <a:solidFill>
+                        <a:srgbClr val="EEEEEE"/>
+                      </a:solidFill>
+                      <a:prstDash val="solid"/>
+                      <a:round/>
+                      <a:headEnd type="none" w="med" len="med"/>
+                      <a:tailEnd type="none" w="med" len="med"/>
+                    </a:lnB>
+                  </a:tcPr>
+                </a:tc>
+                <a:tc>
+                  <a:txBody>
+                    <a:bodyPr/>
+                    <a:lstStyle/>
+                    <a:p>
+                      <a:pPr algn="ctr" indent="0" marL="0">
+                        <a:buNone/>
+                      </a:pPr>
+                      <a:endParaRPr lang="en-US" sz="500" dirty="0">
+                        <a:latin typeface="Calibri" charset="0"/>
+                        <a:ea typeface="Calibri" charset="0"/>
+                        <a:cs typeface="Calibri" charset="0"/>
+                      </a:endParaRPr>
+                    </a:p>
+                  </a:txBody>
+                  <a:tcPr marL="91440" marR="91440" marT="45720" marB="45720">
+                    <a:lnL w="2540" cap="flat" cmpd="sng" algn="ctr">
+                      <a:solidFill>
+                        <a:srgbClr val="EEEEEE"/>
+                      </a:solidFill>
+                      <a:prstDash val="solid"/>
+                      <a:round/>
+                      <a:headEnd type="none" w="med" len="med"/>
+                      <a:tailEnd type="none" w="med" len="med"/>
+                    </a:lnL>
+                    <a:lnR w="2540" cap="flat" cmpd="sng" algn="ctr">
+                      <a:solidFill>
+                        <a:srgbClr val="EEEEEE"/>
+                      </a:solidFill>
+                      <a:prstDash val="solid"/>
+                      <a:round/>
+                      <a:headEnd type="none" w="med" len="med"/>
+                      <a:tailEnd type="none" w="med" len="med"/>
+                    </a:lnR>
+                    <a:lnT w="2540" cap="flat" cmpd="sng" algn="ctr">
+                      <a:solidFill>
+                        <a:srgbClr val="EEEEEE"/>
+                      </a:solidFill>
+                      <a:prstDash val="solid"/>
+                      <a:round/>
+                      <a:headEnd type="none" w="med" len="med"/>
+                      <a:tailEnd type="none" w="med" len="med"/>
+                    </a:lnT>
+                    <a:lnB w="2540" cap="flat" cmpd="sng" algn="ctr">
+                      <a:solidFill>
+                        <a:srgbClr val="EEEEEE"/>
+                      </a:solidFill>
+                      <a:prstDash val="solid"/>
+                      <a:round/>
+                      <a:headEnd type="none" w="med" len="med"/>
+                      <a:tailEnd type="none" w="med" len="med"/>
+                    </a:lnB>
+                  </a:tcPr>
+                </a:tc>
+                <a:tc>
+                  <a:txBody>
+                    <a:bodyPr/>
+                    <a:lstStyle/>
+                    <a:p>
+                      <a:pPr algn="ctr" indent="0" marL="0">
+                        <a:buNone/>
+                      </a:pPr>
+                      <a:endParaRPr lang="en-US" sz="500" dirty="0">
+                        <a:latin typeface="Calibri" charset="0"/>
+                        <a:ea typeface="Calibri" charset="0"/>
+                        <a:cs typeface="Calibri" charset="0"/>
+                      </a:endParaRPr>
+                    </a:p>
+                  </a:txBody>
+                  <a:tcPr marL="91440" marR="91440" marT="45720" marB="45720">
+                    <a:lnL w="2540" cap="flat" cmpd="sng" algn="ctr">
+                      <a:solidFill>
+                        <a:srgbClr val="EEEEEE"/>
+                      </a:solidFill>
+                      <a:prstDash val="solid"/>
+                      <a:round/>
+                      <a:headEnd type="none" w="med" len="med"/>
+                      <a:tailEnd type="none" w="med" len="med"/>
+                    </a:lnL>
+                    <a:lnR w="2540" cap="flat" cmpd="sng" algn="ctr">
+                      <a:solidFill>
+                        <a:srgbClr val="EEEEEE"/>
+                      </a:solidFill>
+                      <a:prstDash val="solid"/>
+                      <a:round/>
+                      <a:headEnd type="none" w="med" len="med"/>
+                      <a:tailEnd type="none" w="med" len="med"/>
+                    </a:lnR>
+                    <a:lnT w="2540" cap="flat" cmpd="sng" algn="ctr">
+                      <a:solidFill>
+                        <a:srgbClr val="EEEEEE"/>
+                      </a:solidFill>
+                      <a:prstDash val="solid"/>
+                      <a:round/>
+                      <a:headEnd type="none" w="med" len="med"/>
+                      <a:tailEnd type="none" w="med" len="med"/>
+                    </a:lnT>
+                    <a:lnB w="2540" cap="flat" cmpd="sng" algn="ctr">
+                      <a:solidFill>
+                        <a:srgbClr val="EEEEEE"/>
+                      </a:solidFill>
+                      <a:prstDash val="solid"/>
+                      <a:round/>
+                      <a:headEnd type="none" w="med" len="med"/>
+                      <a:tailEnd type="none" w="med" len="med"/>
+                    </a:lnB>
+                  </a:tcPr>
+                </a:tc>
+                <a:tc>
+                  <a:txBody>
+                    <a:bodyPr/>
+                    <a:lstStyle/>
+                    <a:p>
+                      <a:pPr algn="ctr" indent="0" marL="0">
+                        <a:buNone/>
+                      </a:pPr>
+                      <a:endParaRPr lang="en-US" sz="500" dirty="0">
+                        <a:latin typeface="Calibri" charset="0"/>
+                        <a:ea typeface="Calibri" charset="0"/>
+                        <a:cs typeface="Calibri" charset="0"/>
+                      </a:endParaRPr>
+                    </a:p>
+                  </a:txBody>
+                  <a:tcPr marL="91440" marR="91440" marT="45720" marB="45720">
+                    <a:lnL w="2540" cap="flat" cmpd="sng" algn="ctr">
+                      <a:solidFill>
+                        <a:srgbClr val="EEEEEE"/>
+                      </a:solidFill>
+                      <a:prstDash val="solid"/>
+                      <a:round/>
+                      <a:headEnd type="none" w="med" len="med"/>
+                      <a:tailEnd type="none" w="med" len="med"/>
+                    </a:lnL>
+                    <a:lnR w="2540" cap="flat" cmpd="sng" algn="ctr">
+                      <a:solidFill>
+                        <a:srgbClr val="EEEEEE"/>
+                      </a:solidFill>
+                      <a:prstDash val="solid"/>
+                      <a:round/>
+                      <a:headEnd type="none" w="med" len="med"/>
+                      <a:tailEnd type="none" w="med" len="med"/>
+                    </a:lnR>
+                    <a:lnT w="2540" cap="flat" cmpd="sng" algn="ctr">
+                      <a:solidFill>
+                        <a:srgbClr val="EEEEEE"/>
+                      </a:solidFill>
+                      <a:prstDash val="solid"/>
+                      <a:round/>
+                      <a:headEnd type="none" w="med" len="med"/>
+                      <a:tailEnd type="none" w="med" len="med"/>
+                    </a:lnT>
+                    <a:lnB w="2540" cap="flat" cmpd="sng" algn="ctr">
+                      <a:solidFill>
+                        <a:srgbClr val="EEEEEE"/>
+                      </a:solidFill>
+                      <a:prstDash val="solid"/>
+                      <a:round/>
+                      <a:headEnd type="none" w="med" len="med"/>
+                      <a:tailEnd type="none" w="med" len="med"/>
+                    </a:lnB>
+                  </a:tcPr>
+                </a:tc>
+                <a:tc>
+                  <a:txBody>
+                    <a:bodyPr/>
+                    <a:lstStyle/>
+                    <a:p>
+                      <a:pPr algn="ctr" indent="0" marL="0">
+                        <a:buNone/>
+                      </a:pPr>
+                      <a:endParaRPr lang="en-US" sz="500" dirty="0">
+                        <a:latin typeface="Calibri" charset="0"/>
+                        <a:ea typeface="Calibri" charset="0"/>
+                        <a:cs typeface="Calibri" charset="0"/>
+                      </a:endParaRPr>
+                    </a:p>
+                  </a:txBody>
+                  <a:tcPr marL="91440" marR="91440" marT="45720" marB="45720">
+                    <a:lnL w="2540" cap="flat" cmpd="sng" algn="ctr">
+                      <a:solidFill>
+                        <a:srgbClr val="EEEEEE"/>
+                      </a:solidFill>
+                      <a:prstDash val="solid"/>
+                      <a:round/>
+                      <a:headEnd type="none" w="med" len="med"/>
+                      <a:tailEnd type="none" w="med" len="med"/>
+                    </a:lnL>
+                    <a:lnR w="2540" cap="flat" cmpd="sng" algn="ctr">
+                      <a:solidFill>
+                        <a:srgbClr val="EEEEEE"/>
+                      </a:solidFill>
+                      <a:prstDash val="solid"/>
+                      <a:round/>
+                      <a:headEnd type="none" w="med" len="med"/>
+                      <a:tailEnd type="none" w="med" len="med"/>
+                    </a:lnR>
+                    <a:lnT w="2540" cap="flat" cmpd="sng" algn="ctr">
+                      <a:solidFill>
+                        <a:srgbClr val="EEEEEE"/>
+                      </a:solidFill>
+                      <a:prstDash val="solid"/>
+                      <a:round/>
+                      <a:headEnd type="none" w="med" len="med"/>
+                      <a:tailEnd type="none" w="med" len="med"/>
+                    </a:lnT>
+                    <a:lnB w="2540" cap="flat" cmpd="sng" algn="ctr">
+                      <a:solidFill>
+                        <a:srgbClr val="EEEEEE"/>
+                      </a:solidFill>
+                      <a:prstDash val="solid"/>
+                      <a:round/>
+                      <a:headEnd type="none" w="med" len="med"/>
+                      <a:tailEnd type="none" w="med" len="med"/>
+                    </a:lnB>
+                  </a:tcPr>
+                </a:tc>
+                <a:tc>
+                  <a:txBody>
+                    <a:bodyPr/>
+                    <a:lstStyle/>
+                    <a:p>
+                      <a:pPr algn="ctr" indent="0" marL="0">
+                        <a:buNone/>
+                      </a:pPr>
+                      <a:endParaRPr lang="en-US" sz="500" dirty="0">
+                        <a:latin typeface="Calibri" charset="0"/>
+                        <a:ea typeface="Calibri" charset="0"/>
+                        <a:cs typeface="Calibri" charset="0"/>
+                      </a:endParaRPr>
+                    </a:p>
+                  </a:txBody>
+                  <a:tcPr marL="91440" marR="91440" marT="45720" marB="45720">
+                    <a:lnL w="2540" cap="flat" cmpd="sng" algn="ctr">
+                      <a:solidFill>
+                        <a:srgbClr val="EEEEEE"/>
+                      </a:solidFill>
+                      <a:prstDash val="solid"/>
+                      <a:round/>
+                      <a:headEnd type="none" w="med" len="med"/>
+                      <a:tailEnd type="none" w="med" len="med"/>
+                    </a:lnL>
+                    <a:lnR w="2540" cap="flat" cmpd="sng" algn="ctr">
+                      <a:solidFill>
+                        <a:srgbClr val="EEEEEE"/>
+                      </a:solidFill>
+                      <a:prstDash val="solid"/>
+                      <a:round/>
+                      <a:headEnd type="none" w="med" len="med"/>
+                      <a:tailEnd type="none" w="med" len="med"/>
+                    </a:lnR>
+                    <a:lnT w="2540" cap="flat" cmpd="sng" algn="ctr">
+                      <a:solidFill>
+                        <a:srgbClr val="EEEEEE"/>
+                      </a:solidFill>
+                      <a:prstDash val="solid"/>
+                      <a:round/>
+                      <a:headEnd type="none" w="med" len="med"/>
+                      <a:tailEnd type="none" w="med" len="med"/>
+                    </a:lnT>
+                    <a:lnB w="2540" cap="flat" cmpd="sng" algn="ctr">
+                      <a:solidFill>
+                        <a:srgbClr val="EEEEEE"/>
+                      </a:solidFill>
+                      <a:prstDash val="solid"/>
+                      <a:round/>
+                      <a:headEnd type="none" w="med" len="med"/>
+                      <a:tailEnd type="none" w="med" len="med"/>
+                    </a:lnB>
+                  </a:tcPr>
+                </a:tc>
+                <a:tc>
+                  <a:txBody>
+                    <a:bodyPr/>
+                    <a:lstStyle/>
+                    <a:p>
+                      <a:pPr algn="ctr" indent="0" marL="0">
+                        <a:buNone/>
+                      </a:pPr>
+                      <a:endParaRPr lang="en-US" sz="500" dirty="0">
+                        <a:latin typeface="Calibri" charset="0"/>
+                        <a:ea typeface="Calibri" charset="0"/>
+                        <a:cs typeface="Calibri" charset="0"/>
+                      </a:endParaRPr>
+                    </a:p>
+                  </a:txBody>
+                  <a:tcPr marL="91440" marR="91440" marT="45720" marB="45720">
+                    <a:lnL w="2540" cap="flat" cmpd="sng" algn="ctr">
+                      <a:solidFill>
+                        <a:srgbClr val="EEEEEE"/>
+                      </a:solidFill>
+                      <a:prstDash val="solid"/>
+                      <a:round/>
+                      <a:headEnd type="none" w="med" len="med"/>
+                      <a:tailEnd type="none" w="med" len="med"/>
+                    </a:lnL>
+                    <a:lnR w="2540" cap="flat" cmpd="sng" algn="ctr">
+                      <a:solidFill>
+                        <a:srgbClr val="EEEEEE"/>
+                      </a:solidFill>
+                      <a:prstDash val="solid"/>
+                      <a:round/>
+                      <a:headEnd type="none" w="med" len="med"/>
+                      <a:tailEnd type="none" w="med" len="med"/>
+                    </a:lnR>
+                    <a:lnT w="2540" cap="flat" cmpd="sng" algn="ctr">
+                      <a:solidFill>
+                        <a:srgbClr val="EEEEEE"/>
+                      </a:solidFill>
+                      <a:prstDash val="solid"/>
+                      <a:round/>
+                      <a:headEnd type="none" w="med" len="med"/>
+                      <a:tailEnd type="none" w="med" len="med"/>
+                    </a:lnT>
+                    <a:lnB w="2540" cap="flat" cmpd="sng" algn="ctr">
+                      <a:solidFill>
+                        <a:srgbClr val="EEEEEE"/>
+                      </a:solidFill>
+                      <a:prstDash val="solid"/>
+                      <a:round/>
+                      <a:headEnd type="none" w="med" len="med"/>
+                      <a:tailEnd type="none" w="med" len="med"/>
+                    </a:lnB>
+                  </a:tcPr>
+                </a:tc>
+                <a:tc>
+                  <a:txBody>
+                    <a:bodyPr/>
+                    <a:lstStyle/>
+                    <a:p>
+                      <a:pPr algn="ctr" indent="0" marL="0">
+                        <a:buNone/>
+                      </a:pPr>
+                      <a:r>
+                        <a:rPr lang="en-US" sz="500" dirty="0">
+                          <a:solidFill>
+                            <a:srgbClr val="000000"/>
+                          </a:solidFill>
+                          <a:latin typeface="Calibri" pitchFamily="34" charset="0"/>
+                          <a:ea typeface="Calibri" pitchFamily="34" charset="-122"/>
+                          <a:cs typeface="Calibri" pitchFamily="34" charset="-120"/>
+                        </a:rPr>
+                        <a:t>0.00%</a:t>
+                      </a:r>
+                      <a:endParaRPr lang="en-US" sz="500" dirty="0">
+                        <a:latin typeface="Calibri" charset="0"/>
+                        <a:ea typeface="Calibri" charset="0"/>
+                        <a:cs typeface="Calibri" charset="0"/>
+                      </a:endParaRPr>
+                    </a:p>
+                  </a:txBody>
+                  <a:tcPr marL="91440" marR="91440" marT="45720" marB="45720">
+                    <a:lnL w="2540" cap="flat" cmpd="sng" algn="ctr">
+                      <a:solidFill>
+                        <a:srgbClr val="EEEEEE"/>
+                      </a:solidFill>
+                      <a:prstDash val="solid"/>
+                      <a:round/>
+                      <a:headEnd type="none" w="med" len="med"/>
+                      <a:tailEnd type="none" w="med" len="med"/>
+                    </a:lnL>
+                    <a:lnR w="2540" cap="flat" cmpd="sng" algn="ctr">
+                      <a:solidFill>
+                        <a:srgbClr val="EEEEEE"/>
+                      </a:solidFill>
+                      <a:prstDash val="solid"/>
+                      <a:round/>
+                      <a:headEnd type="none" w="med" len="med"/>
+                      <a:tailEnd type="none" w="med" len="med"/>
+                    </a:lnR>
+                    <a:lnT w="2540" cap="flat" cmpd="sng" algn="ctr">
+                      <a:solidFill>
+                        <a:srgbClr val="EEEEEE"/>
+                      </a:solidFill>
+                      <a:prstDash val="solid"/>
+                      <a:round/>
+                      <a:headEnd type="none" w="med" len="med"/>
+                      <a:tailEnd type="none" w="med" len="med"/>
+                    </a:lnT>
+                    <a:lnB w="2540" cap="flat" cmpd="sng" algn="ctr">
+                      <a:solidFill>
+                        <a:srgbClr val="EEEEEE"/>
+                      </a:solidFill>
+                      <a:prstDash val="solid"/>
+                      <a:round/>
+                      <a:headEnd type="none" w="med" len="med"/>
+                      <a:tailEnd type="none" w="med" len="med"/>
+                    </a:lnB>
+                  </a:tcPr>
+                </a:tc>
+                <a:tc>
+                  <a:txBody>
+                    <a:bodyPr/>
+                    <a:lstStyle/>
+                    <a:p>
+                      <a:pPr algn="ctr" indent="0" marL="0">
+                        <a:buNone/>
+                      </a:pPr>
+                      <a:r>
+                        <a:rPr lang="en-US" sz="500" dirty="0">
+                          <a:solidFill>
+                            <a:srgbClr val="000000"/>
+                          </a:solidFill>
+                          <a:latin typeface="Calibri" pitchFamily="34" charset="0"/>
+                          <a:ea typeface="Calibri" pitchFamily="34" charset="-122"/>
+                          <a:cs typeface="Calibri" pitchFamily="34" charset="-120"/>
+                        </a:rPr>
+                        <a:t>0.01%</a:t>
+                      </a:r>
+                      <a:endParaRPr lang="en-US" sz="500" dirty="0">
+                        <a:latin typeface="Calibri" charset="0"/>
+                        <a:ea typeface="Calibri" charset="0"/>
+                        <a:cs typeface="Calibri" charset="0"/>
+                      </a:endParaRPr>
+                    </a:p>
+                  </a:txBody>
+                  <a:tcPr marL="91440" marR="91440" marT="45720" marB="45720">
+                    <a:lnL w="2540" cap="flat" cmpd="sng" algn="ctr">
+                      <a:solidFill>
+                        <a:srgbClr val="EEEEEE"/>
+                      </a:solidFill>
+                      <a:prstDash val="solid"/>
+                      <a:round/>
+                      <a:headEnd type="none" w="med" len="med"/>
+                      <a:tailEnd type="none" w="med" len="med"/>
+                    </a:lnL>
+                    <a:lnR w="2540" cap="flat" cmpd="sng" algn="ctr">
+                      <a:solidFill>
+                        <a:srgbClr val="EEEEEE"/>
+                      </a:solidFill>
+                      <a:prstDash val="solid"/>
+                      <a:round/>
+                      <a:headEnd type="none" w="med" len="med"/>
+                      <a:tailEnd type="none" w="med" len="med"/>
+                    </a:lnR>
+                    <a:lnT w="2540" cap="flat" cmpd="sng" algn="ctr">
+                      <a:solidFill>
+                        <a:srgbClr val="EEEEEE"/>
+                      </a:solidFill>
+                      <a:prstDash val="solid"/>
+                      <a:round/>
+                      <a:headEnd type="none" w="med" len="med"/>
+                      <a:tailEnd type="none" w="med" len="med"/>
+                    </a:lnT>
+                    <a:lnB w="2540" cap="flat" cmpd="sng" algn="ctr">
+                      <a:solidFill>
+                        <a:srgbClr val="EEEEEE"/>
+                      </a:solidFill>
+                      <a:prstDash val="solid"/>
+                      <a:round/>
+                      <a:headEnd type="none" w="med" len="med"/>
+                      <a:tailEnd type="none" w="med" len="med"/>
+                    </a:lnB>
+                  </a:tcPr>
+                </a:tc>
+                <a:tc>
+                  <a:txBody>
+                    <a:bodyPr/>
+                    <a:lstStyle/>
+                    <a:p>
+                      <a:pPr algn="ctr" indent="0" marL="0">
+                        <a:buNone/>
+                      </a:pPr>
+                      <a:r>
+                        <a:rPr lang="en-US" sz="500" dirty="0">
+                          <a:solidFill>
+                            <a:srgbClr val="000000"/>
+                          </a:solidFill>
+                          <a:latin typeface="Calibri" pitchFamily="34" charset="0"/>
+                          <a:ea typeface="Calibri" pitchFamily="34" charset="-122"/>
+                          <a:cs typeface="Calibri" pitchFamily="34" charset="-120"/>
+                        </a:rPr>
+                        <a:t>0.01%</a:t>
+                      </a:r>
+                      <a:endParaRPr lang="en-US" sz="500" dirty="0">
+                        <a:latin typeface="Calibri" charset="0"/>
+                        <a:ea typeface="Calibri" charset="0"/>
+                        <a:cs typeface="Calibri" charset="0"/>
+                      </a:endParaRPr>
+                    </a:p>
+                  </a:txBody>
+                  <a:tcPr marL="91440" marR="91440" marT="45720" marB="45720">
+                    <a:lnL w="2540" cap="flat" cmpd="sng" algn="ctr">
+                      <a:solidFill>
+                        <a:srgbClr val="EEEEEE"/>
+                      </a:solidFill>
+                      <a:prstDash val="solid"/>
+                      <a:round/>
+                      <a:headEnd type="none" w="med" len="med"/>
+                      <a:tailEnd type="none" w="med" len="med"/>
+                    </a:lnL>
+                    <a:lnR w="2540" cap="flat" cmpd="sng" algn="ctr">
+                      <a:solidFill>
+                        <a:srgbClr val="EEEEEE"/>
+                      </a:solidFill>
+                      <a:prstDash val="solid"/>
+                      <a:round/>
+                      <a:headEnd type="none" w="med" len="med"/>
+                      <a:tailEnd type="none" w="med" len="med"/>
+                    </a:lnR>
+                    <a:lnT w="2540" cap="flat" cmpd="sng" algn="ctr">
+                      <a:solidFill>
+                        <a:srgbClr val="EEEEEE"/>
+                      </a:solidFill>
+                      <a:prstDash val="solid"/>
+                      <a:round/>
+                      <a:headEnd type="none" w="med" len="med"/>
+                      <a:tailEnd type="none" w="med" len="med"/>
+                    </a:lnT>
+                    <a:lnB w="2540" cap="flat" cmpd="sng" algn="ctr">
+                      <a:solidFill>
+                        <a:srgbClr val="EEEEEE"/>
+                      </a:solidFill>
+                      <a:prstDash val="solid"/>
+                      <a:round/>
+                      <a:headEnd type="none" w="med" len="med"/>
+                      <a:tailEnd type="none" w="med" len="med"/>
+                    </a:lnB>
+                  </a:tcPr>
+                </a:tc>
+                <a:tc>
+                  <a:txBody>
+                    <a:bodyPr/>
+                    <a:lstStyle/>
+                    <a:p>
+                      <a:pPr algn="ctr" indent="0" marL="0">
+                        <a:buNone/>
+                      </a:pPr>
+                      <a:r>
+                        <a:rPr lang="en-US" sz="500" dirty="0">
+                          <a:solidFill>
+                            <a:srgbClr val="000000"/>
+                          </a:solidFill>
+                          <a:latin typeface="Calibri" pitchFamily="34" charset="0"/>
+                          <a:ea typeface="Calibri" pitchFamily="34" charset="-122"/>
+                          <a:cs typeface="Calibri" pitchFamily="34" charset="-120"/>
+                        </a:rPr>
+                        <a:t>0.01%</a:t>
+                      </a:r>
+                      <a:endParaRPr lang="en-US" sz="500" dirty="0">
+                        <a:latin typeface="Calibri" charset="0"/>
+                        <a:ea typeface="Calibri" charset="0"/>
+                        <a:cs typeface="Calibri" charset="0"/>
+                      </a:endParaRPr>
+                    </a:p>
+                  </a:txBody>
+                  <a:tcPr marL="91440" marR="91440" marT="45720" marB="45720">
+                    <a:lnL w="2540" cap="flat" cmpd="sng" algn="ctr">
+                      <a:solidFill>
+                        <a:srgbClr val="EEEEEE"/>
+                      </a:solidFill>
+                      <a:prstDash val="solid"/>
+                      <a:round/>
+                      <a:headEnd type="none" w="med" len="med"/>
+                      <a:tailEnd type="none" w="med" len="med"/>
+                    </a:lnL>
+                    <a:lnR w="2540" cap="flat" cmpd="sng" algn="ctr">
+                      <a:solidFill>
+                        <a:srgbClr val="EEEEEE"/>
+                      </a:solidFill>
+                      <a:prstDash val="solid"/>
+                      <a:round/>
+                      <a:headEnd type="none" w="med" len="med"/>
+                      <a:tailEnd type="none" w="med" len="med"/>
+                    </a:lnR>
+                    <a:lnT w="2540" cap="flat" cmpd="sng" algn="ctr">
+                      <a:solidFill>
+                        <a:srgbClr val="EEEEEE"/>
+                      </a:solidFill>
+                      <a:prstDash val="solid"/>
+                      <a:round/>
+                      <a:headEnd type="none" w="med" len="med"/>
+                      <a:tailEnd type="none" w="med" len="med"/>
+                    </a:lnT>
+                    <a:lnB w="2540" cap="flat" cmpd="sng" algn="ctr">
+                      <a:solidFill>
+                        <a:srgbClr val="EEEEEE"/>
+                      </a:solidFill>
+                      <a:prstDash val="solid"/>
+                      <a:round/>
+                      <a:headEnd type="none" w="med" len="med"/>
+                      <a:tailEnd type="none" w="med" len="med"/>
+                    </a:lnB>
+                  </a:tcPr>
+                </a:tc>
+                <a:tc>
+                  <a:txBody>
+                    <a:bodyPr/>
+                    <a:lstStyle/>
+                    <a:p>
+                      <a:pPr algn="ctr" indent="0" marL="0">
+                        <a:buNone/>
+                      </a:pPr>
+                      <a:r>
+                        <a:rPr lang="en-US" sz="500" dirty="0">
+                          <a:solidFill>
+                            <a:srgbClr val="000000"/>
+                          </a:solidFill>
+                          <a:latin typeface="Calibri" pitchFamily="34" charset="0"/>
+                          <a:ea typeface="Calibri" pitchFamily="34" charset="-122"/>
+                          <a:cs typeface="Calibri" pitchFamily="34" charset="-120"/>
+                        </a:rPr>
+                        <a:t>0.01%</a:t>
+                      </a:r>
+                      <a:endParaRPr lang="en-US" sz="500" dirty="0">
+                        <a:latin typeface="Calibri" charset="0"/>
+                        <a:ea typeface="Calibri" charset="0"/>
+                        <a:cs typeface="Calibri" charset="0"/>
+                      </a:endParaRPr>
+                    </a:p>
+                  </a:txBody>
+                  <a:tcPr marL="91440" marR="91440" marT="45720" marB="45720">
+                    <a:lnL w="2540" cap="flat" cmpd="sng" algn="ctr">
+                      <a:solidFill>
+                        <a:srgbClr val="EEEEEE"/>
+                      </a:solidFill>
+                      <a:prstDash val="solid"/>
+                      <a:round/>
+                      <a:headEnd type="none" w="med" len="med"/>
+                      <a:tailEnd type="none" w="med" len="med"/>
+                    </a:lnL>
+                    <a:lnR w="2540" cap="flat" cmpd="sng" algn="ctr">
+                      <a:solidFill>
+                        <a:srgbClr val="EEEEEE"/>
+                      </a:solidFill>
+                      <a:prstDash val="solid"/>
+                      <a:round/>
+                      <a:headEnd type="none" w="med" len="med"/>
+                      <a:tailEnd type="none" w="med" len="med"/>
+                    </a:lnR>
+                    <a:lnT w="2540" cap="flat" cmpd="sng" algn="ctr">
+                      <a:solidFill>
+                        <a:srgbClr val="EEEEEE"/>
+                      </a:solidFill>
+                      <a:prstDash val="solid"/>
+                      <a:round/>
+                      <a:headEnd type="none" w="med" len="med"/>
+                      <a:tailEnd type="none" w="med" len="med"/>
+                    </a:lnT>
+                    <a:lnB w="2540" cap="flat" cmpd="sng" algn="ctr">
+                      <a:solidFill>
+                        <a:srgbClr val="EEEEEE"/>
+                      </a:solidFill>
+                      <a:prstDash val="solid"/>
+                      <a:round/>
+                      <a:headEnd type="none" w="med" len="med"/>
+                      <a:tailEnd type="none" w="med" len="med"/>
+                    </a:lnB>
+                  </a:tcPr>
+                </a:tc>
+                <a:tc>
+                  <a:txBody>
+                    <a:bodyPr/>
+                    <a:lstStyle/>
+                    <a:p>
+                      <a:pPr algn="ctr" indent="0" marL="0">
+                        <a:buNone/>
+                      </a:pPr>
+                      <a:r>
+                        <a:rPr lang="en-US" sz="500" b="1" dirty="0">
+                          <a:solidFill>
+                            <a:srgbClr val="000000"/>
+                          </a:solidFill>
+                          <a:latin typeface="Calibri" pitchFamily="34" charset="0"/>
+                          <a:ea typeface="Calibri" pitchFamily="34" charset="-122"/>
+                          <a:cs typeface="Calibri" pitchFamily="34" charset="-120"/>
+                        </a:rPr>
+                        <a:t>0.02%</a:t>
+                      </a:r>
+                      <a:endParaRPr lang="en-US" sz="500" dirty="0">
+                        <a:latin typeface="Calibri" charset="0"/>
+                        <a:ea typeface="Calibri" charset="0"/>
+                        <a:cs typeface="Calibri" charset="0"/>
+                      </a:endParaRPr>
+                    </a:p>
+                  </a:txBody>
+                  <a:tcPr marL="91440" marR="91440" marT="45720" marB="45720">
+                    <a:lnL w="2540" cap="flat" cmpd="sng" algn="ctr">
+                      <a:solidFill>
+                        <a:srgbClr val="EEEEEE"/>
+                      </a:solidFill>
+                      <a:prstDash val="solid"/>
+                      <a:round/>
+                      <a:headEnd type="none" w="med" len="med"/>
+                      <a:tailEnd type="none" w="med" len="med"/>
+                    </a:lnL>
+                    <a:lnR w="2540" cap="flat" cmpd="sng" algn="ctr">
+                      <a:solidFill>
+                        <a:srgbClr val="EEEEEE"/>
+                      </a:solidFill>
+                      <a:prstDash val="solid"/>
+                      <a:round/>
+                      <a:headEnd type="none" w="med" len="med"/>
+                      <a:tailEnd type="none" w="med" len="med"/>
+                    </a:lnR>
+                    <a:lnT w="2540" cap="flat" cmpd="sng" algn="ctr">
+                      <a:solidFill>
+                        <a:srgbClr val="EEEEEE"/>
+                      </a:solidFill>
+                      <a:prstDash val="solid"/>
+                      <a:round/>
+                      <a:headEnd type="none" w="med" len="med"/>
+                      <a:tailEnd type="none" w="med" len="med"/>
+                    </a:lnT>
+                    <a:lnB w="2540" cap="flat" cmpd="sng" algn="ctr">
+                      <a:solidFill>
+                        <a:srgbClr val="EEEEEE"/>
+                      </a:solidFill>
+                      <a:prstDash val="solid"/>
+                      <a:round/>
+                      <a:headEnd type="none" w="med" len="med"/>
+                      <a:tailEnd type="none" w="med" len="med"/>
+                    </a:lnB>
+                  </a:tcPr>
+                </a:tc>
+              </a:tr>
+              <a:tr h="123444">
                 <a:tc>
                   <a:txBody>
                     <a:bodyPr/>
@@ -7025,7 +9752,7 @@
                   </a:tcPr>
                 </a:tc>
               </a:tr>
-              <a:tr h="118872">
+              <a:tr h="123444">
                 <a:tc>
                   <a:txBody>
                     <a:bodyPr/>
@@ -7162,7 +9889,7 @@
                           <a:ea typeface="Calibri" pitchFamily="34" charset="-122"/>
                           <a:cs typeface="Calibri" pitchFamily="34" charset="-120"/>
                         </a:rPr>
-                        <a:t>-11.28%</a:t>
+                        <a:t>0.00%</a:t>
                       </a:r>
                       <a:endParaRPr lang="en-US" sz="500" dirty="0">
                         <a:latin typeface="Calibri" charset="0"/>
@@ -7877,7 +10604,7 @@
                           <a:ea typeface="Calibri" pitchFamily="34" charset="-122"/>
                           <a:cs typeface="Calibri" pitchFamily="34" charset="-120"/>
                         </a:rPr>
-                        <a:t>0.28%</a:t>
+                        <a:t>0.56%</a:t>
                       </a:r>
                       <a:endParaRPr lang="en-US" sz="500" dirty="0">
                         <a:latin typeface="Calibri" charset="0"/>
@@ -7942,7 +10669,7 @@
                           <a:ea typeface="Calibri" pitchFamily="34" charset="-122"/>
                           <a:cs typeface="Calibri" pitchFamily="34" charset="-120"/>
                         </a:rPr>
-                        <a:t>-8.39%</a:t>
+                        <a:t>3.54%</a:t>
                       </a:r>
                       <a:endParaRPr lang="en-US" sz="500" dirty="0">
                         <a:latin typeface="Calibri" charset="0"/>
@@ -7991,7 +10718,7 @@
                   </a:tcPr>
                 </a:tc>
               </a:tr>
-              <a:tr h="118872">
+              <a:tr h="123444">
                 <a:tc>
                   <a:txBody>
                     <a:bodyPr/>
@@ -8119,6 +10846,17 @@
                       <a:pPr algn="ctr" indent="0" marL="0">
                         <a:buNone/>
                       </a:pPr>
+                      <a:r>
+                        <a:rPr lang="en-US" sz="500" dirty="0">
+                          <a:solidFill>
+                            <a:srgbClr val="000000"/>
+                          </a:solidFill>
+                          <a:latin typeface="Calibri" pitchFamily="34" charset="0"/>
+                          <a:ea typeface="Calibri" pitchFamily="34" charset="-122"/>
+                          <a:cs typeface="Calibri" pitchFamily="34" charset="-120"/>
+                        </a:rPr>
+                        <a:t>0.00%</a:t>
+                      </a:r>
                       <a:endParaRPr lang="en-US" sz="500" dirty="0">
                         <a:latin typeface="Calibri" charset="0"/>
                         <a:ea typeface="Calibri" charset="0"/>
@@ -8173,6 +10911,17 @@
                       <a:pPr algn="ctr" indent="0" marL="0">
                         <a:buNone/>
                       </a:pPr>
+                      <a:r>
+                        <a:rPr lang="en-US" sz="500" dirty="0">
+                          <a:solidFill>
+                            <a:srgbClr val="000000"/>
+                          </a:solidFill>
+                          <a:latin typeface="Calibri" pitchFamily="34" charset="0"/>
+                          <a:ea typeface="Calibri" pitchFamily="34" charset="-122"/>
+                          <a:cs typeface="Calibri" pitchFamily="34" charset="-120"/>
+                        </a:rPr>
+                        <a:t>0.00%</a:t>
+                      </a:r>
                       <a:endParaRPr lang="en-US" sz="500" dirty="0">
                         <a:latin typeface="Calibri" charset="0"/>
                         <a:ea typeface="Calibri" charset="0"/>
@@ -8227,6 +10976,17 @@
                       <a:pPr algn="ctr" indent="0" marL="0">
                         <a:buNone/>
                       </a:pPr>
+                      <a:r>
+                        <a:rPr lang="en-US" sz="500" dirty="0">
+                          <a:solidFill>
+                            <a:srgbClr val="000000"/>
+                          </a:solidFill>
+                          <a:latin typeface="Calibri" pitchFamily="34" charset="0"/>
+                          <a:ea typeface="Calibri" pitchFamily="34" charset="-122"/>
+                          <a:cs typeface="Calibri" pitchFamily="34" charset="-120"/>
+                        </a:rPr>
+                        <a:t>0.01%</a:t>
+                      </a:r>
                       <a:endParaRPr lang="en-US" sz="500" dirty="0">
                         <a:latin typeface="Calibri" charset="0"/>
                         <a:ea typeface="Calibri" charset="0"/>
@@ -8281,6 +11041,17 @@
                       <a:pPr algn="ctr" indent="0" marL="0">
                         <a:buNone/>
                       </a:pPr>
+                      <a:r>
+                        <a:rPr lang="en-US" sz="500" dirty="0">
+                          <a:solidFill>
+                            <a:srgbClr val="000000"/>
+                          </a:solidFill>
+                          <a:latin typeface="Calibri" pitchFamily="34" charset="0"/>
+                          <a:ea typeface="Calibri" pitchFamily="34" charset="-122"/>
+                          <a:cs typeface="Calibri" pitchFamily="34" charset="-120"/>
+                        </a:rPr>
+                        <a:t>0.01%</a:t>
+                      </a:r>
                       <a:endParaRPr lang="en-US" sz="500" dirty="0">
                         <a:latin typeface="Calibri" charset="0"/>
                         <a:ea typeface="Calibri" charset="0"/>
@@ -8335,6 +11106,17 @@
                       <a:pPr algn="ctr" indent="0" marL="0">
                         <a:buNone/>
                       </a:pPr>
+                      <a:r>
+                        <a:rPr lang="en-US" sz="500" dirty="0">
+                          <a:solidFill>
+                            <a:srgbClr val="000000"/>
+                          </a:solidFill>
+                          <a:latin typeface="Calibri" pitchFamily="34" charset="0"/>
+                          <a:ea typeface="Calibri" pitchFamily="34" charset="-122"/>
+                          <a:cs typeface="Calibri" pitchFamily="34" charset="-120"/>
+                        </a:rPr>
+                        <a:t>0.01%</a:t>
+                      </a:r>
                       <a:endParaRPr lang="en-US" sz="500" dirty="0">
                         <a:latin typeface="Calibri" charset="0"/>
                         <a:ea typeface="Calibri" charset="0"/>
@@ -8389,6 +11171,17 @@
                       <a:pPr algn="ctr" indent="0" marL="0">
                         <a:buNone/>
                       </a:pPr>
+                      <a:r>
+                        <a:rPr lang="en-US" sz="500" dirty="0">
+                          <a:solidFill>
+                            <a:srgbClr val="000000"/>
+                          </a:solidFill>
+                          <a:latin typeface="Calibri" pitchFamily="34" charset="0"/>
+                          <a:ea typeface="Calibri" pitchFamily="34" charset="-122"/>
+                          <a:cs typeface="Calibri" pitchFamily="34" charset="-120"/>
+                        </a:rPr>
+                        <a:t>0.01%</a:t>
+                      </a:r>
                       <a:endParaRPr lang="en-US" sz="500" dirty="0">
                         <a:latin typeface="Calibri" charset="0"/>
                         <a:ea typeface="Calibri" charset="0"/>
@@ -8443,6 +11236,17 @@
                       <a:pPr algn="ctr" indent="0" marL="0">
                         <a:buNone/>
                       </a:pPr>
+                      <a:r>
+                        <a:rPr lang="en-US" sz="500" dirty="0">
+                          <a:solidFill>
+                            <a:srgbClr val="000000"/>
+                          </a:solidFill>
+                          <a:latin typeface="Calibri" pitchFamily="34" charset="0"/>
+                          <a:ea typeface="Calibri" pitchFamily="34" charset="-122"/>
+                          <a:cs typeface="Calibri" pitchFamily="34" charset="-120"/>
+                        </a:rPr>
+                        <a:t>0.01%</a:t>
+                      </a:r>
                       <a:endParaRPr lang="en-US" sz="500" dirty="0">
                         <a:latin typeface="Calibri" charset="0"/>
                         <a:ea typeface="Calibri" charset="0"/>
@@ -8831,7 +11635,7 @@
                           <a:ea typeface="Calibri" pitchFamily="34" charset="-122"/>
                           <a:cs typeface="Calibri" pitchFamily="34" charset="-120"/>
                         </a:rPr>
-                        <a:t>2.94%</a:t>
+                        <a:t>2.98%</a:t>
                       </a:r>
                       <a:endParaRPr lang="en-US" sz="500" dirty="0">
                         <a:latin typeface="Calibri" charset="0"/>
@@ -8880,7 +11684,7 @@
                   </a:tcPr>
                 </a:tc>
               </a:tr>
-              <a:tr h="118872">
+              <a:tr h="123444">
                 <a:tc>
                   <a:txBody>
                     <a:bodyPr/>
@@ -9720,7 +12524,7 @@
                           <a:ea typeface="Calibri" pitchFamily="34" charset="-122"/>
                           <a:cs typeface="Calibri" pitchFamily="34" charset="-120"/>
                         </a:rPr>
-                        <a:t>1.51%</a:t>
+                        <a:t>3.39%</a:t>
                       </a:r>
                       <a:endParaRPr lang="en-US" sz="500" dirty="0">
                         <a:latin typeface="Calibri" charset="0"/>
@@ -9769,7 +12573,7 @@
                   </a:tcPr>
                 </a:tc>
               </a:tr>
-              <a:tr h="118872">
+              <a:tr h="123444">
                 <a:tc>
                   <a:txBody>
                     <a:bodyPr/>
@@ -9906,7 +12710,7 @@
                           <a:ea typeface="Calibri" pitchFamily="34" charset="-122"/>
                           <a:cs typeface="Calibri" pitchFamily="34" charset="-120"/>
                         </a:rPr>
-                        <a:t>0.27%</a:t>
+                        <a:t>0.00%</a:t>
                       </a:r>
                       <a:endParaRPr lang="en-US" sz="500" dirty="0">
                         <a:latin typeface="Calibri" charset="0"/>
@@ -10598,7 +13402,7 @@
                           <a:ea typeface="Calibri" pitchFamily="34" charset="-122"/>
                           <a:cs typeface="Calibri" pitchFamily="34" charset="-120"/>
                         </a:rPr>
-                        <a:t>1.05%</a:t>
+                        <a:t>2.32%</a:t>
                       </a:r>
                       <a:endParaRPr lang="en-US" sz="500" dirty="0">
                         <a:latin typeface="Calibri" charset="0"/>
@@ -10647,7 +13451,7 @@
                   </a:tcPr>
                 </a:tc>
               </a:tr>
-              <a:tr h="118872">
+              <a:tr h="123444">
                 <a:tc>
                   <a:txBody>
                     <a:bodyPr/>
@@ -11476,7 +14280,7 @@
                           <a:ea typeface="Calibri" pitchFamily="34" charset="-122"/>
                           <a:cs typeface="Calibri" pitchFamily="34" charset="-120"/>
                         </a:rPr>
-                        <a:t>2.19%</a:t>
+                        <a:t>4.88%</a:t>
                       </a:r>
                       <a:endParaRPr lang="en-US" sz="500" dirty="0">
                         <a:latin typeface="Calibri" charset="0"/>

--- a/folletos/2026-04/pptx/FIP_VANTRUST_LIQUIDEZ_DISPONIBLE_I.pptx
+++ b/folletos/2026-04/pptx/FIP_VANTRUST_LIQUIDEZ_DISPONIBLE_I.pptx
@@ -3113,7 +3113,7 @@
                 <a:ea typeface="Calibri" pitchFamily="34" charset="-122"/>
                 <a:cs typeface="Calibri" pitchFamily="34" charset="-120"/>
               </a:rPr>
-              <a:t>prueba CLP</a:t>
+              <a:t>prueba 12 CLP</a:t>
             </a:r>
             <a:endParaRPr lang="en-US" sz="800" dirty="0"/>
           </a:p>

--- a/folletos/2026-04/pptx/FIP_VANTRUST_LIQUIDEZ_DISPONIBLE_I.pptx
+++ b/folletos/2026-04/pptx/FIP_VANTRUST_LIQUIDEZ_DISPONIBLE_I.pptx
@@ -3113,7 +3113,7 @@
                 <a:ea typeface="Calibri" pitchFamily="34" charset="-122"/>
                 <a:cs typeface="Calibri" pitchFamily="34" charset="-120"/>
               </a:rPr>
-              <a:t>prueba 12 CLP</a:t>
+              <a:t>prueba CLP</a:t>
             </a:r>
             <a:endParaRPr lang="en-US" sz="800" dirty="0"/>
           </a:p>
@@ -7512,7 +7512,2319 @@
                           <a:ea typeface="Calibri" pitchFamily="34" charset="-122"/>
                           <a:cs typeface="Calibri" pitchFamily="34" charset="-120"/>
                         </a:rPr>
-                        <a:t>0.00%</a:t>
+                        <a:t>0.36%</a:t>
+                      </a:r>
+                      <a:endParaRPr lang="en-US" sz="500" dirty="0">
+                        <a:latin typeface="Calibri" charset="0"/>
+                        <a:ea typeface="Calibri" charset="0"/>
+                        <a:cs typeface="Calibri" charset="0"/>
+                      </a:endParaRPr>
+                    </a:p>
+                  </a:txBody>
+                  <a:tcPr marL="91440" marR="91440" marT="45720" marB="45720">
+                    <a:lnL w="2540" cap="flat" cmpd="sng" algn="ctr">
+                      <a:solidFill>
+                        <a:srgbClr val="EEEEEE"/>
+                      </a:solidFill>
+                      <a:prstDash val="solid"/>
+                      <a:round/>
+                      <a:headEnd type="none" w="med" len="med"/>
+                      <a:tailEnd type="none" w="med" len="med"/>
+                    </a:lnL>
+                    <a:lnR w="2540" cap="flat" cmpd="sng" algn="ctr">
+                      <a:solidFill>
+                        <a:srgbClr val="EEEEEE"/>
+                      </a:solidFill>
+                      <a:prstDash val="solid"/>
+                      <a:round/>
+                      <a:headEnd type="none" w="med" len="med"/>
+                      <a:tailEnd type="none" w="med" len="med"/>
+                    </a:lnR>
+                    <a:lnT w="2540" cap="flat" cmpd="sng" algn="ctr">
+                      <a:solidFill>
+                        <a:srgbClr val="EEEEEE"/>
+                      </a:solidFill>
+                      <a:prstDash val="solid"/>
+                      <a:round/>
+                      <a:headEnd type="none" w="med" len="med"/>
+                      <a:tailEnd type="none" w="med" len="med"/>
+                    </a:lnT>
+                    <a:lnB w="2540" cap="flat" cmpd="sng" algn="ctr">
+                      <a:solidFill>
+                        <a:srgbClr val="EEEEEE"/>
+                      </a:solidFill>
+                      <a:prstDash val="solid"/>
+                      <a:round/>
+                      <a:headEnd type="none" w="med" len="med"/>
+                      <a:tailEnd type="none" w="med" len="med"/>
+                    </a:lnB>
+                  </a:tcPr>
+                </a:tc>
+                <a:tc>
+                  <a:txBody>
+                    <a:bodyPr/>
+                    <a:lstStyle/>
+                    <a:p>
+                      <a:pPr algn="ctr" indent="0" marL="0">
+                        <a:buNone/>
+                      </a:pPr>
+                      <a:r>
+                        <a:rPr lang="en-US" sz="500" dirty="0">
+                          <a:solidFill>
+                            <a:srgbClr val="999999"/>
+                          </a:solidFill>
+                          <a:latin typeface="Calibri" pitchFamily="34" charset="0"/>
+                          <a:ea typeface="Calibri" pitchFamily="34" charset="-122"/>
+                          <a:cs typeface="Calibri" pitchFamily="34" charset="-120"/>
+                        </a:rPr>
+                        <a:t>0.34%</a:t>
+                      </a:r>
+                      <a:endParaRPr lang="en-US" sz="500" dirty="0">
+                        <a:latin typeface="Calibri" charset="0"/>
+                        <a:ea typeface="Calibri" charset="0"/>
+                        <a:cs typeface="Calibri" charset="0"/>
+                      </a:endParaRPr>
+                    </a:p>
+                  </a:txBody>
+                  <a:tcPr marL="91440" marR="91440" marT="45720" marB="45720">
+                    <a:lnL w="2540" cap="flat" cmpd="sng" algn="ctr">
+                      <a:solidFill>
+                        <a:srgbClr val="EEEEEE"/>
+                      </a:solidFill>
+                      <a:prstDash val="solid"/>
+                      <a:round/>
+                      <a:headEnd type="none" w="med" len="med"/>
+                      <a:tailEnd type="none" w="med" len="med"/>
+                    </a:lnL>
+                    <a:lnR w="2540" cap="flat" cmpd="sng" algn="ctr">
+                      <a:solidFill>
+                        <a:srgbClr val="EEEEEE"/>
+                      </a:solidFill>
+                      <a:prstDash val="solid"/>
+                      <a:round/>
+                      <a:headEnd type="none" w="med" len="med"/>
+                      <a:tailEnd type="none" w="med" len="med"/>
+                    </a:lnR>
+                    <a:lnT w="2540" cap="flat" cmpd="sng" algn="ctr">
+                      <a:solidFill>
+                        <a:srgbClr val="EEEEEE"/>
+                      </a:solidFill>
+                      <a:prstDash val="solid"/>
+                      <a:round/>
+                      <a:headEnd type="none" w="med" len="med"/>
+                      <a:tailEnd type="none" w="med" len="med"/>
+                    </a:lnT>
+                    <a:lnB w="2540" cap="flat" cmpd="sng" algn="ctr">
+                      <a:solidFill>
+                        <a:srgbClr val="EEEEEE"/>
+                      </a:solidFill>
+                      <a:prstDash val="solid"/>
+                      <a:round/>
+                      <a:headEnd type="none" w="med" len="med"/>
+                      <a:tailEnd type="none" w="med" len="med"/>
+                    </a:lnB>
+                  </a:tcPr>
+                </a:tc>
+                <a:tc>
+                  <a:txBody>
+                    <a:bodyPr/>
+                    <a:lstStyle/>
+                    <a:p>
+                      <a:pPr algn="ctr" indent="0" marL="0">
+                        <a:buNone/>
+                      </a:pPr>
+                      <a:r>
+                        <a:rPr lang="en-US" sz="500" dirty="0">
+                          <a:solidFill>
+                            <a:srgbClr val="999999"/>
+                          </a:solidFill>
+                          <a:latin typeface="Calibri" pitchFamily="34" charset="0"/>
+                          <a:ea typeface="Calibri" pitchFamily="34" charset="-122"/>
+                          <a:cs typeface="Calibri" pitchFamily="34" charset="-120"/>
+                        </a:rPr>
+                        <a:t>0.34%</a:t>
+                      </a:r>
+                      <a:endParaRPr lang="en-US" sz="500" dirty="0">
+                        <a:latin typeface="Calibri" charset="0"/>
+                        <a:ea typeface="Calibri" charset="0"/>
+                        <a:cs typeface="Calibri" charset="0"/>
+                      </a:endParaRPr>
+                    </a:p>
+                  </a:txBody>
+                  <a:tcPr marL="91440" marR="91440" marT="45720" marB="45720">
+                    <a:lnL w="2540" cap="flat" cmpd="sng" algn="ctr">
+                      <a:solidFill>
+                        <a:srgbClr val="EEEEEE"/>
+                      </a:solidFill>
+                      <a:prstDash val="solid"/>
+                      <a:round/>
+                      <a:headEnd type="none" w="med" len="med"/>
+                      <a:tailEnd type="none" w="med" len="med"/>
+                    </a:lnL>
+                    <a:lnR w="2540" cap="flat" cmpd="sng" algn="ctr">
+                      <a:solidFill>
+                        <a:srgbClr val="EEEEEE"/>
+                      </a:solidFill>
+                      <a:prstDash val="solid"/>
+                      <a:round/>
+                      <a:headEnd type="none" w="med" len="med"/>
+                      <a:tailEnd type="none" w="med" len="med"/>
+                    </a:lnR>
+                    <a:lnT w="2540" cap="flat" cmpd="sng" algn="ctr">
+                      <a:solidFill>
+                        <a:srgbClr val="EEEEEE"/>
+                      </a:solidFill>
+                      <a:prstDash val="solid"/>
+                      <a:round/>
+                      <a:headEnd type="none" w="med" len="med"/>
+                      <a:tailEnd type="none" w="med" len="med"/>
+                    </a:lnT>
+                    <a:lnB w="2540" cap="flat" cmpd="sng" algn="ctr">
+                      <a:solidFill>
+                        <a:srgbClr val="EEEEEE"/>
+                      </a:solidFill>
+                      <a:prstDash val="solid"/>
+                      <a:round/>
+                      <a:headEnd type="none" w="med" len="med"/>
+                      <a:tailEnd type="none" w="med" len="med"/>
+                    </a:lnB>
+                  </a:tcPr>
+                </a:tc>
+                <a:tc>
+                  <a:txBody>
+                    <a:bodyPr/>
+                    <a:lstStyle/>
+                    <a:p>
+                      <a:pPr algn="ctr" indent="0" marL="0">
+                        <a:buNone/>
+                      </a:pPr>
+                      <a:r>
+                        <a:rPr lang="en-US" sz="500" dirty="0">
+                          <a:solidFill>
+                            <a:srgbClr val="999999"/>
+                          </a:solidFill>
+                          <a:latin typeface="Calibri" pitchFamily="34" charset="0"/>
+                          <a:ea typeface="Calibri" pitchFamily="34" charset="-122"/>
+                          <a:cs typeface="Calibri" pitchFamily="34" charset="-120"/>
+                        </a:rPr>
+                        <a:t>0.32%</a:t>
+                      </a:r>
+                      <a:endParaRPr lang="en-US" sz="500" dirty="0">
+                        <a:latin typeface="Calibri" charset="0"/>
+                        <a:ea typeface="Calibri" charset="0"/>
+                        <a:cs typeface="Calibri" charset="0"/>
+                      </a:endParaRPr>
+                    </a:p>
+                  </a:txBody>
+                  <a:tcPr marL="91440" marR="91440" marT="45720" marB="45720">
+                    <a:lnL w="2540" cap="flat" cmpd="sng" algn="ctr">
+                      <a:solidFill>
+                        <a:srgbClr val="EEEEEE"/>
+                      </a:solidFill>
+                      <a:prstDash val="solid"/>
+                      <a:round/>
+                      <a:headEnd type="none" w="med" len="med"/>
+                      <a:tailEnd type="none" w="med" len="med"/>
+                    </a:lnL>
+                    <a:lnR w="2540" cap="flat" cmpd="sng" algn="ctr">
+                      <a:solidFill>
+                        <a:srgbClr val="EEEEEE"/>
+                      </a:solidFill>
+                      <a:prstDash val="solid"/>
+                      <a:round/>
+                      <a:headEnd type="none" w="med" len="med"/>
+                      <a:tailEnd type="none" w="med" len="med"/>
+                    </a:lnR>
+                    <a:lnT w="2540" cap="flat" cmpd="sng" algn="ctr">
+                      <a:solidFill>
+                        <a:srgbClr val="EEEEEE"/>
+                      </a:solidFill>
+                      <a:prstDash val="solid"/>
+                      <a:round/>
+                      <a:headEnd type="none" w="med" len="med"/>
+                      <a:tailEnd type="none" w="med" len="med"/>
+                    </a:lnT>
+                    <a:lnB w="2540" cap="flat" cmpd="sng" algn="ctr">
+                      <a:solidFill>
+                        <a:srgbClr val="EEEEEE"/>
+                      </a:solidFill>
+                      <a:prstDash val="solid"/>
+                      <a:round/>
+                      <a:headEnd type="none" w="med" len="med"/>
+                      <a:tailEnd type="none" w="med" len="med"/>
+                    </a:lnB>
+                  </a:tcPr>
+                </a:tc>
+                <a:tc>
+                  <a:txBody>
+                    <a:bodyPr/>
+                    <a:lstStyle/>
+                    <a:p>
+                      <a:pPr algn="ctr" indent="0" marL="0">
+                        <a:buNone/>
+                      </a:pPr>
+                      <a:r>
+                        <a:rPr lang="en-US" sz="500" dirty="0">
+                          <a:solidFill>
+                            <a:srgbClr val="999999"/>
+                          </a:solidFill>
+                          <a:latin typeface="Calibri" pitchFamily="34" charset="0"/>
+                          <a:ea typeface="Calibri" pitchFamily="34" charset="-122"/>
+                          <a:cs typeface="Calibri" pitchFamily="34" charset="-120"/>
+                        </a:rPr>
+                        <a:t>-2.99%</a:t>
+                      </a:r>
+                      <a:endParaRPr lang="en-US" sz="500" dirty="0">
+                        <a:latin typeface="Calibri" charset="0"/>
+                        <a:ea typeface="Calibri" charset="0"/>
+                        <a:cs typeface="Calibri" charset="0"/>
+                      </a:endParaRPr>
+                    </a:p>
+                  </a:txBody>
+                  <a:tcPr marL="91440" marR="91440" marT="45720" marB="45720">
+                    <a:lnL w="2540" cap="flat" cmpd="sng" algn="ctr">
+                      <a:solidFill>
+                        <a:srgbClr val="EEEEEE"/>
+                      </a:solidFill>
+                      <a:prstDash val="solid"/>
+                      <a:round/>
+                      <a:headEnd type="none" w="med" len="med"/>
+                      <a:tailEnd type="none" w="med" len="med"/>
+                    </a:lnL>
+                    <a:lnR w="2540" cap="flat" cmpd="sng" algn="ctr">
+                      <a:solidFill>
+                        <a:srgbClr val="EEEEEE"/>
+                      </a:solidFill>
+                      <a:prstDash val="solid"/>
+                      <a:round/>
+                      <a:headEnd type="none" w="med" len="med"/>
+                      <a:tailEnd type="none" w="med" len="med"/>
+                    </a:lnR>
+                    <a:lnT w="2540" cap="flat" cmpd="sng" algn="ctr">
+                      <a:solidFill>
+                        <a:srgbClr val="EEEEEE"/>
+                      </a:solidFill>
+                      <a:prstDash val="solid"/>
+                      <a:round/>
+                      <a:headEnd type="none" w="med" len="med"/>
+                      <a:tailEnd type="none" w="med" len="med"/>
+                    </a:lnT>
+                    <a:lnB w="2540" cap="flat" cmpd="sng" algn="ctr">
+                      <a:solidFill>
+                        <a:srgbClr val="EEEEEE"/>
+                      </a:solidFill>
+                      <a:prstDash val="solid"/>
+                      <a:round/>
+                      <a:headEnd type="none" w="med" len="med"/>
+                      <a:tailEnd type="none" w="med" len="med"/>
+                    </a:lnB>
+                  </a:tcPr>
+                </a:tc>
+                <a:tc>
+                  <a:txBody>
+                    <a:bodyPr/>
+                    <a:lstStyle/>
+                    <a:p>
+                      <a:pPr algn="ctr" indent="0" marL="0">
+                        <a:buNone/>
+                      </a:pPr>
+                      <a:r>
+                        <a:rPr lang="en-US" sz="500" b="1" dirty="0">
+                          <a:solidFill>
+                            <a:srgbClr val="999999"/>
+                          </a:solidFill>
+                          <a:latin typeface="Calibri" pitchFamily="34" charset="0"/>
+                          <a:ea typeface="Calibri" pitchFamily="34" charset="-122"/>
+                          <a:cs typeface="Calibri" pitchFamily="34" charset="-120"/>
+                        </a:rPr>
+                        <a:t>-1.66%</a:t>
+                      </a:r>
+                      <a:endParaRPr lang="en-US" sz="500" dirty="0">
+                        <a:latin typeface="Calibri" charset="0"/>
+                        <a:ea typeface="Calibri" charset="0"/>
+                        <a:cs typeface="Calibri" charset="0"/>
+                      </a:endParaRPr>
+                    </a:p>
+                  </a:txBody>
+                  <a:tcPr marL="91440" marR="91440" marT="45720" marB="45720">
+                    <a:lnL w="2540" cap="flat" cmpd="sng" algn="ctr">
+                      <a:solidFill>
+                        <a:srgbClr val="EEEEEE"/>
+                      </a:solidFill>
+                      <a:prstDash val="solid"/>
+                      <a:round/>
+                      <a:headEnd type="none" w="med" len="med"/>
+                      <a:tailEnd type="none" w="med" len="med"/>
+                    </a:lnL>
+                    <a:lnR w="2540" cap="flat" cmpd="sng" algn="ctr">
+                      <a:solidFill>
+                        <a:srgbClr val="EEEEEE"/>
+                      </a:solidFill>
+                      <a:prstDash val="solid"/>
+                      <a:round/>
+                      <a:headEnd type="none" w="med" len="med"/>
+                      <a:tailEnd type="none" w="med" len="med"/>
+                    </a:lnR>
+                    <a:lnT w="2540" cap="flat" cmpd="sng" algn="ctr">
+                      <a:solidFill>
+                        <a:srgbClr val="EEEEEE"/>
+                      </a:solidFill>
+                      <a:prstDash val="solid"/>
+                      <a:round/>
+                      <a:headEnd type="none" w="med" len="med"/>
+                      <a:tailEnd type="none" w="med" len="med"/>
+                    </a:lnT>
+                    <a:lnB w="2540" cap="flat" cmpd="sng" algn="ctr">
+                      <a:solidFill>
+                        <a:srgbClr val="EEEEEE"/>
+                      </a:solidFill>
+                      <a:prstDash val="solid"/>
+                      <a:round/>
+                      <a:headEnd type="none" w="med" len="med"/>
+                      <a:tailEnd type="none" w="med" len="med"/>
+                    </a:lnB>
+                  </a:tcPr>
+                </a:tc>
+              </a:tr>
+              <a:tr h="123444">
+                <a:tc>
+                  <a:txBody>
+                    <a:bodyPr/>
+                    <a:lstStyle/>
+                    <a:p>
+                      <a:pPr algn="l" indent="0" marL="0">
+                        <a:buNone/>
+                      </a:pPr>
+                      <a:endParaRPr lang="en-US" sz="500" dirty="0">
+                        <a:latin typeface="Calibri" charset="0"/>
+                        <a:ea typeface="Calibri" charset="0"/>
+                        <a:cs typeface="Calibri" charset="0"/>
+                      </a:endParaRPr>
+                    </a:p>
+                  </a:txBody>
+                  <a:tcPr marL="91440" marR="91440" marT="45720" marB="45720">
+                    <a:lnL w="2540" cap="flat" cmpd="sng" algn="ctr">
+                      <a:solidFill>
+                        <a:srgbClr val="EEEEEE"/>
+                      </a:solidFill>
+                      <a:prstDash val="solid"/>
+                      <a:round/>
+                      <a:headEnd type="none" w="med" len="med"/>
+                      <a:tailEnd type="none" w="med" len="med"/>
+                    </a:lnL>
+                    <a:lnR w="2540" cap="flat" cmpd="sng" algn="ctr">
+                      <a:solidFill>
+                        <a:srgbClr val="EEEEEE"/>
+                      </a:solidFill>
+                      <a:prstDash val="solid"/>
+                      <a:round/>
+                      <a:headEnd type="none" w="med" len="med"/>
+                      <a:tailEnd type="none" w="med" len="med"/>
+                    </a:lnR>
+                    <a:lnT w="2540" cap="flat" cmpd="sng" algn="ctr">
+                      <a:solidFill>
+                        <a:srgbClr val="EEEEEE"/>
+                      </a:solidFill>
+                      <a:prstDash val="solid"/>
+                      <a:round/>
+                      <a:headEnd type="none" w="med" len="med"/>
+                      <a:tailEnd type="none" w="med" len="med"/>
+                    </a:lnT>
+                    <a:lnB w="2540" cap="flat" cmpd="sng" algn="ctr">
+                      <a:solidFill>
+                        <a:srgbClr val="EEEEEE"/>
+                      </a:solidFill>
+                      <a:prstDash val="solid"/>
+                      <a:round/>
+                      <a:headEnd type="none" w="med" len="med"/>
+                      <a:tailEnd type="none" w="med" len="med"/>
+                    </a:lnB>
+                  </a:tcPr>
+                </a:tc>
+                <a:tc>
+                  <a:txBody>
+                    <a:bodyPr/>
+                    <a:lstStyle/>
+                    <a:p>
+                      <a:pPr algn="l" indent="0" marL="0">
+                        <a:buNone/>
+                      </a:pPr>
+                      <a:r>
+                        <a:rPr lang="en-US" sz="500" dirty="0">
+                          <a:solidFill>
+                            <a:srgbClr val="000000"/>
+                          </a:solidFill>
+                          <a:latin typeface="Calibri" pitchFamily="34" charset="0"/>
+                          <a:ea typeface="Calibri" pitchFamily="34" charset="-122"/>
+                          <a:cs typeface="Calibri" pitchFamily="34" charset="-120"/>
+                        </a:rPr>
+                        <a:t>FIP LIQUIDEZ DISPONIBLE I</a:t>
+                      </a:r>
+                      <a:endParaRPr lang="en-US" sz="500" dirty="0">
+                        <a:latin typeface="Calibri" charset="0"/>
+                        <a:ea typeface="Calibri" charset="0"/>
+                        <a:cs typeface="Calibri" charset="0"/>
+                      </a:endParaRPr>
+                    </a:p>
+                  </a:txBody>
+                  <a:tcPr marL="91440" marR="91440" marT="45720" marB="45720">
+                    <a:lnL w="2540" cap="flat" cmpd="sng" algn="ctr">
+                      <a:solidFill>
+                        <a:srgbClr val="EEEEEE"/>
+                      </a:solidFill>
+                      <a:prstDash val="solid"/>
+                      <a:round/>
+                      <a:headEnd type="none" w="med" len="med"/>
+                      <a:tailEnd type="none" w="med" len="med"/>
+                    </a:lnL>
+                    <a:lnR w="2540" cap="flat" cmpd="sng" algn="ctr">
+                      <a:solidFill>
+                        <a:srgbClr val="EEEEEE"/>
+                      </a:solidFill>
+                      <a:prstDash val="solid"/>
+                      <a:round/>
+                      <a:headEnd type="none" w="med" len="med"/>
+                      <a:tailEnd type="none" w="med" len="med"/>
+                    </a:lnR>
+                    <a:lnT w="2540" cap="flat" cmpd="sng" algn="ctr">
+                      <a:solidFill>
+                        <a:srgbClr val="EEEEEE"/>
+                      </a:solidFill>
+                      <a:prstDash val="solid"/>
+                      <a:round/>
+                      <a:headEnd type="none" w="med" len="med"/>
+                      <a:tailEnd type="none" w="med" len="med"/>
+                    </a:lnT>
+                    <a:lnB w="2540" cap="flat" cmpd="sng" algn="ctr">
+                      <a:solidFill>
+                        <a:srgbClr val="EEEEEE"/>
+                      </a:solidFill>
+                      <a:prstDash val="solid"/>
+                      <a:round/>
+                      <a:headEnd type="none" w="med" len="med"/>
+                      <a:tailEnd type="none" w="med" len="med"/>
+                    </a:lnB>
+                  </a:tcPr>
+                </a:tc>
+                <a:tc>
+                  <a:txBody>
+                    <a:bodyPr/>
+                    <a:lstStyle/>
+                    <a:p>
+                      <a:pPr algn="ctr" indent="0" marL="0">
+                        <a:buNone/>
+                      </a:pPr>
+                      <a:endParaRPr lang="en-US" sz="500" dirty="0">
+                        <a:latin typeface="Calibri" charset="0"/>
+                        <a:ea typeface="Calibri" charset="0"/>
+                        <a:cs typeface="Calibri" charset="0"/>
+                      </a:endParaRPr>
+                    </a:p>
+                  </a:txBody>
+                  <a:tcPr marL="91440" marR="91440" marT="45720" marB="45720">
+                    <a:lnL w="2540" cap="flat" cmpd="sng" algn="ctr">
+                      <a:solidFill>
+                        <a:srgbClr val="EEEEEE"/>
+                      </a:solidFill>
+                      <a:prstDash val="solid"/>
+                      <a:round/>
+                      <a:headEnd type="none" w="med" len="med"/>
+                      <a:tailEnd type="none" w="med" len="med"/>
+                    </a:lnL>
+                    <a:lnR w="2540" cap="flat" cmpd="sng" algn="ctr">
+                      <a:solidFill>
+                        <a:srgbClr val="EEEEEE"/>
+                      </a:solidFill>
+                      <a:prstDash val="solid"/>
+                      <a:round/>
+                      <a:headEnd type="none" w="med" len="med"/>
+                      <a:tailEnd type="none" w="med" len="med"/>
+                    </a:lnR>
+                    <a:lnT w="2540" cap="flat" cmpd="sng" algn="ctr">
+                      <a:solidFill>
+                        <a:srgbClr val="EEEEEE"/>
+                      </a:solidFill>
+                      <a:prstDash val="solid"/>
+                      <a:round/>
+                      <a:headEnd type="none" w="med" len="med"/>
+                      <a:tailEnd type="none" w="med" len="med"/>
+                    </a:lnT>
+                    <a:lnB w="2540" cap="flat" cmpd="sng" algn="ctr">
+                      <a:solidFill>
+                        <a:srgbClr val="EEEEEE"/>
+                      </a:solidFill>
+                      <a:prstDash val="solid"/>
+                      <a:round/>
+                      <a:headEnd type="none" w="med" len="med"/>
+                      <a:tailEnd type="none" w="med" len="med"/>
+                    </a:lnB>
+                  </a:tcPr>
+                </a:tc>
+                <a:tc>
+                  <a:txBody>
+                    <a:bodyPr/>
+                    <a:lstStyle/>
+                    <a:p>
+                      <a:pPr algn="ctr" indent="0" marL="0">
+                        <a:buNone/>
+                      </a:pPr>
+                      <a:endParaRPr lang="en-US" sz="500" dirty="0">
+                        <a:latin typeface="Calibri" charset="0"/>
+                        <a:ea typeface="Calibri" charset="0"/>
+                        <a:cs typeface="Calibri" charset="0"/>
+                      </a:endParaRPr>
+                    </a:p>
+                  </a:txBody>
+                  <a:tcPr marL="91440" marR="91440" marT="45720" marB="45720">
+                    <a:lnL w="2540" cap="flat" cmpd="sng" algn="ctr">
+                      <a:solidFill>
+                        <a:srgbClr val="EEEEEE"/>
+                      </a:solidFill>
+                      <a:prstDash val="solid"/>
+                      <a:round/>
+                      <a:headEnd type="none" w="med" len="med"/>
+                      <a:tailEnd type="none" w="med" len="med"/>
+                    </a:lnL>
+                    <a:lnR w="2540" cap="flat" cmpd="sng" algn="ctr">
+                      <a:solidFill>
+                        <a:srgbClr val="EEEEEE"/>
+                      </a:solidFill>
+                      <a:prstDash val="solid"/>
+                      <a:round/>
+                      <a:headEnd type="none" w="med" len="med"/>
+                      <a:tailEnd type="none" w="med" len="med"/>
+                    </a:lnR>
+                    <a:lnT w="2540" cap="flat" cmpd="sng" algn="ctr">
+                      <a:solidFill>
+                        <a:srgbClr val="EEEEEE"/>
+                      </a:solidFill>
+                      <a:prstDash val="solid"/>
+                      <a:round/>
+                      <a:headEnd type="none" w="med" len="med"/>
+                      <a:tailEnd type="none" w="med" len="med"/>
+                    </a:lnT>
+                    <a:lnB w="2540" cap="flat" cmpd="sng" algn="ctr">
+                      <a:solidFill>
+                        <a:srgbClr val="EEEEEE"/>
+                      </a:solidFill>
+                      <a:prstDash val="solid"/>
+                      <a:round/>
+                      <a:headEnd type="none" w="med" len="med"/>
+                      <a:tailEnd type="none" w="med" len="med"/>
+                    </a:lnB>
+                  </a:tcPr>
+                </a:tc>
+                <a:tc>
+                  <a:txBody>
+                    <a:bodyPr/>
+                    <a:lstStyle/>
+                    <a:p>
+                      <a:pPr algn="ctr" indent="0" marL="0">
+                        <a:buNone/>
+                      </a:pPr>
+                      <a:endParaRPr lang="en-US" sz="500" dirty="0">
+                        <a:latin typeface="Calibri" charset="0"/>
+                        <a:ea typeface="Calibri" charset="0"/>
+                        <a:cs typeface="Calibri" charset="0"/>
+                      </a:endParaRPr>
+                    </a:p>
+                  </a:txBody>
+                  <a:tcPr marL="91440" marR="91440" marT="45720" marB="45720">
+                    <a:lnL w="2540" cap="flat" cmpd="sng" algn="ctr">
+                      <a:solidFill>
+                        <a:srgbClr val="EEEEEE"/>
+                      </a:solidFill>
+                      <a:prstDash val="solid"/>
+                      <a:round/>
+                      <a:headEnd type="none" w="med" len="med"/>
+                      <a:tailEnd type="none" w="med" len="med"/>
+                    </a:lnL>
+                    <a:lnR w="2540" cap="flat" cmpd="sng" algn="ctr">
+                      <a:solidFill>
+                        <a:srgbClr val="EEEEEE"/>
+                      </a:solidFill>
+                      <a:prstDash val="solid"/>
+                      <a:round/>
+                      <a:headEnd type="none" w="med" len="med"/>
+                      <a:tailEnd type="none" w="med" len="med"/>
+                    </a:lnR>
+                    <a:lnT w="2540" cap="flat" cmpd="sng" algn="ctr">
+                      <a:solidFill>
+                        <a:srgbClr val="EEEEEE"/>
+                      </a:solidFill>
+                      <a:prstDash val="solid"/>
+                      <a:round/>
+                      <a:headEnd type="none" w="med" len="med"/>
+                      <a:tailEnd type="none" w="med" len="med"/>
+                    </a:lnT>
+                    <a:lnB w="2540" cap="flat" cmpd="sng" algn="ctr">
+                      <a:solidFill>
+                        <a:srgbClr val="EEEEEE"/>
+                      </a:solidFill>
+                      <a:prstDash val="solid"/>
+                      <a:round/>
+                      <a:headEnd type="none" w="med" len="med"/>
+                      <a:tailEnd type="none" w="med" len="med"/>
+                    </a:lnB>
+                  </a:tcPr>
+                </a:tc>
+                <a:tc>
+                  <a:txBody>
+                    <a:bodyPr/>
+                    <a:lstStyle/>
+                    <a:p>
+                      <a:pPr algn="ctr" indent="0" marL="0">
+                        <a:buNone/>
+                      </a:pPr>
+                      <a:endParaRPr lang="en-US" sz="500" dirty="0">
+                        <a:latin typeface="Calibri" charset="0"/>
+                        <a:ea typeface="Calibri" charset="0"/>
+                        <a:cs typeface="Calibri" charset="0"/>
+                      </a:endParaRPr>
+                    </a:p>
+                  </a:txBody>
+                  <a:tcPr marL="91440" marR="91440" marT="45720" marB="45720">
+                    <a:lnL w="2540" cap="flat" cmpd="sng" algn="ctr">
+                      <a:solidFill>
+                        <a:srgbClr val="EEEEEE"/>
+                      </a:solidFill>
+                      <a:prstDash val="solid"/>
+                      <a:round/>
+                      <a:headEnd type="none" w="med" len="med"/>
+                      <a:tailEnd type="none" w="med" len="med"/>
+                    </a:lnL>
+                    <a:lnR w="2540" cap="flat" cmpd="sng" algn="ctr">
+                      <a:solidFill>
+                        <a:srgbClr val="EEEEEE"/>
+                      </a:solidFill>
+                      <a:prstDash val="solid"/>
+                      <a:round/>
+                      <a:headEnd type="none" w="med" len="med"/>
+                      <a:tailEnd type="none" w="med" len="med"/>
+                    </a:lnR>
+                    <a:lnT w="2540" cap="flat" cmpd="sng" algn="ctr">
+                      <a:solidFill>
+                        <a:srgbClr val="EEEEEE"/>
+                      </a:solidFill>
+                      <a:prstDash val="solid"/>
+                      <a:round/>
+                      <a:headEnd type="none" w="med" len="med"/>
+                      <a:tailEnd type="none" w="med" len="med"/>
+                    </a:lnT>
+                    <a:lnB w="2540" cap="flat" cmpd="sng" algn="ctr">
+                      <a:solidFill>
+                        <a:srgbClr val="EEEEEE"/>
+                      </a:solidFill>
+                      <a:prstDash val="solid"/>
+                      <a:round/>
+                      <a:headEnd type="none" w="med" len="med"/>
+                      <a:tailEnd type="none" w="med" len="med"/>
+                    </a:lnB>
+                  </a:tcPr>
+                </a:tc>
+                <a:tc>
+                  <a:txBody>
+                    <a:bodyPr/>
+                    <a:lstStyle/>
+                    <a:p>
+                      <a:pPr algn="ctr" indent="0" marL="0">
+                        <a:buNone/>
+                      </a:pPr>
+                      <a:endParaRPr lang="en-US" sz="500" dirty="0">
+                        <a:latin typeface="Calibri" charset="0"/>
+                        <a:ea typeface="Calibri" charset="0"/>
+                        <a:cs typeface="Calibri" charset="0"/>
+                      </a:endParaRPr>
+                    </a:p>
+                  </a:txBody>
+                  <a:tcPr marL="91440" marR="91440" marT="45720" marB="45720">
+                    <a:lnL w="2540" cap="flat" cmpd="sng" algn="ctr">
+                      <a:solidFill>
+                        <a:srgbClr val="EEEEEE"/>
+                      </a:solidFill>
+                      <a:prstDash val="solid"/>
+                      <a:round/>
+                      <a:headEnd type="none" w="med" len="med"/>
+                      <a:tailEnd type="none" w="med" len="med"/>
+                    </a:lnL>
+                    <a:lnR w="2540" cap="flat" cmpd="sng" algn="ctr">
+                      <a:solidFill>
+                        <a:srgbClr val="EEEEEE"/>
+                      </a:solidFill>
+                      <a:prstDash val="solid"/>
+                      <a:round/>
+                      <a:headEnd type="none" w="med" len="med"/>
+                      <a:tailEnd type="none" w="med" len="med"/>
+                    </a:lnR>
+                    <a:lnT w="2540" cap="flat" cmpd="sng" algn="ctr">
+                      <a:solidFill>
+                        <a:srgbClr val="EEEEEE"/>
+                      </a:solidFill>
+                      <a:prstDash val="solid"/>
+                      <a:round/>
+                      <a:headEnd type="none" w="med" len="med"/>
+                      <a:tailEnd type="none" w="med" len="med"/>
+                    </a:lnT>
+                    <a:lnB w="2540" cap="flat" cmpd="sng" algn="ctr">
+                      <a:solidFill>
+                        <a:srgbClr val="EEEEEE"/>
+                      </a:solidFill>
+                      <a:prstDash val="solid"/>
+                      <a:round/>
+                      <a:headEnd type="none" w="med" len="med"/>
+                      <a:tailEnd type="none" w="med" len="med"/>
+                    </a:lnB>
+                  </a:tcPr>
+                </a:tc>
+                <a:tc>
+                  <a:txBody>
+                    <a:bodyPr/>
+                    <a:lstStyle/>
+                    <a:p>
+                      <a:pPr algn="ctr" indent="0" marL="0">
+                        <a:buNone/>
+                      </a:pPr>
+                      <a:endParaRPr lang="en-US" sz="500" dirty="0">
+                        <a:latin typeface="Calibri" charset="0"/>
+                        <a:ea typeface="Calibri" charset="0"/>
+                        <a:cs typeface="Calibri" charset="0"/>
+                      </a:endParaRPr>
+                    </a:p>
+                  </a:txBody>
+                  <a:tcPr marL="91440" marR="91440" marT="45720" marB="45720">
+                    <a:lnL w="2540" cap="flat" cmpd="sng" algn="ctr">
+                      <a:solidFill>
+                        <a:srgbClr val="EEEEEE"/>
+                      </a:solidFill>
+                      <a:prstDash val="solid"/>
+                      <a:round/>
+                      <a:headEnd type="none" w="med" len="med"/>
+                      <a:tailEnd type="none" w="med" len="med"/>
+                    </a:lnL>
+                    <a:lnR w="2540" cap="flat" cmpd="sng" algn="ctr">
+                      <a:solidFill>
+                        <a:srgbClr val="EEEEEE"/>
+                      </a:solidFill>
+                      <a:prstDash val="solid"/>
+                      <a:round/>
+                      <a:headEnd type="none" w="med" len="med"/>
+                      <a:tailEnd type="none" w="med" len="med"/>
+                    </a:lnR>
+                    <a:lnT w="2540" cap="flat" cmpd="sng" algn="ctr">
+                      <a:solidFill>
+                        <a:srgbClr val="EEEEEE"/>
+                      </a:solidFill>
+                      <a:prstDash val="solid"/>
+                      <a:round/>
+                      <a:headEnd type="none" w="med" len="med"/>
+                      <a:tailEnd type="none" w="med" len="med"/>
+                    </a:lnT>
+                    <a:lnB w="2540" cap="flat" cmpd="sng" algn="ctr">
+                      <a:solidFill>
+                        <a:srgbClr val="EEEEEE"/>
+                      </a:solidFill>
+                      <a:prstDash val="solid"/>
+                      <a:round/>
+                      <a:headEnd type="none" w="med" len="med"/>
+                      <a:tailEnd type="none" w="med" len="med"/>
+                    </a:lnB>
+                  </a:tcPr>
+                </a:tc>
+                <a:tc>
+                  <a:txBody>
+                    <a:bodyPr/>
+                    <a:lstStyle/>
+                    <a:p>
+                      <a:pPr algn="ctr" indent="0" marL="0">
+                        <a:buNone/>
+                      </a:pPr>
+                      <a:endParaRPr lang="en-US" sz="500" dirty="0">
+                        <a:latin typeface="Calibri" charset="0"/>
+                        <a:ea typeface="Calibri" charset="0"/>
+                        <a:cs typeface="Calibri" charset="0"/>
+                      </a:endParaRPr>
+                    </a:p>
+                  </a:txBody>
+                  <a:tcPr marL="91440" marR="91440" marT="45720" marB="45720">
+                    <a:lnL w="2540" cap="flat" cmpd="sng" algn="ctr">
+                      <a:solidFill>
+                        <a:srgbClr val="EEEEEE"/>
+                      </a:solidFill>
+                      <a:prstDash val="solid"/>
+                      <a:round/>
+                      <a:headEnd type="none" w="med" len="med"/>
+                      <a:tailEnd type="none" w="med" len="med"/>
+                    </a:lnL>
+                    <a:lnR w="2540" cap="flat" cmpd="sng" algn="ctr">
+                      <a:solidFill>
+                        <a:srgbClr val="EEEEEE"/>
+                      </a:solidFill>
+                      <a:prstDash val="solid"/>
+                      <a:round/>
+                      <a:headEnd type="none" w="med" len="med"/>
+                      <a:tailEnd type="none" w="med" len="med"/>
+                    </a:lnR>
+                    <a:lnT w="2540" cap="flat" cmpd="sng" algn="ctr">
+                      <a:solidFill>
+                        <a:srgbClr val="EEEEEE"/>
+                      </a:solidFill>
+                      <a:prstDash val="solid"/>
+                      <a:round/>
+                      <a:headEnd type="none" w="med" len="med"/>
+                      <a:tailEnd type="none" w="med" len="med"/>
+                    </a:lnT>
+                    <a:lnB w="2540" cap="flat" cmpd="sng" algn="ctr">
+                      <a:solidFill>
+                        <a:srgbClr val="EEEEEE"/>
+                      </a:solidFill>
+                      <a:prstDash val="solid"/>
+                      <a:round/>
+                      <a:headEnd type="none" w="med" len="med"/>
+                      <a:tailEnd type="none" w="med" len="med"/>
+                    </a:lnB>
+                  </a:tcPr>
+                </a:tc>
+                <a:tc>
+                  <a:txBody>
+                    <a:bodyPr/>
+                    <a:lstStyle/>
+                    <a:p>
+                      <a:pPr algn="ctr" indent="0" marL="0">
+                        <a:buNone/>
+                      </a:pPr>
+                      <a:r>
+                        <a:rPr lang="en-US" sz="500" dirty="0">
+                          <a:solidFill>
+                            <a:srgbClr val="000000"/>
+                          </a:solidFill>
+                          <a:latin typeface="Calibri" pitchFamily="34" charset="0"/>
+                          <a:ea typeface="Calibri" pitchFamily="34" charset="-122"/>
+                          <a:cs typeface="Calibri" pitchFamily="34" charset="-120"/>
+                        </a:rPr>
+                        <a:t>0.18%</a:t>
+                      </a:r>
+                      <a:endParaRPr lang="en-US" sz="500" dirty="0">
+                        <a:latin typeface="Calibri" charset="0"/>
+                        <a:ea typeface="Calibri" charset="0"/>
+                        <a:cs typeface="Calibri" charset="0"/>
+                      </a:endParaRPr>
+                    </a:p>
+                  </a:txBody>
+                  <a:tcPr marL="91440" marR="91440" marT="45720" marB="45720">
+                    <a:lnL w="2540" cap="flat" cmpd="sng" algn="ctr">
+                      <a:solidFill>
+                        <a:srgbClr val="EEEEEE"/>
+                      </a:solidFill>
+                      <a:prstDash val="solid"/>
+                      <a:round/>
+                      <a:headEnd type="none" w="med" len="med"/>
+                      <a:tailEnd type="none" w="med" len="med"/>
+                    </a:lnL>
+                    <a:lnR w="2540" cap="flat" cmpd="sng" algn="ctr">
+                      <a:solidFill>
+                        <a:srgbClr val="EEEEEE"/>
+                      </a:solidFill>
+                      <a:prstDash val="solid"/>
+                      <a:round/>
+                      <a:headEnd type="none" w="med" len="med"/>
+                      <a:tailEnd type="none" w="med" len="med"/>
+                    </a:lnR>
+                    <a:lnT w="2540" cap="flat" cmpd="sng" algn="ctr">
+                      <a:solidFill>
+                        <a:srgbClr val="EEEEEE"/>
+                      </a:solidFill>
+                      <a:prstDash val="solid"/>
+                      <a:round/>
+                      <a:headEnd type="none" w="med" len="med"/>
+                      <a:tailEnd type="none" w="med" len="med"/>
+                    </a:lnT>
+                    <a:lnB w="2540" cap="flat" cmpd="sng" algn="ctr">
+                      <a:solidFill>
+                        <a:srgbClr val="EEEEEE"/>
+                      </a:solidFill>
+                      <a:prstDash val="solid"/>
+                      <a:round/>
+                      <a:headEnd type="none" w="med" len="med"/>
+                      <a:tailEnd type="none" w="med" len="med"/>
+                    </a:lnB>
+                  </a:tcPr>
+                </a:tc>
+                <a:tc>
+                  <a:txBody>
+                    <a:bodyPr/>
+                    <a:lstStyle/>
+                    <a:p>
+                      <a:pPr algn="ctr" indent="0" marL="0">
+                        <a:buNone/>
+                      </a:pPr>
+                      <a:r>
+                        <a:rPr lang="en-US" sz="500" dirty="0">
+                          <a:solidFill>
+                            <a:srgbClr val="000000"/>
+                          </a:solidFill>
+                          <a:latin typeface="Calibri" pitchFamily="34" charset="0"/>
+                          <a:ea typeface="Calibri" pitchFamily="34" charset="-122"/>
+                          <a:cs typeface="Calibri" pitchFamily="34" charset="-120"/>
+                        </a:rPr>
+                        <a:t>0.56%</a:t>
+                      </a:r>
+                      <a:endParaRPr lang="en-US" sz="500" dirty="0">
+                        <a:latin typeface="Calibri" charset="0"/>
+                        <a:ea typeface="Calibri" charset="0"/>
+                        <a:cs typeface="Calibri" charset="0"/>
+                      </a:endParaRPr>
+                    </a:p>
+                  </a:txBody>
+                  <a:tcPr marL="91440" marR="91440" marT="45720" marB="45720">
+                    <a:lnL w="2540" cap="flat" cmpd="sng" algn="ctr">
+                      <a:solidFill>
+                        <a:srgbClr val="EEEEEE"/>
+                      </a:solidFill>
+                      <a:prstDash val="solid"/>
+                      <a:round/>
+                      <a:headEnd type="none" w="med" len="med"/>
+                      <a:tailEnd type="none" w="med" len="med"/>
+                    </a:lnL>
+                    <a:lnR w="2540" cap="flat" cmpd="sng" algn="ctr">
+                      <a:solidFill>
+                        <a:srgbClr val="EEEEEE"/>
+                      </a:solidFill>
+                      <a:prstDash val="solid"/>
+                      <a:round/>
+                      <a:headEnd type="none" w="med" len="med"/>
+                      <a:tailEnd type="none" w="med" len="med"/>
+                    </a:lnR>
+                    <a:lnT w="2540" cap="flat" cmpd="sng" algn="ctr">
+                      <a:solidFill>
+                        <a:srgbClr val="EEEEEE"/>
+                      </a:solidFill>
+                      <a:prstDash val="solid"/>
+                      <a:round/>
+                      <a:headEnd type="none" w="med" len="med"/>
+                      <a:tailEnd type="none" w="med" len="med"/>
+                    </a:lnT>
+                    <a:lnB w="2540" cap="flat" cmpd="sng" algn="ctr">
+                      <a:solidFill>
+                        <a:srgbClr val="EEEEEE"/>
+                      </a:solidFill>
+                      <a:prstDash val="solid"/>
+                      <a:round/>
+                      <a:headEnd type="none" w="med" len="med"/>
+                      <a:tailEnd type="none" w="med" len="med"/>
+                    </a:lnB>
+                  </a:tcPr>
+                </a:tc>
+                <a:tc>
+                  <a:txBody>
+                    <a:bodyPr/>
+                    <a:lstStyle/>
+                    <a:p>
+                      <a:pPr algn="ctr" indent="0" marL="0">
+                        <a:buNone/>
+                      </a:pPr>
+                      <a:r>
+                        <a:rPr lang="en-US" sz="500" dirty="0">
+                          <a:solidFill>
+                            <a:srgbClr val="000000"/>
+                          </a:solidFill>
+                          <a:latin typeface="Calibri" pitchFamily="34" charset="0"/>
+                          <a:ea typeface="Calibri" pitchFamily="34" charset="-122"/>
+                          <a:cs typeface="Calibri" pitchFamily="34" charset="-120"/>
+                        </a:rPr>
+                        <a:t>0.52%</a:t>
+                      </a:r>
+                      <a:endParaRPr lang="en-US" sz="500" dirty="0">
+                        <a:latin typeface="Calibri" charset="0"/>
+                        <a:ea typeface="Calibri" charset="0"/>
+                        <a:cs typeface="Calibri" charset="0"/>
+                      </a:endParaRPr>
+                    </a:p>
+                  </a:txBody>
+                  <a:tcPr marL="91440" marR="91440" marT="45720" marB="45720">
+                    <a:lnL w="2540" cap="flat" cmpd="sng" algn="ctr">
+                      <a:solidFill>
+                        <a:srgbClr val="EEEEEE"/>
+                      </a:solidFill>
+                      <a:prstDash val="solid"/>
+                      <a:round/>
+                      <a:headEnd type="none" w="med" len="med"/>
+                      <a:tailEnd type="none" w="med" len="med"/>
+                    </a:lnL>
+                    <a:lnR w="2540" cap="flat" cmpd="sng" algn="ctr">
+                      <a:solidFill>
+                        <a:srgbClr val="EEEEEE"/>
+                      </a:solidFill>
+                      <a:prstDash val="solid"/>
+                      <a:round/>
+                      <a:headEnd type="none" w="med" len="med"/>
+                      <a:tailEnd type="none" w="med" len="med"/>
+                    </a:lnR>
+                    <a:lnT w="2540" cap="flat" cmpd="sng" algn="ctr">
+                      <a:solidFill>
+                        <a:srgbClr val="EEEEEE"/>
+                      </a:solidFill>
+                      <a:prstDash val="solid"/>
+                      <a:round/>
+                      <a:headEnd type="none" w="med" len="med"/>
+                      <a:tailEnd type="none" w="med" len="med"/>
+                    </a:lnT>
+                    <a:lnB w="2540" cap="flat" cmpd="sng" algn="ctr">
+                      <a:solidFill>
+                        <a:srgbClr val="EEEEEE"/>
+                      </a:solidFill>
+                      <a:prstDash val="solid"/>
+                      <a:round/>
+                      <a:headEnd type="none" w="med" len="med"/>
+                      <a:tailEnd type="none" w="med" len="med"/>
+                    </a:lnB>
+                  </a:tcPr>
+                </a:tc>
+                <a:tc>
+                  <a:txBody>
+                    <a:bodyPr/>
+                    <a:lstStyle/>
+                    <a:p>
+                      <a:pPr algn="ctr" indent="0" marL="0">
+                        <a:buNone/>
+                      </a:pPr>
+                      <a:r>
+                        <a:rPr lang="en-US" sz="500" dirty="0">
+                          <a:solidFill>
+                            <a:srgbClr val="000000"/>
+                          </a:solidFill>
+                          <a:latin typeface="Calibri" pitchFamily="34" charset="0"/>
+                          <a:ea typeface="Calibri" pitchFamily="34" charset="-122"/>
+                          <a:cs typeface="Calibri" pitchFamily="34" charset="-120"/>
+                        </a:rPr>
+                        <a:t>0.53%</a:t>
+                      </a:r>
+                      <a:endParaRPr lang="en-US" sz="500" dirty="0">
+                        <a:latin typeface="Calibri" charset="0"/>
+                        <a:ea typeface="Calibri" charset="0"/>
+                        <a:cs typeface="Calibri" charset="0"/>
+                      </a:endParaRPr>
+                    </a:p>
+                  </a:txBody>
+                  <a:tcPr marL="91440" marR="91440" marT="45720" marB="45720">
+                    <a:lnL w="2540" cap="flat" cmpd="sng" algn="ctr">
+                      <a:solidFill>
+                        <a:srgbClr val="EEEEEE"/>
+                      </a:solidFill>
+                      <a:prstDash val="solid"/>
+                      <a:round/>
+                      <a:headEnd type="none" w="med" len="med"/>
+                      <a:tailEnd type="none" w="med" len="med"/>
+                    </a:lnL>
+                    <a:lnR w="2540" cap="flat" cmpd="sng" algn="ctr">
+                      <a:solidFill>
+                        <a:srgbClr val="EEEEEE"/>
+                      </a:solidFill>
+                      <a:prstDash val="solid"/>
+                      <a:round/>
+                      <a:headEnd type="none" w="med" len="med"/>
+                      <a:tailEnd type="none" w="med" len="med"/>
+                    </a:lnR>
+                    <a:lnT w="2540" cap="flat" cmpd="sng" algn="ctr">
+                      <a:solidFill>
+                        <a:srgbClr val="EEEEEE"/>
+                      </a:solidFill>
+                      <a:prstDash val="solid"/>
+                      <a:round/>
+                      <a:headEnd type="none" w="med" len="med"/>
+                      <a:tailEnd type="none" w="med" len="med"/>
+                    </a:lnT>
+                    <a:lnB w="2540" cap="flat" cmpd="sng" algn="ctr">
+                      <a:solidFill>
+                        <a:srgbClr val="EEEEEE"/>
+                      </a:solidFill>
+                      <a:prstDash val="solid"/>
+                      <a:round/>
+                      <a:headEnd type="none" w="med" len="med"/>
+                      <a:tailEnd type="none" w="med" len="med"/>
+                    </a:lnB>
+                  </a:tcPr>
+                </a:tc>
+                <a:tc>
+                  <a:txBody>
+                    <a:bodyPr/>
+                    <a:lstStyle/>
+                    <a:p>
+                      <a:pPr algn="ctr" indent="0" marL="0">
+                        <a:buNone/>
+                      </a:pPr>
+                      <a:r>
+                        <a:rPr lang="en-US" sz="500" dirty="0">
+                          <a:solidFill>
+                            <a:srgbClr val="000000"/>
+                          </a:solidFill>
+                          <a:latin typeface="Calibri" pitchFamily="34" charset="0"/>
+                          <a:ea typeface="Calibri" pitchFamily="34" charset="-122"/>
+                          <a:cs typeface="Calibri" pitchFamily="34" charset="-120"/>
+                        </a:rPr>
+                        <a:t>0.51%</a:t>
+                      </a:r>
+                      <a:endParaRPr lang="en-US" sz="500" dirty="0">
+                        <a:latin typeface="Calibri" charset="0"/>
+                        <a:ea typeface="Calibri" charset="0"/>
+                        <a:cs typeface="Calibri" charset="0"/>
+                      </a:endParaRPr>
+                    </a:p>
+                  </a:txBody>
+                  <a:tcPr marL="91440" marR="91440" marT="45720" marB="45720">
+                    <a:lnL w="2540" cap="flat" cmpd="sng" algn="ctr">
+                      <a:solidFill>
+                        <a:srgbClr val="EEEEEE"/>
+                      </a:solidFill>
+                      <a:prstDash val="solid"/>
+                      <a:round/>
+                      <a:headEnd type="none" w="med" len="med"/>
+                      <a:tailEnd type="none" w="med" len="med"/>
+                    </a:lnL>
+                    <a:lnR w="2540" cap="flat" cmpd="sng" algn="ctr">
+                      <a:solidFill>
+                        <a:srgbClr val="EEEEEE"/>
+                      </a:solidFill>
+                      <a:prstDash val="solid"/>
+                      <a:round/>
+                      <a:headEnd type="none" w="med" len="med"/>
+                      <a:tailEnd type="none" w="med" len="med"/>
+                    </a:lnR>
+                    <a:lnT w="2540" cap="flat" cmpd="sng" algn="ctr">
+                      <a:solidFill>
+                        <a:srgbClr val="EEEEEE"/>
+                      </a:solidFill>
+                      <a:prstDash val="solid"/>
+                      <a:round/>
+                      <a:headEnd type="none" w="med" len="med"/>
+                      <a:tailEnd type="none" w="med" len="med"/>
+                    </a:lnT>
+                    <a:lnB w="2540" cap="flat" cmpd="sng" algn="ctr">
+                      <a:solidFill>
+                        <a:srgbClr val="EEEEEE"/>
+                      </a:solidFill>
+                      <a:prstDash val="solid"/>
+                      <a:round/>
+                      <a:headEnd type="none" w="med" len="med"/>
+                      <a:tailEnd type="none" w="med" len="med"/>
+                    </a:lnB>
+                  </a:tcPr>
+                </a:tc>
+                <a:tc>
+                  <a:txBody>
+                    <a:bodyPr/>
+                    <a:lstStyle/>
+                    <a:p>
+                      <a:pPr algn="ctr" indent="0" marL="0">
+                        <a:buNone/>
+                      </a:pPr>
+                      <a:r>
+                        <a:rPr lang="en-US" sz="500" b="1" dirty="0">
+                          <a:solidFill>
+                            <a:srgbClr val="000000"/>
+                          </a:solidFill>
+                          <a:latin typeface="Calibri" pitchFamily="34" charset="0"/>
+                          <a:ea typeface="Calibri" pitchFamily="34" charset="-122"/>
+                          <a:cs typeface="Calibri" pitchFamily="34" charset="-120"/>
+                        </a:rPr>
+                        <a:t>2.33%</a:t>
+                      </a:r>
+                      <a:endParaRPr lang="en-US" sz="500" dirty="0">
+                        <a:latin typeface="Calibri" charset="0"/>
+                        <a:ea typeface="Calibri" charset="0"/>
+                        <a:cs typeface="Calibri" charset="0"/>
+                      </a:endParaRPr>
+                    </a:p>
+                  </a:txBody>
+                  <a:tcPr marL="91440" marR="91440" marT="45720" marB="45720">
+                    <a:lnL w="2540" cap="flat" cmpd="sng" algn="ctr">
+                      <a:solidFill>
+                        <a:srgbClr val="EEEEEE"/>
+                      </a:solidFill>
+                      <a:prstDash val="solid"/>
+                      <a:round/>
+                      <a:headEnd type="none" w="med" len="med"/>
+                      <a:tailEnd type="none" w="med" len="med"/>
+                    </a:lnL>
+                    <a:lnR w="2540" cap="flat" cmpd="sng" algn="ctr">
+                      <a:solidFill>
+                        <a:srgbClr val="EEEEEE"/>
+                      </a:solidFill>
+                      <a:prstDash val="solid"/>
+                      <a:round/>
+                      <a:headEnd type="none" w="med" len="med"/>
+                      <a:tailEnd type="none" w="med" len="med"/>
+                    </a:lnR>
+                    <a:lnT w="2540" cap="flat" cmpd="sng" algn="ctr">
+                      <a:solidFill>
+                        <a:srgbClr val="EEEEEE"/>
+                      </a:solidFill>
+                      <a:prstDash val="solid"/>
+                      <a:round/>
+                      <a:headEnd type="none" w="med" len="med"/>
+                      <a:tailEnd type="none" w="med" len="med"/>
+                    </a:lnT>
+                    <a:lnB w="2540" cap="flat" cmpd="sng" algn="ctr">
+                      <a:solidFill>
+                        <a:srgbClr val="EEEEEE"/>
+                      </a:solidFill>
+                      <a:prstDash val="solid"/>
+                      <a:round/>
+                      <a:headEnd type="none" w="med" len="med"/>
+                      <a:tailEnd type="none" w="med" len="med"/>
+                    </a:lnB>
+                  </a:tcPr>
+                </a:tc>
+              </a:tr>
+              <a:tr h="123444">
+                <a:tc>
+                  <a:txBody>
+                    <a:bodyPr/>
+                    <a:lstStyle/>
+                    <a:p>
+                      <a:pPr algn="l" indent="0" marL="0">
+                        <a:buNone/>
+                      </a:pPr>
+                      <a:r>
+                        <a:rPr lang="en-US" sz="500" b="1" dirty="0">
+                          <a:solidFill>
+                            <a:srgbClr val="000000"/>
+                          </a:solidFill>
+                          <a:latin typeface="Calibri" pitchFamily="34" charset="0"/>
+                          <a:ea typeface="Calibri" pitchFamily="34" charset="-122"/>
+                          <a:cs typeface="Calibri" pitchFamily="34" charset="-120"/>
+                        </a:rPr>
+                        <a:t>2025</a:t>
+                      </a:r>
+                      <a:endParaRPr lang="en-US" sz="500" dirty="0">
+                        <a:latin typeface="Calibri" charset="0"/>
+                        <a:ea typeface="Calibri" charset="0"/>
+                        <a:cs typeface="Calibri" charset="0"/>
+                      </a:endParaRPr>
+                    </a:p>
+                  </a:txBody>
+                  <a:tcPr marL="91440" marR="91440" marT="45720" marB="45720">
+                    <a:lnL w="2540" cap="flat" cmpd="sng" algn="ctr">
+                      <a:solidFill>
+                        <a:srgbClr val="EEEEEE"/>
+                      </a:solidFill>
+                      <a:prstDash val="solid"/>
+                      <a:round/>
+                      <a:headEnd type="none" w="med" len="med"/>
+                      <a:tailEnd type="none" w="med" len="med"/>
+                    </a:lnL>
+                    <a:lnR w="2540" cap="flat" cmpd="sng" algn="ctr">
+                      <a:solidFill>
+                        <a:srgbClr val="EEEEEE"/>
+                      </a:solidFill>
+                      <a:prstDash val="solid"/>
+                      <a:round/>
+                      <a:headEnd type="none" w="med" len="med"/>
+                      <a:tailEnd type="none" w="med" len="med"/>
+                    </a:lnR>
+                    <a:lnT w="2540" cap="flat" cmpd="sng" algn="ctr">
+                      <a:solidFill>
+                        <a:srgbClr val="EEEEEE"/>
+                      </a:solidFill>
+                      <a:prstDash val="solid"/>
+                      <a:round/>
+                      <a:headEnd type="none" w="med" len="med"/>
+                      <a:tailEnd type="none" w="med" len="med"/>
+                    </a:lnT>
+                    <a:lnB w="2540" cap="flat" cmpd="sng" algn="ctr">
+                      <a:solidFill>
+                        <a:srgbClr val="EEEEEE"/>
+                      </a:solidFill>
+                      <a:prstDash val="solid"/>
+                      <a:round/>
+                      <a:headEnd type="none" w="med" len="med"/>
+                      <a:tailEnd type="none" w="med" len="med"/>
+                    </a:lnB>
+                  </a:tcPr>
+                </a:tc>
+                <a:tc>
+                  <a:txBody>
+                    <a:bodyPr/>
+                    <a:lstStyle/>
+                    <a:p>
+                      <a:pPr algn="l" indent="0" marL="0">
+                        <a:buNone/>
+                      </a:pPr>
+                      <a:r>
+                        <a:rPr lang="en-US" sz="500" dirty="0">
+                          <a:solidFill>
+                            <a:srgbClr val="777777"/>
+                          </a:solidFill>
+                          <a:latin typeface="Calibri" pitchFamily="34" charset="0"/>
+                          <a:ea typeface="Calibri" pitchFamily="34" charset="-122"/>
+                          <a:cs typeface="Calibri" pitchFamily="34" charset="-120"/>
+                        </a:rPr>
+                        <a:t>ICP</a:t>
+                      </a:r>
+                      <a:endParaRPr lang="en-US" sz="500" dirty="0">
+                        <a:latin typeface="Calibri" charset="0"/>
+                        <a:ea typeface="Calibri" charset="0"/>
+                        <a:cs typeface="Calibri" charset="0"/>
+                      </a:endParaRPr>
+                    </a:p>
+                  </a:txBody>
+                  <a:tcPr marL="91440" marR="91440" marT="45720" marB="45720">
+                    <a:lnL w="2540" cap="flat" cmpd="sng" algn="ctr">
+                      <a:solidFill>
+                        <a:srgbClr val="EEEEEE"/>
+                      </a:solidFill>
+                      <a:prstDash val="solid"/>
+                      <a:round/>
+                      <a:headEnd type="none" w="med" len="med"/>
+                      <a:tailEnd type="none" w="med" len="med"/>
+                    </a:lnL>
+                    <a:lnR w="2540" cap="flat" cmpd="sng" algn="ctr">
+                      <a:solidFill>
+                        <a:srgbClr val="EEEEEE"/>
+                      </a:solidFill>
+                      <a:prstDash val="solid"/>
+                      <a:round/>
+                      <a:headEnd type="none" w="med" len="med"/>
+                      <a:tailEnd type="none" w="med" len="med"/>
+                    </a:lnR>
+                    <a:lnT w="2540" cap="flat" cmpd="sng" algn="ctr">
+                      <a:solidFill>
+                        <a:srgbClr val="EEEEEE"/>
+                      </a:solidFill>
+                      <a:prstDash val="solid"/>
+                      <a:round/>
+                      <a:headEnd type="none" w="med" len="med"/>
+                      <a:tailEnd type="none" w="med" len="med"/>
+                    </a:lnT>
+                    <a:lnB w="2540" cap="flat" cmpd="sng" algn="ctr">
+                      <a:solidFill>
+                        <a:srgbClr val="EEEEEE"/>
+                      </a:solidFill>
+                      <a:prstDash val="solid"/>
+                      <a:round/>
+                      <a:headEnd type="none" w="med" len="med"/>
+                      <a:tailEnd type="none" w="med" len="med"/>
+                    </a:lnB>
+                  </a:tcPr>
+                </a:tc>
+                <a:tc>
+                  <a:txBody>
+                    <a:bodyPr/>
+                    <a:lstStyle/>
+                    <a:p>
+                      <a:pPr algn="ctr" indent="0" marL="0">
+                        <a:buNone/>
+                      </a:pPr>
+                      <a:r>
+                        <a:rPr lang="en-US" sz="500" dirty="0">
+                          <a:solidFill>
+                            <a:srgbClr val="777777"/>
+                          </a:solidFill>
+                          <a:latin typeface="Calibri" pitchFamily="34" charset="0"/>
+                          <a:ea typeface="Calibri" pitchFamily="34" charset="-122"/>
+                          <a:cs typeface="Calibri" pitchFamily="34" charset="-120"/>
+                        </a:rPr>
+                        <a:t>0.42%</a:t>
+                      </a:r>
+                      <a:endParaRPr lang="en-US" sz="500" dirty="0">
+                        <a:latin typeface="Calibri" charset="0"/>
+                        <a:ea typeface="Calibri" charset="0"/>
+                        <a:cs typeface="Calibri" charset="0"/>
+                      </a:endParaRPr>
+                    </a:p>
+                  </a:txBody>
+                  <a:tcPr marL="91440" marR="91440" marT="45720" marB="45720">
+                    <a:lnL w="2540" cap="flat" cmpd="sng" algn="ctr">
+                      <a:solidFill>
+                        <a:srgbClr val="EEEEEE"/>
+                      </a:solidFill>
+                      <a:prstDash val="solid"/>
+                      <a:round/>
+                      <a:headEnd type="none" w="med" len="med"/>
+                      <a:tailEnd type="none" w="med" len="med"/>
+                    </a:lnL>
+                    <a:lnR w="2540" cap="flat" cmpd="sng" algn="ctr">
+                      <a:solidFill>
+                        <a:srgbClr val="EEEEEE"/>
+                      </a:solidFill>
+                      <a:prstDash val="solid"/>
+                      <a:round/>
+                      <a:headEnd type="none" w="med" len="med"/>
+                      <a:tailEnd type="none" w="med" len="med"/>
+                    </a:lnR>
+                    <a:lnT w="2540" cap="flat" cmpd="sng" algn="ctr">
+                      <a:solidFill>
+                        <a:srgbClr val="EEEEEE"/>
+                      </a:solidFill>
+                      <a:prstDash val="solid"/>
+                      <a:round/>
+                      <a:headEnd type="none" w="med" len="med"/>
+                      <a:tailEnd type="none" w="med" len="med"/>
+                    </a:lnT>
+                    <a:lnB w="2540" cap="flat" cmpd="sng" algn="ctr">
+                      <a:solidFill>
+                        <a:srgbClr val="EEEEEE"/>
+                      </a:solidFill>
+                      <a:prstDash val="solid"/>
+                      <a:round/>
+                      <a:headEnd type="none" w="med" len="med"/>
+                      <a:tailEnd type="none" w="med" len="med"/>
+                    </a:lnB>
+                  </a:tcPr>
+                </a:tc>
+                <a:tc>
+                  <a:txBody>
+                    <a:bodyPr/>
+                    <a:lstStyle/>
+                    <a:p>
+                      <a:pPr algn="ctr" indent="0" marL="0">
+                        <a:buNone/>
+                      </a:pPr>
+                      <a:r>
+                        <a:rPr lang="en-US" sz="500" dirty="0">
+                          <a:solidFill>
+                            <a:srgbClr val="777777"/>
+                          </a:solidFill>
+                          <a:latin typeface="Calibri" pitchFamily="34" charset="0"/>
+                          <a:ea typeface="Calibri" pitchFamily="34" charset="-122"/>
+                          <a:cs typeface="Calibri" pitchFamily="34" charset="-120"/>
+                        </a:rPr>
+                        <a:t>0.42%</a:t>
+                      </a:r>
+                      <a:endParaRPr lang="en-US" sz="500" dirty="0">
+                        <a:latin typeface="Calibri" charset="0"/>
+                        <a:ea typeface="Calibri" charset="0"/>
+                        <a:cs typeface="Calibri" charset="0"/>
+                      </a:endParaRPr>
+                    </a:p>
+                  </a:txBody>
+                  <a:tcPr marL="91440" marR="91440" marT="45720" marB="45720">
+                    <a:lnL w="2540" cap="flat" cmpd="sng" algn="ctr">
+                      <a:solidFill>
+                        <a:srgbClr val="EEEEEE"/>
+                      </a:solidFill>
+                      <a:prstDash val="solid"/>
+                      <a:round/>
+                      <a:headEnd type="none" w="med" len="med"/>
+                      <a:tailEnd type="none" w="med" len="med"/>
+                    </a:lnL>
+                    <a:lnR w="2540" cap="flat" cmpd="sng" algn="ctr">
+                      <a:solidFill>
+                        <a:srgbClr val="EEEEEE"/>
+                      </a:solidFill>
+                      <a:prstDash val="solid"/>
+                      <a:round/>
+                      <a:headEnd type="none" w="med" len="med"/>
+                      <a:tailEnd type="none" w="med" len="med"/>
+                    </a:lnR>
+                    <a:lnT w="2540" cap="flat" cmpd="sng" algn="ctr">
+                      <a:solidFill>
+                        <a:srgbClr val="EEEEEE"/>
+                      </a:solidFill>
+                      <a:prstDash val="solid"/>
+                      <a:round/>
+                      <a:headEnd type="none" w="med" len="med"/>
+                      <a:tailEnd type="none" w="med" len="med"/>
+                    </a:lnT>
+                    <a:lnB w="2540" cap="flat" cmpd="sng" algn="ctr">
+                      <a:solidFill>
+                        <a:srgbClr val="EEEEEE"/>
+                      </a:solidFill>
+                      <a:prstDash val="solid"/>
+                      <a:round/>
+                      <a:headEnd type="none" w="med" len="med"/>
+                      <a:tailEnd type="none" w="med" len="med"/>
+                    </a:lnB>
+                  </a:tcPr>
+                </a:tc>
+                <a:tc>
+                  <a:txBody>
+                    <a:bodyPr/>
+                    <a:lstStyle/>
+                    <a:p>
+                      <a:pPr algn="ctr" indent="0" marL="0">
+                        <a:buNone/>
+                      </a:pPr>
+                      <a:r>
+                        <a:rPr lang="en-US" sz="500" dirty="0">
+                          <a:solidFill>
+                            <a:srgbClr val="777777"/>
+                          </a:solidFill>
+                          <a:latin typeface="Calibri" pitchFamily="34" charset="0"/>
+                          <a:ea typeface="Calibri" pitchFamily="34" charset="-122"/>
+                          <a:cs typeface="Calibri" pitchFamily="34" charset="-120"/>
+                        </a:rPr>
+                        <a:t>0.42%</a:t>
+                      </a:r>
+                      <a:endParaRPr lang="en-US" sz="500" dirty="0">
+                        <a:latin typeface="Calibri" charset="0"/>
+                        <a:ea typeface="Calibri" charset="0"/>
+                        <a:cs typeface="Calibri" charset="0"/>
+                      </a:endParaRPr>
+                    </a:p>
+                  </a:txBody>
+                  <a:tcPr marL="91440" marR="91440" marT="45720" marB="45720">
+                    <a:lnL w="2540" cap="flat" cmpd="sng" algn="ctr">
+                      <a:solidFill>
+                        <a:srgbClr val="EEEEEE"/>
+                      </a:solidFill>
+                      <a:prstDash val="solid"/>
+                      <a:round/>
+                      <a:headEnd type="none" w="med" len="med"/>
+                      <a:tailEnd type="none" w="med" len="med"/>
+                    </a:lnL>
+                    <a:lnR w="2540" cap="flat" cmpd="sng" algn="ctr">
+                      <a:solidFill>
+                        <a:srgbClr val="EEEEEE"/>
+                      </a:solidFill>
+                      <a:prstDash val="solid"/>
+                      <a:round/>
+                      <a:headEnd type="none" w="med" len="med"/>
+                      <a:tailEnd type="none" w="med" len="med"/>
+                    </a:lnR>
+                    <a:lnT w="2540" cap="flat" cmpd="sng" algn="ctr">
+                      <a:solidFill>
+                        <a:srgbClr val="EEEEEE"/>
+                      </a:solidFill>
+                      <a:prstDash val="solid"/>
+                      <a:round/>
+                      <a:headEnd type="none" w="med" len="med"/>
+                      <a:tailEnd type="none" w="med" len="med"/>
+                    </a:lnT>
+                    <a:lnB w="2540" cap="flat" cmpd="sng" algn="ctr">
+                      <a:solidFill>
+                        <a:srgbClr val="EEEEEE"/>
+                      </a:solidFill>
+                      <a:prstDash val="solid"/>
+                      <a:round/>
+                      <a:headEnd type="none" w="med" len="med"/>
+                      <a:tailEnd type="none" w="med" len="med"/>
+                    </a:lnB>
+                  </a:tcPr>
+                </a:tc>
+                <a:tc>
+                  <a:txBody>
+                    <a:bodyPr/>
+                    <a:lstStyle/>
+                    <a:p>
+                      <a:pPr algn="ctr" indent="0" marL="0">
+                        <a:buNone/>
+                      </a:pPr>
+                      <a:r>
+                        <a:rPr lang="en-US" sz="500" dirty="0">
+                          <a:solidFill>
+                            <a:srgbClr val="777777"/>
+                          </a:solidFill>
+                          <a:latin typeface="Calibri" pitchFamily="34" charset="0"/>
+                          <a:ea typeface="Calibri" pitchFamily="34" charset="-122"/>
+                          <a:cs typeface="Calibri" pitchFamily="34" charset="-120"/>
+                        </a:rPr>
+                        <a:t>0.42%</a:t>
+                      </a:r>
+                      <a:endParaRPr lang="en-US" sz="500" dirty="0">
+                        <a:latin typeface="Calibri" charset="0"/>
+                        <a:ea typeface="Calibri" charset="0"/>
+                        <a:cs typeface="Calibri" charset="0"/>
+                      </a:endParaRPr>
+                    </a:p>
+                  </a:txBody>
+                  <a:tcPr marL="91440" marR="91440" marT="45720" marB="45720">
+                    <a:lnL w="2540" cap="flat" cmpd="sng" algn="ctr">
+                      <a:solidFill>
+                        <a:srgbClr val="EEEEEE"/>
+                      </a:solidFill>
+                      <a:prstDash val="solid"/>
+                      <a:round/>
+                      <a:headEnd type="none" w="med" len="med"/>
+                      <a:tailEnd type="none" w="med" len="med"/>
+                    </a:lnL>
+                    <a:lnR w="2540" cap="flat" cmpd="sng" algn="ctr">
+                      <a:solidFill>
+                        <a:srgbClr val="EEEEEE"/>
+                      </a:solidFill>
+                      <a:prstDash val="solid"/>
+                      <a:round/>
+                      <a:headEnd type="none" w="med" len="med"/>
+                      <a:tailEnd type="none" w="med" len="med"/>
+                    </a:lnR>
+                    <a:lnT w="2540" cap="flat" cmpd="sng" algn="ctr">
+                      <a:solidFill>
+                        <a:srgbClr val="EEEEEE"/>
+                      </a:solidFill>
+                      <a:prstDash val="solid"/>
+                      <a:round/>
+                      <a:headEnd type="none" w="med" len="med"/>
+                      <a:tailEnd type="none" w="med" len="med"/>
+                    </a:lnT>
+                    <a:lnB w="2540" cap="flat" cmpd="sng" algn="ctr">
+                      <a:solidFill>
+                        <a:srgbClr val="EEEEEE"/>
+                      </a:solidFill>
+                      <a:prstDash val="solid"/>
+                      <a:round/>
+                      <a:headEnd type="none" w="med" len="med"/>
+                      <a:tailEnd type="none" w="med" len="med"/>
+                    </a:lnB>
+                  </a:tcPr>
+                </a:tc>
+                <a:tc>
+                  <a:txBody>
+                    <a:bodyPr/>
+                    <a:lstStyle/>
+                    <a:p>
+                      <a:pPr algn="ctr" indent="0" marL="0">
+                        <a:buNone/>
+                      </a:pPr>
+                      <a:r>
+                        <a:rPr lang="en-US" sz="500" dirty="0">
+                          <a:solidFill>
+                            <a:srgbClr val="777777"/>
+                          </a:solidFill>
+                          <a:latin typeface="Calibri" pitchFamily="34" charset="0"/>
+                          <a:ea typeface="Calibri" pitchFamily="34" charset="-122"/>
+                          <a:cs typeface="Calibri" pitchFamily="34" charset="-120"/>
+                        </a:rPr>
+                        <a:t>0.42%</a:t>
+                      </a:r>
+                      <a:endParaRPr lang="en-US" sz="500" dirty="0">
+                        <a:latin typeface="Calibri" charset="0"/>
+                        <a:ea typeface="Calibri" charset="0"/>
+                        <a:cs typeface="Calibri" charset="0"/>
+                      </a:endParaRPr>
+                    </a:p>
+                  </a:txBody>
+                  <a:tcPr marL="91440" marR="91440" marT="45720" marB="45720">
+                    <a:lnL w="2540" cap="flat" cmpd="sng" algn="ctr">
+                      <a:solidFill>
+                        <a:srgbClr val="EEEEEE"/>
+                      </a:solidFill>
+                      <a:prstDash val="solid"/>
+                      <a:round/>
+                      <a:headEnd type="none" w="med" len="med"/>
+                      <a:tailEnd type="none" w="med" len="med"/>
+                    </a:lnL>
+                    <a:lnR w="2540" cap="flat" cmpd="sng" algn="ctr">
+                      <a:solidFill>
+                        <a:srgbClr val="EEEEEE"/>
+                      </a:solidFill>
+                      <a:prstDash val="solid"/>
+                      <a:round/>
+                      <a:headEnd type="none" w="med" len="med"/>
+                      <a:tailEnd type="none" w="med" len="med"/>
+                    </a:lnR>
+                    <a:lnT w="2540" cap="flat" cmpd="sng" algn="ctr">
+                      <a:solidFill>
+                        <a:srgbClr val="EEEEEE"/>
+                      </a:solidFill>
+                      <a:prstDash val="solid"/>
+                      <a:round/>
+                      <a:headEnd type="none" w="med" len="med"/>
+                      <a:tailEnd type="none" w="med" len="med"/>
+                    </a:lnT>
+                    <a:lnB w="2540" cap="flat" cmpd="sng" algn="ctr">
+                      <a:solidFill>
+                        <a:srgbClr val="EEEEEE"/>
+                      </a:solidFill>
+                      <a:prstDash val="solid"/>
+                      <a:round/>
+                      <a:headEnd type="none" w="med" len="med"/>
+                      <a:tailEnd type="none" w="med" len="med"/>
+                    </a:lnB>
+                  </a:tcPr>
+                </a:tc>
+                <a:tc>
+                  <a:txBody>
+                    <a:bodyPr/>
+                    <a:lstStyle/>
+                    <a:p>
+                      <a:pPr algn="ctr" indent="0" marL="0">
+                        <a:buNone/>
+                      </a:pPr>
+                      <a:r>
+                        <a:rPr lang="en-US" sz="500" dirty="0">
+                          <a:solidFill>
+                            <a:srgbClr val="777777"/>
+                          </a:solidFill>
+                          <a:latin typeface="Calibri" pitchFamily="34" charset="0"/>
+                          <a:ea typeface="Calibri" pitchFamily="34" charset="-122"/>
+                          <a:cs typeface="Calibri" pitchFamily="34" charset="-120"/>
+                        </a:rPr>
+                        <a:t>0.42%</a:t>
+                      </a:r>
+                      <a:endParaRPr lang="en-US" sz="500" dirty="0">
+                        <a:latin typeface="Calibri" charset="0"/>
+                        <a:ea typeface="Calibri" charset="0"/>
+                        <a:cs typeface="Calibri" charset="0"/>
+                      </a:endParaRPr>
+                    </a:p>
+                  </a:txBody>
+                  <a:tcPr marL="91440" marR="91440" marT="45720" marB="45720">
+                    <a:lnL w="2540" cap="flat" cmpd="sng" algn="ctr">
+                      <a:solidFill>
+                        <a:srgbClr val="EEEEEE"/>
+                      </a:solidFill>
+                      <a:prstDash val="solid"/>
+                      <a:round/>
+                      <a:headEnd type="none" w="med" len="med"/>
+                      <a:tailEnd type="none" w="med" len="med"/>
+                    </a:lnL>
+                    <a:lnR w="2540" cap="flat" cmpd="sng" algn="ctr">
+                      <a:solidFill>
+                        <a:srgbClr val="EEEEEE"/>
+                      </a:solidFill>
+                      <a:prstDash val="solid"/>
+                      <a:round/>
+                      <a:headEnd type="none" w="med" len="med"/>
+                      <a:tailEnd type="none" w="med" len="med"/>
+                    </a:lnR>
+                    <a:lnT w="2540" cap="flat" cmpd="sng" algn="ctr">
+                      <a:solidFill>
+                        <a:srgbClr val="EEEEEE"/>
+                      </a:solidFill>
+                      <a:prstDash val="solid"/>
+                      <a:round/>
+                      <a:headEnd type="none" w="med" len="med"/>
+                      <a:tailEnd type="none" w="med" len="med"/>
+                    </a:lnT>
+                    <a:lnB w="2540" cap="flat" cmpd="sng" algn="ctr">
+                      <a:solidFill>
+                        <a:srgbClr val="EEEEEE"/>
+                      </a:solidFill>
+                      <a:prstDash val="solid"/>
+                      <a:round/>
+                      <a:headEnd type="none" w="med" len="med"/>
+                      <a:tailEnd type="none" w="med" len="med"/>
+                    </a:lnB>
+                  </a:tcPr>
+                </a:tc>
+                <a:tc>
+                  <a:txBody>
+                    <a:bodyPr/>
+                    <a:lstStyle/>
+                    <a:p>
+                      <a:pPr algn="ctr" indent="0" marL="0">
+                        <a:buNone/>
+                      </a:pPr>
+                      <a:r>
+                        <a:rPr lang="en-US" sz="500" dirty="0">
+                          <a:solidFill>
+                            <a:srgbClr val="777777"/>
+                          </a:solidFill>
+                          <a:latin typeface="Calibri" pitchFamily="34" charset="0"/>
+                          <a:ea typeface="Calibri" pitchFamily="34" charset="-122"/>
+                          <a:cs typeface="Calibri" pitchFamily="34" charset="-120"/>
+                        </a:rPr>
+                        <a:t>0.41%</a:t>
+                      </a:r>
+                      <a:endParaRPr lang="en-US" sz="500" dirty="0">
+                        <a:latin typeface="Calibri" charset="0"/>
+                        <a:ea typeface="Calibri" charset="0"/>
+                        <a:cs typeface="Calibri" charset="0"/>
+                      </a:endParaRPr>
+                    </a:p>
+                  </a:txBody>
+                  <a:tcPr marL="91440" marR="91440" marT="45720" marB="45720">
+                    <a:lnL w="2540" cap="flat" cmpd="sng" algn="ctr">
+                      <a:solidFill>
+                        <a:srgbClr val="EEEEEE"/>
+                      </a:solidFill>
+                      <a:prstDash val="solid"/>
+                      <a:round/>
+                      <a:headEnd type="none" w="med" len="med"/>
+                      <a:tailEnd type="none" w="med" len="med"/>
+                    </a:lnL>
+                    <a:lnR w="2540" cap="flat" cmpd="sng" algn="ctr">
+                      <a:solidFill>
+                        <a:srgbClr val="EEEEEE"/>
+                      </a:solidFill>
+                      <a:prstDash val="solid"/>
+                      <a:round/>
+                      <a:headEnd type="none" w="med" len="med"/>
+                      <a:tailEnd type="none" w="med" len="med"/>
+                    </a:lnR>
+                    <a:lnT w="2540" cap="flat" cmpd="sng" algn="ctr">
+                      <a:solidFill>
+                        <a:srgbClr val="EEEEEE"/>
+                      </a:solidFill>
+                      <a:prstDash val="solid"/>
+                      <a:round/>
+                      <a:headEnd type="none" w="med" len="med"/>
+                      <a:tailEnd type="none" w="med" len="med"/>
+                    </a:lnT>
+                    <a:lnB w="2540" cap="flat" cmpd="sng" algn="ctr">
+                      <a:solidFill>
+                        <a:srgbClr val="EEEEEE"/>
+                      </a:solidFill>
+                      <a:prstDash val="solid"/>
+                      <a:round/>
+                      <a:headEnd type="none" w="med" len="med"/>
+                      <a:tailEnd type="none" w="med" len="med"/>
+                    </a:lnB>
+                  </a:tcPr>
+                </a:tc>
+                <a:tc>
+                  <a:txBody>
+                    <a:bodyPr/>
+                    <a:lstStyle/>
+                    <a:p>
+                      <a:pPr algn="ctr" indent="0" marL="0">
+                        <a:buNone/>
+                      </a:pPr>
+                      <a:r>
+                        <a:rPr lang="en-US" sz="500" dirty="0">
+                          <a:solidFill>
+                            <a:srgbClr val="777777"/>
+                          </a:solidFill>
+                          <a:latin typeface="Calibri" pitchFamily="34" charset="0"/>
+                          <a:ea typeface="Calibri" pitchFamily="34" charset="-122"/>
+                          <a:cs typeface="Calibri" pitchFamily="34" charset="-120"/>
+                        </a:rPr>
+                        <a:t>0.40%</a:t>
+                      </a:r>
+                      <a:endParaRPr lang="en-US" sz="500" dirty="0">
+                        <a:latin typeface="Calibri" charset="0"/>
+                        <a:ea typeface="Calibri" charset="0"/>
+                        <a:cs typeface="Calibri" charset="0"/>
+                      </a:endParaRPr>
+                    </a:p>
+                  </a:txBody>
+                  <a:tcPr marL="91440" marR="91440" marT="45720" marB="45720">
+                    <a:lnL w="2540" cap="flat" cmpd="sng" algn="ctr">
+                      <a:solidFill>
+                        <a:srgbClr val="EEEEEE"/>
+                      </a:solidFill>
+                      <a:prstDash val="solid"/>
+                      <a:round/>
+                      <a:headEnd type="none" w="med" len="med"/>
+                      <a:tailEnd type="none" w="med" len="med"/>
+                    </a:lnL>
+                    <a:lnR w="2540" cap="flat" cmpd="sng" algn="ctr">
+                      <a:solidFill>
+                        <a:srgbClr val="EEEEEE"/>
+                      </a:solidFill>
+                      <a:prstDash val="solid"/>
+                      <a:round/>
+                      <a:headEnd type="none" w="med" len="med"/>
+                      <a:tailEnd type="none" w="med" len="med"/>
+                    </a:lnR>
+                    <a:lnT w="2540" cap="flat" cmpd="sng" algn="ctr">
+                      <a:solidFill>
+                        <a:srgbClr val="EEEEEE"/>
+                      </a:solidFill>
+                      <a:prstDash val="solid"/>
+                      <a:round/>
+                      <a:headEnd type="none" w="med" len="med"/>
+                      <a:tailEnd type="none" w="med" len="med"/>
+                    </a:lnT>
+                    <a:lnB w="2540" cap="flat" cmpd="sng" algn="ctr">
+                      <a:solidFill>
+                        <a:srgbClr val="EEEEEE"/>
+                      </a:solidFill>
+                      <a:prstDash val="solid"/>
+                      <a:round/>
+                      <a:headEnd type="none" w="med" len="med"/>
+                      <a:tailEnd type="none" w="med" len="med"/>
+                    </a:lnB>
+                  </a:tcPr>
+                </a:tc>
+                <a:tc>
+                  <a:txBody>
+                    <a:bodyPr/>
+                    <a:lstStyle/>
+                    <a:p>
+                      <a:pPr algn="ctr" indent="0" marL="0">
+                        <a:buNone/>
+                      </a:pPr>
+                      <a:r>
+                        <a:rPr lang="en-US" sz="500" dirty="0">
+                          <a:solidFill>
+                            <a:srgbClr val="777777"/>
+                          </a:solidFill>
+                          <a:latin typeface="Calibri" pitchFamily="34" charset="0"/>
+                          <a:ea typeface="Calibri" pitchFamily="34" charset="-122"/>
+                          <a:cs typeface="Calibri" pitchFamily="34" charset="-120"/>
+                        </a:rPr>
+                        <a:t>0.40%</a:t>
+                      </a:r>
+                      <a:endParaRPr lang="en-US" sz="500" dirty="0">
+                        <a:latin typeface="Calibri" charset="0"/>
+                        <a:ea typeface="Calibri" charset="0"/>
+                        <a:cs typeface="Calibri" charset="0"/>
+                      </a:endParaRPr>
+                    </a:p>
+                  </a:txBody>
+                  <a:tcPr marL="91440" marR="91440" marT="45720" marB="45720">
+                    <a:lnL w="2540" cap="flat" cmpd="sng" algn="ctr">
+                      <a:solidFill>
+                        <a:srgbClr val="EEEEEE"/>
+                      </a:solidFill>
+                      <a:prstDash val="solid"/>
+                      <a:round/>
+                      <a:headEnd type="none" w="med" len="med"/>
+                      <a:tailEnd type="none" w="med" len="med"/>
+                    </a:lnL>
+                    <a:lnR w="2540" cap="flat" cmpd="sng" algn="ctr">
+                      <a:solidFill>
+                        <a:srgbClr val="EEEEEE"/>
+                      </a:solidFill>
+                      <a:prstDash val="solid"/>
+                      <a:round/>
+                      <a:headEnd type="none" w="med" len="med"/>
+                      <a:tailEnd type="none" w="med" len="med"/>
+                    </a:lnR>
+                    <a:lnT w="2540" cap="flat" cmpd="sng" algn="ctr">
+                      <a:solidFill>
+                        <a:srgbClr val="EEEEEE"/>
+                      </a:solidFill>
+                      <a:prstDash val="solid"/>
+                      <a:round/>
+                      <a:headEnd type="none" w="med" len="med"/>
+                      <a:tailEnd type="none" w="med" len="med"/>
+                    </a:lnT>
+                    <a:lnB w="2540" cap="flat" cmpd="sng" algn="ctr">
+                      <a:solidFill>
+                        <a:srgbClr val="EEEEEE"/>
+                      </a:solidFill>
+                      <a:prstDash val="solid"/>
+                      <a:round/>
+                      <a:headEnd type="none" w="med" len="med"/>
+                      <a:tailEnd type="none" w="med" len="med"/>
+                    </a:lnB>
+                  </a:tcPr>
+                </a:tc>
+                <a:tc>
+                  <a:txBody>
+                    <a:bodyPr/>
+                    <a:lstStyle/>
+                    <a:p>
+                      <a:pPr algn="ctr" indent="0" marL="0">
+                        <a:buNone/>
+                      </a:pPr>
+                      <a:r>
+                        <a:rPr lang="en-US" sz="500" dirty="0">
+                          <a:solidFill>
+                            <a:srgbClr val="777777"/>
+                          </a:solidFill>
+                          <a:latin typeface="Calibri" pitchFamily="34" charset="0"/>
+                          <a:ea typeface="Calibri" pitchFamily="34" charset="-122"/>
+                          <a:cs typeface="Calibri" pitchFamily="34" charset="-120"/>
+                        </a:rPr>
+                        <a:t>0.40%</a:t>
+                      </a:r>
+                      <a:endParaRPr lang="en-US" sz="500" dirty="0">
+                        <a:latin typeface="Calibri" charset="0"/>
+                        <a:ea typeface="Calibri" charset="0"/>
+                        <a:cs typeface="Calibri" charset="0"/>
+                      </a:endParaRPr>
+                    </a:p>
+                  </a:txBody>
+                  <a:tcPr marL="91440" marR="91440" marT="45720" marB="45720">
+                    <a:lnL w="2540" cap="flat" cmpd="sng" algn="ctr">
+                      <a:solidFill>
+                        <a:srgbClr val="EEEEEE"/>
+                      </a:solidFill>
+                      <a:prstDash val="solid"/>
+                      <a:round/>
+                      <a:headEnd type="none" w="med" len="med"/>
+                      <a:tailEnd type="none" w="med" len="med"/>
+                    </a:lnL>
+                    <a:lnR w="2540" cap="flat" cmpd="sng" algn="ctr">
+                      <a:solidFill>
+                        <a:srgbClr val="EEEEEE"/>
+                      </a:solidFill>
+                      <a:prstDash val="solid"/>
+                      <a:round/>
+                      <a:headEnd type="none" w="med" len="med"/>
+                      <a:tailEnd type="none" w="med" len="med"/>
+                    </a:lnR>
+                    <a:lnT w="2540" cap="flat" cmpd="sng" algn="ctr">
+                      <a:solidFill>
+                        <a:srgbClr val="EEEEEE"/>
+                      </a:solidFill>
+                      <a:prstDash val="solid"/>
+                      <a:round/>
+                      <a:headEnd type="none" w="med" len="med"/>
+                      <a:tailEnd type="none" w="med" len="med"/>
+                    </a:lnT>
+                    <a:lnB w="2540" cap="flat" cmpd="sng" algn="ctr">
+                      <a:solidFill>
+                        <a:srgbClr val="EEEEEE"/>
+                      </a:solidFill>
+                      <a:prstDash val="solid"/>
+                      <a:round/>
+                      <a:headEnd type="none" w="med" len="med"/>
+                      <a:tailEnd type="none" w="med" len="med"/>
+                    </a:lnB>
+                  </a:tcPr>
+                </a:tc>
+                <a:tc>
+                  <a:txBody>
+                    <a:bodyPr/>
+                    <a:lstStyle/>
+                    <a:p>
+                      <a:pPr algn="ctr" indent="0" marL="0">
+                        <a:buNone/>
+                      </a:pPr>
+                      <a:r>
+                        <a:rPr lang="en-US" sz="500" dirty="0">
+                          <a:solidFill>
+                            <a:srgbClr val="777777"/>
+                          </a:solidFill>
+                          <a:latin typeface="Calibri" pitchFamily="34" charset="0"/>
+                          <a:ea typeface="Calibri" pitchFamily="34" charset="-122"/>
+                          <a:cs typeface="Calibri" pitchFamily="34" charset="-120"/>
+                        </a:rPr>
+                        <a:t>0.40%</a:t>
+                      </a:r>
+                      <a:endParaRPr lang="en-US" sz="500" dirty="0">
+                        <a:latin typeface="Calibri" charset="0"/>
+                        <a:ea typeface="Calibri" charset="0"/>
+                        <a:cs typeface="Calibri" charset="0"/>
+                      </a:endParaRPr>
+                    </a:p>
+                  </a:txBody>
+                  <a:tcPr marL="91440" marR="91440" marT="45720" marB="45720">
+                    <a:lnL w="2540" cap="flat" cmpd="sng" algn="ctr">
+                      <a:solidFill>
+                        <a:srgbClr val="EEEEEE"/>
+                      </a:solidFill>
+                      <a:prstDash val="solid"/>
+                      <a:round/>
+                      <a:headEnd type="none" w="med" len="med"/>
+                      <a:tailEnd type="none" w="med" len="med"/>
+                    </a:lnL>
+                    <a:lnR w="2540" cap="flat" cmpd="sng" algn="ctr">
+                      <a:solidFill>
+                        <a:srgbClr val="EEEEEE"/>
+                      </a:solidFill>
+                      <a:prstDash val="solid"/>
+                      <a:round/>
+                      <a:headEnd type="none" w="med" len="med"/>
+                      <a:tailEnd type="none" w="med" len="med"/>
+                    </a:lnR>
+                    <a:lnT w="2540" cap="flat" cmpd="sng" algn="ctr">
+                      <a:solidFill>
+                        <a:srgbClr val="EEEEEE"/>
+                      </a:solidFill>
+                      <a:prstDash val="solid"/>
+                      <a:round/>
+                      <a:headEnd type="none" w="med" len="med"/>
+                      <a:tailEnd type="none" w="med" len="med"/>
+                    </a:lnT>
+                    <a:lnB w="2540" cap="flat" cmpd="sng" algn="ctr">
+                      <a:solidFill>
+                        <a:srgbClr val="EEEEEE"/>
+                      </a:solidFill>
+                      <a:prstDash val="solid"/>
+                      <a:round/>
+                      <a:headEnd type="none" w="med" len="med"/>
+                      <a:tailEnd type="none" w="med" len="med"/>
+                    </a:lnB>
+                  </a:tcPr>
+                </a:tc>
+                <a:tc>
+                  <a:txBody>
+                    <a:bodyPr/>
+                    <a:lstStyle/>
+                    <a:p>
+                      <a:pPr algn="ctr" indent="0" marL="0">
+                        <a:buNone/>
+                      </a:pPr>
+                      <a:r>
+                        <a:rPr lang="en-US" sz="500" dirty="0">
+                          <a:solidFill>
+                            <a:srgbClr val="777777"/>
+                          </a:solidFill>
+                          <a:latin typeface="Calibri" pitchFamily="34" charset="0"/>
+                          <a:ea typeface="Calibri" pitchFamily="34" charset="-122"/>
+                          <a:cs typeface="Calibri" pitchFamily="34" charset="-120"/>
+                        </a:rPr>
+                        <a:t>0.39%</a:t>
+                      </a:r>
+                      <a:endParaRPr lang="en-US" sz="500" dirty="0">
+                        <a:latin typeface="Calibri" charset="0"/>
+                        <a:ea typeface="Calibri" charset="0"/>
+                        <a:cs typeface="Calibri" charset="0"/>
+                      </a:endParaRPr>
+                    </a:p>
+                  </a:txBody>
+                  <a:tcPr marL="91440" marR="91440" marT="45720" marB="45720">
+                    <a:lnL w="2540" cap="flat" cmpd="sng" algn="ctr">
+                      <a:solidFill>
+                        <a:srgbClr val="EEEEEE"/>
+                      </a:solidFill>
+                      <a:prstDash val="solid"/>
+                      <a:round/>
+                      <a:headEnd type="none" w="med" len="med"/>
+                      <a:tailEnd type="none" w="med" len="med"/>
+                    </a:lnL>
+                    <a:lnR w="2540" cap="flat" cmpd="sng" algn="ctr">
+                      <a:solidFill>
+                        <a:srgbClr val="EEEEEE"/>
+                      </a:solidFill>
+                      <a:prstDash val="solid"/>
+                      <a:round/>
+                      <a:headEnd type="none" w="med" len="med"/>
+                      <a:tailEnd type="none" w="med" len="med"/>
+                    </a:lnR>
+                    <a:lnT w="2540" cap="flat" cmpd="sng" algn="ctr">
+                      <a:solidFill>
+                        <a:srgbClr val="EEEEEE"/>
+                      </a:solidFill>
+                      <a:prstDash val="solid"/>
+                      <a:round/>
+                      <a:headEnd type="none" w="med" len="med"/>
+                      <a:tailEnd type="none" w="med" len="med"/>
+                    </a:lnT>
+                    <a:lnB w="2540" cap="flat" cmpd="sng" algn="ctr">
+                      <a:solidFill>
+                        <a:srgbClr val="EEEEEE"/>
+                      </a:solidFill>
+                      <a:prstDash val="solid"/>
+                      <a:round/>
+                      <a:headEnd type="none" w="med" len="med"/>
+                      <a:tailEnd type="none" w="med" len="med"/>
+                    </a:lnB>
+                  </a:tcPr>
+                </a:tc>
+                <a:tc>
+                  <a:txBody>
+                    <a:bodyPr/>
+                    <a:lstStyle/>
+                    <a:p>
+                      <a:pPr algn="ctr" indent="0" marL="0">
+                        <a:buNone/>
+                      </a:pPr>
+                      <a:r>
+                        <a:rPr lang="en-US" sz="500" b="1" dirty="0">
+                          <a:solidFill>
+                            <a:srgbClr val="777777"/>
+                          </a:solidFill>
+                          <a:latin typeface="Calibri" pitchFamily="34" charset="0"/>
+                          <a:ea typeface="Calibri" pitchFamily="34" charset="-122"/>
+                          <a:cs typeface="Calibri" pitchFamily="34" charset="-120"/>
+                        </a:rPr>
+                        <a:t>4.99%</a:t>
+                      </a:r>
+                      <a:endParaRPr lang="en-US" sz="500" dirty="0">
+                        <a:latin typeface="Calibri" charset="0"/>
+                        <a:ea typeface="Calibri" charset="0"/>
+                        <a:cs typeface="Calibri" charset="0"/>
+                      </a:endParaRPr>
+                    </a:p>
+                  </a:txBody>
+                  <a:tcPr marL="91440" marR="91440" marT="45720" marB="45720">
+                    <a:lnL w="2540" cap="flat" cmpd="sng" algn="ctr">
+                      <a:solidFill>
+                        <a:srgbClr val="EEEEEE"/>
+                      </a:solidFill>
+                      <a:prstDash val="solid"/>
+                      <a:round/>
+                      <a:headEnd type="none" w="med" len="med"/>
+                      <a:tailEnd type="none" w="med" len="med"/>
+                    </a:lnL>
+                    <a:lnR w="2540" cap="flat" cmpd="sng" algn="ctr">
+                      <a:solidFill>
+                        <a:srgbClr val="EEEEEE"/>
+                      </a:solidFill>
+                      <a:prstDash val="solid"/>
+                      <a:round/>
+                      <a:headEnd type="none" w="med" len="med"/>
+                      <a:tailEnd type="none" w="med" len="med"/>
+                    </a:lnR>
+                    <a:lnT w="2540" cap="flat" cmpd="sng" algn="ctr">
+                      <a:solidFill>
+                        <a:srgbClr val="EEEEEE"/>
+                      </a:solidFill>
+                      <a:prstDash val="solid"/>
+                      <a:round/>
+                      <a:headEnd type="none" w="med" len="med"/>
+                      <a:tailEnd type="none" w="med" len="med"/>
+                    </a:lnT>
+                    <a:lnB w="2540" cap="flat" cmpd="sng" algn="ctr">
+                      <a:solidFill>
+                        <a:srgbClr val="EEEEEE"/>
+                      </a:solidFill>
+                      <a:prstDash val="solid"/>
+                      <a:round/>
+                      <a:headEnd type="none" w="med" len="med"/>
+                      <a:tailEnd type="none" w="med" len="med"/>
+                    </a:lnB>
+                  </a:tcPr>
+                </a:tc>
+              </a:tr>
+              <a:tr h="123444">
+                <a:tc>
+                  <a:txBody>
+                    <a:bodyPr/>
+                    <a:lstStyle/>
+                    <a:p>
+                      <a:pPr algn="l" indent="0" marL="0">
+                        <a:buNone/>
+                      </a:pPr>
+                      <a:endParaRPr lang="en-US" sz="500" dirty="0">
+                        <a:latin typeface="Calibri" charset="0"/>
+                        <a:ea typeface="Calibri" charset="0"/>
+                        <a:cs typeface="Calibri" charset="0"/>
+                      </a:endParaRPr>
+                    </a:p>
+                  </a:txBody>
+                  <a:tcPr marL="91440" marR="91440" marT="45720" marB="45720">
+                    <a:lnL w="2540" cap="flat" cmpd="sng" algn="ctr">
+                      <a:solidFill>
+                        <a:srgbClr val="EEEEEE"/>
+                      </a:solidFill>
+                      <a:prstDash val="solid"/>
+                      <a:round/>
+                      <a:headEnd type="none" w="med" len="med"/>
+                      <a:tailEnd type="none" w="med" len="med"/>
+                    </a:lnL>
+                    <a:lnR w="2540" cap="flat" cmpd="sng" algn="ctr">
+                      <a:solidFill>
+                        <a:srgbClr val="EEEEEE"/>
+                      </a:solidFill>
+                      <a:prstDash val="solid"/>
+                      <a:round/>
+                      <a:headEnd type="none" w="med" len="med"/>
+                      <a:tailEnd type="none" w="med" len="med"/>
+                    </a:lnR>
+                    <a:lnT w="2540" cap="flat" cmpd="sng" algn="ctr">
+                      <a:solidFill>
+                        <a:srgbClr val="EEEEEE"/>
+                      </a:solidFill>
+                      <a:prstDash val="solid"/>
+                      <a:round/>
+                      <a:headEnd type="none" w="med" len="med"/>
+                      <a:tailEnd type="none" w="med" len="med"/>
+                    </a:lnT>
+                    <a:lnB w="2540" cap="flat" cmpd="sng" algn="ctr">
+                      <a:solidFill>
+                        <a:srgbClr val="EEEEEE"/>
+                      </a:solidFill>
+                      <a:prstDash val="solid"/>
+                      <a:round/>
+                      <a:headEnd type="none" w="med" len="med"/>
+                      <a:tailEnd type="none" w="med" len="med"/>
+                    </a:lnB>
+                  </a:tcPr>
+                </a:tc>
+                <a:tc>
+                  <a:txBody>
+                    <a:bodyPr/>
+                    <a:lstStyle/>
+                    <a:p>
+                      <a:pPr algn="l" indent="0" marL="0">
+                        <a:buNone/>
+                      </a:pPr>
+                      <a:r>
+                        <a:rPr lang="en-US" sz="500" dirty="0">
+                          <a:solidFill>
+                            <a:srgbClr val="999999"/>
+                          </a:solidFill>
+                          <a:latin typeface="Calibri" pitchFamily="34" charset="0"/>
+                          <a:ea typeface="Calibri" pitchFamily="34" charset="-122"/>
+                          <a:cs typeface="Calibri" pitchFamily="34" charset="-120"/>
+                        </a:rPr>
+                        <a:t>Competencia</a:t>
                       </a:r>
                       <a:endParaRPr lang="en-US" sz="500" dirty="0">
                         <a:latin typeface="Calibri" charset="0"/>
@@ -7642,7 +9954,7 @@
                           <a:ea typeface="Calibri" pitchFamily="34" charset="-122"/>
                           <a:cs typeface="Calibri" pitchFamily="34" charset="-120"/>
                         </a:rPr>
-                        <a:t>0.00%</a:t>
+                        <a:t>0.28%</a:t>
                       </a:r>
                       <a:endParaRPr lang="en-US" sz="500" dirty="0">
                         <a:latin typeface="Calibri" charset="0"/>
@@ -7707,7 +10019,7 @@
                           <a:ea typeface="Calibri" pitchFamily="34" charset="-122"/>
                           <a:cs typeface="Calibri" pitchFamily="34" charset="-120"/>
                         </a:rPr>
-                        <a:t>0.00%</a:t>
+                        <a:t>0.31%</a:t>
                       </a:r>
                       <a:endParaRPr lang="en-US" sz="500" dirty="0">
                         <a:latin typeface="Calibri" charset="0"/>
@@ -7772,7 +10084,527 @@
                           <a:ea typeface="Calibri" pitchFamily="34" charset="-122"/>
                           <a:cs typeface="Calibri" pitchFamily="34" charset="-120"/>
                         </a:rPr>
-                        <a:t>-2.99%</a:t>
+                        <a:t>0.30%</a:t>
+                      </a:r>
+                      <a:endParaRPr lang="en-US" sz="500" dirty="0">
+                        <a:latin typeface="Calibri" charset="0"/>
+                        <a:ea typeface="Calibri" charset="0"/>
+                        <a:cs typeface="Calibri" charset="0"/>
+                      </a:endParaRPr>
+                    </a:p>
+                  </a:txBody>
+                  <a:tcPr marL="91440" marR="91440" marT="45720" marB="45720">
+                    <a:lnL w="2540" cap="flat" cmpd="sng" algn="ctr">
+                      <a:solidFill>
+                        <a:srgbClr val="EEEEEE"/>
+                      </a:solidFill>
+                      <a:prstDash val="solid"/>
+                      <a:round/>
+                      <a:headEnd type="none" w="med" len="med"/>
+                      <a:tailEnd type="none" w="med" len="med"/>
+                    </a:lnL>
+                    <a:lnR w="2540" cap="flat" cmpd="sng" algn="ctr">
+                      <a:solidFill>
+                        <a:srgbClr val="EEEEEE"/>
+                      </a:solidFill>
+                      <a:prstDash val="solid"/>
+                      <a:round/>
+                      <a:headEnd type="none" w="med" len="med"/>
+                      <a:tailEnd type="none" w="med" len="med"/>
+                    </a:lnR>
+                    <a:lnT w="2540" cap="flat" cmpd="sng" algn="ctr">
+                      <a:solidFill>
+                        <a:srgbClr val="EEEEEE"/>
+                      </a:solidFill>
+                      <a:prstDash val="solid"/>
+                      <a:round/>
+                      <a:headEnd type="none" w="med" len="med"/>
+                      <a:tailEnd type="none" w="med" len="med"/>
+                    </a:lnT>
+                    <a:lnB w="2540" cap="flat" cmpd="sng" algn="ctr">
+                      <a:solidFill>
+                        <a:srgbClr val="EEEEEE"/>
+                      </a:solidFill>
+                      <a:prstDash val="solid"/>
+                      <a:round/>
+                      <a:headEnd type="none" w="med" len="med"/>
+                      <a:tailEnd type="none" w="med" len="med"/>
+                    </a:lnB>
+                  </a:tcPr>
+                </a:tc>
+                <a:tc>
+                  <a:txBody>
+                    <a:bodyPr/>
+                    <a:lstStyle/>
+                    <a:p>
+                      <a:pPr algn="ctr" indent="0" marL="0">
+                        <a:buNone/>
+                      </a:pPr>
+                      <a:r>
+                        <a:rPr lang="en-US" sz="500" dirty="0">
+                          <a:solidFill>
+                            <a:srgbClr val="999999"/>
+                          </a:solidFill>
+                          <a:latin typeface="Calibri" pitchFamily="34" charset="0"/>
+                          <a:ea typeface="Calibri" pitchFamily="34" charset="-122"/>
+                          <a:cs typeface="Calibri" pitchFamily="34" charset="-120"/>
+                        </a:rPr>
+                        <a:t>0.31%</a:t>
+                      </a:r>
+                      <a:endParaRPr lang="en-US" sz="500" dirty="0">
+                        <a:latin typeface="Calibri" charset="0"/>
+                        <a:ea typeface="Calibri" charset="0"/>
+                        <a:cs typeface="Calibri" charset="0"/>
+                      </a:endParaRPr>
+                    </a:p>
+                  </a:txBody>
+                  <a:tcPr marL="91440" marR="91440" marT="45720" marB="45720">
+                    <a:lnL w="2540" cap="flat" cmpd="sng" algn="ctr">
+                      <a:solidFill>
+                        <a:srgbClr val="EEEEEE"/>
+                      </a:solidFill>
+                      <a:prstDash val="solid"/>
+                      <a:round/>
+                      <a:headEnd type="none" w="med" len="med"/>
+                      <a:tailEnd type="none" w="med" len="med"/>
+                    </a:lnL>
+                    <a:lnR w="2540" cap="flat" cmpd="sng" algn="ctr">
+                      <a:solidFill>
+                        <a:srgbClr val="EEEEEE"/>
+                      </a:solidFill>
+                      <a:prstDash val="solid"/>
+                      <a:round/>
+                      <a:headEnd type="none" w="med" len="med"/>
+                      <a:tailEnd type="none" w="med" len="med"/>
+                    </a:lnR>
+                    <a:lnT w="2540" cap="flat" cmpd="sng" algn="ctr">
+                      <a:solidFill>
+                        <a:srgbClr val="EEEEEE"/>
+                      </a:solidFill>
+                      <a:prstDash val="solid"/>
+                      <a:round/>
+                      <a:headEnd type="none" w="med" len="med"/>
+                      <a:tailEnd type="none" w="med" len="med"/>
+                    </a:lnT>
+                    <a:lnB w="2540" cap="flat" cmpd="sng" algn="ctr">
+                      <a:solidFill>
+                        <a:srgbClr val="EEEEEE"/>
+                      </a:solidFill>
+                      <a:prstDash val="solid"/>
+                      <a:round/>
+                      <a:headEnd type="none" w="med" len="med"/>
+                      <a:tailEnd type="none" w="med" len="med"/>
+                    </a:lnB>
+                  </a:tcPr>
+                </a:tc>
+                <a:tc>
+                  <a:txBody>
+                    <a:bodyPr/>
+                    <a:lstStyle/>
+                    <a:p>
+                      <a:pPr algn="ctr" indent="0" marL="0">
+                        <a:buNone/>
+                      </a:pPr>
+                      <a:r>
+                        <a:rPr lang="en-US" sz="500" dirty="0">
+                          <a:solidFill>
+                            <a:srgbClr val="999999"/>
+                          </a:solidFill>
+                          <a:latin typeface="Calibri" pitchFamily="34" charset="0"/>
+                          <a:ea typeface="Calibri" pitchFamily="34" charset="-122"/>
+                          <a:cs typeface="Calibri" pitchFamily="34" charset="-120"/>
+                        </a:rPr>
+                        <a:t>0.30%</a:t>
+                      </a:r>
+                      <a:endParaRPr lang="en-US" sz="500" dirty="0">
+                        <a:latin typeface="Calibri" charset="0"/>
+                        <a:ea typeface="Calibri" charset="0"/>
+                        <a:cs typeface="Calibri" charset="0"/>
+                      </a:endParaRPr>
+                    </a:p>
+                  </a:txBody>
+                  <a:tcPr marL="91440" marR="91440" marT="45720" marB="45720">
+                    <a:lnL w="2540" cap="flat" cmpd="sng" algn="ctr">
+                      <a:solidFill>
+                        <a:srgbClr val="EEEEEE"/>
+                      </a:solidFill>
+                      <a:prstDash val="solid"/>
+                      <a:round/>
+                      <a:headEnd type="none" w="med" len="med"/>
+                      <a:tailEnd type="none" w="med" len="med"/>
+                    </a:lnL>
+                    <a:lnR w="2540" cap="flat" cmpd="sng" algn="ctr">
+                      <a:solidFill>
+                        <a:srgbClr val="EEEEEE"/>
+                      </a:solidFill>
+                      <a:prstDash val="solid"/>
+                      <a:round/>
+                      <a:headEnd type="none" w="med" len="med"/>
+                      <a:tailEnd type="none" w="med" len="med"/>
+                    </a:lnR>
+                    <a:lnT w="2540" cap="flat" cmpd="sng" algn="ctr">
+                      <a:solidFill>
+                        <a:srgbClr val="EEEEEE"/>
+                      </a:solidFill>
+                      <a:prstDash val="solid"/>
+                      <a:round/>
+                      <a:headEnd type="none" w="med" len="med"/>
+                      <a:tailEnd type="none" w="med" len="med"/>
+                    </a:lnT>
+                    <a:lnB w="2540" cap="flat" cmpd="sng" algn="ctr">
+                      <a:solidFill>
+                        <a:srgbClr val="EEEEEE"/>
+                      </a:solidFill>
+                      <a:prstDash val="solid"/>
+                      <a:round/>
+                      <a:headEnd type="none" w="med" len="med"/>
+                      <a:tailEnd type="none" w="med" len="med"/>
+                    </a:lnB>
+                  </a:tcPr>
+                </a:tc>
+                <a:tc>
+                  <a:txBody>
+                    <a:bodyPr/>
+                    <a:lstStyle/>
+                    <a:p>
+                      <a:pPr algn="ctr" indent="0" marL="0">
+                        <a:buNone/>
+                      </a:pPr>
+                      <a:r>
+                        <a:rPr lang="en-US" sz="500" dirty="0">
+                          <a:solidFill>
+                            <a:srgbClr val="999999"/>
+                          </a:solidFill>
+                          <a:latin typeface="Calibri" pitchFamily="34" charset="0"/>
+                          <a:ea typeface="Calibri" pitchFamily="34" charset="-122"/>
+                          <a:cs typeface="Calibri" pitchFamily="34" charset="-120"/>
+                        </a:rPr>
+                        <a:t>0.30%</a:t>
+                      </a:r>
+                      <a:endParaRPr lang="en-US" sz="500" dirty="0">
+                        <a:latin typeface="Calibri" charset="0"/>
+                        <a:ea typeface="Calibri" charset="0"/>
+                        <a:cs typeface="Calibri" charset="0"/>
+                      </a:endParaRPr>
+                    </a:p>
+                  </a:txBody>
+                  <a:tcPr marL="91440" marR="91440" marT="45720" marB="45720">
+                    <a:lnL w="2540" cap="flat" cmpd="sng" algn="ctr">
+                      <a:solidFill>
+                        <a:srgbClr val="EEEEEE"/>
+                      </a:solidFill>
+                      <a:prstDash val="solid"/>
+                      <a:round/>
+                      <a:headEnd type="none" w="med" len="med"/>
+                      <a:tailEnd type="none" w="med" len="med"/>
+                    </a:lnL>
+                    <a:lnR w="2540" cap="flat" cmpd="sng" algn="ctr">
+                      <a:solidFill>
+                        <a:srgbClr val="EEEEEE"/>
+                      </a:solidFill>
+                      <a:prstDash val="solid"/>
+                      <a:round/>
+                      <a:headEnd type="none" w="med" len="med"/>
+                      <a:tailEnd type="none" w="med" len="med"/>
+                    </a:lnR>
+                    <a:lnT w="2540" cap="flat" cmpd="sng" algn="ctr">
+                      <a:solidFill>
+                        <a:srgbClr val="EEEEEE"/>
+                      </a:solidFill>
+                      <a:prstDash val="solid"/>
+                      <a:round/>
+                      <a:headEnd type="none" w="med" len="med"/>
+                      <a:tailEnd type="none" w="med" len="med"/>
+                    </a:lnT>
+                    <a:lnB w="2540" cap="flat" cmpd="sng" algn="ctr">
+                      <a:solidFill>
+                        <a:srgbClr val="EEEEEE"/>
+                      </a:solidFill>
+                      <a:prstDash val="solid"/>
+                      <a:round/>
+                      <a:headEnd type="none" w="med" len="med"/>
+                      <a:tailEnd type="none" w="med" len="med"/>
+                    </a:lnB>
+                  </a:tcPr>
+                </a:tc>
+                <a:tc>
+                  <a:txBody>
+                    <a:bodyPr/>
+                    <a:lstStyle/>
+                    <a:p>
+                      <a:pPr algn="ctr" indent="0" marL="0">
+                        <a:buNone/>
+                      </a:pPr>
+                      <a:r>
+                        <a:rPr lang="en-US" sz="500" dirty="0">
+                          <a:solidFill>
+                            <a:srgbClr val="999999"/>
+                          </a:solidFill>
+                          <a:latin typeface="Calibri" pitchFamily="34" charset="0"/>
+                          <a:ea typeface="Calibri" pitchFamily="34" charset="-122"/>
+                          <a:cs typeface="Calibri" pitchFamily="34" charset="-120"/>
+                        </a:rPr>
+                        <a:t>0.30%</a:t>
+                      </a:r>
+                      <a:endParaRPr lang="en-US" sz="500" dirty="0">
+                        <a:latin typeface="Calibri" charset="0"/>
+                        <a:ea typeface="Calibri" charset="0"/>
+                        <a:cs typeface="Calibri" charset="0"/>
+                      </a:endParaRPr>
+                    </a:p>
+                  </a:txBody>
+                  <a:tcPr marL="91440" marR="91440" marT="45720" marB="45720">
+                    <a:lnL w="2540" cap="flat" cmpd="sng" algn="ctr">
+                      <a:solidFill>
+                        <a:srgbClr val="EEEEEE"/>
+                      </a:solidFill>
+                      <a:prstDash val="solid"/>
+                      <a:round/>
+                      <a:headEnd type="none" w="med" len="med"/>
+                      <a:tailEnd type="none" w="med" len="med"/>
+                    </a:lnL>
+                    <a:lnR w="2540" cap="flat" cmpd="sng" algn="ctr">
+                      <a:solidFill>
+                        <a:srgbClr val="EEEEEE"/>
+                      </a:solidFill>
+                      <a:prstDash val="solid"/>
+                      <a:round/>
+                      <a:headEnd type="none" w="med" len="med"/>
+                      <a:tailEnd type="none" w="med" len="med"/>
+                    </a:lnR>
+                    <a:lnT w="2540" cap="flat" cmpd="sng" algn="ctr">
+                      <a:solidFill>
+                        <a:srgbClr val="EEEEEE"/>
+                      </a:solidFill>
+                      <a:prstDash val="solid"/>
+                      <a:round/>
+                      <a:headEnd type="none" w="med" len="med"/>
+                      <a:tailEnd type="none" w="med" len="med"/>
+                    </a:lnT>
+                    <a:lnB w="2540" cap="flat" cmpd="sng" algn="ctr">
+                      <a:solidFill>
+                        <a:srgbClr val="EEEEEE"/>
+                      </a:solidFill>
+                      <a:prstDash val="solid"/>
+                      <a:round/>
+                      <a:headEnd type="none" w="med" len="med"/>
+                      <a:tailEnd type="none" w="med" len="med"/>
+                    </a:lnB>
+                  </a:tcPr>
+                </a:tc>
+                <a:tc>
+                  <a:txBody>
+                    <a:bodyPr/>
+                    <a:lstStyle/>
+                    <a:p>
+                      <a:pPr algn="ctr" indent="0" marL="0">
+                        <a:buNone/>
+                      </a:pPr>
+                      <a:r>
+                        <a:rPr lang="en-US" sz="500" dirty="0">
+                          <a:solidFill>
+                            <a:srgbClr val="999999"/>
+                          </a:solidFill>
+                          <a:latin typeface="Calibri" pitchFamily="34" charset="0"/>
+                          <a:ea typeface="Calibri" pitchFamily="34" charset="-122"/>
+                          <a:cs typeface="Calibri" pitchFamily="34" charset="-120"/>
+                        </a:rPr>
+                        <a:t>0.28%</a:t>
+                      </a:r>
+                      <a:endParaRPr lang="en-US" sz="500" dirty="0">
+                        <a:latin typeface="Calibri" charset="0"/>
+                        <a:ea typeface="Calibri" charset="0"/>
+                        <a:cs typeface="Calibri" charset="0"/>
+                      </a:endParaRPr>
+                    </a:p>
+                  </a:txBody>
+                  <a:tcPr marL="91440" marR="91440" marT="45720" marB="45720">
+                    <a:lnL w="2540" cap="flat" cmpd="sng" algn="ctr">
+                      <a:solidFill>
+                        <a:srgbClr val="EEEEEE"/>
+                      </a:solidFill>
+                      <a:prstDash val="solid"/>
+                      <a:round/>
+                      <a:headEnd type="none" w="med" len="med"/>
+                      <a:tailEnd type="none" w="med" len="med"/>
+                    </a:lnL>
+                    <a:lnR w="2540" cap="flat" cmpd="sng" algn="ctr">
+                      <a:solidFill>
+                        <a:srgbClr val="EEEEEE"/>
+                      </a:solidFill>
+                      <a:prstDash val="solid"/>
+                      <a:round/>
+                      <a:headEnd type="none" w="med" len="med"/>
+                      <a:tailEnd type="none" w="med" len="med"/>
+                    </a:lnR>
+                    <a:lnT w="2540" cap="flat" cmpd="sng" algn="ctr">
+                      <a:solidFill>
+                        <a:srgbClr val="EEEEEE"/>
+                      </a:solidFill>
+                      <a:prstDash val="solid"/>
+                      <a:round/>
+                      <a:headEnd type="none" w="med" len="med"/>
+                      <a:tailEnd type="none" w="med" len="med"/>
+                    </a:lnT>
+                    <a:lnB w="2540" cap="flat" cmpd="sng" algn="ctr">
+                      <a:solidFill>
+                        <a:srgbClr val="EEEEEE"/>
+                      </a:solidFill>
+                      <a:prstDash val="solid"/>
+                      <a:round/>
+                      <a:headEnd type="none" w="med" len="med"/>
+                      <a:tailEnd type="none" w="med" len="med"/>
+                    </a:lnB>
+                  </a:tcPr>
+                </a:tc>
+                <a:tc>
+                  <a:txBody>
+                    <a:bodyPr/>
+                    <a:lstStyle/>
+                    <a:p>
+                      <a:pPr algn="ctr" indent="0" marL="0">
+                        <a:buNone/>
+                      </a:pPr>
+                      <a:r>
+                        <a:rPr lang="en-US" sz="500" dirty="0">
+                          <a:solidFill>
+                            <a:srgbClr val="999999"/>
+                          </a:solidFill>
+                          <a:latin typeface="Calibri" pitchFamily="34" charset="0"/>
+                          <a:ea typeface="Calibri" pitchFamily="34" charset="-122"/>
+                          <a:cs typeface="Calibri" pitchFamily="34" charset="-120"/>
+                        </a:rPr>
+                        <a:t>0.29%</a:t>
+                      </a:r>
+                      <a:endParaRPr lang="en-US" sz="500" dirty="0">
+                        <a:latin typeface="Calibri" charset="0"/>
+                        <a:ea typeface="Calibri" charset="0"/>
+                        <a:cs typeface="Calibri" charset="0"/>
+                      </a:endParaRPr>
+                    </a:p>
+                  </a:txBody>
+                  <a:tcPr marL="91440" marR="91440" marT="45720" marB="45720">
+                    <a:lnL w="2540" cap="flat" cmpd="sng" algn="ctr">
+                      <a:solidFill>
+                        <a:srgbClr val="EEEEEE"/>
+                      </a:solidFill>
+                      <a:prstDash val="solid"/>
+                      <a:round/>
+                      <a:headEnd type="none" w="med" len="med"/>
+                      <a:tailEnd type="none" w="med" len="med"/>
+                    </a:lnL>
+                    <a:lnR w="2540" cap="flat" cmpd="sng" algn="ctr">
+                      <a:solidFill>
+                        <a:srgbClr val="EEEEEE"/>
+                      </a:solidFill>
+                      <a:prstDash val="solid"/>
+                      <a:round/>
+                      <a:headEnd type="none" w="med" len="med"/>
+                      <a:tailEnd type="none" w="med" len="med"/>
+                    </a:lnR>
+                    <a:lnT w="2540" cap="flat" cmpd="sng" algn="ctr">
+                      <a:solidFill>
+                        <a:srgbClr val="EEEEEE"/>
+                      </a:solidFill>
+                      <a:prstDash val="solid"/>
+                      <a:round/>
+                      <a:headEnd type="none" w="med" len="med"/>
+                      <a:tailEnd type="none" w="med" len="med"/>
+                    </a:lnT>
+                    <a:lnB w="2540" cap="flat" cmpd="sng" algn="ctr">
+                      <a:solidFill>
+                        <a:srgbClr val="EEEEEE"/>
+                      </a:solidFill>
+                      <a:prstDash val="solid"/>
+                      <a:round/>
+                      <a:headEnd type="none" w="med" len="med"/>
+                      <a:tailEnd type="none" w="med" len="med"/>
+                    </a:lnB>
+                  </a:tcPr>
+                </a:tc>
+                <a:tc>
+                  <a:txBody>
+                    <a:bodyPr/>
+                    <a:lstStyle/>
+                    <a:p>
+                      <a:pPr algn="ctr" indent="0" marL="0">
+                        <a:buNone/>
+                      </a:pPr>
+                      <a:r>
+                        <a:rPr lang="en-US" sz="500" dirty="0">
+                          <a:solidFill>
+                            <a:srgbClr val="999999"/>
+                          </a:solidFill>
+                          <a:latin typeface="Calibri" pitchFamily="34" charset="0"/>
+                          <a:ea typeface="Calibri" pitchFamily="34" charset="-122"/>
+                          <a:cs typeface="Calibri" pitchFamily="34" charset="-120"/>
+                        </a:rPr>
+                        <a:t>0.28%</a:t>
+                      </a:r>
+                      <a:endParaRPr lang="en-US" sz="500" dirty="0">
+                        <a:latin typeface="Calibri" charset="0"/>
+                        <a:ea typeface="Calibri" charset="0"/>
+                        <a:cs typeface="Calibri" charset="0"/>
+                      </a:endParaRPr>
+                    </a:p>
+                  </a:txBody>
+                  <a:tcPr marL="91440" marR="91440" marT="45720" marB="45720">
+                    <a:lnL w="2540" cap="flat" cmpd="sng" algn="ctr">
+                      <a:solidFill>
+                        <a:srgbClr val="EEEEEE"/>
+                      </a:solidFill>
+                      <a:prstDash val="solid"/>
+                      <a:round/>
+                      <a:headEnd type="none" w="med" len="med"/>
+                      <a:tailEnd type="none" w="med" len="med"/>
+                    </a:lnL>
+                    <a:lnR w="2540" cap="flat" cmpd="sng" algn="ctr">
+                      <a:solidFill>
+                        <a:srgbClr val="EEEEEE"/>
+                      </a:solidFill>
+                      <a:prstDash val="solid"/>
+                      <a:round/>
+                      <a:headEnd type="none" w="med" len="med"/>
+                      <a:tailEnd type="none" w="med" len="med"/>
+                    </a:lnR>
+                    <a:lnT w="2540" cap="flat" cmpd="sng" algn="ctr">
+                      <a:solidFill>
+                        <a:srgbClr val="EEEEEE"/>
+                      </a:solidFill>
+                      <a:prstDash val="solid"/>
+                      <a:round/>
+                      <a:headEnd type="none" w="med" len="med"/>
+                      <a:tailEnd type="none" w="med" len="med"/>
+                    </a:lnT>
+                    <a:lnB w="2540" cap="flat" cmpd="sng" algn="ctr">
+                      <a:solidFill>
+                        <a:srgbClr val="EEEEEE"/>
+                      </a:solidFill>
+                      <a:prstDash val="solid"/>
+                      <a:round/>
+                      <a:headEnd type="none" w="med" len="med"/>
+                      <a:tailEnd type="none" w="med" len="med"/>
+                    </a:lnB>
+                  </a:tcPr>
+                </a:tc>
+                <a:tc>
+                  <a:txBody>
+                    <a:bodyPr/>
+                    <a:lstStyle/>
+                    <a:p>
+                      <a:pPr algn="ctr" indent="0" marL="0">
+                        <a:buNone/>
+                      </a:pPr>
+                      <a:r>
+                        <a:rPr lang="en-US" sz="500" dirty="0">
+                          <a:solidFill>
+                            <a:srgbClr val="999999"/>
+                          </a:solidFill>
+                          <a:latin typeface="Calibri" pitchFamily="34" charset="0"/>
+                          <a:ea typeface="Calibri" pitchFamily="34" charset="-122"/>
+                          <a:cs typeface="Calibri" pitchFamily="34" charset="-120"/>
+                        </a:rPr>
+                        <a:t>0.56%</a:t>
                       </a:r>
                       <a:endParaRPr lang="en-US" sz="500" dirty="0">
                         <a:latin typeface="Calibri" charset="0"/>
@@ -7837,7 +10669,7 @@
                           <a:ea typeface="Calibri" pitchFamily="34" charset="-122"/>
                           <a:cs typeface="Calibri" pitchFamily="34" charset="-120"/>
                         </a:rPr>
-                        <a:t>-2.97%</a:t>
+                        <a:t>3.54%</a:t>
                       </a:r>
                       <a:endParaRPr lang="en-US" sz="500" dirty="0">
                         <a:latin typeface="Calibri" charset="0"/>
@@ -8014,384 +10846,6 @@
                       <a:pPr algn="ctr" indent="0" marL="0">
                         <a:buNone/>
                       </a:pPr>
-                      <a:endParaRPr lang="en-US" sz="500" dirty="0">
-                        <a:latin typeface="Calibri" charset="0"/>
-                        <a:ea typeface="Calibri" charset="0"/>
-                        <a:cs typeface="Calibri" charset="0"/>
-                      </a:endParaRPr>
-                    </a:p>
-                  </a:txBody>
-                  <a:tcPr marL="91440" marR="91440" marT="45720" marB="45720">
-                    <a:lnL w="2540" cap="flat" cmpd="sng" algn="ctr">
-                      <a:solidFill>
-                        <a:srgbClr val="EEEEEE"/>
-                      </a:solidFill>
-                      <a:prstDash val="solid"/>
-                      <a:round/>
-                      <a:headEnd type="none" w="med" len="med"/>
-                      <a:tailEnd type="none" w="med" len="med"/>
-                    </a:lnL>
-                    <a:lnR w="2540" cap="flat" cmpd="sng" algn="ctr">
-                      <a:solidFill>
-                        <a:srgbClr val="EEEEEE"/>
-                      </a:solidFill>
-                      <a:prstDash val="solid"/>
-                      <a:round/>
-                      <a:headEnd type="none" w="med" len="med"/>
-                      <a:tailEnd type="none" w="med" len="med"/>
-                    </a:lnR>
-                    <a:lnT w="2540" cap="flat" cmpd="sng" algn="ctr">
-                      <a:solidFill>
-                        <a:srgbClr val="EEEEEE"/>
-                      </a:solidFill>
-                      <a:prstDash val="solid"/>
-                      <a:round/>
-                      <a:headEnd type="none" w="med" len="med"/>
-                      <a:tailEnd type="none" w="med" len="med"/>
-                    </a:lnT>
-                    <a:lnB w="2540" cap="flat" cmpd="sng" algn="ctr">
-                      <a:solidFill>
-                        <a:srgbClr val="EEEEEE"/>
-                      </a:solidFill>
-                      <a:prstDash val="solid"/>
-                      <a:round/>
-                      <a:headEnd type="none" w="med" len="med"/>
-                      <a:tailEnd type="none" w="med" len="med"/>
-                    </a:lnB>
-                  </a:tcPr>
-                </a:tc>
-                <a:tc>
-                  <a:txBody>
-                    <a:bodyPr/>
-                    <a:lstStyle/>
-                    <a:p>
-                      <a:pPr algn="ctr" indent="0" marL="0">
-                        <a:buNone/>
-                      </a:pPr>
-                      <a:endParaRPr lang="en-US" sz="500" dirty="0">
-                        <a:latin typeface="Calibri" charset="0"/>
-                        <a:ea typeface="Calibri" charset="0"/>
-                        <a:cs typeface="Calibri" charset="0"/>
-                      </a:endParaRPr>
-                    </a:p>
-                  </a:txBody>
-                  <a:tcPr marL="91440" marR="91440" marT="45720" marB="45720">
-                    <a:lnL w="2540" cap="flat" cmpd="sng" algn="ctr">
-                      <a:solidFill>
-                        <a:srgbClr val="EEEEEE"/>
-                      </a:solidFill>
-                      <a:prstDash val="solid"/>
-                      <a:round/>
-                      <a:headEnd type="none" w="med" len="med"/>
-                      <a:tailEnd type="none" w="med" len="med"/>
-                    </a:lnL>
-                    <a:lnR w="2540" cap="flat" cmpd="sng" algn="ctr">
-                      <a:solidFill>
-                        <a:srgbClr val="EEEEEE"/>
-                      </a:solidFill>
-                      <a:prstDash val="solid"/>
-                      <a:round/>
-                      <a:headEnd type="none" w="med" len="med"/>
-                      <a:tailEnd type="none" w="med" len="med"/>
-                    </a:lnR>
-                    <a:lnT w="2540" cap="flat" cmpd="sng" algn="ctr">
-                      <a:solidFill>
-                        <a:srgbClr val="EEEEEE"/>
-                      </a:solidFill>
-                      <a:prstDash val="solid"/>
-                      <a:round/>
-                      <a:headEnd type="none" w="med" len="med"/>
-                      <a:tailEnd type="none" w="med" len="med"/>
-                    </a:lnT>
-                    <a:lnB w="2540" cap="flat" cmpd="sng" algn="ctr">
-                      <a:solidFill>
-                        <a:srgbClr val="EEEEEE"/>
-                      </a:solidFill>
-                      <a:prstDash val="solid"/>
-                      <a:round/>
-                      <a:headEnd type="none" w="med" len="med"/>
-                      <a:tailEnd type="none" w="med" len="med"/>
-                    </a:lnB>
-                  </a:tcPr>
-                </a:tc>
-                <a:tc>
-                  <a:txBody>
-                    <a:bodyPr/>
-                    <a:lstStyle/>
-                    <a:p>
-                      <a:pPr algn="ctr" indent="0" marL="0">
-                        <a:buNone/>
-                      </a:pPr>
-                      <a:endParaRPr lang="en-US" sz="500" dirty="0">
-                        <a:latin typeface="Calibri" charset="0"/>
-                        <a:ea typeface="Calibri" charset="0"/>
-                        <a:cs typeface="Calibri" charset="0"/>
-                      </a:endParaRPr>
-                    </a:p>
-                  </a:txBody>
-                  <a:tcPr marL="91440" marR="91440" marT="45720" marB="45720">
-                    <a:lnL w="2540" cap="flat" cmpd="sng" algn="ctr">
-                      <a:solidFill>
-                        <a:srgbClr val="EEEEEE"/>
-                      </a:solidFill>
-                      <a:prstDash val="solid"/>
-                      <a:round/>
-                      <a:headEnd type="none" w="med" len="med"/>
-                      <a:tailEnd type="none" w="med" len="med"/>
-                    </a:lnL>
-                    <a:lnR w="2540" cap="flat" cmpd="sng" algn="ctr">
-                      <a:solidFill>
-                        <a:srgbClr val="EEEEEE"/>
-                      </a:solidFill>
-                      <a:prstDash val="solid"/>
-                      <a:round/>
-                      <a:headEnd type="none" w="med" len="med"/>
-                      <a:tailEnd type="none" w="med" len="med"/>
-                    </a:lnR>
-                    <a:lnT w="2540" cap="flat" cmpd="sng" algn="ctr">
-                      <a:solidFill>
-                        <a:srgbClr val="EEEEEE"/>
-                      </a:solidFill>
-                      <a:prstDash val="solid"/>
-                      <a:round/>
-                      <a:headEnd type="none" w="med" len="med"/>
-                      <a:tailEnd type="none" w="med" len="med"/>
-                    </a:lnT>
-                    <a:lnB w="2540" cap="flat" cmpd="sng" algn="ctr">
-                      <a:solidFill>
-                        <a:srgbClr val="EEEEEE"/>
-                      </a:solidFill>
-                      <a:prstDash val="solid"/>
-                      <a:round/>
-                      <a:headEnd type="none" w="med" len="med"/>
-                      <a:tailEnd type="none" w="med" len="med"/>
-                    </a:lnB>
-                  </a:tcPr>
-                </a:tc>
-                <a:tc>
-                  <a:txBody>
-                    <a:bodyPr/>
-                    <a:lstStyle/>
-                    <a:p>
-                      <a:pPr algn="ctr" indent="0" marL="0">
-                        <a:buNone/>
-                      </a:pPr>
-                      <a:endParaRPr lang="en-US" sz="500" dirty="0">
-                        <a:latin typeface="Calibri" charset="0"/>
-                        <a:ea typeface="Calibri" charset="0"/>
-                        <a:cs typeface="Calibri" charset="0"/>
-                      </a:endParaRPr>
-                    </a:p>
-                  </a:txBody>
-                  <a:tcPr marL="91440" marR="91440" marT="45720" marB="45720">
-                    <a:lnL w="2540" cap="flat" cmpd="sng" algn="ctr">
-                      <a:solidFill>
-                        <a:srgbClr val="EEEEEE"/>
-                      </a:solidFill>
-                      <a:prstDash val="solid"/>
-                      <a:round/>
-                      <a:headEnd type="none" w="med" len="med"/>
-                      <a:tailEnd type="none" w="med" len="med"/>
-                    </a:lnL>
-                    <a:lnR w="2540" cap="flat" cmpd="sng" algn="ctr">
-                      <a:solidFill>
-                        <a:srgbClr val="EEEEEE"/>
-                      </a:solidFill>
-                      <a:prstDash val="solid"/>
-                      <a:round/>
-                      <a:headEnd type="none" w="med" len="med"/>
-                      <a:tailEnd type="none" w="med" len="med"/>
-                    </a:lnR>
-                    <a:lnT w="2540" cap="flat" cmpd="sng" algn="ctr">
-                      <a:solidFill>
-                        <a:srgbClr val="EEEEEE"/>
-                      </a:solidFill>
-                      <a:prstDash val="solid"/>
-                      <a:round/>
-                      <a:headEnd type="none" w="med" len="med"/>
-                      <a:tailEnd type="none" w="med" len="med"/>
-                    </a:lnT>
-                    <a:lnB w="2540" cap="flat" cmpd="sng" algn="ctr">
-                      <a:solidFill>
-                        <a:srgbClr val="EEEEEE"/>
-                      </a:solidFill>
-                      <a:prstDash val="solid"/>
-                      <a:round/>
-                      <a:headEnd type="none" w="med" len="med"/>
-                      <a:tailEnd type="none" w="med" len="med"/>
-                    </a:lnB>
-                  </a:tcPr>
-                </a:tc>
-                <a:tc>
-                  <a:txBody>
-                    <a:bodyPr/>
-                    <a:lstStyle/>
-                    <a:p>
-                      <a:pPr algn="ctr" indent="0" marL="0">
-                        <a:buNone/>
-                      </a:pPr>
-                      <a:endParaRPr lang="en-US" sz="500" dirty="0">
-                        <a:latin typeface="Calibri" charset="0"/>
-                        <a:ea typeface="Calibri" charset="0"/>
-                        <a:cs typeface="Calibri" charset="0"/>
-                      </a:endParaRPr>
-                    </a:p>
-                  </a:txBody>
-                  <a:tcPr marL="91440" marR="91440" marT="45720" marB="45720">
-                    <a:lnL w="2540" cap="flat" cmpd="sng" algn="ctr">
-                      <a:solidFill>
-                        <a:srgbClr val="EEEEEE"/>
-                      </a:solidFill>
-                      <a:prstDash val="solid"/>
-                      <a:round/>
-                      <a:headEnd type="none" w="med" len="med"/>
-                      <a:tailEnd type="none" w="med" len="med"/>
-                    </a:lnL>
-                    <a:lnR w="2540" cap="flat" cmpd="sng" algn="ctr">
-                      <a:solidFill>
-                        <a:srgbClr val="EEEEEE"/>
-                      </a:solidFill>
-                      <a:prstDash val="solid"/>
-                      <a:round/>
-                      <a:headEnd type="none" w="med" len="med"/>
-                      <a:tailEnd type="none" w="med" len="med"/>
-                    </a:lnR>
-                    <a:lnT w="2540" cap="flat" cmpd="sng" algn="ctr">
-                      <a:solidFill>
-                        <a:srgbClr val="EEEEEE"/>
-                      </a:solidFill>
-                      <a:prstDash val="solid"/>
-                      <a:round/>
-                      <a:headEnd type="none" w="med" len="med"/>
-                      <a:tailEnd type="none" w="med" len="med"/>
-                    </a:lnT>
-                    <a:lnB w="2540" cap="flat" cmpd="sng" algn="ctr">
-                      <a:solidFill>
-                        <a:srgbClr val="EEEEEE"/>
-                      </a:solidFill>
-                      <a:prstDash val="solid"/>
-                      <a:round/>
-                      <a:headEnd type="none" w="med" len="med"/>
-                      <a:tailEnd type="none" w="med" len="med"/>
-                    </a:lnB>
-                  </a:tcPr>
-                </a:tc>
-                <a:tc>
-                  <a:txBody>
-                    <a:bodyPr/>
-                    <a:lstStyle/>
-                    <a:p>
-                      <a:pPr algn="ctr" indent="0" marL="0">
-                        <a:buNone/>
-                      </a:pPr>
-                      <a:endParaRPr lang="en-US" sz="500" dirty="0">
-                        <a:latin typeface="Calibri" charset="0"/>
-                        <a:ea typeface="Calibri" charset="0"/>
-                        <a:cs typeface="Calibri" charset="0"/>
-                      </a:endParaRPr>
-                    </a:p>
-                  </a:txBody>
-                  <a:tcPr marL="91440" marR="91440" marT="45720" marB="45720">
-                    <a:lnL w="2540" cap="flat" cmpd="sng" algn="ctr">
-                      <a:solidFill>
-                        <a:srgbClr val="EEEEEE"/>
-                      </a:solidFill>
-                      <a:prstDash val="solid"/>
-                      <a:round/>
-                      <a:headEnd type="none" w="med" len="med"/>
-                      <a:tailEnd type="none" w="med" len="med"/>
-                    </a:lnL>
-                    <a:lnR w="2540" cap="flat" cmpd="sng" algn="ctr">
-                      <a:solidFill>
-                        <a:srgbClr val="EEEEEE"/>
-                      </a:solidFill>
-                      <a:prstDash val="solid"/>
-                      <a:round/>
-                      <a:headEnd type="none" w="med" len="med"/>
-                      <a:tailEnd type="none" w="med" len="med"/>
-                    </a:lnR>
-                    <a:lnT w="2540" cap="flat" cmpd="sng" algn="ctr">
-                      <a:solidFill>
-                        <a:srgbClr val="EEEEEE"/>
-                      </a:solidFill>
-                      <a:prstDash val="solid"/>
-                      <a:round/>
-                      <a:headEnd type="none" w="med" len="med"/>
-                      <a:tailEnd type="none" w="med" len="med"/>
-                    </a:lnT>
-                    <a:lnB w="2540" cap="flat" cmpd="sng" algn="ctr">
-                      <a:solidFill>
-                        <a:srgbClr val="EEEEEE"/>
-                      </a:solidFill>
-                      <a:prstDash val="solid"/>
-                      <a:round/>
-                      <a:headEnd type="none" w="med" len="med"/>
-                      <a:tailEnd type="none" w="med" len="med"/>
-                    </a:lnB>
-                  </a:tcPr>
-                </a:tc>
-                <a:tc>
-                  <a:txBody>
-                    <a:bodyPr/>
-                    <a:lstStyle/>
-                    <a:p>
-                      <a:pPr algn="ctr" indent="0" marL="0">
-                        <a:buNone/>
-                      </a:pPr>
-                      <a:endParaRPr lang="en-US" sz="500" dirty="0">
-                        <a:latin typeface="Calibri" charset="0"/>
-                        <a:ea typeface="Calibri" charset="0"/>
-                        <a:cs typeface="Calibri" charset="0"/>
-                      </a:endParaRPr>
-                    </a:p>
-                  </a:txBody>
-                  <a:tcPr marL="91440" marR="91440" marT="45720" marB="45720">
-                    <a:lnL w="2540" cap="flat" cmpd="sng" algn="ctr">
-                      <a:solidFill>
-                        <a:srgbClr val="EEEEEE"/>
-                      </a:solidFill>
-                      <a:prstDash val="solid"/>
-                      <a:round/>
-                      <a:headEnd type="none" w="med" len="med"/>
-                      <a:tailEnd type="none" w="med" len="med"/>
-                    </a:lnL>
-                    <a:lnR w="2540" cap="flat" cmpd="sng" algn="ctr">
-                      <a:solidFill>
-                        <a:srgbClr val="EEEEEE"/>
-                      </a:solidFill>
-                      <a:prstDash val="solid"/>
-                      <a:round/>
-                      <a:headEnd type="none" w="med" len="med"/>
-                      <a:tailEnd type="none" w="med" len="med"/>
-                    </a:lnR>
-                    <a:lnT w="2540" cap="flat" cmpd="sng" algn="ctr">
-                      <a:solidFill>
-                        <a:srgbClr val="EEEEEE"/>
-                      </a:solidFill>
-                      <a:prstDash val="solid"/>
-                      <a:round/>
-                      <a:headEnd type="none" w="med" len="med"/>
-                      <a:tailEnd type="none" w="med" len="med"/>
-                    </a:lnT>
-                    <a:lnB w="2540" cap="flat" cmpd="sng" algn="ctr">
-                      <a:solidFill>
-                        <a:srgbClr val="EEEEEE"/>
-                      </a:solidFill>
-                      <a:prstDash val="solid"/>
-                      <a:round/>
-                      <a:headEnd type="none" w="med" len="med"/>
-                      <a:tailEnd type="none" w="med" len="med"/>
-                    </a:lnB>
-                  </a:tcPr>
-                </a:tc>
-                <a:tc>
-                  <a:txBody>
-                    <a:bodyPr/>
-                    <a:lstStyle/>
-                    <a:p>
-                      <a:pPr algn="ctr" indent="0" marL="0">
-                        <a:buNone/>
-                      </a:pPr>
                       <a:r>
                         <a:rPr lang="en-US" sz="500" dirty="0">
                           <a:solidFill>
@@ -8401,7 +10855,7 @@
                           <a:ea typeface="Calibri" pitchFamily="34" charset="-122"/>
                           <a:cs typeface="Calibri" pitchFamily="34" charset="-120"/>
                         </a:rPr>
-                        <a:t>0.00%</a:t>
+                        <a:t>0.44%</a:t>
                       </a:r>
                       <a:endParaRPr lang="en-US" sz="500" dirty="0">
                         <a:latin typeface="Calibri" charset="0"/>
@@ -8466,7 +10920,7 @@
                           <a:ea typeface="Calibri" pitchFamily="34" charset="-122"/>
                           <a:cs typeface="Calibri" pitchFamily="34" charset="-120"/>
                         </a:rPr>
-                        <a:t>0.01%</a:t>
+                        <a:t>0.45%</a:t>
                       </a:r>
                       <a:endParaRPr lang="en-US" sz="500" dirty="0">
                         <a:latin typeface="Calibri" charset="0"/>
@@ -8531,7 +10985,7 @@
                           <a:ea typeface="Calibri" pitchFamily="34" charset="-122"/>
                           <a:cs typeface="Calibri" pitchFamily="34" charset="-120"/>
                         </a:rPr>
-                        <a:t>0.01%</a:t>
+                        <a:t>0.60%</a:t>
                       </a:r>
                       <a:endParaRPr lang="en-US" sz="500" dirty="0">
                         <a:latin typeface="Calibri" charset="0"/>
@@ -8596,7 +11050,7 @@
                           <a:ea typeface="Calibri" pitchFamily="34" charset="-122"/>
                           <a:cs typeface="Calibri" pitchFamily="34" charset="-120"/>
                         </a:rPr>
-                        <a:t>0.01%</a:t>
+                        <a:t>0.70%</a:t>
                       </a:r>
                       <a:endParaRPr lang="en-US" sz="500" dirty="0">
                         <a:latin typeface="Calibri" charset="0"/>
@@ -8661,7 +11115,7 @@
                           <a:ea typeface="Calibri" pitchFamily="34" charset="-122"/>
                           <a:cs typeface="Calibri" pitchFamily="34" charset="-120"/>
                         </a:rPr>
-                        <a:t>0.01%</a:t>
+                        <a:t>0.65%</a:t>
                       </a:r>
                       <a:endParaRPr lang="en-US" sz="500" dirty="0">
                         <a:latin typeface="Calibri" charset="0"/>
@@ -8715,2070 +11169,6 @@
                     <a:lstStyle/>
                     <a:p>
                       <a:pPr algn="ctr" indent="0" marL="0">
-                        <a:buNone/>
-                      </a:pPr>
-                      <a:r>
-                        <a:rPr lang="en-US" sz="500" b="1" dirty="0">
-                          <a:solidFill>
-                            <a:srgbClr val="000000"/>
-                          </a:solidFill>
-                          <a:latin typeface="Calibri" pitchFamily="34" charset="0"/>
-                          <a:ea typeface="Calibri" pitchFamily="34" charset="-122"/>
-                          <a:cs typeface="Calibri" pitchFamily="34" charset="-120"/>
-                        </a:rPr>
-                        <a:t>0.02%</a:t>
-                      </a:r>
-                      <a:endParaRPr lang="en-US" sz="500" dirty="0">
-                        <a:latin typeface="Calibri" charset="0"/>
-                        <a:ea typeface="Calibri" charset="0"/>
-                        <a:cs typeface="Calibri" charset="0"/>
-                      </a:endParaRPr>
-                    </a:p>
-                  </a:txBody>
-                  <a:tcPr marL="91440" marR="91440" marT="45720" marB="45720">
-                    <a:lnL w="2540" cap="flat" cmpd="sng" algn="ctr">
-                      <a:solidFill>
-                        <a:srgbClr val="EEEEEE"/>
-                      </a:solidFill>
-                      <a:prstDash val="solid"/>
-                      <a:round/>
-                      <a:headEnd type="none" w="med" len="med"/>
-                      <a:tailEnd type="none" w="med" len="med"/>
-                    </a:lnL>
-                    <a:lnR w="2540" cap="flat" cmpd="sng" algn="ctr">
-                      <a:solidFill>
-                        <a:srgbClr val="EEEEEE"/>
-                      </a:solidFill>
-                      <a:prstDash val="solid"/>
-                      <a:round/>
-                      <a:headEnd type="none" w="med" len="med"/>
-                      <a:tailEnd type="none" w="med" len="med"/>
-                    </a:lnR>
-                    <a:lnT w="2540" cap="flat" cmpd="sng" algn="ctr">
-                      <a:solidFill>
-                        <a:srgbClr val="EEEEEE"/>
-                      </a:solidFill>
-                      <a:prstDash val="solid"/>
-                      <a:round/>
-                      <a:headEnd type="none" w="med" len="med"/>
-                      <a:tailEnd type="none" w="med" len="med"/>
-                    </a:lnT>
-                    <a:lnB w="2540" cap="flat" cmpd="sng" algn="ctr">
-                      <a:solidFill>
-                        <a:srgbClr val="EEEEEE"/>
-                      </a:solidFill>
-                      <a:prstDash val="solid"/>
-                      <a:round/>
-                      <a:headEnd type="none" w="med" len="med"/>
-                      <a:tailEnd type="none" w="med" len="med"/>
-                    </a:lnB>
-                  </a:tcPr>
-                </a:tc>
-              </a:tr>
-              <a:tr h="123444">
-                <a:tc>
-                  <a:txBody>
-                    <a:bodyPr/>
-                    <a:lstStyle/>
-                    <a:p>
-                      <a:pPr algn="l" indent="0" marL="0">
-                        <a:buNone/>
-                      </a:pPr>
-                      <a:r>
-                        <a:rPr lang="en-US" sz="500" b="1" dirty="0">
-                          <a:solidFill>
-                            <a:srgbClr val="000000"/>
-                          </a:solidFill>
-                          <a:latin typeface="Calibri" pitchFamily="34" charset="0"/>
-                          <a:ea typeface="Calibri" pitchFamily="34" charset="-122"/>
-                          <a:cs typeface="Calibri" pitchFamily="34" charset="-120"/>
-                        </a:rPr>
-                        <a:t>2025</a:t>
-                      </a:r>
-                      <a:endParaRPr lang="en-US" sz="500" dirty="0">
-                        <a:latin typeface="Calibri" charset="0"/>
-                        <a:ea typeface="Calibri" charset="0"/>
-                        <a:cs typeface="Calibri" charset="0"/>
-                      </a:endParaRPr>
-                    </a:p>
-                  </a:txBody>
-                  <a:tcPr marL="91440" marR="91440" marT="45720" marB="45720">
-                    <a:lnL w="2540" cap="flat" cmpd="sng" algn="ctr">
-                      <a:solidFill>
-                        <a:srgbClr val="EEEEEE"/>
-                      </a:solidFill>
-                      <a:prstDash val="solid"/>
-                      <a:round/>
-                      <a:headEnd type="none" w="med" len="med"/>
-                      <a:tailEnd type="none" w="med" len="med"/>
-                    </a:lnL>
-                    <a:lnR w="2540" cap="flat" cmpd="sng" algn="ctr">
-                      <a:solidFill>
-                        <a:srgbClr val="EEEEEE"/>
-                      </a:solidFill>
-                      <a:prstDash val="solid"/>
-                      <a:round/>
-                      <a:headEnd type="none" w="med" len="med"/>
-                      <a:tailEnd type="none" w="med" len="med"/>
-                    </a:lnR>
-                    <a:lnT w="2540" cap="flat" cmpd="sng" algn="ctr">
-                      <a:solidFill>
-                        <a:srgbClr val="EEEEEE"/>
-                      </a:solidFill>
-                      <a:prstDash val="solid"/>
-                      <a:round/>
-                      <a:headEnd type="none" w="med" len="med"/>
-                      <a:tailEnd type="none" w="med" len="med"/>
-                    </a:lnT>
-                    <a:lnB w="2540" cap="flat" cmpd="sng" algn="ctr">
-                      <a:solidFill>
-                        <a:srgbClr val="EEEEEE"/>
-                      </a:solidFill>
-                      <a:prstDash val="solid"/>
-                      <a:round/>
-                      <a:headEnd type="none" w="med" len="med"/>
-                      <a:tailEnd type="none" w="med" len="med"/>
-                    </a:lnB>
-                  </a:tcPr>
-                </a:tc>
-                <a:tc>
-                  <a:txBody>
-                    <a:bodyPr/>
-                    <a:lstStyle/>
-                    <a:p>
-                      <a:pPr algn="l" indent="0" marL="0">
-                        <a:buNone/>
-                      </a:pPr>
-                      <a:r>
-                        <a:rPr lang="en-US" sz="500" dirty="0">
-                          <a:solidFill>
-                            <a:srgbClr val="777777"/>
-                          </a:solidFill>
-                          <a:latin typeface="Calibri" pitchFamily="34" charset="0"/>
-                          <a:ea typeface="Calibri" pitchFamily="34" charset="-122"/>
-                          <a:cs typeface="Calibri" pitchFamily="34" charset="-120"/>
-                        </a:rPr>
-                        <a:t>ICP</a:t>
-                      </a:r>
-                      <a:endParaRPr lang="en-US" sz="500" dirty="0">
-                        <a:latin typeface="Calibri" charset="0"/>
-                        <a:ea typeface="Calibri" charset="0"/>
-                        <a:cs typeface="Calibri" charset="0"/>
-                      </a:endParaRPr>
-                    </a:p>
-                  </a:txBody>
-                  <a:tcPr marL="91440" marR="91440" marT="45720" marB="45720">
-                    <a:lnL w="2540" cap="flat" cmpd="sng" algn="ctr">
-                      <a:solidFill>
-                        <a:srgbClr val="EEEEEE"/>
-                      </a:solidFill>
-                      <a:prstDash val="solid"/>
-                      <a:round/>
-                      <a:headEnd type="none" w="med" len="med"/>
-                      <a:tailEnd type="none" w="med" len="med"/>
-                    </a:lnL>
-                    <a:lnR w="2540" cap="flat" cmpd="sng" algn="ctr">
-                      <a:solidFill>
-                        <a:srgbClr val="EEEEEE"/>
-                      </a:solidFill>
-                      <a:prstDash val="solid"/>
-                      <a:round/>
-                      <a:headEnd type="none" w="med" len="med"/>
-                      <a:tailEnd type="none" w="med" len="med"/>
-                    </a:lnR>
-                    <a:lnT w="2540" cap="flat" cmpd="sng" algn="ctr">
-                      <a:solidFill>
-                        <a:srgbClr val="EEEEEE"/>
-                      </a:solidFill>
-                      <a:prstDash val="solid"/>
-                      <a:round/>
-                      <a:headEnd type="none" w="med" len="med"/>
-                      <a:tailEnd type="none" w="med" len="med"/>
-                    </a:lnT>
-                    <a:lnB w="2540" cap="flat" cmpd="sng" algn="ctr">
-                      <a:solidFill>
-                        <a:srgbClr val="EEEEEE"/>
-                      </a:solidFill>
-                      <a:prstDash val="solid"/>
-                      <a:round/>
-                      <a:headEnd type="none" w="med" len="med"/>
-                      <a:tailEnd type="none" w="med" len="med"/>
-                    </a:lnB>
-                  </a:tcPr>
-                </a:tc>
-                <a:tc>
-                  <a:txBody>
-                    <a:bodyPr/>
-                    <a:lstStyle/>
-                    <a:p>
-                      <a:pPr algn="ctr" indent="0" marL="0">
-                        <a:buNone/>
-                      </a:pPr>
-                      <a:r>
-                        <a:rPr lang="en-US" sz="500" dirty="0">
-                          <a:solidFill>
-                            <a:srgbClr val="777777"/>
-                          </a:solidFill>
-                          <a:latin typeface="Calibri" pitchFamily="34" charset="0"/>
-                          <a:ea typeface="Calibri" pitchFamily="34" charset="-122"/>
-                          <a:cs typeface="Calibri" pitchFamily="34" charset="-120"/>
-                        </a:rPr>
-                        <a:t>0.42%</a:t>
-                      </a:r>
-                      <a:endParaRPr lang="en-US" sz="500" dirty="0">
-                        <a:latin typeface="Calibri" charset="0"/>
-                        <a:ea typeface="Calibri" charset="0"/>
-                        <a:cs typeface="Calibri" charset="0"/>
-                      </a:endParaRPr>
-                    </a:p>
-                  </a:txBody>
-                  <a:tcPr marL="91440" marR="91440" marT="45720" marB="45720">
-                    <a:lnL w="2540" cap="flat" cmpd="sng" algn="ctr">
-                      <a:solidFill>
-                        <a:srgbClr val="EEEEEE"/>
-                      </a:solidFill>
-                      <a:prstDash val="solid"/>
-                      <a:round/>
-                      <a:headEnd type="none" w="med" len="med"/>
-                      <a:tailEnd type="none" w="med" len="med"/>
-                    </a:lnL>
-                    <a:lnR w="2540" cap="flat" cmpd="sng" algn="ctr">
-                      <a:solidFill>
-                        <a:srgbClr val="EEEEEE"/>
-                      </a:solidFill>
-                      <a:prstDash val="solid"/>
-                      <a:round/>
-                      <a:headEnd type="none" w="med" len="med"/>
-                      <a:tailEnd type="none" w="med" len="med"/>
-                    </a:lnR>
-                    <a:lnT w="2540" cap="flat" cmpd="sng" algn="ctr">
-                      <a:solidFill>
-                        <a:srgbClr val="EEEEEE"/>
-                      </a:solidFill>
-                      <a:prstDash val="solid"/>
-                      <a:round/>
-                      <a:headEnd type="none" w="med" len="med"/>
-                      <a:tailEnd type="none" w="med" len="med"/>
-                    </a:lnT>
-                    <a:lnB w="2540" cap="flat" cmpd="sng" algn="ctr">
-                      <a:solidFill>
-                        <a:srgbClr val="EEEEEE"/>
-                      </a:solidFill>
-                      <a:prstDash val="solid"/>
-                      <a:round/>
-                      <a:headEnd type="none" w="med" len="med"/>
-                      <a:tailEnd type="none" w="med" len="med"/>
-                    </a:lnB>
-                  </a:tcPr>
-                </a:tc>
-                <a:tc>
-                  <a:txBody>
-                    <a:bodyPr/>
-                    <a:lstStyle/>
-                    <a:p>
-                      <a:pPr algn="ctr" indent="0" marL="0">
-                        <a:buNone/>
-                      </a:pPr>
-                      <a:r>
-                        <a:rPr lang="en-US" sz="500" dirty="0">
-                          <a:solidFill>
-                            <a:srgbClr val="777777"/>
-                          </a:solidFill>
-                          <a:latin typeface="Calibri" pitchFamily="34" charset="0"/>
-                          <a:ea typeface="Calibri" pitchFamily="34" charset="-122"/>
-                          <a:cs typeface="Calibri" pitchFamily="34" charset="-120"/>
-                        </a:rPr>
-                        <a:t>0.42%</a:t>
-                      </a:r>
-                      <a:endParaRPr lang="en-US" sz="500" dirty="0">
-                        <a:latin typeface="Calibri" charset="0"/>
-                        <a:ea typeface="Calibri" charset="0"/>
-                        <a:cs typeface="Calibri" charset="0"/>
-                      </a:endParaRPr>
-                    </a:p>
-                  </a:txBody>
-                  <a:tcPr marL="91440" marR="91440" marT="45720" marB="45720">
-                    <a:lnL w="2540" cap="flat" cmpd="sng" algn="ctr">
-                      <a:solidFill>
-                        <a:srgbClr val="EEEEEE"/>
-                      </a:solidFill>
-                      <a:prstDash val="solid"/>
-                      <a:round/>
-                      <a:headEnd type="none" w="med" len="med"/>
-                      <a:tailEnd type="none" w="med" len="med"/>
-                    </a:lnL>
-                    <a:lnR w="2540" cap="flat" cmpd="sng" algn="ctr">
-                      <a:solidFill>
-                        <a:srgbClr val="EEEEEE"/>
-                      </a:solidFill>
-                      <a:prstDash val="solid"/>
-                      <a:round/>
-                      <a:headEnd type="none" w="med" len="med"/>
-                      <a:tailEnd type="none" w="med" len="med"/>
-                    </a:lnR>
-                    <a:lnT w="2540" cap="flat" cmpd="sng" algn="ctr">
-                      <a:solidFill>
-                        <a:srgbClr val="EEEEEE"/>
-                      </a:solidFill>
-                      <a:prstDash val="solid"/>
-                      <a:round/>
-                      <a:headEnd type="none" w="med" len="med"/>
-                      <a:tailEnd type="none" w="med" len="med"/>
-                    </a:lnT>
-                    <a:lnB w="2540" cap="flat" cmpd="sng" algn="ctr">
-                      <a:solidFill>
-                        <a:srgbClr val="EEEEEE"/>
-                      </a:solidFill>
-                      <a:prstDash val="solid"/>
-                      <a:round/>
-                      <a:headEnd type="none" w="med" len="med"/>
-                      <a:tailEnd type="none" w="med" len="med"/>
-                    </a:lnB>
-                  </a:tcPr>
-                </a:tc>
-                <a:tc>
-                  <a:txBody>
-                    <a:bodyPr/>
-                    <a:lstStyle/>
-                    <a:p>
-                      <a:pPr algn="ctr" indent="0" marL="0">
-                        <a:buNone/>
-                      </a:pPr>
-                      <a:r>
-                        <a:rPr lang="en-US" sz="500" dirty="0">
-                          <a:solidFill>
-                            <a:srgbClr val="777777"/>
-                          </a:solidFill>
-                          <a:latin typeface="Calibri" pitchFamily="34" charset="0"/>
-                          <a:ea typeface="Calibri" pitchFamily="34" charset="-122"/>
-                          <a:cs typeface="Calibri" pitchFamily="34" charset="-120"/>
-                        </a:rPr>
-                        <a:t>0.42%</a:t>
-                      </a:r>
-                      <a:endParaRPr lang="en-US" sz="500" dirty="0">
-                        <a:latin typeface="Calibri" charset="0"/>
-                        <a:ea typeface="Calibri" charset="0"/>
-                        <a:cs typeface="Calibri" charset="0"/>
-                      </a:endParaRPr>
-                    </a:p>
-                  </a:txBody>
-                  <a:tcPr marL="91440" marR="91440" marT="45720" marB="45720">
-                    <a:lnL w="2540" cap="flat" cmpd="sng" algn="ctr">
-                      <a:solidFill>
-                        <a:srgbClr val="EEEEEE"/>
-                      </a:solidFill>
-                      <a:prstDash val="solid"/>
-                      <a:round/>
-                      <a:headEnd type="none" w="med" len="med"/>
-                      <a:tailEnd type="none" w="med" len="med"/>
-                    </a:lnL>
-                    <a:lnR w="2540" cap="flat" cmpd="sng" algn="ctr">
-                      <a:solidFill>
-                        <a:srgbClr val="EEEEEE"/>
-                      </a:solidFill>
-                      <a:prstDash val="solid"/>
-                      <a:round/>
-                      <a:headEnd type="none" w="med" len="med"/>
-                      <a:tailEnd type="none" w="med" len="med"/>
-                    </a:lnR>
-                    <a:lnT w="2540" cap="flat" cmpd="sng" algn="ctr">
-                      <a:solidFill>
-                        <a:srgbClr val="EEEEEE"/>
-                      </a:solidFill>
-                      <a:prstDash val="solid"/>
-                      <a:round/>
-                      <a:headEnd type="none" w="med" len="med"/>
-                      <a:tailEnd type="none" w="med" len="med"/>
-                    </a:lnT>
-                    <a:lnB w="2540" cap="flat" cmpd="sng" algn="ctr">
-                      <a:solidFill>
-                        <a:srgbClr val="EEEEEE"/>
-                      </a:solidFill>
-                      <a:prstDash val="solid"/>
-                      <a:round/>
-                      <a:headEnd type="none" w="med" len="med"/>
-                      <a:tailEnd type="none" w="med" len="med"/>
-                    </a:lnB>
-                  </a:tcPr>
-                </a:tc>
-                <a:tc>
-                  <a:txBody>
-                    <a:bodyPr/>
-                    <a:lstStyle/>
-                    <a:p>
-                      <a:pPr algn="ctr" indent="0" marL="0">
-                        <a:buNone/>
-                      </a:pPr>
-                      <a:r>
-                        <a:rPr lang="en-US" sz="500" dirty="0">
-                          <a:solidFill>
-                            <a:srgbClr val="777777"/>
-                          </a:solidFill>
-                          <a:latin typeface="Calibri" pitchFamily="34" charset="0"/>
-                          <a:ea typeface="Calibri" pitchFamily="34" charset="-122"/>
-                          <a:cs typeface="Calibri" pitchFamily="34" charset="-120"/>
-                        </a:rPr>
-                        <a:t>0.42%</a:t>
-                      </a:r>
-                      <a:endParaRPr lang="en-US" sz="500" dirty="0">
-                        <a:latin typeface="Calibri" charset="0"/>
-                        <a:ea typeface="Calibri" charset="0"/>
-                        <a:cs typeface="Calibri" charset="0"/>
-                      </a:endParaRPr>
-                    </a:p>
-                  </a:txBody>
-                  <a:tcPr marL="91440" marR="91440" marT="45720" marB="45720">
-                    <a:lnL w="2540" cap="flat" cmpd="sng" algn="ctr">
-                      <a:solidFill>
-                        <a:srgbClr val="EEEEEE"/>
-                      </a:solidFill>
-                      <a:prstDash val="solid"/>
-                      <a:round/>
-                      <a:headEnd type="none" w="med" len="med"/>
-                      <a:tailEnd type="none" w="med" len="med"/>
-                    </a:lnL>
-                    <a:lnR w="2540" cap="flat" cmpd="sng" algn="ctr">
-                      <a:solidFill>
-                        <a:srgbClr val="EEEEEE"/>
-                      </a:solidFill>
-                      <a:prstDash val="solid"/>
-                      <a:round/>
-                      <a:headEnd type="none" w="med" len="med"/>
-                      <a:tailEnd type="none" w="med" len="med"/>
-                    </a:lnR>
-                    <a:lnT w="2540" cap="flat" cmpd="sng" algn="ctr">
-                      <a:solidFill>
-                        <a:srgbClr val="EEEEEE"/>
-                      </a:solidFill>
-                      <a:prstDash val="solid"/>
-                      <a:round/>
-                      <a:headEnd type="none" w="med" len="med"/>
-                      <a:tailEnd type="none" w="med" len="med"/>
-                    </a:lnT>
-                    <a:lnB w="2540" cap="flat" cmpd="sng" algn="ctr">
-                      <a:solidFill>
-                        <a:srgbClr val="EEEEEE"/>
-                      </a:solidFill>
-                      <a:prstDash val="solid"/>
-                      <a:round/>
-                      <a:headEnd type="none" w="med" len="med"/>
-                      <a:tailEnd type="none" w="med" len="med"/>
-                    </a:lnB>
-                  </a:tcPr>
-                </a:tc>
-                <a:tc>
-                  <a:txBody>
-                    <a:bodyPr/>
-                    <a:lstStyle/>
-                    <a:p>
-                      <a:pPr algn="ctr" indent="0" marL="0">
-                        <a:buNone/>
-                      </a:pPr>
-                      <a:r>
-                        <a:rPr lang="en-US" sz="500" dirty="0">
-                          <a:solidFill>
-                            <a:srgbClr val="777777"/>
-                          </a:solidFill>
-                          <a:latin typeface="Calibri" pitchFamily="34" charset="0"/>
-                          <a:ea typeface="Calibri" pitchFamily="34" charset="-122"/>
-                          <a:cs typeface="Calibri" pitchFamily="34" charset="-120"/>
-                        </a:rPr>
-                        <a:t>0.42%</a:t>
-                      </a:r>
-                      <a:endParaRPr lang="en-US" sz="500" dirty="0">
-                        <a:latin typeface="Calibri" charset="0"/>
-                        <a:ea typeface="Calibri" charset="0"/>
-                        <a:cs typeface="Calibri" charset="0"/>
-                      </a:endParaRPr>
-                    </a:p>
-                  </a:txBody>
-                  <a:tcPr marL="91440" marR="91440" marT="45720" marB="45720">
-                    <a:lnL w="2540" cap="flat" cmpd="sng" algn="ctr">
-                      <a:solidFill>
-                        <a:srgbClr val="EEEEEE"/>
-                      </a:solidFill>
-                      <a:prstDash val="solid"/>
-                      <a:round/>
-                      <a:headEnd type="none" w="med" len="med"/>
-                      <a:tailEnd type="none" w="med" len="med"/>
-                    </a:lnL>
-                    <a:lnR w="2540" cap="flat" cmpd="sng" algn="ctr">
-                      <a:solidFill>
-                        <a:srgbClr val="EEEEEE"/>
-                      </a:solidFill>
-                      <a:prstDash val="solid"/>
-                      <a:round/>
-                      <a:headEnd type="none" w="med" len="med"/>
-                      <a:tailEnd type="none" w="med" len="med"/>
-                    </a:lnR>
-                    <a:lnT w="2540" cap="flat" cmpd="sng" algn="ctr">
-                      <a:solidFill>
-                        <a:srgbClr val="EEEEEE"/>
-                      </a:solidFill>
-                      <a:prstDash val="solid"/>
-                      <a:round/>
-                      <a:headEnd type="none" w="med" len="med"/>
-                      <a:tailEnd type="none" w="med" len="med"/>
-                    </a:lnT>
-                    <a:lnB w="2540" cap="flat" cmpd="sng" algn="ctr">
-                      <a:solidFill>
-                        <a:srgbClr val="EEEEEE"/>
-                      </a:solidFill>
-                      <a:prstDash val="solid"/>
-                      <a:round/>
-                      <a:headEnd type="none" w="med" len="med"/>
-                      <a:tailEnd type="none" w="med" len="med"/>
-                    </a:lnB>
-                  </a:tcPr>
-                </a:tc>
-                <a:tc>
-                  <a:txBody>
-                    <a:bodyPr/>
-                    <a:lstStyle/>
-                    <a:p>
-                      <a:pPr algn="ctr" indent="0" marL="0">
-                        <a:buNone/>
-                      </a:pPr>
-                      <a:r>
-                        <a:rPr lang="en-US" sz="500" dirty="0">
-                          <a:solidFill>
-                            <a:srgbClr val="777777"/>
-                          </a:solidFill>
-                          <a:latin typeface="Calibri" pitchFamily="34" charset="0"/>
-                          <a:ea typeface="Calibri" pitchFamily="34" charset="-122"/>
-                          <a:cs typeface="Calibri" pitchFamily="34" charset="-120"/>
-                        </a:rPr>
-                        <a:t>0.42%</a:t>
-                      </a:r>
-                      <a:endParaRPr lang="en-US" sz="500" dirty="0">
-                        <a:latin typeface="Calibri" charset="0"/>
-                        <a:ea typeface="Calibri" charset="0"/>
-                        <a:cs typeface="Calibri" charset="0"/>
-                      </a:endParaRPr>
-                    </a:p>
-                  </a:txBody>
-                  <a:tcPr marL="91440" marR="91440" marT="45720" marB="45720">
-                    <a:lnL w="2540" cap="flat" cmpd="sng" algn="ctr">
-                      <a:solidFill>
-                        <a:srgbClr val="EEEEEE"/>
-                      </a:solidFill>
-                      <a:prstDash val="solid"/>
-                      <a:round/>
-                      <a:headEnd type="none" w="med" len="med"/>
-                      <a:tailEnd type="none" w="med" len="med"/>
-                    </a:lnL>
-                    <a:lnR w="2540" cap="flat" cmpd="sng" algn="ctr">
-                      <a:solidFill>
-                        <a:srgbClr val="EEEEEE"/>
-                      </a:solidFill>
-                      <a:prstDash val="solid"/>
-                      <a:round/>
-                      <a:headEnd type="none" w="med" len="med"/>
-                      <a:tailEnd type="none" w="med" len="med"/>
-                    </a:lnR>
-                    <a:lnT w="2540" cap="flat" cmpd="sng" algn="ctr">
-                      <a:solidFill>
-                        <a:srgbClr val="EEEEEE"/>
-                      </a:solidFill>
-                      <a:prstDash val="solid"/>
-                      <a:round/>
-                      <a:headEnd type="none" w="med" len="med"/>
-                      <a:tailEnd type="none" w="med" len="med"/>
-                    </a:lnT>
-                    <a:lnB w="2540" cap="flat" cmpd="sng" algn="ctr">
-                      <a:solidFill>
-                        <a:srgbClr val="EEEEEE"/>
-                      </a:solidFill>
-                      <a:prstDash val="solid"/>
-                      <a:round/>
-                      <a:headEnd type="none" w="med" len="med"/>
-                      <a:tailEnd type="none" w="med" len="med"/>
-                    </a:lnB>
-                  </a:tcPr>
-                </a:tc>
-                <a:tc>
-                  <a:txBody>
-                    <a:bodyPr/>
-                    <a:lstStyle/>
-                    <a:p>
-                      <a:pPr algn="ctr" indent="0" marL="0">
-                        <a:buNone/>
-                      </a:pPr>
-                      <a:r>
-                        <a:rPr lang="en-US" sz="500" dirty="0">
-                          <a:solidFill>
-                            <a:srgbClr val="777777"/>
-                          </a:solidFill>
-                          <a:latin typeface="Calibri" pitchFamily="34" charset="0"/>
-                          <a:ea typeface="Calibri" pitchFamily="34" charset="-122"/>
-                          <a:cs typeface="Calibri" pitchFamily="34" charset="-120"/>
-                        </a:rPr>
-                        <a:t>0.41%</a:t>
-                      </a:r>
-                      <a:endParaRPr lang="en-US" sz="500" dirty="0">
-                        <a:latin typeface="Calibri" charset="0"/>
-                        <a:ea typeface="Calibri" charset="0"/>
-                        <a:cs typeface="Calibri" charset="0"/>
-                      </a:endParaRPr>
-                    </a:p>
-                  </a:txBody>
-                  <a:tcPr marL="91440" marR="91440" marT="45720" marB="45720">
-                    <a:lnL w="2540" cap="flat" cmpd="sng" algn="ctr">
-                      <a:solidFill>
-                        <a:srgbClr val="EEEEEE"/>
-                      </a:solidFill>
-                      <a:prstDash val="solid"/>
-                      <a:round/>
-                      <a:headEnd type="none" w="med" len="med"/>
-                      <a:tailEnd type="none" w="med" len="med"/>
-                    </a:lnL>
-                    <a:lnR w="2540" cap="flat" cmpd="sng" algn="ctr">
-                      <a:solidFill>
-                        <a:srgbClr val="EEEEEE"/>
-                      </a:solidFill>
-                      <a:prstDash val="solid"/>
-                      <a:round/>
-                      <a:headEnd type="none" w="med" len="med"/>
-                      <a:tailEnd type="none" w="med" len="med"/>
-                    </a:lnR>
-                    <a:lnT w="2540" cap="flat" cmpd="sng" algn="ctr">
-                      <a:solidFill>
-                        <a:srgbClr val="EEEEEE"/>
-                      </a:solidFill>
-                      <a:prstDash val="solid"/>
-                      <a:round/>
-                      <a:headEnd type="none" w="med" len="med"/>
-                      <a:tailEnd type="none" w="med" len="med"/>
-                    </a:lnT>
-                    <a:lnB w="2540" cap="flat" cmpd="sng" algn="ctr">
-                      <a:solidFill>
-                        <a:srgbClr val="EEEEEE"/>
-                      </a:solidFill>
-                      <a:prstDash val="solid"/>
-                      <a:round/>
-                      <a:headEnd type="none" w="med" len="med"/>
-                      <a:tailEnd type="none" w="med" len="med"/>
-                    </a:lnB>
-                  </a:tcPr>
-                </a:tc>
-                <a:tc>
-                  <a:txBody>
-                    <a:bodyPr/>
-                    <a:lstStyle/>
-                    <a:p>
-                      <a:pPr algn="ctr" indent="0" marL="0">
-                        <a:buNone/>
-                      </a:pPr>
-                      <a:r>
-                        <a:rPr lang="en-US" sz="500" dirty="0">
-                          <a:solidFill>
-                            <a:srgbClr val="777777"/>
-                          </a:solidFill>
-                          <a:latin typeface="Calibri" pitchFamily="34" charset="0"/>
-                          <a:ea typeface="Calibri" pitchFamily="34" charset="-122"/>
-                          <a:cs typeface="Calibri" pitchFamily="34" charset="-120"/>
-                        </a:rPr>
-                        <a:t>0.40%</a:t>
-                      </a:r>
-                      <a:endParaRPr lang="en-US" sz="500" dirty="0">
-                        <a:latin typeface="Calibri" charset="0"/>
-                        <a:ea typeface="Calibri" charset="0"/>
-                        <a:cs typeface="Calibri" charset="0"/>
-                      </a:endParaRPr>
-                    </a:p>
-                  </a:txBody>
-                  <a:tcPr marL="91440" marR="91440" marT="45720" marB="45720">
-                    <a:lnL w="2540" cap="flat" cmpd="sng" algn="ctr">
-                      <a:solidFill>
-                        <a:srgbClr val="EEEEEE"/>
-                      </a:solidFill>
-                      <a:prstDash val="solid"/>
-                      <a:round/>
-                      <a:headEnd type="none" w="med" len="med"/>
-                      <a:tailEnd type="none" w="med" len="med"/>
-                    </a:lnL>
-                    <a:lnR w="2540" cap="flat" cmpd="sng" algn="ctr">
-                      <a:solidFill>
-                        <a:srgbClr val="EEEEEE"/>
-                      </a:solidFill>
-                      <a:prstDash val="solid"/>
-                      <a:round/>
-                      <a:headEnd type="none" w="med" len="med"/>
-                      <a:tailEnd type="none" w="med" len="med"/>
-                    </a:lnR>
-                    <a:lnT w="2540" cap="flat" cmpd="sng" algn="ctr">
-                      <a:solidFill>
-                        <a:srgbClr val="EEEEEE"/>
-                      </a:solidFill>
-                      <a:prstDash val="solid"/>
-                      <a:round/>
-                      <a:headEnd type="none" w="med" len="med"/>
-                      <a:tailEnd type="none" w="med" len="med"/>
-                    </a:lnT>
-                    <a:lnB w="2540" cap="flat" cmpd="sng" algn="ctr">
-                      <a:solidFill>
-                        <a:srgbClr val="EEEEEE"/>
-                      </a:solidFill>
-                      <a:prstDash val="solid"/>
-                      <a:round/>
-                      <a:headEnd type="none" w="med" len="med"/>
-                      <a:tailEnd type="none" w="med" len="med"/>
-                    </a:lnB>
-                  </a:tcPr>
-                </a:tc>
-                <a:tc>
-                  <a:txBody>
-                    <a:bodyPr/>
-                    <a:lstStyle/>
-                    <a:p>
-                      <a:pPr algn="ctr" indent="0" marL="0">
-                        <a:buNone/>
-                      </a:pPr>
-                      <a:r>
-                        <a:rPr lang="en-US" sz="500" dirty="0">
-                          <a:solidFill>
-                            <a:srgbClr val="777777"/>
-                          </a:solidFill>
-                          <a:latin typeface="Calibri" pitchFamily="34" charset="0"/>
-                          <a:ea typeface="Calibri" pitchFamily="34" charset="-122"/>
-                          <a:cs typeface="Calibri" pitchFamily="34" charset="-120"/>
-                        </a:rPr>
-                        <a:t>0.40%</a:t>
-                      </a:r>
-                      <a:endParaRPr lang="en-US" sz="500" dirty="0">
-                        <a:latin typeface="Calibri" charset="0"/>
-                        <a:ea typeface="Calibri" charset="0"/>
-                        <a:cs typeface="Calibri" charset="0"/>
-                      </a:endParaRPr>
-                    </a:p>
-                  </a:txBody>
-                  <a:tcPr marL="91440" marR="91440" marT="45720" marB="45720">
-                    <a:lnL w="2540" cap="flat" cmpd="sng" algn="ctr">
-                      <a:solidFill>
-                        <a:srgbClr val="EEEEEE"/>
-                      </a:solidFill>
-                      <a:prstDash val="solid"/>
-                      <a:round/>
-                      <a:headEnd type="none" w="med" len="med"/>
-                      <a:tailEnd type="none" w="med" len="med"/>
-                    </a:lnL>
-                    <a:lnR w="2540" cap="flat" cmpd="sng" algn="ctr">
-                      <a:solidFill>
-                        <a:srgbClr val="EEEEEE"/>
-                      </a:solidFill>
-                      <a:prstDash val="solid"/>
-                      <a:round/>
-                      <a:headEnd type="none" w="med" len="med"/>
-                      <a:tailEnd type="none" w="med" len="med"/>
-                    </a:lnR>
-                    <a:lnT w="2540" cap="flat" cmpd="sng" algn="ctr">
-                      <a:solidFill>
-                        <a:srgbClr val="EEEEEE"/>
-                      </a:solidFill>
-                      <a:prstDash val="solid"/>
-                      <a:round/>
-                      <a:headEnd type="none" w="med" len="med"/>
-                      <a:tailEnd type="none" w="med" len="med"/>
-                    </a:lnT>
-                    <a:lnB w="2540" cap="flat" cmpd="sng" algn="ctr">
-                      <a:solidFill>
-                        <a:srgbClr val="EEEEEE"/>
-                      </a:solidFill>
-                      <a:prstDash val="solid"/>
-                      <a:round/>
-                      <a:headEnd type="none" w="med" len="med"/>
-                      <a:tailEnd type="none" w="med" len="med"/>
-                    </a:lnB>
-                  </a:tcPr>
-                </a:tc>
-                <a:tc>
-                  <a:txBody>
-                    <a:bodyPr/>
-                    <a:lstStyle/>
-                    <a:p>
-                      <a:pPr algn="ctr" indent="0" marL="0">
-                        <a:buNone/>
-                      </a:pPr>
-                      <a:r>
-                        <a:rPr lang="en-US" sz="500" dirty="0">
-                          <a:solidFill>
-                            <a:srgbClr val="777777"/>
-                          </a:solidFill>
-                          <a:latin typeface="Calibri" pitchFamily="34" charset="0"/>
-                          <a:ea typeface="Calibri" pitchFamily="34" charset="-122"/>
-                          <a:cs typeface="Calibri" pitchFamily="34" charset="-120"/>
-                        </a:rPr>
-                        <a:t>0.40%</a:t>
-                      </a:r>
-                      <a:endParaRPr lang="en-US" sz="500" dirty="0">
-                        <a:latin typeface="Calibri" charset="0"/>
-                        <a:ea typeface="Calibri" charset="0"/>
-                        <a:cs typeface="Calibri" charset="0"/>
-                      </a:endParaRPr>
-                    </a:p>
-                  </a:txBody>
-                  <a:tcPr marL="91440" marR="91440" marT="45720" marB="45720">
-                    <a:lnL w="2540" cap="flat" cmpd="sng" algn="ctr">
-                      <a:solidFill>
-                        <a:srgbClr val="EEEEEE"/>
-                      </a:solidFill>
-                      <a:prstDash val="solid"/>
-                      <a:round/>
-                      <a:headEnd type="none" w="med" len="med"/>
-                      <a:tailEnd type="none" w="med" len="med"/>
-                    </a:lnL>
-                    <a:lnR w="2540" cap="flat" cmpd="sng" algn="ctr">
-                      <a:solidFill>
-                        <a:srgbClr val="EEEEEE"/>
-                      </a:solidFill>
-                      <a:prstDash val="solid"/>
-                      <a:round/>
-                      <a:headEnd type="none" w="med" len="med"/>
-                      <a:tailEnd type="none" w="med" len="med"/>
-                    </a:lnR>
-                    <a:lnT w="2540" cap="flat" cmpd="sng" algn="ctr">
-                      <a:solidFill>
-                        <a:srgbClr val="EEEEEE"/>
-                      </a:solidFill>
-                      <a:prstDash val="solid"/>
-                      <a:round/>
-                      <a:headEnd type="none" w="med" len="med"/>
-                      <a:tailEnd type="none" w="med" len="med"/>
-                    </a:lnT>
-                    <a:lnB w="2540" cap="flat" cmpd="sng" algn="ctr">
-                      <a:solidFill>
-                        <a:srgbClr val="EEEEEE"/>
-                      </a:solidFill>
-                      <a:prstDash val="solid"/>
-                      <a:round/>
-                      <a:headEnd type="none" w="med" len="med"/>
-                      <a:tailEnd type="none" w="med" len="med"/>
-                    </a:lnB>
-                  </a:tcPr>
-                </a:tc>
-                <a:tc>
-                  <a:txBody>
-                    <a:bodyPr/>
-                    <a:lstStyle/>
-                    <a:p>
-                      <a:pPr algn="ctr" indent="0" marL="0">
-                        <a:buNone/>
-                      </a:pPr>
-                      <a:r>
-                        <a:rPr lang="en-US" sz="500" dirty="0">
-                          <a:solidFill>
-                            <a:srgbClr val="777777"/>
-                          </a:solidFill>
-                          <a:latin typeface="Calibri" pitchFamily="34" charset="0"/>
-                          <a:ea typeface="Calibri" pitchFamily="34" charset="-122"/>
-                          <a:cs typeface="Calibri" pitchFamily="34" charset="-120"/>
-                        </a:rPr>
-                        <a:t>0.40%</a:t>
-                      </a:r>
-                      <a:endParaRPr lang="en-US" sz="500" dirty="0">
-                        <a:latin typeface="Calibri" charset="0"/>
-                        <a:ea typeface="Calibri" charset="0"/>
-                        <a:cs typeface="Calibri" charset="0"/>
-                      </a:endParaRPr>
-                    </a:p>
-                  </a:txBody>
-                  <a:tcPr marL="91440" marR="91440" marT="45720" marB="45720">
-                    <a:lnL w="2540" cap="flat" cmpd="sng" algn="ctr">
-                      <a:solidFill>
-                        <a:srgbClr val="EEEEEE"/>
-                      </a:solidFill>
-                      <a:prstDash val="solid"/>
-                      <a:round/>
-                      <a:headEnd type="none" w="med" len="med"/>
-                      <a:tailEnd type="none" w="med" len="med"/>
-                    </a:lnL>
-                    <a:lnR w="2540" cap="flat" cmpd="sng" algn="ctr">
-                      <a:solidFill>
-                        <a:srgbClr val="EEEEEE"/>
-                      </a:solidFill>
-                      <a:prstDash val="solid"/>
-                      <a:round/>
-                      <a:headEnd type="none" w="med" len="med"/>
-                      <a:tailEnd type="none" w="med" len="med"/>
-                    </a:lnR>
-                    <a:lnT w="2540" cap="flat" cmpd="sng" algn="ctr">
-                      <a:solidFill>
-                        <a:srgbClr val="EEEEEE"/>
-                      </a:solidFill>
-                      <a:prstDash val="solid"/>
-                      <a:round/>
-                      <a:headEnd type="none" w="med" len="med"/>
-                      <a:tailEnd type="none" w="med" len="med"/>
-                    </a:lnT>
-                    <a:lnB w="2540" cap="flat" cmpd="sng" algn="ctr">
-                      <a:solidFill>
-                        <a:srgbClr val="EEEEEE"/>
-                      </a:solidFill>
-                      <a:prstDash val="solid"/>
-                      <a:round/>
-                      <a:headEnd type="none" w="med" len="med"/>
-                      <a:tailEnd type="none" w="med" len="med"/>
-                    </a:lnB>
-                  </a:tcPr>
-                </a:tc>
-                <a:tc>
-                  <a:txBody>
-                    <a:bodyPr/>
-                    <a:lstStyle/>
-                    <a:p>
-                      <a:pPr algn="ctr" indent="0" marL="0">
-                        <a:buNone/>
-                      </a:pPr>
-                      <a:r>
-                        <a:rPr lang="en-US" sz="500" dirty="0">
-                          <a:solidFill>
-                            <a:srgbClr val="777777"/>
-                          </a:solidFill>
-                          <a:latin typeface="Calibri" pitchFamily="34" charset="0"/>
-                          <a:ea typeface="Calibri" pitchFamily="34" charset="-122"/>
-                          <a:cs typeface="Calibri" pitchFamily="34" charset="-120"/>
-                        </a:rPr>
-                        <a:t>0.39%</a:t>
-                      </a:r>
-                      <a:endParaRPr lang="en-US" sz="500" dirty="0">
-                        <a:latin typeface="Calibri" charset="0"/>
-                        <a:ea typeface="Calibri" charset="0"/>
-                        <a:cs typeface="Calibri" charset="0"/>
-                      </a:endParaRPr>
-                    </a:p>
-                  </a:txBody>
-                  <a:tcPr marL="91440" marR="91440" marT="45720" marB="45720">
-                    <a:lnL w="2540" cap="flat" cmpd="sng" algn="ctr">
-                      <a:solidFill>
-                        <a:srgbClr val="EEEEEE"/>
-                      </a:solidFill>
-                      <a:prstDash val="solid"/>
-                      <a:round/>
-                      <a:headEnd type="none" w="med" len="med"/>
-                      <a:tailEnd type="none" w="med" len="med"/>
-                    </a:lnL>
-                    <a:lnR w="2540" cap="flat" cmpd="sng" algn="ctr">
-                      <a:solidFill>
-                        <a:srgbClr val="EEEEEE"/>
-                      </a:solidFill>
-                      <a:prstDash val="solid"/>
-                      <a:round/>
-                      <a:headEnd type="none" w="med" len="med"/>
-                      <a:tailEnd type="none" w="med" len="med"/>
-                    </a:lnR>
-                    <a:lnT w="2540" cap="flat" cmpd="sng" algn="ctr">
-                      <a:solidFill>
-                        <a:srgbClr val="EEEEEE"/>
-                      </a:solidFill>
-                      <a:prstDash val="solid"/>
-                      <a:round/>
-                      <a:headEnd type="none" w="med" len="med"/>
-                      <a:tailEnd type="none" w="med" len="med"/>
-                    </a:lnT>
-                    <a:lnB w="2540" cap="flat" cmpd="sng" algn="ctr">
-                      <a:solidFill>
-                        <a:srgbClr val="EEEEEE"/>
-                      </a:solidFill>
-                      <a:prstDash val="solid"/>
-                      <a:round/>
-                      <a:headEnd type="none" w="med" len="med"/>
-                      <a:tailEnd type="none" w="med" len="med"/>
-                    </a:lnB>
-                  </a:tcPr>
-                </a:tc>
-                <a:tc>
-                  <a:txBody>
-                    <a:bodyPr/>
-                    <a:lstStyle/>
-                    <a:p>
-                      <a:pPr algn="ctr" indent="0" marL="0">
-                        <a:buNone/>
-                      </a:pPr>
-                      <a:r>
-                        <a:rPr lang="en-US" sz="500" b="1" dirty="0">
-                          <a:solidFill>
-                            <a:srgbClr val="777777"/>
-                          </a:solidFill>
-                          <a:latin typeface="Calibri" pitchFamily="34" charset="0"/>
-                          <a:ea typeface="Calibri" pitchFamily="34" charset="-122"/>
-                          <a:cs typeface="Calibri" pitchFamily="34" charset="-120"/>
-                        </a:rPr>
-                        <a:t>4.99%</a:t>
-                      </a:r>
-                      <a:endParaRPr lang="en-US" sz="500" dirty="0">
-                        <a:latin typeface="Calibri" charset="0"/>
-                        <a:ea typeface="Calibri" charset="0"/>
-                        <a:cs typeface="Calibri" charset="0"/>
-                      </a:endParaRPr>
-                    </a:p>
-                  </a:txBody>
-                  <a:tcPr marL="91440" marR="91440" marT="45720" marB="45720">
-                    <a:lnL w="2540" cap="flat" cmpd="sng" algn="ctr">
-                      <a:solidFill>
-                        <a:srgbClr val="EEEEEE"/>
-                      </a:solidFill>
-                      <a:prstDash val="solid"/>
-                      <a:round/>
-                      <a:headEnd type="none" w="med" len="med"/>
-                      <a:tailEnd type="none" w="med" len="med"/>
-                    </a:lnL>
-                    <a:lnR w="2540" cap="flat" cmpd="sng" algn="ctr">
-                      <a:solidFill>
-                        <a:srgbClr val="EEEEEE"/>
-                      </a:solidFill>
-                      <a:prstDash val="solid"/>
-                      <a:round/>
-                      <a:headEnd type="none" w="med" len="med"/>
-                      <a:tailEnd type="none" w="med" len="med"/>
-                    </a:lnR>
-                    <a:lnT w="2540" cap="flat" cmpd="sng" algn="ctr">
-                      <a:solidFill>
-                        <a:srgbClr val="EEEEEE"/>
-                      </a:solidFill>
-                      <a:prstDash val="solid"/>
-                      <a:round/>
-                      <a:headEnd type="none" w="med" len="med"/>
-                      <a:tailEnd type="none" w="med" len="med"/>
-                    </a:lnT>
-                    <a:lnB w="2540" cap="flat" cmpd="sng" algn="ctr">
-                      <a:solidFill>
-                        <a:srgbClr val="EEEEEE"/>
-                      </a:solidFill>
-                      <a:prstDash val="solid"/>
-                      <a:round/>
-                      <a:headEnd type="none" w="med" len="med"/>
-                      <a:tailEnd type="none" w="med" len="med"/>
-                    </a:lnB>
-                  </a:tcPr>
-                </a:tc>
-              </a:tr>
-              <a:tr h="123444">
-                <a:tc>
-                  <a:txBody>
-                    <a:bodyPr/>
-                    <a:lstStyle/>
-                    <a:p>
-                      <a:pPr algn="l" indent="0" marL="0">
-                        <a:buNone/>
-                      </a:pPr>
-                      <a:endParaRPr lang="en-US" sz="500" dirty="0">
-                        <a:latin typeface="Calibri" charset="0"/>
-                        <a:ea typeface="Calibri" charset="0"/>
-                        <a:cs typeface="Calibri" charset="0"/>
-                      </a:endParaRPr>
-                    </a:p>
-                  </a:txBody>
-                  <a:tcPr marL="91440" marR="91440" marT="45720" marB="45720">
-                    <a:lnL w="2540" cap="flat" cmpd="sng" algn="ctr">
-                      <a:solidFill>
-                        <a:srgbClr val="EEEEEE"/>
-                      </a:solidFill>
-                      <a:prstDash val="solid"/>
-                      <a:round/>
-                      <a:headEnd type="none" w="med" len="med"/>
-                      <a:tailEnd type="none" w="med" len="med"/>
-                    </a:lnL>
-                    <a:lnR w="2540" cap="flat" cmpd="sng" algn="ctr">
-                      <a:solidFill>
-                        <a:srgbClr val="EEEEEE"/>
-                      </a:solidFill>
-                      <a:prstDash val="solid"/>
-                      <a:round/>
-                      <a:headEnd type="none" w="med" len="med"/>
-                      <a:tailEnd type="none" w="med" len="med"/>
-                    </a:lnR>
-                    <a:lnT w="2540" cap="flat" cmpd="sng" algn="ctr">
-                      <a:solidFill>
-                        <a:srgbClr val="EEEEEE"/>
-                      </a:solidFill>
-                      <a:prstDash val="solid"/>
-                      <a:round/>
-                      <a:headEnd type="none" w="med" len="med"/>
-                      <a:tailEnd type="none" w="med" len="med"/>
-                    </a:lnT>
-                    <a:lnB w="2540" cap="flat" cmpd="sng" algn="ctr">
-                      <a:solidFill>
-                        <a:srgbClr val="EEEEEE"/>
-                      </a:solidFill>
-                      <a:prstDash val="solid"/>
-                      <a:round/>
-                      <a:headEnd type="none" w="med" len="med"/>
-                      <a:tailEnd type="none" w="med" len="med"/>
-                    </a:lnB>
-                  </a:tcPr>
-                </a:tc>
-                <a:tc>
-                  <a:txBody>
-                    <a:bodyPr/>
-                    <a:lstStyle/>
-                    <a:p>
-                      <a:pPr algn="l" indent="0" marL="0">
-                        <a:buNone/>
-                      </a:pPr>
-                      <a:r>
-                        <a:rPr lang="en-US" sz="500" dirty="0">
-                          <a:solidFill>
-                            <a:srgbClr val="999999"/>
-                          </a:solidFill>
-                          <a:latin typeface="Calibri" pitchFamily="34" charset="0"/>
-                          <a:ea typeface="Calibri" pitchFamily="34" charset="-122"/>
-                          <a:cs typeface="Calibri" pitchFamily="34" charset="-120"/>
-                        </a:rPr>
-                        <a:t>Competencia</a:t>
-                      </a:r>
-                      <a:endParaRPr lang="en-US" sz="500" dirty="0">
-                        <a:latin typeface="Calibri" charset="0"/>
-                        <a:ea typeface="Calibri" charset="0"/>
-                        <a:cs typeface="Calibri" charset="0"/>
-                      </a:endParaRPr>
-                    </a:p>
-                  </a:txBody>
-                  <a:tcPr marL="91440" marR="91440" marT="45720" marB="45720">
-                    <a:lnL w="2540" cap="flat" cmpd="sng" algn="ctr">
-                      <a:solidFill>
-                        <a:srgbClr val="EEEEEE"/>
-                      </a:solidFill>
-                      <a:prstDash val="solid"/>
-                      <a:round/>
-                      <a:headEnd type="none" w="med" len="med"/>
-                      <a:tailEnd type="none" w="med" len="med"/>
-                    </a:lnL>
-                    <a:lnR w="2540" cap="flat" cmpd="sng" algn="ctr">
-                      <a:solidFill>
-                        <a:srgbClr val="EEEEEE"/>
-                      </a:solidFill>
-                      <a:prstDash val="solid"/>
-                      <a:round/>
-                      <a:headEnd type="none" w="med" len="med"/>
-                      <a:tailEnd type="none" w="med" len="med"/>
-                    </a:lnR>
-                    <a:lnT w="2540" cap="flat" cmpd="sng" algn="ctr">
-                      <a:solidFill>
-                        <a:srgbClr val="EEEEEE"/>
-                      </a:solidFill>
-                      <a:prstDash val="solid"/>
-                      <a:round/>
-                      <a:headEnd type="none" w="med" len="med"/>
-                      <a:tailEnd type="none" w="med" len="med"/>
-                    </a:lnT>
-                    <a:lnB w="2540" cap="flat" cmpd="sng" algn="ctr">
-                      <a:solidFill>
-                        <a:srgbClr val="EEEEEE"/>
-                      </a:solidFill>
-                      <a:prstDash val="solid"/>
-                      <a:round/>
-                      <a:headEnd type="none" w="med" len="med"/>
-                      <a:tailEnd type="none" w="med" len="med"/>
-                    </a:lnB>
-                  </a:tcPr>
-                </a:tc>
-                <a:tc>
-                  <a:txBody>
-                    <a:bodyPr/>
-                    <a:lstStyle/>
-                    <a:p>
-                      <a:pPr algn="ctr" indent="0" marL="0">
-                        <a:buNone/>
-                      </a:pPr>
-                      <a:r>
-                        <a:rPr lang="en-US" sz="500" dirty="0">
-                          <a:solidFill>
-                            <a:srgbClr val="999999"/>
-                          </a:solidFill>
-                          <a:latin typeface="Calibri" pitchFamily="34" charset="0"/>
-                          <a:ea typeface="Calibri" pitchFamily="34" charset="-122"/>
-                          <a:cs typeface="Calibri" pitchFamily="34" charset="-120"/>
-                        </a:rPr>
-                        <a:t>0.00%</a:t>
-                      </a:r>
-                      <a:endParaRPr lang="en-US" sz="500" dirty="0">
-                        <a:latin typeface="Calibri" charset="0"/>
-                        <a:ea typeface="Calibri" charset="0"/>
-                        <a:cs typeface="Calibri" charset="0"/>
-                      </a:endParaRPr>
-                    </a:p>
-                  </a:txBody>
-                  <a:tcPr marL="91440" marR="91440" marT="45720" marB="45720">
-                    <a:lnL w="2540" cap="flat" cmpd="sng" algn="ctr">
-                      <a:solidFill>
-                        <a:srgbClr val="EEEEEE"/>
-                      </a:solidFill>
-                      <a:prstDash val="solid"/>
-                      <a:round/>
-                      <a:headEnd type="none" w="med" len="med"/>
-                      <a:tailEnd type="none" w="med" len="med"/>
-                    </a:lnL>
-                    <a:lnR w="2540" cap="flat" cmpd="sng" algn="ctr">
-                      <a:solidFill>
-                        <a:srgbClr val="EEEEEE"/>
-                      </a:solidFill>
-                      <a:prstDash val="solid"/>
-                      <a:round/>
-                      <a:headEnd type="none" w="med" len="med"/>
-                      <a:tailEnd type="none" w="med" len="med"/>
-                    </a:lnR>
-                    <a:lnT w="2540" cap="flat" cmpd="sng" algn="ctr">
-                      <a:solidFill>
-                        <a:srgbClr val="EEEEEE"/>
-                      </a:solidFill>
-                      <a:prstDash val="solid"/>
-                      <a:round/>
-                      <a:headEnd type="none" w="med" len="med"/>
-                      <a:tailEnd type="none" w="med" len="med"/>
-                    </a:lnT>
-                    <a:lnB w="2540" cap="flat" cmpd="sng" algn="ctr">
-                      <a:solidFill>
-                        <a:srgbClr val="EEEEEE"/>
-                      </a:solidFill>
-                      <a:prstDash val="solid"/>
-                      <a:round/>
-                      <a:headEnd type="none" w="med" len="med"/>
-                      <a:tailEnd type="none" w="med" len="med"/>
-                    </a:lnB>
-                  </a:tcPr>
-                </a:tc>
-                <a:tc>
-                  <a:txBody>
-                    <a:bodyPr/>
-                    <a:lstStyle/>
-                    <a:p>
-                      <a:pPr algn="ctr" indent="0" marL="0">
-                        <a:buNone/>
-                      </a:pPr>
-                      <a:r>
-                        <a:rPr lang="en-US" sz="500" dirty="0">
-                          <a:solidFill>
-                            <a:srgbClr val="999999"/>
-                          </a:solidFill>
-                          <a:latin typeface="Calibri" pitchFamily="34" charset="0"/>
-                          <a:ea typeface="Calibri" pitchFamily="34" charset="-122"/>
-                          <a:cs typeface="Calibri" pitchFamily="34" charset="-120"/>
-                        </a:rPr>
-                        <a:t>0.28%</a:t>
-                      </a:r>
-                      <a:endParaRPr lang="en-US" sz="500" dirty="0">
-                        <a:latin typeface="Calibri" charset="0"/>
-                        <a:ea typeface="Calibri" charset="0"/>
-                        <a:cs typeface="Calibri" charset="0"/>
-                      </a:endParaRPr>
-                    </a:p>
-                  </a:txBody>
-                  <a:tcPr marL="91440" marR="91440" marT="45720" marB="45720">
-                    <a:lnL w="2540" cap="flat" cmpd="sng" algn="ctr">
-                      <a:solidFill>
-                        <a:srgbClr val="EEEEEE"/>
-                      </a:solidFill>
-                      <a:prstDash val="solid"/>
-                      <a:round/>
-                      <a:headEnd type="none" w="med" len="med"/>
-                      <a:tailEnd type="none" w="med" len="med"/>
-                    </a:lnL>
-                    <a:lnR w="2540" cap="flat" cmpd="sng" algn="ctr">
-                      <a:solidFill>
-                        <a:srgbClr val="EEEEEE"/>
-                      </a:solidFill>
-                      <a:prstDash val="solid"/>
-                      <a:round/>
-                      <a:headEnd type="none" w="med" len="med"/>
-                      <a:tailEnd type="none" w="med" len="med"/>
-                    </a:lnR>
-                    <a:lnT w="2540" cap="flat" cmpd="sng" algn="ctr">
-                      <a:solidFill>
-                        <a:srgbClr val="EEEEEE"/>
-                      </a:solidFill>
-                      <a:prstDash val="solid"/>
-                      <a:round/>
-                      <a:headEnd type="none" w="med" len="med"/>
-                      <a:tailEnd type="none" w="med" len="med"/>
-                    </a:lnT>
-                    <a:lnB w="2540" cap="flat" cmpd="sng" algn="ctr">
-                      <a:solidFill>
-                        <a:srgbClr val="EEEEEE"/>
-                      </a:solidFill>
-                      <a:prstDash val="solid"/>
-                      <a:round/>
-                      <a:headEnd type="none" w="med" len="med"/>
-                      <a:tailEnd type="none" w="med" len="med"/>
-                    </a:lnB>
-                  </a:tcPr>
-                </a:tc>
-                <a:tc>
-                  <a:txBody>
-                    <a:bodyPr/>
-                    <a:lstStyle/>
-                    <a:p>
-                      <a:pPr algn="ctr" indent="0" marL="0">
-                        <a:buNone/>
-                      </a:pPr>
-                      <a:r>
-                        <a:rPr lang="en-US" sz="500" dirty="0">
-                          <a:solidFill>
-                            <a:srgbClr val="999999"/>
-                          </a:solidFill>
-                          <a:latin typeface="Calibri" pitchFamily="34" charset="0"/>
-                          <a:ea typeface="Calibri" pitchFamily="34" charset="-122"/>
-                          <a:cs typeface="Calibri" pitchFamily="34" charset="-120"/>
-                        </a:rPr>
-                        <a:t>0.31%</a:t>
-                      </a:r>
-                      <a:endParaRPr lang="en-US" sz="500" dirty="0">
-                        <a:latin typeface="Calibri" charset="0"/>
-                        <a:ea typeface="Calibri" charset="0"/>
-                        <a:cs typeface="Calibri" charset="0"/>
-                      </a:endParaRPr>
-                    </a:p>
-                  </a:txBody>
-                  <a:tcPr marL="91440" marR="91440" marT="45720" marB="45720">
-                    <a:lnL w="2540" cap="flat" cmpd="sng" algn="ctr">
-                      <a:solidFill>
-                        <a:srgbClr val="EEEEEE"/>
-                      </a:solidFill>
-                      <a:prstDash val="solid"/>
-                      <a:round/>
-                      <a:headEnd type="none" w="med" len="med"/>
-                      <a:tailEnd type="none" w="med" len="med"/>
-                    </a:lnL>
-                    <a:lnR w="2540" cap="flat" cmpd="sng" algn="ctr">
-                      <a:solidFill>
-                        <a:srgbClr val="EEEEEE"/>
-                      </a:solidFill>
-                      <a:prstDash val="solid"/>
-                      <a:round/>
-                      <a:headEnd type="none" w="med" len="med"/>
-                      <a:tailEnd type="none" w="med" len="med"/>
-                    </a:lnR>
-                    <a:lnT w="2540" cap="flat" cmpd="sng" algn="ctr">
-                      <a:solidFill>
-                        <a:srgbClr val="EEEEEE"/>
-                      </a:solidFill>
-                      <a:prstDash val="solid"/>
-                      <a:round/>
-                      <a:headEnd type="none" w="med" len="med"/>
-                      <a:tailEnd type="none" w="med" len="med"/>
-                    </a:lnT>
-                    <a:lnB w="2540" cap="flat" cmpd="sng" algn="ctr">
-                      <a:solidFill>
-                        <a:srgbClr val="EEEEEE"/>
-                      </a:solidFill>
-                      <a:prstDash val="solid"/>
-                      <a:round/>
-                      <a:headEnd type="none" w="med" len="med"/>
-                      <a:tailEnd type="none" w="med" len="med"/>
-                    </a:lnB>
-                  </a:tcPr>
-                </a:tc>
-                <a:tc>
-                  <a:txBody>
-                    <a:bodyPr/>
-                    <a:lstStyle/>
-                    <a:p>
-                      <a:pPr algn="ctr" indent="0" marL="0">
-                        <a:buNone/>
-                      </a:pPr>
-                      <a:r>
-                        <a:rPr lang="en-US" sz="500" dirty="0">
-                          <a:solidFill>
-                            <a:srgbClr val="999999"/>
-                          </a:solidFill>
-                          <a:latin typeface="Calibri" pitchFamily="34" charset="0"/>
-                          <a:ea typeface="Calibri" pitchFamily="34" charset="-122"/>
-                          <a:cs typeface="Calibri" pitchFamily="34" charset="-120"/>
-                        </a:rPr>
-                        <a:t>0.30%</a:t>
-                      </a:r>
-                      <a:endParaRPr lang="en-US" sz="500" dirty="0">
-                        <a:latin typeface="Calibri" charset="0"/>
-                        <a:ea typeface="Calibri" charset="0"/>
-                        <a:cs typeface="Calibri" charset="0"/>
-                      </a:endParaRPr>
-                    </a:p>
-                  </a:txBody>
-                  <a:tcPr marL="91440" marR="91440" marT="45720" marB="45720">
-                    <a:lnL w="2540" cap="flat" cmpd="sng" algn="ctr">
-                      <a:solidFill>
-                        <a:srgbClr val="EEEEEE"/>
-                      </a:solidFill>
-                      <a:prstDash val="solid"/>
-                      <a:round/>
-                      <a:headEnd type="none" w="med" len="med"/>
-                      <a:tailEnd type="none" w="med" len="med"/>
-                    </a:lnL>
-                    <a:lnR w="2540" cap="flat" cmpd="sng" algn="ctr">
-                      <a:solidFill>
-                        <a:srgbClr val="EEEEEE"/>
-                      </a:solidFill>
-                      <a:prstDash val="solid"/>
-                      <a:round/>
-                      <a:headEnd type="none" w="med" len="med"/>
-                      <a:tailEnd type="none" w="med" len="med"/>
-                    </a:lnR>
-                    <a:lnT w="2540" cap="flat" cmpd="sng" algn="ctr">
-                      <a:solidFill>
-                        <a:srgbClr val="EEEEEE"/>
-                      </a:solidFill>
-                      <a:prstDash val="solid"/>
-                      <a:round/>
-                      <a:headEnd type="none" w="med" len="med"/>
-                      <a:tailEnd type="none" w="med" len="med"/>
-                    </a:lnT>
-                    <a:lnB w="2540" cap="flat" cmpd="sng" algn="ctr">
-                      <a:solidFill>
-                        <a:srgbClr val="EEEEEE"/>
-                      </a:solidFill>
-                      <a:prstDash val="solid"/>
-                      <a:round/>
-                      <a:headEnd type="none" w="med" len="med"/>
-                      <a:tailEnd type="none" w="med" len="med"/>
-                    </a:lnB>
-                  </a:tcPr>
-                </a:tc>
-                <a:tc>
-                  <a:txBody>
-                    <a:bodyPr/>
-                    <a:lstStyle/>
-                    <a:p>
-                      <a:pPr algn="ctr" indent="0" marL="0">
-                        <a:buNone/>
-                      </a:pPr>
-                      <a:r>
-                        <a:rPr lang="en-US" sz="500" dirty="0">
-                          <a:solidFill>
-                            <a:srgbClr val="999999"/>
-                          </a:solidFill>
-                          <a:latin typeface="Calibri" pitchFamily="34" charset="0"/>
-                          <a:ea typeface="Calibri" pitchFamily="34" charset="-122"/>
-                          <a:cs typeface="Calibri" pitchFamily="34" charset="-120"/>
-                        </a:rPr>
-                        <a:t>0.31%</a:t>
-                      </a:r>
-                      <a:endParaRPr lang="en-US" sz="500" dirty="0">
-                        <a:latin typeface="Calibri" charset="0"/>
-                        <a:ea typeface="Calibri" charset="0"/>
-                        <a:cs typeface="Calibri" charset="0"/>
-                      </a:endParaRPr>
-                    </a:p>
-                  </a:txBody>
-                  <a:tcPr marL="91440" marR="91440" marT="45720" marB="45720">
-                    <a:lnL w="2540" cap="flat" cmpd="sng" algn="ctr">
-                      <a:solidFill>
-                        <a:srgbClr val="EEEEEE"/>
-                      </a:solidFill>
-                      <a:prstDash val="solid"/>
-                      <a:round/>
-                      <a:headEnd type="none" w="med" len="med"/>
-                      <a:tailEnd type="none" w="med" len="med"/>
-                    </a:lnL>
-                    <a:lnR w="2540" cap="flat" cmpd="sng" algn="ctr">
-                      <a:solidFill>
-                        <a:srgbClr val="EEEEEE"/>
-                      </a:solidFill>
-                      <a:prstDash val="solid"/>
-                      <a:round/>
-                      <a:headEnd type="none" w="med" len="med"/>
-                      <a:tailEnd type="none" w="med" len="med"/>
-                    </a:lnR>
-                    <a:lnT w="2540" cap="flat" cmpd="sng" algn="ctr">
-                      <a:solidFill>
-                        <a:srgbClr val="EEEEEE"/>
-                      </a:solidFill>
-                      <a:prstDash val="solid"/>
-                      <a:round/>
-                      <a:headEnd type="none" w="med" len="med"/>
-                      <a:tailEnd type="none" w="med" len="med"/>
-                    </a:lnT>
-                    <a:lnB w="2540" cap="flat" cmpd="sng" algn="ctr">
-                      <a:solidFill>
-                        <a:srgbClr val="EEEEEE"/>
-                      </a:solidFill>
-                      <a:prstDash val="solid"/>
-                      <a:round/>
-                      <a:headEnd type="none" w="med" len="med"/>
-                      <a:tailEnd type="none" w="med" len="med"/>
-                    </a:lnB>
-                  </a:tcPr>
-                </a:tc>
-                <a:tc>
-                  <a:txBody>
-                    <a:bodyPr/>
-                    <a:lstStyle/>
-                    <a:p>
-                      <a:pPr algn="ctr" indent="0" marL="0">
-                        <a:buNone/>
-                      </a:pPr>
-                      <a:r>
-                        <a:rPr lang="en-US" sz="500" dirty="0">
-                          <a:solidFill>
-                            <a:srgbClr val="999999"/>
-                          </a:solidFill>
-                          <a:latin typeface="Calibri" pitchFamily="34" charset="0"/>
-                          <a:ea typeface="Calibri" pitchFamily="34" charset="-122"/>
-                          <a:cs typeface="Calibri" pitchFamily="34" charset="-120"/>
-                        </a:rPr>
-                        <a:t>0.30%</a:t>
-                      </a:r>
-                      <a:endParaRPr lang="en-US" sz="500" dirty="0">
-                        <a:latin typeface="Calibri" charset="0"/>
-                        <a:ea typeface="Calibri" charset="0"/>
-                        <a:cs typeface="Calibri" charset="0"/>
-                      </a:endParaRPr>
-                    </a:p>
-                  </a:txBody>
-                  <a:tcPr marL="91440" marR="91440" marT="45720" marB="45720">
-                    <a:lnL w="2540" cap="flat" cmpd="sng" algn="ctr">
-                      <a:solidFill>
-                        <a:srgbClr val="EEEEEE"/>
-                      </a:solidFill>
-                      <a:prstDash val="solid"/>
-                      <a:round/>
-                      <a:headEnd type="none" w="med" len="med"/>
-                      <a:tailEnd type="none" w="med" len="med"/>
-                    </a:lnL>
-                    <a:lnR w="2540" cap="flat" cmpd="sng" algn="ctr">
-                      <a:solidFill>
-                        <a:srgbClr val="EEEEEE"/>
-                      </a:solidFill>
-                      <a:prstDash val="solid"/>
-                      <a:round/>
-                      <a:headEnd type="none" w="med" len="med"/>
-                      <a:tailEnd type="none" w="med" len="med"/>
-                    </a:lnR>
-                    <a:lnT w="2540" cap="flat" cmpd="sng" algn="ctr">
-                      <a:solidFill>
-                        <a:srgbClr val="EEEEEE"/>
-                      </a:solidFill>
-                      <a:prstDash val="solid"/>
-                      <a:round/>
-                      <a:headEnd type="none" w="med" len="med"/>
-                      <a:tailEnd type="none" w="med" len="med"/>
-                    </a:lnT>
-                    <a:lnB w="2540" cap="flat" cmpd="sng" algn="ctr">
-                      <a:solidFill>
-                        <a:srgbClr val="EEEEEE"/>
-                      </a:solidFill>
-                      <a:prstDash val="solid"/>
-                      <a:round/>
-                      <a:headEnd type="none" w="med" len="med"/>
-                      <a:tailEnd type="none" w="med" len="med"/>
-                    </a:lnB>
-                  </a:tcPr>
-                </a:tc>
-                <a:tc>
-                  <a:txBody>
-                    <a:bodyPr/>
-                    <a:lstStyle/>
-                    <a:p>
-                      <a:pPr algn="ctr" indent="0" marL="0">
-                        <a:buNone/>
-                      </a:pPr>
-                      <a:r>
-                        <a:rPr lang="en-US" sz="500" dirty="0">
-                          <a:solidFill>
-                            <a:srgbClr val="999999"/>
-                          </a:solidFill>
-                          <a:latin typeface="Calibri" pitchFamily="34" charset="0"/>
-                          <a:ea typeface="Calibri" pitchFamily="34" charset="-122"/>
-                          <a:cs typeface="Calibri" pitchFamily="34" charset="-120"/>
-                        </a:rPr>
-                        <a:t>0.30%</a:t>
-                      </a:r>
-                      <a:endParaRPr lang="en-US" sz="500" dirty="0">
-                        <a:latin typeface="Calibri" charset="0"/>
-                        <a:ea typeface="Calibri" charset="0"/>
-                        <a:cs typeface="Calibri" charset="0"/>
-                      </a:endParaRPr>
-                    </a:p>
-                  </a:txBody>
-                  <a:tcPr marL="91440" marR="91440" marT="45720" marB="45720">
-                    <a:lnL w="2540" cap="flat" cmpd="sng" algn="ctr">
-                      <a:solidFill>
-                        <a:srgbClr val="EEEEEE"/>
-                      </a:solidFill>
-                      <a:prstDash val="solid"/>
-                      <a:round/>
-                      <a:headEnd type="none" w="med" len="med"/>
-                      <a:tailEnd type="none" w="med" len="med"/>
-                    </a:lnL>
-                    <a:lnR w="2540" cap="flat" cmpd="sng" algn="ctr">
-                      <a:solidFill>
-                        <a:srgbClr val="EEEEEE"/>
-                      </a:solidFill>
-                      <a:prstDash val="solid"/>
-                      <a:round/>
-                      <a:headEnd type="none" w="med" len="med"/>
-                      <a:tailEnd type="none" w="med" len="med"/>
-                    </a:lnR>
-                    <a:lnT w="2540" cap="flat" cmpd="sng" algn="ctr">
-                      <a:solidFill>
-                        <a:srgbClr val="EEEEEE"/>
-                      </a:solidFill>
-                      <a:prstDash val="solid"/>
-                      <a:round/>
-                      <a:headEnd type="none" w="med" len="med"/>
-                      <a:tailEnd type="none" w="med" len="med"/>
-                    </a:lnT>
-                    <a:lnB w="2540" cap="flat" cmpd="sng" algn="ctr">
-                      <a:solidFill>
-                        <a:srgbClr val="EEEEEE"/>
-                      </a:solidFill>
-                      <a:prstDash val="solid"/>
-                      <a:round/>
-                      <a:headEnd type="none" w="med" len="med"/>
-                      <a:tailEnd type="none" w="med" len="med"/>
-                    </a:lnB>
-                  </a:tcPr>
-                </a:tc>
-                <a:tc>
-                  <a:txBody>
-                    <a:bodyPr/>
-                    <a:lstStyle/>
-                    <a:p>
-                      <a:pPr algn="ctr" indent="0" marL="0">
-                        <a:buNone/>
-                      </a:pPr>
-                      <a:r>
-                        <a:rPr lang="en-US" sz="500" dirty="0">
-                          <a:solidFill>
-                            <a:srgbClr val="999999"/>
-                          </a:solidFill>
-                          <a:latin typeface="Calibri" pitchFamily="34" charset="0"/>
-                          <a:ea typeface="Calibri" pitchFamily="34" charset="-122"/>
-                          <a:cs typeface="Calibri" pitchFamily="34" charset="-120"/>
-                        </a:rPr>
-                        <a:t>0.30%</a:t>
-                      </a:r>
-                      <a:endParaRPr lang="en-US" sz="500" dirty="0">
-                        <a:latin typeface="Calibri" charset="0"/>
-                        <a:ea typeface="Calibri" charset="0"/>
-                        <a:cs typeface="Calibri" charset="0"/>
-                      </a:endParaRPr>
-                    </a:p>
-                  </a:txBody>
-                  <a:tcPr marL="91440" marR="91440" marT="45720" marB="45720">
-                    <a:lnL w="2540" cap="flat" cmpd="sng" algn="ctr">
-                      <a:solidFill>
-                        <a:srgbClr val="EEEEEE"/>
-                      </a:solidFill>
-                      <a:prstDash val="solid"/>
-                      <a:round/>
-                      <a:headEnd type="none" w="med" len="med"/>
-                      <a:tailEnd type="none" w="med" len="med"/>
-                    </a:lnL>
-                    <a:lnR w="2540" cap="flat" cmpd="sng" algn="ctr">
-                      <a:solidFill>
-                        <a:srgbClr val="EEEEEE"/>
-                      </a:solidFill>
-                      <a:prstDash val="solid"/>
-                      <a:round/>
-                      <a:headEnd type="none" w="med" len="med"/>
-                      <a:tailEnd type="none" w="med" len="med"/>
-                    </a:lnR>
-                    <a:lnT w="2540" cap="flat" cmpd="sng" algn="ctr">
-                      <a:solidFill>
-                        <a:srgbClr val="EEEEEE"/>
-                      </a:solidFill>
-                      <a:prstDash val="solid"/>
-                      <a:round/>
-                      <a:headEnd type="none" w="med" len="med"/>
-                      <a:tailEnd type="none" w="med" len="med"/>
-                    </a:lnT>
-                    <a:lnB w="2540" cap="flat" cmpd="sng" algn="ctr">
-                      <a:solidFill>
-                        <a:srgbClr val="EEEEEE"/>
-                      </a:solidFill>
-                      <a:prstDash val="solid"/>
-                      <a:round/>
-                      <a:headEnd type="none" w="med" len="med"/>
-                      <a:tailEnd type="none" w="med" len="med"/>
-                    </a:lnB>
-                  </a:tcPr>
-                </a:tc>
-                <a:tc>
-                  <a:txBody>
-                    <a:bodyPr/>
-                    <a:lstStyle/>
-                    <a:p>
-                      <a:pPr algn="ctr" indent="0" marL="0">
-                        <a:buNone/>
-                      </a:pPr>
-                      <a:r>
-                        <a:rPr lang="en-US" sz="500" dirty="0">
-                          <a:solidFill>
-                            <a:srgbClr val="999999"/>
-                          </a:solidFill>
-                          <a:latin typeface="Calibri" pitchFamily="34" charset="0"/>
-                          <a:ea typeface="Calibri" pitchFamily="34" charset="-122"/>
-                          <a:cs typeface="Calibri" pitchFamily="34" charset="-120"/>
-                        </a:rPr>
-                        <a:t>0.28%</a:t>
-                      </a:r>
-                      <a:endParaRPr lang="en-US" sz="500" dirty="0">
-                        <a:latin typeface="Calibri" charset="0"/>
-                        <a:ea typeface="Calibri" charset="0"/>
-                        <a:cs typeface="Calibri" charset="0"/>
-                      </a:endParaRPr>
-                    </a:p>
-                  </a:txBody>
-                  <a:tcPr marL="91440" marR="91440" marT="45720" marB="45720">
-                    <a:lnL w="2540" cap="flat" cmpd="sng" algn="ctr">
-                      <a:solidFill>
-                        <a:srgbClr val="EEEEEE"/>
-                      </a:solidFill>
-                      <a:prstDash val="solid"/>
-                      <a:round/>
-                      <a:headEnd type="none" w="med" len="med"/>
-                      <a:tailEnd type="none" w="med" len="med"/>
-                    </a:lnL>
-                    <a:lnR w="2540" cap="flat" cmpd="sng" algn="ctr">
-                      <a:solidFill>
-                        <a:srgbClr val="EEEEEE"/>
-                      </a:solidFill>
-                      <a:prstDash val="solid"/>
-                      <a:round/>
-                      <a:headEnd type="none" w="med" len="med"/>
-                      <a:tailEnd type="none" w="med" len="med"/>
-                    </a:lnR>
-                    <a:lnT w="2540" cap="flat" cmpd="sng" algn="ctr">
-                      <a:solidFill>
-                        <a:srgbClr val="EEEEEE"/>
-                      </a:solidFill>
-                      <a:prstDash val="solid"/>
-                      <a:round/>
-                      <a:headEnd type="none" w="med" len="med"/>
-                      <a:tailEnd type="none" w="med" len="med"/>
-                    </a:lnT>
-                    <a:lnB w="2540" cap="flat" cmpd="sng" algn="ctr">
-                      <a:solidFill>
-                        <a:srgbClr val="EEEEEE"/>
-                      </a:solidFill>
-                      <a:prstDash val="solid"/>
-                      <a:round/>
-                      <a:headEnd type="none" w="med" len="med"/>
-                      <a:tailEnd type="none" w="med" len="med"/>
-                    </a:lnB>
-                  </a:tcPr>
-                </a:tc>
-                <a:tc>
-                  <a:txBody>
-                    <a:bodyPr/>
-                    <a:lstStyle/>
-                    <a:p>
-                      <a:pPr algn="ctr" indent="0" marL="0">
-                        <a:buNone/>
-                      </a:pPr>
-                      <a:r>
-                        <a:rPr lang="en-US" sz="500" dirty="0">
-                          <a:solidFill>
-                            <a:srgbClr val="999999"/>
-                          </a:solidFill>
-                          <a:latin typeface="Calibri" pitchFamily="34" charset="0"/>
-                          <a:ea typeface="Calibri" pitchFamily="34" charset="-122"/>
-                          <a:cs typeface="Calibri" pitchFamily="34" charset="-120"/>
-                        </a:rPr>
-                        <a:t>0.29%</a:t>
-                      </a:r>
-                      <a:endParaRPr lang="en-US" sz="500" dirty="0">
-                        <a:latin typeface="Calibri" charset="0"/>
-                        <a:ea typeface="Calibri" charset="0"/>
-                        <a:cs typeface="Calibri" charset="0"/>
-                      </a:endParaRPr>
-                    </a:p>
-                  </a:txBody>
-                  <a:tcPr marL="91440" marR="91440" marT="45720" marB="45720">
-                    <a:lnL w="2540" cap="flat" cmpd="sng" algn="ctr">
-                      <a:solidFill>
-                        <a:srgbClr val="EEEEEE"/>
-                      </a:solidFill>
-                      <a:prstDash val="solid"/>
-                      <a:round/>
-                      <a:headEnd type="none" w="med" len="med"/>
-                      <a:tailEnd type="none" w="med" len="med"/>
-                    </a:lnL>
-                    <a:lnR w="2540" cap="flat" cmpd="sng" algn="ctr">
-                      <a:solidFill>
-                        <a:srgbClr val="EEEEEE"/>
-                      </a:solidFill>
-                      <a:prstDash val="solid"/>
-                      <a:round/>
-                      <a:headEnd type="none" w="med" len="med"/>
-                      <a:tailEnd type="none" w="med" len="med"/>
-                    </a:lnR>
-                    <a:lnT w="2540" cap="flat" cmpd="sng" algn="ctr">
-                      <a:solidFill>
-                        <a:srgbClr val="EEEEEE"/>
-                      </a:solidFill>
-                      <a:prstDash val="solid"/>
-                      <a:round/>
-                      <a:headEnd type="none" w="med" len="med"/>
-                      <a:tailEnd type="none" w="med" len="med"/>
-                    </a:lnT>
-                    <a:lnB w="2540" cap="flat" cmpd="sng" algn="ctr">
-                      <a:solidFill>
-                        <a:srgbClr val="EEEEEE"/>
-                      </a:solidFill>
-                      <a:prstDash val="solid"/>
-                      <a:round/>
-                      <a:headEnd type="none" w="med" len="med"/>
-                      <a:tailEnd type="none" w="med" len="med"/>
-                    </a:lnB>
-                  </a:tcPr>
-                </a:tc>
-                <a:tc>
-                  <a:txBody>
-                    <a:bodyPr/>
-                    <a:lstStyle/>
-                    <a:p>
-                      <a:pPr algn="ctr" indent="0" marL="0">
-                        <a:buNone/>
-                      </a:pPr>
-                      <a:r>
-                        <a:rPr lang="en-US" sz="500" dirty="0">
-                          <a:solidFill>
-                            <a:srgbClr val="999999"/>
-                          </a:solidFill>
-                          <a:latin typeface="Calibri" pitchFamily="34" charset="0"/>
-                          <a:ea typeface="Calibri" pitchFamily="34" charset="-122"/>
-                          <a:cs typeface="Calibri" pitchFamily="34" charset="-120"/>
-                        </a:rPr>
-                        <a:t>0.28%</a:t>
-                      </a:r>
-                      <a:endParaRPr lang="en-US" sz="500" dirty="0">
-                        <a:latin typeface="Calibri" charset="0"/>
-                        <a:ea typeface="Calibri" charset="0"/>
-                        <a:cs typeface="Calibri" charset="0"/>
-                      </a:endParaRPr>
-                    </a:p>
-                  </a:txBody>
-                  <a:tcPr marL="91440" marR="91440" marT="45720" marB="45720">
-                    <a:lnL w="2540" cap="flat" cmpd="sng" algn="ctr">
-                      <a:solidFill>
-                        <a:srgbClr val="EEEEEE"/>
-                      </a:solidFill>
-                      <a:prstDash val="solid"/>
-                      <a:round/>
-                      <a:headEnd type="none" w="med" len="med"/>
-                      <a:tailEnd type="none" w="med" len="med"/>
-                    </a:lnL>
-                    <a:lnR w="2540" cap="flat" cmpd="sng" algn="ctr">
-                      <a:solidFill>
-                        <a:srgbClr val="EEEEEE"/>
-                      </a:solidFill>
-                      <a:prstDash val="solid"/>
-                      <a:round/>
-                      <a:headEnd type="none" w="med" len="med"/>
-                      <a:tailEnd type="none" w="med" len="med"/>
-                    </a:lnR>
-                    <a:lnT w="2540" cap="flat" cmpd="sng" algn="ctr">
-                      <a:solidFill>
-                        <a:srgbClr val="EEEEEE"/>
-                      </a:solidFill>
-                      <a:prstDash val="solid"/>
-                      <a:round/>
-                      <a:headEnd type="none" w="med" len="med"/>
-                      <a:tailEnd type="none" w="med" len="med"/>
-                    </a:lnT>
-                    <a:lnB w="2540" cap="flat" cmpd="sng" algn="ctr">
-                      <a:solidFill>
-                        <a:srgbClr val="EEEEEE"/>
-                      </a:solidFill>
-                      <a:prstDash val="solid"/>
-                      <a:round/>
-                      <a:headEnd type="none" w="med" len="med"/>
-                      <a:tailEnd type="none" w="med" len="med"/>
-                    </a:lnB>
-                  </a:tcPr>
-                </a:tc>
-                <a:tc>
-                  <a:txBody>
-                    <a:bodyPr/>
-                    <a:lstStyle/>
-                    <a:p>
-                      <a:pPr algn="ctr" indent="0" marL="0">
-                        <a:buNone/>
-                      </a:pPr>
-                      <a:r>
-                        <a:rPr lang="en-US" sz="500" dirty="0">
-                          <a:solidFill>
-                            <a:srgbClr val="999999"/>
-                          </a:solidFill>
-                          <a:latin typeface="Calibri" pitchFamily="34" charset="0"/>
-                          <a:ea typeface="Calibri" pitchFamily="34" charset="-122"/>
-                          <a:cs typeface="Calibri" pitchFamily="34" charset="-120"/>
-                        </a:rPr>
-                        <a:t>0.56%</a:t>
-                      </a:r>
-                      <a:endParaRPr lang="en-US" sz="500" dirty="0">
-                        <a:latin typeface="Calibri" charset="0"/>
-                        <a:ea typeface="Calibri" charset="0"/>
-                        <a:cs typeface="Calibri" charset="0"/>
-                      </a:endParaRPr>
-                    </a:p>
-                  </a:txBody>
-                  <a:tcPr marL="91440" marR="91440" marT="45720" marB="45720">
-                    <a:lnL w="2540" cap="flat" cmpd="sng" algn="ctr">
-                      <a:solidFill>
-                        <a:srgbClr val="EEEEEE"/>
-                      </a:solidFill>
-                      <a:prstDash val="solid"/>
-                      <a:round/>
-                      <a:headEnd type="none" w="med" len="med"/>
-                      <a:tailEnd type="none" w="med" len="med"/>
-                    </a:lnL>
-                    <a:lnR w="2540" cap="flat" cmpd="sng" algn="ctr">
-                      <a:solidFill>
-                        <a:srgbClr val="EEEEEE"/>
-                      </a:solidFill>
-                      <a:prstDash val="solid"/>
-                      <a:round/>
-                      <a:headEnd type="none" w="med" len="med"/>
-                      <a:tailEnd type="none" w="med" len="med"/>
-                    </a:lnR>
-                    <a:lnT w="2540" cap="flat" cmpd="sng" algn="ctr">
-                      <a:solidFill>
-                        <a:srgbClr val="EEEEEE"/>
-                      </a:solidFill>
-                      <a:prstDash val="solid"/>
-                      <a:round/>
-                      <a:headEnd type="none" w="med" len="med"/>
-                      <a:tailEnd type="none" w="med" len="med"/>
-                    </a:lnT>
-                    <a:lnB w="2540" cap="flat" cmpd="sng" algn="ctr">
-                      <a:solidFill>
-                        <a:srgbClr val="EEEEEE"/>
-                      </a:solidFill>
-                      <a:prstDash val="solid"/>
-                      <a:round/>
-                      <a:headEnd type="none" w="med" len="med"/>
-                      <a:tailEnd type="none" w="med" len="med"/>
-                    </a:lnB>
-                  </a:tcPr>
-                </a:tc>
-                <a:tc>
-                  <a:txBody>
-                    <a:bodyPr/>
-                    <a:lstStyle/>
-                    <a:p>
-                      <a:pPr algn="ctr" indent="0" marL="0">
-                        <a:buNone/>
-                      </a:pPr>
-                      <a:r>
-                        <a:rPr lang="en-US" sz="500" b="1" dirty="0">
-                          <a:solidFill>
-                            <a:srgbClr val="999999"/>
-                          </a:solidFill>
-                          <a:latin typeface="Calibri" pitchFamily="34" charset="0"/>
-                          <a:ea typeface="Calibri" pitchFamily="34" charset="-122"/>
-                          <a:cs typeface="Calibri" pitchFamily="34" charset="-120"/>
-                        </a:rPr>
-                        <a:t>3.54%</a:t>
-                      </a:r>
-                      <a:endParaRPr lang="en-US" sz="500" dirty="0">
-                        <a:latin typeface="Calibri" charset="0"/>
-                        <a:ea typeface="Calibri" charset="0"/>
-                        <a:cs typeface="Calibri" charset="0"/>
-                      </a:endParaRPr>
-                    </a:p>
-                  </a:txBody>
-                  <a:tcPr marL="91440" marR="91440" marT="45720" marB="45720">
-                    <a:lnL w="2540" cap="flat" cmpd="sng" algn="ctr">
-                      <a:solidFill>
-                        <a:srgbClr val="EEEEEE"/>
-                      </a:solidFill>
-                      <a:prstDash val="solid"/>
-                      <a:round/>
-                      <a:headEnd type="none" w="med" len="med"/>
-                      <a:tailEnd type="none" w="med" len="med"/>
-                    </a:lnL>
-                    <a:lnR w="2540" cap="flat" cmpd="sng" algn="ctr">
-                      <a:solidFill>
-                        <a:srgbClr val="EEEEEE"/>
-                      </a:solidFill>
-                      <a:prstDash val="solid"/>
-                      <a:round/>
-                      <a:headEnd type="none" w="med" len="med"/>
-                      <a:tailEnd type="none" w="med" len="med"/>
-                    </a:lnR>
-                    <a:lnT w="2540" cap="flat" cmpd="sng" algn="ctr">
-                      <a:solidFill>
-                        <a:srgbClr val="EEEEEE"/>
-                      </a:solidFill>
-                      <a:prstDash val="solid"/>
-                      <a:round/>
-                      <a:headEnd type="none" w="med" len="med"/>
-                      <a:tailEnd type="none" w="med" len="med"/>
-                    </a:lnT>
-                    <a:lnB w="2540" cap="flat" cmpd="sng" algn="ctr">
-                      <a:solidFill>
-                        <a:srgbClr val="EEEEEE"/>
-                      </a:solidFill>
-                      <a:prstDash val="solid"/>
-                      <a:round/>
-                      <a:headEnd type="none" w="med" len="med"/>
-                      <a:tailEnd type="none" w="med" len="med"/>
-                    </a:lnB>
-                  </a:tcPr>
-                </a:tc>
-              </a:tr>
-              <a:tr h="123444">
-                <a:tc>
-                  <a:txBody>
-                    <a:bodyPr/>
-                    <a:lstStyle/>
-                    <a:p>
-                      <a:pPr algn="l" indent="0" marL="0">
-                        <a:buNone/>
-                      </a:pPr>
-                      <a:endParaRPr lang="en-US" sz="500" dirty="0">
-                        <a:latin typeface="Calibri" charset="0"/>
-                        <a:ea typeface="Calibri" charset="0"/>
-                        <a:cs typeface="Calibri" charset="0"/>
-                      </a:endParaRPr>
-                    </a:p>
-                  </a:txBody>
-                  <a:tcPr marL="91440" marR="91440" marT="45720" marB="45720">
-                    <a:lnL w="2540" cap="flat" cmpd="sng" algn="ctr">
-                      <a:solidFill>
-                        <a:srgbClr val="EEEEEE"/>
-                      </a:solidFill>
-                      <a:prstDash val="solid"/>
-                      <a:round/>
-                      <a:headEnd type="none" w="med" len="med"/>
-                      <a:tailEnd type="none" w="med" len="med"/>
-                    </a:lnL>
-                    <a:lnR w="2540" cap="flat" cmpd="sng" algn="ctr">
-                      <a:solidFill>
-                        <a:srgbClr val="EEEEEE"/>
-                      </a:solidFill>
-                      <a:prstDash val="solid"/>
-                      <a:round/>
-                      <a:headEnd type="none" w="med" len="med"/>
-                      <a:tailEnd type="none" w="med" len="med"/>
-                    </a:lnR>
-                    <a:lnT w="2540" cap="flat" cmpd="sng" algn="ctr">
-                      <a:solidFill>
-                        <a:srgbClr val="EEEEEE"/>
-                      </a:solidFill>
-                      <a:prstDash val="solid"/>
-                      <a:round/>
-                      <a:headEnd type="none" w="med" len="med"/>
-                      <a:tailEnd type="none" w="med" len="med"/>
-                    </a:lnT>
-                    <a:lnB w="2540" cap="flat" cmpd="sng" algn="ctr">
-                      <a:solidFill>
-                        <a:srgbClr val="EEEEEE"/>
-                      </a:solidFill>
-                      <a:prstDash val="solid"/>
-                      <a:round/>
-                      <a:headEnd type="none" w="med" len="med"/>
-                      <a:tailEnd type="none" w="med" len="med"/>
-                    </a:lnB>
-                  </a:tcPr>
-                </a:tc>
-                <a:tc>
-                  <a:txBody>
-                    <a:bodyPr/>
-                    <a:lstStyle/>
-                    <a:p>
-                      <a:pPr algn="l" indent="0" marL="0">
                         <a:buNone/>
                       </a:pPr>
                       <a:r>
@@ -10790,7 +11180,7 @@
                           <a:ea typeface="Calibri" pitchFamily="34" charset="-122"/>
                           <a:cs typeface="Calibri" pitchFamily="34" charset="-120"/>
                         </a:rPr>
-                        <a:t>FIP LIQUIDEZ DISPONIBLE I</a:t>
+                        <a:t>0.56%</a:t>
                       </a:r>
                       <a:endParaRPr lang="en-US" sz="500" dirty="0">
                         <a:latin typeface="Calibri" charset="0"/>
@@ -10855,397 +11245,7 @@
                           <a:ea typeface="Calibri" pitchFamily="34" charset="-122"/>
                           <a:cs typeface="Calibri" pitchFamily="34" charset="-120"/>
                         </a:rPr>
-                        <a:t>0.00%</a:t>
-                      </a:r>
-                      <a:endParaRPr lang="en-US" sz="500" dirty="0">
-                        <a:latin typeface="Calibri" charset="0"/>
-                        <a:ea typeface="Calibri" charset="0"/>
-                        <a:cs typeface="Calibri" charset="0"/>
-                      </a:endParaRPr>
-                    </a:p>
-                  </a:txBody>
-                  <a:tcPr marL="91440" marR="91440" marT="45720" marB="45720">
-                    <a:lnL w="2540" cap="flat" cmpd="sng" algn="ctr">
-                      <a:solidFill>
-                        <a:srgbClr val="EEEEEE"/>
-                      </a:solidFill>
-                      <a:prstDash val="solid"/>
-                      <a:round/>
-                      <a:headEnd type="none" w="med" len="med"/>
-                      <a:tailEnd type="none" w="med" len="med"/>
-                    </a:lnL>
-                    <a:lnR w="2540" cap="flat" cmpd="sng" algn="ctr">
-                      <a:solidFill>
-                        <a:srgbClr val="EEEEEE"/>
-                      </a:solidFill>
-                      <a:prstDash val="solid"/>
-                      <a:round/>
-                      <a:headEnd type="none" w="med" len="med"/>
-                      <a:tailEnd type="none" w="med" len="med"/>
-                    </a:lnR>
-                    <a:lnT w="2540" cap="flat" cmpd="sng" algn="ctr">
-                      <a:solidFill>
-                        <a:srgbClr val="EEEEEE"/>
-                      </a:solidFill>
-                      <a:prstDash val="solid"/>
-                      <a:round/>
-                      <a:headEnd type="none" w="med" len="med"/>
-                      <a:tailEnd type="none" w="med" len="med"/>
-                    </a:lnT>
-                    <a:lnB w="2540" cap="flat" cmpd="sng" algn="ctr">
-                      <a:solidFill>
-                        <a:srgbClr val="EEEEEE"/>
-                      </a:solidFill>
-                      <a:prstDash val="solid"/>
-                      <a:round/>
-                      <a:headEnd type="none" w="med" len="med"/>
-                      <a:tailEnd type="none" w="med" len="med"/>
-                    </a:lnB>
-                  </a:tcPr>
-                </a:tc>
-                <a:tc>
-                  <a:txBody>
-                    <a:bodyPr/>
-                    <a:lstStyle/>
-                    <a:p>
-                      <a:pPr algn="ctr" indent="0" marL="0">
-                        <a:buNone/>
-                      </a:pPr>
-                      <a:r>
-                        <a:rPr lang="en-US" sz="500" dirty="0">
-                          <a:solidFill>
-                            <a:srgbClr val="000000"/>
-                          </a:solidFill>
-                          <a:latin typeface="Calibri" pitchFamily="34" charset="0"/>
-                          <a:ea typeface="Calibri" pitchFamily="34" charset="-122"/>
-                          <a:cs typeface="Calibri" pitchFamily="34" charset="-120"/>
-                        </a:rPr>
-                        <a:t>0.00%</a:t>
-                      </a:r>
-                      <a:endParaRPr lang="en-US" sz="500" dirty="0">
-                        <a:latin typeface="Calibri" charset="0"/>
-                        <a:ea typeface="Calibri" charset="0"/>
-                        <a:cs typeface="Calibri" charset="0"/>
-                      </a:endParaRPr>
-                    </a:p>
-                  </a:txBody>
-                  <a:tcPr marL="91440" marR="91440" marT="45720" marB="45720">
-                    <a:lnL w="2540" cap="flat" cmpd="sng" algn="ctr">
-                      <a:solidFill>
-                        <a:srgbClr val="EEEEEE"/>
-                      </a:solidFill>
-                      <a:prstDash val="solid"/>
-                      <a:round/>
-                      <a:headEnd type="none" w="med" len="med"/>
-                      <a:tailEnd type="none" w="med" len="med"/>
-                    </a:lnL>
-                    <a:lnR w="2540" cap="flat" cmpd="sng" algn="ctr">
-                      <a:solidFill>
-                        <a:srgbClr val="EEEEEE"/>
-                      </a:solidFill>
-                      <a:prstDash val="solid"/>
-                      <a:round/>
-                      <a:headEnd type="none" w="med" len="med"/>
-                      <a:tailEnd type="none" w="med" len="med"/>
-                    </a:lnR>
-                    <a:lnT w="2540" cap="flat" cmpd="sng" algn="ctr">
-                      <a:solidFill>
-                        <a:srgbClr val="EEEEEE"/>
-                      </a:solidFill>
-                      <a:prstDash val="solid"/>
-                      <a:round/>
-                      <a:headEnd type="none" w="med" len="med"/>
-                      <a:tailEnd type="none" w="med" len="med"/>
-                    </a:lnT>
-                    <a:lnB w="2540" cap="flat" cmpd="sng" algn="ctr">
-                      <a:solidFill>
-                        <a:srgbClr val="EEEEEE"/>
-                      </a:solidFill>
-                      <a:prstDash val="solid"/>
-                      <a:round/>
-                      <a:headEnd type="none" w="med" len="med"/>
-                      <a:tailEnd type="none" w="med" len="med"/>
-                    </a:lnB>
-                  </a:tcPr>
-                </a:tc>
-                <a:tc>
-                  <a:txBody>
-                    <a:bodyPr/>
-                    <a:lstStyle/>
-                    <a:p>
-                      <a:pPr algn="ctr" indent="0" marL="0">
-                        <a:buNone/>
-                      </a:pPr>
-                      <a:r>
-                        <a:rPr lang="en-US" sz="500" dirty="0">
-                          <a:solidFill>
-                            <a:srgbClr val="000000"/>
-                          </a:solidFill>
-                          <a:latin typeface="Calibri" pitchFamily="34" charset="0"/>
-                          <a:ea typeface="Calibri" pitchFamily="34" charset="-122"/>
-                          <a:cs typeface="Calibri" pitchFamily="34" charset="-120"/>
-                        </a:rPr>
-                        <a:t>0.01%</a:t>
-                      </a:r>
-                      <a:endParaRPr lang="en-US" sz="500" dirty="0">
-                        <a:latin typeface="Calibri" charset="0"/>
-                        <a:ea typeface="Calibri" charset="0"/>
-                        <a:cs typeface="Calibri" charset="0"/>
-                      </a:endParaRPr>
-                    </a:p>
-                  </a:txBody>
-                  <a:tcPr marL="91440" marR="91440" marT="45720" marB="45720">
-                    <a:lnL w="2540" cap="flat" cmpd="sng" algn="ctr">
-                      <a:solidFill>
-                        <a:srgbClr val="EEEEEE"/>
-                      </a:solidFill>
-                      <a:prstDash val="solid"/>
-                      <a:round/>
-                      <a:headEnd type="none" w="med" len="med"/>
-                      <a:tailEnd type="none" w="med" len="med"/>
-                    </a:lnL>
-                    <a:lnR w="2540" cap="flat" cmpd="sng" algn="ctr">
-                      <a:solidFill>
-                        <a:srgbClr val="EEEEEE"/>
-                      </a:solidFill>
-                      <a:prstDash val="solid"/>
-                      <a:round/>
-                      <a:headEnd type="none" w="med" len="med"/>
-                      <a:tailEnd type="none" w="med" len="med"/>
-                    </a:lnR>
-                    <a:lnT w="2540" cap="flat" cmpd="sng" algn="ctr">
-                      <a:solidFill>
-                        <a:srgbClr val="EEEEEE"/>
-                      </a:solidFill>
-                      <a:prstDash val="solid"/>
-                      <a:round/>
-                      <a:headEnd type="none" w="med" len="med"/>
-                      <a:tailEnd type="none" w="med" len="med"/>
-                    </a:lnT>
-                    <a:lnB w="2540" cap="flat" cmpd="sng" algn="ctr">
-                      <a:solidFill>
-                        <a:srgbClr val="EEEEEE"/>
-                      </a:solidFill>
-                      <a:prstDash val="solid"/>
-                      <a:round/>
-                      <a:headEnd type="none" w="med" len="med"/>
-                      <a:tailEnd type="none" w="med" len="med"/>
-                    </a:lnB>
-                  </a:tcPr>
-                </a:tc>
-                <a:tc>
-                  <a:txBody>
-                    <a:bodyPr/>
-                    <a:lstStyle/>
-                    <a:p>
-                      <a:pPr algn="ctr" indent="0" marL="0">
-                        <a:buNone/>
-                      </a:pPr>
-                      <a:r>
-                        <a:rPr lang="en-US" sz="500" dirty="0">
-                          <a:solidFill>
-                            <a:srgbClr val="000000"/>
-                          </a:solidFill>
-                          <a:latin typeface="Calibri" pitchFamily="34" charset="0"/>
-                          <a:ea typeface="Calibri" pitchFamily="34" charset="-122"/>
-                          <a:cs typeface="Calibri" pitchFamily="34" charset="-120"/>
-                        </a:rPr>
-                        <a:t>0.01%</a:t>
-                      </a:r>
-                      <a:endParaRPr lang="en-US" sz="500" dirty="0">
-                        <a:latin typeface="Calibri" charset="0"/>
-                        <a:ea typeface="Calibri" charset="0"/>
-                        <a:cs typeface="Calibri" charset="0"/>
-                      </a:endParaRPr>
-                    </a:p>
-                  </a:txBody>
-                  <a:tcPr marL="91440" marR="91440" marT="45720" marB="45720">
-                    <a:lnL w="2540" cap="flat" cmpd="sng" algn="ctr">
-                      <a:solidFill>
-                        <a:srgbClr val="EEEEEE"/>
-                      </a:solidFill>
-                      <a:prstDash val="solid"/>
-                      <a:round/>
-                      <a:headEnd type="none" w="med" len="med"/>
-                      <a:tailEnd type="none" w="med" len="med"/>
-                    </a:lnL>
-                    <a:lnR w="2540" cap="flat" cmpd="sng" algn="ctr">
-                      <a:solidFill>
-                        <a:srgbClr val="EEEEEE"/>
-                      </a:solidFill>
-                      <a:prstDash val="solid"/>
-                      <a:round/>
-                      <a:headEnd type="none" w="med" len="med"/>
-                      <a:tailEnd type="none" w="med" len="med"/>
-                    </a:lnR>
-                    <a:lnT w="2540" cap="flat" cmpd="sng" algn="ctr">
-                      <a:solidFill>
-                        <a:srgbClr val="EEEEEE"/>
-                      </a:solidFill>
-                      <a:prstDash val="solid"/>
-                      <a:round/>
-                      <a:headEnd type="none" w="med" len="med"/>
-                      <a:tailEnd type="none" w="med" len="med"/>
-                    </a:lnT>
-                    <a:lnB w="2540" cap="flat" cmpd="sng" algn="ctr">
-                      <a:solidFill>
-                        <a:srgbClr val="EEEEEE"/>
-                      </a:solidFill>
-                      <a:prstDash val="solid"/>
-                      <a:round/>
-                      <a:headEnd type="none" w="med" len="med"/>
-                      <a:tailEnd type="none" w="med" len="med"/>
-                    </a:lnB>
-                  </a:tcPr>
-                </a:tc>
-                <a:tc>
-                  <a:txBody>
-                    <a:bodyPr/>
-                    <a:lstStyle/>
-                    <a:p>
-                      <a:pPr algn="ctr" indent="0" marL="0">
-                        <a:buNone/>
-                      </a:pPr>
-                      <a:r>
-                        <a:rPr lang="en-US" sz="500" dirty="0">
-                          <a:solidFill>
-                            <a:srgbClr val="000000"/>
-                          </a:solidFill>
-                          <a:latin typeface="Calibri" pitchFamily="34" charset="0"/>
-                          <a:ea typeface="Calibri" pitchFamily="34" charset="-122"/>
-                          <a:cs typeface="Calibri" pitchFamily="34" charset="-120"/>
-                        </a:rPr>
-                        <a:t>0.01%</a:t>
-                      </a:r>
-                      <a:endParaRPr lang="en-US" sz="500" dirty="0">
-                        <a:latin typeface="Calibri" charset="0"/>
-                        <a:ea typeface="Calibri" charset="0"/>
-                        <a:cs typeface="Calibri" charset="0"/>
-                      </a:endParaRPr>
-                    </a:p>
-                  </a:txBody>
-                  <a:tcPr marL="91440" marR="91440" marT="45720" marB="45720">
-                    <a:lnL w="2540" cap="flat" cmpd="sng" algn="ctr">
-                      <a:solidFill>
-                        <a:srgbClr val="EEEEEE"/>
-                      </a:solidFill>
-                      <a:prstDash val="solid"/>
-                      <a:round/>
-                      <a:headEnd type="none" w="med" len="med"/>
-                      <a:tailEnd type="none" w="med" len="med"/>
-                    </a:lnL>
-                    <a:lnR w="2540" cap="flat" cmpd="sng" algn="ctr">
-                      <a:solidFill>
-                        <a:srgbClr val="EEEEEE"/>
-                      </a:solidFill>
-                      <a:prstDash val="solid"/>
-                      <a:round/>
-                      <a:headEnd type="none" w="med" len="med"/>
-                      <a:tailEnd type="none" w="med" len="med"/>
-                    </a:lnR>
-                    <a:lnT w="2540" cap="flat" cmpd="sng" algn="ctr">
-                      <a:solidFill>
-                        <a:srgbClr val="EEEEEE"/>
-                      </a:solidFill>
-                      <a:prstDash val="solid"/>
-                      <a:round/>
-                      <a:headEnd type="none" w="med" len="med"/>
-                      <a:tailEnd type="none" w="med" len="med"/>
-                    </a:lnT>
-                    <a:lnB w="2540" cap="flat" cmpd="sng" algn="ctr">
-                      <a:solidFill>
-                        <a:srgbClr val="EEEEEE"/>
-                      </a:solidFill>
-                      <a:prstDash val="solid"/>
-                      <a:round/>
-                      <a:headEnd type="none" w="med" len="med"/>
-                      <a:tailEnd type="none" w="med" len="med"/>
-                    </a:lnB>
-                  </a:tcPr>
-                </a:tc>
-                <a:tc>
-                  <a:txBody>
-                    <a:bodyPr/>
-                    <a:lstStyle/>
-                    <a:p>
-                      <a:pPr algn="ctr" indent="0" marL="0">
-                        <a:buNone/>
-                      </a:pPr>
-                      <a:r>
-                        <a:rPr lang="en-US" sz="500" dirty="0">
-                          <a:solidFill>
-                            <a:srgbClr val="000000"/>
-                          </a:solidFill>
-                          <a:latin typeface="Calibri" pitchFamily="34" charset="0"/>
-                          <a:ea typeface="Calibri" pitchFamily="34" charset="-122"/>
-                          <a:cs typeface="Calibri" pitchFamily="34" charset="-120"/>
-                        </a:rPr>
-                        <a:t>0.01%</a:t>
-                      </a:r>
-                      <a:endParaRPr lang="en-US" sz="500" dirty="0">
-                        <a:latin typeface="Calibri" charset="0"/>
-                        <a:ea typeface="Calibri" charset="0"/>
-                        <a:cs typeface="Calibri" charset="0"/>
-                      </a:endParaRPr>
-                    </a:p>
-                  </a:txBody>
-                  <a:tcPr marL="91440" marR="91440" marT="45720" marB="45720">
-                    <a:lnL w="2540" cap="flat" cmpd="sng" algn="ctr">
-                      <a:solidFill>
-                        <a:srgbClr val="EEEEEE"/>
-                      </a:solidFill>
-                      <a:prstDash val="solid"/>
-                      <a:round/>
-                      <a:headEnd type="none" w="med" len="med"/>
-                      <a:tailEnd type="none" w="med" len="med"/>
-                    </a:lnL>
-                    <a:lnR w="2540" cap="flat" cmpd="sng" algn="ctr">
-                      <a:solidFill>
-                        <a:srgbClr val="EEEEEE"/>
-                      </a:solidFill>
-                      <a:prstDash val="solid"/>
-                      <a:round/>
-                      <a:headEnd type="none" w="med" len="med"/>
-                      <a:tailEnd type="none" w="med" len="med"/>
-                    </a:lnR>
-                    <a:lnT w="2540" cap="flat" cmpd="sng" algn="ctr">
-                      <a:solidFill>
-                        <a:srgbClr val="EEEEEE"/>
-                      </a:solidFill>
-                      <a:prstDash val="solid"/>
-                      <a:round/>
-                      <a:headEnd type="none" w="med" len="med"/>
-                      <a:tailEnd type="none" w="med" len="med"/>
-                    </a:lnT>
-                    <a:lnB w="2540" cap="flat" cmpd="sng" algn="ctr">
-                      <a:solidFill>
-                        <a:srgbClr val="EEEEEE"/>
-                      </a:solidFill>
-                      <a:prstDash val="solid"/>
-                      <a:round/>
-                      <a:headEnd type="none" w="med" len="med"/>
-                      <a:tailEnd type="none" w="med" len="med"/>
-                    </a:lnB>
-                  </a:tcPr>
-                </a:tc>
-                <a:tc>
-                  <a:txBody>
-                    <a:bodyPr/>
-                    <a:lstStyle/>
-                    <a:p>
-                      <a:pPr algn="ctr" indent="0" marL="0">
-                        <a:buNone/>
-                      </a:pPr>
-                      <a:r>
-                        <a:rPr lang="en-US" sz="500" dirty="0">
-                          <a:solidFill>
-                            <a:srgbClr val="000000"/>
-                          </a:solidFill>
-                          <a:latin typeface="Calibri" pitchFamily="34" charset="0"/>
-                          <a:ea typeface="Calibri" pitchFamily="34" charset="-122"/>
-                          <a:cs typeface="Calibri" pitchFamily="34" charset="-120"/>
-                        </a:rPr>
-                        <a:t>0.01%</a:t>
+                        <a:t>0.57%</a:t>
                       </a:r>
                       <a:endParaRPr lang="en-US" sz="500" dirty="0">
                         <a:latin typeface="Calibri" charset="0"/>
@@ -11635,7 +11635,7 @@
                           <a:ea typeface="Calibri" pitchFamily="34" charset="-122"/>
                           <a:cs typeface="Calibri" pitchFamily="34" charset="-120"/>
                         </a:rPr>
-                        <a:t>2.98%</a:t>
+                        <a:t>7.10%</a:t>
                       </a:r>
                       <a:endParaRPr lang="en-US" sz="500" dirty="0">
                         <a:latin typeface="Calibri" charset="0"/>

--- a/folletos/2026-04/pptx/FIP_VANTRUST_LIQUIDEZ_DISPONIBLE_I.pptx
+++ b/folletos/2026-04/pptx/FIP_VANTRUST_LIQUIDEZ_DISPONIBLE_I.pptx
@@ -3113,7 +3113,7 @@
                 <a:ea typeface="Calibri" pitchFamily="34" charset="-122"/>
                 <a:cs typeface="Calibri" pitchFamily="34" charset="-120"/>
               </a:rPr>
-              <a:t>prueba CLP</a:t>
+              <a:t>prueba 13 CLP</a:t>
             </a:r>
             <a:endParaRPr lang="en-US" sz="800" dirty="0"/>
           </a:p>

--- a/folletos/2026-04/pptx/FIP_VANTRUST_LIQUIDEZ_DISPONIBLE_I.pptx
+++ b/folletos/2026-04/pptx/FIP_VANTRUST_LIQUIDEZ_DISPONIBLE_I.pptx
@@ -189,38 +189,74 @@
           </c:marker>
           <c:cat>
             <c:multiLvlStrRef>
-              <c:f>Sheet1!$A$2:$A$11</c:f>
+              <c:f>Sheet1!$A$2:$A$23</c:f>
               <c:multiLvlStrCache>
-                <c:ptCount val="10"/>
+                <c:ptCount val="22"/>
                 <c:lvl>
                   <c:pt idx="0">
+                    <c:v>Aug 2024</c:v>
+                  </c:pt>
+                  <c:pt idx="1">
+                    <c:v>Aug 2024</c:v>
+                  </c:pt>
+                  <c:pt idx="2">
+                    <c:v>Sep 2024</c:v>
+                  </c:pt>
+                  <c:pt idx="3">
+                    <c:v>Oct 2024</c:v>
+                  </c:pt>
+                  <c:pt idx="4">
+                    <c:v>Nov 2024</c:v>
+                  </c:pt>
+                  <c:pt idx="5">
+                    <c:v>Dec 2024</c:v>
+                  </c:pt>
+                  <c:pt idx="6">
+                    <c:v>Jan 2025</c:v>
+                  </c:pt>
+                  <c:pt idx="7">
+                    <c:v>Feb 2025</c:v>
+                  </c:pt>
+                  <c:pt idx="8">
+                    <c:v>Mar 2025</c:v>
+                  </c:pt>
+                  <c:pt idx="9">
+                    <c:v>Apr 2025</c:v>
+                  </c:pt>
+                  <c:pt idx="10">
+                    <c:v>May 2025</c:v>
+                  </c:pt>
+                  <c:pt idx="11">
+                    <c:v>Jun 2025</c:v>
+                  </c:pt>
+                  <c:pt idx="12">
                     <c:v>Jul 2025</c:v>
                   </c:pt>
-                  <c:pt idx="1">
+                  <c:pt idx="13">
                     <c:v>Aug 2025</c:v>
                   </c:pt>
-                  <c:pt idx="2">
+                  <c:pt idx="14">
                     <c:v>Sep 2025</c:v>
                   </c:pt>
-                  <c:pt idx="3">
+                  <c:pt idx="15">
                     <c:v>Oct 2025</c:v>
                   </c:pt>
-                  <c:pt idx="4">
+                  <c:pt idx="16">
                     <c:v>Nov 2025</c:v>
                   </c:pt>
-                  <c:pt idx="5">
+                  <c:pt idx="17">
                     <c:v>Dec 2025</c:v>
                   </c:pt>
-                  <c:pt idx="6">
+                  <c:pt idx="18">
                     <c:v>Jan 2026</c:v>
                   </c:pt>
-                  <c:pt idx="7">
+                  <c:pt idx="19">
                     <c:v>Feb 2026</c:v>
                   </c:pt>
-                  <c:pt idx="8">
+                  <c:pt idx="20">
                     <c:v>Mar 2026</c:v>
                   </c:pt>
-                  <c:pt idx="9">
+                  <c:pt idx="21">
                     <c:v>Apr 2026</c:v>
                   </c:pt>
                 </c:lvl>
@@ -229,39 +265,75 @@
           </c:cat>
           <c:val>
             <c:numRef>
-              <c:f>Sheet1!$B$2:$B$11</c:f>
+              <c:f>Sheet1!$B$2:$B$23</c:f>
               <c:numCache>
                 <c:formatCode>General</c:formatCode>
-                <c:ptCount val="10"/>
+                <c:ptCount val="22"/>
                 <c:pt idx="0">
                   <c:v>100</c:v>
                 </c:pt>
                 <c:pt idx="1">
-                  <c:v>100.4</c:v>
+                  <c:v>100.48</c:v>
                 </c:pt>
                 <c:pt idx="2">
-                  <c:v>100.79</c:v>
+                  <c:v>100.96</c:v>
                 </c:pt>
                 <c:pt idx="3">
-                  <c:v>101.19</c:v>
+                  <c:v>101.42</c:v>
                 </c:pt>
                 <c:pt idx="4">
-                  <c:v>101.59</c:v>
+                  <c:v>101.86</c:v>
                 </c:pt>
                 <c:pt idx="5">
-                  <c:v>101.98</c:v>
+                  <c:v>102.31</c:v>
                 </c:pt>
                 <c:pt idx="6">
-                  <c:v>102.37</c:v>
+                  <c:v>102.77</c:v>
                 </c:pt>
                 <c:pt idx="7">
-                  <c:v>102.75</c:v>
+                  <c:v>103.17</c:v>
                 </c:pt>
                 <c:pt idx="8">
-                  <c:v>103.14</c:v>
+                  <c:v>103.61</c:v>
                 </c:pt>
                 <c:pt idx="9">
-                  <c:v>103.52</c:v>
+                  <c:v>104.05</c:v>
+                </c:pt>
+                <c:pt idx="10">
+                  <c:v>104.48</c:v>
+                </c:pt>
+                <c:pt idx="11">
+                  <c:v>104.93</c:v>
+                </c:pt>
+                <c:pt idx="12">
+                  <c:v>105.38</c:v>
+                </c:pt>
+                <c:pt idx="13">
+                  <c:v>105.79</c:v>
+                </c:pt>
+                <c:pt idx="14">
+                  <c:v>106.24</c:v>
+                </c:pt>
+                <c:pt idx="15">
+                  <c:v>106.66</c:v>
+                </c:pt>
+                <c:pt idx="16">
+                  <c:v>107.07</c:v>
+                </c:pt>
+                <c:pt idx="17">
+                  <c:v>107.51</c:v>
+                </c:pt>
+                <c:pt idx="18">
+                  <c:v>107.93</c:v>
+                </c:pt>
+                <c:pt idx="19">
+                  <c:v>108.32</c:v>
+                </c:pt>
+                <c:pt idx="20">
+                  <c:v>108.74</c:v>
+                </c:pt>
+                <c:pt idx="21">
+                  <c:v>109.15</c:v>
                 </c:pt>
               </c:numCache>
             </c:numRef>
@@ -339,38 +411,74 @@
           </c:marker>
           <c:cat>
             <c:multiLvlStrRef>
-              <c:f>Sheet1!$A$2:$A$11</c:f>
+              <c:f>Sheet1!$A$2:$A$23</c:f>
               <c:multiLvlStrCache>
-                <c:ptCount val="10"/>
+                <c:ptCount val="22"/>
                 <c:lvl>
                   <c:pt idx="0">
+                    <c:v>Aug 2024</c:v>
+                  </c:pt>
+                  <c:pt idx="1">
+                    <c:v>Aug 2024</c:v>
+                  </c:pt>
+                  <c:pt idx="2">
+                    <c:v>Sep 2024</c:v>
+                  </c:pt>
+                  <c:pt idx="3">
+                    <c:v>Oct 2024</c:v>
+                  </c:pt>
+                  <c:pt idx="4">
+                    <c:v>Nov 2024</c:v>
+                  </c:pt>
+                  <c:pt idx="5">
+                    <c:v>Dec 2024</c:v>
+                  </c:pt>
+                  <c:pt idx="6">
+                    <c:v>Jan 2025</c:v>
+                  </c:pt>
+                  <c:pt idx="7">
+                    <c:v>Feb 2025</c:v>
+                  </c:pt>
+                  <c:pt idx="8">
+                    <c:v>Mar 2025</c:v>
+                  </c:pt>
+                  <c:pt idx="9">
+                    <c:v>Apr 2025</c:v>
+                  </c:pt>
+                  <c:pt idx="10">
+                    <c:v>May 2025</c:v>
+                  </c:pt>
+                  <c:pt idx="11">
+                    <c:v>Jun 2025</c:v>
+                  </c:pt>
+                  <c:pt idx="12">
                     <c:v>Jul 2025</c:v>
                   </c:pt>
-                  <c:pt idx="1">
+                  <c:pt idx="13">
                     <c:v>Aug 2025</c:v>
                   </c:pt>
-                  <c:pt idx="2">
+                  <c:pt idx="14">
                     <c:v>Sep 2025</c:v>
                   </c:pt>
-                  <c:pt idx="3">
+                  <c:pt idx="15">
                     <c:v>Oct 2025</c:v>
                   </c:pt>
-                  <c:pt idx="4">
+                  <c:pt idx="16">
                     <c:v>Nov 2025</c:v>
                   </c:pt>
-                  <c:pt idx="5">
+                  <c:pt idx="17">
                     <c:v>Dec 2025</c:v>
                   </c:pt>
-                  <c:pt idx="6">
+                  <c:pt idx="18">
                     <c:v>Jan 2026</c:v>
                   </c:pt>
-                  <c:pt idx="7">
+                  <c:pt idx="19">
                     <c:v>Feb 2026</c:v>
                   </c:pt>
-                  <c:pt idx="8">
+                  <c:pt idx="20">
                     <c:v>Mar 2026</c:v>
                   </c:pt>
-                  <c:pt idx="9">
+                  <c:pt idx="21">
                     <c:v>Apr 2026</c:v>
                   </c:pt>
                 </c:lvl>
@@ -379,39 +487,75 @@
           </c:cat>
           <c:val>
             <c:numRef>
-              <c:f>Sheet1!$C$2:$C$11</c:f>
+              <c:f>Sheet1!$C$2:$C$23</c:f>
               <c:numCache>
                 <c:formatCode>General</c:formatCode>
-                <c:ptCount val="10"/>
+                <c:ptCount val="22"/>
                 <c:pt idx="0">
                   <c:v>100</c:v>
                 </c:pt>
                 <c:pt idx="1">
-                  <c:v>100.58</c:v>
+                  <c:v>100.18</c:v>
                 </c:pt>
                 <c:pt idx="2">
-                  <c:v>101.1</c:v>
+                  <c:v>100.75</c:v>
                 </c:pt>
                 <c:pt idx="3">
-                  <c:v>101.69</c:v>
+                  <c:v>101.27</c:v>
                 </c:pt>
                 <c:pt idx="4">
-                  <c:v>102.29</c:v>
+                  <c:v>101.81</c:v>
                 </c:pt>
                 <c:pt idx="5">
-                  <c:v>102.94</c:v>
+                  <c:v>102.33</c:v>
                 </c:pt>
                 <c:pt idx="6">
-                  <c:v>103.51</c:v>
+                  <c:v>102.78</c:v>
                 </c:pt>
                 <c:pt idx="7">
-                  <c:v>104.03</c:v>
+                  <c:v>103.24</c:v>
                 </c:pt>
                 <c:pt idx="8">
-                  <c:v>104.62</c:v>
+                  <c:v>103.86</c:v>
                 </c:pt>
                 <c:pt idx="9">
-                  <c:v>105.19</c:v>
+                  <c:v>104.59</c:v>
+                </c:pt>
+                <c:pt idx="10">
+                  <c:v>105.27</c:v>
+                </c:pt>
+                <c:pt idx="11">
+                  <c:v>105.86</c:v>
+                </c:pt>
+                <c:pt idx="12">
+                  <c:v>106.47</c:v>
+                </c:pt>
+                <c:pt idx="13">
+                  <c:v>107.08</c:v>
+                </c:pt>
+                <c:pt idx="14">
+                  <c:v>107.64</c:v>
+                </c:pt>
+                <c:pt idx="15">
+                  <c:v>108.27</c:v>
+                </c:pt>
+                <c:pt idx="16">
+                  <c:v>108.91</c:v>
+                </c:pt>
+                <c:pt idx="17">
+                  <c:v>109.6</c:v>
+                </c:pt>
+                <c:pt idx="18">
+                  <c:v>110.2</c:v>
+                </c:pt>
+                <c:pt idx="19">
+                  <c:v>110.76</c:v>
+                </c:pt>
+                <c:pt idx="20">
+                  <c:v>111.39</c:v>
+                </c:pt>
+                <c:pt idx="21">
+                  <c:v>111.99</c:v>
                 </c:pt>
               </c:numCache>
             </c:numRef>
@@ -489,38 +633,74 @@
           </c:marker>
           <c:cat>
             <c:multiLvlStrRef>
-              <c:f>Sheet1!$A$2:$A$11</c:f>
+              <c:f>Sheet1!$A$2:$A$23</c:f>
               <c:multiLvlStrCache>
-                <c:ptCount val="10"/>
+                <c:ptCount val="22"/>
                 <c:lvl>
                   <c:pt idx="0">
+                    <c:v>Aug 2024</c:v>
+                  </c:pt>
+                  <c:pt idx="1">
+                    <c:v>Aug 2024</c:v>
+                  </c:pt>
+                  <c:pt idx="2">
+                    <c:v>Sep 2024</c:v>
+                  </c:pt>
+                  <c:pt idx="3">
+                    <c:v>Oct 2024</c:v>
+                  </c:pt>
+                  <c:pt idx="4">
+                    <c:v>Nov 2024</c:v>
+                  </c:pt>
+                  <c:pt idx="5">
+                    <c:v>Dec 2024</c:v>
+                  </c:pt>
+                  <c:pt idx="6">
+                    <c:v>Jan 2025</c:v>
+                  </c:pt>
+                  <c:pt idx="7">
+                    <c:v>Feb 2025</c:v>
+                  </c:pt>
+                  <c:pt idx="8">
+                    <c:v>Mar 2025</c:v>
+                  </c:pt>
+                  <c:pt idx="9">
+                    <c:v>Apr 2025</c:v>
+                  </c:pt>
+                  <c:pt idx="10">
+                    <c:v>May 2025</c:v>
+                  </c:pt>
+                  <c:pt idx="11">
+                    <c:v>Jun 2025</c:v>
+                  </c:pt>
+                  <c:pt idx="12">
                     <c:v>Jul 2025</c:v>
                   </c:pt>
-                  <c:pt idx="1">
+                  <c:pt idx="13">
                     <c:v>Aug 2025</c:v>
                   </c:pt>
-                  <c:pt idx="2">
+                  <c:pt idx="14">
                     <c:v>Sep 2025</c:v>
                   </c:pt>
-                  <c:pt idx="3">
+                  <c:pt idx="15">
                     <c:v>Oct 2025</c:v>
                   </c:pt>
-                  <c:pt idx="4">
+                  <c:pt idx="16">
                     <c:v>Nov 2025</c:v>
                   </c:pt>
-                  <c:pt idx="5">
+                  <c:pt idx="17">
                     <c:v>Dec 2025</c:v>
                   </c:pt>
-                  <c:pt idx="6">
+                  <c:pt idx="18">
                     <c:v>Jan 2026</c:v>
                   </c:pt>
-                  <c:pt idx="7">
+                  <c:pt idx="19">
                     <c:v>Feb 2026</c:v>
                   </c:pt>
-                  <c:pt idx="8">
+                  <c:pt idx="20">
                     <c:v>Mar 2026</c:v>
                   </c:pt>
-                  <c:pt idx="9">
+                  <c:pt idx="21">
                     <c:v>Apr 2026</c:v>
                   </c:pt>
                 </c:lvl>
@@ -529,39 +709,75 @@
           </c:cat>
           <c:val>
             <c:numRef>
-              <c:f>Sheet1!$D$2:$D$11</c:f>
+              <c:f>Sheet1!$D$2:$D$23</c:f>
               <c:numCache>
                 <c:formatCode>General</c:formatCode>
-                <c:ptCount val="10"/>
+                <c:ptCount val="22"/>
                 <c:pt idx="0">
                   <c:v>100</c:v>
                 </c:pt>
                 <c:pt idx="1">
-                  <c:v>100.3</c:v>
+                  <c:v>100.36</c:v>
                 </c:pt>
                 <c:pt idx="2">
-                  <c:v>100.58</c:v>
+                  <c:v>100.7</c:v>
                 </c:pt>
                 <c:pt idx="3">
-                  <c:v>100.87</c:v>
+                  <c:v>101.05</c:v>
                 </c:pt>
                 <c:pt idx="4">
-                  <c:v>101.15</c:v>
+                  <c:v>101.37</c:v>
                 </c:pt>
                 <c:pt idx="5">
-                  <c:v>101.71</c:v>
+                  <c:v>101.7</c:v>
                 </c:pt>
                 <c:pt idx="6">
-                  <c:v>101.71</c:v>
+                  <c:v>102</c:v>
                 </c:pt>
                 <c:pt idx="7">
-                  <c:v>101.96</c:v>
+                  <c:v>102.29</c:v>
                 </c:pt>
                 <c:pt idx="8">
-                  <c:v>102.23</c:v>
+                  <c:v>102.6</c:v>
                 </c:pt>
                 <c:pt idx="9">
-                  <c:v>102.5</c:v>
+                  <c:v>102.91</c:v>
+                </c:pt>
+                <c:pt idx="10">
+                  <c:v>103.22</c:v>
+                </c:pt>
+                <c:pt idx="11">
+                  <c:v>103.53</c:v>
+                </c:pt>
+                <c:pt idx="12">
+                  <c:v>103.84</c:v>
+                </c:pt>
+                <c:pt idx="13">
+                  <c:v>104.15</c:v>
+                </c:pt>
+                <c:pt idx="14">
+                  <c:v>104.44</c:v>
+                </c:pt>
+                <c:pt idx="15">
+                  <c:v>104.74</c:v>
+                </c:pt>
+                <c:pt idx="16">
+                  <c:v>105.03</c:v>
+                </c:pt>
+                <c:pt idx="17">
+                  <c:v>105.33</c:v>
+                </c:pt>
+                <c:pt idx="18">
+                  <c:v>105.61</c:v>
+                </c:pt>
+                <c:pt idx="19">
+                  <c:v>105.87</c:v>
+                </c:pt>
+                <c:pt idx="20">
+                  <c:v>106.16</c:v>
+                </c:pt>
+                <c:pt idx="21">
+                  <c:v>106.43</c:v>
                 </c:pt>
               </c:numCache>
             </c:numRef>
@@ -637,7 +853,7 @@
         <c:auto val="1"/>
         <c:lblAlgn val="ctr"/>
         <c:noMultiLvlLbl val="1"/>
-        <c:tickLblSkip val="1"/>
+        <c:tickLblSkip val="2"/>
       </c:catAx>
       <c:valAx>
         <c:axId val="2094734552"/>
@@ -3113,7 +3329,7 @@
                 <a:ea typeface="Calibri" pitchFamily="34" charset="-122"/>
                 <a:cs typeface="Calibri" pitchFamily="34" charset="-120"/>
               </a:rPr>
-              <a:t>prueba 13 CLP</a:t>
+              <a:t>prueba CLP</a:t>
             </a:r>
             <a:endParaRPr lang="en-US" sz="800" dirty="0"/>
           </a:p>
@@ -3762,7 +3978,7 @@
                           <a:ea typeface="Calibri" pitchFamily="34" charset="-122"/>
                           <a:cs typeface="Calibri" pitchFamily="34" charset="-120"/>
                         </a:rPr>
-                        <a:t>0.37%</a:t>
+                        <a:t>0.38%</a:t>
                       </a:r>
                       <a:endParaRPr lang="en-US" sz="750" dirty="0">
                         <a:latin typeface="Calibri" charset="0"/>
@@ -3898,7 +4114,7 @@
                           <a:ea typeface="Calibri" pitchFamily="34" charset="-122"/>
                           <a:cs typeface="Calibri" pitchFamily="34" charset="-120"/>
                         </a:rPr>
-                        <a:t>2.30%</a:t>
+                        <a:t>2.33%</a:t>
                       </a:r>
                       <a:endParaRPr lang="en-US" sz="750" dirty="0">
                         <a:latin typeface="Calibri" charset="0"/>
@@ -3966,7 +4182,7 @@
                           <a:ea typeface="Calibri" pitchFamily="34" charset="-122"/>
                           <a:cs typeface="Calibri" pitchFamily="34" charset="-120"/>
                         </a:rPr>
-                        <a:t>4.82%</a:t>
+                        <a:t>4.90%</a:t>
                       </a:r>
                       <a:endParaRPr lang="en-US" sz="750" dirty="0">
                         <a:latin typeface="Calibri" charset="0"/>
@@ -4786,7 +5002,7 @@
                           <a:ea typeface="Calibri" pitchFamily="34" charset="-122"/>
                           <a:cs typeface="Calibri" pitchFamily="34" charset="-120"/>
                         </a:rPr>
-                        <a:t>—</a:t>
+                        <a:t>7.08%</a:t>
                       </a:r>
                       <a:endParaRPr lang="en-US" sz="750" dirty="0">
                         <a:latin typeface="Calibri" charset="0"/>
@@ -4996,20 +5212,20 @@
               <a:tblPr/>
               <a:tblGrid>
                 <a:gridCol w="201168"/>
-                <a:gridCol w="822960"/>
-                <a:gridCol w="246888"/>
-                <a:gridCol w="246888"/>
-                <a:gridCol w="246888"/>
-                <a:gridCol w="246888"/>
-                <a:gridCol w="246888"/>
-                <a:gridCol w="246888"/>
-                <a:gridCol w="246888"/>
-                <a:gridCol w="246888"/>
-                <a:gridCol w="246888"/>
-                <a:gridCol w="246888"/>
-                <a:gridCol w="246888"/>
-                <a:gridCol w="246888"/>
-                <a:gridCol w="283464"/>
+                <a:gridCol w="804672"/>
+                <a:gridCol w="292608"/>
+                <a:gridCol w="292608"/>
+                <a:gridCol w="292608"/>
+                <a:gridCol w="292608"/>
+                <a:gridCol w="292608"/>
+                <a:gridCol w="292608"/>
+                <a:gridCol w="292608"/>
+                <a:gridCol w="292608"/>
+                <a:gridCol w="292608"/>
+                <a:gridCol w="292608"/>
+                <a:gridCol w="292608"/>
+                <a:gridCol w="292608"/>
+                <a:gridCol w="301752"/>
               </a:tblGrid>
               <a:tr h="123444">
                 <a:tc>
@@ -6148,17 +6364,6 @@
                       <a:pPr algn="ctr" indent="0" marL="0">
                         <a:buNone/>
                       </a:pPr>
-                      <a:r>
-                        <a:rPr lang="en-US" sz="500" dirty="0">
-                          <a:solidFill>
-                            <a:srgbClr val="777777"/>
-                          </a:solidFill>
-                          <a:latin typeface="Calibri" pitchFamily="34" charset="0"/>
-                          <a:ea typeface="Calibri" pitchFamily="34" charset="-122"/>
-                          <a:cs typeface="Calibri" pitchFamily="34" charset="-120"/>
-                        </a:rPr>
-                        <a:t>0.69%</a:t>
-                      </a:r>
                       <a:endParaRPr lang="en-US" sz="500" dirty="0">
                         <a:latin typeface="Calibri" charset="0"/>
                         <a:ea typeface="Calibri" charset="0"/>
@@ -6213,17 +6418,6 @@
                       <a:pPr algn="ctr" indent="0" marL="0">
                         <a:buNone/>
                       </a:pPr>
-                      <a:r>
-                        <a:rPr lang="en-US" sz="500" dirty="0">
-                          <a:solidFill>
-                            <a:srgbClr val="777777"/>
-                          </a:solidFill>
-                          <a:latin typeface="Calibri" pitchFamily="34" charset="0"/>
-                          <a:ea typeface="Calibri" pitchFamily="34" charset="-122"/>
-                          <a:cs typeface="Calibri" pitchFamily="34" charset="-120"/>
-                        </a:rPr>
-                        <a:t>0.60%</a:t>
-                      </a:r>
                       <a:endParaRPr lang="en-US" sz="500" dirty="0">
                         <a:latin typeface="Calibri" charset="0"/>
                         <a:ea typeface="Calibri" charset="0"/>
@@ -6278,17 +6472,6 @@
                       <a:pPr algn="ctr" indent="0" marL="0">
                         <a:buNone/>
                       </a:pPr>
-                      <a:r>
-                        <a:rPr lang="en-US" sz="500" dirty="0">
-                          <a:solidFill>
-                            <a:srgbClr val="777777"/>
-                          </a:solidFill>
-                          <a:latin typeface="Calibri" pitchFamily="34" charset="0"/>
-                          <a:ea typeface="Calibri" pitchFamily="34" charset="-122"/>
-                          <a:cs typeface="Calibri" pitchFamily="34" charset="-120"/>
-                        </a:rPr>
-                        <a:t>0.60%</a:t>
-                      </a:r>
                       <a:endParaRPr lang="en-US" sz="500" dirty="0">
                         <a:latin typeface="Calibri" charset="0"/>
                         <a:ea typeface="Calibri" charset="0"/>
@@ -6343,17 +6526,6 @@
                       <a:pPr algn="ctr" indent="0" marL="0">
                         <a:buNone/>
                       </a:pPr>
-                      <a:r>
-                        <a:rPr lang="en-US" sz="500" dirty="0">
-                          <a:solidFill>
-                            <a:srgbClr val="777777"/>
-                          </a:solidFill>
-                          <a:latin typeface="Calibri" pitchFamily="34" charset="0"/>
-                          <a:ea typeface="Calibri" pitchFamily="34" charset="-122"/>
-                          <a:cs typeface="Calibri" pitchFamily="34" charset="-120"/>
-                        </a:rPr>
-                        <a:t>0.55%</a:t>
-                      </a:r>
                       <a:endParaRPr lang="en-US" sz="500" dirty="0">
                         <a:latin typeface="Calibri" charset="0"/>
                         <a:ea typeface="Calibri" charset="0"/>
@@ -6408,17 +6580,6 @@
                       <a:pPr algn="ctr" indent="0" marL="0">
                         <a:buNone/>
                       </a:pPr>
-                      <a:r>
-                        <a:rPr lang="en-US" sz="500" dirty="0">
-                          <a:solidFill>
-                            <a:srgbClr val="777777"/>
-                          </a:solidFill>
-                          <a:latin typeface="Calibri" pitchFamily="34" charset="0"/>
-                          <a:ea typeface="Calibri" pitchFamily="34" charset="-122"/>
-                          <a:cs typeface="Calibri" pitchFamily="34" charset="-120"/>
-                        </a:rPr>
-                        <a:t>0.53%</a:t>
-                      </a:r>
                       <a:endParaRPr lang="en-US" sz="500" dirty="0">
                         <a:latin typeface="Calibri" charset="0"/>
                         <a:ea typeface="Calibri" charset="0"/>
@@ -6473,17 +6634,60 @@
                       <a:pPr algn="ctr" indent="0" marL="0">
                         <a:buNone/>
                       </a:pPr>
-                      <a:r>
-                        <a:rPr lang="en-US" sz="500" dirty="0">
-                          <a:solidFill>
-                            <a:srgbClr val="777777"/>
-                          </a:solidFill>
-                          <a:latin typeface="Calibri" pitchFamily="34" charset="0"/>
-                          <a:ea typeface="Calibri" pitchFamily="34" charset="-122"/>
-                          <a:cs typeface="Calibri" pitchFamily="34" charset="-120"/>
-                        </a:rPr>
-                        <a:t>0.49%</a:t>
-                      </a:r>
+                      <a:endParaRPr lang="en-US" sz="500" dirty="0">
+                        <a:latin typeface="Calibri" charset="0"/>
+                        <a:ea typeface="Calibri" charset="0"/>
+                        <a:cs typeface="Calibri" charset="0"/>
+                      </a:endParaRPr>
+                    </a:p>
+                  </a:txBody>
+                  <a:tcPr marL="91440" marR="91440" marT="45720" marB="45720">
+                    <a:lnL w="2540" cap="flat" cmpd="sng" algn="ctr">
+                      <a:solidFill>
+                        <a:srgbClr val="EEEEEE"/>
+                      </a:solidFill>
+                      <a:prstDash val="solid"/>
+                      <a:round/>
+                      <a:headEnd type="none" w="med" len="med"/>
+                      <a:tailEnd type="none" w="med" len="med"/>
+                    </a:lnL>
+                    <a:lnR w="2540" cap="flat" cmpd="sng" algn="ctr">
+                      <a:solidFill>
+                        <a:srgbClr val="EEEEEE"/>
+                      </a:solidFill>
+                      <a:prstDash val="solid"/>
+                      <a:round/>
+                      <a:headEnd type="none" w="med" len="med"/>
+                      <a:tailEnd type="none" w="med" len="med"/>
+                    </a:lnR>
+                    <a:lnT w="2540" cap="flat" cmpd="sng" algn="ctr">
+                      <a:solidFill>
+                        <a:srgbClr val="EEEEEE"/>
+                      </a:solidFill>
+                      <a:prstDash val="solid"/>
+                      <a:round/>
+                      <a:headEnd type="none" w="med" len="med"/>
+                      <a:tailEnd type="none" w="med" len="med"/>
+                    </a:lnT>
+                    <a:lnB w="2540" cap="flat" cmpd="sng" algn="ctr">
+                      <a:solidFill>
+                        <a:srgbClr val="EEEEEE"/>
+                      </a:solidFill>
+                      <a:prstDash val="solid"/>
+                      <a:round/>
+                      <a:headEnd type="none" w="med" len="med"/>
+                      <a:tailEnd type="none" w="med" len="med"/>
+                    </a:lnB>
+                  </a:tcPr>
+                </a:tc>
+                <a:tc>
+                  <a:txBody>
+                    <a:bodyPr/>
+                    <a:lstStyle/>
+                    <a:p>
+                      <a:pPr algn="ctr" indent="0" marL="0">
+                        <a:buNone/>
+                      </a:pPr>
                       <a:endParaRPr lang="en-US" sz="500" dirty="0">
                         <a:latin typeface="Calibri" charset="0"/>
                         <a:ea typeface="Calibri" charset="0"/>
@@ -6677,7 +6881,2112 @@
                           <a:ea typeface="Calibri" pitchFamily="34" charset="-122"/>
                           <a:cs typeface="Calibri" pitchFamily="34" charset="-120"/>
                         </a:rPr>
-                        <a:t>0.46%</a:t>
+                        <a:t>0.45%</a:t>
+                      </a:r>
+                      <a:endParaRPr lang="en-US" sz="500" dirty="0">
+                        <a:latin typeface="Calibri" charset="0"/>
+                        <a:ea typeface="Calibri" charset="0"/>
+                        <a:cs typeface="Calibri" charset="0"/>
+                      </a:endParaRPr>
+                    </a:p>
+                  </a:txBody>
+                  <a:tcPr marL="91440" marR="91440" marT="45720" marB="45720">
+                    <a:lnL w="2540" cap="flat" cmpd="sng" algn="ctr">
+                      <a:solidFill>
+                        <a:srgbClr val="EEEEEE"/>
+                      </a:solidFill>
+                      <a:prstDash val="solid"/>
+                      <a:round/>
+                      <a:headEnd type="none" w="med" len="med"/>
+                      <a:tailEnd type="none" w="med" len="med"/>
+                    </a:lnL>
+                    <a:lnR w="2540" cap="flat" cmpd="sng" algn="ctr">
+                      <a:solidFill>
+                        <a:srgbClr val="EEEEEE"/>
+                      </a:solidFill>
+                      <a:prstDash val="solid"/>
+                      <a:round/>
+                      <a:headEnd type="none" w="med" len="med"/>
+                      <a:tailEnd type="none" w="med" len="med"/>
+                    </a:lnR>
+                    <a:lnT w="2540" cap="flat" cmpd="sng" algn="ctr">
+                      <a:solidFill>
+                        <a:srgbClr val="EEEEEE"/>
+                      </a:solidFill>
+                      <a:prstDash val="solid"/>
+                      <a:round/>
+                      <a:headEnd type="none" w="med" len="med"/>
+                      <a:tailEnd type="none" w="med" len="med"/>
+                    </a:lnT>
+                    <a:lnB w="2540" cap="flat" cmpd="sng" algn="ctr">
+                      <a:solidFill>
+                        <a:srgbClr val="EEEEEE"/>
+                      </a:solidFill>
+                      <a:prstDash val="solid"/>
+                      <a:round/>
+                      <a:headEnd type="none" w="med" len="med"/>
+                      <a:tailEnd type="none" w="med" len="med"/>
+                    </a:lnB>
+                  </a:tcPr>
+                </a:tc>
+                <a:tc>
+                  <a:txBody>
+                    <a:bodyPr/>
+                    <a:lstStyle/>
+                    <a:p>
+                      <a:pPr algn="ctr" indent="0" marL="0">
+                        <a:buNone/>
+                      </a:pPr>
+                      <a:r>
+                        <a:rPr lang="en-US" sz="500" dirty="0">
+                          <a:solidFill>
+                            <a:srgbClr val="777777"/>
+                          </a:solidFill>
+                          <a:latin typeface="Calibri" pitchFamily="34" charset="0"/>
+                          <a:ea typeface="Calibri" pitchFamily="34" charset="-122"/>
+                          <a:cs typeface="Calibri" pitchFamily="34" charset="-120"/>
+                        </a:rPr>
+                        <a:t>0.44%</a:t>
+                      </a:r>
+                      <a:endParaRPr lang="en-US" sz="500" dirty="0">
+                        <a:latin typeface="Calibri" charset="0"/>
+                        <a:ea typeface="Calibri" charset="0"/>
+                        <a:cs typeface="Calibri" charset="0"/>
+                      </a:endParaRPr>
+                    </a:p>
+                  </a:txBody>
+                  <a:tcPr marL="91440" marR="91440" marT="45720" marB="45720">
+                    <a:lnL w="2540" cap="flat" cmpd="sng" algn="ctr">
+                      <a:solidFill>
+                        <a:srgbClr val="EEEEEE"/>
+                      </a:solidFill>
+                      <a:prstDash val="solid"/>
+                      <a:round/>
+                      <a:headEnd type="none" w="med" len="med"/>
+                      <a:tailEnd type="none" w="med" len="med"/>
+                    </a:lnL>
+                    <a:lnR w="2540" cap="flat" cmpd="sng" algn="ctr">
+                      <a:solidFill>
+                        <a:srgbClr val="EEEEEE"/>
+                      </a:solidFill>
+                      <a:prstDash val="solid"/>
+                      <a:round/>
+                      <a:headEnd type="none" w="med" len="med"/>
+                      <a:tailEnd type="none" w="med" len="med"/>
+                    </a:lnR>
+                    <a:lnT w="2540" cap="flat" cmpd="sng" algn="ctr">
+                      <a:solidFill>
+                        <a:srgbClr val="EEEEEE"/>
+                      </a:solidFill>
+                      <a:prstDash val="solid"/>
+                      <a:round/>
+                      <a:headEnd type="none" w="med" len="med"/>
+                      <a:tailEnd type="none" w="med" len="med"/>
+                    </a:lnT>
+                    <a:lnB w="2540" cap="flat" cmpd="sng" algn="ctr">
+                      <a:solidFill>
+                        <a:srgbClr val="EEEEEE"/>
+                      </a:solidFill>
+                      <a:prstDash val="solid"/>
+                      <a:round/>
+                      <a:headEnd type="none" w="med" len="med"/>
+                      <a:tailEnd type="none" w="med" len="med"/>
+                    </a:lnB>
+                  </a:tcPr>
+                </a:tc>
+                <a:tc>
+                  <a:txBody>
+                    <a:bodyPr/>
+                    <a:lstStyle/>
+                    <a:p>
+                      <a:pPr algn="ctr" indent="0" marL="0">
+                        <a:buNone/>
+                      </a:pPr>
+                      <a:r>
+                        <a:rPr lang="en-US" sz="500" dirty="0">
+                          <a:solidFill>
+                            <a:srgbClr val="777777"/>
+                          </a:solidFill>
+                          <a:latin typeface="Calibri" pitchFamily="34" charset="0"/>
+                          <a:ea typeface="Calibri" pitchFamily="34" charset="-122"/>
+                          <a:cs typeface="Calibri" pitchFamily="34" charset="-120"/>
+                        </a:rPr>
+                        <a:t>0.44%</a:t>
+                      </a:r>
+                      <a:endParaRPr lang="en-US" sz="500" dirty="0">
+                        <a:latin typeface="Calibri" charset="0"/>
+                        <a:ea typeface="Calibri" charset="0"/>
+                        <a:cs typeface="Calibri" charset="0"/>
+                      </a:endParaRPr>
+                    </a:p>
+                  </a:txBody>
+                  <a:tcPr marL="91440" marR="91440" marT="45720" marB="45720">
+                    <a:lnL w="2540" cap="flat" cmpd="sng" algn="ctr">
+                      <a:solidFill>
+                        <a:srgbClr val="EEEEEE"/>
+                      </a:solidFill>
+                      <a:prstDash val="solid"/>
+                      <a:round/>
+                      <a:headEnd type="none" w="med" len="med"/>
+                      <a:tailEnd type="none" w="med" len="med"/>
+                    </a:lnL>
+                    <a:lnR w="2540" cap="flat" cmpd="sng" algn="ctr">
+                      <a:solidFill>
+                        <a:srgbClr val="EEEEEE"/>
+                      </a:solidFill>
+                      <a:prstDash val="solid"/>
+                      <a:round/>
+                      <a:headEnd type="none" w="med" len="med"/>
+                      <a:tailEnd type="none" w="med" len="med"/>
+                    </a:lnR>
+                    <a:lnT w="2540" cap="flat" cmpd="sng" algn="ctr">
+                      <a:solidFill>
+                        <a:srgbClr val="EEEEEE"/>
+                      </a:solidFill>
+                      <a:prstDash val="solid"/>
+                      <a:round/>
+                      <a:headEnd type="none" w="med" len="med"/>
+                      <a:tailEnd type="none" w="med" len="med"/>
+                    </a:lnT>
+                    <a:lnB w="2540" cap="flat" cmpd="sng" algn="ctr">
+                      <a:solidFill>
+                        <a:srgbClr val="EEEEEE"/>
+                      </a:solidFill>
+                      <a:prstDash val="solid"/>
+                      <a:round/>
+                      <a:headEnd type="none" w="med" len="med"/>
+                      <a:tailEnd type="none" w="med" len="med"/>
+                    </a:lnB>
+                  </a:tcPr>
+                </a:tc>
+                <a:tc>
+                  <a:txBody>
+                    <a:bodyPr/>
+                    <a:lstStyle/>
+                    <a:p>
+                      <a:pPr algn="ctr" indent="0" marL="0">
+                        <a:buNone/>
+                      </a:pPr>
+                      <a:r>
+                        <a:rPr lang="en-US" sz="500" b="1" dirty="0">
+                          <a:solidFill>
+                            <a:srgbClr val="777777"/>
+                          </a:solidFill>
+                          <a:latin typeface="Calibri" pitchFamily="34" charset="0"/>
+                          <a:ea typeface="Calibri" pitchFamily="34" charset="-122"/>
+                          <a:cs typeface="Calibri" pitchFamily="34" charset="-120"/>
+                        </a:rPr>
+                        <a:t>5.55%</a:t>
+                      </a:r>
+                      <a:endParaRPr lang="en-US" sz="500" dirty="0">
+                        <a:latin typeface="Calibri" charset="0"/>
+                        <a:ea typeface="Calibri" charset="0"/>
+                        <a:cs typeface="Calibri" charset="0"/>
+                      </a:endParaRPr>
+                    </a:p>
+                  </a:txBody>
+                  <a:tcPr marL="91440" marR="91440" marT="45720" marB="45720">
+                    <a:lnL w="2540" cap="flat" cmpd="sng" algn="ctr">
+                      <a:solidFill>
+                        <a:srgbClr val="EEEEEE"/>
+                      </a:solidFill>
+                      <a:prstDash val="solid"/>
+                      <a:round/>
+                      <a:headEnd type="none" w="med" len="med"/>
+                      <a:tailEnd type="none" w="med" len="med"/>
+                    </a:lnL>
+                    <a:lnR w="2540" cap="flat" cmpd="sng" algn="ctr">
+                      <a:solidFill>
+                        <a:srgbClr val="EEEEEE"/>
+                      </a:solidFill>
+                      <a:prstDash val="solid"/>
+                      <a:round/>
+                      <a:headEnd type="none" w="med" len="med"/>
+                      <a:tailEnd type="none" w="med" len="med"/>
+                    </a:lnR>
+                    <a:lnT w="2540" cap="flat" cmpd="sng" algn="ctr">
+                      <a:solidFill>
+                        <a:srgbClr val="EEEEEE"/>
+                      </a:solidFill>
+                      <a:prstDash val="solid"/>
+                      <a:round/>
+                      <a:headEnd type="none" w="med" len="med"/>
+                      <a:tailEnd type="none" w="med" len="med"/>
+                    </a:lnT>
+                    <a:lnB w="2540" cap="flat" cmpd="sng" algn="ctr">
+                      <a:solidFill>
+                        <a:srgbClr val="EEEEEE"/>
+                      </a:solidFill>
+                      <a:prstDash val="solid"/>
+                      <a:round/>
+                      <a:headEnd type="none" w="med" len="med"/>
+                      <a:tailEnd type="none" w="med" len="med"/>
+                    </a:lnB>
+                  </a:tcPr>
+                </a:tc>
+              </a:tr>
+              <a:tr h="123444">
+                <a:tc>
+                  <a:txBody>
+                    <a:bodyPr/>
+                    <a:lstStyle/>
+                    <a:p>
+                      <a:pPr algn="l" indent="0" marL="0">
+                        <a:buNone/>
+                      </a:pPr>
+                      <a:endParaRPr lang="en-US" sz="500" dirty="0">
+                        <a:latin typeface="Calibri" charset="0"/>
+                        <a:ea typeface="Calibri" charset="0"/>
+                        <a:cs typeface="Calibri" charset="0"/>
+                      </a:endParaRPr>
+                    </a:p>
+                  </a:txBody>
+                  <a:tcPr marL="91440" marR="91440" marT="45720" marB="45720">
+                    <a:lnL w="2540" cap="flat" cmpd="sng" algn="ctr">
+                      <a:solidFill>
+                        <a:srgbClr val="EEEEEE"/>
+                      </a:solidFill>
+                      <a:prstDash val="solid"/>
+                      <a:round/>
+                      <a:headEnd type="none" w="med" len="med"/>
+                      <a:tailEnd type="none" w="med" len="med"/>
+                    </a:lnL>
+                    <a:lnR w="2540" cap="flat" cmpd="sng" algn="ctr">
+                      <a:solidFill>
+                        <a:srgbClr val="EEEEEE"/>
+                      </a:solidFill>
+                      <a:prstDash val="solid"/>
+                      <a:round/>
+                      <a:headEnd type="none" w="med" len="med"/>
+                      <a:tailEnd type="none" w="med" len="med"/>
+                    </a:lnR>
+                    <a:lnT w="2540" cap="flat" cmpd="sng" algn="ctr">
+                      <a:solidFill>
+                        <a:srgbClr val="EEEEEE"/>
+                      </a:solidFill>
+                      <a:prstDash val="solid"/>
+                      <a:round/>
+                      <a:headEnd type="none" w="med" len="med"/>
+                      <a:tailEnd type="none" w="med" len="med"/>
+                    </a:lnT>
+                    <a:lnB w="2540" cap="flat" cmpd="sng" algn="ctr">
+                      <a:solidFill>
+                        <a:srgbClr val="EEEEEE"/>
+                      </a:solidFill>
+                      <a:prstDash val="solid"/>
+                      <a:round/>
+                      <a:headEnd type="none" w="med" len="med"/>
+                      <a:tailEnd type="none" w="med" len="med"/>
+                    </a:lnB>
+                  </a:tcPr>
+                </a:tc>
+                <a:tc>
+                  <a:txBody>
+                    <a:bodyPr/>
+                    <a:lstStyle/>
+                    <a:p>
+                      <a:pPr algn="l" indent="0" marL="0">
+                        <a:buNone/>
+                      </a:pPr>
+                      <a:r>
+                        <a:rPr lang="en-US" sz="500" dirty="0">
+                          <a:solidFill>
+                            <a:srgbClr val="999999"/>
+                          </a:solidFill>
+                          <a:latin typeface="Calibri" pitchFamily="34" charset="0"/>
+                          <a:ea typeface="Calibri" pitchFamily="34" charset="-122"/>
+                          <a:cs typeface="Calibri" pitchFamily="34" charset="-120"/>
+                        </a:rPr>
+                        <a:t>Competencia</a:t>
+                      </a:r>
+                      <a:endParaRPr lang="en-US" sz="500" dirty="0">
+                        <a:latin typeface="Calibri" charset="0"/>
+                        <a:ea typeface="Calibri" charset="0"/>
+                        <a:cs typeface="Calibri" charset="0"/>
+                      </a:endParaRPr>
+                    </a:p>
+                  </a:txBody>
+                  <a:tcPr marL="91440" marR="91440" marT="45720" marB="45720">
+                    <a:lnL w="2540" cap="flat" cmpd="sng" algn="ctr">
+                      <a:solidFill>
+                        <a:srgbClr val="EEEEEE"/>
+                      </a:solidFill>
+                      <a:prstDash val="solid"/>
+                      <a:round/>
+                      <a:headEnd type="none" w="med" len="med"/>
+                      <a:tailEnd type="none" w="med" len="med"/>
+                    </a:lnL>
+                    <a:lnR w="2540" cap="flat" cmpd="sng" algn="ctr">
+                      <a:solidFill>
+                        <a:srgbClr val="EEEEEE"/>
+                      </a:solidFill>
+                      <a:prstDash val="solid"/>
+                      <a:round/>
+                      <a:headEnd type="none" w="med" len="med"/>
+                      <a:tailEnd type="none" w="med" len="med"/>
+                    </a:lnR>
+                    <a:lnT w="2540" cap="flat" cmpd="sng" algn="ctr">
+                      <a:solidFill>
+                        <a:srgbClr val="EEEEEE"/>
+                      </a:solidFill>
+                      <a:prstDash val="solid"/>
+                      <a:round/>
+                      <a:headEnd type="none" w="med" len="med"/>
+                      <a:tailEnd type="none" w="med" len="med"/>
+                    </a:lnT>
+                    <a:lnB w="2540" cap="flat" cmpd="sng" algn="ctr">
+                      <a:solidFill>
+                        <a:srgbClr val="EEEEEE"/>
+                      </a:solidFill>
+                      <a:prstDash val="solid"/>
+                      <a:round/>
+                      <a:headEnd type="none" w="med" len="med"/>
+                      <a:tailEnd type="none" w="med" len="med"/>
+                    </a:lnB>
+                  </a:tcPr>
+                </a:tc>
+                <a:tc>
+                  <a:txBody>
+                    <a:bodyPr/>
+                    <a:lstStyle/>
+                    <a:p>
+                      <a:pPr algn="ctr" indent="0" marL="0">
+                        <a:buNone/>
+                      </a:pPr>
+                      <a:endParaRPr lang="en-US" sz="500" dirty="0">
+                        <a:latin typeface="Calibri" charset="0"/>
+                        <a:ea typeface="Calibri" charset="0"/>
+                        <a:cs typeface="Calibri" charset="0"/>
+                      </a:endParaRPr>
+                    </a:p>
+                  </a:txBody>
+                  <a:tcPr marL="91440" marR="91440" marT="45720" marB="45720">
+                    <a:lnL w="2540" cap="flat" cmpd="sng" algn="ctr">
+                      <a:solidFill>
+                        <a:srgbClr val="EEEEEE"/>
+                      </a:solidFill>
+                      <a:prstDash val="solid"/>
+                      <a:round/>
+                      <a:headEnd type="none" w="med" len="med"/>
+                      <a:tailEnd type="none" w="med" len="med"/>
+                    </a:lnL>
+                    <a:lnR w="2540" cap="flat" cmpd="sng" algn="ctr">
+                      <a:solidFill>
+                        <a:srgbClr val="EEEEEE"/>
+                      </a:solidFill>
+                      <a:prstDash val="solid"/>
+                      <a:round/>
+                      <a:headEnd type="none" w="med" len="med"/>
+                      <a:tailEnd type="none" w="med" len="med"/>
+                    </a:lnR>
+                    <a:lnT w="2540" cap="flat" cmpd="sng" algn="ctr">
+                      <a:solidFill>
+                        <a:srgbClr val="EEEEEE"/>
+                      </a:solidFill>
+                      <a:prstDash val="solid"/>
+                      <a:round/>
+                      <a:headEnd type="none" w="med" len="med"/>
+                      <a:tailEnd type="none" w="med" len="med"/>
+                    </a:lnT>
+                    <a:lnB w="2540" cap="flat" cmpd="sng" algn="ctr">
+                      <a:solidFill>
+                        <a:srgbClr val="EEEEEE"/>
+                      </a:solidFill>
+                      <a:prstDash val="solid"/>
+                      <a:round/>
+                      <a:headEnd type="none" w="med" len="med"/>
+                      <a:tailEnd type="none" w="med" len="med"/>
+                    </a:lnB>
+                  </a:tcPr>
+                </a:tc>
+                <a:tc>
+                  <a:txBody>
+                    <a:bodyPr/>
+                    <a:lstStyle/>
+                    <a:p>
+                      <a:pPr algn="ctr" indent="0" marL="0">
+                        <a:buNone/>
+                      </a:pPr>
+                      <a:endParaRPr lang="en-US" sz="500" dirty="0">
+                        <a:latin typeface="Calibri" charset="0"/>
+                        <a:ea typeface="Calibri" charset="0"/>
+                        <a:cs typeface="Calibri" charset="0"/>
+                      </a:endParaRPr>
+                    </a:p>
+                  </a:txBody>
+                  <a:tcPr marL="91440" marR="91440" marT="45720" marB="45720">
+                    <a:lnL w="2540" cap="flat" cmpd="sng" algn="ctr">
+                      <a:solidFill>
+                        <a:srgbClr val="EEEEEE"/>
+                      </a:solidFill>
+                      <a:prstDash val="solid"/>
+                      <a:round/>
+                      <a:headEnd type="none" w="med" len="med"/>
+                      <a:tailEnd type="none" w="med" len="med"/>
+                    </a:lnL>
+                    <a:lnR w="2540" cap="flat" cmpd="sng" algn="ctr">
+                      <a:solidFill>
+                        <a:srgbClr val="EEEEEE"/>
+                      </a:solidFill>
+                      <a:prstDash val="solid"/>
+                      <a:round/>
+                      <a:headEnd type="none" w="med" len="med"/>
+                      <a:tailEnd type="none" w="med" len="med"/>
+                    </a:lnR>
+                    <a:lnT w="2540" cap="flat" cmpd="sng" algn="ctr">
+                      <a:solidFill>
+                        <a:srgbClr val="EEEEEE"/>
+                      </a:solidFill>
+                      <a:prstDash val="solid"/>
+                      <a:round/>
+                      <a:headEnd type="none" w="med" len="med"/>
+                      <a:tailEnd type="none" w="med" len="med"/>
+                    </a:lnT>
+                    <a:lnB w="2540" cap="flat" cmpd="sng" algn="ctr">
+                      <a:solidFill>
+                        <a:srgbClr val="EEEEEE"/>
+                      </a:solidFill>
+                      <a:prstDash val="solid"/>
+                      <a:round/>
+                      <a:headEnd type="none" w="med" len="med"/>
+                      <a:tailEnd type="none" w="med" len="med"/>
+                    </a:lnB>
+                  </a:tcPr>
+                </a:tc>
+                <a:tc>
+                  <a:txBody>
+                    <a:bodyPr/>
+                    <a:lstStyle/>
+                    <a:p>
+                      <a:pPr algn="ctr" indent="0" marL="0">
+                        <a:buNone/>
+                      </a:pPr>
+                      <a:endParaRPr lang="en-US" sz="500" dirty="0">
+                        <a:latin typeface="Calibri" charset="0"/>
+                        <a:ea typeface="Calibri" charset="0"/>
+                        <a:cs typeface="Calibri" charset="0"/>
+                      </a:endParaRPr>
+                    </a:p>
+                  </a:txBody>
+                  <a:tcPr marL="91440" marR="91440" marT="45720" marB="45720">
+                    <a:lnL w="2540" cap="flat" cmpd="sng" algn="ctr">
+                      <a:solidFill>
+                        <a:srgbClr val="EEEEEE"/>
+                      </a:solidFill>
+                      <a:prstDash val="solid"/>
+                      <a:round/>
+                      <a:headEnd type="none" w="med" len="med"/>
+                      <a:tailEnd type="none" w="med" len="med"/>
+                    </a:lnL>
+                    <a:lnR w="2540" cap="flat" cmpd="sng" algn="ctr">
+                      <a:solidFill>
+                        <a:srgbClr val="EEEEEE"/>
+                      </a:solidFill>
+                      <a:prstDash val="solid"/>
+                      <a:round/>
+                      <a:headEnd type="none" w="med" len="med"/>
+                      <a:tailEnd type="none" w="med" len="med"/>
+                    </a:lnR>
+                    <a:lnT w="2540" cap="flat" cmpd="sng" algn="ctr">
+                      <a:solidFill>
+                        <a:srgbClr val="EEEEEE"/>
+                      </a:solidFill>
+                      <a:prstDash val="solid"/>
+                      <a:round/>
+                      <a:headEnd type="none" w="med" len="med"/>
+                      <a:tailEnd type="none" w="med" len="med"/>
+                    </a:lnT>
+                    <a:lnB w="2540" cap="flat" cmpd="sng" algn="ctr">
+                      <a:solidFill>
+                        <a:srgbClr val="EEEEEE"/>
+                      </a:solidFill>
+                      <a:prstDash val="solid"/>
+                      <a:round/>
+                      <a:headEnd type="none" w="med" len="med"/>
+                      <a:tailEnd type="none" w="med" len="med"/>
+                    </a:lnB>
+                  </a:tcPr>
+                </a:tc>
+                <a:tc>
+                  <a:txBody>
+                    <a:bodyPr/>
+                    <a:lstStyle/>
+                    <a:p>
+                      <a:pPr algn="ctr" indent="0" marL="0">
+                        <a:buNone/>
+                      </a:pPr>
+                      <a:endParaRPr lang="en-US" sz="500" dirty="0">
+                        <a:latin typeface="Calibri" charset="0"/>
+                        <a:ea typeface="Calibri" charset="0"/>
+                        <a:cs typeface="Calibri" charset="0"/>
+                      </a:endParaRPr>
+                    </a:p>
+                  </a:txBody>
+                  <a:tcPr marL="91440" marR="91440" marT="45720" marB="45720">
+                    <a:lnL w="2540" cap="flat" cmpd="sng" algn="ctr">
+                      <a:solidFill>
+                        <a:srgbClr val="EEEEEE"/>
+                      </a:solidFill>
+                      <a:prstDash val="solid"/>
+                      <a:round/>
+                      <a:headEnd type="none" w="med" len="med"/>
+                      <a:tailEnd type="none" w="med" len="med"/>
+                    </a:lnL>
+                    <a:lnR w="2540" cap="flat" cmpd="sng" algn="ctr">
+                      <a:solidFill>
+                        <a:srgbClr val="EEEEEE"/>
+                      </a:solidFill>
+                      <a:prstDash val="solid"/>
+                      <a:round/>
+                      <a:headEnd type="none" w="med" len="med"/>
+                      <a:tailEnd type="none" w="med" len="med"/>
+                    </a:lnR>
+                    <a:lnT w="2540" cap="flat" cmpd="sng" algn="ctr">
+                      <a:solidFill>
+                        <a:srgbClr val="EEEEEE"/>
+                      </a:solidFill>
+                      <a:prstDash val="solid"/>
+                      <a:round/>
+                      <a:headEnd type="none" w="med" len="med"/>
+                      <a:tailEnd type="none" w="med" len="med"/>
+                    </a:lnT>
+                    <a:lnB w="2540" cap="flat" cmpd="sng" algn="ctr">
+                      <a:solidFill>
+                        <a:srgbClr val="EEEEEE"/>
+                      </a:solidFill>
+                      <a:prstDash val="solid"/>
+                      <a:round/>
+                      <a:headEnd type="none" w="med" len="med"/>
+                      <a:tailEnd type="none" w="med" len="med"/>
+                    </a:lnB>
+                  </a:tcPr>
+                </a:tc>
+                <a:tc>
+                  <a:txBody>
+                    <a:bodyPr/>
+                    <a:lstStyle/>
+                    <a:p>
+                      <a:pPr algn="ctr" indent="0" marL="0">
+                        <a:buNone/>
+                      </a:pPr>
+                      <a:endParaRPr lang="en-US" sz="500" dirty="0">
+                        <a:latin typeface="Calibri" charset="0"/>
+                        <a:ea typeface="Calibri" charset="0"/>
+                        <a:cs typeface="Calibri" charset="0"/>
+                      </a:endParaRPr>
+                    </a:p>
+                  </a:txBody>
+                  <a:tcPr marL="91440" marR="91440" marT="45720" marB="45720">
+                    <a:lnL w="2540" cap="flat" cmpd="sng" algn="ctr">
+                      <a:solidFill>
+                        <a:srgbClr val="EEEEEE"/>
+                      </a:solidFill>
+                      <a:prstDash val="solid"/>
+                      <a:round/>
+                      <a:headEnd type="none" w="med" len="med"/>
+                      <a:tailEnd type="none" w="med" len="med"/>
+                    </a:lnL>
+                    <a:lnR w="2540" cap="flat" cmpd="sng" algn="ctr">
+                      <a:solidFill>
+                        <a:srgbClr val="EEEEEE"/>
+                      </a:solidFill>
+                      <a:prstDash val="solid"/>
+                      <a:round/>
+                      <a:headEnd type="none" w="med" len="med"/>
+                      <a:tailEnd type="none" w="med" len="med"/>
+                    </a:lnR>
+                    <a:lnT w="2540" cap="flat" cmpd="sng" algn="ctr">
+                      <a:solidFill>
+                        <a:srgbClr val="EEEEEE"/>
+                      </a:solidFill>
+                      <a:prstDash val="solid"/>
+                      <a:round/>
+                      <a:headEnd type="none" w="med" len="med"/>
+                      <a:tailEnd type="none" w="med" len="med"/>
+                    </a:lnT>
+                    <a:lnB w="2540" cap="flat" cmpd="sng" algn="ctr">
+                      <a:solidFill>
+                        <a:srgbClr val="EEEEEE"/>
+                      </a:solidFill>
+                      <a:prstDash val="solid"/>
+                      <a:round/>
+                      <a:headEnd type="none" w="med" len="med"/>
+                      <a:tailEnd type="none" w="med" len="med"/>
+                    </a:lnB>
+                  </a:tcPr>
+                </a:tc>
+                <a:tc>
+                  <a:txBody>
+                    <a:bodyPr/>
+                    <a:lstStyle/>
+                    <a:p>
+                      <a:pPr algn="ctr" indent="0" marL="0">
+                        <a:buNone/>
+                      </a:pPr>
+                      <a:endParaRPr lang="en-US" sz="500" dirty="0">
+                        <a:latin typeface="Calibri" charset="0"/>
+                        <a:ea typeface="Calibri" charset="0"/>
+                        <a:cs typeface="Calibri" charset="0"/>
+                      </a:endParaRPr>
+                    </a:p>
+                  </a:txBody>
+                  <a:tcPr marL="91440" marR="91440" marT="45720" marB="45720">
+                    <a:lnL w="2540" cap="flat" cmpd="sng" algn="ctr">
+                      <a:solidFill>
+                        <a:srgbClr val="EEEEEE"/>
+                      </a:solidFill>
+                      <a:prstDash val="solid"/>
+                      <a:round/>
+                      <a:headEnd type="none" w="med" len="med"/>
+                      <a:tailEnd type="none" w="med" len="med"/>
+                    </a:lnL>
+                    <a:lnR w="2540" cap="flat" cmpd="sng" algn="ctr">
+                      <a:solidFill>
+                        <a:srgbClr val="EEEEEE"/>
+                      </a:solidFill>
+                      <a:prstDash val="solid"/>
+                      <a:round/>
+                      <a:headEnd type="none" w="med" len="med"/>
+                      <a:tailEnd type="none" w="med" len="med"/>
+                    </a:lnR>
+                    <a:lnT w="2540" cap="flat" cmpd="sng" algn="ctr">
+                      <a:solidFill>
+                        <a:srgbClr val="EEEEEE"/>
+                      </a:solidFill>
+                      <a:prstDash val="solid"/>
+                      <a:round/>
+                      <a:headEnd type="none" w="med" len="med"/>
+                      <a:tailEnd type="none" w="med" len="med"/>
+                    </a:lnT>
+                    <a:lnB w="2540" cap="flat" cmpd="sng" algn="ctr">
+                      <a:solidFill>
+                        <a:srgbClr val="EEEEEE"/>
+                      </a:solidFill>
+                      <a:prstDash val="solid"/>
+                      <a:round/>
+                      <a:headEnd type="none" w="med" len="med"/>
+                      <a:tailEnd type="none" w="med" len="med"/>
+                    </a:lnB>
+                  </a:tcPr>
+                </a:tc>
+                <a:tc>
+                  <a:txBody>
+                    <a:bodyPr/>
+                    <a:lstStyle/>
+                    <a:p>
+                      <a:pPr algn="ctr" indent="0" marL="0">
+                        <a:buNone/>
+                      </a:pPr>
+                      <a:endParaRPr lang="en-US" sz="500" dirty="0">
+                        <a:latin typeface="Calibri" charset="0"/>
+                        <a:ea typeface="Calibri" charset="0"/>
+                        <a:cs typeface="Calibri" charset="0"/>
+                      </a:endParaRPr>
+                    </a:p>
+                  </a:txBody>
+                  <a:tcPr marL="91440" marR="91440" marT="45720" marB="45720">
+                    <a:lnL w="2540" cap="flat" cmpd="sng" algn="ctr">
+                      <a:solidFill>
+                        <a:srgbClr val="EEEEEE"/>
+                      </a:solidFill>
+                      <a:prstDash val="solid"/>
+                      <a:round/>
+                      <a:headEnd type="none" w="med" len="med"/>
+                      <a:tailEnd type="none" w="med" len="med"/>
+                    </a:lnL>
+                    <a:lnR w="2540" cap="flat" cmpd="sng" algn="ctr">
+                      <a:solidFill>
+                        <a:srgbClr val="EEEEEE"/>
+                      </a:solidFill>
+                      <a:prstDash val="solid"/>
+                      <a:round/>
+                      <a:headEnd type="none" w="med" len="med"/>
+                      <a:tailEnd type="none" w="med" len="med"/>
+                    </a:lnR>
+                    <a:lnT w="2540" cap="flat" cmpd="sng" algn="ctr">
+                      <a:solidFill>
+                        <a:srgbClr val="EEEEEE"/>
+                      </a:solidFill>
+                      <a:prstDash val="solid"/>
+                      <a:round/>
+                      <a:headEnd type="none" w="med" len="med"/>
+                      <a:tailEnd type="none" w="med" len="med"/>
+                    </a:lnT>
+                    <a:lnB w="2540" cap="flat" cmpd="sng" algn="ctr">
+                      <a:solidFill>
+                        <a:srgbClr val="EEEEEE"/>
+                      </a:solidFill>
+                      <a:prstDash val="solid"/>
+                      <a:round/>
+                      <a:headEnd type="none" w="med" len="med"/>
+                      <a:tailEnd type="none" w="med" len="med"/>
+                    </a:lnB>
+                  </a:tcPr>
+                </a:tc>
+                <a:tc>
+                  <a:txBody>
+                    <a:bodyPr/>
+                    <a:lstStyle/>
+                    <a:p>
+                      <a:pPr algn="ctr" indent="0" marL="0">
+                        <a:buNone/>
+                      </a:pPr>
+                      <a:r>
+                        <a:rPr lang="en-US" sz="500" dirty="0">
+                          <a:solidFill>
+                            <a:srgbClr val="999999"/>
+                          </a:solidFill>
+                          <a:latin typeface="Calibri" pitchFamily="34" charset="0"/>
+                          <a:ea typeface="Calibri" pitchFamily="34" charset="-122"/>
+                          <a:cs typeface="Calibri" pitchFamily="34" charset="-120"/>
+                        </a:rPr>
+                        <a:t>0.36%</a:t>
+                      </a:r>
+                      <a:endParaRPr lang="en-US" sz="500" dirty="0">
+                        <a:latin typeface="Calibri" charset="0"/>
+                        <a:ea typeface="Calibri" charset="0"/>
+                        <a:cs typeface="Calibri" charset="0"/>
+                      </a:endParaRPr>
+                    </a:p>
+                  </a:txBody>
+                  <a:tcPr marL="91440" marR="91440" marT="45720" marB="45720">
+                    <a:lnL w="2540" cap="flat" cmpd="sng" algn="ctr">
+                      <a:solidFill>
+                        <a:srgbClr val="EEEEEE"/>
+                      </a:solidFill>
+                      <a:prstDash val="solid"/>
+                      <a:round/>
+                      <a:headEnd type="none" w="med" len="med"/>
+                      <a:tailEnd type="none" w="med" len="med"/>
+                    </a:lnL>
+                    <a:lnR w="2540" cap="flat" cmpd="sng" algn="ctr">
+                      <a:solidFill>
+                        <a:srgbClr val="EEEEEE"/>
+                      </a:solidFill>
+                      <a:prstDash val="solid"/>
+                      <a:round/>
+                      <a:headEnd type="none" w="med" len="med"/>
+                      <a:tailEnd type="none" w="med" len="med"/>
+                    </a:lnR>
+                    <a:lnT w="2540" cap="flat" cmpd="sng" algn="ctr">
+                      <a:solidFill>
+                        <a:srgbClr val="EEEEEE"/>
+                      </a:solidFill>
+                      <a:prstDash val="solid"/>
+                      <a:round/>
+                      <a:headEnd type="none" w="med" len="med"/>
+                      <a:tailEnd type="none" w="med" len="med"/>
+                    </a:lnT>
+                    <a:lnB w="2540" cap="flat" cmpd="sng" algn="ctr">
+                      <a:solidFill>
+                        <a:srgbClr val="EEEEEE"/>
+                      </a:solidFill>
+                      <a:prstDash val="solid"/>
+                      <a:round/>
+                      <a:headEnd type="none" w="med" len="med"/>
+                      <a:tailEnd type="none" w="med" len="med"/>
+                    </a:lnB>
+                  </a:tcPr>
+                </a:tc>
+                <a:tc>
+                  <a:txBody>
+                    <a:bodyPr/>
+                    <a:lstStyle/>
+                    <a:p>
+                      <a:pPr algn="ctr" indent="0" marL="0">
+                        <a:buNone/>
+                      </a:pPr>
+                      <a:r>
+                        <a:rPr lang="en-US" sz="500" dirty="0">
+                          <a:solidFill>
+                            <a:srgbClr val="999999"/>
+                          </a:solidFill>
+                          <a:latin typeface="Calibri" pitchFamily="34" charset="0"/>
+                          <a:ea typeface="Calibri" pitchFamily="34" charset="-122"/>
+                          <a:cs typeface="Calibri" pitchFamily="34" charset="-120"/>
+                        </a:rPr>
+                        <a:t>0.34%</a:t>
+                      </a:r>
+                      <a:endParaRPr lang="en-US" sz="500" dirty="0">
+                        <a:latin typeface="Calibri" charset="0"/>
+                        <a:ea typeface="Calibri" charset="0"/>
+                        <a:cs typeface="Calibri" charset="0"/>
+                      </a:endParaRPr>
+                    </a:p>
+                  </a:txBody>
+                  <a:tcPr marL="91440" marR="91440" marT="45720" marB="45720">
+                    <a:lnL w="2540" cap="flat" cmpd="sng" algn="ctr">
+                      <a:solidFill>
+                        <a:srgbClr val="EEEEEE"/>
+                      </a:solidFill>
+                      <a:prstDash val="solid"/>
+                      <a:round/>
+                      <a:headEnd type="none" w="med" len="med"/>
+                      <a:tailEnd type="none" w="med" len="med"/>
+                    </a:lnL>
+                    <a:lnR w="2540" cap="flat" cmpd="sng" algn="ctr">
+                      <a:solidFill>
+                        <a:srgbClr val="EEEEEE"/>
+                      </a:solidFill>
+                      <a:prstDash val="solid"/>
+                      <a:round/>
+                      <a:headEnd type="none" w="med" len="med"/>
+                      <a:tailEnd type="none" w="med" len="med"/>
+                    </a:lnR>
+                    <a:lnT w="2540" cap="flat" cmpd="sng" algn="ctr">
+                      <a:solidFill>
+                        <a:srgbClr val="EEEEEE"/>
+                      </a:solidFill>
+                      <a:prstDash val="solid"/>
+                      <a:round/>
+                      <a:headEnd type="none" w="med" len="med"/>
+                      <a:tailEnd type="none" w="med" len="med"/>
+                    </a:lnT>
+                    <a:lnB w="2540" cap="flat" cmpd="sng" algn="ctr">
+                      <a:solidFill>
+                        <a:srgbClr val="EEEEEE"/>
+                      </a:solidFill>
+                      <a:prstDash val="solid"/>
+                      <a:round/>
+                      <a:headEnd type="none" w="med" len="med"/>
+                      <a:tailEnd type="none" w="med" len="med"/>
+                    </a:lnB>
+                  </a:tcPr>
+                </a:tc>
+                <a:tc>
+                  <a:txBody>
+                    <a:bodyPr/>
+                    <a:lstStyle/>
+                    <a:p>
+                      <a:pPr algn="ctr" indent="0" marL="0">
+                        <a:buNone/>
+                      </a:pPr>
+                      <a:r>
+                        <a:rPr lang="en-US" sz="500" dirty="0">
+                          <a:solidFill>
+                            <a:srgbClr val="999999"/>
+                          </a:solidFill>
+                          <a:latin typeface="Calibri" pitchFamily="34" charset="0"/>
+                          <a:ea typeface="Calibri" pitchFamily="34" charset="-122"/>
+                          <a:cs typeface="Calibri" pitchFamily="34" charset="-120"/>
+                        </a:rPr>
+                        <a:t>0.34%</a:t>
+                      </a:r>
+                      <a:endParaRPr lang="en-US" sz="500" dirty="0">
+                        <a:latin typeface="Calibri" charset="0"/>
+                        <a:ea typeface="Calibri" charset="0"/>
+                        <a:cs typeface="Calibri" charset="0"/>
+                      </a:endParaRPr>
+                    </a:p>
+                  </a:txBody>
+                  <a:tcPr marL="91440" marR="91440" marT="45720" marB="45720">
+                    <a:lnL w="2540" cap="flat" cmpd="sng" algn="ctr">
+                      <a:solidFill>
+                        <a:srgbClr val="EEEEEE"/>
+                      </a:solidFill>
+                      <a:prstDash val="solid"/>
+                      <a:round/>
+                      <a:headEnd type="none" w="med" len="med"/>
+                      <a:tailEnd type="none" w="med" len="med"/>
+                    </a:lnL>
+                    <a:lnR w="2540" cap="flat" cmpd="sng" algn="ctr">
+                      <a:solidFill>
+                        <a:srgbClr val="EEEEEE"/>
+                      </a:solidFill>
+                      <a:prstDash val="solid"/>
+                      <a:round/>
+                      <a:headEnd type="none" w="med" len="med"/>
+                      <a:tailEnd type="none" w="med" len="med"/>
+                    </a:lnR>
+                    <a:lnT w="2540" cap="flat" cmpd="sng" algn="ctr">
+                      <a:solidFill>
+                        <a:srgbClr val="EEEEEE"/>
+                      </a:solidFill>
+                      <a:prstDash val="solid"/>
+                      <a:round/>
+                      <a:headEnd type="none" w="med" len="med"/>
+                      <a:tailEnd type="none" w="med" len="med"/>
+                    </a:lnT>
+                    <a:lnB w="2540" cap="flat" cmpd="sng" algn="ctr">
+                      <a:solidFill>
+                        <a:srgbClr val="EEEEEE"/>
+                      </a:solidFill>
+                      <a:prstDash val="solid"/>
+                      <a:round/>
+                      <a:headEnd type="none" w="med" len="med"/>
+                      <a:tailEnd type="none" w="med" len="med"/>
+                    </a:lnB>
+                  </a:tcPr>
+                </a:tc>
+                <a:tc>
+                  <a:txBody>
+                    <a:bodyPr/>
+                    <a:lstStyle/>
+                    <a:p>
+                      <a:pPr algn="ctr" indent="0" marL="0">
+                        <a:buNone/>
+                      </a:pPr>
+                      <a:r>
+                        <a:rPr lang="en-US" sz="500" dirty="0">
+                          <a:solidFill>
+                            <a:srgbClr val="999999"/>
+                          </a:solidFill>
+                          <a:latin typeface="Calibri" pitchFamily="34" charset="0"/>
+                          <a:ea typeface="Calibri" pitchFamily="34" charset="-122"/>
+                          <a:cs typeface="Calibri" pitchFamily="34" charset="-120"/>
+                        </a:rPr>
+                        <a:t>0.32%</a:t>
+                      </a:r>
+                      <a:endParaRPr lang="en-US" sz="500" dirty="0">
+                        <a:latin typeface="Calibri" charset="0"/>
+                        <a:ea typeface="Calibri" charset="0"/>
+                        <a:cs typeface="Calibri" charset="0"/>
+                      </a:endParaRPr>
+                    </a:p>
+                  </a:txBody>
+                  <a:tcPr marL="91440" marR="91440" marT="45720" marB="45720">
+                    <a:lnL w="2540" cap="flat" cmpd="sng" algn="ctr">
+                      <a:solidFill>
+                        <a:srgbClr val="EEEEEE"/>
+                      </a:solidFill>
+                      <a:prstDash val="solid"/>
+                      <a:round/>
+                      <a:headEnd type="none" w="med" len="med"/>
+                      <a:tailEnd type="none" w="med" len="med"/>
+                    </a:lnL>
+                    <a:lnR w="2540" cap="flat" cmpd="sng" algn="ctr">
+                      <a:solidFill>
+                        <a:srgbClr val="EEEEEE"/>
+                      </a:solidFill>
+                      <a:prstDash val="solid"/>
+                      <a:round/>
+                      <a:headEnd type="none" w="med" len="med"/>
+                      <a:tailEnd type="none" w="med" len="med"/>
+                    </a:lnR>
+                    <a:lnT w="2540" cap="flat" cmpd="sng" algn="ctr">
+                      <a:solidFill>
+                        <a:srgbClr val="EEEEEE"/>
+                      </a:solidFill>
+                      <a:prstDash val="solid"/>
+                      <a:round/>
+                      <a:headEnd type="none" w="med" len="med"/>
+                      <a:tailEnd type="none" w="med" len="med"/>
+                    </a:lnT>
+                    <a:lnB w="2540" cap="flat" cmpd="sng" algn="ctr">
+                      <a:solidFill>
+                        <a:srgbClr val="EEEEEE"/>
+                      </a:solidFill>
+                      <a:prstDash val="solid"/>
+                      <a:round/>
+                      <a:headEnd type="none" w="med" len="med"/>
+                      <a:tailEnd type="none" w="med" len="med"/>
+                    </a:lnB>
+                  </a:tcPr>
+                </a:tc>
+                <a:tc>
+                  <a:txBody>
+                    <a:bodyPr/>
+                    <a:lstStyle/>
+                    <a:p>
+                      <a:pPr algn="ctr" indent="0" marL="0">
+                        <a:buNone/>
+                      </a:pPr>
+                      <a:r>
+                        <a:rPr lang="en-US" sz="500" dirty="0">
+                          <a:solidFill>
+                            <a:srgbClr val="999999"/>
+                          </a:solidFill>
+                          <a:latin typeface="Calibri" pitchFamily="34" charset="0"/>
+                          <a:ea typeface="Calibri" pitchFamily="34" charset="-122"/>
+                          <a:cs typeface="Calibri" pitchFamily="34" charset="-120"/>
+                        </a:rPr>
+                        <a:t>0.32%</a:t>
+                      </a:r>
+                      <a:endParaRPr lang="en-US" sz="500" dirty="0">
+                        <a:latin typeface="Calibri" charset="0"/>
+                        <a:ea typeface="Calibri" charset="0"/>
+                        <a:cs typeface="Calibri" charset="0"/>
+                      </a:endParaRPr>
+                    </a:p>
+                  </a:txBody>
+                  <a:tcPr marL="91440" marR="91440" marT="45720" marB="45720">
+                    <a:lnL w="2540" cap="flat" cmpd="sng" algn="ctr">
+                      <a:solidFill>
+                        <a:srgbClr val="EEEEEE"/>
+                      </a:solidFill>
+                      <a:prstDash val="solid"/>
+                      <a:round/>
+                      <a:headEnd type="none" w="med" len="med"/>
+                      <a:tailEnd type="none" w="med" len="med"/>
+                    </a:lnL>
+                    <a:lnR w="2540" cap="flat" cmpd="sng" algn="ctr">
+                      <a:solidFill>
+                        <a:srgbClr val="EEEEEE"/>
+                      </a:solidFill>
+                      <a:prstDash val="solid"/>
+                      <a:round/>
+                      <a:headEnd type="none" w="med" len="med"/>
+                      <a:tailEnd type="none" w="med" len="med"/>
+                    </a:lnR>
+                    <a:lnT w="2540" cap="flat" cmpd="sng" algn="ctr">
+                      <a:solidFill>
+                        <a:srgbClr val="EEEEEE"/>
+                      </a:solidFill>
+                      <a:prstDash val="solid"/>
+                      <a:round/>
+                      <a:headEnd type="none" w="med" len="med"/>
+                      <a:tailEnd type="none" w="med" len="med"/>
+                    </a:lnT>
+                    <a:lnB w="2540" cap="flat" cmpd="sng" algn="ctr">
+                      <a:solidFill>
+                        <a:srgbClr val="EEEEEE"/>
+                      </a:solidFill>
+                      <a:prstDash val="solid"/>
+                      <a:round/>
+                      <a:headEnd type="none" w="med" len="med"/>
+                      <a:tailEnd type="none" w="med" len="med"/>
+                    </a:lnB>
+                  </a:tcPr>
+                </a:tc>
+                <a:tc>
+                  <a:txBody>
+                    <a:bodyPr/>
+                    <a:lstStyle/>
+                    <a:p>
+                      <a:pPr algn="ctr" indent="0" marL="0">
+                        <a:buNone/>
+                      </a:pPr>
+                      <a:r>
+                        <a:rPr lang="en-US" sz="500" b="1" dirty="0">
+                          <a:solidFill>
+                            <a:srgbClr val="999999"/>
+                          </a:solidFill>
+                          <a:latin typeface="Calibri" pitchFamily="34" charset="0"/>
+                          <a:ea typeface="Calibri" pitchFamily="34" charset="-122"/>
+                          <a:cs typeface="Calibri" pitchFamily="34" charset="-120"/>
+                        </a:rPr>
+                        <a:t>4.07%</a:t>
+                      </a:r>
+                      <a:endParaRPr lang="en-US" sz="500" dirty="0">
+                        <a:latin typeface="Calibri" charset="0"/>
+                        <a:ea typeface="Calibri" charset="0"/>
+                        <a:cs typeface="Calibri" charset="0"/>
+                      </a:endParaRPr>
+                    </a:p>
+                  </a:txBody>
+                  <a:tcPr marL="91440" marR="91440" marT="45720" marB="45720">
+                    <a:lnL w="2540" cap="flat" cmpd="sng" algn="ctr">
+                      <a:solidFill>
+                        <a:srgbClr val="EEEEEE"/>
+                      </a:solidFill>
+                      <a:prstDash val="solid"/>
+                      <a:round/>
+                      <a:headEnd type="none" w="med" len="med"/>
+                      <a:tailEnd type="none" w="med" len="med"/>
+                    </a:lnL>
+                    <a:lnR w="2540" cap="flat" cmpd="sng" algn="ctr">
+                      <a:solidFill>
+                        <a:srgbClr val="EEEEEE"/>
+                      </a:solidFill>
+                      <a:prstDash val="solid"/>
+                      <a:round/>
+                      <a:headEnd type="none" w="med" len="med"/>
+                      <a:tailEnd type="none" w="med" len="med"/>
+                    </a:lnR>
+                    <a:lnT w="2540" cap="flat" cmpd="sng" algn="ctr">
+                      <a:solidFill>
+                        <a:srgbClr val="EEEEEE"/>
+                      </a:solidFill>
+                      <a:prstDash val="solid"/>
+                      <a:round/>
+                      <a:headEnd type="none" w="med" len="med"/>
+                      <a:tailEnd type="none" w="med" len="med"/>
+                    </a:lnT>
+                    <a:lnB w="2540" cap="flat" cmpd="sng" algn="ctr">
+                      <a:solidFill>
+                        <a:srgbClr val="EEEEEE"/>
+                      </a:solidFill>
+                      <a:prstDash val="solid"/>
+                      <a:round/>
+                      <a:headEnd type="none" w="med" len="med"/>
+                      <a:tailEnd type="none" w="med" len="med"/>
+                    </a:lnB>
+                  </a:tcPr>
+                </a:tc>
+              </a:tr>
+              <a:tr h="123444">
+                <a:tc>
+                  <a:txBody>
+                    <a:bodyPr/>
+                    <a:lstStyle/>
+                    <a:p>
+                      <a:pPr algn="l" indent="0" marL="0">
+                        <a:buNone/>
+                      </a:pPr>
+                      <a:endParaRPr lang="en-US" sz="500" dirty="0">
+                        <a:latin typeface="Calibri" charset="0"/>
+                        <a:ea typeface="Calibri" charset="0"/>
+                        <a:cs typeface="Calibri" charset="0"/>
+                      </a:endParaRPr>
+                    </a:p>
+                  </a:txBody>
+                  <a:tcPr marL="91440" marR="91440" marT="45720" marB="45720">
+                    <a:lnL w="2540" cap="flat" cmpd="sng" algn="ctr">
+                      <a:solidFill>
+                        <a:srgbClr val="EEEEEE"/>
+                      </a:solidFill>
+                      <a:prstDash val="solid"/>
+                      <a:round/>
+                      <a:headEnd type="none" w="med" len="med"/>
+                      <a:tailEnd type="none" w="med" len="med"/>
+                    </a:lnL>
+                    <a:lnR w="2540" cap="flat" cmpd="sng" algn="ctr">
+                      <a:solidFill>
+                        <a:srgbClr val="EEEEEE"/>
+                      </a:solidFill>
+                      <a:prstDash val="solid"/>
+                      <a:round/>
+                      <a:headEnd type="none" w="med" len="med"/>
+                      <a:tailEnd type="none" w="med" len="med"/>
+                    </a:lnR>
+                    <a:lnT w="2540" cap="flat" cmpd="sng" algn="ctr">
+                      <a:solidFill>
+                        <a:srgbClr val="EEEEEE"/>
+                      </a:solidFill>
+                      <a:prstDash val="solid"/>
+                      <a:round/>
+                      <a:headEnd type="none" w="med" len="med"/>
+                      <a:tailEnd type="none" w="med" len="med"/>
+                    </a:lnT>
+                    <a:lnB w="2540" cap="flat" cmpd="sng" algn="ctr">
+                      <a:solidFill>
+                        <a:srgbClr val="EEEEEE"/>
+                      </a:solidFill>
+                      <a:prstDash val="solid"/>
+                      <a:round/>
+                      <a:headEnd type="none" w="med" len="med"/>
+                      <a:tailEnd type="none" w="med" len="med"/>
+                    </a:lnB>
+                  </a:tcPr>
+                </a:tc>
+                <a:tc>
+                  <a:txBody>
+                    <a:bodyPr/>
+                    <a:lstStyle/>
+                    <a:p>
+                      <a:pPr algn="l" indent="0" marL="0">
+                        <a:buNone/>
+                      </a:pPr>
+                      <a:r>
+                        <a:rPr lang="en-US" sz="400" dirty="0">
+                          <a:solidFill>
+                            <a:srgbClr val="000000"/>
+                          </a:solidFill>
+                          <a:latin typeface="Calibri" pitchFamily="34" charset="0"/>
+                          <a:ea typeface="Calibri" pitchFamily="34" charset="-122"/>
+                          <a:cs typeface="Calibri" pitchFamily="34" charset="-120"/>
+                        </a:rPr>
+                        <a:t>FIP LIQUIDEZ DISPONIBLE I</a:t>
+                      </a:r>
+                      <a:endParaRPr lang="en-US" sz="400" dirty="0">
+                        <a:latin typeface="Calibri" charset="0"/>
+                        <a:ea typeface="Calibri" charset="0"/>
+                        <a:cs typeface="Calibri" charset="0"/>
+                      </a:endParaRPr>
+                    </a:p>
+                  </a:txBody>
+                  <a:tcPr marL="91440" marR="91440" marT="45720" marB="45720">
+                    <a:lnL w="2540" cap="flat" cmpd="sng" algn="ctr">
+                      <a:solidFill>
+                        <a:srgbClr val="EEEEEE"/>
+                      </a:solidFill>
+                      <a:prstDash val="solid"/>
+                      <a:round/>
+                      <a:headEnd type="none" w="med" len="med"/>
+                      <a:tailEnd type="none" w="med" len="med"/>
+                    </a:lnL>
+                    <a:lnR w="2540" cap="flat" cmpd="sng" algn="ctr">
+                      <a:solidFill>
+                        <a:srgbClr val="EEEEEE"/>
+                      </a:solidFill>
+                      <a:prstDash val="solid"/>
+                      <a:round/>
+                      <a:headEnd type="none" w="med" len="med"/>
+                      <a:tailEnd type="none" w="med" len="med"/>
+                    </a:lnR>
+                    <a:lnT w="2540" cap="flat" cmpd="sng" algn="ctr">
+                      <a:solidFill>
+                        <a:srgbClr val="EEEEEE"/>
+                      </a:solidFill>
+                      <a:prstDash val="solid"/>
+                      <a:round/>
+                      <a:headEnd type="none" w="med" len="med"/>
+                      <a:tailEnd type="none" w="med" len="med"/>
+                    </a:lnT>
+                    <a:lnB w="2540" cap="flat" cmpd="sng" algn="ctr">
+                      <a:solidFill>
+                        <a:srgbClr val="EEEEEE"/>
+                      </a:solidFill>
+                      <a:prstDash val="solid"/>
+                      <a:round/>
+                      <a:headEnd type="none" w="med" len="med"/>
+                      <a:tailEnd type="none" w="med" len="med"/>
+                    </a:lnB>
+                  </a:tcPr>
+                </a:tc>
+                <a:tc>
+                  <a:txBody>
+                    <a:bodyPr/>
+                    <a:lstStyle/>
+                    <a:p>
+                      <a:pPr algn="ctr" indent="0" marL="0">
+                        <a:buNone/>
+                      </a:pPr>
+                      <a:endParaRPr lang="en-US" sz="500" dirty="0">
+                        <a:latin typeface="Calibri" charset="0"/>
+                        <a:ea typeface="Calibri" charset="0"/>
+                        <a:cs typeface="Calibri" charset="0"/>
+                      </a:endParaRPr>
+                    </a:p>
+                  </a:txBody>
+                  <a:tcPr marL="91440" marR="91440" marT="45720" marB="45720">
+                    <a:lnL w="2540" cap="flat" cmpd="sng" algn="ctr">
+                      <a:solidFill>
+                        <a:srgbClr val="EEEEEE"/>
+                      </a:solidFill>
+                      <a:prstDash val="solid"/>
+                      <a:round/>
+                      <a:headEnd type="none" w="med" len="med"/>
+                      <a:tailEnd type="none" w="med" len="med"/>
+                    </a:lnL>
+                    <a:lnR w="2540" cap="flat" cmpd="sng" algn="ctr">
+                      <a:solidFill>
+                        <a:srgbClr val="EEEEEE"/>
+                      </a:solidFill>
+                      <a:prstDash val="solid"/>
+                      <a:round/>
+                      <a:headEnd type="none" w="med" len="med"/>
+                      <a:tailEnd type="none" w="med" len="med"/>
+                    </a:lnR>
+                    <a:lnT w="2540" cap="flat" cmpd="sng" algn="ctr">
+                      <a:solidFill>
+                        <a:srgbClr val="EEEEEE"/>
+                      </a:solidFill>
+                      <a:prstDash val="solid"/>
+                      <a:round/>
+                      <a:headEnd type="none" w="med" len="med"/>
+                      <a:tailEnd type="none" w="med" len="med"/>
+                    </a:lnT>
+                    <a:lnB w="2540" cap="flat" cmpd="sng" algn="ctr">
+                      <a:solidFill>
+                        <a:srgbClr val="EEEEEE"/>
+                      </a:solidFill>
+                      <a:prstDash val="solid"/>
+                      <a:round/>
+                      <a:headEnd type="none" w="med" len="med"/>
+                      <a:tailEnd type="none" w="med" len="med"/>
+                    </a:lnB>
+                  </a:tcPr>
+                </a:tc>
+                <a:tc>
+                  <a:txBody>
+                    <a:bodyPr/>
+                    <a:lstStyle/>
+                    <a:p>
+                      <a:pPr algn="ctr" indent="0" marL="0">
+                        <a:buNone/>
+                      </a:pPr>
+                      <a:endParaRPr lang="en-US" sz="500" dirty="0">
+                        <a:latin typeface="Calibri" charset="0"/>
+                        <a:ea typeface="Calibri" charset="0"/>
+                        <a:cs typeface="Calibri" charset="0"/>
+                      </a:endParaRPr>
+                    </a:p>
+                  </a:txBody>
+                  <a:tcPr marL="91440" marR="91440" marT="45720" marB="45720">
+                    <a:lnL w="2540" cap="flat" cmpd="sng" algn="ctr">
+                      <a:solidFill>
+                        <a:srgbClr val="EEEEEE"/>
+                      </a:solidFill>
+                      <a:prstDash val="solid"/>
+                      <a:round/>
+                      <a:headEnd type="none" w="med" len="med"/>
+                      <a:tailEnd type="none" w="med" len="med"/>
+                    </a:lnL>
+                    <a:lnR w="2540" cap="flat" cmpd="sng" algn="ctr">
+                      <a:solidFill>
+                        <a:srgbClr val="EEEEEE"/>
+                      </a:solidFill>
+                      <a:prstDash val="solid"/>
+                      <a:round/>
+                      <a:headEnd type="none" w="med" len="med"/>
+                      <a:tailEnd type="none" w="med" len="med"/>
+                    </a:lnR>
+                    <a:lnT w="2540" cap="flat" cmpd="sng" algn="ctr">
+                      <a:solidFill>
+                        <a:srgbClr val="EEEEEE"/>
+                      </a:solidFill>
+                      <a:prstDash val="solid"/>
+                      <a:round/>
+                      <a:headEnd type="none" w="med" len="med"/>
+                      <a:tailEnd type="none" w="med" len="med"/>
+                    </a:lnT>
+                    <a:lnB w="2540" cap="flat" cmpd="sng" algn="ctr">
+                      <a:solidFill>
+                        <a:srgbClr val="EEEEEE"/>
+                      </a:solidFill>
+                      <a:prstDash val="solid"/>
+                      <a:round/>
+                      <a:headEnd type="none" w="med" len="med"/>
+                      <a:tailEnd type="none" w="med" len="med"/>
+                    </a:lnB>
+                  </a:tcPr>
+                </a:tc>
+                <a:tc>
+                  <a:txBody>
+                    <a:bodyPr/>
+                    <a:lstStyle/>
+                    <a:p>
+                      <a:pPr algn="ctr" indent="0" marL="0">
+                        <a:buNone/>
+                      </a:pPr>
+                      <a:endParaRPr lang="en-US" sz="500" dirty="0">
+                        <a:latin typeface="Calibri" charset="0"/>
+                        <a:ea typeface="Calibri" charset="0"/>
+                        <a:cs typeface="Calibri" charset="0"/>
+                      </a:endParaRPr>
+                    </a:p>
+                  </a:txBody>
+                  <a:tcPr marL="91440" marR="91440" marT="45720" marB="45720">
+                    <a:lnL w="2540" cap="flat" cmpd="sng" algn="ctr">
+                      <a:solidFill>
+                        <a:srgbClr val="EEEEEE"/>
+                      </a:solidFill>
+                      <a:prstDash val="solid"/>
+                      <a:round/>
+                      <a:headEnd type="none" w="med" len="med"/>
+                      <a:tailEnd type="none" w="med" len="med"/>
+                    </a:lnL>
+                    <a:lnR w="2540" cap="flat" cmpd="sng" algn="ctr">
+                      <a:solidFill>
+                        <a:srgbClr val="EEEEEE"/>
+                      </a:solidFill>
+                      <a:prstDash val="solid"/>
+                      <a:round/>
+                      <a:headEnd type="none" w="med" len="med"/>
+                      <a:tailEnd type="none" w="med" len="med"/>
+                    </a:lnR>
+                    <a:lnT w="2540" cap="flat" cmpd="sng" algn="ctr">
+                      <a:solidFill>
+                        <a:srgbClr val="EEEEEE"/>
+                      </a:solidFill>
+                      <a:prstDash val="solid"/>
+                      <a:round/>
+                      <a:headEnd type="none" w="med" len="med"/>
+                      <a:tailEnd type="none" w="med" len="med"/>
+                    </a:lnT>
+                    <a:lnB w="2540" cap="flat" cmpd="sng" algn="ctr">
+                      <a:solidFill>
+                        <a:srgbClr val="EEEEEE"/>
+                      </a:solidFill>
+                      <a:prstDash val="solid"/>
+                      <a:round/>
+                      <a:headEnd type="none" w="med" len="med"/>
+                      <a:tailEnd type="none" w="med" len="med"/>
+                    </a:lnB>
+                  </a:tcPr>
+                </a:tc>
+                <a:tc>
+                  <a:txBody>
+                    <a:bodyPr/>
+                    <a:lstStyle/>
+                    <a:p>
+                      <a:pPr algn="ctr" indent="0" marL="0">
+                        <a:buNone/>
+                      </a:pPr>
+                      <a:endParaRPr lang="en-US" sz="500" dirty="0">
+                        <a:latin typeface="Calibri" charset="0"/>
+                        <a:ea typeface="Calibri" charset="0"/>
+                        <a:cs typeface="Calibri" charset="0"/>
+                      </a:endParaRPr>
+                    </a:p>
+                  </a:txBody>
+                  <a:tcPr marL="91440" marR="91440" marT="45720" marB="45720">
+                    <a:lnL w="2540" cap="flat" cmpd="sng" algn="ctr">
+                      <a:solidFill>
+                        <a:srgbClr val="EEEEEE"/>
+                      </a:solidFill>
+                      <a:prstDash val="solid"/>
+                      <a:round/>
+                      <a:headEnd type="none" w="med" len="med"/>
+                      <a:tailEnd type="none" w="med" len="med"/>
+                    </a:lnL>
+                    <a:lnR w="2540" cap="flat" cmpd="sng" algn="ctr">
+                      <a:solidFill>
+                        <a:srgbClr val="EEEEEE"/>
+                      </a:solidFill>
+                      <a:prstDash val="solid"/>
+                      <a:round/>
+                      <a:headEnd type="none" w="med" len="med"/>
+                      <a:tailEnd type="none" w="med" len="med"/>
+                    </a:lnR>
+                    <a:lnT w="2540" cap="flat" cmpd="sng" algn="ctr">
+                      <a:solidFill>
+                        <a:srgbClr val="EEEEEE"/>
+                      </a:solidFill>
+                      <a:prstDash val="solid"/>
+                      <a:round/>
+                      <a:headEnd type="none" w="med" len="med"/>
+                      <a:tailEnd type="none" w="med" len="med"/>
+                    </a:lnT>
+                    <a:lnB w="2540" cap="flat" cmpd="sng" algn="ctr">
+                      <a:solidFill>
+                        <a:srgbClr val="EEEEEE"/>
+                      </a:solidFill>
+                      <a:prstDash val="solid"/>
+                      <a:round/>
+                      <a:headEnd type="none" w="med" len="med"/>
+                      <a:tailEnd type="none" w="med" len="med"/>
+                    </a:lnB>
+                  </a:tcPr>
+                </a:tc>
+                <a:tc>
+                  <a:txBody>
+                    <a:bodyPr/>
+                    <a:lstStyle/>
+                    <a:p>
+                      <a:pPr algn="ctr" indent="0" marL="0">
+                        <a:buNone/>
+                      </a:pPr>
+                      <a:endParaRPr lang="en-US" sz="500" dirty="0">
+                        <a:latin typeface="Calibri" charset="0"/>
+                        <a:ea typeface="Calibri" charset="0"/>
+                        <a:cs typeface="Calibri" charset="0"/>
+                      </a:endParaRPr>
+                    </a:p>
+                  </a:txBody>
+                  <a:tcPr marL="91440" marR="91440" marT="45720" marB="45720">
+                    <a:lnL w="2540" cap="flat" cmpd="sng" algn="ctr">
+                      <a:solidFill>
+                        <a:srgbClr val="EEEEEE"/>
+                      </a:solidFill>
+                      <a:prstDash val="solid"/>
+                      <a:round/>
+                      <a:headEnd type="none" w="med" len="med"/>
+                      <a:tailEnd type="none" w="med" len="med"/>
+                    </a:lnL>
+                    <a:lnR w="2540" cap="flat" cmpd="sng" algn="ctr">
+                      <a:solidFill>
+                        <a:srgbClr val="EEEEEE"/>
+                      </a:solidFill>
+                      <a:prstDash val="solid"/>
+                      <a:round/>
+                      <a:headEnd type="none" w="med" len="med"/>
+                      <a:tailEnd type="none" w="med" len="med"/>
+                    </a:lnR>
+                    <a:lnT w="2540" cap="flat" cmpd="sng" algn="ctr">
+                      <a:solidFill>
+                        <a:srgbClr val="EEEEEE"/>
+                      </a:solidFill>
+                      <a:prstDash val="solid"/>
+                      <a:round/>
+                      <a:headEnd type="none" w="med" len="med"/>
+                      <a:tailEnd type="none" w="med" len="med"/>
+                    </a:lnT>
+                    <a:lnB w="2540" cap="flat" cmpd="sng" algn="ctr">
+                      <a:solidFill>
+                        <a:srgbClr val="EEEEEE"/>
+                      </a:solidFill>
+                      <a:prstDash val="solid"/>
+                      <a:round/>
+                      <a:headEnd type="none" w="med" len="med"/>
+                      <a:tailEnd type="none" w="med" len="med"/>
+                    </a:lnB>
+                  </a:tcPr>
+                </a:tc>
+                <a:tc>
+                  <a:txBody>
+                    <a:bodyPr/>
+                    <a:lstStyle/>
+                    <a:p>
+                      <a:pPr algn="ctr" indent="0" marL="0">
+                        <a:buNone/>
+                      </a:pPr>
+                      <a:endParaRPr lang="en-US" sz="500" dirty="0">
+                        <a:latin typeface="Calibri" charset="0"/>
+                        <a:ea typeface="Calibri" charset="0"/>
+                        <a:cs typeface="Calibri" charset="0"/>
+                      </a:endParaRPr>
+                    </a:p>
+                  </a:txBody>
+                  <a:tcPr marL="91440" marR="91440" marT="45720" marB="45720">
+                    <a:lnL w="2540" cap="flat" cmpd="sng" algn="ctr">
+                      <a:solidFill>
+                        <a:srgbClr val="EEEEEE"/>
+                      </a:solidFill>
+                      <a:prstDash val="solid"/>
+                      <a:round/>
+                      <a:headEnd type="none" w="med" len="med"/>
+                      <a:tailEnd type="none" w="med" len="med"/>
+                    </a:lnL>
+                    <a:lnR w="2540" cap="flat" cmpd="sng" algn="ctr">
+                      <a:solidFill>
+                        <a:srgbClr val="EEEEEE"/>
+                      </a:solidFill>
+                      <a:prstDash val="solid"/>
+                      <a:round/>
+                      <a:headEnd type="none" w="med" len="med"/>
+                      <a:tailEnd type="none" w="med" len="med"/>
+                    </a:lnR>
+                    <a:lnT w="2540" cap="flat" cmpd="sng" algn="ctr">
+                      <a:solidFill>
+                        <a:srgbClr val="EEEEEE"/>
+                      </a:solidFill>
+                      <a:prstDash val="solid"/>
+                      <a:round/>
+                      <a:headEnd type="none" w="med" len="med"/>
+                      <a:tailEnd type="none" w="med" len="med"/>
+                    </a:lnT>
+                    <a:lnB w="2540" cap="flat" cmpd="sng" algn="ctr">
+                      <a:solidFill>
+                        <a:srgbClr val="EEEEEE"/>
+                      </a:solidFill>
+                      <a:prstDash val="solid"/>
+                      <a:round/>
+                      <a:headEnd type="none" w="med" len="med"/>
+                      <a:tailEnd type="none" w="med" len="med"/>
+                    </a:lnB>
+                  </a:tcPr>
+                </a:tc>
+                <a:tc>
+                  <a:txBody>
+                    <a:bodyPr/>
+                    <a:lstStyle/>
+                    <a:p>
+                      <a:pPr algn="ctr" indent="0" marL="0">
+                        <a:buNone/>
+                      </a:pPr>
+                      <a:endParaRPr lang="en-US" sz="500" dirty="0">
+                        <a:latin typeface="Calibri" charset="0"/>
+                        <a:ea typeface="Calibri" charset="0"/>
+                        <a:cs typeface="Calibri" charset="0"/>
+                      </a:endParaRPr>
+                    </a:p>
+                  </a:txBody>
+                  <a:tcPr marL="91440" marR="91440" marT="45720" marB="45720">
+                    <a:lnL w="2540" cap="flat" cmpd="sng" algn="ctr">
+                      <a:solidFill>
+                        <a:srgbClr val="EEEEEE"/>
+                      </a:solidFill>
+                      <a:prstDash val="solid"/>
+                      <a:round/>
+                      <a:headEnd type="none" w="med" len="med"/>
+                      <a:tailEnd type="none" w="med" len="med"/>
+                    </a:lnL>
+                    <a:lnR w="2540" cap="flat" cmpd="sng" algn="ctr">
+                      <a:solidFill>
+                        <a:srgbClr val="EEEEEE"/>
+                      </a:solidFill>
+                      <a:prstDash val="solid"/>
+                      <a:round/>
+                      <a:headEnd type="none" w="med" len="med"/>
+                      <a:tailEnd type="none" w="med" len="med"/>
+                    </a:lnR>
+                    <a:lnT w="2540" cap="flat" cmpd="sng" algn="ctr">
+                      <a:solidFill>
+                        <a:srgbClr val="EEEEEE"/>
+                      </a:solidFill>
+                      <a:prstDash val="solid"/>
+                      <a:round/>
+                      <a:headEnd type="none" w="med" len="med"/>
+                      <a:tailEnd type="none" w="med" len="med"/>
+                    </a:lnT>
+                    <a:lnB w="2540" cap="flat" cmpd="sng" algn="ctr">
+                      <a:solidFill>
+                        <a:srgbClr val="EEEEEE"/>
+                      </a:solidFill>
+                      <a:prstDash val="solid"/>
+                      <a:round/>
+                      <a:headEnd type="none" w="med" len="med"/>
+                      <a:tailEnd type="none" w="med" len="med"/>
+                    </a:lnB>
+                  </a:tcPr>
+                </a:tc>
+                <a:tc>
+                  <a:txBody>
+                    <a:bodyPr/>
+                    <a:lstStyle/>
+                    <a:p>
+                      <a:pPr algn="ctr" indent="0" marL="0">
+                        <a:buNone/>
+                      </a:pPr>
+                      <a:r>
+                        <a:rPr lang="en-US" sz="500" dirty="0">
+                          <a:solidFill>
+                            <a:srgbClr val="000000"/>
+                          </a:solidFill>
+                          <a:latin typeface="Calibri" pitchFamily="34" charset="0"/>
+                          <a:ea typeface="Calibri" pitchFamily="34" charset="-122"/>
+                          <a:cs typeface="Calibri" pitchFamily="34" charset="-120"/>
+                        </a:rPr>
+                        <a:t>0.18%</a:t>
+                      </a:r>
+                      <a:endParaRPr lang="en-US" sz="500" dirty="0">
+                        <a:latin typeface="Calibri" charset="0"/>
+                        <a:ea typeface="Calibri" charset="0"/>
+                        <a:cs typeface="Calibri" charset="0"/>
+                      </a:endParaRPr>
+                    </a:p>
+                  </a:txBody>
+                  <a:tcPr marL="91440" marR="91440" marT="45720" marB="45720">
+                    <a:lnL w="2540" cap="flat" cmpd="sng" algn="ctr">
+                      <a:solidFill>
+                        <a:srgbClr val="EEEEEE"/>
+                      </a:solidFill>
+                      <a:prstDash val="solid"/>
+                      <a:round/>
+                      <a:headEnd type="none" w="med" len="med"/>
+                      <a:tailEnd type="none" w="med" len="med"/>
+                    </a:lnL>
+                    <a:lnR w="2540" cap="flat" cmpd="sng" algn="ctr">
+                      <a:solidFill>
+                        <a:srgbClr val="EEEEEE"/>
+                      </a:solidFill>
+                      <a:prstDash val="solid"/>
+                      <a:round/>
+                      <a:headEnd type="none" w="med" len="med"/>
+                      <a:tailEnd type="none" w="med" len="med"/>
+                    </a:lnR>
+                    <a:lnT w="2540" cap="flat" cmpd="sng" algn="ctr">
+                      <a:solidFill>
+                        <a:srgbClr val="EEEEEE"/>
+                      </a:solidFill>
+                      <a:prstDash val="solid"/>
+                      <a:round/>
+                      <a:headEnd type="none" w="med" len="med"/>
+                      <a:tailEnd type="none" w="med" len="med"/>
+                    </a:lnT>
+                    <a:lnB w="2540" cap="flat" cmpd="sng" algn="ctr">
+                      <a:solidFill>
+                        <a:srgbClr val="EEEEEE"/>
+                      </a:solidFill>
+                      <a:prstDash val="solid"/>
+                      <a:round/>
+                      <a:headEnd type="none" w="med" len="med"/>
+                      <a:tailEnd type="none" w="med" len="med"/>
+                    </a:lnB>
+                  </a:tcPr>
+                </a:tc>
+                <a:tc>
+                  <a:txBody>
+                    <a:bodyPr/>
+                    <a:lstStyle/>
+                    <a:p>
+                      <a:pPr algn="ctr" indent="0" marL="0">
+                        <a:buNone/>
+                      </a:pPr>
+                      <a:r>
+                        <a:rPr lang="en-US" sz="500" dirty="0">
+                          <a:solidFill>
+                            <a:srgbClr val="000000"/>
+                          </a:solidFill>
+                          <a:latin typeface="Calibri" pitchFamily="34" charset="0"/>
+                          <a:ea typeface="Calibri" pitchFamily="34" charset="-122"/>
+                          <a:cs typeface="Calibri" pitchFamily="34" charset="-120"/>
+                        </a:rPr>
+                        <a:t>0.56%</a:t>
+                      </a:r>
+                      <a:endParaRPr lang="en-US" sz="500" dirty="0">
+                        <a:latin typeface="Calibri" charset="0"/>
+                        <a:ea typeface="Calibri" charset="0"/>
+                        <a:cs typeface="Calibri" charset="0"/>
+                      </a:endParaRPr>
+                    </a:p>
+                  </a:txBody>
+                  <a:tcPr marL="91440" marR="91440" marT="45720" marB="45720">
+                    <a:lnL w="2540" cap="flat" cmpd="sng" algn="ctr">
+                      <a:solidFill>
+                        <a:srgbClr val="EEEEEE"/>
+                      </a:solidFill>
+                      <a:prstDash val="solid"/>
+                      <a:round/>
+                      <a:headEnd type="none" w="med" len="med"/>
+                      <a:tailEnd type="none" w="med" len="med"/>
+                    </a:lnL>
+                    <a:lnR w="2540" cap="flat" cmpd="sng" algn="ctr">
+                      <a:solidFill>
+                        <a:srgbClr val="EEEEEE"/>
+                      </a:solidFill>
+                      <a:prstDash val="solid"/>
+                      <a:round/>
+                      <a:headEnd type="none" w="med" len="med"/>
+                      <a:tailEnd type="none" w="med" len="med"/>
+                    </a:lnR>
+                    <a:lnT w="2540" cap="flat" cmpd="sng" algn="ctr">
+                      <a:solidFill>
+                        <a:srgbClr val="EEEEEE"/>
+                      </a:solidFill>
+                      <a:prstDash val="solid"/>
+                      <a:round/>
+                      <a:headEnd type="none" w="med" len="med"/>
+                      <a:tailEnd type="none" w="med" len="med"/>
+                    </a:lnT>
+                    <a:lnB w="2540" cap="flat" cmpd="sng" algn="ctr">
+                      <a:solidFill>
+                        <a:srgbClr val="EEEEEE"/>
+                      </a:solidFill>
+                      <a:prstDash val="solid"/>
+                      <a:round/>
+                      <a:headEnd type="none" w="med" len="med"/>
+                      <a:tailEnd type="none" w="med" len="med"/>
+                    </a:lnB>
+                  </a:tcPr>
+                </a:tc>
+                <a:tc>
+                  <a:txBody>
+                    <a:bodyPr/>
+                    <a:lstStyle/>
+                    <a:p>
+                      <a:pPr algn="ctr" indent="0" marL="0">
+                        <a:buNone/>
+                      </a:pPr>
+                      <a:r>
+                        <a:rPr lang="en-US" sz="500" dirty="0">
+                          <a:solidFill>
+                            <a:srgbClr val="000000"/>
+                          </a:solidFill>
+                          <a:latin typeface="Calibri" pitchFamily="34" charset="0"/>
+                          <a:ea typeface="Calibri" pitchFamily="34" charset="-122"/>
+                          <a:cs typeface="Calibri" pitchFamily="34" charset="-120"/>
+                        </a:rPr>
+                        <a:t>0.52%</a:t>
+                      </a:r>
+                      <a:endParaRPr lang="en-US" sz="500" dirty="0">
+                        <a:latin typeface="Calibri" charset="0"/>
+                        <a:ea typeface="Calibri" charset="0"/>
+                        <a:cs typeface="Calibri" charset="0"/>
+                      </a:endParaRPr>
+                    </a:p>
+                  </a:txBody>
+                  <a:tcPr marL="91440" marR="91440" marT="45720" marB="45720">
+                    <a:lnL w="2540" cap="flat" cmpd="sng" algn="ctr">
+                      <a:solidFill>
+                        <a:srgbClr val="EEEEEE"/>
+                      </a:solidFill>
+                      <a:prstDash val="solid"/>
+                      <a:round/>
+                      <a:headEnd type="none" w="med" len="med"/>
+                      <a:tailEnd type="none" w="med" len="med"/>
+                    </a:lnL>
+                    <a:lnR w="2540" cap="flat" cmpd="sng" algn="ctr">
+                      <a:solidFill>
+                        <a:srgbClr val="EEEEEE"/>
+                      </a:solidFill>
+                      <a:prstDash val="solid"/>
+                      <a:round/>
+                      <a:headEnd type="none" w="med" len="med"/>
+                      <a:tailEnd type="none" w="med" len="med"/>
+                    </a:lnR>
+                    <a:lnT w="2540" cap="flat" cmpd="sng" algn="ctr">
+                      <a:solidFill>
+                        <a:srgbClr val="EEEEEE"/>
+                      </a:solidFill>
+                      <a:prstDash val="solid"/>
+                      <a:round/>
+                      <a:headEnd type="none" w="med" len="med"/>
+                      <a:tailEnd type="none" w="med" len="med"/>
+                    </a:lnT>
+                    <a:lnB w="2540" cap="flat" cmpd="sng" algn="ctr">
+                      <a:solidFill>
+                        <a:srgbClr val="EEEEEE"/>
+                      </a:solidFill>
+                      <a:prstDash val="solid"/>
+                      <a:round/>
+                      <a:headEnd type="none" w="med" len="med"/>
+                      <a:tailEnd type="none" w="med" len="med"/>
+                    </a:lnB>
+                  </a:tcPr>
+                </a:tc>
+                <a:tc>
+                  <a:txBody>
+                    <a:bodyPr/>
+                    <a:lstStyle/>
+                    <a:p>
+                      <a:pPr algn="ctr" indent="0" marL="0">
+                        <a:buNone/>
+                      </a:pPr>
+                      <a:r>
+                        <a:rPr lang="en-US" sz="500" dirty="0">
+                          <a:solidFill>
+                            <a:srgbClr val="000000"/>
+                          </a:solidFill>
+                          <a:latin typeface="Calibri" pitchFamily="34" charset="0"/>
+                          <a:ea typeface="Calibri" pitchFamily="34" charset="-122"/>
+                          <a:cs typeface="Calibri" pitchFamily="34" charset="-120"/>
+                        </a:rPr>
+                        <a:t>0.53%</a:t>
+                      </a:r>
+                      <a:endParaRPr lang="en-US" sz="500" dirty="0">
+                        <a:latin typeface="Calibri" charset="0"/>
+                        <a:ea typeface="Calibri" charset="0"/>
+                        <a:cs typeface="Calibri" charset="0"/>
+                      </a:endParaRPr>
+                    </a:p>
+                  </a:txBody>
+                  <a:tcPr marL="91440" marR="91440" marT="45720" marB="45720">
+                    <a:lnL w="2540" cap="flat" cmpd="sng" algn="ctr">
+                      <a:solidFill>
+                        <a:srgbClr val="EEEEEE"/>
+                      </a:solidFill>
+                      <a:prstDash val="solid"/>
+                      <a:round/>
+                      <a:headEnd type="none" w="med" len="med"/>
+                      <a:tailEnd type="none" w="med" len="med"/>
+                    </a:lnL>
+                    <a:lnR w="2540" cap="flat" cmpd="sng" algn="ctr">
+                      <a:solidFill>
+                        <a:srgbClr val="EEEEEE"/>
+                      </a:solidFill>
+                      <a:prstDash val="solid"/>
+                      <a:round/>
+                      <a:headEnd type="none" w="med" len="med"/>
+                      <a:tailEnd type="none" w="med" len="med"/>
+                    </a:lnR>
+                    <a:lnT w="2540" cap="flat" cmpd="sng" algn="ctr">
+                      <a:solidFill>
+                        <a:srgbClr val="EEEEEE"/>
+                      </a:solidFill>
+                      <a:prstDash val="solid"/>
+                      <a:round/>
+                      <a:headEnd type="none" w="med" len="med"/>
+                      <a:tailEnd type="none" w="med" len="med"/>
+                    </a:lnT>
+                    <a:lnB w="2540" cap="flat" cmpd="sng" algn="ctr">
+                      <a:solidFill>
+                        <a:srgbClr val="EEEEEE"/>
+                      </a:solidFill>
+                      <a:prstDash val="solid"/>
+                      <a:round/>
+                      <a:headEnd type="none" w="med" len="med"/>
+                      <a:tailEnd type="none" w="med" len="med"/>
+                    </a:lnB>
+                  </a:tcPr>
+                </a:tc>
+                <a:tc>
+                  <a:txBody>
+                    <a:bodyPr/>
+                    <a:lstStyle/>
+                    <a:p>
+                      <a:pPr algn="ctr" indent="0" marL="0">
+                        <a:buNone/>
+                      </a:pPr>
+                      <a:r>
+                        <a:rPr lang="en-US" sz="500" dirty="0">
+                          <a:solidFill>
+                            <a:srgbClr val="000000"/>
+                          </a:solidFill>
+                          <a:latin typeface="Calibri" pitchFamily="34" charset="0"/>
+                          <a:ea typeface="Calibri" pitchFamily="34" charset="-122"/>
+                          <a:cs typeface="Calibri" pitchFamily="34" charset="-120"/>
+                        </a:rPr>
+                        <a:t>0.51%</a:t>
+                      </a:r>
+                      <a:endParaRPr lang="en-US" sz="500" dirty="0">
+                        <a:latin typeface="Calibri" charset="0"/>
+                        <a:ea typeface="Calibri" charset="0"/>
+                        <a:cs typeface="Calibri" charset="0"/>
+                      </a:endParaRPr>
+                    </a:p>
+                  </a:txBody>
+                  <a:tcPr marL="91440" marR="91440" marT="45720" marB="45720">
+                    <a:lnL w="2540" cap="flat" cmpd="sng" algn="ctr">
+                      <a:solidFill>
+                        <a:srgbClr val="EEEEEE"/>
+                      </a:solidFill>
+                      <a:prstDash val="solid"/>
+                      <a:round/>
+                      <a:headEnd type="none" w="med" len="med"/>
+                      <a:tailEnd type="none" w="med" len="med"/>
+                    </a:lnL>
+                    <a:lnR w="2540" cap="flat" cmpd="sng" algn="ctr">
+                      <a:solidFill>
+                        <a:srgbClr val="EEEEEE"/>
+                      </a:solidFill>
+                      <a:prstDash val="solid"/>
+                      <a:round/>
+                      <a:headEnd type="none" w="med" len="med"/>
+                      <a:tailEnd type="none" w="med" len="med"/>
+                    </a:lnR>
+                    <a:lnT w="2540" cap="flat" cmpd="sng" algn="ctr">
+                      <a:solidFill>
+                        <a:srgbClr val="EEEEEE"/>
+                      </a:solidFill>
+                      <a:prstDash val="solid"/>
+                      <a:round/>
+                      <a:headEnd type="none" w="med" len="med"/>
+                      <a:tailEnd type="none" w="med" len="med"/>
+                    </a:lnT>
+                    <a:lnB w="2540" cap="flat" cmpd="sng" algn="ctr">
+                      <a:solidFill>
+                        <a:srgbClr val="EEEEEE"/>
+                      </a:solidFill>
+                      <a:prstDash val="solid"/>
+                      <a:round/>
+                      <a:headEnd type="none" w="med" len="med"/>
+                      <a:tailEnd type="none" w="med" len="med"/>
+                    </a:lnB>
+                  </a:tcPr>
+                </a:tc>
+                <a:tc>
+                  <a:txBody>
+                    <a:bodyPr/>
+                    <a:lstStyle/>
+                    <a:p>
+                      <a:pPr algn="ctr" indent="0" marL="0">
+                        <a:buNone/>
+                      </a:pPr>
+                      <a:r>
+                        <a:rPr lang="en-US" sz="500" b="1" dirty="0">
+                          <a:solidFill>
+                            <a:srgbClr val="000000"/>
+                          </a:solidFill>
+                          <a:latin typeface="Calibri" pitchFamily="34" charset="0"/>
+                          <a:ea typeface="Calibri" pitchFamily="34" charset="-122"/>
+                          <a:cs typeface="Calibri" pitchFamily="34" charset="-120"/>
+                        </a:rPr>
+                        <a:t>5.60%</a:t>
+                      </a:r>
+                      <a:endParaRPr lang="en-US" sz="500" dirty="0">
+                        <a:latin typeface="Calibri" charset="0"/>
+                        <a:ea typeface="Calibri" charset="0"/>
+                        <a:cs typeface="Calibri" charset="0"/>
+                      </a:endParaRPr>
+                    </a:p>
+                  </a:txBody>
+                  <a:tcPr marL="91440" marR="91440" marT="45720" marB="45720">
+                    <a:lnL w="2540" cap="flat" cmpd="sng" algn="ctr">
+                      <a:solidFill>
+                        <a:srgbClr val="EEEEEE"/>
+                      </a:solidFill>
+                      <a:prstDash val="solid"/>
+                      <a:round/>
+                      <a:headEnd type="none" w="med" len="med"/>
+                      <a:tailEnd type="none" w="med" len="med"/>
+                    </a:lnL>
+                    <a:lnR w="2540" cap="flat" cmpd="sng" algn="ctr">
+                      <a:solidFill>
+                        <a:srgbClr val="EEEEEE"/>
+                      </a:solidFill>
+                      <a:prstDash val="solid"/>
+                      <a:round/>
+                      <a:headEnd type="none" w="med" len="med"/>
+                      <a:tailEnd type="none" w="med" len="med"/>
+                    </a:lnR>
+                    <a:lnT w="2540" cap="flat" cmpd="sng" algn="ctr">
+                      <a:solidFill>
+                        <a:srgbClr val="EEEEEE"/>
+                      </a:solidFill>
+                      <a:prstDash val="solid"/>
+                      <a:round/>
+                      <a:headEnd type="none" w="med" len="med"/>
+                      <a:tailEnd type="none" w="med" len="med"/>
+                    </a:lnT>
+                    <a:lnB w="2540" cap="flat" cmpd="sng" algn="ctr">
+                      <a:solidFill>
+                        <a:srgbClr val="EEEEEE"/>
+                      </a:solidFill>
+                      <a:prstDash val="solid"/>
+                      <a:round/>
+                      <a:headEnd type="none" w="med" len="med"/>
+                      <a:tailEnd type="none" w="med" len="med"/>
+                    </a:lnB>
+                  </a:tcPr>
+                </a:tc>
+              </a:tr>
+              <a:tr h="123444">
+                <a:tc>
+                  <a:txBody>
+                    <a:bodyPr/>
+                    <a:lstStyle/>
+                    <a:p>
+                      <a:pPr algn="l" indent="0" marL="0">
+                        <a:buNone/>
+                      </a:pPr>
+                      <a:r>
+                        <a:rPr lang="en-US" sz="500" b="1" dirty="0">
+                          <a:solidFill>
+                            <a:srgbClr val="000000"/>
+                          </a:solidFill>
+                          <a:latin typeface="Calibri" pitchFamily="34" charset="0"/>
+                          <a:ea typeface="Calibri" pitchFamily="34" charset="-122"/>
+                          <a:cs typeface="Calibri" pitchFamily="34" charset="-120"/>
+                        </a:rPr>
+                        <a:t>2025</a:t>
+                      </a:r>
+                      <a:endParaRPr lang="en-US" sz="500" dirty="0">
+                        <a:latin typeface="Calibri" charset="0"/>
+                        <a:ea typeface="Calibri" charset="0"/>
+                        <a:cs typeface="Calibri" charset="0"/>
+                      </a:endParaRPr>
+                    </a:p>
+                  </a:txBody>
+                  <a:tcPr marL="91440" marR="91440" marT="45720" marB="45720">
+                    <a:lnL w="2540" cap="flat" cmpd="sng" algn="ctr">
+                      <a:solidFill>
+                        <a:srgbClr val="EEEEEE"/>
+                      </a:solidFill>
+                      <a:prstDash val="solid"/>
+                      <a:round/>
+                      <a:headEnd type="none" w="med" len="med"/>
+                      <a:tailEnd type="none" w="med" len="med"/>
+                    </a:lnL>
+                    <a:lnR w="2540" cap="flat" cmpd="sng" algn="ctr">
+                      <a:solidFill>
+                        <a:srgbClr val="EEEEEE"/>
+                      </a:solidFill>
+                      <a:prstDash val="solid"/>
+                      <a:round/>
+                      <a:headEnd type="none" w="med" len="med"/>
+                      <a:tailEnd type="none" w="med" len="med"/>
+                    </a:lnR>
+                    <a:lnT w="2540" cap="flat" cmpd="sng" algn="ctr">
+                      <a:solidFill>
+                        <a:srgbClr val="EEEEEE"/>
+                      </a:solidFill>
+                      <a:prstDash val="solid"/>
+                      <a:round/>
+                      <a:headEnd type="none" w="med" len="med"/>
+                      <a:tailEnd type="none" w="med" len="med"/>
+                    </a:lnT>
+                    <a:lnB w="2540" cap="flat" cmpd="sng" algn="ctr">
+                      <a:solidFill>
+                        <a:srgbClr val="EEEEEE"/>
+                      </a:solidFill>
+                      <a:prstDash val="solid"/>
+                      <a:round/>
+                      <a:headEnd type="none" w="med" len="med"/>
+                      <a:tailEnd type="none" w="med" len="med"/>
+                    </a:lnB>
+                  </a:tcPr>
+                </a:tc>
+                <a:tc>
+                  <a:txBody>
+                    <a:bodyPr/>
+                    <a:lstStyle/>
+                    <a:p>
+                      <a:pPr algn="l" indent="0" marL="0">
+                        <a:buNone/>
+                      </a:pPr>
+                      <a:r>
+                        <a:rPr lang="en-US" sz="500" dirty="0">
+                          <a:solidFill>
+                            <a:srgbClr val="777777"/>
+                          </a:solidFill>
+                          <a:latin typeface="Calibri" pitchFamily="34" charset="0"/>
+                          <a:ea typeface="Calibri" pitchFamily="34" charset="-122"/>
+                          <a:cs typeface="Calibri" pitchFamily="34" charset="-120"/>
+                        </a:rPr>
+                        <a:t>ICP</a:t>
                       </a:r>
                       <a:endParaRPr lang="en-US" sz="500" dirty="0">
                         <a:latin typeface="Calibri" charset="0"/>
@@ -6807,7 +9116,7 @@
                           <a:ea typeface="Calibri" pitchFamily="34" charset="-122"/>
                           <a:cs typeface="Calibri" pitchFamily="34" charset="-120"/>
                         </a:rPr>
-                        <a:t>0.44%</a:t>
+                        <a:t>0.39%</a:t>
                       </a:r>
                       <a:endParaRPr lang="en-US" sz="500" dirty="0">
                         <a:latin typeface="Calibri" charset="0"/>
@@ -6929,6 +9238,591 @@
                         <a:buNone/>
                       </a:pPr>
                       <a:r>
+                        <a:rPr lang="en-US" sz="500" dirty="0">
+                          <a:solidFill>
+                            <a:srgbClr val="777777"/>
+                          </a:solidFill>
+                          <a:latin typeface="Calibri" pitchFamily="34" charset="0"/>
+                          <a:ea typeface="Calibri" pitchFamily="34" charset="-122"/>
+                          <a:cs typeface="Calibri" pitchFamily="34" charset="-120"/>
+                        </a:rPr>
+                        <a:t>0.42%</a:t>
+                      </a:r>
+                      <a:endParaRPr lang="en-US" sz="500" dirty="0">
+                        <a:latin typeface="Calibri" charset="0"/>
+                        <a:ea typeface="Calibri" charset="0"/>
+                        <a:cs typeface="Calibri" charset="0"/>
+                      </a:endParaRPr>
+                    </a:p>
+                  </a:txBody>
+                  <a:tcPr marL="91440" marR="91440" marT="45720" marB="45720">
+                    <a:lnL w="2540" cap="flat" cmpd="sng" algn="ctr">
+                      <a:solidFill>
+                        <a:srgbClr val="EEEEEE"/>
+                      </a:solidFill>
+                      <a:prstDash val="solid"/>
+                      <a:round/>
+                      <a:headEnd type="none" w="med" len="med"/>
+                      <a:tailEnd type="none" w="med" len="med"/>
+                    </a:lnL>
+                    <a:lnR w="2540" cap="flat" cmpd="sng" algn="ctr">
+                      <a:solidFill>
+                        <a:srgbClr val="EEEEEE"/>
+                      </a:solidFill>
+                      <a:prstDash val="solid"/>
+                      <a:round/>
+                      <a:headEnd type="none" w="med" len="med"/>
+                      <a:tailEnd type="none" w="med" len="med"/>
+                    </a:lnR>
+                    <a:lnT w="2540" cap="flat" cmpd="sng" algn="ctr">
+                      <a:solidFill>
+                        <a:srgbClr val="EEEEEE"/>
+                      </a:solidFill>
+                      <a:prstDash val="solid"/>
+                      <a:round/>
+                      <a:headEnd type="none" w="med" len="med"/>
+                      <a:tailEnd type="none" w="med" len="med"/>
+                    </a:lnT>
+                    <a:lnB w="2540" cap="flat" cmpd="sng" algn="ctr">
+                      <a:solidFill>
+                        <a:srgbClr val="EEEEEE"/>
+                      </a:solidFill>
+                      <a:prstDash val="solid"/>
+                      <a:round/>
+                      <a:headEnd type="none" w="med" len="med"/>
+                      <a:tailEnd type="none" w="med" len="med"/>
+                    </a:lnB>
+                  </a:tcPr>
+                </a:tc>
+                <a:tc>
+                  <a:txBody>
+                    <a:bodyPr/>
+                    <a:lstStyle/>
+                    <a:p>
+                      <a:pPr algn="ctr" indent="0" marL="0">
+                        <a:buNone/>
+                      </a:pPr>
+                      <a:r>
+                        <a:rPr lang="en-US" sz="500" dirty="0">
+                          <a:solidFill>
+                            <a:srgbClr val="777777"/>
+                          </a:solidFill>
+                          <a:latin typeface="Calibri" pitchFamily="34" charset="0"/>
+                          <a:ea typeface="Calibri" pitchFamily="34" charset="-122"/>
+                          <a:cs typeface="Calibri" pitchFamily="34" charset="-120"/>
+                        </a:rPr>
+                        <a:t>0.42%</a:t>
+                      </a:r>
+                      <a:endParaRPr lang="en-US" sz="500" dirty="0">
+                        <a:latin typeface="Calibri" charset="0"/>
+                        <a:ea typeface="Calibri" charset="0"/>
+                        <a:cs typeface="Calibri" charset="0"/>
+                      </a:endParaRPr>
+                    </a:p>
+                  </a:txBody>
+                  <a:tcPr marL="91440" marR="91440" marT="45720" marB="45720">
+                    <a:lnL w="2540" cap="flat" cmpd="sng" algn="ctr">
+                      <a:solidFill>
+                        <a:srgbClr val="EEEEEE"/>
+                      </a:solidFill>
+                      <a:prstDash val="solid"/>
+                      <a:round/>
+                      <a:headEnd type="none" w="med" len="med"/>
+                      <a:tailEnd type="none" w="med" len="med"/>
+                    </a:lnL>
+                    <a:lnR w="2540" cap="flat" cmpd="sng" algn="ctr">
+                      <a:solidFill>
+                        <a:srgbClr val="EEEEEE"/>
+                      </a:solidFill>
+                      <a:prstDash val="solid"/>
+                      <a:round/>
+                      <a:headEnd type="none" w="med" len="med"/>
+                      <a:tailEnd type="none" w="med" len="med"/>
+                    </a:lnR>
+                    <a:lnT w="2540" cap="flat" cmpd="sng" algn="ctr">
+                      <a:solidFill>
+                        <a:srgbClr val="EEEEEE"/>
+                      </a:solidFill>
+                      <a:prstDash val="solid"/>
+                      <a:round/>
+                      <a:headEnd type="none" w="med" len="med"/>
+                      <a:tailEnd type="none" w="med" len="med"/>
+                    </a:lnT>
+                    <a:lnB w="2540" cap="flat" cmpd="sng" algn="ctr">
+                      <a:solidFill>
+                        <a:srgbClr val="EEEEEE"/>
+                      </a:solidFill>
+                      <a:prstDash val="solid"/>
+                      <a:round/>
+                      <a:headEnd type="none" w="med" len="med"/>
+                      <a:tailEnd type="none" w="med" len="med"/>
+                    </a:lnB>
+                  </a:tcPr>
+                </a:tc>
+                <a:tc>
+                  <a:txBody>
+                    <a:bodyPr/>
+                    <a:lstStyle/>
+                    <a:p>
+                      <a:pPr algn="ctr" indent="0" marL="0">
+                        <a:buNone/>
+                      </a:pPr>
+                      <a:r>
+                        <a:rPr lang="en-US" sz="500" dirty="0">
+                          <a:solidFill>
+                            <a:srgbClr val="777777"/>
+                          </a:solidFill>
+                          <a:latin typeface="Calibri" pitchFamily="34" charset="0"/>
+                          <a:ea typeface="Calibri" pitchFamily="34" charset="-122"/>
+                          <a:cs typeface="Calibri" pitchFamily="34" charset="-120"/>
+                        </a:rPr>
+                        <a:t>0.43%</a:t>
+                      </a:r>
+                      <a:endParaRPr lang="en-US" sz="500" dirty="0">
+                        <a:latin typeface="Calibri" charset="0"/>
+                        <a:ea typeface="Calibri" charset="0"/>
+                        <a:cs typeface="Calibri" charset="0"/>
+                      </a:endParaRPr>
+                    </a:p>
+                  </a:txBody>
+                  <a:tcPr marL="91440" marR="91440" marT="45720" marB="45720">
+                    <a:lnL w="2540" cap="flat" cmpd="sng" algn="ctr">
+                      <a:solidFill>
+                        <a:srgbClr val="EEEEEE"/>
+                      </a:solidFill>
+                      <a:prstDash val="solid"/>
+                      <a:round/>
+                      <a:headEnd type="none" w="med" len="med"/>
+                      <a:tailEnd type="none" w="med" len="med"/>
+                    </a:lnL>
+                    <a:lnR w="2540" cap="flat" cmpd="sng" algn="ctr">
+                      <a:solidFill>
+                        <a:srgbClr val="EEEEEE"/>
+                      </a:solidFill>
+                      <a:prstDash val="solid"/>
+                      <a:round/>
+                      <a:headEnd type="none" w="med" len="med"/>
+                      <a:tailEnd type="none" w="med" len="med"/>
+                    </a:lnR>
+                    <a:lnT w="2540" cap="flat" cmpd="sng" algn="ctr">
+                      <a:solidFill>
+                        <a:srgbClr val="EEEEEE"/>
+                      </a:solidFill>
+                      <a:prstDash val="solid"/>
+                      <a:round/>
+                      <a:headEnd type="none" w="med" len="med"/>
+                      <a:tailEnd type="none" w="med" len="med"/>
+                    </a:lnT>
+                    <a:lnB w="2540" cap="flat" cmpd="sng" algn="ctr">
+                      <a:solidFill>
+                        <a:srgbClr val="EEEEEE"/>
+                      </a:solidFill>
+                      <a:prstDash val="solid"/>
+                      <a:round/>
+                      <a:headEnd type="none" w="med" len="med"/>
+                      <a:tailEnd type="none" w="med" len="med"/>
+                    </a:lnB>
+                  </a:tcPr>
+                </a:tc>
+                <a:tc>
+                  <a:txBody>
+                    <a:bodyPr/>
+                    <a:lstStyle/>
+                    <a:p>
+                      <a:pPr algn="ctr" indent="0" marL="0">
+                        <a:buNone/>
+                      </a:pPr>
+                      <a:r>
+                        <a:rPr lang="en-US" sz="500" dirty="0">
+                          <a:solidFill>
+                            <a:srgbClr val="777777"/>
+                          </a:solidFill>
+                          <a:latin typeface="Calibri" pitchFamily="34" charset="0"/>
+                          <a:ea typeface="Calibri" pitchFamily="34" charset="-122"/>
+                          <a:cs typeface="Calibri" pitchFamily="34" charset="-120"/>
+                        </a:rPr>
+                        <a:t>0.43%</a:t>
+                      </a:r>
+                      <a:endParaRPr lang="en-US" sz="500" dirty="0">
+                        <a:latin typeface="Calibri" charset="0"/>
+                        <a:ea typeface="Calibri" charset="0"/>
+                        <a:cs typeface="Calibri" charset="0"/>
+                      </a:endParaRPr>
+                    </a:p>
+                  </a:txBody>
+                  <a:tcPr marL="91440" marR="91440" marT="45720" marB="45720">
+                    <a:lnL w="2540" cap="flat" cmpd="sng" algn="ctr">
+                      <a:solidFill>
+                        <a:srgbClr val="EEEEEE"/>
+                      </a:solidFill>
+                      <a:prstDash val="solid"/>
+                      <a:round/>
+                      <a:headEnd type="none" w="med" len="med"/>
+                      <a:tailEnd type="none" w="med" len="med"/>
+                    </a:lnL>
+                    <a:lnR w="2540" cap="flat" cmpd="sng" algn="ctr">
+                      <a:solidFill>
+                        <a:srgbClr val="EEEEEE"/>
+                      </a:solidFill>
+                      <a:prstDash val="solid"/>
+                      <a:round/>
+                      <a:headEnd type="none" w="med" len="med"/>
+                      <a:tailEnd type="none" w="med" len="med"/>
+                    </a:lnR>
+                    <a:lnT w="2540" cap="flat" cmpd="sng" algn="ctr">
+                      <a:solidFill>
+                        <a:srgbClr val="EEEEEE"/>
+                      </a:solidFill>
+                      <a:prstDash val="solid"/>
+                      <a:round/>
+                      <a:headEnd type="none" w="med" len="med"/>
+                      <a:tailEnd type="none" w="med" len="med"/>
+                    </a:lnT>
+                    <a:lnB w="2540" cap="flat" cmpd="sng" algn="ctr">
+                      <a:solidFill>
+                        <a:srgbClr val="EEEEEE"/>
+                      </a:solidFill>
+                      <a:prstDash val="solid"/>
+                      <a:round/>
+                      <a:headEnd type="none" w="med" len="med"/>
+                      <a:tailEnd type="none" w="med" len="med"/>
+                    </a:lnB>
+                  </a:tcPr>
+                </a:tc>
+                <a:tc>
+                  <a:txBody>
+                    <a:bodyPr/>
+                    <a:lstStyle/>
+                    <a:p>
+                      <a:pPr algn="ctr" indent="0" marL="0">
+                        <a:buNone/>
+                      </a:pPr>
+                      <a:r>
+                        <a:rPr lang="en-US" sz="500" dirty="0">
+                          <a:solidFill>
+                            <a:srgbClr val="777777"/>
+                          </a:solidFill>
+                          <a:latin typeface="Calibri" pitchFamily="34" charset="0"/>
+                          <a:ea typeface="Calibri" pitchFamily="34" charset="-122"/>
+                          <a:cs typeface="Calibri" pitchFamily="34" charset="-120"/>
+                        </a:rPr>
+                        <a:t>0.38%</a:t>
+                      </a:r>
+                      <a:endParaRPr lang="en-US" sz="500" dirty="0">
+                        <a:latin typeface="Calibri" charset="0"/>
+                        <a:ea typeface="Calibri" charset="0"/>
+                        <a:cs typeface="Calibri" charset="0"/>
+                      </a:endParaRPr>
+                    </a:p>
+                  </a:txBody>
+                  <a:tcPr marL="91440" marR="91440" marT="45720" marB="45720">
+                    <a:lnL w="2540" cap="flat" cmpd="sng" algn="ctr">
+                      <a:solidFill>
+                        <a:srgbClr val="EEEEEE"/>
+                      </a:solidFill>
+                      <a:prstDash val="solid"/>
+                      <a:round/>
+                      <a:headEnd type="none" w="med" len="med"/>
+                      <a:tailEnd type="none" w="med" len="med"/>
+                    </a:lnL>
+                    <a:lnR w="2540" cap="flat" cmpd="sng" algn="ctr">
+                      <a:solidFill>
+                        <a:srgbClr val="EEEEEE"/>
+                      </a:solidFill>
+                      <a:prstDash val="solid"/>
+                      <a:round/>
+                      <a:headEnd type="none" w="med" len="med"/>
+                      <a:tailEnd type="none" w="med" len="med"/>
+                    </a:lnR>
+                    <a:lnT w="2540" cap="flat" cmpd="sng" algn="ctr">
+                      <a:solidFill>
+                        <a:srgbClr val="EEEEEE"/>
+                      </a:solidFill>
+                      <a:prstDash val="solid"/>
+                      <a:round/>
+                      <a:headEnd type="none" w="med" len="med"/>
+                      <a:tailEnd type="none" w="med" len="med"/>
+                    </a:lnT>
+                    <a:lnB w="2540" cap="flat" cmpd="sng" algn="ctr">
+                      <a:solidFill>
+                        <a:srgbClr val="EEEEEE"/>
+                      </a:solidFill>
+                      <a:prstDash val="solid"/>
+                      <a:round/>
+                      <a:headEnd type="none" w="med" len="med"/>
+                      <a:tailEnd type="none" w="med" len="med"/>
+                    </a:lnB>
+                  </a:tcPr>
+                </a:tc>
+                <a:tc>
+                  <a:txBody>
+                    <a:bodyPr/>
+                    <a:lstStyle/>
+                    <a:p>
+                      <a:pPr algn="ctr" indent="0" marL="0">
+                        <a:buNone/>
+                      </a:pPr>
+                      <a:r>
+                        <a:rPr lang="en-US" sz="500" dirty="0">
+                          <a:solidFill>
+                            <a:srgbClr val="777777"/>
+                          </a:solidFill>
+                          <a:latin typeface="Calibri" pitchFamily="34" charset="0"/>
+                          <a:ea typeface="Calibri" pitchFamily="34" charset="-122"/>
+                          <a:cs typeface="Calibri" pitchFamily="34" charset="-120"/>
+                        </a:rPr>
+                        <a:t>0.42%</a:t>
+                      </a:r>
+                      <a:endParaRPr lang="en-US" sz="500" dirty="0">
+                        <a:latin typeface="Calibri" charset="0"/>
+                        <a:ea typeface="Calibri" charset="0"/>
+                        <a:cs typeface="Calibri" charset="0"/>
+                      </a:endParaRPr>
+                    </a:p>
+                  </a:txBody>
+                  <a:tcPr marL="91440" marR="91440" marT="45720" marB="45720">
+                    <a:lnL w="2540" cap="flat" cmpd="sng" algn="ctr">
+                      <a:solidFill>
+                        <a:srgbClr val="EEEEEE"/>
+                      </a:solidFill>
+                      <a:prstDash val="solid"/>
+                      <a:round/>
+                      <a:headEnd type="none" w="med" len="med"/>
+                      <a:tailEnd type="none" w="med" len="med"/>
+                    </a:lnL>
+                    <a:lnR w="2540" cap="flat" cmpd="sng" algn="ctr">
+                      <a:solidFill>
+                        <a:srgbClr val="EEEEEE"/>
+                      </a:solidFill>
+                      <a:prstDash val="solid"/>
+                      <a:round/>
+                      <a:headEnd type="none" w="med" len="med"/>
+                      <a:tailEnd type="none" w="med" len="med"/>
+                    </a:lnR>
+                    <a:lnT w="2540" cap="flat" cmpd="sng" algn="ctr">
+                      <a:solidFill>
+                        <a:srgbClr val="EEEEEE"/>
+                      </a:solidFill>
+                      <a:prstDash val="solid"/>
+                      <a:round/>
+                      <a:headEnd type="none" w="med" len="med"/>
+                      <a:tailEnd type="none" w="med" len="med"/>
+                    </a:lnT>
+                    <a:lnB w="2540" cap="flat" cmpd="sng" algn="ctr">
+                      <a:solidFill>
+                        <a:srgbClr val="EEEEEE"/>
+                      </a:solidFill>
+                      <a:prstDash val="solid"/>
+                      <a:round/>
+                      <a:headEnd type="none" w="med" len="med"/>
+                      <a:tailEnd type="none" w="med" len="med"/>
+                    </a:lnB>
+                  </a:tcPr>
+                </a:tc>
+                <a:tc>
+                  <a:txBody>
+                    <a:bodyPr/>
+                    <a:lstStyle/>
+                    <a:p>
+                      <a:pPr algn="ctr" indent="0" marL="0">
+                        <a:buNone/>
+                      </a:pPr>
+                      <a:r>
+                        <a:rPr lang="en-US" sz="500" dirty="0">
+                          <a:solidFill>
+                            <a:srgbClr val="777777"/>
+                          </a:solidFill>
+                          <a:latin typeface="Calibri" pitchFamily="34" charset="0"/>
+                          <a:ea typeface="Calibri" pitchFamily="34" charset="-122"/>
+                          <a:cs typeface="Calibri" pitchFamily="34" charset="-120"/>
+                        </a:rPr>
+                        <a:t>0.40%</a:t>
+                      </a:r>
+                      <a:endParaRPr lang="en-US" sz="500" dirty="0">
+                        <a:latin typeface="Calibri" charset="0"/>
+                        <a:ea typeface="Calibri" charset="0"/>
+                        <a:cs typeface="Calibri" charset="0"/>
+                      </a:endParaRPr>
+                    </a:p>
+                  </a:txBody>
+                  <a:tcPr marL="91440" marR="91440" marT="45720" marB="45720">
+                    <a:lnL w="2540" cap="flat" cmpd="sng" algn="ctr">
+                      <a:solidFill>
+                        <a:srgbClr val="EEEEEE"/>
+                      </a:solidFill>
+                      <a:prstDash val="solid"/>
+                      <a:round/>
+                      <a:headEnd type="none" w="med" len="med"/>
+                      <a:tailEnd type="none" w="med" len="med"/>
+                    </a:lnL>
+                    <a:lnR w="2540" cap="flat" cmpd="sng" algn="ctr">
+                      <a:solidFill>
+                        <a:srgbClr val="EEEEEE"/>
+                      </a:solidFill>
+                      <a:prstDash val="solid"/>
+                      <a:round/>
+                      <a:headEnd type="none" w="med" len="med"/>
+                      <a:tailEnd type="none" w="med" len="med"/>
+                    </a:lnR>
+                    <a:lnT w="2540" cap="flat" cmpd="sng" algn="ctr">
+                      <a:solidFill>
+                        <a:srgbClr val="EEEEEE"/>
+                      </a:solidFill>
+                      <a:prstDash val="solid"/>
+                      <a:round/>
+                      <a:headEnd type="none" w="med" len="med"/>
+                      <a:tailEnd type="none" w="med" len="med"/>
+                    </a:lnT>
+                    <a:lnB w="2540" cap="flat" cmpd="sng" algn="ctr">
+                      <a:solidFill>
+                        <a:srgbClr val="EEEEEE"/>
+                      </a:solidFill>
+                      <a:prstDash val="solid"/>
+                      <a:round/>
+                      <a:headEnd type="none" w="med" len="med"/>
+                      <a:tailEnd type="none" w="med" len="med"/>
+                    </a:lnB>
+                  </a:tcPr>
+                </a:tc>
+                <a:tc>
+                  <a:txBody>
+                    <a:bodyPr/>
+                    <a:lstStyle/>
+                    <a:p>
+                      <a:pPr algn="ctr" indent="0" marL="0">
+                        <a:buNone/>
+                      </a:pPr>
+                      <a:r>
+                        <a:rPr lang="en-US" sz="500" dirty="0">
+                          <a:solidFill>
+                            <a:srgbClr val="777777"/>
+                          </a:solidFill>
+                          <a:latin typeface="Calibri" pitchFamily="34" charset="0"/>
+                          <a:ea typeface="Calibri" pitchFamily="34" charset="-122"/>
+                          <a:cs typeface="Calibri" pitchFamily="34" charset="-120"/>
+                        </a:rPr>
+                        <a:t>0.38%</a:t>
+                      </a:r>
+                      <a:endParaRPr lang="en-US" sz="500" dirty="0">
+                        <a:latin typeface="Calibri" charset="0"/>
+                        <a:ea typeface="Calibri" charset="0"/>
+                        <a:cs typeface="Calibri" charset="0"/>
+                      </a:endParaRPr>
+                    </a:p>
+                  </a:txBody>
+                  <a:tcPr marL="91440" marR="91440" marT="45720" marB="45720">
+                    <a:lnL w="2540" cap="flat" cmpd="sng" algn="ctr">
+                      <a:solidFill>
+                        <a:srgbClr val="EEEEEE"/>
+                      </a:solidFill>
+                      <a:prstDash val="solid"/>
+                      <a:round/>
+                      <a:headEnd type="none" w="med" len="med"/>
+                      <a:tailEnd type="none" w="med" len="med"/>
+                    </a:lnL>
+                    <a:lnR w="2540" cap="flat" cmpd="sng" algn="ctr">
+                      <a:solidFill>
+                        <a:srgbClr val="EEEEEE"/>
+                      </a:solidFill>
+                      <a:prstDash val="solid"/>
+                      <a:round/>
+                      <a:headEnd type="none" w="med" len="med"/>
+                      <a:tailEnd type="none" w="med" len="med"/>
+                    </a:lnR>
+                    <a:lnT w="2540" cap="flat" cmpd="sng" algn="ctr">
+                      <a:solidFill>
+                        <a:srgbClr val="EEEEEE"/>
+                      </a:solidFill>
+                      <a:prstDash val="solid"/>
+                      <a:round/>
+                      <a:headEnd type="none" w="med" len="med"/>
+                      <a:tailEnd type="none" w="med" len="med"/>
+                    </a:lnT>
+                    <a:lnB w="2540" cap="flat" cmpd="sng" algn="ctr">
+                      <a:solidFill>
+                        <a:srgbClr val="EEEEEE"/>
+                      </a:solidFill>
+                      <a:prstDash val="solid"/>
+                      <a:round/>
+                      <a:headEnd type="none" w="med" len="med"/>
+                      <a:tailEnd type="none" w="med" len="med"/>
+                    </a:lnB>
+                  </a:tcPr>
+                </a:tc>
+                <a:tc>
+                  <a:txBody>
+                    <a:bodyPr/>
+                    <a:lstStyle/>
+                    <a:p>
+                      <a:pPr algn="ctr" indent="0" marL="0">
+                        <a:buNone/>
+                      </a:pPr>
+                      <a:r>
+                        <a:rPr lang="en-US" sz="500" dirty="0">
+                          <a:solidFill>
+                            <a:srgbClr val="777777"/>
+                          </a:solidFill>
+                          <a:latin typeface="Calibri" pitchFamily="34" charset="0"/>
+                          <a:ea typeface="Calibri" pitchFamily="34" charset="-122"/>
+                          <a:cs typeface="Calibri" pitchFamily="34" charset="-120"/>
+                        </a:rPr>
+                        <a:t>0.41%</a:t>
+                      </a:r>
+                      <a:endParaRPr lang="en-US" sz="500" dirty="0">
+                        <a:latin typeface="Calibri" charset="0"/>
+                        <a:ea typeface="Calibri" charset="0"/>
+                        <a:cs typeface="Calibri" charset="0"/>
+                      </a:endParaRPr>
+                    </a:p>
+                  </a:txBody>
+                  <a:tcPr marL="91440" marR="91440" marT="45720" marB="45720">
+                    <a:lnL w="2540" cap="flat" cmpd="sng" algn="ctr">
+                      <a:solidFill>
+                        <a:srgbClr val="EEEEEE"/>
+                      </a:solidFill>
+                      <a:prstDash val="solid"/>
+                      <a:round/>
+                      <a:headEnd type="none" w="med" len="med"/>
+                      <a:tailEnd type="none" w="med" len="med"/>
+                    </a:lnL>
+                    <a:lnR w="2540" cap="flat" cmpd="sng" algn="ctr">
+                      <a:solidFill>
+                        <a:srgbClr val="EEEEEE"/>
+                      </a:solidFill>
+                      <a:prstDash val="solid"/>
+                      <a:round/>
+                      <a:headEnd type="none" w="med" len="med"/>
+                      <a:tailEnd type="none" w="med" len="med"/>
+                    </a:lnR>
+                    <a:lnT w="2540" cap="flat" cmpd="sng" algn="ctr">
+                      <a:solidFill>
+                        <a:srgbClr val="EEEEEE"/>
+                      </a:solidFill>
+                      <a:prstDash val="solid"/>
+                      <a:round/>
+                      <a:headEnd type="none" w="med" len="med"/>
+                      <a:tailEnd type="none" w="med" len="med"/>
+                    </a:lnT>
+                    <a:lnB w="2540" cap="flat" cmpd="sng" algn="ctr">
+                      <a:solidFill>
+                        <a:srgbClr val="EEEEEE"/>
+                      </a:solidFill>
+                      <a:prstDash val="solid"/>
+                      <a:round/>
+                      <a:headEnd type="none" w="med" len="med"/>
+                      <a:tailEnd type="none" w="med" len="med"/>
+                    </a:lnB>
+                  </a:tcPr>
+                </a:tc>
+                <a:tc>
+                  <a:txBody>
+                    <a:bodyPr/>
+                    <a:lstStyle/>
+                    <a:p>
+                      <a:pPr algn="ctr" indent="0" marL="0">
+                        <a:buNone/>
+                      </a:pPr>
+                      <a:r>
                         <a:rPr lang="en-US" sz="500" b="1" dirty="0">
                           <a:solidFill>
                             <a:srgbClr val="777777"/>
@@ -6937,7 +9831,7 @@
                           <a:ea typeface="Calibri" pitchFamily="34" charset="-122"/>
                           <a:cs typeface="Calibri" pitchFamily="34" charset="-120"/>
                         </a:rPr>
-                        <a:t>6.38%</a:t>
+                        <a:t>4.61%</a:t>
                       </a:r>
                       <a:endParaRPr lang="en-US" sz="500" dirty="0">
                         <a:latin typeface="Calibri" charset="0"/>
@@ -7123,332 +10017,8 @@
                           <a:ea typeface="Calibri" pitchFamily="34" charset="-122"/>
                           <a:cs typeface="Calibri" pitchFamily="34" charset="-120"/>
                         </a:rPr>
-                        <a:t>0.00%</a:t>
+                        <a:t>0.30%</a:t>
                       </a:r>
-                      <a:endParaRPr lang="en-US" sz="500" dirty="0">
-                        <a:latin typeface="Calibri" charset="0"/>
-                        <a:ea typeface="Calibri" charset="0"/>
-                        <a:cs typeface="Calibri" charset="0"/>
-                      </a:endParaRPr>
-                    </a:p>
-                  </a:txBody>
-                  <a:tcPr marL="91440" marR="91440" marT="45720" marB="45720">
-                    <a:lnL w="2540" cap="flat" cmpd="sng" algn="ctr">
-                      <a:solidFill>
-                        <a:srgbClr val="EEEEEE"/>
-                      </a:solidFill>
-                      <a:prstDash val="solid"/>
-                      <a:round/>
-                      <a:headEnd type="none" w="med" len="med"/>
-                      <a:tailEnd type="none" w="med" len="med"/>
-                    </a:lnL>
-                    <a:lnR w="2540" cap="flat" cmpd="sng" algn="ctr">
-                      <a:solidFill>
-                        <a:srgbClr val="EEEEEE"/>
-                      </a:solidFill>
-                      <a:prstDash val="solid"/>
-                      <a:round/>
-                      <a:headEnd type="none" w="med" len="med"/>
-                      <a:tailEnd type="none" w="med" len="med"/>
-                    </a:lnR>
-                    <a:lnT w="2540" cap="flat" cmpd="sng" algn="ctr">
-                      <a:solidFill>
-                        <a:srgbClr val="EEEEEE"/>
-                      </a:solidFill>
-                      <a:prstDash val="solid"/>
-                      <a:round/>
-                      <a:headEnd type="none" w="med" len="med"/>
-                      <a:tailEnd type="none" w="med" len="med"/>
-                    </a:lnT>
-                    <a:lnB w="2540" cap="flat" cmpd="sng" algn="ctr">
-                      <a:solidFill>
-                        <a:srgbClr val="EEEEEE"/>
-                      </a:solidFill>
-                      <a:prstDash val="solid"/>
-                      <a:round/>
-                      <a:headEnd type="none" w="med" len="med"/>
-                      <a:tailEnd type="none" w="med" len="med"/>
-                    </a:lnB>
-                  </a:tcPr>
-                </a:tc>
-                <a:tc>
-                  <a:txBody>
-                    <a:bodyPr/>
-                    <a:lstStyle/>
-                    <a:p>
-                      <a:pPr algn="ctr" indent="0" marL="0">
-                        <a:buNone/>
-                      </a:pPr>
-                      <a:endParaRPr lang="en-US" sz="500" dirty="0">
-                        <a:latin typeface="Calibri" charset="0"/>
-                        <a:ea typeface="Calibri" charset="0"/>
-                        <a:cs typeface="Calibri" charset="0"/>
-                      </a:endParaRPr>
-                    </a:p>
-                  </a:txBody>
-                  <a:tcPr marL="91440" marR="91440" marT="45720" marB="45720">
-                    <a:lnL w="2540" cap="flat" cmpd="sng" algn="ctr">
-                      <a:solidFill>
-                        <a:srgbClr val="EEEEEE"/>
-                      </a:solidFill>
-                      <a:prstDash val="solid"/>
-                      <a:round/>
-                      <a:headEnd type="none" w="med" len="med"/>
-                      <a:tailEnd type="none" w="med" len="med"/>
-                    </a:lnL>
-                    <a:lnR w="2540" cap="flat" cmpd="sng" algn="ctr">
-                      <a:solidFill>
-                        <a:srgbClr val="EEEEEE"/>
-                      </a:solidFill>
-                      <a:prstDash val="solid"/>
-                      <a:round/>
-                      <a:headEnd type="none" w="med" len="med"/>
-                      <a:tailEnd type="none" w="med" len="med"/>
-                    </a:lnR>
-                    <a:lnT w="2540" cap="flat" cmpd="sng" algn="ctr">
-                      <a:solidFill>
-                        <a:srgbClr val="EEEEEE"/>
-                      </a:solidFill>
-                      <a:prstDash val="solid"/>
-                      <a:round/>
-                      <a:headEnd type="none" w="med" len="med"/>
-                      <a:tailEnd type="none" w="med" len="med"/>
-                    </a:lnT>
-                    <a:lnB w="2540" cap="flat" cmpd="sng" algn="ctr">
-                      <a:solidFill>
-                        <a:srgbClr val="EEEEEE"/>
-                      </a:solidFill>
-                      <a:prstDash val="solid"/>
-                      <a:round/>
-                      <a:headEnd type="none" w="med" len="med"/>
-                      <a:tailEnd type="none" w="med" len="med"/>
-                    </a:lnB>
-                  </a:tcPr>
-                </a:tc>
-                <a:tc>
-                  <a:txBody>
-                    <a:bodyPr/>
-                    <a:lstStyle/>
-                    <a:p>
-                      <a:pPr algn="ctr" indent="0" marL="0">
-                        <a:buNone/>
-                      </a:pPr>
-                      <a:endParaRPr lang="en-US" sz="500" dirty="0">
-                        <a:latin typeface="Calibri" charset="0"/>
-                        <a:ea typeface="Calibri" charset="0"/>
-                        <a:cs typeface="Calibri" charset="0"/>
-                      </a:endParaRPr>
-                    </a:p>
-                  </a:txBody>
-                  <a:tcPr marL="91440" marR="91440" marT="45720" marB="45720">
-                    <a:lnL w="2540" cap="flat" cmpd="sng" algn="ctr">
-                      <a:solidFill>
-                        <a:srgbClr val="EEEEEE"/>
-                      </a:solidFill>
-                      <a:prstDash val="solid"/>
-                      <a:round/>
-                      <a:headEnd type="none" w="med" len="med"/>
-                      <a:tailEnd type="none" w="med" len="med"/>
-                    </a:lnL>
-                    <a:lnR w="2540" cap="flat" cmpd="sng" algn="ctr">
-                      <a:solidFill>
-                        <a:srgbClr val="EEEEEE"/>
-                      </a:solidFill>
-                      <a:prstDash val="solid"/>
-                      <a:round/>
-                      <a:headEnd type="none" w="med" len="med"/>
-                      <a:tailEnd type="none" w="med" len="med"/>
-                    </a:lnR>
-                    <a:lnT w="2540" cap="flat" cmpd="sng" algn="ctr">
-                      <a:solidFill>
-                        <a:srgbClr val="EEEEEE"/>
-                      </a:solidFill>
-                      <a:prstDash val="solid"/>
-                      <a:round/>
-                      <a:headEnd type="none" w="med" len="med"/>
-                      <a:tailEnd type="none" w="med" len="med"/>
-                    </a:lnT>
-                    <a:lnB w="2540" cap="flat" cmpd="sng" algn="ctr">
-                      <a:solidFill>
-                        <a:srgbClr val="EEEEEE"/>
-                      </a:solidFill>
-                      <a:prstDash val="solid"/>
-                      <a:round/>
-                      <a:headEnd type="none" w="med" len="med"/>
-                      <a:tailEnd type="none" w="med" len="med"/>
-                    </a:lnB>
-                  </a:tcPr>
-                </a:tc>
-                <a:tc>
-                  <a:txBody>
-                    <a:bodyPr/>
-                    <a:lstStyle/>
-                    <a:p>
-                      <a:pPr algn="ctr" indent="0" marL="0">
-                        <a:buNone/>
-                      </a:pPr>
-                      <a:endParaRPr lang="en-US" sz="500" dirty="0">
-                        <a:latin typeface="Calibri" charset="0"/>
-                        <a:ea typeface="Calibri" charset="0"/>
-                        <a:cs typeface="Calibri" charset="0"/>
-                      </a:endParaRPr>
-                    </a:p>
-                  </a:txBody>
-                  <a:tcPr marL="91440" marR="91440" marT="45720" marB="45720">
-                    <a:lnL w="2540" cap="flat" cmpd="sng" algn="ctr">
-                      <a:solidFill>
-                        <a:srgbClr val="EEEEEE"/>
-                      </a:solidFill>
-                      <a:prstDash val="solid"/>
-                      <a:round/>
-                      <a:headEnd type="none" w="med" len="med"/>
-                      <a:tailEnd type="none" w="med" len="med"/>
-                    </a:lnL>
-                    <a:lnR w="2540" cap="flat" cmpd="sng" algn="ctr">
-                      <a:solidFill>
-                        <a:srgbClr val="EEEEEE"/>
-                      </a:solidFill>
-                      <a:prstDash val="solid"/>
-                      <a:round/>
-                      <a:headEnd type="none" w="med" len="med"/>
-                      <a:tailEnd type="none" w="med" len="med"/>
-                    </a:lnR>
-                    <a:lnT w="2540" cap="flat" cmpd="sng" algn="ctr">
-                      <a:solidFill>
-                        <a:srgbClr val="EEEEEE"/>
-                      </a:solidFill>
-                      <a:prstDash val="solid"/>
-                      <a:round/>
-                      <a:headEnd type="none" w="med" len="med"/>
-                      <a:tailEnd type="none" w="med" len="med"/>
-                    </a:lnT>
-                    <a:lnB w="2540" cap="flat" cmpd="sng" algn="ctr">
-                      <a:solidFill>
-                        <a:srgbClr val="EEEEEE"/>
-                      </a:solidFill>
-                      <a:prstDash val="solid"/>
-                      <a:round/>
-                      <a:headEnd type="none" w="med" len="med"/>
-                      <a:tailEnd type="none" w="med" len="med"/>
-                    </a:lnB>
-                  </a:tcPr>
-                </a:tc>
-                <a:tc>
-                  <a:txBody>
-                    <a:bodyPr/>
-                    <a:lstStyle/>
-                    <a:p>
-                      <a:pPr algn="ctr" indent="0" marL="0">
-                        <a:buNone/>
-                      </a:pPr>
-                      <a:endParaRPr lang="en-US" sz="500" dirty="0">
-                        <a:latin typeface="Calibri" charset="0"/>
-                        <a:ea typeface="Calibri" charset="0"/>
-                        <a:cs typeface="Calibri" charset="0"/>
-                      </a:endParaRPr>
-                    </a:p>
-                  </a:txBody>
-                  <a:tcPr marL="91440" marR="91440" marT="45720" marB="45720">
-                    <a:lnL w="2540" cap="flat" cmpd="sng" algn="ctr">
-                      <a:solidFill>
-                        <a:srgbClr val="EEEEEE"/>
-                      </a:solidFill>
-                      <a:prstDash val="solid"/>
-                      <a:round/>
-                      <a:headEnd type="none" w="med" len="med"/>
-                      <a:tailEnd type="none" w="med" len="med"/>
-                    </a:lnL>
-                    <a:lnR w="2540" cap="flat" cmpd="sng" algn="ctr">
-                      <a:solidFill>
-                        <a:srgbClr val="EEEEEE"/>
-                      </a:solidFill>
-                      <a:prstDash val="solid"/>
-                      <a:round/>
-                      <a:headEnd type="none" w="med" len="med"/>
-                      <a:tailEnd type="none" w="med" len="med"/>
-                    </a:lnR>
-                    <a:lnT w="2540" cap="flat" cmpd="sng" algn="ctr">
-                      <a:solidFill>
-                        <a:srgbClr val="EEEEEE"/>
-                      </a:solidFill>
-                      <a:prstDash val="solid"/>
-                      <a:round/>
-                      <a:headEnd type="none" w="med" len="med"/>
-                      <a:tailEnd type="none" w="med" len="med"/>
-                    </a:lnT>
-                    <a:lnB w="2540" cap="flat" cmpd="sng" algn="ctr">
-                      <a:solidFill>
-                        <a:srgbClr val="EEEEEE"/>
-                      </a:solidFill>
-                      <a:prstDash val="solid"/>
-                      <a:round/>
-                      <a:headEnd type="none" w="med" len="med"/>
-                      <a:tailEnd type="none" w="med" len="med"/>
-                    </a:lnB>
-                  </a:tcPr>
-                </a:tc>
-                <a:tc>
-                  <a:txBody>
-                    <a:bodyPr/>
-                    <a:lstStyle/>
-                    <a:p>
-                      <a:pPr algn="ctr" indent="0" marL="0">
-                        <a:buNone/>
-                      </a:pPr>
-                      <a:endParaRPr lang="en-US" sz="500" dirty="0">
-                        <a:latin typeface="Calibri" charset="0"/>
-                        <a:ea typeface="Calibri" charset="0"/>
-                        <a:cs typeface="Calibri" charset="0"/>
-                      </a:endParaRPr>
-                    </a:p>
-                  </a:txBody>
-                  <a:tcPr marL="91440" marR="91440" marT="45720" marB="45720">
-                    <a:lnL w="2540" cap="flat" cmpd="sng" algn="ctr">
-                      <a:solidFill>
-                        <a:srgbClr val="EEEEEE"/>
-                      </a:solidFill>
-                      <a:prstDash val="solid"/>
-                      <a:round/>
-                      <a:headEnd type="none" w="med" len="med"/>
-                      <a:tailEnd type="none" w="med" len="med"/>
-                    </a:lnL>
-                    <a:lnR w="2540" cap="flat" cmpd="sng" algn="ctr">
-                      <a:solidFill>
-                        <a:srgbClr val="EEEEEE"/>
-                      </a:solidFill>
-                      <a:prstDash val="solid"/>
-                      <a:round/>
-                      <a:headEnd type="none" w="med" len="med"/>
-                      <a:tailEnd type="none" w="med" len="med"/>
-                    </a:lnR>
-                    <a:lnT w="2540" cap="flat" cmpd="sng" algn="ctr">
-                      <a:solidFill>
-                        <a:srgbClr val="EEEEEE"/>
-                      </a:solidFill>
-                      <a:prstDash val="solid"/>
-                      <a:round/>
-                      <a:headEnd type="none" w="med" len="med"/>
-                      <a:tailEnd type="none" w="med" len="med"/>
-                    </a:lnT>
-                    <a:lnB w="2540" cap="flat" cmpd="sng" algn="ctr">
-                      <a:solidFill>
-                        <a:srgbClr val="EEEEEE"/>
-                      </a:solidFill>
-                      <a:prstDash val="solid"/>
-                      <a:round/>
-                      <a:headEnd type="none" w="med" len="med"/>
-                      <a:tailEnd type="none" w="med" len="med"/>
-                    </a:lnB>
-                  </a:tcPr>
-                </a:tc>
-                <a:tc>
-                  <a:txBody>
-                    <a:bodyPr/>
-                    <a:lstStyle/>
-                    <a:p>
-                      <a:pPr algn="ctr" indent="0" marL="0">
-                        <a:buNone/>
-                      </a:pPr>
                       <a:endParaRPr lang="en-US" sz="500" dirty="0">
                         <a:latin typeface="Calibri" charset="0"/>
                         <a:ea typeface="Calibri" charset="0"/>
@@ -7512,7 +10082,7 @@
                           <a:ea typeface="Calibri" pitchFamily="34" charset="-122"/>
                           <a:cs typeface="Calibri" pitchFamily="34" charset="-120"/>
                         </a:rPr>
-                        <a:t>0.36%</a:t>
+                        <a:t>0.28%</a:t>
                       </a:r>
                       <a:endParaRPr lang="en-US" sz="500" dirty="0">
                         <a:latin typeface="Calibri" charset="0"/>
@@ -7577,7 +10147,7 @@
                           <a:ea typeface="Calibri" pitchFamily="34" charset="-122"/>
                           <a:cs typeface="Calibri" pitchFamily="34" charset="-120"/>
                         </a:rPr>
-                        <a:t>0.34%</a:t>
+                        <a:t>0.31%</a:t>
                       </a:r>
                       <a:endParaRPr lang="en-US" sz="500" dirty="0">
                         <a:latin typeface="Calibri" charset="0"/>
@@ -7642,7 +10212,7 @@
                           <a:ea typeface="Calibri" pitchFamily="34" charset="-122"/>
                           <a:cs typeface="Calibri" pitchFamily="34" charset="-120"/>
                         </a:rPr>
-                        <a:t>0.34%</a:t>
+                        <a:t>0.30%</a:t>
                       </a:r>
                       <a:endParaRPr lang="en-US" sz="500" dirty="0">
                         <a:latin typeface="Calibri" charset="0"/>
@@ -7707,7 +10277,7 @@
                           <a:ea typeface="Calibri" pitchFamily="34" charset="-122"/>
                           <a:cs typeface="Calibri" pitchFamily="34" charset="-120"/>
                         </a:rPr>
-                        <a:t>0.32%</a:t>
+                        <a:t>0.31%</a:t>
                       </a:r>
                       <a:endParaRPr lang="en-US" sz="500" dirty="0">
                         <a:latin typeface="Calibri" charset="0"/>
@@ -7772,7 +10342,397 @@
                           <a:ea typeface="Calibri" pitchFamily="34" charset="-122"/>
                           <a:cs typeface="Calibri" pitchFamily="34" charset="-120"/>
                         </a:rPr>
-                        <a:t>-2.99%</a:t>
+                        <a:t>0.30%</a:t>
+                      </a:r>
+                      <a:endParaRPr lang="en-US" sz="500" dirty="0">
+                        <a:latin typeface="Calibri" charset="0"/>
+                        <a:ea typeface="Calibri" charset="0"/>
+                        <a:cs typeface="Calibri" charset="0"/>
+                      </a:endParaRPr>
+                    </a:p>
+                  </a:txBody>
+                  <a:tcPr marL="91440" marR="91440" marT="45720" marB="45720">
+                    <a:lnL w="2540" cap="flat" cmpd="sng" algn="ctr">
+                      <a:solidFill>
+                        <a:srgbClr val="EEEEEE"/>
+                      </a:solidFill>
+                      <a:prstDash val="solid"/>
+                      <a:round/>
+                      <a:headEnd type="none" w="med" len="med"/>
+                      <a:tailEnd type="none" w="med" len="med"/>
+                    </a:lnL>
+                    <a:lnR w="2540" cap="flat" cmpd="sng" algn="ctr">
+                      <a:solidFill>
+                        <a:srgbClr val="EEEEEE"/>
+                      </a:solidFill>
+                      <a:prstDash val="solid"/>
+                      <a:round/>
+                      <a:headEnd type="none" w="med" len="med"/>
+                      <a:tailEnd type="none" w="med" len="med"/>
+                    </a:lnR>
+                    <a:lnT w="2540" cap="flat" cmpd="sng" algn="ctr">
+                      <a:solidFill>
+                        <a:srgbClr val="EEEEEE"/>
+                      </a:solidFill>
+                      <a:prstDash val="solid"/>
+                      <a:round/>
+                      <a:headEnd type="none" w="med" len="med"/>
+                      <a:tailEnd type="none" w="med" len="med"/>
+                    </a:lnT>
+                    <a:lnB w="2540" cap="flat" cmpd="sng" algn="ctr">
+                      <a:solidFill>
+                        <a:srgbClr val="EEEEEE"/>
+                      </a:solidFill>
+                      <a:prstDash val="solid"/>
+                      <a:round/>
+                      <a:headEnd type="none" w="med" len="med"/>
+                      <a:tailEnd type="none" w="med" len="med"/>
+                    </a:lnB>
+                  </a:tcPr>
+                </a:tc>
+                <a:tc>
+                  <a:txBody>
+                    <a:bodyPr/>
+                    <a:lstStyle/>
+                    <a:p>
+                      <a:pPr algn="ctr" indent="0" marL="0">
+                        <a:buNone/>
+                      </a:pPr>
+                      <a:r>
+                        <a:rPr lang="en-US" sz="500" dirty="0">
+                          <a:solidFill>
+                            <a:srgbClr val="999999"/>
+                          </a:solidFill>
+                          <a:latin typeface="Calibri" pitchFamily="34" charset="0"/>
+                          <a:ea typeface="Calibri" pitchFamily="34" charset="-122"/>
+                          <a:cs typeface="Calibri" pitchFamily="34" charset="-120"/>
+                        </a:rPr>
+                        <a:t>0.30%</a:t>
+                      </a:r>
+                      <a:endParaRPr lang="en-US" sz="500" dirty="0">
+                        <a:latin typeface="Calibri" charset="0"/>
+                        <a:ea typeface="Calibri" charset="0"/>
+                        <a:cs typeface="Calibri" charset="0"/>
+                      </a:endParaRPr>
+                    </a:p>
+                  </a:txBody>
+                  <a:tcPr marL="91440" marR="91440" marT="45720" marB="45720">
+                    <a:lnL w="2540" cap="flat" cmpd="sng" algn="ctr">
+                      <a:solidFill>
+                        <a:srgbClr val="EEEEEE"/>
+                      </a:solidFill>
+                      <a:prstDash val="solid"/>
+                      <a:round/>
+                      <a:headEnd type="none" w="med" len="med"/>
+                      <a:tailEnd type="none" w="med" len="med"/>
+                    </a:lnL>
+                    <a:lnR w="2540" cap="flat" cmpd="sng" algn="ctr">
+                      <a:solidFill>
+                        <a:srgbClr val="EEEEEE"/>
+                      </a:solidFill>
+                      <a:prstDash val="solid"/>
+                      <a:round/>
+                      <a:headEnd type="none" w="med" len="med"/>
+                      <a:tailEnd type="none" w="med" len="med"/>
+                    </a:lnR>
+                    <a:lnT w="2540" cap="flat" cmpd="sng" algn="ctr">
+                      <a:solidFill>
+                        <a:srgbClr val="EEEEEE"/>
+                      </a:solidFill>
+                      <a:prstDash val="solid"/>
+                      <a:round/>
+                      <a:headEnd type="none" w="med" len="med"/>
+                      <a:tailEnd type="none" w="med" len="med"/>
+                    </a:lnT>
+                    <a:lnB w="2540" cap="flat" cmpd="sng" algn="ctr">
+                      <a:solidFill>
+                        <a:srgbClr val="EEEEEE"/>
+                      </a:solidFill>
+                      <a:prstDash val="solid"/>
+                      <a:round/>
+                      <a:headEnd type="none" w="med" len="med"/>
+                      <a:tailEnd type="none" w="med" len="med"/>
+                    </a:lnB>
+                  </a:tcPr>
+                </a:tc>
+                <a:tc>
+                  <a:txBody>
+                    <a:bodyPr/>
+                    <a:lstStyle/>
+                    <a:p>
+                      <a:pPr algn="ctr" indent="0" marL="0">
+                        <a:buNone/>
+                      </a:pPr>
+                      <a:r>
+                        <a:rPr lang="en-US" sz="500" dirty="0">
+                          <a:solidFill>
+                            <a:srgbClr val="999999"/>
+                          </a:solidFill>
+                          <a:latin typeface="Calibri" pitchFamily="34" charset="0"/>
+                          <a:ea typeface="Calibri" pitchFamily="34" charset="-122"/>
+                          <a:cs typeface="Calibri" pitchFamily="34" charset="-120"/>
+                        </a:rPr>
+                        <a:t>0.30%</a:t>
+                      </a:r>
+                      <a:endParaRPr lang="en-US" sz="500" dirty="0">
+                        <a:latin typeface="Calibri" charset="0"/>
+                        <a:ea typeface="Calibri" charset="0"/>
+                        <a:cs typeface="Calibri" charset="0"/>
+                      </a:endParaRPr>
+                    </a:p>
+                  </a:txBody>
+                  <a:tcPr marL="91440" marR="91440" marT="45720" marB="45720">
+                    <a:lnL w="2540" cap="flat" cmpd="sng" algn="ctr">
+                      <a:solidFill>
+                        <a:srgbClr val="EEEEEE"/>
+                      </a:solidFill>
+                      <a:prstDash val="solid"/>
+                      <a:round/>
+                      <a:headEnd type="none" w="med" len="med"/>
+                      <a:tailEnd type="none" w="med" len="med"/>
+                    </a:lnL>
+                    <a:lnR w="2540" cap="flat" cmpd="sng" algn="ctr">
+                      <a:solidFill>
+                        <a:srgbClr val="EEEEEE"/>
+                      </a:solidFill>
+                      <a:prstDash val="solid"/>
+                      <a:round/>
+                      <a:headEnd type="none" w="med" len="med"/>
+                      <a:tailEnd type="none" w="med" len="med"/>
+                    </a:lnR>
+                    <a:lnT w="2540" cap="flat" cmpd="sng" algn="ctr">
+                      <a:solidFill>
+                        <a:srgbClr val="EEEEEE"/>
+                      </a:solidFill>
+                      <a:prstDash val="solid"/>
+                      <a:round/>
+                      <a:headEnd type="none" w="med" len="med"/>
+                      <a:tailEnd type="none" w="med" len="med"/>
+                    </a:lnT>
+                    <a:lnB w="2540" cap="flat" cmpd="sng" algn="ctr">
+                      <a:solidFill>
+                        <a:srgbClr val="EEEEEE"/>
+                      </a:solidFill>
+                      <a:prstDash val="solid"/>
+                      <a:round/>
+                      <a:headEnd type="none" w="med" len="med"/>
+                      <a:tailEnd type="none" w="med" len="med"/>
+                    </a:lnB>
+                  </a:tcPr>
+                </a:tc>
+                <a:tc>
+                  <a:txBody>
+                    <a:bodyPr/>
+                    <a:lstStyle/>
+                    <a:p>
+                      <a:pPr algn="ctr" indent="0" marL="0">
+                        <a:buNone/>
+                      </a:pPr>
+                      <a:r>
+                        <a:rPr lang="en-US" sz="500" dirty="0">
+                          <a:solidFill>
+                            <a:srgbClr val="999999"/>
+                          </a:solidFill>
+                          <a:latin typeface="Calibri" pitchFamily="34" charset="0"/>
+                          <a:ea typeface="Calibri" pitchFamily="34" charset="-122"/>
+                          <a:cs typeface="Calibri" pitchFamily="34" charset="-120"/>
+                        </a:rPr>
+                        <a:t>0.28%</a:t>
+                      </a:r>
+                      <a:endParaRPr lang="en-US" sz="500" dirty="0">
+                        <a:latin typeface="Calibri" charset="0"/>
+                        <a:ea typeface="Calibri" charset="0"/>
+                        <a:cs typeface="Calibri" charset="0"/>
+                      </a:endParaRPr>
+                    </a:p>
+                  </a:txBody>
+                  <a:tcPr marL="91440" marR="91440" marT="45720" marB="45720">
+                    <a:lnL w="2540" cap="flat" cmpd="sng" algn="ctr">
+                      <a:solidFill>
+                        <a:srgbClr val="EEEEEE"/>
+                      </a:solidFill>
+                      <a:prstDash val="solid"/>
+                      <a:round/>
+                      <a:headEnd type="none" w="med" len="med"/>
+                      <a:tailEnd type="none" w="med" len="med"/>
+                    </a:lnL>
+                    <a:lnR w="2540" cap="flat" cmpd="sng" algn="ctr">
+                      <a:solidFill>
+                        <a:srgbClr val="EEEEEE"/>
+                      </a:solidFill>
+                      <a:prstDash val="solid"/>
+                      <a:round/>
+                      <a:headEnd type="none" w="med" len="med"/>
+                      <a:tailEnd type="none" w="med" len="med"/>
+                    </a:lnR>
+                    <a:lnT w="2540" cap="flat" cmpd="sng" algn="ctr">
+                      <a:solidFill>
+                        <a:srgbClr val="EEEEEE"/>
+                      </a:solidFill>
+                      <a:prstDash val="solid"/>
+                      <a:round/>
+                      <a:headEnd type="none" w="med" len="med"/>
+                      <a:tailEnd type="none" w="med" len="med"/>
+                    </a:lnT>
+                    <a:lnB w="2540" cap="flat" cmpd="sng" algn="ctr">
+                      <a:solidFill>
+                        <a:srgbClr val="EEEEEE"/>
+                      </a:solidFill>
+                      <a:prstDash val="solid"/>
+                      <a:round/>
+                      <a:headEnd type="none" w="med" len="med"/>
+                      <a:tailEnd type="none" w="med" len="med"/>
+                    </a:lnB>
+                  </a:tcPr>
+                </a:tc>
+                <a:tc>
+                  <a:txBody>
+                    <a:bodyPr/>
+                    <a:lstStyle/>
+                    <a:p>
+                      <a:pPr algn="ctr" indent="0" marL="0">
+                        <a:buNone/>
+                      </a:pPr>
+                      <a:r>
+                        <a:rPr lang="en-US" sz="500" dirty="0">
+                          <a:solidFill>
+                            <a:srgbClr val="999999"/>
+                          </a:solidFill>
+                          <a:latin typeface="Calibri" pitchFamily="34" charset="0"/>
+                          <a:ea typeface="Calibri" pitchFamily="34" charset="-122"/>
+                          <a:cs typeface="Calibri" pitchFamily="34" charset="-120"/>
+                        </a:rPr>
+                        <a:t>0.29%</a:t>
+                      </a:r>
+                      <a:endParaRPr lang="en-US" sz="500" dirty="0">
+                        <a:latin typeface="Calibri" charset="0"/>
+                        <a:ea typeface="Calibri" charset="0"/>
+                        <a:cs typeface="Calibri" charset="0"/>
+                      </a:endParaRPr>
+                    </a:p>
+                  </a:txBody>
+                  <a:tcPr marL="91440" marR="91440" marT="45720" marB="45720">
+                    <a:lnL w="2540" cap="flat" cmpd="sng" algn="ctr">
+                      <a:solidFill>
+                        <a:srgbClr val="EEEEEE"/>
+                      </a:solidFill>
+                      <a:prstDash val="solid"/>
+                      <a:round/>
+                      <a:headEnd type="none" w="med" len="med"/>
+                      <a:tailEnd type="none" w="med" len="med"/>
+                    </a:lnL>
+                    <a:lnR w="2540" cap="flat" cmpd="sng" algn="ctr">
+                      <a:solidFill>
+                        <a:srgbClr val="EEEEEE"/>
+                      </a:solidFill>
+                      <a:prstDash val="solid"/>
+                      <a:round/>
+                      <a:headEnd type="none" w="med" len="med"/>
+                      <a:tailEnd type="none" w="med" len="med"/>
+                    </a:lnR>
+                    <a:lnT w="2540" cap="flat" cmpd="sng" algn="ctr">
+                      <a:solidFill>
+                        <a:srgbClr val="EEEEEE"/>
+                      </a:solidFill>
+                      <a:prstDash val="solid"/>
+                      <a:round/>
+                      <a:headEnd type="none" w="med" len="med"/>
+                      <a:tailEnd type="none" w="med" len="med"/>
+                    </a:lnT>
+                    <a:lnB w="2540" cap="flat" cmpd="sng" algn="ctr">
+                      <a:solidFill>
+                        <a:srgbClr val="EEEEEE"/>
+                      </a:solidFill>
+                      <a:prstDash val="solid"/>
+                      <a:round/>
+                      <a:headEnd type="none" w="med" len="med"/>
+                      <a:tailEnd type="none" w="med" len="med"/>
+                    </a:lnB>
+                  </a:tcPr>
+                </a:tc>
+                <a:tc>
+                  <a:txBody>
+                    <a:bodyPr/>
+                    <a:lstStyle/>
+                    <a:p>
+                      <a:pPr algn="ctr" indent="0" marL="0">
+                        <a:buNone/>
+                      </a:pPr>
+                      <a:r>
+                        <a:rPr lang="en-US" sz="500" dirty="0">
+                          <a:solidFill>
+                            <a:srgbClr val="999999"/>
+                          </a:solidFill>
+                          <a:latin typeface="Calibri" pitchFamily="34" charset="0"/>
+                          <a:ea typeface="Calibri" pitchFamily="34" charset="-122"/>
+                          <a:cs typeface="Calibri" pitchFamily="34" charset="-120"/>
+                        </a:rPr>
+                        <a:t>0.28%</a:t>
+                      </a:r>
+                      <a:endParaRPr lang="en-US" sz="500" dirty="0">
+                        <a:latin typeface="Calibri" charset="0"/>
+                        <a:ea typeface="Calibri" charset="0"/>
+                        <a:cs typeface="Calibri" charset="0"/>
+                      </a:endParaRPr>
+                    </a:p>
+                  </a:txBody>
+                  <a:tcPr marL="91440" marR="91440" marT="45720" marB="45720">
+                    <a:lnL w="2540" cap="flat" cmpd="sng" algn="ctr">
+                      <a:solidFill>
+                        <a:srgbClr val="EEEEEE"/>
+                      </a:solidFill>
+                      <a:prstDash val="solid"/>
+                      <a:round/>
+                      <a:headEnd type="none" w="med" len="med"/>
+                      <a:tailEnd type="none" w="med" len="med"/>
+                    </a:lnL>
+                    <a:lnR w="2540" cap="flat" cmpd="sng" algn="ctr">
+                      <a:solidFill>
+                        <a:srgbClr val="EEEEEE"/>
+                      </a:solidFill>
+                      <a:prstDash val="solid"/>
+                      <a:round/>
+                      <a:headEnd type="none" w="med" len="med"/>
+                      <a:tailEnd type="none" w="med" len="med"/>
+                    </a:lnR>
+                    <a:lnT w="2540" cap="flat" cmpd="sng" algn="ctr">
+                      <a:solidFill>
+                        <a:srgbClr val="EEEEEE"/>
+                      </a:solidFill>
+                      <a:prstDash val="solid"/>
+                      <a:round/>
+                      <a:headEnd type="none" w="med" len="med"/>
+                      <a:tailEnd type="none" w="med" len="med"/>
+                    </a:lnT>
+                    <a:lnB w="2540" cap="flat" cmpd="sng" algn="ctr">
+                      <a:solidFill>
+                        <a:srgbClr val="EEEEEE"/>
+                      </a:solidFill>
+                      <a:prstDash val="solid"/>
+                      <a:round/>
+                      <a:headEnd type="none" w="med" len="med"/>
+                      <a:tailEnd type="none" w="med" len="med"/>
+                    </a:lnB>
+                  </a:tcPr>
+                </a:tc>
+                <a:tc>
+                  <a:txBody>
+                    <a:bodyPr/>
+                    <a:lstStyle/>
+                    <a:p>
+                      <a:pPr algn="ctr" indent="0" marL="0">
+                        <a:buNone/>
+                      </a:pPr>
+                      <a:r>
+                        <a:rPr lang="en-US" sz="500" dirty="0">
+                          <a:solidFill>
+                            <a:srgbClr val="999999"/>
+                          </a:solidFill>
+                          <a:latin typeface="Calibri" pitchFamily="34" charset="0"/>
+                          <a:ea typeface="Calibri" pitchFamily="34" charset="-122"/>
+                          <a:cs typeface="Calibri" pitchFamily="34" charset="-120"/>
+                        </a:rPr>
+                        <a:t>0.28%</a:t>
                       </a:r>
                       <a:endParaRPr lang="en-US" sz="500" dirty="0">
                         <a:latin typeface="Calibri" charset="0"/>
@@ -7837,7 +10797,7 @@
                           <a:ea typeface="Calibri" pitchFamily="34" charset="-122"/>
                           <a:cs typeface="Calibri" pitchFamily="34" charset="-120"/>
                         </a:rPr>
-                        <a:t>-1.66%</a:t>
+                        <a:t>3.26%</a:t>
                       </a:r>
                       <a:endParaRPr lang="en-US" sz="500" dirty="0">
                         <a:latin typeface="Calibri" charset="0"/>
@@ -7947,6 +10907,71 @@
                     <a:lstStyle/>
                     <a:p>
                       <a:pPr algn="l" indent="0" marL="0">
+                        <a:buNone/>
+                      </a:pPr>
+                      <a:r>
+                        <a:rPr lang="en-US" sz="400" dirty="0">
+                          <a:solidFill>
+                            <a:srgbClr val="000000"/>
+                          </a:solidFill>
+                          <a:latin typeface="Calibri" pitchFamily="34" charset="0"/>
+                          <a:ea typeface="Calibri" pitchFamily="34" charset="-122"/>
+                          <a:cs typeface="Calibri" pitchFamily="34" charset="-120"/>
+                        </a:rPr>
+                        <a:t>FIP LIQUIDEZ DISPONIBLE I</a:t>
+                      </a:r>
+                      <a:endParaRPr lang="en-US" sz="400" dirty="0">
+                        <a:latin typeface="Calibri" charset="0"/>
+                        <a:ea typeface="Calibri" charset="0"/>
+                        <a:cs typeface="Calibri" charset="0"/>
+                      </a:endParaRPr>
+                    </a:p>
+                  </a:txBody>
+                  <a:tcPr marL="91440" marR="91440" marT="45720" marB="45720">
+                    <a:lnL w="2540" cap="flat" cmpd="sng" algn="ctr">
+                      <a:solidFill>
+                        <a:srgbClr val="EEEEEE"/>
+                      </a:solidFill>
+                      <a:prstDash val="solid"/>
+                      <a:round/>
+                      <a:headEnd type="none" w="med" len="med"/>
+                      <a:tailEnd type="none" w="med" len="med"/>
+                    </a:lnL>
+                    <a:lnR w="2540" cap="flat" cmpd="sng" algn="ctr">
+                      <a:solidFill>
+                        <a:srgbClr val="EEEEEE"/>
+                      </a:solidFill>
+                      <a:prstDash val="solid"/>
+                      <a:round/>
+                      <a:headEnd type="none" w="med" len="med"/>
+                      <a:tailEnd type="none" w="med" len="med"/>
+                    </a:lnR>
+                    <a:lnT w="2540" cap="flat" cmpd="sng" algn="ctr">
+                      <a:solidFill>
+                        <a:srgbClr val="EEEEEE"/>
+                      </a:solidFill>
+                      <a:prstDash val="solid"/>
+                      <a:round/>
+                      <a:headEnd type="none" w="med" len="med"/>
+                      <a:tailEnd type="none" w="med" len="med"/>
+                    </a:lnT>
+                    <a:lnB w="2540" cap="flat" cmpd="sng" algn="ctr">
+                      <a:solidFill>
+                        <a:srgbClr val="EEEEEE"/>
+                      </a:solidFill>
+                      <a:prstDash val="solid"/>
+                      <a:round/>
+                      <a:headEnd type="none" w="med" len="med"/>
+                      <a:tailEnd type="none" w="med" len="med"/>
+                    </a:lnB>
+                  </a:tcPr>
+                </a:tc>
+                <a:tc>
+                  <a:txBody>
+                    <a:bodyPr/>
+                    <a:lstStyle/>
+                    <a:p>
+                      <a:pPr algn="ctr" indent="0" marL="0">
                         <a:buNone/>
                       </a:pPr>
                       <a:r>
@@ -7958,386 +10983,8 @@
                           <a:ea typeface="Calibri" pitchFamily="34" charset="-122"/>
                           <a:cs typeface="Calibri" pitchFamily="34" charset="-120"/>
                         </a:rPr>
-                        <a:t>FIP LIQUIDEZ DISPONIBLE I</a:t>
+                        <a:t>0.44%</a:t>
                       </a:r>
-                      <a:endParaRPr lang="en-US" sz="500" dirty="0">
-                        <a:latin typeface="Calibri" charset="0"/>
-                        <a:ea typeface="Calibri" charset="0"/>
-                        <a:cs typeface="Calibri" charset="0"/>
-                      </a:endParaRPr>
-                    </a:p>
-                  </a:txBody>
-                  <a:tcPr marL="91440" marR="91440" marT="45720" marB="45720">
-                    <a:lnL w="2540" cap="flat" cmpd="sng" algn="ctr">
-                      <a:solidFill>
-                        <a:srgbClr val="EEEEEE"/>
-                      </a:solidFill>
-                      <a:prstDash val="solid"/>
-                      <a:round/>
-                      <a:headEnd type="none" w="med" len="med"/>
-                      <a:tailEnd type="none" w="med" len="med"/>
-                    </a:lnL>
-                    <a:lnR w="2540" cap="flat" cmpd="sng" algn="ctr">
-                      <a:solidFill>
-                        <a:srgbClr val="EEEEEE"/>
-                      </a:solidFill>
-                      <a:prstDash val="solid"/>
-                      <a:round/>
-                      <a:headEnd type="none" w="med" len="med"/>
-                      <a:tailEnd type="none" w="med" len="med"/>
-                    </a:lnR>
-                    <a:lnT w="2540" cap="flat" cmpd="sng" algn="ctr">
-                      <a:solidFill>
-                        <a:srgbClr val="EEEEEE"/>
-                      </a:solidFill>
-                      <a:prstDash val="solid"/>
-                      <a:round/>
-                      <a:headEnd type="none" w="med" len="med"/>
-                      <a:tailEnd type="none" w="med" len="med"/>
-                    </a:lnT>
-                    <a:lnB w="2540" cap="flat" cmpd="sng" algn="ctr">
-                      <a:solidFill>
-                        <a:srgbClr val="EEEEEE"/>
-                      </a:solidFill>
-                      <a:prstDash val="solid"/>
-                      <a:round/>
-                      <a:headEnd type="none" w="med" len="med"/>
-                      <a:tailEnd type="none" w="med" len="med"/>
-                    </a:lnB>
-                  </a:tcPr>
-                </a:tc>
-                <a:tc>
-                  <a:txBody>
-                    <a:bodyPr/>
-                    <a:lstStyle/>
-                    <a:p>
-                      <a:pPr algn="ctr" indent="0" marL="0">
-                        <a:buNone/>
-                      </a:pPr>
-                      <a:endParaRPr lang="en-US" sz="500" dirty="0">
-                        <a:latin typeface="Calibri" charset="0"/>
-                        <a:ea typeface="Calibri" charset="0"/>
-                        <a:cs typeface="Calibri" charset="0"/>
-                      </a:endParaRPr>
-                    </a:p>
-                  </a:txBody>
-                  <a:tcPr marL="91440" marR="91440" marT="45720" marB="45720">
-                    <a:lnL w="2540" cap="flat" cmpd="sng" algn="ctr">
-                      <a:solidFill>
-                        <a:srgbClr val="EEEEEE"/>
-                      </a:solidFill>
-                      <a:prstDash val="solid"/>
-                      <a:round/>
-                      <a:headEnd type="none" w="med" len="med"/>
-                      <a:tailEnd type="none" w="med" len="med"/>
-                    </a:lnL>
-                    <a:lnR w="2540" cap="flat" cmpd="sng" algn="ctr">
-                      <a:solidFill>
-                        <a:srgbClr val="EEEEEE"/>
-                      </a:solidFill>
-                      <a:prstDash val="solid"/>
-                      <a:round/>
-                      <a:headEnd type="none" w="med" len="med"/>
-                      <a:tailEnd type="none" w="med" len="med"/>
-                    </a:lnR>
-                    <a:lnT w="2540" cap="flat" cmpd="sng" algn="ctr">
-                      <a:solidFill>
-                        <a:srgbClr val="EEEEEE"/>
-                      </a:solidFill>
-                      <a:prstDash val="solid"/>
-                      <a:round/>
-                      <a:headEnd type="none" w="med" len="med"/>
-                      <a:tailEnd type="none" w="med" len="med"/>
-                    </a:lnT>
-                    <a:lnB w="2540" cap="flat" cmpd="sng" algn="ctr">
-                      <a:solidFill>
-                        <a:srgbClr val="EEEEEE"/>
-                      </a:solidFill>
-                      <a:prstDash val="solid"/>
-                      <a:round/>
-                      <a:headEnd type="none" w="med" len="med"/>
-                      <a:tailEnd type="none" w="med" len="med"/>
-                    </a:lnB>
-                  </a:tcPr>
-                </a:tc>
-                <a:tc>
-                  <a:txBody>
-                    <a:bodyPr/>
-                    <a:lstStyle/>
-                    <a:p>
-                      <a:pPr algn="ctr" indent="0" marL="0">
-                        <a:buNone/>
-                      </a:pPr>
-                      <a:endParaRPr lang="en-US" sz="500" dirty="0">
-                        <a:latin typeface="Calibri" charset="0"/>
-                        <a:ea typeface="Calibri" charset="0"/>
-                        <a:cs typeface="Calibri" charset="0"/>
-                      </a:endParaRPr>
-                    </a:p>
-                  </a:txBody>
-                  <a:tcPr marL="91440" marR="91440" marT="45720" marB="45720">
-                    <a:lnL w="2540" cap="flat" cmpd="sng" algn="ctr">
-                      <a:solidFill>
-                        <a:srgbClr val="EEEEEE"/>
-                      </a:solidFill>
-                      <a:prstDash val="solid"/>
-                      <a:round/>
-                      <a:headEnd type="none" w="med" len="med"/>
-                      <a:tailEnd type="none" w="med" len="med"/>
-                    </a:lnL>
-                    <a:lnR w="2540" cap="flat" cmpd="sng" algn="ctr">
-                      <a:solidFill>
-                        <a:srgbClr val="EEEEEE"/>
-                      </a:solidFill>
-                      <a:prstDash val="solid"/>
-                      <a:round/>
-                      <a:headEnd type="none" w="med" len="med"/>
-                      <a:tailEnd type="none" w="med" len="med"/>
-                    </a:lnR>
-                    <a:lnT w="2540" cap="flat" cmpd="sng" algn="ctr">
-                      <a:solidFill>
-                        <a:srgbClr val="EEEEEE"/>
-                      </a:solidFill>
-                      <a:prstDash val="solid"/>
-                      <a:round/>
-                      <a:headEnd type="none" w="med" len="med"/>
-                      <a:tailEnd type="none" w="med" len="med"/>
-                    </a:lnT>
-                    <a:lnB w="2540" cap="flat" cmpd="sng" algn="ctr">
-                      <a:solidFill>
-                        <a:srgbClr val="EEEEEE"/>
-                      </a:solidFill>
-                      <a:prstDash val="solid"/>
-                      <a:round/>
-                      <a:headEnd type="none" w="med" len="med"/>
-                      <a:tailEnd type="none" w="med" len="med"/>
-                    </a:lnB>
-                  </a:tcPr>
-                </a:tc>
-                <a:tc>
-                  <a:txBody>
-                    <a:bodyPr/>
-                    <a:lstStyle/>
-                    <a:p>
-                      <a:pPr algn="ctr" indent="0" marL="0">
-                        <a:buNone/>
-                      </a:pPr>
-                      <a:endParaRPr lang="en-US" sz="500" dirty="0">
-                        <a:latin typeface="Calibri" charset="0"/>
-                        <a:ea typeface="Calibri" charset="0"/>
-                        <a:cs typeface="Calibri" charset="0"/>
-                      </a:endParaRPr>
-                    </a:p>
-                  </a:txBody>
-                  <a:tcPr marL="91440" marR="91440" marT="45720" marB="45720">
-                    <a:lnL w="2540" cap="flat" cmpd="sng" algn="ctr">
-                      <a:solidFill>
-                        <a:srgbClr val="EEEEEE"/>
-                      </a:solidFill>
-                      <a:prstDash val="solid"/>
-                      <a:round/>
-                      <a:headEnd type="none" w="med" len="med"/>
-                      <a:tailEnd type="none" w="med" len="med"/>
-                    </a:lnL>
-                    <a:lnR w="2540" cap="flat" cmpd="sng" algn="ctr">
-                      <a:solidFill>
-                        <a:srgbClr val="EEEEEE"/>
-                      </a:solidFill>
-                      <a:prstDash val="solid"/>
-                      <a:round/>
-                      <a:headEnd type="none" w="med" len="med"/>
-                      <a:tailEnd type="none" w="med" len="med"/>
-                    </a:lnR>
-                    <a:lnT w="2540" cap="flat" cmpd="sng" algn="ctr">
-                      <a:solidFill>
-                        <a:srgbClr val="EEEEEE"/>
-                      </a:solidFill>
-                      <a:prstDash val="solid"/>
-                      <a:round/>
-                      <a:headEnd type="none" w="med" len="med"/>
-                      <a:tailEnd type="none" w="med" len="med"/>
-                    </a:lnT>
-                    <a:lnB w="2540" cap="flat" cmpd="sng" algn="ctr">
-                      <a:solidFill>
-                        <a:srgbClr val="EEEEEE"/>
-                      </a:solidFill>
-                      <a:prstDash val="solid"/>
-                      <a:round/>
-                      <a:headEnd type="none" w="med" len="med"/>
-                      <a:tailEnd type="none" w="med" len="med"/>
-                    </a:lnB>
-                  </a:tcPr>
-                </a:tc>
-                <a:tc>
-                  <a:txBody>
-                    <a:bodyPr/>
-                    <a:lstStyle/>
-                    <a:p>
-                      <a:pPr algn="ctr" indent="0" marL="0">
-                        <a:buNone/>
-                      </a:pPr>
-                      <a:endParaRPr lang="en-US" sz="500" dirty="0">
-                        <a:latin typeface="Calibri" charset="0"/>
-                        <a:ea typeface="Calibri" charset="0"/>
-                        <a:cs typeface="Calibri" charset="0"/>
-                      </a:endParaRPr>
-                    </a:p>
-                  </a:txBody>
-                  <a:tcPr marL="91440" marR="91440" marT="45720" marB="45720">
-                    <a:lnL w="2540" cap="flat" cmpd="sng" algn="ctr">
-                      <a:solidFill>
-                        <a:srgbClr val="EEEEEE"/>
-                      </a:solidFill>
-                      <a:prstDash val="solid"/>
-                      <a:round/>
-                      <a:headEnd type="none" w="med" len="med"/>
-                      <a:tailEnd type="none" w="med" len="med"/>
-                    </a:lnL>
-                    <a:lnR w="2540" cap="flat" cmpd="sng" algn="ctr">
-                      <a:solidFill>
-                        <a:srgbClr val="EEEEEE"/>
-                      </a:solidFill>
-                      <a:prstDash val="solid"/>
-                      <a:round/>
-                      <a:headEnd type="none" w="med" len="med"/>
-                      <a:tailEnd type="none" w="med" len="med"/>
-                    </a:lnR>
-                    <a:lnT w="2540" cap="flat" cmpd="sng" algn="ctr">
-                      <a:solidFill>
-                        <a:srgbClr val="EEEEEE"/>
-                      </a:solidFill>
-                      <a:prstDash val="solid"/>
-                      <a:round/>
-                      <a:headEnd type="none" w="med" len="med"/>
-                      <a:tailEnd type="none" w="med" len="med"/>
-                    </a:lnT>
-                    <a:lnB w="2540" cap="flat" cmpd="sng" algn="ctr">
-                      <a:solidFill>
-                        <a:srgbClr val="EEEEEE"/>
-                      </a:solidFill>
-                      <a:prstDash val="solid"/>
-                      <a:round/>
-                      <a:headEnd type="none" w="med" len="med"/>
-                      <a:tailEnd type="none" w="med" len="med"/>
-                    </a:lnB>
-                  </a:tcPr>
-                </a:tc>
-                <a:tc>
-                  <a:txBody>
-                    <a:bodyPr/>
-                    <a:lstStyle/>
-                    <a:p>
-                      <a:pPr algn="ctr" indent="0" marL="0">
-                        <a:buNone/>
-                      </a:pPr>
-                      <a:endParaRPr lang="en-US" sz="500" dirty="0">
-                        <a:latin typeface="Calibri" charset="0"/>
-                        <a:ea typeface="Calibri" charset="0"/>
-                        <a:cs typeface="Calibri" charset="0"/>
-                      </a:endParaRPr>
-                    </a:p>
-                  </a:txBody>
-                  <a:tcPr marL="91440" marR="91440" marT="45720" marB="45720">
-                    <a:lnL w="2540" cap="flat" cmpd="sng" algn="ctr">
-                      <a:solidFill>
-                        <a:srgbClr val="EEEEEE"/>
-                      </a:solidFill>
-                      <a:prstDash val="solid"/>
-                      <a:round/>
-                      <a:headEnd type="none" w="med" len="med"/>
-                      <a:tailEnd type="none" w="med" len="med"/>
-                    </a:lnL>
-                    <a:lnR w="2540" cap="flat" cmpd="sng" algn="ctr">
-                      <a:solidFill>
-                        <a:srgbClr val="EEEEEE"/>
-                      </a:solidFill>
-                      <a:prstDash val="solid"/>
-                      <a:round/>
-                      <a:headEnd type="none" w="med" len="med"/>
-                      <a:tailEnd type="none" w="med" len="med"/>
-                    </a:lnR>
-                    <a:lnT w="2540" cap="flat" cmpd="sng" algn="ctr">
-                      <a:solidFill>
-                        <a:srgbClr val="EEEEEE"/>
-                      </a:solidFill>
-                      <a:prstDash val="solid"/>
-                      <a:round/>
-                      <a:headEnd type="none" w="med" len="med"/>
-                      <a:tailEnd type="none" w="med" len="med"/>
-                    </a:lnT>
-                    <a:lnB w="2540" cap="flat" cmpd="sng" algn="ctr">
-                      <a:solidFill>
-                        <a:srgbClr val="EEEEEE"/>
-                      </a:solidFill>
-                      <a:prstDash val="solid"/>
-                      <a:round/>
-                      <a:headEnd type="none" w="med" len="med"/>
-                      <a:tailEnd type="none" w="med" len="med"/>
-                    </a:lnB>
-                  </a:tcPr>
-                </a:tc>
-                <a:tc>
-                  <a:txBody>
-                    <a:bodyPr/>
-                    <a:lstStyle/>
-                    <a:p>
-                      <a:pPr algn="ctr" indent="0" marL="0">
-                        <a:buNone/>
-                      </a:pPr>
-                      <a:endParaRPr lang="en-US" sz="500" dirty="0">
-                        <a:latin typeface="Calibri" charset="0"/>
-                        <a:ea typeface="Calibri" charset="0"/>
-                        <a:cs typeface="Calibri" charset="0"/>
-                      </a:endParaRPr>
-                    </a:p>
-                  </a:txBody>
-                  <a:tcPr marL="91440" marR="91440" marT="45720" marB="45720">
-                    <a:lnL w="2540" cap="flat" cmpd="sng" algn="ctr">
-                      <a:solidFill>
-                        <a:srgbClr val="EEEEEE"/>
-                      </a:solidFill>
-                      <a:prstDash val="solid"/>
-                      <a:round/>
-                      <a:headEnd type="none" w="med" len="med"/>
-                      <a:tailEnd type="none" w="med" len="med"/>
-                    </a:lnL>
-                    <a:lnR w="2540" cap="flat" cmpd="sng" algn="ctr">
-                      <a:solidFill>
-                        <a:srgbClr val="EEEEEE"/>
-                      </a:solidFill>
-                      <a:prstDash val="solid"/>
-                      <a:round/>
-                      <a:headEnd type="none" w="med" len="med"/>
-                      <a:tailEnd type="none" w="med" len="med"/>
-                    </a:lnR>
-                    <a:lnT w="2540" cap="flat" cmpd="sng" algn="ctr">
-                      <a:solidFill>
-                        <a:srgbClr val="EEEEEE"/>
-                      </a:solidFill>
-                      <a:prstDash val="solid"/>
-                      <a:round/>
-                      <a:headEnd type="none" w="med" len="med"/>
-                      <a:tailEnd type="none" w="med" len="med"/>
-                    </a:lnT>
-                    <a:lnB w="2540" cap="flat" cmpd="sng" algn="ctr">
-                      <a:solidFill>
-                        <a:srgbClr val="EEEEEE"/>
-                      </a:solidFill>
-                      <a:prstDash val="solid"/>
-                      <a:round/>
-                      <a:headEnd type="none" w="med" len="med"/>
-                      <a:tailEnd type="none" w="med" len="med"/>
-                    </a:lnB>
-                  </a:tcPr>
-                </a:tc>
-                <a:tc>
-                  <a:txBody>
-                    <a:bodyPr/>
-                    <a:lstStyle/>
-                    <a:p>
-                      <a:pPr algn="ctr" indent="0" marL="0">
-                        <a:buNone/>
-                      </a:pPr>
                       <a:endParaRPr lang="en-US" sz="500" dirty="0">
                         <a:latin typeface="Calibri" charset="0"/>
                         <a:ea typeface="Calibri" charset="0"/>
@@ -8401,7 +11048,202 @@
                           <a:ea typeface="Calibri" pitchFamily="34" charset="-122"/>
                           <a:cs typeface="Calibri" pitchFamily="34" charset="-120"/>
                         </a:rPr>
-                        <a:t>0.18%</a:t>
+                        <a:t>0.45%</a:t>
+                      </a:r>
+                      <a:endParaRPr lang="en-US" sz="500" dirty="0">
+                        <a:latin typeface="Calibri" charset="0"/>
+                        <a:ea typeface="Calibri" charset="0"/>
+                        <a:cs typeface="Calibri" charset="0"/>
+                      </a:endParaRPr>
+                    </a:p>
+                  </a:txBody>
+                  <a:tcPr marL="91440" marR="91440" marT="45720" marB="45720">
+                    <a:lnL w="2540" cap="flat" cmpd="sng" algn="ctr">
+                      <a:solidFill>
+                        <a:srgbClr val="EEEEEE"/>
+                      </a:solidFill>
+                      <a:prstDash val="solid"/>
+                      <a:round/>
+                      <a:headEnd type="none" w="med" len="med"/>
+                      <a:tailEnd type="none" w="med" len="med"/>
+                    </a:lnL>
+                    <a:lnR w="2540" cap="flat" cmpd="sng" algn="ctr">
+                      <a:solidFill>
+                        <a:srgbClr val="EEEEEE"/>
+                      </a:solidFill>
+                      <a:prstDash val="solid"/>
+                      <a:round/>
+                      <a:headEnd type="none" w="med" len="med"/>
+                      <a:tailEnd type="none" w="med" len="med"/>
+                    </a:lnR>
+                    <a:lnT w="2540" cap="flat" cmpd="sng" algn="ctr">
+                      <a:solidFill>
+                        <a:srgbClr val="EEEEEE"/>
+                      </a:solidFill>
+                      <a:prstDash val="solid"/>
+                      <a:round/>
+                      <a:headEnd type="none" w="med" len="med"/>
+                      <a:tailEnd type="none" w="med" len="med"/>
+                    </a:lnT>
+                    <a:lnB w="2540" cap="flat" cmpd="sng" algn="ctr">
+                      <a:solidFill>
+                        <a:srgbClr val="EEEEEE"/>
+                      </a:solidFill>
+                      <a:prstDash val="solid"/>
+                      <a:round/>
+                      <a:headEnd type="none" w="med" len="med"/>
+                      <a:tailEnd type="none" w="med" len="med"/>
+                    </a:lnB>
+                  </a:tcPr>
+                </a:tc>
+                <a:tc>
+                  <a:txBody>
+                    <a:bodyPr/>
+                    <a:lstStyle/>
+                    <a:p>
+                      <a:pPr algn="ctr" indent="0" marL="0">
+                        <a:buNone/>
+                      </a:pPr>
+                      <a:r>
+                        <a:rPr lang="en-US" sz="500" dirty="0">
+                          <a:solidFill>
+                            <a:srgbClr val="000000"/>
+                          </a:solidFill>
+                          <a:latin typeface="Calibri" pitchFamily="34" charset="0"/>
+                          <a:ea typeface="Calibri" pitchFamily="34" charset="-122"/>
+                          <a:cs typeface="Calibri" pitchFamily="34" charset="-120"/>
+                        </a:rPr>
+                        <a:t>0.60%</a:t>
+                      </a:r>
+                      <a:endParaRPr lang="en-US" sz="500" dirty="0">
+                        <a:latin typeface="Calibri" charset="0"/>
+                        <a:ea typeface="Calibri" charset="0"/>
+                        <a:cs typeface="Calibri" charset="0"/>
+                      </a:endParaRPr>
+                    </a:p>
+                  </a:txBody>
+                  <a:tcPr marL="91440" marR="91440" marT="45720" marB="45720">
+                    <a:lnL w="2540" cap="flat" cmpd="sng" algn="ctr">
+                      <a:solidFill>
+                        <a:srgbClr val="EEEEEE"/>
+                      </a:solidFill>
+                      <a:prstDash val="solid"/>
+                      <a:round/>
+                      <a:headEnd type="none" w="med" len="med"/>
+                      <a:tailEnd type="none" w="med" len="med"/>
+                    </a:lnL>
+                    <a:lnR w="2540" cap="flat" cmpd="sng" algn="ctr">
+                      <a:solidFill>
+                        <a:srgbClr val="EEEEEE"/>
+                      </a:solidFill>
+                      <a:prstDash val="solid"/>
+                      <a:round/>
+                      <a:headEnd type="none" w="med" len="med"/>
+                      <a:tailEnd type="none" w="med" len="med"/>
+                    </a:lnR>
+                    <a:lnT w="2540" cap="flat" cmpd="sng" algn="ctr">
+                      <a:solidFill>
+                        <a:srgbClr val="EEEEEE"/>
+                      </a:solidFill>
+                      <a:prstDash val="solid"/>
+                      <a:round/>
+                      <a:headEnd type="none" w="med" len="med"/>
+                      <a:tailEnd type="none" w="med" len="med"/>
+                    </a:lnT>
+                    <a:lnB w="2540" cap="flat" cmpd="sng" algn="ctr">
+                      <a:solidFill>
+                        <a:srgbClr val="EEEEEE"/>
+                      </a:solidFill>
+                      <a:prstDash val="solid"/>
+                      <a:round/>
+                      <a:headEnd type="none" w="med" len="med"/>
+                      <a:tailEnd type="none" w="med" len="med"/>
+                    </a:lnB>
+                  </a:tcPr>
+                </a:tc>
+                <a:tc>
+                  <a:txBody>
+                    <a:bodyPr/>
+                    <a:lstStyle/>
+                    <a:p>
+                      <a:pPr algn="ctr" indent="0" marL="0">
+                        <a:buNone/>
+                      </a:pPr>
+                      <a:r>
+                        <a:rPr lang="en-US" sz="500" dirty="0">
+                          <a:solidFill>
+                            <a:srgbClr val="000000"/>
+                          </a:solidFill>
+                          <a:latin typeface="Calibri" pitchFamily="34" charset="0"/>
+                          <a:ea typeface="Calibri" pitchFamily="34" charset="-122"/>
+                          <a:cs typeface="Calibri" pitchFamily="34" charset="-120"/>
+                        </a:rPr>
+                        <a:t>0.70%</a:t>
+                      </a:r>
+                      <a:endParaRPr lang="en-US" sz="500" dirty="0">
+                        <a:latin typeface="Calibri" charset="0"/>
+                        <a:ea typeface="Calibri" charset="0"/>
+                        <a:cs typeface="Calibri" charset="0"/>
+                      </a:endParaRPr>
+                    </a:p>
+                  </a:txBody>
+                  <a:tcPr marL="91440" marR="91440" marT="45720" marB="45720">
+                    <a:lnL w="2540" cap="flat" cmpd="sng" algn="ctr">
+                      <a:solidFill>
+                        <a:srgbClr val="EEEEEE"/>
+                      </a:solidFill>
+                      <a:prstDash val="solid"/>
+                      <a:round/>
+                      <a:headEnd type="none" w="med" len="med"/>
+                      <a:tailEnd type="none" w="med" len="med"/>
+                    </a:lnL>
+                    <a:lnR w="2540" cap="flat" cmpd="sng" algn="ctr">
+                      <a:solidFill>
+                        <a:srgbClr val="EEEEEE"/>
+                      </a:solidFill>
+                      <a:prstDash val="solid"/>
+                      <a:round/>
+                      <a:headEnd type="none" w="med" len="med"/>
+                      <a:tailEnd type="none" w="med" len="med"/>
+                    </a:lnR>
+                    <a:lnT w="2540" cap="flat" cmpd="sng" algn="ctr">
+                      <a:solidFill>
+                        <a:srgbClr val="EEEEEE"/>
+                      </a:solidFill>
+                      <a:prstDash val="solid"/>
+                      <a:round/>
+                      <a:headEnd type="none" w="med" len="med"/>
+                      <a:tailEnd type="none" w="med" len="med"/>
+                    </a:lnT>
+                    <a:lnB w="2540" cap="flat" cmpd="sng" algn="ctr">
+                      <a:solidFill>
+                        <a:srgbClr val="EEEEEE"/>
+                      </a:solidFill>
+                      <a:prstDash val="solid"/>
+                      <a:round/>
+                      <a:headEnd type="none" w="med" len="med"/>
+                      <a:tailEnd type="none" w="med" len="med"/>
+                    </a:lnB>
+                  </a:tcPr>
+                </a:tc>
+                <a:tc>
+                  <a:txBody>
+                    <a:bodyPr/>
+                    <a:lstStyle/>
+                    <a:p>
+                      <a:pPr algn="ctr" indent="0" marL="0">
+                        <a:buNone/>
+                      </a:pPr>
+                      <a:r>
+                        <a:rPr lang="en-US" sz="500" dirty="0">
+                          <a:solidFill>
+                            <a:srgbClr val="000000"/>
+                          </a:solidFill>
+                          <a:latin typeface="Calibri" pitchFamily="34" charset="0"/>
+                          <a:ea typeface="Calibri" pitchFamily="34" charset="-122"/>
+                          <a:cs typeface="Calibri" pitchFamily="34" charset="-120"/>
+                        </a:rPr>
+                        <a:t>0.65%</a:t>
                       </a:r>
                       <a:endParaRPr lang="en-US" sz="500" dirty="0">
                         <a:latin typeface="Calibri" charset="0"/>
@@ -8531,7 +11373,7 @@
                           <a:ea typeface="Calibri" pitchFamily="34" charset="-122"/>
                           <a:cs typeface="Calibri" pitchFamily="34" charset="-120"/>
                         </a:rPr>
-                        <a:t>0.52%</a:t>
+                        <a:t>0.57%</a:t>
                       </a:r>
                       <a:endParaRPr lang="en-US" sz="500" dirty="0">
                         <a:latin typeface="Calibri" charset="0"/>
@@ -8596,7 +11438,7 @@
                           <a:ea typeface="Calibri" pitchFamily="34" charset="-122"/>
                           <a:cs typeface="Calibri" pitchFamily="34" charset="-120"/>
                         </a:rPr>
-                        <a:t>0.53%</a:t>
+                        <a:t>0.58%</a:t>
                       </a:r>
                       <a:endParaRPr lang="en-US" sz="500" dirty="0">
                         <a:latin typeface="Calibri" charset="0"/>
@@ -8661,7 +11503,202 @@
                           <a:ea typeface="Calibri" pitchFamily="34" charset="-122"/>
                           <a:cs typeface="Calibri" pitchFamily="34" charset="-120"/>
                         </a:rPr>
-                        <a:t>0.51%</a:t>
+                        <a:t>0.52%</a:t>
+                      </a:r>
+                      <a:endParaRPr lang="en-US" sz="500" dirty="0">
+                        <a:latin typeface="Calibri" charset="0"/>
+                        <a:ea typeface="Calibri" charset="0"/>
+                        <a:cs typeface="Calibri" charset="0"/>
+                      </a:endParaRPr>
+                    </a:p>
+                  </a:txBody>
+                  <a:tcPr marL="91440" marR="91440" marT="45720" marB="45720">
+                    <a:lnL w="2540" cap="flat" cmpd="sng" algn="ctr">
+                      <a:solidFill>
+                        <a:srgbClr val="EEEEEE"/>
+                      </a:solidFill>
+                      <a:prstDash val="solid"/>
+                      <a:round/>
+                      <a:headEnd type="none" w="med" len="med"/>
+                      <a:tailEnd type="none" w="med" len="med"/>
+                    </a:lnL>
+                    <a:lnR w="2540" cap="flat" cmpd="sng" algn="ctr">
+                      <a:solidFill>
+                        <a:srgbClr val="EEEEEE"/>
+                      </a:solidFill>
+                      <a:prstDash val="solid"/>
+                      <a:round/>
+                      <a:headEnd type="none" w="med" len="med"/>
+                      <a:tailEnd type="none" w="med" len="med"/>
+                    </a:lnR>
+                    <a:lnT w="2540" cap="flat" cmpd="sng" algn="ctr">
+                      <a:solidFill>
+                        <a:srgbClr val="EEEEEE"/>
+                      </a:solidFill>
+                      <a:prstDash val="solid"/>
+                      <a:round/>
+                      <a:headEnd type="none" w="med" len="med"/>
+                      <a:tailEnd type="none" w="med" len="med"/>
+                    </a:lnT>
+                    <a:lnB w="2540" cap="flat" cmpd="sng" algn="ctr">
+                      <a:solidFill>
+                        <a:srgbClr val="EEEEEE"/>
+                      </a:solidFill>
+                      <a:prstDash val="solid"/>
+                      <a:round/>
+                      <a:headEnd type="none" w="med" len="med"/>
+                      <a:tailEnd type="none" w="med" len="med"/>
+                    </a:lnB>
+                  </a:tcPr>
+                </a:tc>
+                <a:tc>
+                  <a:txBody>
+                    <a:bodyPr/>
+                    <a:lstStyle/>
+                    <a:p>
+                      <a:pPr algn="ctr" indent="0" marL="0">
+                        <a:buNone/>
+                      </a:pPr>
+                      <a:r>
+                        <a:rPr lang="en-US" sz="500" dirty="0">
+                          <a:solidFill>
+                            <a:srgbClr val="000000"/>
+                          </a:solidFill>
+                          <a:latin typeface="Calibri" pitchFamily="34" charset="0"/>
+                          <a:ea typeface="Calibri" pitchFamily="34" charset="-122"/>
+                          <a:cs typeface="Calibri" pitchFamily="34" charset="-120"/>
+                        </a:rPr>
+                        <a:t>0.58%</a:t>
+                      </a:r>
+                      <a:endParaRPr lang="en-US" sz="500" dirty="0">
+                        <a:latin typeface="Calibri" charset="0"/>
+                        <a:ea typeface="Calibri" charset="0"/>
+                        <a:cs typeface="Calibri" charset="0"/>
+                      </a:endParaRPr>
+                    </a:p>
+                  </a:txBody>
+                  <a:tcPr marL="91440" marR="91440" marT="45720" marB="45720">
+                    <a:lnL w="2540" cap="flat" cmpd="sng" algn="ctr">
+                      <a:solidFill>
+                        <a:srgbClr val="EEEEEE"/>
+                      </a:solidFill>
+                      <a:prstDash val="solid"/>
+                      <a:round/>
+                      <a:headEnd type="none" w="med" len="med"/>
+                      <a:tailEnd type="none" w="med" len="med"/>
+                    </a:lnL>
+                    <a:lnR w="2540" cap="flat" cmpd="sng" algn="ctr">
+                      <a:solidFill>
+                        <a:srgbClr val="EEEEEE"/>
+                      </a:solidFill>
+                      <a:prstDash val="solid"/>
+                      <a:round/>
+                      <a:headEnd type="none" w="med" len="med"/>
+                      <a:tailEnd type="none" w="med" len="med"/>
+                    </a:lnR>
+                    <a:lnT w="2540" cap="flat" cmpd="sng" algn="ctr">
+                      <a:solidFill>
+                        <a:srgbClr val="EEEEEE"/>
+                      </a:solidFill>
+                      <a:prstDash val="solid"/>
+                      <a:round/>
+                      <a:headEnd type="none" w="med" len="med"/>
+                      <a:tailEnd type="none" w="med" len="med"/>
+                    </a:lnT>
+                    <a:lnB w="2540" cap="flat" cmpd="sng" algn="ctr">
+                      <a:solidFill>
+                        <a:srgbClr val="EEEEEE"/>
+                      </a:solidFill>
+                      <a:prstDash val="solid"/>
+                      <a:round/>
+                      <a:headEnd type="none" w="med" len="med"/>
+                      <a:tailEnd type="none" w="med" len="med"/>
+                    </a:lnB>
+                  </a:tcPr>
+                </a:tc>
+                <a:tc>
+                  <a:txBody>
+                    <a:bodyPr/>
+                    <a:lstStyle/>
+                    <a:p>
+                      <a:pPr algn="ctr" indent="0" marL="0">
+                        <a:buNone/>
+                      </a:pPr>
+                      <a:r>
+                        <a:rPr lang="en-US" sz="500" dirty="0">
+                          <a:solidFill>
+                            <a:srgbClr val="000000"/>
+                          </a:solidFill>
+                          <a:latin typeface="Calibri" pitchFamily="34" charset="0"/>
+                          <a:ea typeface="Calibri" pitchFamily="34" charset="-122"/>
+                          <a:cs typeface="Calibri" pitchFamily="34" charset="-120"/>
+                        </a:rPr>
+                        <a:t>0.60%</a:t>
+                      </a:r>
+                      <a:endParaRPr lang="en-US" sz="500" dirty="0">
+                        <a:latin typeface="Calibri" charset="0"/>
+                        <a:ea typeface="Calibri" charset="0"/>
+                        <a:cs typeface="Calibri" charset="0"/>
+                      </a:endParaRPr>
+                    </a:p>
+                  </a:txBody>
+                  <a:tcPr marL="91440" marR="91440" marT="45720" marB="45720">
+                    <a:lnL w="2540" cap="flat" cmpd="sng" algn="ctr">
+                      <a:solidFill>
+                        <a:srgbClr val="EEEEEE"/>
+                      </a:solidFill>
+                      <a:prstDash val="solid"/>
+                      <a:round/>
+                      <a:headEnd type="none" w="med" len="med"/>
+                      <a:tailEnd type="none" w="med" len="med"/>
+                    </a:lnL>
+                    <a:lnR w="2540" cap="flat" cmpd="sng" algn="ctr">
+                      <a:solidFill>
+                        <a:srgbClr val="EEEEEE"/>
+                      </a:solidFill>
+                      <a:prstDash val="solid"/>
+                      <a:round/>
+                      <a:headEnd type="none" w="med" len="med"/>
+                      <a:tailEnd type="none" w="med" len="med"/>
+                    </a:lnR>
+                    <a:lnT w="2540" cap="flat" cmpd="sng" algn="ctr">
+                      <a:solidFill>
+                        <a:srgbClr val="EEEEEE"/>
+                      </a:solidFill>
+                      <a:prstDash val="solid"/>
+                      <a:round/>
+                      <a:headEnd type="none" w="med" len="med"/>
+                      <a:tailEnd type="none" w="med" len="med"/>
+                    </a:lnT>
+                    <a:lnB w="2540" cap="flat" cmpd="sng" algn="ctr">
+                      <a:solidFill>
+                        <a:srgbClr val="EEEEEE"/>
+                      </a:solidFill>
+                      <a:prstDash val="solid"/>
+                      <a:round/>
+                      <a:headEnd type="none" w="med" len="med"/>
+                      <a:tailEnd type="none" w="med" len="med"/>
+                    </a:lnB>
+                  </a:tcPr>
+                </a:tc>
+                <a:tc>
+                  <a:txBody>
+                    <a:bodyPr/>
+                    <a:lstStyle/>
+                    <a:p>
+                      <a:pPr algn="ctr" indent="0" marL="0">
+                        <a:buNone/>
+                      </a:pPr>
+                      <a:r>
+                        <a:rPr lang="en-US" sz="500" dirty="0">
+                          <a:solidFill>
+                            <a:srgbClr val="000000"/>
+                          </a:solidFill>
+                          <a:latin typeface="Calibri" pitchFamily="34" charset="0"/>
+                          <a:ea typeface="Calibri" pitchFamily="34" charset="-122"/>
+                          <a:cs typeface="Calibri" pitchFamily="34" charset="-120"/>
+                        </a:rPr>
+                        <a:t>0.63%</a:t>
                       </a:r>
                       <a:endParaRPr lang="en-US" sz="500" dirty="0">
                         <a:latin typeface="Calibri" charset="0"/>
@@ -8726,7 +11763,7 @@
                           <a:ea typeface="Calibri" pitchFamily="34" charset="-122"/>
                           <a:cs typeface="Calibri" pitchFamily="34" charset="-120"/>
                         </a:rPr>
-                        <a:t>2.33%</a:t>
+                        <a:t>6.63%</a:t>
                       </a:r>
                       <a:endParaRPr lang="en-US" sz="500" dirty="0">
                         <a:latin typeface="Calibri" charset="0"/>
@@ -8793,7 +11830,7 @@
                           <a:ea typeface="Calibri" pitchFamily="34" charset="-122"/>
                           <a:cs typeface="Calibri" pitchFamily="34" charset="-120"/>
                         </a:rPr>
-                        <a:t>2025</a:t>
+                        <a:t>2026</a:t>
                       </a:r>
                       <a:endParaRPr lang="en-US" sz="500" dirty="0">
                         <a:latin typeface="Calibri" charset="0"/>
@@ -8923,7 +11960,7 @@
                           <a:ea typeface="Calibri" pitchFamily="34" charset="-122"/>
                           <a:cs typeface="Calibri" pitchFamily="34" charset="-120"/>
                         </a:rPr>
-                        <a:t>0.42%</a:t>
+                        <a:t>0.39%</a:t>
                       </a:r>
                       <a:endParaRPr lang="en-US" sz="500" dirty="0">
                         <a:latin typeface="Calibri" charset="0"/>
@@ -8988,592 +12025,7 @@
                           <a:ea typeface="Calibri" pitchFamily="34" charset="-122"/>
                           <a:cs typeface="Calibri" pitchFamily="34" charset="-120"/>
                         </a:rPr>
-                        <a:t>0.42%</a:t>
-                      </a:r>
-                      <a:endParaRPr lang="en-US" sz="500" dirty="0">
-                        <a:latin typeface="Calibri" charset="0"/>
-                        <a:ea typeface="Calibri" charset="0"/>
-                        <a:cs typeface="Calibri" charset="0"/>
-                      </a:endParaRPr>
-                    </a:p>
-                  </a:txBody>
-                  <a:tcPr marL="91440" marR="91440" marT="45720" marB="45720">
-                    <a:lnL w="2540" cap="flat" cmpd="sng" algn="ctr">
-                      <a:solidFill>
-                        <a:srgbClr val="EEEEEE"/>
-                      </a:solidFill>
-                      <a:prstDash val="solid"/>
-                      <a:round/>
-                      <a:headEnd type="none" w="med" len="med"/>
-                      <a:tailEnd type="none" w="med" len="med"/>
-                    </a:lnL>
-                    <a:lnR w="2540" cap="flat" cmpd="sng" algn="ctr">
-                      <a:solidFill>
-                        <a:srgbClr val="EEEEEE"/>
-                      </a:solidFill>
-                      <a:prstDash val="solid"/>
-                      <a:round/>
-                      <a:headEnd type="none" w="med" len="med"/>
-                      <a:tailEnd type="none" w="med" len="med"/>
-                    </a:lnR>
-                    <a:lnT w="2540" cap="flat" cmpd="sng" algn="ctr">
-                      <a:solidFill>
-                        <a:srgbClr val="EEEEEE"/>
-                      </a:solidFill>
-                      <a:prstDash val="solid"/>
-                      <a:round/>
-                      <a:headEnd type="none" w="med" len="med"/>
-                      <a:tailEnd type="none" w="med" len="med"/>
-                    </a:lnT>
-                    <a:lnB w="2540" cap="flat" cmpd="sng" algn="ctr">
-                      <a:solidFill>
-                        <a:srgbClr val="EEEEEE"/>
-                      </a:solidFill>
-                      <a:prstDash val="solid"/>
-                      <a:round/>
-                      <a:headEnd type="none" w="med" len="med"/>
-                      <a:tailEnd type="none" w="med" len="med"/>
-                    </a:lnB>
-                  </a:tcPr>
-                </a:tc>
-                <a:tc>
-                  <a:txBody>
-                    <a:bodyPr/>
-                    <a:lstStyle/>
-                    <a:p>
-                      <a:pPr algn="ctr" indent="0" marL="0">
-                        <a:buNone/>
-                      </a:pPr>
-                      <a:r>
-                        <a:rPr lang="en-US" sz="500" dirty="0">
-                          <a:solidFill>
-                            <a:srgbClr val="777777"/>
-                          </a:solidFill>
-                          <a:latin typeface="Calibri" pitchFamily="34" charset="0"/>
-                          <a:ea typeface="Calibri" pitchFamily="34" charset="-122"/>
-                          <a:cs typeface="Calibri" pitchFamily="34" charset="-120"/>
-                        </a:rPr>
-                        <a:t>0.42%</a:t>
-                      </a:r>
-                      <a:endParaRPr lang="en-US" sz="500" dirty="0">
-                        <a:latin typeface="Calibri" charset="0"/>
-                        <a:ea typeface="Calibri" charset="0"/>
-                        <a:cs typeface="Calibri" charset="0"/>
-                      </a:endParaRPr>
-                    </a:p>
-                  </a:txBody>
-                  <a:tcPr marL="91440" marR="91440" marT="45720" marB="45720">
-                    <a:lnL w="2540" cap="flat" cmpd="sng" algn="ctr">
-                      <a:solidFill>
-                        <a:srgbClr val="EEEEEE"/>
-                      </a:solidFill>
-                      <a:prstDash val="solid"/>
-                      <a:round/>
-                      <a:headEnd type="none" w="med" len="med"/>
-                      <a:tailEnd type="none" w="med" len="med"/>
-                    </a:lnL>
-                    <a:lnR w="2540" cap="flat" cmpd="sng" algn="ctr">
-                      <a:solidFill>
-                        <a:srgbClr val="EEEEEE"/>
-                      </a:solidFill>
-                      <a:prstDash val="solid"/>
-                      <a:round/>
-                      <a:headEnd type="none" w="med" len="med"/>
-                      <a:tailEnd type="none" w="med" len="med"/>
-                    </a:lnR>
-                    <a:lnT w="2540" cap="flat" cmpd="sng" algn="ctr">
-                      <a:solidFill>
-                        <a:srgbClr val="EEEEEE"/>
-                      </a:solidFill>
-                      <a:prstDash val="solid"/>
-                      <a:round/>
-                      <a:headEnd type="none" w="med" len="med"/>
-                      <a:tailEnd type="none" w="med" len="med"/>
-                    </a:lnT>
-                    <a:lnB w="2540" cap="flat" cmpd="sng" algn="ctr">
-                      <a:solidFill>
-                        <a:srgbClr val="EEEEEE"/>
-                      </a:solidFill>
-                      <a:prstDash val="solid"/>
-                      <a:round/>
-                      <a:headEnd type="none" w="med" len="med"/>
-                      <a:tailEnd type="none" w="med" len="med"/>
-                    </a:lnB>
-                  </a:tcPr>
-                </a:tc>
-                <a:tc>
-                  <a:txBody>
-                    <a:bodyPr/>
-                    <a:lstStyle/>
-                    <a:p>
-                      <a:pPr algn="ctr" indent="0" marL="0">
-                        <a:buNone/>
-                      </a:pPr>
-                      <a:r>
-                        <a:rPr lang="en-US" sz="500" dirty="0">
-                          <a:solidFill>
-                            <a:srgbClr val="777777"/>
-                          </a:solidFill>
-                          <a:latin typeface="Calibri" pitchFamily="34" charset="0"/>
-                          <a:ea typeface="Calibri" pitchFamily="34" charset="-122"/>
-                          <a:cs typeface="Calibri" pitchFamily="34" charset="-120"/>
-                        </a:rPr>
-                        <a:t>0.42%</a:t>
-                      </a:r>
-                      <a:endParaRPr lang="en-US" sz="500" dirty="0">
-                        <a:latin typeface="Calibri" charset="0"/>
-                        <a:ea typeface="Calibri" charset="0"/>
-                        <a:cs typeface="Calibri" charset="0"/>
-                      </a:endParaRPr>
-                    </a:p>
-                  </a:txBody>
-                  <a:tcPr marL="91440" marR="91440" marT="45720" marB="45720">
-                    <a:lnL w="2540" cap="flat" cmpd="sng" algn="ctr">
-                      <a:solidFill>
-                        <a:srgbClr val="EEEEEE"/>
-                      </a:solidFill>
-                      <a:prstDash val="solid"/>
-                      <a:round/>
-                      <a:headEnd type="none" w="med" len="med"/>
-                      <a:tailEnd type="none" w="med" len="med"/>
-                    </a:lnL>
-                    <a:lnR w="2540" cap="flat" cmpd="sng" algn="ctr">
-                      <a:solidFill>
-                        <a:srgbClr val="EEEEEE"/>
-                      </a:solidFill>
-                      <a:prstDash val="solid"/>
-                      <a:round/>
-                      <a:headEnd type="none" w="med" len="med"/>
-                      <a:tailEnd type="none" w="med" len="med"/>
-                    </a:lnR>
-                    <a:lnT w="2540" cap="flat" cmpd="sng" algn="ctr">
-                      <a:solidFill>
-                        <a:srgbClr val="EEEEEE"/>
-                      </a:solidFill>
-                      <a:prstDash val="solid"/>
-                      <a:round/>
-                      <a:headEnd type="none" w="med" len="med"/>
-                      <a:tailEnd type="none" w="med" len="med"/>
-                    </a:lnT>
-                    <a:lnB w="2540" cap="flat" cmpd="sng" algn="ctr">
-                      <a:solidFill>
-                        <a:srgbClr val="EEEEEE"/>
-                      </a:solidFill>
-                      <a:prstDash val="solid"/>
-                      <a:round/>
-                      <a:headEnd type="none" w="med" len="med"/>
-                      <a:tailEnd type="none" w="med" len="med"/>
-                    </a:lnB>
-                  </a:tcPr>
-                </a:tc>
-                <a:tc>
-                  <a:txBody>
-                    <a:bodyPr/>
-                    <a:lstStyle/>
-                    <a:p>
-                      <a:pPr algn="ctr" indent="0" marL="0">
-                        <a:buNone/>
-                      </a:pPr>
-                      <a:r>
-                        <a:rPr lang="en-US" sz="500" dirty="0">
-                          <a:solidFill>
-                            <a:srgbClr val="777777"/>
-                          </a:solidFill>
-                          <a:latin typeface="Calibri" pitchFamily="34" charset="0"/>
-                          <a:ea typeface="Calibri" pitchFamily="34" charset="-122"/>
-                          <a:cs typeface="Calibri" pitchFamily="34" charset="-120"/>
-                        </a:rPr>
-                        <a:t>0.42%</a:t>
-                      </a:r>
-                      <a:endParaRPr lang="en-US" sz="500" dirty="0">
-                        <a:latin typeface="Calibri" charset="0"/>
-                        <a:ea typeface="Calibri" charset="0"/>
-                        <a:cs typeface="Calibri" charset="0"/>
-                      </a:endParaRPr>
-                    </a:p>
-                  </a:txBody>
-                  <a:tcPr marL="91440" marR="91440" marT="45720" marB="45720">
-                    <a:lnL w="2540" cap="flat" cmpd="sng" algn="ctr">
-                      <a:solidFill>
-                        <a:srgbClr val="EEEEEE"/>
-                      </a:solidFill>
-                      <a:prstDash val="solid"/>
-                      <a:round/>
-                      <a:headEnd type="none" w="med" len="med"/>
-                      <a:tailEnd type="none" w="med" len="med"/>
-                    </a:lnL>
-                    <a:lnR w="2540" cap="flat" cmpd="sng" algn="ctr">
-                      <a:solidFill>
-                        <a:srgbClr val="EEEEEE"/>
-                      </a:solidFill>
-                      <a:prstDash val="solid"/>
-                      <a:round/>
-                      <a:headEnd type="none" w="med" len="med"/>
-                      <a:tailEnd type="none" w="med" len="med"/>
-                    </a:lnR>
-                    <a:lnT w="2540" cap="flat" cmpd="sng" algn="ctr">
-                      <a:solidFill>
-                        <a:srgbClr val="EEEEEE"/>
-                      </a:solidFill>
-                      <a:prstDash val="solid"/>
-                      <a:round/>
-                      <a:headEnd type="none" w="med" len="med"/>
-                      <a:tailEnd type="none" w="med" len="med"/>
-                    </a:lnT>
-                    <a:lnB w="2540" cap="flat" cmpd="sng" algn="ctr">
-                      <a:solidFill>
-                        <a:srgbClr val="EEEEEE"/>
-                      </a:solidFill>
-                      <a:prstDash val="solid"/>
-                      <a:round/>
-                      <a:headEnd type="none" w="med" len="med"/>
-                      <a:tailEnd type="none" w="med" len="med"/>
-                    </a:lnB>
-                  </a:tcPr>
-                </a:tc>
-                <a:tc>
-                  <a:txBody>
-                    <a:bodyPr/>
-                    <a:lstStyle/>
-                    <a:p>
-                      <a:pPr algn="ctr" indent="0" marL="0">
-                        <a:buNone/>
-                      </a:pPr>
-                      <a:r>
-                        <a:rPr lang="en-US" sz="500" dirty="0">
-                          <a:solidFill>
-                            <a:srgbClr val="777777"/>
-                          </a:solidFill>
-                          <a:latin typeface="Calibri" pitchFamily="34" charset="0"/>
-                          <a:ea typeface="Calibri" pitchFamily="34" charset="-122"/>
-                          <a:cs typeface="Calibri" pitchFamily="34" charset="-120"/>
-                        </a:rPr>
-                        <a:t>0.42%</a:t>
-                      </a:r>
-                      <a:endParaRPr lang="en-US" sz="500" dirty="0">
-                        <a:latin typeface="Calibri" charset="0"/>
-                        <a:ea typeface="Calibri" charset="0"/>
-                        <a:cs typeface="Calibri" charset="0"/>
-                      </a:endParaRPr>
-                    </a:p>
-                  </a:txBody>
-                  <a:tcPr marL="91440" marR="91440" marT="45720" marB="45720">
-                    <a:lnL w="2540" cap="flat" cmpd="sng" algn="ctr">
-                      <a:solidFill>
-                        <a:srgbClr val="EEEEEE"/>
-                      </a:solidFill>
-                      <a:prstDash val="solid"/>
-                      <a:round/>
-                      <a:headEnd type="none" w="med" len="med"/>
-                      <a:tailEnd type="none" w="med" len="med"/>
-                    </a:lnL>
-                    <a:lnR w="2540" cap="flat" cmpd="sng" algn="ctr">
-                      <a:solidFill>
-                        <a:srgbClr val="EEEEEE"/>
-                      </a:solidFill>
-                      <a:prstDash val="solid"/>
-                      <a:round/>
-                      <a:headEnd type="none" w="med" len="med"/>
-                      <a:tailEnd type="none" w="med" len="med"/>
-                    </a:lnR>
-                    <a:lnT w="2540" cap="flat" cmpd="sng" algn="ctr">
-                      <a:solidFill>
-                        <a:srgbClr val="EEEEEE"/>
-                      </a:solidFill>
-                      <a:prstDash val="solid"/>
-                      <a:round/>
-                      <a:headEnd type="none" w="med" len="med"/>
-                      <a:tailEnd type="none" w="med" len="med"/>
-                    </a:lnT>
-                    <a:lnB w="2540" cap="flat" cmpd="sng" algn="ctr">
-                      <a:solidFill>
-                        <a:srgbClr val="EEEEEE"/>
-                      </a:solidFill>
-                      <a:prstDash val="solid"/>
-                      <a:round/>
-                      <a:headEnd type="none" w="med" len="med"/>
-                      <a:tailEnd type="none" w="med" len="med"/>
-                    </a:lnB>
-                  </a:tcPr>
-                </a:tc>
-                <a:tc>
-                  <a:txBody>
-                    <a:bodyPr/>
-                    <a:lstStyle/>
-                    <a:p>
-                      <a:pPr algn="ctr" indent="0" marL="0">
-                        <a:buNone/>
-                      </a:pPr>
-                      <a:r>
-                        <a:rPr lang="en-US" sz="500" dirty="0">
-                          <a:solidFill>
-                            <a:srgbClr val="777777"/>
-                          </a:solidFill>
-                          <a:latin typeface="Calibri" pitchFamily="34" charset="0"/>
-                          <a:ea typeface="Calibri" pitchFamily="34" charset="-122"/>
-                          <a:cs typeface="Calibri" pitchFamily="34" charset="-120"/>
-                        </a:rPr>
-                        <a:t>0.41%</a:t>
-                      </a:r>
-                      <a:endParaRPr lang="en-US" sz="500" dirty="0">
-                        <a:latin typeface="Calibri" charset="0"/>
-                        <a:ea typeface="Calibri" charset="0"/>
-                        <a:cs typeface="Calibri" charset="0"/>
-                      </a:endParaRPr>
-                    </a:p>
-                  </a:txBody>
-                  <a:tcPr marL="91440" marR="91440" marT="45720" marB="45720">
-                    <a:lnL w="2540" cap="flat" cmpd="sng" algn="ctr">
-                      <a:solidFill>
-                        <a:srgbClr val="EEEEEE"/>
-                      </a:solidFill>
-                      <a:prstDash val="solid"/>
-                      <a:round/>
-                      <a:headEnd type="none" w="med" len="med"/>
-                      <a:tailEnd type="none" w="med" len="med"/>
-                    </a:lnL>
-                    <a:lnR w="2540" cap="flat" cmpd="sng" algn="ctr">
-                      <a:solidFill>
-                        <a:srgbClr val="EEEEEE"/>
-                      </a:solidFill>
-                      <a:prstDash val="solid"/>
-                      <a:round/>
-                      <a:headEnd type="none" w="med" len="med"/>
-                      <a:tailEnd type="none" w="med" len="med"/>
-                    </a:lnR>
-                    <a:lnT w="2540" cap="flat" cmpd="sng" algn="ctr">
-                      <a:solidFill>
-                        <a:srgbClr val="EEEEEE"/>
-                      </a:solidFill>
-                      <a:prstDash val="solid"/>
-                      <a:round/>
-                      <a:headEnd type="none" w="med" len="med"/>
-                      <a:tailEnd type="none" w="med" len="med"/>
-                    </a:lnT>
-                    <a:lnB w="2540" cap="flat" cmpd="sng" algn="ctr">
-                      <a:solidFill>
-                        <a:srgbClr val="EEEEEE"/>
-                      </a:solidFill>
-                      <a:prstDash val="solid"/>
-                      <a:round/>
-                      <a:headEnd type="none" w="med" len="med"/>
-                      <a:tailEnd type="none" w="med" len="med"/>
-                    </a:lnB>
-                  </a:tcPr>
-                </a:tc>
-                <a:tc>
-                  <a:txBody>
-                    <a:bodyPr/>
-                    <a:lstStyle/>
-                    <a:p>
-                      <a:pPr algn="ctr" indent="0" marL="0">
-                        <a:buNone/>
-                      </a:pPr>
-                      <a:r>
-                        <a:rPr lang="en-US" sz="500" dirty="0">
-                          <a:solidFill>
-                            <a:srgbClr val="777777"/>
-                          </a:solidFill>
-                          <a:latin typeface="Calibri" pitchFamily="34" charset="0"/>
-                          <a:ea typeface="Calibri" pitchFamily="34" charset="-122"/>
-                          <a:cs typeface="Calibri" pitchFamily="34" charset="-120"/>
-                        </a:rPr>
-                        <a:t>0.40%</a:t>
-                      </a:r>
-                      <a:endParaRPr lang="en-US" sz="500" dirty="0">
-                        <a:latin typeface="Calibri" charset="0"/>
-                        <a:ea typeface="Calibri" charset="0"/>
-                        <a:cs typeface="Calibri" charset="0"/>
-                      </a:endParaRPr>
-                    </a:p>
-                  </a:txBody>
-                  <a:tcPr marL="91440" marR="91440" marT="45720" marB="45720">
-                    <a:lnL w="2540" cap="flat" cmpd="sng" algn="ctr">
-                      <a:solidFill>
-                        <a:srgbClr val="EEEEEE"/>
-                      </a:solidFill>
-                      <a:prstDash val="solid"/>
-                      <a:round/>
-                      <a:headEnd type="none" w="med" len="med"/>
-                      <a:tailEnd type="none" w="med" len="med"/>
-                    </a:lnL>
-                    <a:lnR w="2540" cap="flat" cmpd="sng" algn="ctr">
-                      <a:solidFill>
-                        <a:srgbClr val="EEEEEE"/>
-                      </a:solidFill>
-                      <a:prstDash val="solid"/>
-                      <a:round/>
-                      <a:headEnd type="none" w="med" len="med"/>
-                      <a:tailEnd type="none" w="med" len="med"/>
-                    </a:lnR>
-                    <a:lnT w="2540" cap="flat" cmpd="sng" algn="ctr">
-                      <a:solidFill>
-                        <a:srgbClr val="EEEEEE"/>
-                      </a:solidFill>
-                      <a:prstDash val="solid"/>
-                      <a:round/>
-                      <a:headEnd type="none" w="med" len="med"/>
-                      <a:tailEnd type="none" w="med" len="med"/>
-                    </a:lnT>
-                    <a:lnB w="2540" cap="flat" cmpd="sng" algn="ctr">
-                      <a:solidFill>
-                        <a:srgbClr val="EEEEEE"/>
-                      </a:solidFill>
-                      <a:prstDash val="solid"/>
-                      <a:round/>
-                      <a:headEnd type="none" w="med" len="med"/>
-                      <a:tailEnd type="none" w="med" len="med"/>
-                    </a:lnB>
-                  </a:tcPr>
-                </a:tc>
-                <a:tc>
-                  <a:txBody>
-                    <a:bodyPr/>
-                    <a:lstStyle/>
-                    <a:p>
-                      <a:pPr algn="ctr" indent="0" marL="0">
-                        <a:buNone/>
-                      </a:pPr>
-                      <a:r>
-                        <a:rPr lang="en-US" sz="500" dirty="0">
-                          <a:solidFill>
-                            <a:srgbClr val="777777"/>
-                          </a:solidFill>
-                          <a:latin typeface="Calibri" pitchFamily="34" charset="0"/>
-                          <a:ea typeface="Calibri" pitchFamily="34" charset="-122"/>
-                          <a:cs typeface="Calibri" pitchFamily="34" charset="-120"/>
-                        </a:rPr>
-                        <a:t>0.40%</a:t>
-                      </a:r>
-                      <a:endParaRPr lang="en-US" sz="500" dirty="0">
-                        <a:latin typeface="Calibri" charset="0"/>
-                        <a:ea typeface="Calibri" charset="0"/>
-                        <a:cs typeface="Calibri" charset="0"/>
-                      </a:endParaRPr>
-                    </a:p>
-                  </a:txBody>
-                  <a:tcPr marL="91440" marR="91440" marT="45720" marB="45720">
-                    <a:lnL w="2540" cap="flat" cmpd="sng" algn="ctr">
-                      <a:solidFill>
-                        <a:srgbClr val="EEEEEE"/>
-                      </a:solidFill>
-                      <a:prstDash val="solid"/>
-                      <a:round/>
-                      <a:headEnd type="none" w="med" len="med"/>
-                      <a:tailEnd type="none" w="med" len="med"/>
-                    </a:lnL>
-                    <a:lnR w="2540" cap="flat" cmpd="sng" algn="ctr">
-                      <a:solidFill>
-                        <a:srgbClr val="EEEEEE"/>
-                      </a:solidFill>
-                      <a:prstDash val="solid"/>
-                      <a:round/>
-                      <a:headEnd type="none" w="med" len="med"/>
-                      <a:tailEnd type="none" w="med" len="med"/>
-                    </a:lnR>
-                    <a:lnT w="2540" cap="flat" cmpd="sng" algn="ctr">
-                      <a:solidFill>
-                        <a:srgbClr val="EEEEEE"/>
-                      </a:solidFill>
-                      <a:prstDash val="solid"/>
-                      <a:round/>
-                      <a:headEnd type="none" w="med" len="med"/>
-                      <a:tailEnd type="none" w="med" len="med"/>
-                    </a:lnT>
-                    <a:lnB w="2540" cap="flat" cmpd="sng" algn="ctr">
-                      <a:solidFill>
-                        <a:srgbClr val="EEEEEE"/>
-                      </a:solidFill>
-                      <a:prstDash val="solid"/>
-                      <a:round/>
-                      <a:headEnd type="none" w="med" len="med"/>
-                      <a:tailEnd type="none" w="med" len="med"/>
-                    </a:lnB>
-                  </a:tcPr>
-                </a:tc>
-                <a:tc>
-                  <a:txBody>
-                    <a:bodyPr/>
-                    <a:lstStyle/>
-                    <a:p>
-                      <a:pPr algn="ctr" indent="0" marL="0">
-                        <a:buNone/>
-                      </a:pPr>
-                      <a:r>
-                        <a:rPr lang="en-US" sz="500" dirty="0">
-                          <a:solidFill>
-                            <a:srgbClr val="777777"/>
-                          </a:solidFill>
-                          <a:latin typeface="Calibri" pitchFamily="34" charset="0"/>
-                          <a:ea typeface="Calibri" pitchFamily="34" charset="-122"/>
-                          <a:cs typeface="Calibri" pitchFamily="34" charset="-120"/>
-                        </a:rPr>
-                        <a:t>0.40%</a:t>
-                      </a:r>
-                      <a:endParaRPr lang="en-US" sz="500" dirty="0">
-                        <a:latin typeface="Calibri" charset="0"/>
-                        <a:ea typeface="Calibri" charset="0"/>
-                        <a:cs typeface="Calibri" charset="0"/>
-                      </a:endParaRPr>
-                    </a:p>
-                  </a:txBody>
-                  <a:tcPr marL="91440" marR="91440" marT="45720" marB="45720">
-                    <a:lnL w="2540" cap="flat" cmpd="sng" algn="ctr">
-                      <a:solidFill>
-                        <a:srgbClr val="EEEEEE"/>
-                      </a:solidFill>
-                      <a:prstDash val="solid"/>
-                      <a:round/>
-                      <a:headEnd type="none" w="med" len="med"/>
-                      <a:tailEnd type="none" w="med" len="med"/>
-                    </a:lnL>
-                    <a:lnR w="2540" cap="flat" cmpd="sng" algn="ctr">
-                      <a:solidFill>
-                        <a:srgbClr val="EEEEEE"/>
-                      </a:solidFill>
-                      <a:prstDash val="solid"/>
-                      <a:round/>
-                      <a:headEnd type="none" w="med" len="med"/>
-                      <a:tailEnd type="none" w="med" len="med"/>
-                    </a:lnR>
-                    <a:lnT w="2540" cap="flat" cmpd="sng" algn="ctr">
-                      <a:solidFill>
-                        <a:srgbClr val="EEEEEE"/>
-                      </a:solidFill>
-                      <a:prstDash val="solid"/>
-                      <a:round/>
-                      <a:headEnd type="none" w="med" len="med"/>
-                      <a:tailEnd type="none" w="med" len="med"/>
-                    </a:lnT>
-                    <a:lnB w="2540" cap="flat" cmpd="sng" algn="ctr">
-                      <a:solidFill>
-                        <a:srgbClr val="EEEEEE"/>
-                      </a:solidFill>
-                      <a:prstDash val="solid"/>
-                      <a:round/>
-                      <a:headEnd type="none" w="med" len="med"/>
-                      <a:tailEnd type="none" w="med" len="med"/>
-                    </a:lnB>
-                  </a:tcPr>
-                </a:tc>
-                <a:tc>
-                  <a:txBody>
-                    <a:bodyPr/>
-                    <a:lstStyle/>
-                    <a:p>
-                      <a:pPr algn="ctr" indent="0" marL="0">
-                        <a:buNone/>
-                      </a:pPr>
-                      <a:r>
-                        <a:rPr lang="en-US" sz="500" dirty="0">
-                          <a:solidFill>
-                            <a:srgbClr val="777777"/>
-                          </a:solidFill>
-                          <a:latin typeface="Calibri" pitchFamily="34" charset="0"/>
-                          <a:ea typeface="Calibri" pitchFamily="34" charset="-122"/>
-                          <a:cs typeface="Calibri" pitchFamily="34" charset="-120"/>
-                        </a:rPr>
-                        <a:t>0.40%</a:t>
+                        <a:t>0.36%</a:t>
                       </a:r>
                       <a:endParaRPr lang="en-US" sz="500" dirty="0">
                         <a:latin typeface="Calibri" charset="0"/>
@@ -9695,6 +12147,503 @@
                         <a:buNone/>
                       </a:pPr>
                       <a:r>
+                        <a:rPr lang="en-US" sz="500" dirty="0">
+                          <a:solidFill>
+                            <a:srgbClr val="777777"/>
+                          </a:solidFill>
+                          <a:latin typeface="Calibri" pitchFamily="34" charset="0"/>
+                          <a:ea typeface="Calibri" pitchFamily="34" charset="-122"/>
+                          <a:cs typeface="Calibri" pitchFamily="34" charset="-120"/>
+                        </a:rPr>
+                        <a:t>0.38%</a:t>
+                      </a:r>
+                      <a:endParaRPr lang="en-US" sz="500" dirty="0">
+                        <a:latin typeface="Calibri" charset="0"/>
+                        <a:ea typeface="Calibri" charset="0"/>
+                        <a:cs typeface="Calibri" charset="0"/>
+                      </a:endParaRPr>
+                    </a:p>
+                  </a:txBody>
+                  <a:tcPr marL="91440" marR="91440" marT="45720" marB="45720">
+                    <a:lnL w="2540" cap="flat" cmpd="sng" algn="ctr">
+                      <a:solidFill>
+                        <a:srgbClr val="EEEEEE"/>
+                      </a:solidFill>
+                      <a:prstDash val="solid"/>
+                      <a:round/>
+                      <a:headEnd type="none" w="med" len="med"/>
+                      <a:tailEnd type="none" w="med" len="med"/>
+                    </a:lnL>
+                    <a:lnR w="2540" cap="flat" cmpd="sng" algn="ctr">
+                      <a:solidFill>
+                        <a:srgbClr val="EEEEEE"/>
+                      </a:solidFill>
+                      <a:prstDash val="solid"/>
+                      <a:round/>
+                      <a:headEnd type="none" w="med" len="med"/>
+                      <a:tailEnd type="none" w="med" len="med"/>
+                    </a:lnR>
+                    <a:lnT w="2540" cap="flat" cmpd="sng" algn="ctr">
+                      <a:solidFill>
+                        <a:srgbClr val="EEEEEE"/>
+                      </a:solidFill>
+                      <a:prstDash val="solid"/>
+                      <a:round/>
+                      <a:headEnd type="none" w="med" len="med"/>
+                      <a:tailEnd type="none" w="med" len="med"/>
+                    </a:lnT>
+                    <a:lnB w="2540" cap="flat" cmpd="sng" algn="ctr">
+                      <a:solidFill>
+                        <a:srgbClr val="EEEEEE"/>
+                      </a:solidFill>
+                      <a:prstDash val="solid"/>
+                      <a:round/>
+                      <a:headEnd type="none" w="med" len="med"/>
+                      <a:tailEnd type="none" w="med" len="med"/>
+                    </a:lnB>
+                  </a:tcPr>
+                </a:tc>
+                <a:tc>
+                  <a:txBody>
+                    <a:bodyPr/>
+                    <a:lstStyle/>
+                    <a:p>
+                      <a:pPr algn="ctr" indent="0" marL="0">
+                        <a:buNone/>
+                      </a:pPr>
+                      <a:endParaRPr lang="en-US" sz="500" dirty="0">
+                        <a:latin typeface="Calibri" charset="0"/>
+                        <a:ea typeface="Calibri" charset="0"/>
+                        <a:cs typeface="Calibri" charset="0"/>
+                      </a:endParaRPr>
+                    </a:p>
+                  </a:txBody>
+                  <a:tcPr marL="91440" marR="91440" marT="45720" marB="45720">
+                    <a:lnL w="2540" cap="flat" cmpd="sng" algn="ctr">
+                      <a:solidFill>
+                        <a:srgbClr val="EEEEEE"/>
+                      </a:solidFill>
+                      <a:prstDash val="solid"/>
+                      <a:round/>
+                      <a:headEnd type="none" w="med" len="med"/>
+                      <a:tailEnd type="none" w="med" len="med"/>
+                    </a:lnL>
+                    <a:lnR w="2540" cap="flat" cmpd="sng" algn="ctr">
+                      <a:solidFill>
+                        <a:srgbClr val="EEEEEE"/>
+                      </a:solidFill>
+                      <a:prstDash val="solid"/>
+                      <a:round/>
+                      <a:headEnd type="none" w="med" len="med"/>
+                      <a:tailEnd type="none" w="med" len="med"/>
+                    </a:lnR>
+                    <a:lnT w="2540" cap="flat" cmpd="sng" algn="ctr">
+                      <a:solidFill>
+                        <a:srgbClr val="EEEEEE"/>
+                      </a:solidFill>
+                      <a:prstDash val="solid"/>
+                      <a:round/>
+                      <a:headEnd type="none" w="med" len="med"/>
+                      <a:tailEnd type="none" w="med" len="med"/>
+                    </a:lnT>
+                    <a:lnB w="2540" cap="flat" cmpd="sng" algn="ctr">
+                      <a:solidFill>
+                        <a:srgbClr val="EEEEEE"/>
+                      </a:solidFill>
+                      <a:prstDash val="solid"/>
+                      <a:round/>
+                      <a:headEnd type="none" w="med" len="med"/>
+                      <a:tailEnd type="none" w="med" len="med"/>
+                    </a:lnB>
+                  </a:tcPr>
+                </a:tc>
+                <a:tc>
+                  <a:txBody>
+                    <a:bodyPr/>
+                    <a:lstStyle/>
+                    <a:p>
+                      <a:pPr algn="ctr" indent="0" marL="0">
+                        <a:buNone/>
+                      </a:pPr>
+                      <a:endParaRPr lang="en-US" sz="500" dirty="0">
+                        <a:latin typeface="Calibri" charset="0"/>
+                        <a:ea typeface="Calibri" charset="0"/>
+                        <a:cs typeface="Calibri" charset="0"/>
+                      </a:endParaRPr>
+                    </a:p>
+                  </a:txBody>
+                  <a:tcPr marL="91440" marR="91440" marT="45720" marB="45720">
+                    <a:lnL w="2540" cap="flat" cmpd="sng" algn="ctr">
+                      <a:solidFill>
+                        <a:srgbClr val="EEEEEE"/>
+                      </a:solidFill>
+                      <a:prstDash val="solid"/>
+                      <a:round/>
+                      <a:headEnd type="none" w="med" len="med"/>
+                      <a:tailEnd type="none" w="med" len="med"/>
+                    </a:lnL>
+                    <a:lnR w="2540" cap="flat" cmpd="sng" algn="ctr">
+                      <a:solidFill>
+                        <a:srgbClr val="EEEEEE"/>
+                      </a:solidFill>
+                      <a:prstDash val="solid"/>
+                      <a:round/>
+                      <a:headEnd type="none" w="med" len="med"/>
+                      <a:tailEnd type="none" w="med" len="med"/>
+                    </a:lnR>
+                    <a:lnT w="2540" cap="flat" cmpd="sng" algn="ctr">
+                      <a:solidFill>
+                        <a:srgbClr val="EEEEEE"/>
+                      </a:solidFill>
+                      <a:prstDash val="solid"/>
+                      <a:round/>
+                      <a:headEnd type="none" w="med" len="med"/>
+                      <a:tailEnd type="none" w="med" len="med"/>
+                    </a:lnT>
+                    <a:lnB w="2540" cap="flat" cmpd="sng" algn="ctr">
+                      <a:solidFill>
+                        <a:srgbClr val="EEEEEE"/>
+                      </a:solidFill>
+                      <a:prstDash val="solid"/>
+                      <a:round/>
+                      <a:headEnd type="none" w="med" len="med"/>
+                      <a:tailEnd type="none" w="med" len="med"/>
+                    </a:lnB>
+                  </a:tcPr>
+                </a:tc>
+                <a:tc>
+                  <a:txBody>
+                    <a:bodyPr/>
+                    <a:lstStyle/>
+                    <a:p>
+                      <a:pPr algn="ctr" indent="0" marL="0">
+                        <a:buNone/>
+                      </a:pPr>
+                      <a:endParaRPr lang="en-US" sz="500" dirty="0">
+                        <a:latin typeface="Calibri" charset="0"/>
+                        <a:ea typeface="Calibri" charset="0"/>
+                        <a:cs typeface="Calibri" charset="0"/>
+                      </a:endParaRPr>
+                    </a:p>
+                  </a:txBody>
+                  <a:tcPr marL="91440" marR="91440" marT="45720" marB="45720">
+                    <a:lnL w="2540" cap="flat" cmpd="sng" algn="ctr">
+                      <a:solidFill>
+                        <a:srgbClr val="EEEEEE"/>
+                      </a:solidFill>
+                      <a:prstDash val="solid"/>
+                      <a:round/>
+                      <a:headEnd type="none" w="med" len="med"/>
+                      <a:tailEnd type="none" w="med" len="med"/>
+                    </a:lnL>
+                    <a:lnR w="2540" cap="flat" cmpd="sng" algn="ctr">
+                      <a:solidFill>
+                        <a:srgbClr val="EEEEEE"/>
+                      </a:solidFill>
+                      <a:prstDash val="solid"/>
+                      <a:round/>
+                      <a:headEnd type="none" w="med" len="med"/>
+                      <a:tailEnd type="none" w="med" len="med"/>
+                    </a:lnR>
+                    <a:lnT w="2540" cap="flat" cmpd="sng" algn="ctr">
+                      <a:solidFill>
+                        <a:srgbClr val="EEEEEE"/>
+                      </a:solidFill>
+                      <a:prstDash val="solid"/>
+                      <a:round/>
+                      <a:headEnd type="none" w="med" len="med"/>
+                      <a:tailEnd type="none" w="med" len="med"/>
+                    </a:lnT>
+                    <a:lnB w="2540" cap="flat" cmpd="sng" algn="ctr">
+                      <a:solidFill>
+                        <a:srgbClr val="EEEEEE"/>
+                      </a:solidFill>
+                      <a:prstDash val="solid"/>
+                      <a:round/>
+                      <a:headEnd type="none" w="med" len="med"/>
+                      <a:tailEnd type="none" w="med" len="med"/>
+                    </a:lnB>
+                  </a:tcPr>
+                </a:tc>
+                <a:tc>
+                  <a:txBody>
+                    <a:bodyPr/>
+                    <a:lstStyle/>
+                    <a:p>
+                      <a:pPr algn="ctr" indent="0" marL="0">
+                        <a:buNone/>
+                      </a:pPr>
+                      <a:endParaRPr lang="en-US" sz="500" dirty="0">
+                        <a:latin typeface="Calibri" charset="0"/>
+                        <a:ea typeface="Calibri" charset="0"/>
+                        <a:cs typeface="Calibri" charset="0"/>
+                      </a:endParaRPr>
+                    </a:p>
+                  </a:txBody>
+                  <a:tcPr marL="91440" marR="91440" marT="45720" marB="45720">
+                    <a:lnL w="2540" cap="flat" cmpd="sng" algn="ctr">
+                      <a:solidFill>
+                        <a:srgbClr val="EEEEEE"/>
+                      </a:solidFill>
+                      <a:prstDash val="solid"/>
+                      <a:round/>
+                      <a:headEnd type="none" w="med" len="med"/>
+                      <a:tailEnd type="none" w="med" len="med"/>
+                    </a:lnL>
+                    <a:lnR w="2540" cap="flat" cmpd="sng" algn="ctr">
+                      <a:solidFill>
+                        <a:srgbClr val="EEEEEE"/>
+                      </a:solidFill>
+                      <a:prstDash val="solid"/>
+                      <a:round/>
+                      <a:headEnd type="none" w="med" len="med"/>
+                      <a:tailEnd type="none" w="med" len="med"/>
+                    </a:lnR>
+                    <a:lnT w="2540" cap="flat" cmpd="sng" algn="ctr">
+                      <a:solidFill>
+                        <a:srgbClr val="EEEEEE"/>
+                      </a:solidFill>
+                      <a:prstDash val="solid"/>
+                      <a:round/>
+                      <a:headEnd type="none" w="med" len="med"/>
+                      <a:tailEnd type="none" w="med" len="med"/>
+                    </a:lnT>
+                    <a:lnB w="2540" cap="flat" cmpd="sng" algn="ctr">
+                      <a:solidFill>
+                        <a:srgbClr val="EEEEEE"/>
+                      </a:solidFill>
+                      <a:prstDash val="solid"/>
+                      <a:round/>
+                      <a:headEnd type="none" w="med" len="med"/>
+                      <a:tailEnd type="none" w="med" len="med"/>
+                    </a:lnB>
+                  </a:tcPr>
+                </a:tc>
+                <a:tc>
+                  <a:txBody>
+                    <a:bodyPr/>
+                    <a:lstStyle/>
+                    <a:p>
+                      <a:pPr algn="ctr" indent="0" marL="0">
+                        <a:buNone/>
+                      </a:pPr>
+                      <a:endParaRPr lang="en-US" sz="500" dirty="0">
+                        <a:latin typeface="Calibri" charset="0"/>
+                        <a:ea typeface="Calibri" charset="0"/>
+                        <a:cs typeface="Calibri" charset="0"/>
+                      </a:endParaRPr>
+                    </a:p>
+                  </a:txBody>
+                  <a:tcPr marL="91440" marR="91440" marT="45720" marB="45720">
+                    <a:lnL w="2540" cap="flat" cmpd="sng" algn="ctr">
+                      <a:solidFill>
+                        <a:srgbClr val="EEEEEE"/>
+                      </a:solidFill>
+                      <a:prstDash val="solid"/>
+                      <a:round/>
+                      <a:headEnd type="none" w="med" len="med"/>
+                      <a:tailEnd type="none" w="med" len="med"/>
+                    </a:lnL>
+                    <a:lnR w="2540" cap="flat" cmpd="sng" algn="ctr">
+                      <a:solidFill>
+                        <a:srgbClr val="EEEEEE"/>
+                      </a:solidFill>
+                      <a:prstDash val="solid"/>
+                      <a:round/>
+                      <a:headEnd type="none" w="med" len="med"/>
+                      <a:tailEnd type="none" w="med" len="med"/>
+                    </a:lnR>
+                    <a:lnT w="2540" cap="flat" cmpd="sng" algn="ctr">
+                      <a:solidFill>
+                        <a:srgbClr val="EEEEEE"/>
+                      </a:solidFill>
+                      <a:prstDash val="solid"/>
+                      <a:round/>
+                      <a:headEnd type="none" w="med" len="med"/>
+                      <a:tailEnd type="none" w="med" len="med"/>
+                    </a:lnT>
+                    <a:lnB w="2540" cap="flat" cmpd="sng" algn="ctr">
+                      <a:solidFill>
+                        <a:srgbClr val="EEEEEE"/>
+                      </a:solidFill>
+                      <a:prstDash val="solid"/>
+                      <a:round/>
+                      <a:headEnd type="none" w="med" len="med"/>
+                      <a:tailEnd type="none" w="med" len="med"/>
+                    </a:lnB>
+                  </a:tcPr>
+                </a:tc>
+                <a:tc>
+                  <a:txBody>
+                    <a:bodyPr/>
+                    <a:lstStyle/>
+                    <a:p>
+                      <a:pPr algn="ctr" indent="0" marL="0">
+                        <a:buNone/>
+                      </a:pPr>
+                      <a:endParaRPr lang="en-US" sz="500" dirty="0">
+                        <a:latin typeface="Calibri" charset="0"/>
+                        <a:ea typeface="Calibri" charset="0"/>
+                        <a:cs typeface="Calibri" charset="0"/>
+                      </a:endParaRPr>
+                    </a:p>
+                  </a:txBody>
+                  <a:tcPr marL="91440" marR="91440" marT="45720" marB="45720">
+                    <a:lnL w="2540" cap="flat" cmpd="sng" algn="ctr">
+                      <a:solidFill>
+                        <a:srgbClr val="EEEEEE"/>
+                      </a:solidFill>
+                      <a:prstDash val="solid"/>
+                      <a:round/>
+                      <a:headEnd type="none" w="med" len="med"/>
+                      <a:tailEnd type="none" w="med" len="med"/>
+                    </a:lnL>
+                    <a:lnR w="2540" cap="flat" cmpd="sng" algn="ctr">
+                      <a:solidFill>
+                        <a:srgbClr val="EEEEEE"/>
+                      </a:solidFill>
+                      <a:prstDash val="solid"/>
+                      <a:round/>
+                      <a:headEnd type="none" w="med" len="med"/>
+                      <a:tailEnd type="none" w="med" len="med"/>
+                    </a:lnR>
+                    <a:lnT w="2540" cap="flat" cmpd="sng" algn="ctr">
+                      <a:solidFill>
+                        <a:srgbClr val="EEEEEE"/>
+                      </a:solidFill>
+                      <a:prstDash val="solid"/>
+                      <a:round/>
+                      <a:headEnd type="none" w="med" len="med"/>
+                      <a:tailEnd type="none" w="med" len="med"/>
+                    </a:lnT>
+                    <a:lnB w="2540" cap="flat" cmpd="sng" algn="ctr">
+                      <a:solidFill>
+                        <a:srgbClr val="EEEEEE"/>
+                      </a:solidFill>
+                      <a:prstDash val="solid"/>
+                      <a:round/>
+                      <a:headEnd type="none" w="med" len="med"/>
+                      <a:tailEnd type="none" w="med" len="med"/>
+                    </a:lnB>
+                  </a:tcPr>
+                </a:tc>
+                <a:tc>
+                  <a:txBody>
+                    <a:bodyPr/>
+                    <a:lstStyle/>
+                    <a:p>
+                      <a:pPr algn="ctr" indent="0" marL="0">
+                        <a:buNone/>
+                      </a:pPr>
+                      <a:endParaRPr lang="en-US" sz="500" dirty="0">
+                        <a:latin typeface="Calibri" charset="0"/>
+                        <a:ea typeface="Calibri" charset="0"/>
+                        <a:cs typeface="Calibri" charset="0"/>
+                      </a:endParaRPr>
+                    </a:p>
+                  </a:txBody>
+                  <a:tcPr marL="91440" marR="91440" marT="45720" marB="45720">
+                    <a:lnL w="2540" cap="flat" cmpd="sng" algn="ctr">
+                      <a:solidFill>
+                        <a:srgbClr val="EEEEEE"/>
+                      </a:solidFill>
+                      <a:prstDash val="solid"/>
+                      <a:round/>
+                      <a:headEnd type="none" w="med" len="med"/>
+                      <a:tailEnd type="none" w="med" len="med"/>
+                    </a:lnL>
+                    <a:lnR w="2540" cap="flat" cmpd="sng" algn="ctr">
+                      <a:solidFill>
+                        <a:srgbClr val="EEEEEE"/>
+                      </a:solidFill>
+                      <a:prstDash val="solid"/>
+                      <a:round/>
+                      <a:headEnd type="none" w="med" len="med"/>
+                      <a:tailEnd type="none" w="med" len="med"/>
+                    </a:lnR>
+                    <a:lnT w="2540" cap="flat" cmpd="sng" algn="ctr">
+                      <a:solidFill>
+                        <a:srgbClr val="EEEEEE"/>
+                      </a:solidFill>
+                      <a:prstDash val="solid"/>
+                      <a:round/>
+                      <a:headEnd type="none" w="med" len="med"/>
+                      <a:tailEnd type="none" w="med" len="med"/>
+                    </a:lnT>
+                    <a:lnB w="2540" cap="flat" cmpd="sng" algn="ctr">
+                      <a:solidFill>
+                        <a:srgbClr val="EEEEEE"/>
+                      </a:solidFill>
+                      <a:prstDash val="solid"/>
+                      <a:round/>
+                      <a:headEnd type="none" w="med" len="med"/>
+                      <a:tailEnd type="none" w="med" len="med"/>
+                    </a:lnB>
+                  </a:tcPr>
+                </a:tc>
+                <a:tc>
+                  <a:txBody>
+                    <a:bodyPr/>
+                    <a:lstStyle/>
+                    <a:p>
+                      <a:pPr algn="ctr" indent="0" marL="0">
+                        <a:buNone/>
+                      </a:pPr>
+                      <a:endParaRPr lang="en-US" sz="500" dirty="0">
+                        <a:latin typeface="Calibri" charset="0"/>
+                        <a:ea typeface="Calibri" charset="0"/>
+                        <a:cs typeface="Calibri" charset="0"/>
+                      </a:endParaRPr>
+                    </a:p>
+                  </a:txBody>
+                  <a:tcPr marL="91440" marR="91440" marT="45720" marB="45720">
+                    <a:lnL w="2540" cap="flat" cmpd="sng" algn="ctr">
+                      <a:solidFill>
+                        <a:srgbClr val="EEEEEE"/>
+                      </a:solidFill>
+                      <a:prstDash val="solid"/>
+                      <a:round/>
+                      <a:headEnd type="none" w="med" len="med"/>
+                      <a:tailEnd type="none" w="med" len="med"/>
+                    </a:lnL>
+                    <a:lnR w="2540" cap="flat" cmpd="sng" algn="ctr">
+                      <a:solidFill>
+                        <a:srgbClr val="EEEEEE"/>
+                      </a:solidFill>
+                      <a:prstDash val="solid"/>
+                      <a:round/>
+                      <a:headEnd type="none" w="med" len="med"/>
+                      <a:tailEnd type="none" w="med" len="med"/>
+                    </a:lnR>
+                    <a:lnT w="2540" cap="flat" cmpd="sng" algn="ctr">
+                      <a:solidFill>
+                        <a:srgbClr val="EEEEEE"/>
+                      </a:solidFill>
+                      <a:prstDash val="solid"/>
+                      <a:round/>
+                      <a:headEnd type="none" w="med" len="med"/>
+                      <a:tailEnd type="none" w="med" len="med"/>
+                    </a:lnT>
+                    <a:lnB w="2540" cap="flat" cmpd="sng" algn="ctr">
+                      <a:solidFill>
+                        <a:srgbClr val="EEEEEE"/>
+                      </a:solidFill>
+                      <a:prstDash val="solid"/>
+                      <a:round/>
+                      <a:headEnd type="none" w="med" len="med"/>
+                      <a:tailEnd type="none" w="med" len="med"/>
+                    </a:lnB>
+                  </a:tcPr>
+                </a:tc>
+                <a:tc>
+                  <a:txBody>
+                    <a:bodyPr/>
+                    <a:lstStyle/>
+                    <a:p>
+                      <a:pPr algn="ctr" indent="0" marL="0">
+                        <a:buNone/>
+                      </a:pPr>
+                      <a:r>
                         <a:rPr lang="en-US" sz="500" b="1" dirty="0">
                           <a:solidFill>
                             <a:srgbClr val="777777"/>
@@ -9703,7 +12652,7 @@
                           <a:ea typeface="Calibri" pitchFamily="34" charset="-122"/>
                           <a:cs typeface="Calibri" pitchFamily="34" charset="-120"/>
                         </a:rPr>
-                        <a:t>4.99%</a:t>
+                        <a:t>3.39%</a:t>
                       </a:r>
                       <a:endParaRPr lang="en-US" sz="500" dirty="0">
                         <a:latin typeface="Calibri" charset="0"/>
@@ -9889,2828 +12838,7 @@
                           <a:ea typeface="Calibri" pitchFamily="34" charset="-122"/>
                           <a:cs typeface="Calibri" pitchFamily="34" charset="-120"/>
                         </a:rPr>
-                        <a:t>0.00%</a:t>
-                      </a:r>
-                      <a:endParaRPr lang="en-US" sz="500" dirty="0">
-                        <a:latin typeface="Calibri" charset="0"/>
-                        <a:ea typeface="Calibri" charset="0"/>
-                        <a:cs typeface="Calibri" charset="0"/>
-                      </a:endParaRPr>
-                    </a:p>
-                  </a:txBody>
-                  <a:tcPr marL="91440" marR="91440" marT="45720" marB="45720">
-                    <a:lnL w="2540" cap="flat" cmpd="sng" algn="ctr">
-                      <a:solidFill>
-                        <a:srgbClr val="EEEEEE"/>
-                      </a:solidFill>
-                      <a:prstDash val="solid"/>
-                      <a:round/>
-                      <a:headEnd type="none" w="med" len="med"/>
-                      <a:tailEnd type="none" w="med" len="med"/>
-                    </a:lnL>
-                    <a:lnR w="2540" cap="flat" cmpd="sng" algn="ctr">
-                      <a:solidFill>
-                        <a:srgbClr val="EEEEEE"/>
-                      </a:solidFill>
-                      <a:prstDash val="solid"/>
-                      <a:round/>
-                      <a:headEnd type="none" w="med" len="med"/>
-                      <a:tailEnd type="none" w="med" len="med"/>
-                    </a:lnR>
-                    <a:lnT w="2540" cap="flat" cmpd="sng" algn="ctr">
-                      <a:solidFill>
-                        <a:srgbClr val="EEEEEE"/>
-                      </a:solidFill>
-                      <a:prstDash val="solid"/>
-                      <a:round/>
-                      <a:headEnd type="none" w="med" len="med"/>
-                      <a:tailEnd type="none" w="med" len="med"/>
-                    </a:lnT>
-                    <a:lnB w="2540" cap="flat" cmpd="sng" algn="ctr">
-                      <a:solidFill>
-                        <a:srgbClr val="EEEEEE"/>
-                      </a:solidFill>
-                      <a:prstDash val="solid"/>
-                      <a:round/>
-                      <a:headEnd type="none" w="med" len="med"/>
-                      <a:tailEnd type="none" w="med" len="med"/>
-                    </a:lnB>
-                  </a:tcPr>
-                </a:tc>
-                <a:tc>
-                  <a:txBody>
-                    <a:bodyPr/>
-                    <a:lstStyle/>
-                    <a:p>
-                      <a:pPr algn="ctr" indent="0" marL="0">
-                        <a:buNone/>
-                      </a:pPr>
-                      <a:r>
-                        <a:rPr lang="en-US" sz="500" dirty="0">
-                          <a:solidFill>
-                            <a:srgbClr val="999999"/>
-                          </a:solidFill>
-                          <a:latin typeface="Calibri" pitchFamily="34" charset="0"/>
-                          <a:ea typeface="Calibri" pitchFamily="34" charset="-122"/>
-                          <a:cs typeface="Calibri" pitchFamily="34" charset="-120"/>
-                        </a:rPr>
-                        <a:t>0.28%</a:t>
-                      </a:r>
-                      <a:endParaRPr lang="en-US" sz="500" dirty="0">
-                        <a:latin typeface="Calibri" charset="0"/>
-                        <a:ea typeface="Calibri" charset="0"/>
-                        <a:cs typeface="Calibri" charset="0"/>
-                      </a:endParaRPr>
-                    </a:p>
-                  </a:txBody>
-                  <a:tcPr marL="91440" marR="91440" marT="45720" marB="45720">
-                    <a:lnL w="2540" cap="flat" cmpd="sng" algn="ctr">
-                      <a:solidFill>
-                        <a:srgbClr val="EEEEEE"/>
-                      </a:solidFill>
-                      <a:prstDash val="solid"/>
-                      <a:round/>
-                      <a:headEnd type="none" w="med" len="med"/>
-                      <a:tailEnd type="none" w="med" len="med"/>
-                    </a:lnL>
-                    <a:lnR w="2540" cap="flat" cmpd="sng" algn="ctr">
-                      <a:solidFill>
-                        <a:srgbClr val="EEEEEE"/>
-                      </a:solidFill>
-                      <a:prstDash val="solid"/>
-                      <a:round/>
-                      <a:headEnd type="none" w="med" len="med"/>
-                      <a:tailEnd type="none" w="med" len="med"/>
-                    </a:lnR>
-                    <a:lnT w="2540" cap="flat" cmpd="sng" algn="ctr">
-                      <a:solidFill>
-                        <a:srgbClr val="EEEEEE"/>
-                      </a:solidFill>
-                      <a:prstDash val="solid"/>
-                      <a:round/>
-                      <a:headEnd type="none" w="med" len="med"/>
-                      <a:tailEnd type="none" w="med" len="med"/>
-                    </a:lnT>
-                    <a:lnB w="2540" cap="flat" cmpd="sng" algn="ctr">
-                      <a:solidFill>
-                        <a:srgbClr val="EEEEEE"/>
-                      </a:solidFill>
-                      <a:prstDash val="solid"/>
-                      <a:round/>
-                      <a:headEnd type="none" w="med" len="med"/>
-                      <a:tailEnd type="none" w="med" len="med"/>
-                    </a:lnB>
-                  </a:tcPr>
-                </a:tc>
-                <a:tc>
-                  <a:txBody>
-                    <a:bodyPr/>
-                    <a:lstStyle/>
-                    <a:p>
-                      <a:pPr algn="ctr" indent="0" marL="0">
-                        <a:buNone/>
-                      </a:pPr>
-                      <a:r>
-                        <a:rPr lang="en-US" sz="500" dirty="0">
-                          <a:solidFill>
-                            <a:srgbClr val="999999"/>
-                          </a:solidFill>
-                          <a:latin typeface="Calibri" pitchFamily="34" charset="0"/>
-                          <a:ea typeface="Calibri" pitchFamily="34" charset="-122"/>
-                          <a:cs typeface="Calibri" pitchFamily="34" charset="-120"/>
-                        </a:rPr>
-                        <a:t>0.31%</a:t>
-                      </a:r>
-                      <a:endParaRPr lang="en-US" sz="500" dirty="0">
-                        <a:latin typeface="Calibri" charset="0"/>
-                        <a:ea typeface="Calibri" charset="0"/>
-                        <a:cs typeface="Calibri" charset="0"/>
-                      </a:endParaRPr>
-                    </a:p>
-                  </a:txBody>
-                  <a:tcPr marL="91440" marR="91440" marT="45720" marB="45720">
-                    <a:lnL w="2540" cap="flat" cmpd="sng" algn="ctr">
-                      <a:solidFill>
-                        <a:srgbClr val="EEEEEE"/>
-                      </a:solidFill>
-                      <a:prstDash val="solid"/>
-                      <a:round/>
-                      <a:headEnd type="none" w="med" len="med"/>
-                      <a:tailEnd type="none" w="med" len="med"/>
-                    </a:lnL>
-                    <a:lnR w="2540" cap="flat" cmpd="sng" algn="ctr">
-                      <a:solidFill>
-                        <a:srgbClr val="EEEEEE"/>
-                      </a:solidFill>
-                      <a:prstDash val="solid"/>
-                      <a:round/>
-                      <a:headEnd type="none" w="med" len="med"/>
-                      <a:tailEnd type="none" w="med" len="med"/>
-                    </a:lnR>
-                    <a:lnT w="2540" cap="flat" cmpd="sng" algn="ctr">
-                      <a:solidFill>
-                        <a:srgbClr val="EEEEEE"/>
-                      </a:solidFill>
-                      <a:prstDash val="solid"/>
-                      <a:round/>
-                      <a:headEnd type="none" w="med" len="med"/>
-                      <a:tailEnd type="none" w="med" len="med"/>
-                    </a:lnT>
-                    <a:lnB w="2540" cap="flat" cmpd="sng" algn="ctr">
-                      <a:solidFill>
-                        <a:srgbClr val="EEEEEE"/>
-                      </a:solidFill>
-                      <a:prstDash val="solid"/>
-                      <a:round/>
-                      <a:headEnd type="none" w="med" len="med"/>
-                      <a:tailEnd type="none" w="med" len="med"/>
-                    </a:lnB>
-                  </a:tcPr>
-                </a:tc>
-                <a:tc>
-                  <a:txBody>
-                    <a:bodyPr/>
-                    <a:lstStyle/>
-                    <a:p>
-                      <a:pPr algn="ctr" indent="0" marL="0">
-                        <a:buNone/>
-                      </a:pPr>
-                      <a:r>
-                        <a:rPr lang="en-US" sz="500" dirty="0">
-                          <a:solidFill>
-                            <a:srgbClr val="999999"/>
-                          </a:solidFill>
-                          <a:latin typeface="Calibri" pitchFamily="34" charset="0"/>
-                          <a:ea typeface="Calibri" pitchFamily="34" charset="-122"/>
-                          <a:cs typeface="Calibri" pitchFamily="34" charset="-120"/>
-                        </a:rPr>
-                        <a:t>0.30%</a:t>
-                      </a:r>
-                      <a:endParaRPr lang="en-US" sz="500" dirty="0">
-                        <a:latin typeface="Calibri" charset="0"/>
-                        <a:ea typeface="Calibri" charset="0"/>
-                        <a:cs typeface="Calibri" charset="0"/>
-                      </a:endParaRPr>
-                    </a:p>
-                  </a:txBody>
-                  <a:tcPr marL="91440" marR="91440" marT="45720" marB="45720">
-                    <a:lnL w="2540" cap="flat" cmpd="sng" algn="ctr">
-                      <a:solidFill>
-                        <a:srgbClr val="EEEEEE"/>
-                      </a:solidFill>
-                      <a:prstDash val="solid"/>
-                      <a:round/>
-                      <a:headEnd type="none" w="med" len="med"/>
-                      <a:tailEnd type="none" w="med" len="med"/>
-                    </a:lnL>
-                    <a:lnR w="2540" cap="flat" cmpd="sng" algn="ctr">
-                      <a:solidFill>
-                        <a:srgbClr val="EEEEEE"/>
-                      </a:solidFill>
-                      <a:prstDash val="solid"/>
-                      <a:round/>
-                      <a:headEnd type="none" w="med" len="med"/>
-                      <a:tailEnd type="none" w="med" len="med"/>
-                    </a:lnR>
-                    <a:lnT w="2540" cap="flat" cmpd="sng" algn="ctr">
-                      <a:solidFill>
-                        <a:srgbClr val="EEEEEE"/>
-                      </a:solidFill>
-                      <a:prstDash val="solid"/>
-                      <a:round/>
-                      <a:headEnd type="none" w="med" len="med"/>
-                      <a:tailEnd type="none" w="med" len="med"/>
-                    </a:lnT>
-                    <a:lnB w="2540" cap="flat" cmpd="sng" algn="ctr">
-                      <a:solidFill>
-                        <a:srgbClr val="EEEEEE"/>
-                      </a:solidFill>
-                      <a:prstDash val="solid"/>
-                      <a:round/>
-                      <a:headEnd type="none" w="med" len="med"/>
-                      <a:tailEnd type="none" w="med" len="med"/>
-                    </a:lnB>
-                  </a:tcPr>
-                </a:tc>
-                <a:tc>
-                  <a:txBody>
-                    <a:bodyPr/>
-                    <a:lstStyle/>
-                    <a:p>
-                      <a:pPr algn="ctr" indent="0" marL="0">
-                        <a:buNone/>
-                      </a:pPr>
-                      <a:r>
-                        <a:rPr lang="en-US" sz="500" dirty="0">
-                          <a:solidFill>
-                            <a:srgbClr val="999999"/>
-                          </a:solidFill>
-                          <a:latin typeface="Calibri" pitchFamily="34" charset="0"/>
-                          <a:ea typeface="Calibri" pitchFamily="34" charset="-122"/>
-                          <a:cs typeface="Calibri" pitchFamily="34" charset="-120"/>
-                        </a:rPr>
-                        <a:t>0.31%</a:t>
-                      </a:r>
-                      <a:endParaRPr lang="en-US" sz="500" dirty="0">
-                        <a:latin typeface="Calibri" charset="0"/>
-                        <a:ea typeface="Calibri" charset="0"/>
-                        <a:cs typeface="Calibri" charset="0"/>
-                      </a:endParaRPr>
-                    </a:p>
-                  </a:txBody>
-                  <a:tcPr marL="91440" marR="91440" marT="45720" marB="45720">
-                    <a:lnL w="2540" cap="flat" cmpd="sng" algn="ctr">
-                      <a:solidFill>
-                        <a:srgbClr val="EEEEEE"/>
-                      </a:solidFill>
-                      <a:prstDash val="solid"/>
-                      <a:round/>
-                      <a:headEnd type="none" w="med" len="med"/>
-                      <a:tailEnd type="none" w="med" len="med"/>
-                    </a:lnL>
-                    <a:lnR w="2540" cap="flat" cmpd="sng" algn="ctr">
-                      <a:solidFill>
-                        <a:srgbClr val="EEEEEE"/>
-                      </a:solidFill>
-                      <a:prstDash val="solid"/>
-                      <a:round/>
-                      <a:headEnd type="none" w="med" len="med"/>
-                      <a:tailEnd type="none" w="med" len="med"/>
-                    </a:lnR>
-                    <a:lnT w="2540" cap="flat" cmpd="sng" algn="ctr">
-                      <a:solidFill>
-                        <a:srgbClr val="EEEEEE"/>
-                      </a:solidFill>
-                      <a:prstDash val="solid"/>
-                      <a:round/>
-                      <a:headEnd type="none" w="med" len="med"/>
-                      <a:tailEnd type="none" w="med" len="med"/>
-                    </a:lnT>
-                    <a:lnB w="2540" cap="flat" cmpd="sng" algn="ctr">
-                      <a:solidFill>
-                        <a:srgbClr val="EEEEEE"/>
-                      </a:solidFill>
-                      <a:prstDash val="solid"/>
-                      <a:round/>
-                      <a:headEnd type="none" w="med" len="med"/>
-                      <a:tailEnd type="none" w="med" len="med"/>
-                    </a:lnB>
-                  </a:tcPr>
-                </a:tc>
-                <a:tc>
-                  <a:txBody>
-                    <a:bodyPr/>
-                    <a:lstStyle/>
-                    <a:p>
-                      <a:pPr algn="ctr" indent="0" marL="0">
-                        <a:buNone/>
-                      </a:pPr>
-                      <a:r>
-                        <a:rPr lang="en-US" sz="500" dirty="0">
-                          <a:solidFill>
-                            <a:srgbClr val="999999"/>
-                          </a:solidFill>
-                          <a:latin typeface="Calibri" pitchFamily="34" charset="0"/>
-                          <a:ea typeface="Calibri" pitchFamily="34" charset="-122"/>
-                          <a:cs typeface="Calibri" pitchFamily="34" charset="-120"/>
-                        </a:rPr>
-                        <a:t>0.30%</a:t>
-                      </a:r>
-                      <a:endParaRPr lang="en-US" sz="500" dirty="0">
-                        <a:latin typeface="Calibri" charset="0"/>
-                        <a:ea typeface="Calibri" charset="0"/>
-                        <a:cs typeface="Calibri" charset="0"/>
-                      </a:endParaRPr>
-                    </a:p>
-                  </a:txBody>
-                  <a:tcPr marL="91440" marR="91440" marT="45720" marB="45720">
-                    <a:lnL w="2540" cap="flat" cmpd="sng" algn="ctr">
-                      <a:solidFill>
-                        <a:srgbClr val="EEEEEE"/>
-                      </a:solidFill>
-                      <a:prstDash val="solid"/>
-                      <a:round/>
-                      <a:headEnd type="none" w="med" len="med"/>
-                      <a:tailEnd type="none" w="med" len="med"/>
-                    </a:lnL>
-                    <a:lnR w="2540" cap="flat" cmpd="sng" algn="ctr">
-                      <a:solidFill>
-                        <a:srgbClr val="EEEEEE"/>
-                      </a:solidFill>
-                      <a:prstDash val="solid"/>
-                      <a:round/>
-                      <a:headEnd type="none" w="med" len="med"/>
-                      <a:tailEnd type="none" w="med" len="med"/>
-                    </a:lnR>
-                    <a:lnT w="2540" cap="flat" cmpd="sng" algn="ctr">
-                      <a:solidFill>
-                        <a:srgbClr val="EEEEEE"/>
-                      </a:solidFill>
-                      <a:prstDash val="solid"/>
-                      <a:round/>
-                      <a:headEnd type="none" w="med" len="med"/>
-                      <a:tailEnd type="none" w="med" len="med"/>
-                    </a:lnT>
-                    <a:lnB w="2540" cap="flat" cmpd="sng" algn="ctr">
-                      <a:solidFill>
-                        <a:srgbClr val="EEEEEE"/>
-                      </a:solidFill>
-                      <a:prstDash val="solid"/>
-                      <a:round/>
-                      <a:headEnd type="none" w="med" len="med"/>
-                      <a:tailEnd type="none" w="med" len="med"/>
-                    </a:lnB>
-                  </a:tcPr>
-                </a:tc>
-                <a:tc>
-                  <a:txBody>
-                    <a:bodyPr/>
-                    <a:lstStyle/>
-                    <a:p>
-                      <a:pPr algn="ctr" indent="0" marL="0">
-                        <a:buNone/>
-                      </a:pPr>
-                      <a:r>
-                        <a:rPr lang="en-US" sz="500" dirty="0">
-                          <a:solidFill>
-                            <a:srgbClr val="999999"/>
-                          </a:solidFill>
-                          <a:latin typeface="Calibri" pitchFamily="34" charset="0"/>
-                          <a:ea typeface="Calibri" pitchFamily="34" charset="-122"/>
-                          <a:cs typeface="Calibri" pitchFamily="34" charset="-120"/>
-                        </a:rPr>
-                        <a:t>0.30%</a:t>
-                      </a:r>
-                      <a:endParaRPr lang="en-US" sz="500" dirty="0">
-                        <a:latin typeface="Calibri" charset="0"/>
-                        <a:ea typeface="Calibri" charset="0"/>
-                        <a:cs typeface="Calibri" charset="0"/>
-                      </a:endParaRPr>
-                    </a:p>
-                  </a:txBody>
-                  <a:tcPr marL="91440" marR="91440" marT="45720" marB="45720">
-                    <a:lnL w="2540" cap="flat" cmpd="sng" algn="ctr">
-                      <a:solidFill>
-                        <a:srgbClr val="EEEEEE"/>
-                      </a:solidFill>
-                      <a:prstDash val="solid"/>
-                      <a:round/>
-                      <a:headEnd type="none" w="med" len="med"/>
-                      <a:tailEnd type="none" w="med" len="med"/>
-                    </a:lnL>
-                    <a:lnR w="2540" cap="flat" cmpd="sng" algn="ctr">
-                      <a:solidFill>
-                        <a:srgbClr val="EEEEEE"/>
-                      </a:solidFill>
-                      <a:prstDash val="solid"/>
-                      <a:round/>
-                      <a:headEnd type="none" w="med" len="med"/>
-                      <a:tailEnd type="none" w="med" len="med"/>
-                    </a:lnR>
-                    <a:lnT w="2540" cap="flat" cmpd="sng" algn="ctr">
-                      <a:solidFill>
-                        <a:srgbClr val="EEEEEE"/>
-                      </a:solidFill>
-                      <a:prstDash val="solid"/>
-                      <a:round/>
-                      <a:headEnd type="none" w="med" len="med"/>
-                      <a:tailEnd type="none" w="med" len="med"/>
-                    </a:lnT>
-                    <a:lnB w="2540" cap="flat" cmpd="sng" algn="ctr">
-                      <a:solidFill>
-                        <a:srgbClr val="EEEEEE"/>
-                      </a:solidFill>
-                      <a:prstDash val="solid"/>
-                      <a:round/>
-                      <a:headEnd type="none" w="med" len="med"/>
-                      <a:tailEnd type="none" w="med" len="med"/>
-                    </a:lnB>
-                  </a:tcPr>
-                </a:tc>
-                <a:tc>
-                  <a:txBody>
-                    <a:bodyPr/>
-                    <a:lstStyle/>
-                    <a:p>
-                      <a:pPr algn="ctr" indent="0" marL="0">
-                        <a:buNone/>
-                      </a:pPr>
-                      <a:r>
-                        <a:rPr lang="en-US" sz="500" dirty="0">
-                          <a:solidFill>
-                            <a:srgbClr val="999999"/>
-                          </a:solidFill>
-                          <a:latin typeface="Calibri" pitchFamily="34" charset="0"/>
-                          <a:ea typeface="Calibri" pitchFamily="34" charset="-122"/>
-                          <a:cs typeface="Calibri" pitchFamily="34" charset="-120"/>
-                        </a:rPr>
-                        <a:t>0.30%</a:t>
-                      </a:r>
-                      <a:endParaRPr lang="en-US" sz="500" dirty="0">
-                        <a:latin typeface="Calibri" charset="0"/>
-                        <a:ea typeface="Calibri" charset="0"/>
-                        <a:cs typeface="Calibri" charset="0"/>
-                      </a:endParaRPr>
-                    </a:p>
-                  </a:txBody>
-                  <a:tcPr marL="91440" marR="91440" marT="45720" marB="45720">
-                    <a:lnL w="2540" cap="flat" cmpd="sng" algn="ctr">
-                      <a:solidFill>
-                        <a:srgbClr val="EEEEEE"/>
-                      </a:solidFill>
-                      <a:prstDash val="solid"/>
-                      <a:round/>
-                      <a:headEnd type="none" w="med" len="med"/>
-                      <a:tailEnd type="none" w="med" len="med"/>
-                    </a:lnL>
-                    <a:lnR w="2540" cap="flat" cmpd="sng" algn="ctr">
-                      <a:solidFill>
-                        <a:srgbClr val="EEEEEE"/>
-                      </a:solidFill>
-                      <a:prstDash val="solid"/>
-                      <a:round/>
-                      <a:headEnd type="none" w="med" len="med"/>
-                      <a:tailEnd type="none" w="med" len="med"/>
-                    </a:lnR>
-                    <a:lnT w="2540" cap="flat" cmpd="sng" algn="ctr">
-                      <a:solidFill>
-                        <a:srgbClr val="EEEEEE"/>
-                      </a:solidFill>
-                      <a:prstDash val="solid"/>
-                      <a:round/>
-                      <a:headEnd type="none" w="med" len="med"/>
-                      <a:tailEnd type="none" w="med" len="med"/>
-                    </a:lnT>
-                    <a:lnB w="2540" cap="flat" cmpd="sng" algn="ctr">
-                      <a:solidFill>
-                        <a:srgbClr val="EEEEEE"/>
-                      </a:solidFill>
-                      <a:prstDash val="solid"/>
-                      <a:round/>
-                      <a:headEnd type="none" w="med" len="med"/>
-                      <a:tailEnd type="none" w="med" len="med"/>
-                    </a:lnB>
-                  </a:tcPr>
-                </a:tc>
-                <a:tc>
-                  <a:txBody>
-                    <a:bodyPr/>
-                    <a:lstStyle/>
-                    <a:p>
-                      <a:pPr algn="ctr" indent="0" marL="0">
-                        <a:buNone/>
-                      </a:pPr>
-                      <a:r>
-                        <a:rPr lang="en-US" sz="500" dirty="0">
-                          <a:solidFill>
-                            <a:srgbClr val="999999"/>
-                          </a:solidFill>
-                          <a:latin typeface="Calibri" pitchFamily="34" charset="0"/>
-                          <a:ea typeface="Calibri" pitchFamily="34" charset="-122"/>
-                          <a:cs typeface="Calibri" pitchFamily="34" charset="-120"/>
-                        </a:rPr>
-                        <a:t>0.28%</a:t>
-                      </a:r>
-                      <a:endParaRPr lang="en-US" sz="500" dirty="0">
-                        <a:latin typeface="Calibri" charset="0"/>
-                        <a:ea typeface="Calibri" charset="0"/>
-                        <a:cs typeface="Calibri" charset="0"/>
-                      </a:endParaRPr>
-                    </a:p>
-                  </a:txBody>
-                  <a:tcPr marL="91440" marR="91440" marT="45720" marB="45720">
-                    <a:lnL w="2540" cap="flat" cmpd="sng" algn="ctr">
-                      <a:solidFill>
-                        <a:srgbClr val="EEEEEE"/>
-                      </a:solidFill>
-                      <a:prstDash val="solid"/>
-                      <a:round/>
-                      <a:headEnd type="none" w="med" len="med"/>
-                      <a:tailEnd type="none" w="med" len="med"/>
-                    </a:lnL>
-                    <a:lnR w="2540" cap="flat" cmpd="sng" algn="ctr">
-                      <a:solidFill>
-                        <a:srgbClr val="EEEEEE"/>
-                      </a:solidFill>
-                      <a:prstDash val="solid"/>
-                      <a:round/>
-                      <a:headEnd type="none" w="med" len="med"/>
-                      <a:tailEnd type="none" w="med" len="med"/>
-                    </a:lnR>
-                    <a:lnT w="2540" cap="flat" cmpd="sng" algn="ctr">
-                      <a:solidFill>
-                        <a:srgbClr val="EEEEEE"/>
-                      </a:solidFill>
-                      <a:prstDash val="solid"/>
-                      <a:round/>
-                      <a:headEnd type="none" w="med" len="med"/>
-                      <a:tailEnd type="none" w="med" len="med"/>
-                    </a:lnT>
-                    <a:lnB w="2540" cap="flat" cmpd="sng" algn="ctr">
-                      <a:solidFill>
-                        <a:srgbClr val="EEEEEE"/>
-                      </a:solidFill>
-                      <a:prstDash val="solid"/>
-                      <a:round/>
-                      <a:headEnd type="none" w="med" len="med"/>
-                      <a:tailEnd type="none" w="med" len="med"/>
-                    </a:lnB>
-                  </a:tcPr>
-                </a:tc>
-                <a:tc>
-                  <a:txBody>
-                    <a:bodyPr/>
-                    <a:lstStyle/>
-                    <a:p>
-                      <a:pPr algn="ctr" indent="0" marL="0">
-                        <a:buNone/>
-                      </a:pPr>
-                      <a:r>
-                        <a:rPr lang="en-US" sz="500" dirty="0">
-                          <a:solidFill>
-                            <a:srgbClr val="999999"/>
-                          </a:solidFill>
-                          <a:latin typeface="Calibri" pitchFamily="34" charset="0"/>
-                          <a:ea typeface="Calibri" pitchFamily="34" charset="-122"/>
-                          <a:cs typeface="Calibri" pitchFamily="34" charset="-120"/>
-                        </a:rPr>
-                        <a:t>0.29%</a:t>
-                      </a:r>
-                      <a:endParaRPr lang="en-US" sz="500" dirty="0">
-                        <a:latin typeface="Calibri" charset="0"/>
-                        <a:ea typeface="Calibri" charset="0"/>
-                        <a:cs typeface="Calibri" charset="0"/>
-                      </a:endParaRPr>
-                    </a:p>
-                  </a:txBody>
-                  <a:tcPr marL="91440" marR="91440" marT="45720" marB="45720">
-                    <a:lnL w="2540" cap="flat" cmpd="sng" algn="ctr">
-                      <a:solidFill>
-                        <a:srgbClr val="EEEEEE"/>
-                      </a:solidFill>
-                      <a:prstDash val="solid"/>
-                      <a:round/>
-                      <a:headEnd type="none" w="med" len="med"/>
-                      <a:tailEnd type="none" w="med" len="med"/>
-                    </a:lnL>
-                    <a:lnR w="2540" cap="flat" cmpd="sng" algn="ctr">
-                      <a:solidFill>
-                        <a:srgbClr val="EEEEEE"/>
-                      </a:solidFill>
-                      <a:prstDash val="solid"/>
-                      <a:round/>
-                      <a:headEnd type="none" w="med" len="med"/>
-                      <a:tailEnd type="none" w="med" len="med"/>
-                    </a:lnR>
-                    <a:lnT w="2540" cap="flat" cmpd="sng" algn="ctr">
-                      <a:solidFill>
-                        <a:srgbClr val="EEEEEE"/>
-                      </a:solidFill>
-                      <a:prstDash val="solid"/>
-                      <a:round/>
-                      <a:headEnd type="none" w="med" len="med"/>
-                      <a:tailEnd type="none" w="med" len="med"/>
-                    </a:lnT>
-                    <a:lnB w="2540" cap="flat" cmpd="sng" algn="ctr">
-                      <a:solidFill>
-                        <a:srgbClr val="EEEEEE"/>
-                      </a:solidFill>
-                      <a:prstDash val="solid"/>
-                      <a:round/>
-                      <a:headEnd type="none" w="med" len="med"/>
-                      <a:tailEnd type="none" w="med" len="med"/>
-                    </a:lnB>
-                  </a:tcPr>
-                </a:tc>
-                <a:tc>
-                  <a:txBody>
-                    <a:bodyPr/>
-                    <a:lstStyle/>
-                    <a:p>
-                      <a:pPr algn="ctr" indent="0" marL="0">
-                        <a:buNone/>
-                      </a:pPr>
-                      <a:r>
-                        <a:rPr lang="en-US" sz="500" dirty="0">
-                          <a:solidFill>
-                            <a:srgbClr val="999999"/>
-                          </a:solidFill>
-                          <a:latin typeface="Calibri" pitchFamily="34" charset="0"/>
-                          <a:ea typeface="Calibri" pitchFamily="34" charset="-122"/>
-                          <a:cs typeface="Calibri" pitchFamily="34" charset="-120"/>
-                        </a:rPr>
-                        <a:t>0.28%</a:t>
-                      </a:r>
-                      <a:endParaRPr lang="en-US" sz="500" dirty="0">
-                        <a:latin typeface="Calibri" charset="0"/>
-                        <a:ea typeface="Calibri" charset="0"/>
-                        <a:cs typeface="Calibri" charset="0"/>
-                      </a:endParaRPr>
-                    </a:p>
-                  </a:txBody>
-                  <a:tcPr marL="91440" marR="91440" marT="45720" marB="45720">
-                    <a:lnL w="2540" cap="flat" cmpd="sng" algn="ctr">
-                      <a:solidFill>
-                        <a:srgbClr val="EEEEEE"/>
-                      </a:solidFill>
-                      <a:prstDash val="solid"/>
-                      <a:round/>
-                      <a:headEnd type="none" w="med" len="med"/>
-                      <a:tailEnd type="none" w="med" len="med"/>
-                    </a:lnL>
-                    <a:lnR w="2540" cap="flat" cmpd="sng" algn="ctr">
-                      <a:solidFill>
-                        <a:srgbClr val="EEEEEE"/>
-                      </a:solidFill>
-                      <a:prstDash val="solid"/>
-                      <a:round/>
-                      <a:headEnd type="none" w="med" len="med"/>
-                      <a:tailEnd type="none" w="med" len="med"/>
-                    </a:lnR>
-                    <a:lnT w="2540" cap="flat" cmpd="sng" algn="ctr">
-                      <a:solidFill>
-                        <a:srgbClr val="EEEEEE"/>
-                      </a:solidFill>
-                      <a:prstDash val="solid"/>
-                      <a:round/>
-                      <a:headEnd type="none" w="med" len="med"/>
-                      <a:tailEnd type="none" w="med" len="med"/>
-                    </a:lnT>
-                    <a:lnB w="2540" cap="flat" cmpd="sng" algn="ctr">
-                      <a:solidFill>
-                        <a:srgbClr val="EEEEEE"/>
-                      </a:solidFill>
-                      <a:prstDash val="solid"/>
-                      <a:round/>
-                      <a:headEnd type="none" w="med" len="med"/>
-                      <a:tailEnd type="none" w="med" len="med"/>
-                    </a:lnB>
-                  </a:tcPr>
-                </a:tc>
-                <a:tc>
-                  <a:txBody>
-                    <a:bodyPr/>
-                    <a:lstStyle/>
-                    <a:p>
-                      <a:pPr algn="ctr" indent="0" marL="0">
-                        <a:buNone/>
-                      </a:pPr>
-                      <a:r>
-                        <a:rPr lang="en-US" sz="500" dirty="0">
-                          <a:solidFill>
-                            <a:srgbClr val="999999"/>
-                          </a:solidFill>
-                          <a:latin typeface="Calibri" pitchFamily="34" charset="0"/>
-                          <a:ea typeface="Calibri" pitchFamily="34" charset="-122"/>
-                          <a:cs typeface="Calibri" pitchFamily="34" charset="-120"/>
-                        </a:rPr>
-                        <a:t>0.56%</a:t>
-                      </a:r>
-                      <a:endParaRPr lang="en-US" sz="500" dirty="0">
-                        <a:latin typeface="Calibri" charset="0"/>
-                        <a:ea typeface="Calibri" charset="0"/>
-                        <a:cs typeface="Calibri" charset="0"/>
-                      </a:endParaRPr>
-                    </a:p>
-                  </a:txBody>
-                  <a:tcPr marL="91440" marR="91440" marT="45720" marB="45720">
-                    <a:lnL w="2540" cap="flat" cmpd="sng" algn="ctr">
-                      <a:solidFill>
-                        <a:srgbClr val="EEEEEE"/>
-                      </a:solidFill>
-                      <a:prstDash val="solid"/>
-                      <a:round/>
-                      <a:headEnd type="none" w="med" len="med"/>
-                      <a:tailEnd type="none" w="med" len="med"/>
-                    </a:lnL>
-                    <a:lnR w="2540" cap="flat" cmpd="sng" algn="ctr">
-                      <a:solidFill>
-                        <a:srgbClr val="EEEEEE"/>
-                      </a:solidFill>
-                      <a:prstDash val="solid"/>
-                      <a:round/>
-                      <a:headEnd type="none" w="med" len="med"/>
-                      <a:tailEnd type="none" w="med" len="med"/>
-                    </a:lnR>
-                    <a:lnT w="2540" cap="flat" cmpd="sng" algn="ctr">
-                      <a:solidFill>
-                        <a:srgbClr val="EEEEEE"/>
-                      </a:solidFill>
-                      <a:prstDash val="solid"/>
-                      <a:round/>
-                      <a:headEnd type="none" w="med" len="med"/>
-                      <a:tailEnd type="none" w="med" len="med"/>
-                    </a:lnT>
-                    <a:lnB w="2540" cap="flat" cmpd="sng" algn="ctr">
-                      <a:solidFill>
-                        <a:srgbClr val="EEEEEE"/>
-                      </a:solidFill>
-                      <a:prstDash val="solid"/>
-                      <a:round/>
-                      <a:headEnd type="none" w="med" len="med"/>
-                      <a:tailEnd type="none" w="med" len="med"/>
-                    </a:lnB>
-                  </a:tcPr>
-                </a:tc>
-                <a:tc>
-                  <a:txBody>
-                    <a:bodyPr/>
-                    <a:lstStyle/>
-                    <a:p>
-                      <a:pPr algn="ctr" indent="0" marL="0">
-                        <a:buNone/>
-                      </a:pPr>
-                      <a:r>
-                        <a:rPr lang="en-US" sz="500" b="1" dirty="0">
-                          <a:solidFill>
-                            <a:srgbClr val="999999"/>
-                          </a:solidFill>
-                          <a:latin typeface="Calibri" pitchFamily="34" charset="0"/>
-                          <a:ea typeface="Calibri" pitchFamily="34" charset="-122"/>
-                          <a:cs typeface="Calibri" pitchFamily="34" charset="-120"/>
-                        </a:rPr>
-                        <a:t>3.54%</a:t>
-                      </a:r>
-                      <a:endParaRPr lang="en-US" sz="500" dirty="0">
-                        <a:latin typeface="Calibri" charset="0"/>
-                        <a:ea typeface="Calibri" charset="0"/>
-                        <a:cs typeface="Calibri" charset="0"/>
-                      </a:endParaRPr>
-                    </a:p>
-                  </a:txBody>
-                  <a:tcPr marL="91440" marR="91440" marT="45720" marB="45720">
-                    <a:lnL w="2540" cap="flat" cmpd="sng" algn="ctr">
-                      <a:solidFill>
-                        <a:srgbClr val="EEEEEE"/>
-                      </a:solidFill>
-                      <a:prstDash val="solid"/>
-                      <a:round/>
-                      <a:headEnd type="none" w="med" len="med"/>
-                      <a:tailEnd type="none" w="med" len="med"/>
-                    </a:lnL>
-                    <a:lnR w="2540" cap="flat" cmpd="sng" algn="ctr">
-                      <a:solidFill>
-                        <a:srgbClr val="EEEEEE"/>
-                      </a:solidFill>
-                      <a:prstDash val="solid"/>
-                      <a:round/>
-                      <a:headEnd type="none" w="med" len="med"/>
-                      <a:tailEnd type="none" w="med" len="med"/>
-                    </a:lnR>
-                    <a:lnT w="2540" cap="flat" cmpd="sng" algn="ctr">
-                      <a:solidFill>
-                        <a:srgbClr val="EEEEEE"/>
-                      </a:solidFill>
-                      <a:prstDash val="solid"/>
-                      <a:round/>
-                      <a:headEnd type="none" w="med" len="med"/>
-                      <a:tailEnd type="none" w="med" len="med"/>
-                    </a:lnT>
-                    <a:lnB w="2540" cap="flat" cmpd="sng" algn="ctr">
-                      <a:solidFill>
-                        <a:srgbClr val="EEEEEE"/>
-                      </a:solidFill>
-                      <a:prstDash val="solid"/>
-                      <a:round/>
-                      <a:headEnd type="none" w="med" len="med"/>
-                      <a:tailEnd type="none" w="med" len="med"/>
-                    </a:lnB>
-                  </a:tcPr>
-                </a:tc>
-              </a:tr>
-              <a:tr h="123444">
-                <a:tc>
-                  <a:txBody>
-                    <a:bodyPr/>
-                    <a:lstStyle/>
-                    <a:p>
-                      <a:pPr algn="l" indent="0" marL="0">
-                        <a:buNone/>
-                      </a:pPr>
-                      <a:endParaRPr lang="en-US" sz="500" dirty="0">
-                        <a:latin typeface="Calibri" charset="0"/>
-                        <a:ea typeface="Calibri" charset="0"/>
-                        <a:cs typeface="Calibri" charset="0"/>
-                      </a:endParaRPr>
-                    </a:p>
-                  </a:txBody>
-                  <a:tcPr marL="91440" marR="91440" marT="45720" marB="45720">
-                    <a:lnL w="2540" cap="flat" cmpd="sng" algn="ctr">
-                      <a:solidFill>
-                        <a:srgbClr val="EEEEEE"/>
-                      </a:solidFill>
-                      <a:prstDash val="solid"/>
-                      <a:round/>
-                      <a:headEnd type="none" w="med" len="med"/>
-                      <a:tailEnd type="none" w="med" len="med"/>
-                    </a:lnL>
-                    <a:lnR w="2540" cap="flat" cmpd="sng" algn="ctr">
-                      <a:solidFill>
-                        <a:srgbClr val="EEEEEE"/>
-                      </a:solidFill>
-                      <a:prstDash val="solid"/>
-                      <a:round/>
-                      <a:headEnd type="none" w="med" len="med"/>
-                      <a:tailEnd type="none" w="med" len="med"/>
-                    </a:lnR>
-                    <a:lnT w="2540" cap="flat" cmpd="sng" algn="ctr">
-                      <a:solidFill>
-                        <a:srgbClr val="EEEEEE"/>
-                      </a:solidFill>
-                      <a:prstDash val="solid"/>
-                      <a:round/>
-                      <a:headEnd type="none" w="med" len="med"/>
-                      <a:tailEnd type="none" w="med" len="med"/>
-                    </a:lnT>
-                    <a:lnB w="2540" cap="flat" cmpd="sng" algn="ctr">
-                      <a:solidFill>
-                        <a:srgbClr val="EEEEEE"/>
-                      </a:solidFill>
-                      <a:prstDash val="solid"/>
-                      <a:round/>
-                      <a:headEnd type="none" w="med" len="med"/>
-                      <a:tailEnd type="none" w="med" len="med"/>
-                    </a:lnB>
-                  </a:tcPr>
-                </a:tc>
-                <a:tc>
-                  <a:txBody>
-                    <a:bodyPr/>
-                    <a:lstStyle/>
-                    <a:p>
-                      <a:pPr algn="l" indent="0" marL="0">
-                        <a:buNone/>
-                      </a:pPr>
-                      <a:r>
-                        <a:rPr lang="en-US" sz="500" dirty="0">
-                          <a:solidFill>
-                            <a:srgbClr val="000000"/>
-                          </a:solidFill>
-                          <a:latin typeface="Calibri" pitchFamily="34" charset="0"/>
-                          <a:ea typeface="Calibri" pitchFamily="34" charset="-122"/>
-                          <a:cs typeface="Calibri" pitchFamily="34" charset="-120"/>
-                        </a:rPr>
-                        <a:t>FIP LIQUIDEZ DISPONIBLE I</a:t>
-                      </a:r>
-                      <a:endParaRPr lang="en-US" sz="500" dirty="0">
-                        <a:latin typeface="Calibri" charset="0"/>
-                        <a:ea typeface="Calibri" charset="0"/>
-                        <a:cs typeface="Calibri" charset="0"/>
-                      </a:endParaRPr>
-                    </a:p>
-                  </a:txBody>
-                  <a:tcPr marL="91440" marR="91440" marT="45720" marB="45720">
-                    <a:lnL w="2540" cap="flat" cmpd="sng" algn="ctr">
-                      <a:solidFill>
-                        <a:srgbClr val="EEEEEE"/>
-                      </a:solidFill>
-                      <a:prstDash val="solid"/>
-                      <a:round/>
-                      <a:headEnd type="none" w="med" len="med"/>
-                      <a:tailEnd type="none" w="med" len="med"/>
-                    </a:lnL>
-                    <a:lnR w="2540" cap="flat" cmpd="sng" algn="ctr">
-                      <a:solidFill>
-                        <a:srgbClr val="EEEEEE"/>
-                      </a:solidFill>
-                      <a:prstDash val="solid"/>
-                      <a:round/>
-                      <a:headEnd type="none" w="med" len="med"/>
-                      <a:tailEnd type="none" w="med" len="med"/>
-                    </a:lnR>
-                    <a:lnT w="2540" cap="flat" cmpd="sng" algn="ctr">
-                      <a:solidFill>
-                        <a:srgbClr val="EEEEEE"/>
-                      </a:solidFill>
-                      <a:prstDash val="solid"/>
-                      <a:round/>
-                      <a:headEnd type="none" w="med" len="med"/>
-                      <a:tailEnd type="none" w="med" len="med"/>
-                    </a:lnT>
-                    <a:lnB w="2540" cap="flat" cmpd="sng" algn="ctr">
-                      <a:solidFill>
-                        <a:srgbClr val="EEEEEE"/>
-                      </a:solidFill>
-                      <a:prstDash val="solid"/>
-                      <a:round/>
-                      <a:headEnd type="none" w="med" len="med"/>
-                      <a:tailEnd type="none" w="med" len="med"/>
-                    </a:lnB>
-                  </a:tcPr>
-                </a:tc>
-                <a:tc>
-                  <a:txBody>
-                    <a:bodyPr/>
-                    <a:lstStyle/>
-                    <a:p>
-                      <a:pPr algn="ctr" indent="0" marL="0">
-                        <a:buNone/>
-                      </a:pPr>
-                      <a:r>
-                        <a:rPr lang="en-US" sz="500" dirty="0">
-                          <a:solidFill>
-                            <a:srgbClr val="000000"/>
-                          </a:solidFill>
-                          <a:latin typeface="Calibri" pitchFamily="34" charset="0"/>
-                          <a:ea typeface="Calibri" pitchFamily="34" charset="-122"/>
-                          <a:cs typeface="Calibri" pitchFamily="34" charset="-120"/>
-                        </a:rPr>
-                        <a:t>0.44%</a:t>
-                      </a:r>
-                      <a:endParaRPr lang="en-US" sz="500" dirty="0">
-                        <a:latin typeface="Calibri" charset="0"/>
-                        <a:ea typeface="Calibri" charset="0"/>
-                        <a:cs typeface="Calibri" charset="0"/>
-                      </a:endParaRPr>
-                    </a:p>
-                  </a:txBody>
-                  <a:tcPr marL="91440" marR="91440" marT="45720" marB="45720">
-                    <a:lnL w="2540" cap="flat" cmpd="sng" algn="ctr">
-                      <a:solidFill>
-                        <a:srgbClr val="EEEEEE"/>
-                      </a:solidFill>
-                      <a:prstDash val="solid"/>
-                      <a:round/>
-                      <a:headEnd type="none" w="med" len="med"/>
-                      <a:tailEnd type="none" w="med" len="med"/>
-                    </a:lnL>
-                    <a:lnR w="2540" cap="flat" cmpd="sng" algn="ctr">
-                      <a:solidFill>
-                        <a:srgbClr val="EEEEEE"/>
-                      </a:solidFill>
-                      <a:prstDash val="solid"/>
-                      <a:round/>
-                      <a:headEnd type="none" w="med" len="med"/>
-                      <a:tailEnd type="none" w="med" len="med"/>
-                    </a:lnR>
-                    <a:lnT w="2540" cap="flat" cmpd="sng" algn="ctr">
-                      <a:solidFill>
-                        <a:srgbClr val="EEEEEE"/>
-                      </a:solidFill>
-                      <a:prstDash val="solid"/>
-                      <a:round/>
-                      <a:headEnd type="none" w="med" len="med"/>
-                      <a:tailEnd type="none" w="med" len="med"/>
-                    </a:lnT>
-                    <a:lnB w="2540" cap="flat" cmpd="sng" algn="ctr">
-                      <a:solidFill>
-                        <a:srgbClr val="EEEEEE"/>
-                      </a:solidFill>
-                      <a:prstDash val="solid"/>
-                      <a:round/>
-                      <a:headEnd type="none" w="med" len="med"/>
-                      <a:tailEnd type="none" w="med" len="med"/>
-                    </a:lnB>
-                  </a:tcPr>
-                </a:tc>
-                <a:tc>
-                  <a:txBody>
-                    <a:bodyPr/>
-                    <a:lstStyle/>
-                    <a:p>
-                      <a:pPr algn="ctr" indent="0" marL="0">
-                        <a:buNone/>
-                      </a:pPr>
-                      <a:r>
-                        <a:rPr lang="en-US" sz="500" dirty="0">
-                          <a:solidFill>
-                            <a:srgbClr val="000000"/>
-                          </a:solidFill>
-                          <a:latin typeface="Calibri" pitchFamily="34" charset="0"/>
-                          <a:ea typeface="Calibri" pitchFamily="34" charset="-122"/>
-                          <a:cs typeface="Calibri" pitchFamily="34" charset="-120"/>
-                        </a:rPr>
-                        <a:t>0.45%</a:t>
-                      </a:r>
-                      <a:endParaRPr lang="en-US" sz="500" dirty="0">
-                        <a:latin typeface="Calibri" charset="0"/>
-                        <a:ea typeface="Calibri" charset="0"/>
-                        <a:cs typeface="Calibri" charset="0"/>
-                      </a:endParaRPr>
-                    </a:p>
-                  </a:txBody>
-                  <a:tcPr marL="91440" marR="91440" marT="45720" marB="45720">
-                    <a:lnL w="2540" cap="flat" cmpd="sng" algn="ctr">
-                      <a:solidFill>
-                        <a:srgbClr val="EEEEEE"/>
-                      </a:solidFill>
-                      <a:prstDash val="solid"/>
-                      <a:round/>
-                      <a:headEnd type="none" w="med" len="med"/>
-                      <a:tailEnd type="none" w="med" len="med"/>
-                    </a:lnL>
-                    <a:lnR w="2540" cap="flat" cmpd="sng" algn="ctr">
-                      <a:solidFill>
-                        <a:srgbClr val="EEEEEE"/>
-                      </a:solidFill>
-                      <a:prstDash val="solid"/>
-                      <a:round/>
-                      <a:headEnd type="none" w="med" len="med"/>
-                      <a:tailEnd type="none" w="med" len="med"/>
-                    </a:lnR>
-                    <a:lnT w="2540" cap="flat" cmpd="sng" algn="ctr">
-                      <a:solidFill>
-                        <a:srgbClr val="EEEEEE"/>
-                      </a:solidFill>
-                      <a:prstDash val="solid"/>
-                      <a:round/>
-                      <a:headEnd type="none" w="med" len="med"/>
-                      <a:tailEnd type="none" w="med" len="med"/>
-                    </a:lnT>
-                    <a:lnB w="2540" cap="flat" cmpd="sng" algn="ctr">
-                      <a:solidFill>
-                        <a:srgbClr val="EEEEEE"/>
-                      </a:solidFill>
-                      <a:prstDash val="solid"/>
-                      <a:round/>
-                      <a:headEnd type="none" w="med" len="med"/>
-                      <a:tailEnd type="none" w="med" len="med"/>
-                    </a:lnB>
-                  </a:tcPr>
-                </a:tc>
-                <a:tc>
-                  <a:txBody>
-                    <a:bodyPr/>
-                    <a:lstStyle/>
-                    <a:p>
-                      <a:pPr algn="ctr" indent="0" marL="0">
-                        <a:buNone/>
-                      </a:pPr>
-                      <a:r>
-                        <a:rPr lang="en-US" sz="500" dirty="0">
-                          <a:solidFill>
-                            <a:srgbClr val="000000"/>
-                          </a:solidFill>
-                          <a:latin typeface="Calibri" pitchFamily="34" charset="0"/>
-                          <a:ea typeface="Calibri" pitchFamily="34" charset="-122"/>
-                          <a:cs typeface="Calibri" pitchFamily="34" charset="-120"/>
-                        </a:rPr>
-                        <a:t>0.60%</a:t>
-                      </a:r>
-                      <a:endParaRPr lang="en-US" sz="500" dirty="0">
-                        <a:latin typeface="Calibri" charset="0"/>
-                        <a:ea typeface="Calibri" charset="0"/>
-                        <a:cs typeface="Calibri" charset="0"/>
-                      </a:endParaRPr>
-                    </a:p>
-                  </a:txBody>
-                  <a:tcPr marL="91440" marR="91440" marT="45720" marB="45720">
-                    <a:lnL w="2540" cap="flat" cmpd="sng" algn="ctr">
-                      <a:solidFill>
-                        <a:srgbClr val="EEEEEE"/>
-                      </a:solidFill>
-                      <a:prstDash val="solid"/>
-                      <a:round/>
-                      <a:headEnd type="none" w="med" len="med"/>
-                      <a:tailEnd type="none" w="med" len="med"/>
-                    </a:lnL>
-                    <a:lnR w="2540" cap="flat" cmpd="sng" algn="ctr">
-                      <a:solidFill>
-                        <a:srgbClr val="EEEEEE"/>
-                      </a:solidFill>
-                      <a:prstDash val="solid"/>
-                      <a:round/>
-                      <a:headEnd type="none" w="med" len="med"/>
-                      <a:tailEnd type="none" w="med" len="med"/>
-                    </a:lnR>
-                    <a:lnT w="2540" cap="flat" cmpd="sng" algn="ctr">
-                      <a:solidFill>
-                        <a:srgbClr val="EEEEEE"/>
-                      </a:solidFill>
-                      <a:prstDash val="solid"/>
-                      <a:round/>
-                      <a:headEnd type="none" w="med" len="med"/>
-                      <a:tailEnd type="none" w="med" len="med"/>
-                    </a:lnT>
-                    <a:lnB w="2540" cap="flat" cmpd="sng" algn="ctr">
-                      <a:solidFill>
-                        <a:srgbClr val="EEEEEE"/>
-                      </a:solidFill>
-                      <a:prstDash val="solid"/>
-                      <a:round/>
-                      <a:headEnd type="none" w="med" len="med"/>
-                      <a:tailEnd type="none" w="med" len="med"/>
-                    </a:lnB>
-                  </a:tcPr>
-                </a:tc>
-                <a:tc>
-                  <a:txBody>
-                    <a:bodyPr/>
-                    <a:lstStyle/>
-                    <a:p>
-                      <a:pPr algn="ctr" indent="0" marL="0">
-                        <a:buNone/>
-                      </a:pPr>
-                      <a:r>
-                        <a:rPr lang="en-US" sz="500" dirty="0">
-                          <a:solidFill>
-                            <a:srgbClr val="000000"/>
-                          </a:solidFill>
-                          <a:latin typeface="Calibri" pitchFamily="34" charset="0"/>
-                          <a:ea typeface="Calibri" pitchFamily="34" charset="-122"/>
-                          <a:cs typeface="Calibri" pitchFamily="34" charset="-120"/>
-                        </a:rPr>
-                        <a:t>0.70%</a:t>
-                      </a:r>
-                      <a:endParaRPr lang="en-US" sz="500" dirty="0">
-                        <a:latin typeface="Calibri" charset="0"/>
-                        <a:ea typeface="Calibri" charset="0"/>
-                        <a:cs typeface="Calibri" charset="0"/>
-                      </a:endParaRPr>
-                    </a:p>
-                  </a:txBody>
-                  <a:tcPr marL="91440" marR="91440" marT="45720" marB="45720">
-                    <a:lnL w="2540" cap="flat" cmpd="sng" algn="ctr">
-                      <a:solidFill>
-                        <a:srgbClr val="EEEEEE"/>
-                      </a:solidFill>
-                      <a:prstDash val="solid"/>
-                      <a:round/>
-                      <a:headEnd type="none" w="med" len="med"/>
-                      <a:tailEnd type="none" w="med" len="med"/>
-                    </a:lnL>
-                    <a:lnR w="2540" cap="flat" cmpd="sng" algn="ctr">
-                      <a:solidFill>
-                        <a:srgbClr val="EEEEEE"/>
-                      </a:solidFill>
-                      <a:prstDash val="solid"/>
-                      <a:round/>
-                      <a:headEnd type="none" w="med" len="med"/>
-                      <a:tailEnd type="none" w="med" len="med"/>
-                    </a:lnR>
-                    <a:lnT w="2540" cap="flat" cmpd="sng" algn="ctr">
-                      <a:solidFill>
-                        <a:srgbClr val="EEEEEE"/>
-                      </a:solidFill>
-                      <a:prstDash val="solid"/>
-                      <a:round/>
-                      <a:headEnd type="none" w="med" len="med"/>
-                      <a:tailEnd type="none" w="med" len="med"/>
-                    </a:lnT>
-                    <a:lnB w="2540" cap="flat" cmpd="sng" algn="ctr">
-                      <a:solidFill>
-                        <a:srgbClr val="EEEEEE"/>
-                      </a:solidFill>
-                      <a:prstDash val="solid"/>
-                      <a:round/>
-                      <a:headEnd type="none" w="med" len="med"/>
-                      <a:tailEnd type="none" w="med" len="med"/>
-                    </a:lnB>
-                  </a:tcPr>
-                </a:tc>
-                <a:tc>
-                  <a:txBody>
-                    <a:bodyPr/>
-                    <a:lstStyle/>
-                    <a:p>
-                      <a:pPr algn="ctr" indent="0" marL="0">
-                        <a:buNone/>
-                      </a:pPr>
-                      <a:r>
-                        <a:rPr lang="en-US" sz="500" dirty="0">
-                          <a:solidFill>
-                            <a:srgbClr val="000000"/>
-                          </a:solidFill>
-                          <a:latin typeface="Calibri" pitchFamily="34" charset="0"/>
-                          <a:ea typeface="Calibri" pitchFamily="34" charset="-122"/>
-                          <a:cs typeface="Calibri" pitchFamily="34" charset="-120"/>
-                        </a:rPr>
-                        <a:t>0.65%</a:t>
-                      </a:r>
-                      <a:endParaRPr lang="en-US" sz="500" dirty="0">
-                        <a:latin typeface="Calibri" charset="0"/>
-                        <a:ea typeface="Calibri" charset="0"/>
-                        <a:cs typeface="Calibri" charset="0"/>
-                      </a:endParaRPr>
-                    </a:p>
-                  </a:txBody>
-                  <a:tcPr marL="91440" marR="91440" marT="45720" marB="45720">
-                    <a:lnL w="2540" cap="flat" cmpd="sng" algn="ctr">
-                      <a:solidFill>
-                        <a:srgbClr val="EEEEEE"/>
-                      </a:solidFill>
-                      <a:prstDash val="solid"/>
-                      <a:round/>
-                      <a:headEnd type="none" w="med" len="med"/>
-                      <a:tailEnd type="none" w="med" len="med"/>
-                    </a:lnL>
-                    <a:lnR w="2540" cap="flat" cmpd="sng" algn="ctr">
-                      <a:solidFill>
-                        <a:srgbClr val="EEEEEE"/>
-                      </a:solidFill>
-                      <a:prstDash val="solid"/>
-                      <a:round/>
-                      <a:headEnd type="none" w="med" len="med"/>
-                      <a:tailEnd type="none" w="med" len="med"/>
-                    </a:lnR>
-                    <a:lnT w="2540" cap="flat" cmpd="sng" algn="ctr">
-                      <a:solidFill>
-                        <a:srgbClr val="EEEEEE"/>
-                      </a:solidFill>
-                      <a:prstDash val="solid"/>
-                      <a:round/>
-                      <a:headEnd type="none" w="med" len="med"/>
-                      <a:tailEnd type="none" w="med" len="med"/>
-                    </a:lnT>
-                    <a:lnB w="2540" cap="flat" cmpd="sng" algn="ctr">
-                      <a:solidFill>
-                        <a:srgbClr val="EEEEEE"/>
-                      </a:solidFill>
-                      <a:prstDash val="solid"/>
-                      <a:round/>
-                      <a:headEnd type="none" w="med" len="med"/>
-                      <a:tailEnd type="none" w="med" len="med"/>
-                    </a:lnB>
-                  </a:tcPr>
-                </a:tc>
-                <a:tc>
-                  <a:txBody>
-                    <a:bodyPr/>
-                    <a:lstStyle/>
-                    <a:p>
-                      <a:pPr algn="ctr" indent="0" marL="0">
-                        <a:buNone/>
-                      </a:pPr>
-                      <a:r>
-                        <a:rPr lang="en-US" sz="500" dirty="0">
-                          <a:solidFill>
-                            <a:srgbClr val="000000"/>
-                          </a:solidFill>
-                          <a:latin typeface="Calibri" pitchFamily="34" charset="0"/>
-                          <a:ea typeface="Calibri" pitchFamily="34" charset="-122"/>
-                          <a:cs typeface="Calibri" pitchFamily="34" charset="-120"/>
-                        </a:rPr>
-                        <a:t>0.56%</a:t>
-                      </a:r>
-                      <a:endParaRPr lang="en-US" sz="500" dirty="0">
-                        <a:latin typeface="Calibri" charset="0"/>
-                        <a:ea typeface="Calibri" charset="0"/>
-                        <a:cs typeface="Calibri" charset="0"/>
-                      </a:endParaRPr>
-                    </a:p>
-                  </a:txBody>
-                  <a:tcPr marL="91440" marR="91440" marT="45720" marB="45720">
-                    <a:lnL w="2540" cap="flat" cmpd="sng" algn="ctr">
-                      <a:solidFill>
-                        <a:srgbClr val="EEEEEE"/>
-                      </a:solidFill>
-                      <a:prstDash val="solid"/>
-                      <a:round/>
-                      <a:headEnd type="none" w="med" len="med"/>
-                      <a:tailEnd type="none" w="med" len="med"/>
-                    </a:lnL>
-                    <a:lnR w="2540" cap="flat" cmpd="sng" algn="ctr">
-                      <a:solidFill>
-                        <a:srgbClr val="EEEEEE"/>
-                      </a:solidFill>
-                      <a:prstDash val="solid"/>
-                      <a:round/>
-                      <a:headEnd type="none" w="med" len="med"/>
-                      <a:tailEnd type="none" w="med" len="med"/>
-                    </a:lnR>
-                    <a:lnT w="2540" cap="flat" cmpd="sng" algn="ctr">
-                      <a:solidFill>
-                        <a:srgbClr val="EEEEEE"/>
-                      </a:solidFill>
-                      <a:prstDash val="solid"/>
-                      <a:round/>
-                      <a:headEnd type="none" w="med" len="med"/>
-                      <a:tailEnd type="none" w="med" len="med"/>
-                    </a:lnT>
-                    <a:lnB w="2540" cap="flat" cmpd="sng" algn="ctr">
-                      <a:solidFill>
-                        <a:srgbClr val="EEEEEE"/>
-                      </a:solidFill>
-                      <a:prstDash val="solid"/>
-                      <a:round/>
-                      <a:headEnd type="none" w="med" len="med"/>
-                      <a:tailEnd type="none" w="med" len="med"/>
-                    </a:lnB>
-                  </a:tcPr>
-                </a:tc>
-                <a:tc>
-                  <a:txBody>
-                    <a:bodyPr/>
-                    <a:lstStyle/>
-                    <a:p>
-                      <a:pPr algn="ctr" indent="0" marL="0">
-                        <a:buNone/>
-                      </a:pPr>
-                      <a:r>
-                        <a:rPr lang="en-US" sz="500" dirty="0">
-                          <a:solidFill>
-                            <a:srgbClr val="000000"/>
-                          </a:solidFill>
-                          <a:latin typeface="Calibri" pitchFamily="34" charset="0"/>
-                          <a:ea typeface="Calibri" pitchFamily="34" charset="-122"/>
-                          <a:cs typeface="Calibri" pitchFamily="34" charset="-120"/>
-                        </a:rPr>
-                        <a:t>0.57%</a:t>
-                      </a:r>
-                      <a:endParaRPr lang="en-US" sz="500" dirty="0">
-                        <a:latin typeface="Calibri" charset="0"/>
-                        <a:ea typeface="Calibri" charset="0"/>
-                        <a:cs typeface="Calibri" charset="0"/>
-                      </a:endParaRPr>
-                    </a:p>
-                  </a:txBody>
-                  <a:tcPr marL="91440" marR="91440" marT="45720" marB="45720">
-                    <a:lnL w="2540" cap="flat" cmpd="sng" algn="ctr">
-                      <a:solidFill>
-                        <a:srgbClr val="EEEEEE"/>
-                      </a:solidFill>
-                      <a:prstDash val="solid"/>
-                      <a:round/>
-                      <a:headEnd type="none" w="med" len="med"/>
-                      <a:tailEnd type="none" w="med" len="med"/>
-                    </a:lnL>
-                    <a:lnR w="2540" cap="flat" cmpd="sng" algn="ctr">
-                      <a:solidFill>
-                        <a:srgbClr val="EEEEEE"/>
-                      </a:solidFill>
-                      <a:prstDash val="solid"/>
-                      <a:round/>
-                      <a:headEnd type="none" w="med" len="med"/>
-                      <a:tailEnd type="none" w="med" len="med"/>
-                    </a:lnR>
-                    <a:lnT w="2540" cap="flat" cmpd="sng" algn="ctr">
-                      <a:solidFill>
-                        <a:srgbClr val="EEEEEE"/>
-                      </a:solidFill>
-                      <a:prstDash val="solid"/>
-                      <a:round/>
-                      <a:headEnd type="none" w="med" len="med"/>
-                      <a:tailEnd type="none" w="med" len="med"/>
-                    </a:lnT>
-                    <a:lnB w="2540" cap="flat" cmpd="sng" algn="ctr">
-                      <a:solidFill>
-                        <a:srgbClr val="EEEEEE"/>
-                      </a:solidFill>
-                      <a:prstDash val="solid"/>
-                      <a:round/>
-                      <a:headEnd type="none" w="med" len="med"/>
-                      <a:tailEnd type="none" w="med" len="med"/>
-                    </a:lnB>
-                  </a:tcPr>
-                </a:tc>
-                <a:tc>
-                  <a:txBody>
-                    <a:bodyPr/>
-                    <a:lstStyle/>
-                    <a:p>
-                      <a:pPr algn="ctr" indent="0" marL="0">
-                        <a:buNone/>
-                      </a:pPr>
-                      <a:r>
-                        <a:rPr lang="en-US" sz="500" dirty="0">
-                          <a:solidFill>
-                            <a:srgbClr val="000000"/>
-                          </a:solidFill>
-                          <a:latin typeface="Calibri" pitchFamily="34" charset="0"/>
-                          <a:ea typeface="Calibri" pitchFamily="34" charset="-122"/>
-                          <a:cs typeface="Calibri" pitchFamily="34" charset="-120"/>
-                        </a:rPr>
-                        <a:t>0.58%</a:t>
-                      </a:r>
-                      <a:endParaRPr lang="en-US" sz="500" dirty="0">
-                        <a:latin typeface="Calibri" charset="0"/>
-                        <a:ea typeface="Calibri" charset="0"/>
-                        <a:cs typeface="Calibri" charset="0"/>
-                      </a:endParaRPr>
-                    </a:p>
-                  </a:txBody>
-                  <a:tcPr marL="91440" marR="91440" marT="45720" marB="45720">
-                    <a:lnL w="2540" cap="flat" cmpd="sng" algn="ctr">
-                      <a:solidFill>
-                        <a:srgbClr val="EEEEEE"/>
-                      </a:solidFill>
-                      <a:prstDash val="solid"/>
-                      <a:round/>
-                      <a:headEnd type="none" w="med" len="med"/>
-                      <a:tailEnd type="none" w="med" len="med"/>
-                    </a:lnL>
-                    <a:lnR w="2540" cap="flat" cmpd="sng" algn="ctr">
-                      <a:solidFill>
-                        <a:srgbClr val="EEEEEE"/>
-                      </a:solidFill>
-                      <a:prstDash val="solid"/>
-                      <a:round/>
-                      <a:headEnd type="none" w="med" len="med"/>
-                      <a:tailEnd type="none" w="med" len="med"/>
-                    </a:lnR>
-                    <a:lnT w="2540" cap="flat" cmpd="sng" algn="ctr">
-                      <a:solidFill>
-                        <a:srgbClr val="EEEEEE"/>
-                      </a:solidFill>
-                      <a:prstDash val="solid"/>
-                      <a:round/>
-                      <a:headEnd type="none" w="med" len="med"/>
-                      <a:tailEnd type="none" w="med" len="med"/>
-                    </a:lnT>
-                    <a:lnB w="2540" cap="flat" cmpd="sng" algn="ctr">
-                      <a:solidFill>
-                        <a:srgbClr val="EEEEEE"/>
-                      </a:solidFill>
-                      <a:prstDash val="solid"/>
-                      <a:round/>
-                      <a:headEnd type="none" w="med" len="med"/>
-                      <a:tailEnd type="none" w="med" len="med"/>
-                    </a:lnB>
-                  </a:tcPr>
-                </a:tc>
-                <a:tc>
-                  <a:txBody>
-                    <a:bodyPr/>
-                    <a:lstStyle/>
-                    <a:p>
-                      <a:pPr algn="ctr" indent="0" marL="0">
-                        <a:buNone/>
-                      </a:pPr>
-                      <a:r>
-                        <a:rPr lang="en-US" sz="500" dirty="0">
-                          <a:solidFill>
-                            <a:srgbClr val="000000"/>
-                          </a:solidFill>
-                          <a:latin typeface="Calibri" pitchFamily="34" charset="0"/>
-                          <a:ea typeface="Calibri" pitchFamily="34" charset="-122"/>
-                          <a:cs typeface="Calibri" pitchFamily="34" charset="-120"/>
-                        </a:rPr>
-                        <a:t>0.52%</a:t>
-                      </a:r>
-                      <a:endParaRPr lang="en-US" sz="500" dirty="0">
-                        <a:latin typeface="Calibri" charset="0"/>
-                        <a:ea typeface="Calibri" charset="0"/>
-                        <a:cs typeface="Calibri" charset="0"/>
-                      </a:endParaRPr>
-                    </a:p>
-                  </a:txBody>
-                  <a:tcPr marL="91440" marR="91440" marT="45720" marB="45720">
-                    <a:lnL w="2540" cap="flat" cmpd="sng" algn="ctr">
-                      <a:solidFill>
-                        <a:srgbClr val="EEEEEE"/>
-                      </a:solidFill>
-                      <a:prstDash val="solid"/>
-                      <a:round/>
-                      <a:headEnd type="none" w="med" len="med"/>
-                      <a:tailEnd type="none" w="med" len="med"/>
-                    </a:lnL>
-                    <a:lnR w="2540" cap="flat" cmpd="sng" algn="ctr">
-                      <a:solidFill>
-                        <a:srgbClr val="EEEEEE"/>
-                      </a:solidFill>
-                      <a:prstDash val="solid"/>
-                      <a:round/>
-                      <a:headEnd type="none" w="med" len="med"/>
-                      <a:tailEnd type="none" w="med" len="med"/>
-                    </a:lnR>
-                    <a:lnT w="2540" cap="flat" cmpd="sng" algn="ctr">
-                      <a:solidFill>
-                        <a:srgbClr val="EEEEEE"/>
-                      </a:solidFill>
-                      <a:prstDash val="solid"/>
-                      <a:round/>
-                      <a:headEnd type="none" w="med" len="med"/>
-                      <a:tailEnd type="none" w="med" len="med"/>
-                    </a:lnT>
-                    <a:lnB w="2540" cap="flat" cmpd="sng" algn="ctr">
-                      <a:solidFill>
-                        <a:srgbClr val="EEEEEE"/>
-                      </a:solidFill>
-                      <a:prstDash val="solid"/>
-                      <a:round/>
-                      <a:headEnd type="none" w="med" len="med"/>
-                      <a:tailEnd type="none" w="med" len="med"/>
-                    </a:lnB>
-                  </a:tcPr>
-                </a:tc>
-                <a:tc>
-                  <a:txBody>
-                    <a:bodyPr/>
-                    <a:lstStyle/>
-                    <a:p>
-                      <a:pPr algn="ctr" indent="0" marL="0">
-                        <a:buNone/>
-                      </a:pPr>
-                      <a:r>
-                        <a:rPr lang="en-US" sz="500" dirty="0">
-                          <a:solidFill>
-                            <a:srgbClr val="000000"/>
-                          </a:solidFill>
-                          <a:latin typeface="Calibri" pitchFamily="34" charset="0"/>
-                          <a:ea typeface="Calibri" pitchFamily="34" charset="-122"/>
-                          <a:cs typeface="Calibri" pitchFamily="34" charset="-120"/>
-                        </a:rPr>
-                        <a:t>0.58%</a:t>
-                      </a:r>
-                      <a:endParaRPr lang="en-US" sz="500" dirty="0">
-                        <a:latin typeface="Calibri" charset="0"/>
-                        <a:ea typeface="Calibri" charset="0"/>
-                        <a:cs typeface="Calibri" charset="0"/>
-                      </a:endParaRPr>
-                    </a:p>
-                  </a:txBody>
-                  <a:tcPr marL="91440" marR="91440" marT="45720" marB="45720">
-                    <a:lnL w="2540" cap="flat" cmpd="sng" algn="ctr">
-                      <a:solidFill>
-                        <a:srgbClr val="EEEEEE"/>
-                      </a:solidFill>
-                      <a:prstDash val="solid"/>
-                      <a:round/>
-                      <a:headEnd type="none" w="med" len="med"/>
-                      <a:tailEnd type="none" w="med" len="med"/>
-                    </a:lnL>
-                    <a:lnR w="2540" cap="flat" cmpd="sng" algn="ctr">
-                      <a:solidFill>
-                        <a:srgbClr val="EEEEEE"/>
-                      </a:solidFill>
-                      <a:prstDash val="solid"/>
-                      <a:round/>
-                      <a:headEnd type="none" w="med" len="med"/>
-                      <a:tailEnd type="none" w="med" len="med"/>
-                    </a:lnR>
-                    <a:lnT w="2540" cap="flat" cmpd="sng" algn="ctr">
-                      <a:solidFill>
-                        <a:srgbClr val="EEEEEE"/>
-                      </a:solidFill>
-                      <a:prstDash val="solid"/>
-                      <a:round/>
-                      <a:headEnd type="none" w="med" len="med"/>
-                      <a:tailEnd type="none" w="med" len="med"/>
-                    </a:lnT>
-                    <a:lnB w="2540" cap="flat" cmpd="sng" algn="ctr">
-                      <a:solidFill>
-                        <a:srgbClr val="EEEEEE"/>
-                      </a:solidFill>
-                      <a:prstDash val="solid"/>
-                      <a:round/>
-                      <a:headEnd type="none" w="med" len="med"/>
-                      <a:tailEnd type="none" w="med" len="med"/>
-                    </a:lnB>
-                  </a:tcPr>
-                </a:tc>
-                <a:tc>
-                  <a:txBody>
-                    <a:bodyPr/>
-                    <a:lstStyle/>
-                    <a:p>
-                      <a:pPr algn="ctr" indent="0" marL="0">
-                        <a:buNone/>
-                      </a:pPr>
-                      <a:r>
-                        <a:rPr lang="en-US" sz="500" dirty="0">
-                          <a:solidFill>
-                            <a:srgbClr val="000000"/>
-                          </a:solidFill>
-                          <a:latin typeface="Calibri" pitchFamily="34" charset="0"/>
-                          <a:ea typeface="Calibri" pitchFamily="34" charset="-122"/>
-                          <a:cs typeface="Calibri" pitchFamily="34" charset="-120"/>
-                        </a:rPr>
-                        <a:t>0.60%</a:t>
-                      </a:r>
-                      <a:endParaRPr lang="en-US" sz="500" dirty="0">
-                        <a:latin typeface="Calibri" charset="0"/>
-                        <a:ea typeface="Calibri" charset="0"/>
-                        <a:cs typeface="Calibri" charset="0"/>
-                      </a:endParaRPr>
-                    </a:p>
-                  </a:txBody>
-                  <a:tcPr marL="91440" marR="91440" marT="45720" marB="45720">
-                    <a:lnL w="2540" cap="flat" cmpd="sng" algn="ctr">
-                      <a:solidFill>
-                        <a:srgbClr val="EEEEEE"/>
-                      </a:solidFill>
-                      <a:prstDash val="solid"/>
-                      <a:round/>
-                      <a:headEnd type="none" w="med" len="med"/>
-                      <a:tailEnd type="none" w="med" len="med"/>
-                    </a:lnL>
-                    <a:lnR w="2540" cap="flat" cmpd="sng" algn="ctr">
-                      <a:solidFill>
-                        <a:srgbClr val="EEEEEE"/>
-                      </a:solidFill>
-                      <a:prstDash val="solid"/>
-                      <a:round/>
-                      <a:headEnd type="none" w="med" len="med"/>
-                      <a:tailEnd type="none" w="med" len="med"/>
-                    </a:lnR>
-                    <a:lnT w="2540" cap="flat" cmpd="sng" algn="ctr">
-                      <a:solidFill>
-                        <a:srgbClr val="EEEEEE"/>
-                      </a:solidFill>
-                      <a:prstDash val="solid"/>
-                      <a:round/>
-                      <a:headEnd type="none" w="med" len="med"/>
-                      <a:tailEnd type="none" w="med" len="med"/>
-                    </a:lnT>
-                    <a:lnB w="2540" cap="flat" cmpd="sng" algn="ctr">
-                      <a:solidFill>
-                        <a:srgbClr val="EEEEEE"/>
-                      </a:solidFill>
-                      <a:prstDash val="solid"/>
-                      <a:round/>
-                      <a:headEnd type="none" w="med" len="med"/>
-                      <a:tailEnd type="none" w="med" len="med"/>
-                    </a:lnB>
-                  </a:tcPr>
-                </a:tc>
-                <a:tc>
-                  <a:txBody>
-                    <a:bodyPr/>
-                    <a:lstStyle/>
-                    <a:p>
-                      <a:pPr algn="ctr" indent="0" marL="0">
-                        <a:buNone/>
-                      </a:pPr>
-                      <a:r>
-                        <a:rPr lang="en-US" sz="500" dirty="0">
-                          <a:solidFill>
-                            <a:srgbClr val="000000"/>
-                          </a:solidFill>
-                          <a:latin typeface="Calibri" pitchFamily="34" charset="0"/>
-                          <a:ea typeface="Calibri" pitchFamily="34" charset="-122"/>
-                          <a:cs typeface="Calibri" pitchFamily="34" charset="-120"/>
-                        </a:rPr>
-                        <a:t>0.63%</a:t>
-                      </a:r>
-                      <a:endParaRPr lang="en-US" sz="500" dirty="0">
-                        <a:latin typeface="Calibri" charset="0"/>
-                        <a:ea typeface="Calibri" charset="0"/>
-                        <a:cs typeface="Calibri" charset="0"/>
-                      </a:endParaRPr>
-                    </a:p>
-                  </a:txBody>
-                  <a:tcPr marL="91440" marR="91440" marT="45720" marB="45720">
-                    <a:lnL w="2540" cap="flat" cmpd="sng" algn="ctr">
-                      <a:solidFill>
-                        <a:srgbClr val="EEEEEE"/>
-                      </a:solidFill>
-                      <a:prstDash val="solid"/>
-                      <a:round/>
-                      <a:headEnd type="none" w="med" len="med"/>
-                      <a:tailEnd type="none" w="med" len="med"/>
-                    </a:lnL>
-                    <a:lnR w="2540" cap="flat" cmpd="sng" algn="ctr">
-                      <a:solidFill>
-                        <a:srgbClr val="EEEEEE"/>
-                      </a:solidFill>
-                      <a:prstDash val="solid"/>
-                      <a:round/>
-                      <a:headEnd type="none" w="med" len="med"/>
-                      <a:tailEnd type="none" w="med" len="med"/>
-                    </a:lnR>
-                    <a:lnT w="2540" cap="flat" cmpd="sng" algn="ctr">
-                      <a:solidFill>
-                        <a:srgbClr val="EEEEEE"/>
-                      </a:solidFill>
-                      <a:prstDash val="solid"/>
-                      <a:round/>
-                      <a:headEnd type="none" w="med" len="med"/>
-                      <a:tailEnd type="none" w="med" len="med"/>
-                    </a:lnT>
-                    <a:lnB w="2540" cap="flat" cmpd="sng" algn="ctr">
-                      <a:solidFill>
-                        <a:srgbClr val="EEEEEE"/>
-                      </a:solidFill>
-                      <a:prstDash val="solid"/>
-                      <a:round/>
-                      <a:headEnd type="none" w="med" len="med"/>
-                      <a:tailEnd type="none" w="med" len="med"/>
-                    </a:lnB>
-                  </a:tcPr>
-                </a:tc>
-                <a:tc>
-                  <a:txBody>
-                    <a:bodyPr/>
-                    <a:lstStyle/>
-                    <a:p>
-                      <a:pPr algn="ctr" indent="0" marL="0">
-                        <a:buNone/>
-                      </a:pPr>
-                      <a:r>
-                        <a:rPr lang="en-US" sz="500" b="1" dirty="0">
-                          <a:solidFill>
-                            <a:srgbClr val="000000"/>
-                          </a:solidFill>
-                          <a:latin typeface="Calibri" pitchFamily="34" charset="0"/>
-                          <a:ea typeface="Calibri" pitchFamily="34" charset="-122"/>
-                          <a:cs typeface="Calibri" pitchFamily="34" charset="-120"/>
-                        </a:rPr>
-                        <a:t>7.10%</a:t>
-                      </a:r>
-                      <a:endParaRPr lang="en-US" sz="500" dirty="0">
-                        <a:latin typeface="Calibri" charset="0"/>
-                        <a:ea typeface="Calibri" charset="0"/>
-                        <a:cs typeface="Calibri" charset="0"/>
-                      </a:endParaRPr>
-                    </a:p>
-                  </a:txBody>
-                  <a:tcPr marL="91440" marR="91440" marT="45720" marB="45720">
-                    <a:lnL w="2540" cap="flat" cmpd="sng" algn="ctr">
-                      <a:solidFill>
-                        <a:srgbClr val="EEEEEE"/>
-                      </a:solidFill>
-                      <a:prstDash val="solid"/>
-                      <a:round/>
-                      <a:headEnd type="none" w="med" len="med"/>
-                      <a:tailEnd type="none" w="med" len="med"/>
-                    </a:lnL>
-                    <a:lnR w="2540" cap="flat" cmpd="sng" algn="ctr">
-                      <a:solidFill>
-                        <a:srgbClr val="EEEEEE"/>
-                      </a:solidFill>
-                      <a:prstDash val="solid"/>
-                      <a:round/>
-                      <a:headEnd type="none" w="med" len="med"/>
-                      <a:tailEnd type="none" w="med" len="med"/>
-                    </a:lnR>
-                    <a:lnT w="2540" cap="flat" cmpd="sng" algn="ctr">
-                      <a:solidFill>
-                        <a:srgbClr val="EEEEEE"/>
-                      </a:solidFill>
-                      <a:prstDash val="solid"/>
-                      <a:round/>
-                      <a:headEnd type="none" w="med" len="med"/>
-                      <a:tailEnd type="none" w="med" len="med"/>
-                    </a:lnT>
-                    <a:lnB w="2540" cap="flat" cmpd="sng" algn="ctr">
-                      <a:solidFill>
-                        <a:srgbClr val="EEEEEE"/>
-                      </a:solidFill>
-                      <a:prstDash val="solid"/>
-                      <a:round/>
-                      <a:headEnd type="none" w="med" len="med"/>
-                      <a:tailEnd type="none" w="med" len="med"/>
-                    </a:lnB>
-                  </a:tcPr>
-                </a:tc>
-              </a:tr>
-              <a:tr h="123444">
-                <a:tc>
-                  <a:txBody>
-                    <a:bodyPr/>
-                    <a:lstStyle/>
-                    <a:p>
-                      <a:pPr algn="l" indent="0" marL="0">
-                        <a:buNone/>
-                      </a:pPr>
-                      <a:r>
-                        <a:rPr lang="en-US" sz="500" b="1" dirty="0">
-                          <a:solidFill>
-                            <a:srgbClr val="000000"/>
-                          </a:solidFill>
-                          <a:latin typeface="Calibri" pitchFamily="34" charset="0"/>
-                          <a:ea typeface="Calibri" pitchFamily="34" charset="-122"/>
-                          <a:cs typeface="Calibri" pitchFamily="34" charset="-120"/>
-                        </a:rPr>
-                        <a:t>2026</a:t>
-                      </a:r>
-                      <a:endParaRPr lang="en-US" sz="500" dirty="0">
-                        <a:latin typeface="Calibri" charset="0"/>
-                        <a:ea typeface="Calibri" charset="0"/>
-                        <a:cs typeface="Calibri" charset="0"/>
-                      </a:endParaRPr>
-                    </a:p>
-                  </a:txBody>
-                  <a:tcPr marL="91440" marR="91440" marT="45720" marB="45720">
-                    <a:lnL w="2540" cap="flat" cmpd="sng" algn="ctr">
-                      <a:solidFill>
-                        <a:srgbClr val="EEEEEE"/>
-                      </a:solidFill>
-                      <a:prstDash val="solid"/>
-                      <a:round/>
-                      <a:headEnd type="none" w="med" len="med"/>
-                      <a:tailEnd type="none" w="med" len="med"/>
-                    </a:lnL>
-                    <a:lnR w="2540" cap="flat" cmpd="sng" algn="ctr">
-                      <a:solidFill>
-                        <a:srgbClr val="EEEEEE"/>
-                      </a:solidFill>
-                      <a:prstDash val="solid"/>
-                      <a:round/>
-                      <a:headEnd type="none" w="med" len="med"/>
-                      <a:tailEnd type="none" w="med" len="med"/>
-                    </a:lnR>
-                    <a:lnT w="2540" cap="flat" cmpd="sng" algn="ctr">
-                      <a:solidFill>
-                        <a:srgbClr val="EEEEEE"/>
-                      </a:solidFill>
-                      <a:prstDash val="solid"/>
-                      <a:round/>
-                      <a:headEnd type="none" w="med" len="med"/>
-                      <a:tailEnd type="none" w="med" len="med"/>
-                    </a:lnT>
-                    <a:lnB w="2540" cap="flat" cmpd="sng" algn="ctr">
-                      <a:solidFill>
-                        <a:srgbClr val="EEEEEE"/>
-                      </a:solidFill>
-                      <a:prstDash val="solid"/>
-                      <a:round/>
-                      <a:headEnd type="none" w="med" len="med"/>
-                      <a:tailEnd type="none" w="med" len="med"/>
-                    </a:lnB>
-                  </a:tcPr>
-                </a:tc>
-                <a:tc>
-                  <a:txBody>
-                    <a:bodyPr/>
-                    <a:lstStyle/>
-                    <a:p>
-                      <a:pPr algn="l" indent="0" marL="0">
-                        <a:buNone/>
-                      </a:pPr>
-                      <a:r>
-                        <a:rPr lang="en-US" sz="500" dirty="0">
-                          <a:solidFill>
-                            <a:srgbClr val="777777"/>
-                          </a:solidFill>
-                          <a:latin typeface="Calibri" pitchFamily="34" charset="0"/>
-                          <a:ea typeface="Calibri" pitchFamily="34" charset="-122"/>
-                          <a:cs typeface="Calibri" pitchFamily="34" charset="-120"/>
-                        </a:rPr>
-                        <a:t>ICP</a:t>
-                      </a:r>
-                      <a:endParaRPr lang="en-US" sz="500" dirty="0">
-                        <a:latin typeface="Calibri" charset="0"/>
-                        <a:ea typeface="Calibri" charset="0"/>
-                        <a:cs typeface="Calibri" charset="0"/>
-                      </a:endParaRPr>
-                    </a:p>
-                  </a:txBody>
-                  <a:tcPr marL="91440" marR="91440" marT="45720" marB="45720">
-                    <a:lnL w="2540" cap="flat" cmpd="sng" algn="ctr">
-                      <a:solidFill>
-                        <a:srgbClr val="EEEEEE"/>
-                      </a:solidFill>
-                      <a:prstDash val="solid"/>
-                      <a:round/>
-                      <a:headEnd type="none" w="med" len="med"/>
-                      <a:tailEnd type="none" w="med" len="med"/>
-                    </a:lnL>
-                    <a:lnR w="2540" cap="flat" cmpd="sng" algn="ctr">
-                      <a:solidFill>
-                        <a:srgbClr val="EEEEEE"/>
-                      </a:solidFill>
-                      <a:prstDash val="solid"/>
-                      <a:round/>
-                      <a:headEnd type="none" w="med" len="med"/>
-                      <a:tailEnd type="none" w="med" len="med"/>
-                    </a:lnR>
-                    <a:lnT w="2540" cap="flat" cmpd="sng" algn="ctr">
-                      <a:solidFill>
-                        <a:srgbClr val="EEEEEE"/>
-                      </a:solidFill>
-                      <a:prstDash val="solid"/>
-                      <a:round/>
-                      <a:headEnd type="none" w="med" len="med"/>
-                      <a:tailEnd type="none" w="med" len="med"/>
-                    </a:lnT>
-                    <a:lnB w="2540" cap="flat" cmpd="sng" algn="ctr">
-                      <a:solidFill>
-                        <a:srgbClr val="EEEEEE"/>
-                      </a:solidFill>
-                      <a:prstDash val="solid"/>
-                      <a:round/>
-                      <a:headEnd type="none" w="med" len="med"/>
-                      <a:tailEnd type="none" w="med" len="med"/>
-                    </a:lnB>
-                  </a:tcPr>
-                </a:tc>
-                <a:tc>
-                  <a:txBody>
-                    <a:bodyPr/>
-                    <a:lstStyle/>
-                    <a:p>
-                      <a:pPr algn="ctr" indent="0" marL="0">
-                        <a:buNone/>
-                      </a:pPr>
-                      <a:r>
-                        <a:rPr lang="en-US" sz="500" dirty="0">
-                          <a:solidFill>
-                            <a:srgbClr val="777777"/>
-                          </a:solidFill>
-                          <a:latin typeface="Calibri" pitchFamily="34" charset="0"/>
-                          <a:ea typeface="Calibri" pitchFamily="34" charset="-122"/>
-                          <a:cs typeface="Calibri" pitchFamily="34" charset="-120"/>
-                        </a:rPr>
-                        <a:t>0.37%</a:t>
-                      </a:r>
-                      <a:endParaRPr lang="en-US" sz="500" dirty="0">
-                        <a:latin typeface="Calibri" charset="0"/>
-                        <a:ea typeface="Calibri" charset="0"/>
-                        <a:cs typeface="Calibri" charset="0"/>
-                      </a:endParaRPr>
-                    </a:p>
-                  </a:txBody>
-                  <a:tcPr marL="91440" marR="91440" marT="45720" marB="45720">
-                    <a:lnL w="2540" cap="flat" cmpd="sng" algn="ctr">
-                      <a:solidFill>
-                        <a:srgbClr val="EEEEEE"/>
-                      </a:solidFill>
-                      <a:prstDash val="solid"/>
-                      <a:round/>
-                      <a:headEnd type="none" w="med" len="med"/>
-                      <a:tailEnd type="none" w="med" len="med"/>
-                    </a:lnL>
-                    <a:lnR w="2540" cap="flat" cmpd="sng" algn="ctr">
-                      <a:solidFill>
-                        <a:srgbClr val="EEEEEE"/>
-                      </a:solidFill>
-                      <a:prstDash val="solid"/>
-                      <a:round/>
-                      <a:headEnd type="none" w="med" len="med"/>
-                      <a:tailEnd type="none" w="med" len="med"/>
-                    </a:lnR>
-                    <a:lnT w="2540" cap="flat" cmpd="sng" algn="ctr">
-                      <a:solidFill>
-                        <a:srgbClr val="EEEEEE"/>
-                      </a:solidFill>
-                      <a:prstDash val="solid"/>
-                      <a:round/>
-                      <a:headEnd type="none" w="med" len="med"/>
-                      <a:tailEnd type="none" w="med" len="med"/>
-                    </a:lnT>
-                    <a:lnB w="2540" cap="flat" cmpd="sng" algn="ctr">
-                      <a:solidFill>
-                        <a:srgbClr val="EEEEEE"/>
-                      </a:solidFill>
-                      <a:prstDash val="solid"/>
-                      <a:round/>
-                      <a:headEnd type="none" w="med" len="med"/>
-                      <a:tailEnd type="none" w="med" len="med"/>
-                    </a:lnB>
-                  </a:tcPr>
-                </a:tc>
-                <a:tc>
-                  <a:txBody>
-                    <a:bodyPr/>
-                    <a:lstStyle/>
-                    <a:p>
-                      <a:pPr algn="ctr" indent="0" marL="0">
-                        <a:buNone/>
-                      </a:pPr>
-                      <a:r>
-                        <a:rPr lang="en-US" sz="500" dirty="0">
-                          <a:solidFill>
-                            <a:srgbClr val="777777"/>
-                          </a:solidFill>
-                          <a:latin typeface="Calibri" pitchFamily="34" charset="0"/>
-                          <a:ea typeface="Calibri" pitchFamily="34" charset="-122"/>
-                          <a:cs typeface="Calibri" pitchFamily="34" charset="-120"/>
-                        </a:rPr>
-                        <a:t>0.37%</a:t>
-                      </a:r>
-                      <a:endParaRPr lang="en-US" sz="500" dirty="0">
-                        <a:latin typeface="Calibri" charset="0"/>
-                        <a:ea typeface="Calibri" charset="0"/>
-                        <a:cs typeface="Calibri" charset="0"/>
-                      </a:endParaRPr>
-                    </a:p>
-                  </a:txBody>
-                  <a:tcPr marL="91440" marR="91440" marT="45720" marB="45720">
-                    <a:lnL w="2540" cap="flat" cmpd="sng" algn="ctr">
-                      <a:solidFill>
-                        <a:srgbClr val="EEEEEE"/>
-                      </a:solidFill>
-                      <a:prstDash val="solid"/>
-                      <a:round/>
-                      <a:headEnd type="none" w="med" len="med"/>
-                      <a:tailEnd type="none" w="med" len="med"/>
-                    </a:lnL>
-                    <a:lnR w="2540" cap="flat" cmpd="sng" algn="ctr">
-                      <a:solidFill>
-                        <a:srgbClr val="EEEEEE"/>
-                      </a:solidFill>
-                      <a:prstDash val="solid"/>
-                      <a:round/>
-                      <a:headEnd type="none" w="med" len="med"/>
-                      <a:tailEnd type="none" w="med" len="med"/>
-                    </a:lnR>
-                    <a:lnT w="2540" cap="flat" cmpd="sng" algn="ctr">
-                      <a:solidFill>
-                        <a:srgbClr val="EEEEEE"/>
-                      </a:solidFill>
-                      <a:prstDash val="solid"/>
-                      <a:round/>
-                      <a:headEnd type="none" w="med" len="med"/>
-                      <a:tailEnd type="none" w="med" len="med"/>
-                    </a:lnT>
-                    <a:lnB w="2540" cap="flat" cmpd="sng" algn="ctr">
-                      <a:solidFill>
-                        <a:srgbClr val="EEEEEE"/>
-                      </a:solidFill>
-                      <a:prstDash val="solid"/>
-                      <a:round/>
-                      <a:headEnd type="none" w="med" len="med"/>
-                      <a:tailEnd type="none" w="med" len="med"/>
-                    </a:lnB>
-                  </a:tcPr>
-                </a:tc>
-                <a:tc>
-                  <a:txBody>
-                    <a:bodyPr/>
-                    <a:lstStyle/>
-                    <a:p>
-                      <a:pPr algn="ctr" indent="0" marL="0">
-                        <a:buNone/>
-                      </a:pPr>
-                      <a:r>
-                        <a:rPr lang="en-US" sz="500" dirty="0">
-                          <a:solidFill>
-                            <a:srgbClr val="777777"/>
-                          </a:solidFill>
-                          <a:latin typeface="Calibri" pitchFamily="34" charset="0"/>
-                          <a:ea typeface="Calibri" pitchFamily="34" charset="-122"/>
-                          <a:cs typeface="Calibri" pitchFamily="34" charset="-120"/>
-                        </a:rPr>
-                        <a:t>0.37%</a:t>
-                      </a:r>
-                      <a:endParaRPr lang="en-US" sz="500" dirty="0">
-                        <a:latin typeface="Calibri" charset="0"/>
-                        <a:ea typeface="Calibri" charset="0"/>
-                        <a:cs typeface="Calibri" charset="0"/>
-                      </a:endParaRPr>
-                    </a:p>
-                  </a:txBody>
-                  <a:tcPr marL="91440" marR="91440" marT="45720" marB="45720">
-                    <a:lnL w="2540" cap="flat" cmpd="sng" algn="ctr">
-                      <a:solidFill>
-                        <a:srgbClr val="EEEEEE"/>
-                      </a:solidFill>
-                      <a:prstDash val="solid"/>
-                      <a:round/>
-                      <a:headEnd type="none" w="med" len="med"/>
-                      <a:tailEnd type="none" w="med" len="med"/>
-                    </a:lnL>
-                    <a:lnR w="2540" cap="flat" cmpd="sng" algn="ctr">
-                      <a:solidFill>
-                        <a:srgbClr val="EEEEEE"/>
-                      </a:solidFill>
-                      <a:prstDash val="solid"/>
-                      <a:round/>
-                      <a:headEnd type="none" w="med" len="med"/>
-                      <a:tailEnd type="none" w="med" len="med"/>
-                    </a:lnR>
-                    <a:lnT w="2540" cap="flat" cmpd="sng" algn="ctr">
-                      <a:solidFill>
-                        <a:srgbClr val="EEEEEE"/>
-                      </a:solidFill>
-                      <a:prstDash val="solid"/>
-                      <a:round/>
-                      <a:headEnd type="none" w="med" len="med"/>
-                      <a:tailEnd type="none" w="med" len="med"/>
-                    </a:lnT>
-                    <a:lnB w="2540" cap="flat" cmpd="sng" algn="ctr">
-                      <a:solidFill>
-                        <a:srgbClr val="EEEEEE"/>
-                      </a:solidFill>
-                      <a:prstDash val="solid"/>
-                      <a:round/>
-                      <a:headEnd type="none" w="med" len="med"/>
-                      <a:tailEnd type="none" w="med" len="med"/>
-                    </a:lnB>
-                  </a:tcPr>
-                </a:tc>
-                <a:tc>
-                  <a:txBody>
-                    <a:bodyPr/>
-                    <a:lstStyle/>
-                    <a:p>
-                      <a:pPr algn="ctr" indent="0" marL="0">
-                        <a:buNone/>
-                      </a:pPr>
-                      <a:r>
-                        <a:rPr lang="en-US" sz="500" dirty="0">
-                          <a:solidFill>
-                            <a:srgbClr val="777777"/>
-                          </a:solidFill>
-                          <a:latin typeface="Calibri" pitchFamily="34" charset="0"/>
-                          <a:ea typeface="Calibri" pitchFamily="34" charset="-122"/>
-                          <a:cs typeface="Calibri" pitchFamily="34" charset="-120"/>
-                        </a:rPr>
-                        <a:t>0.37%</a:t>
-                      </a:r>
-                      <a:endParaRPr lang="en-US" sz="500" dirty="0">
-                        <a:latin typeface="Calibri" charset="0"/>
-                        <a:ea typeface="Calibri" charset="0"/>
-                        <a:cs typeface="Calibri" charset="0"/>
-                      </a:endParaRPr>
-                    </a:p>
-                  </a:txBody>
-                  <a:tcPr marL="91440" marR="91440" marT="45720" marB="45720">
-                    <a:lnL w="2540" cap="flat" cmpd="sng" algn="ctr">
-                      <a:solidFill>
-                        <a:srgbClr val="EEEEEE"/>
-                      </a:solidFill>
-                      <a:prstDash val="solid"/>
-                      <a:round/>
-                      <a:headEnd type="none" w="med" len="med"/>
-                      <a:tailEnd type="none" w="med" len="med"/>
-                    </a:lnL>
-                    <a:lnR w="2540" cap="flat" cmpd="sng" algn="ctr">
-                      <a:solidFill>
-                        <a:srgbClr val="EEEEEE"/>
-                      </a:solidFill>
-                      <a:prstDash val="solid"/>
-                      <a:round/>
-                      <a:headEnd type="none" w="med" len="med"/>
-                      <a:tailEnd type="none" w="med" len="med"/>
-                    </a:lnR>
-                    <a:lnT w="2540" cap="flat" cmpd="sng" algn="ctr">
-                      <a:solidFill>
-                        <a:srgbClr val="EEEEEE"/>
-                      </a:solidFill>
-                      <a:prstDash val="solid"/>
-                      <a:round/>
-                      <a:headEnd type="none" w="med" len="med"/>
-                      <a:tailEnd type="none" w="med" len="med"/>
-                    </a:lnT>
-                    <a:lnB w="2540" cap="flat" cmpd="sng" algn="ctr">
-                      <a:solidFill>
-                        <a:srgbClr val="EEEEEE"/>
-                      </a:solidFill>
-                      <a:prstDash val="solid"/>
-                      <a:round/>
-                      <a:headEnd type="none" w="med" len="med"/>
-                      <a:tailEnd type="none" w="med" len="med"/>
-                    </a:lnB>
-                  </a:tcPr>
-                </a:tc>
-                <a:tc>
-                  <a:txBody>
-                    <a:bodyPr/>
-                    <a:lstStyle/>
-                    <a:p>
-                      <a:pPr algn="ctr" indent="0" marL="0">
-                        <a:buNone/>
-                      </a:pPr>
-                      <a:endParaRPr lang="en-US" sz="500" dirty="0">
-                        <a:latin typeface="Calibri" charset="0"/>
-                        <a:ea typeface="Calibri" charset="0"/>
-                        <a:cs typeface="Calibri" charset="0"/>
-                      </a:endParaRPr>
-                    </a:p>
-                  </a:txBody>
-                  <a:tcPr marL="91440" marR="91440" marT="45720" marB="45720">
-                    <a:lnL w="2540" cap="flat" cmpd="sng" algn="ctr">
-                      <a:solidFill>
-                        <a:srgbClr val="EEEEEE"/>
-                      </a:solidFill>
-                      <a:prstDash val="solid"/>
-                      <a:round/>
-                      <a:headEnd type="none" w="med" len="med"/>
-                      <a:tailEnd type="none" w="med" len="med"/>
-                    </a:lnL>
-                    <a:lnR w="2540" cap="flat" cmpd="sng" algn="ctr">
-                      <a:solidFill>
-                        <a:srgbClr val="EEEEEE"/>
-                      </a:solidFill>
-                      <a:prstDash val="solid"/>
-                      <a:round/>
-                      <a:headEnd type="none" w="med" len="med"/>
-                      <a:tailEnd type="none" w="med" len="med"/>
-                    </a:lnR>
-                    <a:lnT w="2540" cap="flat" cmpd="sng" algn="ctr">
-                      <a:solidFill>
-                        <a:srgbClr val="EEEEEE"/>
-                      </a:solidFill>
-                      <a:prstDash val="solid"/>
-                      <a:round/>
-                      <a:headEnd type="none" w="med" len="med"/>
-                      <a:tailEnd type="none" w="med" len="med"/>
-                    </a:lnT>
-                    <a:lnB w="2540" cap="flat" cmpd="sng" algn="ctr">
-                      <a:solidFill>
-                        <a:srgbClr val="EEEEEE"/>
-                      </a:solidFill>
-                      <a:prstDash val="solid"/>
-                      <a:round/>
-                      <a:headEnd type="none" w="med" len="med"/>
-                      <a:tailEnd type="none" w="med" len="med"/>
-                    </a:lnB>
-                  </a:tcPr>
-                </a:tc>
-                <a:tc>
-                  <a:txBody>
-                    <a:bodyPr/>
-                    <a:lstStyle/>
-                    <a:p>
-                      <a:pPr algn="ctr" indent="0" marL="0">
-                        <a:buNone/>
-                      </a:pPr>
-                      <a:endParaRPr lang="en-US" sz="500" dirty="0">
-                        <a:latin typeface="Calibri" charset="0"/>
-                        <a:ea typeface="Calibri" charset="0"/>
-                        <a:cs typeface="Calibri" charset="0"/>
-                      </a:endParaRPr>
-                    </a:p>
-                  </a:txBody>
-                  <a:tcPr marL="91440" marR="91440" marT="45720" marB="45720">
-                    <a:lnL w="2540" cap="flat" cmpd="sng" algn="ctr">
-                      <a:solidFill>
-                        <a:srgbClr val="EEEEEE"/>
-                      </a:solidFill>
-                      <a:prstDash val="solid"/>
-                      <a:round/>
-                      <a:headEnd type="none" w="med" len="med"/>
-                      <a:tailEnd type="none" w="med" len="med"/>
-                    </a:lnL>
-                    <a:lnR w="2540" cap="flat" cmpd="sng" algn="ctr">
-                      <a:solidFill>
-                        <a:srgbClr val="EEEEEE"/>
-                      </a:solidFill>
-                      <a:prstDash val="solid"/>
-                      <a:round/>
-                      <a:headEnd type="none" w="med" len="med"/>
-                      <a:tailEnd type="none" w="med" len="med"/>
-                    </a:lnR>
-                    <a:lnT w="2540" cap="flat" cmpd="sng" algn="ctr">
-                      <a:solidFill>
-                        <a:srgbClr val="EEEEEE"/>
-                      </a:solidFill>
-                      <a:prstDash val="solid"/>
-                      <a:round/>
-                      <a:headEnd type="none" w="med" len="med"/>
-                      <a:tailEnd type="none" w="med" len="med"/>
-                    </a:lnT>
-                    <a:lnB w="2540" cap="flat" cmpd="sng" algn="ctr">
-                      <a:solidFill>
-                        <a:srgbClr val="EEEEEE"/>
-                      </a:solidFill>
-                      <a:prstDash val="solid"/>
-                      <a:round/>
-                      <a:headEnd type="none" w="med" len="med"/>
-                      <a:tailEnd type="none" w="med" len="med"/>
-                    </a:lnB>
-                  </a:tcPr>
-                </a:tc>
-                <a:tc>
-                  <a:txBody>
-                    <a:bodyPr/>
-                    <a:lstStyle/>
-                    <a:p>
-                      <a:pPr algn="ctr" indent="0" marL="0">
-                        <a:buNone/>
-                      </a:pPr>
-                      <a:endParaRPr lang="en-US" sz="500" dirty="0">
-                        <a:latin typeface="Calibri" charset="0"/>
-                        <a:ea typeface="Calibri" charset="0"/>
-                        <a:cs typeface="Calibri" charset="0"/>
-                      </a:endParaRPr>
-                    </a:p>
-                  </a:txBody>
-                  <a:tcPr marL="91440" marR="91440" marT="45720" marB="45720">
-                    <a:lnL w="2540" cap="flat" cmpd="sng" algn="ctr">
-                      <a:solidFill>
-                        <a:srgbClr val="EEEEEE"/>
-                      </a:solidFill>
-                      <a:prstDash val="solid"/>
-                      <a:round/>
-                      <a:headEnd type="none" w="med" len="med"/>
-                      <a:tailEnd type="none" w="med" len="med"/>
-                    </a:lnL>
-                    <a:lnR w="2540" cap="flat" cmpd="sng" algn="ctr">
-                      <a:solidFill>
-                        <a:srgbClr val="EEEEEE"/>
-                      </a:solidFill>
-                      <a:prstDash val="solid"/>
-                      <a:round/>
-                      <a:headEnd type="none" w="med" len="med"/>
-                      <a:tailEnd type="none" w="med" len="med"/>
-                    </a:lnR>
-                    <a:lnT w="2540" cap="flat" cmpd="sng" algn="ctr">
-                      <a:solidFill>
-                        <a:srgbClr val="EEEEEE"/>
-                      </a:solidFill>
-                      <a:prstDash val="solid"/>
-                      <a:round/>
-                      <a:headEnd type="none" w="med" len="med"/>
-                      <a:tailEnd type="none" w="med" len="med"/>
-                    </a:lnT>
-                    <a:lnB w="2540" cap="flat" cmpd="sng" algn="ctr">
-                      <a:solidFill>
-                        <a:srgbClr val="EEEEEE"/>
-                      </a:solidFill>
-                      <a:prstDash val="solid"/>
-                      <a:round/>
-                      <a:headEnd type="none" w="med" len="med"/>
-                      <a:tailEnd type="none" w="med" len="med"/>
-                    </a:lnB>
-                  </a:tcPr>
-                </a:tc>
-                <a:tc>
-                  <a:txBody>
-                    <a:bodyPr/>
-                    <a:lstStyle/>
-                    <a:p>
-                      <a:pPr algn="ctr" indent="0" marL="0">
-                        <a:buNone/>
-                      </a:pPr>
-                      <a:endParaRPr lang="en-US" sz="500" dirty="0">
-                        <a:latin typeface="Calibri" charset="0"/>
-                        <a:ea typeface="Calibri" charset="0"/>
-                        <a:cs typeface="Calibri" charset="0"/>
-                      </a:endParaRPr>
-                    </a:p>
-                  </a:txBody>
-                  <a:tcPr marL="91440" marR="91440" marT="45720" marB="45720">
-                    <a:lnL w="2540" cap="flat" cmpd="sng" algn="ctr">
-                      <a:solidFill>
-                        <a:srgbClr val="EEEEEE"/>
-                      </a:solidFill>
-                      <a:prstDash val="solid"/>
-                      <a:round/>
-                      <a:headEnd type="none" w="med" len="med"/>
-                      <a:tailEnd type="none" w="med" len="med"/>
-                    </a:lnL>
-                    <a:lnR w="2540" cap="flat" cmpd="sng" algn="ctr">
-                      <a:solidFill>
-                        <a:srgbClr val="EEEEEE"/>
-                      </a:solidFill>
-                      <a:prstDash val="solid"/>
-                      <a:round/>
-                      <a:headEnd type="none" w="med" len="med"/>
-                      <a:tailEnd type="none" w="med" len="med"/>
-                    </a:lnR>
-                    <a:lnT w="2540" cap="flat" cmpd="sng" algn="ctr">
-                      <a:solidFill>
-                        <a:srgbClr val="EEEEEE"/>
-                      </a:solidFill>
-                      <a:prstDash val="solid"/>
-                      <a:round/>
-                      <a:headEnd type="none" w="med" len="med"/>
-                      <a:tailEnd type="none" w="med" len="med"/>
-                    </a:lnT>
-                    <a:lnB w="2540" cap="flat" cmpd="sng" algn="ctr">
-                      <a:solidFill>
-                        <a:srgbClr val="EEEEEE"/>
-                      </a:solidFill>
-                      <a:prstDash val="solid"/>
-                      <a:round/>
-                      <a:headEnd type="none" w="med" len="med"/>
-                      <a:tailEnd type="none" w="med" len="med"/>
-                    </a:lnB>
-                  </a:tcPr>
-                </a:tc>
-                <a:tc>
-                  <a:txBody>
-                    <a:bodyPr/>
-                    <a:lstStyle/>
-                    <a:p>
-                      <a:pPr algn="ctr" indent="0" marL="0">
-                        <a:buNone/>
-                      </a:pPr>
-                      <a:endParaRPr lang="en-US" sz="500" dirty="0">
-                        <a:latin typeface="Calibri" charset="0"/>
-                        <a:ea typeface="Calibri" charset="0"/>
-                        <a:cs typeface="Calibri" charset="0"/>
-                      </a:endParaRPr>
-                    </a:p>
-                  </a:txBody>
-                  <a:tcPr marL="91440" marR="91440" marT="45720" marB="45720">
-                    <a:lnL w="2540" cap="flat" cmpd="sng" algn="ctr">
-                      <a:solidFill>
-                        <a:srgbClr val="EEEEEE"/>
-                      </a:solidFill>
-                      <a:prstDash val="solid"/>
-                      <a:round/>
-                      <a:headEnd type="none" w="med" len="med"/>
-                      <a:tailEnd type="none" w="med" len="med"/>
-                    </a:lnL>
-                    <a:lnR w="2540" cap="flat" cmpd="sng" algn="ctr">
-                      <a:solidFill>
-                        <a:srgbClr val="EEEEEE"/>
-                      </a:solidFill>
-                      <a:prstDash val="solid"/>
-                      <a:round/>
-                      <a:headEnd type="none" w="med" len="med"/>
-                      <a:tailEnd type="none" w="med" len="med"/>
-                    </a:lnR>
-                    <a:lnT w="2540" cap="flat" cmpd="sng" algn="ctr">
-                      <a:solidFill>
-                        <a:srgbClr val="EEEEEE"/>
-                      </a:solidFill>
-                      <a:prstDash val="solid"/>
-                      <a:round/>
-                      <a:headEnd type="none" w="med" len="med"/>
-                      <a:tailEnd type="none" w="med" len="med"/>
-                    </a:lnT>
-                    <a:lnB w="2540" cap="flat" cmpd="sng" algn="ctr">
-                      <a:solidFill>
-                        <a:srgbClr val="EEEEEE"/>
-                      </a:solidFill>
-                      <a:prstDash val="solid"/>
-                      <a:round/>
-                      <a:headEnd type="none" w="med" len="med"/>
-                      <a:tailEnd type="none" w="med" len="med"/>
-                    </a:lnB>
-                  </a:tcPr>
-                </a:tc>
-                <a:tc>
-                  <a:txBody>
-                    <a:bodyPr/>
-                    <a:lstStyle/>
-                    <a:p>
-                      <a:pPr algn="ctr" indent="0" marL="0">
-                        <a:buNone/>
-                      </a:pPr>
-                      <a:endParaRPr lang="en-US" sz="500" dirty="0">
-                        <a:latin typeface="Calibri" charset="0"/>
-                        <a:ea typeface="Calibri" charset="0"/>
-                        <a:cs typeface="Calibri" charset="0"/>
-                      </a:endParaRPr>
-                    </a:p>
-                  </a:txBody>
-                  <a:tcPr marL="91440" marR="91440" marT="45720" marB="45720">
-                    <a:lnL w="2540" cap="flat" cmpd="sng" algn="ctr">
-                      <a:solidFill>
-                        <a:srgbClr val="EEEEEE"/>
-                      </a:solidFill>
-                      <a:prstDash val="solid"/>
-                      <a:round/>
-                      <a:headEnd type="none" w="med" len="med"/>
-                      <a:tailEnd type="none" w="med" len="med"/>
-                    </a:lnL>
-                    <a:lnR w="2540" cap="flat" cmpd="sng" algn="ctr">
-                      <a:solidFill>
-                        <a:srgbClr val="EEEEEE"/>
-                      </a:solidFill>
-                      <a:prstDash val="solid"/>
-                      <a:round/>
-                      <a:headEnd type="none" w="med" len="med"/>
-                      <a:tailEnd type="none" w="med" len="med"/>
-                    </a:lnR>
-                    <a:lnT w="2540" cap="flat" cmpd="sng" algn="ctr">
-                      <a:solidFill>
-                        <a:srgbClr val="EEEEEE"/>
-                      </a:solidFill>
-                      <a:prstDash val="solid"/>
-                      <a:round/>
-                      <a:headEnd type="none" w="med" len="med"/>
-                      <a:tailEnd type="none" w="med" len="med"/>
-                    </a:lnT>
-                    <a:lnB w="2540" cap="flat" cmpd="sng" algn="ctr">
-                      <a:solidFill>
-                        <a:srgbClr val="EEEEEE"/>
-                      </a:solidFill>
-                      <a:prstDash val="solid"/>
-                      <a:round/>
-                      <a:headEnd type="none" w="med" len="med"/>
-                      <a:tailEnd type="none" w="med" len="med"/>
-                    </a:lnB>
-                  </a:tcPr>
-                </a:tc>
-                <a:tc>
-                  <a:txBody>
-                    <a:bodyPr/>
-                    <a:lstStyle/>
-                    <a:p>
-                      <a:pPr algn="ctr" indent="0" marL="0">
-                        <a:buNone/>
-                      </a:pPr>
-                      <a:endParaRPr lang="en-US" sz="500" dirty="0">
-                        <a:latin typeface="Calibri" charset="0"/>
-                        <a:ea typeface="Calibri" charset="0"/>
-                        <a:cs typeface="Calibri" charset="0"/>
-                      </a:endParaRPr>
-                    </a:p>
-                  </a:txBody>
-                  <a:tcPr marL="91440" marR="91440" marT="45720" marB="45720">
-                    <a:lnL w="2540" cap="flat" cmpd="sng" algn="ctr">
-                      <a:solidFill>
-                        <a:srgbClr val="EEEEEE"/>
-                      </a:solidFill>
-                      <a:prstDash val="solid"/>
-                      <a:round/>
-                      <a:headEnd type="none" w="med" len="med"/>
-                      <a:tailEnd type="none" w="med" len="med"/>
-                    </a:lnL>
-                    <a:lnR w="2540" cap="flat" cmpd="sng" algn="ctr">
-                      <a:solidFill>
-                        <a:srgbClr val="EEEEEE"/>
-                      </a:solidFill>
-                      <a:prstDash val="solid"/>
-                      <a:round/>
-                      <a:headEnd type="none" w="med" len="med"/>
-                      <a:tailEnd type="none" w="med" len="med"/>
-                    </a:lnR>
-                    <a:lnT w="2540" cap="flat" cmpd="sng" algn="ctr">
-                      <a:solidFill>
-                        <a:srgbClr val="EEEEEE"/>
-                      </a:solidFill>
-                      <a:prstDash val="solid"/>
-                      <a:round/>
-                      <a:headEnd type="none" w="med" len="med"/>
-                      <a:tailEnd type="none" w="med" len="med"/>
-                    </a:lnT>
-                    <a:lnB w="2540" cap="flat" cmpd="sng" algn="ctr">
-                      <a:solidFill>
-                        <a:srgbClr val="EEEEEE"/>
-                      </a:solidFill>
-                      <a:prstDash val="solid"/>
-                      <a:round/>
-                      <a:headEnd type="none" w="med" len="med"/>
-                      <a:tailEnd type="none" w="med" len="med"/>
-                    </a:lnB>
-                  </a:tcPr>
-                </a:tc>
-                <a:tc>
-                  <a:txBody>
-                    <a:bodyPr/>
-                    <a:lstStyle/>
-                    <a:p>
-                      <a:pPr algn="ctr" indent="0" marL="0">
-                        <a:buNone/>
-                      </a:pPr>
-                      <a:endParaRPr lang="en-US" sz="500" dirty="0">
-                        <a:latin typeface="Calibri" charset="0"/>
-                        <a:ea typeface="Calibri" charset="0"/>
-                        <a:cs typeface="Calibri" charset="0"/>
-                      </a:endParaRPr>
-                    </a:p>
-                  </a:txBody>
-                  <a:tcPr marL="91440" marR="91440" marT="45720" marB="45720">
-                    <a:lnL w="2540" cap="flat" cmpd="sng" algn="ctr">
-                      <a:solidFill>
-                        <a:srgbClr val="EEEEEE"/>
-                      </a:solidFill>
-                      <a:prstDash val="solid"/>
-                      <a:round/>
-                      <a:headEnd type="none" w="med" len="med"/>
-                      <a:tailEnd type="none" w="med" len="med"/>
-                    </a:lnL>
-                    <a:lnR w="2540" cap="flat" cmpd="sng" algn="ctr">
-                      <a:solidFill>
-                        <a:srgbClr val="EEEEEE"/>
-                      </a:solidFill>
-                      <a:prstDash val="solid"/>
-                      <a:round/>
-                      <a:headEnd type="none" w="med" len="med"/>
-                      <a:tailEnd type="none" w="med" len="med"/>
-                    </a:lnR>
-                    <a:lnT w="2540" cap="flat" cmpd="sng" algn="ctr">
-                      <a:solidFill>
-                        <a:srgbClr val="EEEEEE"/>
-                      </a:solidFill>
-                      <a:prstDash val="solid"/>
-                      <a:round/>
-                      <a:headEnd type="none" w="med" len="med"/>
-                      <a:tailEnd type="none" w="med" len="med"/>
-                    </a:lnT>
-                    <a:lnB w="2540" cap="flat" cmpd="sng" algn="ctr">
-                      <a:solidFill>
-                        <a:srgbClr val="EEEEEE"/>
-                      </a:solidFill>
-                      <a:prstDash val="solid"/>
-                      <a:round/>
-                      <a:headEnd type="none" w="med" len="med"/>
-                      <a:tailEnd type="none" w="med" len="med"/>
-                    </a:lnB>
-                  </a:tcPr>
-                </a:tc>
-                <a:tc>
-                  <a:txBody>
-                    <a:bodyPr/>
-                    <a:lstStyle/>
-                    <a:p>
-                      <a:pPr algn="ctr" indent="0" marL="0">
-                        <a:buNone/>
-                      </a:pPr>
-                      <a:r>
-                        <a:rPr lang="en-US" sz="500" b="1" dirty="0">
-                          <a:solidFill>
-                            <a:srgbClr val="777777"/>
-                          </a:solidFill>
-                          <a:latin typeface="Calibri" pitchFamily="34" charset="0"/>
-                          <a:ea typeface="Calibri" pitchFamily="34" charset="-122"/>
-                          <a:cs typeface="Calibri" pitchFamily="34" charset="-120"/>
-                        </a:rPr>
-                        <a:t>3.39%</a:t>
-                      </a:r>
-                      <a:endParaRPr lang="en-US" sz="500" dirty="0">
-                        <a:latin typeface="Calibri" charset="0"/>
-                        <a:ea typeface="Calibri" charset="0"/>
-                        <a:cs typeface="Calibri" charset="0"/>
-                      </a:endParaRPr>
-                    </a:p>
-                  </a:txBody>
-                  <a:tcPr marL="91440" marR="91440" marT="45720" marB="45720">
-                    <a:lnL w="2540" cap="flat" cmpd="sng" algn="ctr">
-                      <a:solidFill>
-                        <a:srgbClr val="EEEEEE"/>
-                      </a:solidFill>
-                      <a:prstDash val="solid"/>
-                      <a:round/>
-                      <a:headEnd type="none" w="med" len="med"/>
-                      <a:tailEnd type="none" w="med" len="med"/>
-                    </a:lnL>
-                    <a:lnR w="2540" cap="flat" cmpd="sng" algn="ctr">
-                      <a:solidFill>
-                        <a:srgbClr val="EEEEEE"/>
-                      </a:solidFill>
-                      <a:prstDash val="solid"/>
-                      <a:round/>
-                      <a:headEnd type="none" w="med" len="med"/>
-                      <a:tailEnd type="none" w="med" len="med"/>
-                    </a:lnR>
-                    <a:lnT w="2540" cap="flat" cmpd="sng" algn="ctr">
-                      <a:solidFill>
-                        <a:srgbClr val="EEEEEE"/>
-                      </a:solidFill>
-                      <a:prstDash val="solid"/>
-                      <a:round/>
-                      <a:headEnd type="none" w="med" len="med"/>
-                      <a:tailEnd type="none" w="med" len="med"/>
-                    </a:lnT>
-                    <a:lnB w="2540" cap="flat" cmpd="sng" algn="ctr">
-                      <a:solidFill>
-                        <a:srgbClr val="EEEEEE"/>
-                      </a:solidFill>
-                      <a:prstDash val="solid"/>
-                      <a:round/>
-                      <a:headEnd type="none" w="med" len="med"/>
-                      <a:tailEnd type="none" w="med" len="med"/>
-                    </a:lnB>
-                  </a:tcPr>
-                </a:tc>
-              </a:tr>
-              <a:tr h="123444">
-                <a:tc>
-                  <a:txBody>
-                    <a:bodyPr/>
-                    <a:lstStyle/>
-                    <a:p>
-                      <a:pPr algn="l" indent="0" marL="0">
-                        <a:buNone/>
-                      </a:pPr>
-                      <a:endParaRPr lang="en-US" sz="500" dirty="0">
-                        <a:latin typeface="Calibri" charset="0"/>
-                        <a:ea typeface="Calibri" charset="0"/>
-                        <a:cs typeface="Calibri" charset="0"/>
-                      </a:endParaRPr>
-                    </a:p>
-                  </a:txBody>
-                  <a:tcPr marL="91440" marR="91440" marT="45720" marB="45720">
-                    <a:lnL w="2540" cap="flat" cmpd="sng" algn="ctr">
-                      <a:solidFill>
-                        <a:srgbClr val="EEEEEE"/>
-                      </a:solidFill>
-                      <a:prstDash val="solid"/>
-                      <a:round/>
-                      <a:headEnd type="none" w="med" len="med"/>
-                      <a:tailEnd type="none" w="med" len="med"/>
-                    </a:lnL>
-                    <a:lnR w="2540" cap="flat" cmpd="sng" algn="ctr">
-                      <a:solidFill>
-                        <a:srgbClr val="EEEEEE"/>
-                      </a:solidFill>
-                      <a:prstDash val="solid"/>
-                      <a:round/>
-                      <a:headEnd type="none" w="med" len="med"/>
-                      <a:tailEnd type="none" w="med" len="med"/>
-                    </a:lnR>
-                    <a:lnT w="2540" cap="flat" cmpd="sng" algn="ctr">
-                      <a:solidFill>
-                        <a:srgbClr val="EEEEEE"/>
-                      </a:solidFill>
-                      <a:prstDash val="solid"/>
-                      <a:round/>
-                      <a:headEnd type="none" w="med" len="med"/>
-                      <a:tailEnd type="none" w="med" len="med"/>
-                    </a:lnT>
-                    <a:lnB w="2540" cap="flat" cmpd="sng" algn="ctr">
-                      <a:solidFill>
-                        <a:srgbClr val="EEEEEE"/>
-                      </a:solidFill>
-                      <a:prstDash val="solid"/>
-                      <a:round/>
-                      <a:headEnd type="none" w="med" len="med"/>
-                      <a:tailEnd type="none" w="med" len="med"/>
-                    </a:lnB>
-                  </a:tcPr>
-                </a:tc>
-                <a:tc>
-                  <a:txBody>
-                    <a:bodyPr/>
-                    <a:lstStyle/>
-                    <a:p>
-                      <a:pPr algn="l" indent="0" marL="0">
-                        <a:buNone/>
-                      </a:pPr>
-                      <a:r>
-                        <a:rPr lang="en-US" sz="500" dirty="0">
-                          <a:solidFill>
-                            <a:srgbClr val="999999"/>
-                          </a:solidFill>
-                          <a:latin typeface="Calibri" pitchFamily="34" charset="0"/>
-                          <a:ea typeface="Calibri" pitchFamily="34" charset="-122"/>
-                          <a:cs typeface="Calibri" pitchFamily="34" charset="-120"/>
-                        </a:rPr>
-                        <a:t>Competencia</a:t>
-                      </a:r>
-                      <a:endParaRPr lang="en-US" sz="500" dirty="0">
-                        <a:latin typeface="Calibri" charset="0"/>
-                        <a:ea typeface="Calibri" charset="0"/>
-                        <a:cs typeface="Calibri" charset="0"/>
-                      </a:endParaRPr>
-                    </a:p>
-                  </a:txBody>
-                  <a:tcPr marL="91440" marR="91440" marT="45720" marB="45720">
-                    <a:lnL w="2540" cap="flat" cmpd="sng" algn="ctr">
-                      <a:solidFill>
-                        <a:srgbClr val="EEEEEE"/>
-                      </a:solidFill>
-                      <a:prstDash val="solid"/>
-                      <a:round/>
-                      <a:headEnd type="none" w="med" len="med"/>
-                      <a:tailEnd type="none" w="med" len="med"/>
-                    </a:lnL>
-                    <a:lnR w="2540" cap="flat" cmpd="sng" algn="ctr">
-                      <a:solidFill>
-                        <a:srgbClr val="EEEEEE"/>
-                      </a:solidFill>
-                      <a:prstDash val="solid"/>
-                      <a:round/>
-                      <a:headEnd type="none" w="med" len="med"/>
-                      <a:tailEnd type="none" w="med" len="med"/>
-                    </a:lnR>
-                    <a:lnT w="2540" cap="flat" cmpd="sng" algn="ctr">
-                      <a:solidFill>
-                        <a:srgbClr val="EEEEEE"/>
-                      </a:solidFill>
-                      <a:prstDash val="solid"/>
-                      <a:round/>
-                      <a:headEnd type="none" w="med" len="med"/>
-                      <a:tailEnd type="none" w="med" len="med"/>
-                    </a:lnT>
-                    <a:lnB w="2540" cap="flat" cmpd="sng" algn="ctr">
-                      <a:solidFill>
-                        <a:srgbClr val="EEEEEE"/>
-                      </a:solidFill>
-                      <a:prstDash val="solid"/>
-                      <a:round/>
-                      <a:headEnd type="none" w="med" len="med"/>
-                      <a:tailEnd type="none" w="med" len="med"/>
-                    </a:lnB>
-                  </a:tcPr>
-                </a:tc>
-                <a:tc>
-                  <a:txBody>
-                    <a:bodyPr/>
-                    <a:lstStyle/>
-                    <a:p>
-                      <a:pPr algn="ctr" indent="0" marL="0">
-                        <a:buNone/>
-                      </a:pPr>
-                      <a:r>
-                        <a:rPr lang="en-US" sz="500" dirty="0">
-                          <a:solidFill>
-                            <a:srgbClr val="999999"/>
-                          </a:solidFill>
-                          <a:latin typeface="Calibri" pitchFamily="34" charset="0"/>
-                          <a:ea typeface="Calibri" pitchFamily="34" charset="-122"/>
-                          <a:cs typeface="Calibri" pitchFamily="34" charset="-120"/>
-                        </a:rPr>
-                        <a:t>0.00%</a:t>
+                        <a:t>0.27%</a:t>
                       </a:r>
                       <a:endParaRPr lang="en-US" sz="500" dirty="0">
                         <a:latin typeface="Calibri" charset="0"/>
@@ -13515,7 +13643,7 @@
                         <a:buNone/>
                       </a:pPr>
                       <a:r>
-                        <a:rPr lang="en-US" sz="500" dirty="0">
+                        <a:rPr lang="en-US" sz="400" dirty="0">
                           <a:solidFill>
                             <a:srgbClr val="000000"/>
                           </a:solidFill>
@@ -13525,7 +13653,7 @@
                         </a:rPr>
                         <a:t>FIP LIQUIDEZ DISPONIBLE I</a:t>
                       </a:r>
-                      <a:endParaRPr lang="en-US" sz="500" dirty="0">
+                      <a:endParaRPr lang="en-US" sz="400" dirty="0">
                         <a:latin typeface="Calibri" charset="0"/>
                         <a:ea typeface="Calibri" charset="0"/>
                         <a:cs typeface="Calibri" charset="0"/>

--- a/folletos/2026-04/pptx/FIP_VANTRUST_LIQUIDEZ_DISPONIBLE_I.pptx
+++ b/folletos/2026-04/pptx/FIP_VANTRUST_LIQUIDEZ_DISPONIBLE_I.pptx
@@ -3329,7 +3329,7 @@
                 <a:ea typeface="Calibri" pitchFamily="34" charset="-122"/>
                 <a:cs typeface="Calibri" pitchFamily="34" charset="-120"/>
               </a:rPr>
-              <a:t>prueba CLP</a:t>
+              <a:t>prueba 13 CLP</a:t>
             </a:r>
             <a:endParaRPr lang="en-US" sz="800" dirty="0"/>
           </a:p>

--- a/folletos/2026-04/pptx/FIP_VANTRUST_LIQUIDEZ_DISPONIBLE_I.pptx
+++ b/folletos/2026-04/pptx/FIP_VANTRUST_LIQUIDEZ_DISPONIBLE_I.pptx
@@ -333,7 +333,7 @@
                   <c:v>108.74</c:v>
                 </c:pt>
                 <c:pt idx="21">
-                  <c:v>109.15</c:v>
+                  <c:v>81.08</c:v>
                 </c:pt>
               </c:numCache>
             </c:numRef>
@@ -777,7 +777,7 @@
                   <c:v>106.16</c:v>
                 </c:pt>
                 <c:pt idx="21">
-                  <c:v>106.43</c:v>
+                  <c:v/>
                 </c:pt>
               </c:numCache>
             </c:numRef>
@@ -859,7 +859,7 @@
         <c:axId val="2094734552"/>
         <c:scaling>
           <c:orientation val="minMax"/>
-          <c:min val="97"/>
+          <c:min val="78"/>
         </c:scaling>
         <c:delete val="0"/>
         <c:axPos val="l"/>
@@ -3329,7 +3329,7 @@
                 <a:ea typeface="Calibri" pitchFamily="34" charset="-122"/>
                 <a:cs typeface="Calibri" pitchFamily="34" charset="-120"/>
               </a:rPr>
-              <a:t>prueba 13 CLP</a:t>
+              <a:t>prueba CLP</a:t>
             </a:r>
             <a:endParaRPr lang="en-US" sz="800" dirty="0"/>
           </a:p>
@@ -3978,7 +3978,7 @@
                           <a:ea typeface="Calibri" pitchFamily="34" charset="-122"/>
                           <a:cs typeface="Calibri" pitchFamily="34" charset="-120"/>
                         </a:rPr>
-                        <a:t>0.38%</a:t>
+                        <a:t>-25.44%</a:t>
                       </a:r>
                       <a:endParaRPr lang="en-US" sz="750" dirty="0">
                         <a:latin typeface="Calibri" charset="0"/>
@@ -4046,7 +4046,7 @@
                           <a:ea typeface="Calibri" pitchFamily="34" charset="-122"/>
                           <a:cs typeface="Calibri" pitchFamily="34" charset="-120"/>
                         </a:rPr>
-                        <a:t>1.13%</a:t>
+                        <a:t>-24.88%</a:t>
                       </a:r>
                       <a:endParaRPr lang="en-US" sz="750" dirty="0">
                         <a:latin typeface="Calibri" charset="0"/>
@@ -4114,7 +4114,7 @@
                           <a:ea typeface="Calibri" pitchFamily="34" charset="-122"/>
                           <a:cs typeface="Calibri" pitchFamily="34" charset="-120"/>
                         </a:rPr>
-                        <a:t>2.33%</a:t>
+                        <a:t>-23.98%</a:t>
                       </a:r>
                       <a:endParaRPr lang="en-US" sz="750" dirty="0">
                         <a:latin typeface="Calibri" charset="0"/>
@@ -4182,7 +4182,7 @@
                           <a:ea typeface="Calibri" pitchFamily="34" charset="-122"/>
                           <a:cs typeface="Calibri" pitchFamily="34" charset="-120"/>
                         </a:rPr>
-                        <a:t>4.90%</a:t>
+                        <a:t>-22.07%</a:t>
                       </a:r>
                       <a:endParaRPr lang="en-US" sz="750" dirty="0">
                         <a:latin typeface="Calibri" charset="0"/>
@@ -4250,7 +4250,7 @@
                           <a:ea typeface="Calibri" pitchFamily="34" charset="-122"/>
                           <a:cs typeface="Calibri" pitchFamily="34" charset="-120"/>
                         </a:rPr>
-                        <a:t>3.39%</a:t>
+                        <a:t>-74.63%</a:t>
                       </a:r>
                       <a:endParaRPr lang="en-US" sz="750" dirty="0">
                         <a:latin typeface="Calibri" charset="0"/>
@@ -4388,7 +4388,7 @@
                           <a:ea typeface="Calibri" pitchFamily="34" charset="-122"/>
                           <a:cs typeface="Calibri" pitchFamily="34" charset="-120"/>
                         </a:rPr>
-                        <a:t>0.26%</a:t>
+                        <a:t>-100.00%</a:t>
                       </a:r>
                       <a:endParaRPr lang="en-US" sz="750" dirty="0">
                         <a:latin typeface="Calibri" charset="0"/>
@@ -4456,7 +4456,7 @@
                           <a:ea typeface="Calibri" pitchFamily="34" charset="-122"/>
                           <a:cs typeface="Calibri" pitchFamily="34" charset="-120"/>
                         </a:rPr>
-                        <a:t>0.77%</a:t>
+                        <a:t>-100.00%</a:t>
                       </a:r>
                       <a:endParaRPr lang="en-US" sz="750" dirty="0">
                         <a:latin typeface="Calibri" charset="0"/>
@@ -4524,7 +4524,7 @@
                           <a:ea typeface="Calibri" pitchFamily="34" charset="-122"/>
                           <a:cs typeface="Calibri" pitchFamily="34" charset="-120"/>
                         </a:rPr>
-                        <a:t>1.62%</a:t>
+                        <a:t>-100.00%</a:t>
                       </a:r>
                       <a:endParaRPr lang="en-US" sz="750" dirty="0">
                         <a:latin typeface="Calibri" charset="0"/>
@@ -4592,7 +4592,7 @@
                           <a:ea typeface="Calibri" pitchFamily="34" charset="-122"/>
                           <a:cs typeface="Calibri" pitchFamily="34" charset="-120"/>
                         </a:rPr>
-                        <a:t>3.43%</a:t>
+                        <a:t>-100.00%</a:t>
                       </a:r>
                       <a:endParaRPr lang="en-US" sz="750" dirty="0">
                         <a:latin typeface="Calibri" charset="0"/>
@@ -4660,7 +4660,7 @@
                           <a:ea typeface="Calibri" pitchFamily="34" charset="-122"/>
                           <a:cs typeface="Calibri" pitchFamily="34" charset="-120"/>
                         </a:rPr>
-                        <a:t>2.32%</a:t>
+                        <a:t>-300.00%</a:t>
                       </a:r>
                       <a:endParaRPr lang="en-US" sz="750" dirty="0">
                         <a:latin typeface="Calibri" charset="0"/>
@@ -12155,7 +12155,7 @@
                           <a:ea typeface="Calibri" pitchFamily="34" charset="-122"/>
                           <a:cs typeface="Calibri" pitchFamily="34" charset="-120"/>
                         </a:rPr>
-                        <a:t>0.38%</a:t>
+                        <a:t>-25.44%</a:t>
                       </a:r>
                       <a:endParaRPr lang="en-US" sz="500" dirty="0">
                         <a:latin typeface="Calibri" charset="0"/>
@@ -12652,7 +12652,7 @@
                           <a:ea typeface="Calibri" pitchFamily="34" charset="-122"/>
                           <a:cs typeface="Calibri" pitchFamily="34" charset="-120"/>
                         </a:rPr>
-                        <a:t>3.39%</a:t>
+                        <a:t>-74.63%</a:t>
                       </a:r>
                       <a:endParaRPr lang="en-US" sz="500" dirty="0">
                         <a:latin typeface="Calibri" charset="0"/>
@@ -13033,7 +13033,7 @@
                           <a:ea typeface="Calibri" pitchFamily="34" charset="-122"/>
                           <a:cs typeface="Calibri" pitchFamily="34" charset="-120"/>
                         </a:rPr>
-                        <a:t>0.26%</a:t>
+                        <a:t>-100.00%</a:t>
                       </a:r>
                       <a:endParaRPr lang="en-US" sz="500" dirty="0">
                         <a:latin typeface="Calibri" charset="0"/>
@@ -13530,7 +13530,7 @@
                           <a:ea typeface="Calibri" pitchFamily="34" charset="-122"/>
                           <a:cs typeface="Calibri" pitchFamily="34" charset="-120"/>
                         </a:rPr>
-                        <a:t>2.32%</a:t>
+                        <a:t>-300.00%</a:t>
                       </a:r>
                       <a:endParaRPr lang="en-US" sz="500" dirty="0">
                         <a:latin typeface="Calibri" charset="0"/>

--- a/folletos/2026-04/pptx/FIP_VANTRUST_LIQUIDEZ_DISPONIBLE_I.pptx
+++ b/folletos/2026-04/pptx/FIP_VANTRUST_LIQUIDEZ_DISPONIBLE_I.pptx
@@ -3329,7 +3329,7 @@
                 <a:ea typeface="Calibri" pitchFamily="34" charset="-122"/>
                 <a:cs typeface="Calibri" pitchFamily="34" charset="-120"/>
               </a:rPr>
-              <a:t>prueba CLP</a:t>
+              <a:t>prueba 14 CLP</a:t>
             </a:r>
             <a:endParaRPr lang="en-US" sz="800" dirty="0"/>
           </a:p>
